--- a/AI漫剧制作课程/PPT课件/00-课程导论.pptx
+++ b/AI漫剧制作课程/PPT课件/00-课程导论.pptx
@@ -3091,7 +3091,7 @@
     <p:bg>
       <p:bgPr>
         <a:solidFill>
-          <a:srgbClr val="0F172A"/>
+          <a:srgbClr val="0B1120"/>
         </a:solidFill>
         <a:effectLst/>
       </p:bgPr>
@@ -3112,7 +3112,7 @@
         <p:spPr>
           <a:xfrm>
             <a:off x="0" y="0"/>
-            <a:ext cx="12191695" cy="73152"/>
+            <a:ext cx="5029200" cy="6858000"/>
           </a:xfrm>
           <a:prstGeom prst="rect">
             <a:avLst/>
@@ -3155,13 +3155,13 @@
         <p:spPr>
           <a:xfrm>
             <a:off x="0" y="0"/>
-            <a:ext cx="137160" cy="3200400"/>
-          </a:xfrm>
-          <a:prstGeom prst="rect">
-            <a:avLst/>
-          </a:prstGeom>
-          <a:solidFill>
-            <a:srgbClr val="00D4FF"/>
+            <a:ext cx="5029200" cy="109728"/>
+          </a:xfrm>
+          <a:prstGeom prst="rect">
+            <a:avLst/>
+          </a:prstGeom>
+          <a:solidFill>
+            <a:srgbClr val="FFFFFF"/>
           </a:solidFill>
           <a:ln>
             <a:noFill/>
@@ -3191,14 +3191,57 @@
       </p:sp>
       <p:sp>
         <p:nvSpPr>
-          <p:cNvPr id="4" name="TextBox 3"/>
+          <p:cNvPr id="4" name="Rectangle 3"/>
+          <p:cNvSpPr/>
+          <p:nvPr/>
+        </p:nvSpPr>
+        <p:spPr>
+          <a:xfrm>
+            <a:off x="0" y="0"/>
+            <a:ext cx="109728" cy="6858000"/>
+          </a:xfrm>
+          <a:prstGeom prst="rect">
+            <a:avLst/>
+          </a:prstGeom>
+          <a:solidFill>
+            <a:srgbClr val="FFFFFF"/>
+          </a:solidFill>
+          <a:ln>
+            <a:noFill/>
+          </a:ln>
+        </p:spPr>
+        <p:style>
+          <a:lnRef idx="1">
+            <a:schemeClr val="accent1"/>
+          </a:lnRef>
+          <a:fillRef idx="3">
+            <a:schemeClr val="accent1"/>
+          </a:fillRef>
+          <a:effectRef idx="2">
+            <a:schemeClr val="accent1"/>
+          </a:effectRef>
+          <a:fontRef idx="minor">
+            <a:schemeClr val="lt1"/>
+          </a:fontRef>
+        </p:style>
+        <p:txBody>
+          <a:bodyPr rtlCol="0" anchor="ctr"/>
+          <a:lstStyle/>
+          <a:p>
+            <a:pPr algn="ctr"/>
+          </a:p>
+        </p:txBody>
+      </p:sp>
+      <p:sp>
+        <p:nvSpPr>
+          <p:cNvPr id="5" name="TextBox 4"/>
           <p:cNvSpPr txBox="1"/>
           <p:nvPr/>
         </p:nvSpPr>
         <p:spPr>
           <a:xfrm>
-            <a:off x="731520" y="914400"/>
-            <a:ext cx="10058400" cy="457200"/>
+            <a:off x="457200" y="1828800"/>
+            <a:ext cx="4114800" cy="1828800"/>
           </a:xfrm>
           <a:prstGeom prst="rect">
             <a:avLst/>
@@ -3211,8 +3254,281 @@
           </a:bodyPr>
           <a:lstStyle/>
           <a:p>
+            <a:pPr algn="ctr">
+              <a:defRPr sz="10000" b="0">
+                <a:solidFill>
+                  <a:srgbClr val="FFFFFF"/>
+                </a:solidFill>
+                <a:latin typeface="Microsoft YaHei"/>
+              </a:defRPr>
+            </a:pPr>
+            <a:r>
+              <a:t>🎬</a:t>
+            </a:r>
+          </a:p>
+        </p:txBody>
+      </p:sp>
+      <p:sp>
+        <p:nvSpPr>
+          <p:cNvPr id="6" name="Rounded Rectangle 5"/>
+          <p:cNvSpPr/>
+          <p:nvPr/>
+        </p:nvSpPr>
+        <p:spPr>
+          <a:xfrm>
+            <a:off x="5669280" y="1371600"/>
+            <a:ext cx="5943600" cy="457200"/>
+          </a:xfrm>
+          <a:prstGeom prst="roundRect">
+            <a:avLst/>
+          </a:prstGeom>
+          <a:solidFill>
+            <a:srgbClr val="00D4FF"/>
+          </a:solidFill>
+          <a:ln>
+            <a:noFill/>
+          </a:ln>
+        </p:spPr>
+        <p:style>
+          <a:lnRef idx="1">
+            <a:schemeClr val="accent1"/>
+          </a:lnRef>
+          <a:fillRef idx="3">
+            <a:schemeClr val="accent1"/>
+          </a:fillRef>
+          <a:effectRef idx="2">
+            <a:schemeClr val="accent1"/>
+          </a:effectRef>
+          <a:fontRef idx="minor">
+            <a:schemeClr val="lt1"/>
+          </a:fontRef>
+        </p:style>
+        <p:txBody>
+          <a:bodyPr rtlCol="0" anchor="ctr"/>
+          <a:lstStyle/>
+          <a:p>
+            <a:pPr algn="ctr"/>
+          </a:p>
+        </p:txBody>
+      </p:sp>
+      <p:sp>
+        <p:nvSpPr>
+          <p:cNvPr id="7" name="TextBox 6"/>
+          <p:cNvSpPr txBox="1"/>
+          <p:nvPr/>
+        </p:nvSpPr>
+        <p:spPr>
+          <a:xfrm>
+            <a:off x="5852160" y="1371600"/>
+            <a:ext cx="5486400" cy="457200"/>
+          </a:xfrm>
+          <a:prstGeom prst="rect">
+            <a:avLst/>
+          </a:prstGeom>
+          <a:noFill/>
+        </p:spPr>
+        <p:txBody>
+          <a:bodyPr wrap="square">
+            <a:spAutoFit/>
+          </a:bodyPr>
+          <a:lstStyle/>
+          <a:p>
+            <a:pPr algn="ctr">
+              <a:defRPr sz="1200" b="0">
+                <a:solidFill>
+                  <a:srgbClr val="FFFFFF"/>
+                </a:solidFill>
+                <a:latin typeface="Microsoft YaHei"/>
+              </a:defRPr>
+            </a:pPr>
+            <a:r>
+              <a:t>AI漫剧制作全流程课程 · 2026版</a:t>
+            </a:r>
+          </a:p>
+        </p:txBody>
+      </p:sp>
+      <p:sp>
+        <p:nvSpPr>
+          <p:cNvPr id="8" name="TextBox 7"/>
+          <p:cNvSpPr txBox="1"/>
+          <p:nvPr/>
+        </p:nvSpPr>
+        <p:spPr>
+          <a:xfrm>
+            <a:off x="5669280" y="2286000"/>
+            <a:ext cx="5943600" cy="1645920"/>
+          </a:xfrm>
+          <a:prstGeom prst="rect">
+            <a:avLst/>
+          </a:prstGeom>
+          <a:noFill/>
+        </p:spPr>
+        <p:txBody>
+          <a:bodyPr wrap="square">
+            <a:spAutoFit/>
+          </a:bodyPr>
+          <a:lstStyle/>
+          <a:p>
             <a:pPr algn="l">
-              <a:defRPr sz="1400" b="0">
+              <a:defRPr sz="3600" b="1">
+                <a:solidFill>
+                  <a:srgbClr val="FFFFFF"/>
+                </a:solidFill>
+                <a:latin typeface="Microsoft YaHei"/>
+              </a:defRPr>
+            </a:pPr>
+            <a:r>
+              <a:t>AI漫剧制作全流程课程</a:t>
+            </a:r>
+          </a:p>
+        </p:txBody>
+      </p:sp>
+      <p:sp>
+        <p:nvSpPr>
+          <p:cNvPr id="9" name="Rectangle 8"/>
+          <p:cNvSpPr/>
+          <p:nvPr/>
+        </p:nvSpPr>
+        <p:spPr>
+          <a:xfrm>
+            <a:off x="5669280" y="4023360"/>
+            <a:ext cx="2743200" cy="38100"/>
+          </a:xfrm>
+          <a:prstGeom prst="rect">
+            <a:avLst/>
+          </a:prstGeom>
+          <a:solidFill>
+            <a:srgbClr val="00D4FF"/>
+          </a:solidFill>
+          <a:ln>
+            <a:noFill/>
+          </a:ln>
+        </p:spPr>
+        <p:style>
+          <a:lnRef idx="1">
+            <a:schemeClr val="accent1"/>
+          </a:lnRef>
+          <a:fillRef idx="3">
+            <a:schemeClr val="accent1"/>
+          </a:fillRef>
+          <a:effectRef idx="2">
+            <a:schemeClr val="accent1"/>
+          </a:effectRef>
+          <a:fontRef idx="minor">
+            <a:schemeClr val="lt1"/>
+          </a:fontRef>
+        </p:style>
+        <p:txBody>
+          <a:bodyPr rtlCol="0" anchor="ctr"/>
+          <a:lstStyle/>
+          <a:p>
+            <a:pPr algn="ctr"/>
+          </a:p>
+        </p:txBody>
+      </p:sp>
+      <p:sp>
+        <p:nvSpPr>
+          <p:cNvPr id="10" name="TextBox 9"/>
+          <p:cNvSpPr txBox="1"/>
+          <p:nvPr/>
+        </p:nvSpPr>
+        <p:spPr>
+          <a:xfrm>
+            <a:off x="5669280" y="4389120"/>
+            <a:ext cx="5943600" cy="914400"/>
+          </a:xfrm>
+          <a:prstGeom prst="rect">
+            <a:avLst/>
+          </a:prstGeom>
+          <a:noFill/>
+        </p:spPr>
+        <p:txBody>
+          <a:bodyPr wrap="square">
+            <a:spAutoFit/>
+          </a:bodyPr>
+          <a:lstStyle/>
+          <a:p>
+            <a:pPr algn="l">
+              <a:defRPr sz="1800" b="0">
+                <a:solidFill>
+                  <a:srgbClr val="CBD5E8"/>
+                </a:solidFill>
+                <a:latin typeface="Microsoft YaHei"/>
+              </a:defRPr>
+            </a:pPr>
+            <a:r>
+              <a:t>124课时 · 17个模块 · 从零基础到独立制作完整AI漫剧</a:t>
+            </a:r>
+          </a:p>
+        </p:txBody>
+      </p:sp>
+      <p:sp>
+        <p:nvSpPr>
+          <p:cNvPr id="11" name="Rectangle 10"/>
+          <p:cNvSpPr/>
+          <p:nvPr/>
+        </p:nvSpPr>
+        <p:spPr>
+          <a:xfrm>
+            <a:off x="5669280" y="5669280"/>
+            <a:ext cx="5943600" cy="640080"/>
+          </a:xfrm>
+          <a:prstGeom prst="rect">
+            <a:avLst/>
+          </a:prstGeom>
+          <a:solidFill>
+            <a:srgbClr val="141E33"/>
+          </a:solidFill>
+          <a:ln>
+            <a:noFill/>
+          </a:ln>
+        </p:spPr>
+        <p:style>
+          <a:lnRef idx="1">
+            <a:schemeClr val="accent1"/>
+          </a:lnRef>
+          <a:fillRef idx="3">
+            <a:schemeClr val="accent1"/>
+          </a:fillRef>
+          <a:effectRef idx="2">
+            <a:schemeClr val="accent1"/>
+          </a:effectRef>
+          <a:fontRef idx="minor">
+            <a:schemeClr val="lt1"/>
+          </a:fontRef>
+        </p:style>
+        <p:txBody>
+          <a:bodyPr rtlCol="0" anchor="ctr"/>
+          <a:lstStyle/>
+          <a:p>
+            <a:pPr algn="ctr"/>
+          </a:p>
+        </p:txBody>
+      </p:sp>
+      <p:sp>
+        <p:nvSpPr>
+          <p:cNvPr id="12" name="TextBox 11"/>
+          <p:cNvSpPr txBox="1"/>
+          <p:nvPr/>
+        </p:nvSpPr>
+        <p:spPr>
+          <a:xfrm>
+            <a:off x="5852160" y="5715000"/>
+            <a:ext cx="1371600" cy="548640"/>
+          </a:xfrm>
+          <a:prstGeom prst="rect">
+            <a:avLst/>
+          </a:prstGeom>
+          <a:noFill/>
+        </p:spPr>
+        <p:txBody>
+          <a:bodyPr wrap="square">
+            <a:spAutoFit/>
+          </a:bodyPr>
+          <a:lstStyle/>
+          <a:p>
+            <a:pPr algn="ctr">
+              <a:defRPr sz="1200" b="1">
                 <a:solidFill>
                   <a:srgbClr val="00D4FF"/>
                 </a:solidFill>
@@ -3220,21 +3536,21 @@
               </a:defRPr>
             </a:pPr>
             <a:r>
-              <a:t>AI漫剧制作全流程课程 · 2026版</a:t>
-            </a:r>
-          </a:p>
-        </p:txBody>
-      </p:sp>
-      <p:sp>
-        <p:nvSpPr>
-          <p:cNvPr id="5" name="TextBox 4"/>
+              <a:t>124课时</a:t>
+            </a:r>
+          </a:p>
+        </p:txBody>
+      </p:sp>
+      <p:sp>
+        <p:nvSpPr>
+          <p:cNvPr id="13" name="TextBox 12"/>
           <p:cNvSpPr txBox="1"/>
           <p:nvPr/>
         </p:nvSpPr>
         <p:spPr>
           <a:xfrm>
-            <a:off x="731520" y="1645920"/>
-            <a:ext cx="10058400" cy="1371600"/>
+            <a:off x="7315200" y="5715000"/>
+            <a:ext cx="1371600" cy="548640"/>
           </a:xfrm>
           <a:prstGeom prst="rect">
             <a:avLst/>
@@ -3247,73 +3563,30 @@
           </a:bodyPr>
           <a:lstStyle/>
           <a:p>
-            <a:pPr algn="l">
-              <a:defRPr sz="4000" b="1">
+            <a:pPr algn="ctr">
+              <a:defRPr sz="1200" b="1">
                 <a:solidFill>
-                  <a:srgbClr val="FFFFFF"/>
+                  <a:srgbClr val="00D4FF"/>
                 </a:solidFill>
                 <a:latin typeface="Microsoft YaHei"/>
               </a:defRPr>
             </a:pPr>
             <a:r>
-              <a:t>AI漫剧制作全流程课程</a:t>
-            </a:r>
-          </a:p>
-        </p:txBody>
-      </p:sp>
-      <p:sp>
-        <p:nvSpPr>
-          <p:cNvPr id="6" name="Rectangle 5"/>
-          <p:cNvSpPr/>
-          <p:nvPr/>
-        </p:nvSpPr>
-        <p:spPr>
-          <a:xfrm>
-            <a:off x="731520" y="3200400"/>
-            <a:ext cx="2743200" cy="38100"/>
-          </a:xfrm>
-          <a:prstGeom prst="rect">
-            <a:avLst/>
-          </a:prstGeom>
-          <a:solidFill>
-            <a:srgbClr val="00D4FF"/>
-          </a:solidFill>
-          <a:ln>
-            <a:noFill/>
-          </a:ln>
-        </p:spPr>
-        <p:style>
-          <a:lnRef idx="1">
-            <a:schemeClr val="accent1"/>
-          </a:lnRef>
-          <a:fillRef idx="3">
-            <a:schemeClr val="accent1"/>
-          </a:fillRef>
-          <a:effectRef idx="2">
-            <a:schemeClr val="accent1"/>
-          </a:effectRef>
-          <a:fontRef idx="minor">
-            <a:schemeClr val="lt1"/>
-          </a:fontRef>
-        </p:style>
-        <p:txBody>
-          <a:bodyPr rtlCol="0" anchor="ctr"/>
-          <a:lstStyle/>
-          <a:p>
-            <a:pPr algn="ctr"/>
-          </a:p>
-        </p:txBody>
-      </p:sp>
-      <p:sp>
-        <p:nvSpPr>
-          <p:cNvPr id="7" name="TextBox 6"/>
+              <a:t>17模块</a:t>
+            </a:r>
+          </a:p>
+        </p:txBody>
+      </p:sp>
+      <p:sp>
+        <p:nvSpPr>
+          <p:cNvPr id="14" name="TextBox 13"/>
           <p:cNvSpPr txBox="1"/>
           <p:nvPr/>
         </p:nvSpPr>
         <p:spPr>
           <a:xfrm>
-            <a:off x="731520" y="3566160"/>
-            <a:ext cx="9144000" cy="914400"/>
+            <a:off x="8778240" y="5715000"/>
+            <a:ext cx="1371600" cy="548640"/>
           </a:xfrm>
           <a:prstGeom prst="rect">
             <a:avLst/>
@@ -3326,73 +3599,30 @@
           </a:bodyPr>
           <a:lstStyle/>
           <a:p>
-            <a:pPr algn="l">
-              <a:defRPr sz="2000" b="0">
+            <a:pPr algn="ctr">
+              <a:defRPr sz="1200" b="1">
                 <a:solidFill>
-                  <a:srgbClr val="B0BCD4"/>
+                  <a:srgbClr val="00D4FF"/>
                 </a:solidFill>
                 <a:latin typeface="Microsoft YaHei"/>
               </a:defRPr>
             </a:pPr>
             <a:r>
-              <a:t>124课时 · 17个模块 · 从零基础到独立制作完整AI漫剧</a:t>
-            </a:r>
-          </a:p>
-        </p:txBody>
-      </p:sp>
-      <p:sp>
-        <p:nvSpPr>
-          <p:cNvPr id="8" name="Rectangle 7"/>
-          <p:cNvSpPr/>
-          <p:nvPr/>
-        </p:nvSpPr>
-        <p:spPr>
-          <a:xfrm>
-            <a:off x="0" y="6217920"/>
-            <a:ext cx="12191695" cy="25400"/>
-          </a:xfrm>
-          <a:prstGeom prst="rect">
-            <a:avLst/>
-          </a:prstGeom>
-          <a:solidFill>
-            <a:srgbClr val="2D3B55"/>
-          </a:solidFill>
-          <a:ln>
-            <a:noFill/>
-          </a:ln>
-        </p:spPr>
-        <p:style>
-          <a:lnRef idx="1">
-            <a:schemeClr val="accent1"/>
-          </a:lnRef>
-          <a:fillRef idx="3">
-            <a:schemeClr val="accent1"/>
-          </a:fillRef>
-          <a:effectRef idx="2">
-            <a:schemeClr val="accent1"/>
-          </a:effectRef>
-          <a:fontRef idx="minor">
-            <a:schemeClr val="lt1"/>
-          </a:fontRef>
-        </p:style>
-        <p:txBody>
-          <a:bodyPr rtlCol="0" anchor="ctr"/>
-          <a:lstStyle/>
-          <a:p>
-            <a:pPr algn="ctr"/>
-          </a:p>
-        </p:txBody>
-      </p:sp>
-      <p:sp>
-        <p:nvSpPr>
-          <p:cNvPr id="9" name="TextBox 8"/>
+              <a:t>8-16周</a:t>
+            </a:r>
+          </a:p>
+        </p:txBody>
+      </p:sp>
+      <p:sp>
+        <p:nvSpPr>
+          <p:cNvPr id="15" name="TextBox 14"/>
           <p:cNvSpPr txBox="1"/>
           <p:nvPr/>
         </p:nvSpPr>
         <p:spPr>
           <a:xfrm>
-            <a:off x="731520" y="6309360"/>
-            <a:ext cx="4572000" cy="365760"/>
+            <a:off x="10241280" y="5715000"/>
+            <a:ext cx="1371600" cy="548640"/>
           </a:xfrm>
           <a:prstGeom prst="rect">
             <a:avLst/>
@@ -3405,16 +3635,16 @@
           </a:bodyPr>
           <a:lstStyle/>
           <a:p>
-            <a:pPr algn="l">
-              <a:defRPr sz="1200" b="0">
+            <a:pPr algn="ctr">
+              <a:defRPr sz="1200" b="1">
                 <a:solidFill>
-                  <a:srgbClr val="6B7B9E"/>
+                  <a:srgbClr val="00D4FF"/>
                 </a:solidFill>
                 <a:latin typeface="Microsoft YaHei"/>
               </a:defRPr>
             </a:pPr>
             <a:r>
-              <a:t>124课时 · 17个模块 · 从零基础到独立制作</a:t>
+              <a:t>全流程</a:t>
             </a:r>
           </a:p>
         </p:txBody>
@@ -3433,7 +3663,7 @@
     <p:bg>
       <p:bgPr>
         <a:solidFill>
-          <a:srgbClr val="0F172A"/>
+          <a:srgbClr val="0B1120"/>
         </a:solidFill>
         <a:effectLst/>
       </p:bgPr>
@@ -3447,14 +3677,100 @@
       <p:grpSpPr/>
       <p:sp>
         <p:nvSpPr>
-          <p:cNvPr id="2" name="TextBox 1"/>
+          <p:cNvPr id="2" name="Rectangle 1"/>
+          <p:cNvSpPr/>
+          <p:nvPr/>
+        </p:nvSpPr>
+        <p:spPr>
+          <a:xfrm>
+            <a:off x="0" y="0"/>
+            <a:ext cx="12191695" cy="1051560"/>
+          </a:xfrm>
+          <a:prstGeom prst="rect">
+            <a:avLst/>
+          </a:prstGeom>
+          <a:solidFill>
+            <a:srgbClr val="141E33"/>
+          </a:solidFill>
+          <a:ln>
+            <a:noFill/>
+          </a:ln>
+        </p:spPr>
+        <p:style>
+          <a:lnRef idx="1">
+            <a:schemeClr val="accent1"/>
+          </a:lnRef>
+          <a:fillRef idx="3">
+            <a:schemeClr val="accent1"/>
+          </a:fillRef>
+          <a:effectRef idx="2">
+            <a:schemeClr val="accent1"/>
+          </a:effectRef>
+          <a:fontRef idx="minor">
+            <a:schemeClr val="lt1"/>
+          </a:fontRef>
+        </p:style>
+        <p:txBody>
+          <a:bodyPr rtlCol="0" anchor="ctr"/>
+          <a:lstStyle/>
+          <a:p>
+            <a:pPr algn="ctr"/>
+          </a:p>
+        </p:txBody>
+      </p:sp>
+      <p:sp>
+        <p:nvSpPr>
+          <p:cNvPr id="3" name="Rectangle 2"/>
+          <p:cNvSpPr/>
+          <p:nvPr/>
+        </p:nvSpPr>
+        <p:spPr>
+          <a:xfrm>
+            <a:off x="0" y="0"/>
+            <a:ext cx="109728" cy="1051560"/>
+          </a:xfrm>
+          <a:prstGeom prst="rect">
+            <a:avLst/>
+          </a:prstGeom>
+          <a:solidFill>
+            <a:srgbClr val="00D4FF"/>
+          </a:solidFill>
+          <a:ln>
+            <a:noFill/>
+          </a:ln>
+        </p:spPr>
+        <p:style>
+          <a:lnRef idx="1">
+            <a:schemeClr val="accent1"/>
+          </a:lnRef>
+          <a:fillRef idx="3">
+            <a:schemeClr val="accent1"/>
+          </a:fillRef>
+          <a:effectRef idx="2">
+            <a:schemeClr val="accent1"/>
+          </a:effectRef>
+          <a:fontRef idx="minor">
+            <a:schemeClr val="lt1"/>
+          </a:fontRef>
+        </p:style>
+        <p:txBody>
+          <a:bodyPr rtlCol="0" anchor="ctr"/>
+          <a:lstStyle/>
+          <a:p>
+            <a:pPr algn="ctr"/>
+          </a:p>
+        </p:txBody>
+      </p:sp>
+      <p:sp>
+        <p:nvSpPr>
+          <p:cNvPr id="4" name="TextBox 3"/>
           <p:cNvSpPr txBox="1"/>
           <p:nvPr/>
         </p:nvSpPr>
         <p:spPr>
           <a:xfrm>
-            <a:off x="731520" y="365760"/>
-            <a:ext cx="7315200" cy="548640"/>
+            <a:off x="548640" y="182880"/>
+            <a:ext cx="10058400" cy="640080"/>
           </a:xfrm>
           <a:prstGeom prst="rect">
             <a:avLst/>
@@ -3468,7 +3784,7 @@
           <a:lstStyle/>
           <a:p>
             <a:pPr algn="l">
-              <a:defRPr sz="2800" b="1">
+              <a:defRPr sz="2600" b="1">
                 <a:solidFill>
                   <a:srgbClr val="FFFFFF"/>
                 </a:solidFill>
@@ -3483,14 +3799,14 @@
       </p:sp>
       <p:sp>
         <p:nvSpPr>
-          <p:cNvPr id="3" name="Rectangle 2"/>
+          <p:cNvPr id="5" name="Rectangle 4"/>
           <p:cNvSpPr/>
           <p:nvPr/>
         </p:nvSpPr>
         <p:spPr>
           <a:xfrm>
-            <a:off x="731520" y="1005840"/>
-            <a:ext cx="1828800" cy="38100"/>
+            <a:off x="0" y="1051560"/>
+            <a:ext cx="12191695" cy="25400"/>
           </a:xfrm>
           <a:prstGeom prst="rect">
             <a:avLst/>
@@ -3526,23 +3842,25 @@
       </p:sp>
       <p:sp>
         <p:nvSpPr>
-          <p:cNvPr id="4" name="Oval 3"/>
+          <p:cNvPr id="6" name="Rounded Rectangle 5"/>
           <p:cNvSpPr/>
           <p:nvPr/>
         </p:nvSpPr>
         <p:spPr>
           <a:xfrm>
-            <a:off x="731520" y="1371600"/>
-            <a:ext cx="457200" cy="457200"/>
-          </a:xfrm>
-          <a:prstGeom prst="ellipse">
-            <a:avLst/>
-          </a:prstGeom>
-          <a:solidFill>
-            <a:srgbClr val="00D4FF"/>
-          </a:solidFill>
-          <a:ln>
-            <a:noFill/>
+            <a:off x="548640" y="1371600"/>
+            <a:ext cx="3383280" cy="1005840"/>
+          </a:xfrm>
+          <a:prstGeom prst="roundRect">
+            <a:avLst/>
+          </a:prstGeom>
+          <a:solidFill>
+            <a:srgbClr val="141E33"/>
+          </a:solidFill>
+          <a:ln w="19050">
+            <a:solidFill>
+              <a:srgbClr val="00D4FF"/>
+            </a:solidFill>
           </a:ln>
         </p:spPr>
         <p:style>
@@ -3560,16 +3878,79 @@
           </a:fontRef>
         </p:style>
         <p:txBody>
-          <a:bodyPr rtlCol="0" anchor="ctr" wrap="none"/>
+          <a:bodyPr rtlCol="0" anchor="ctr"/>
+          <a:lstStyle/>
+          <a:p>
+            <a:pPr algn="ctr"/>
+          </a:p>
+        </p:txBody>
+      </p:sp>
+      <p:sp>
+        <p:nvSpPr>
+          <p:cNvPr id="7" name="Oval 6"/>
+          <p:cNvSpPr/>
+          <p:nvPr/>
+        </p:nvSpPr>
+        <p:spPr>
+          <a:xfrm>
+            <a:off x="685800" y="1600200"/>
+            <a:ext cx="457200" cy="457200"/>
+          </a:xfrm>
+          <a:prstGeom prst="ellipse">
+            <a:avLst/>
+          </a:prstGeom>
+          <a:solidFill>
+            <a:srgbClr val="00D4FF"/>
+          </a:solidFill>
+          <a:ln>
+            <a:noFill/>
+          </a:ln>
+        </p:spPr>
+        <p:style>
+          <a:lnRef idx="1">
+            <a:schemeClr val="accent1"/>
+          </a:lnRef>
+          <a:fillRef idx="3">
+            <a:schemeClr val="accent1"/>
+          </a:fillRef>
+          <a:effectRef idx="2">
+            <a:schemeClr val="accent1"/>
+          </a:effectRef>
+          <a:fontRef idx="minor">
+            <a:schemeClr val="lt1"/>
+          </a:fontRef>
+        </p:style>
+        <p:txBody>
+          <a:bodyPr rtlCol="0" anchor="ctr"/>
+          <a:lstStyle/>
+          <a:p>
+            <a:pPr algn="ctr"/>
+          </a:p>
+        </p:txBody>
+      </p:sp>
+      <p:sp>
+        <p:nvSpPr>
+          <p:cNvPr id="8" name="TextBox 7"/>
+          <p:cNvSpPr txBox="1"/>
+          <p:nvPr/>
+        </p:nvSpPr>
+        <p:spPr>
+          <a:xfrm>
+            <a:off x="685800" y="1600200"/>
+            <a:ext cx="457200" cy="457200"/>
+          </a:xfrm>
+          <a:prstGeom prst="rect">
+            <a:avLst/>
+          </a:prstGeom>
+          <a:noFill/>
+        </p:spPr>
+        <p:txBody>
+          <a:bodyPr wrap="square">
+            <a:spAutoFit/>
+          </a:bodyPr>
           <a:lstStyle/>
           <a:p>
             <a:pPr algn="ctr">
-              <a:spcBef>
-                <a:spcPts val="0"/>
-              </a:spcBef>
-              <a:spcAft>
-                <a:spcPts val="0"/>
-              </a:spcAft>
               <a:defRPr sz="1400" b="1">
                 <a:solidFill>
                   <a:srgbClr val="FFFFFF"/>
@@ -3585,14 +3966,14 @@
       </p:sp>
       <p:sp>
         <p:nvSpPr>
-          <p:cNvPr id="5" name="TextBox 4"/>
+          <p:cNvPr id="9" name="TextBox 8"/>
           <p:cNvSpPr txBox="1"/>
           <p:nvPr/>
         </p:nvSpPr>
         <p:spPr>
           <a:xfrm>
-            <a:off x="1371600" y="1371600"/>
-            <a:ext cx="4572000" cy="457200"/>
+            <a:off x="1280160" y="1554480"/>
+            <a:ext cx="2468880" cy="640080"/>
           </a:xfrm>
           <a:prstGeom prst="rect">
             <a:avLst/>
@@ -3606,9 +3987,9 @@
           <a:lstStyle/>
           <a:p>
             <a:pPr algn="l">
-              <a:defRPr sz="1600" b="0">
+              <a:defRPr sz="1300" b="0">
                 <a:solidFill>
-                  <a:srgbClr val="B0BCD4"/>
+                  <a:srgbClr val="CBD5E8"/>
                 </a:solidFill>
                 <a:latin typeface="Microsoft YaHei"/>
               </a:defRPr>
@@ -3621,23 +4002,25 @@
       </p:sp>
       <p:sp>
         <p:nvSpPr>
-          <p:cNvPr id="6" name="Oval 5"/>
+          <p:cNvPr id="10" name="Rounded Rectangle 9"/>
           <p:cNvSpPr/>
           <p:nvPr/>
         </p:nvSpPr>
         <p:spPr>
           <a:xfrm>
-            <a:off x="731520" y="2011680"/>
-            <a:ext cx="457200" cy="457200"/>
-          </a:xfrm>
-          <a:prstGeom prst="ellipse">
-            <a:avLst/>
-          </a:prstGeom>
-          <a:solidFill>
-            <a:srgbClr val="00D4FF"/>
-          </a:solidFill>
-          <a:ln>
-            <a:noFill/>
+            <a:off x="4251960" y="1371600"/>
+            <a:ext cx="3383280" cy="1005840"/>
+          </a:xfrm>
+          <a:prstGeom prst="roundRect">
+            <a:avLst/>
+          </a:prstGeom>
+          <a:solidFill>
+            <a:srgbClr val="141E33"/>
+          </a:solidFill>
+          <a:ln w="19050">
+            <a:solidFill>
+              <a:srgbClr val="00D4FF"/>
+            </a:solidFill>
           </a:ln>
         </p:spPr>
         <p:style>
@@ -3655,16 +4038,79 @@
           </a:fontRef>
         </p:style>
         <p:txBody>
-          <a:bodyPr rtlCol="0" anchor="ctr" wrap="none"/>
+          <a:bodyPr rtlCol="0" anchor="ctr"/>
+          <a:lstStyle/>
+          <a:p>
+            <a:pPr algn="ctr"/>
+          </a:p>
+        </p:txBody>
+      </p:sp>
+      <p:sp>
+        <p:nvSpPr>
+          <p:cNvPr id="11" name="Oval 10"/>
+          <p:cNvSpPr/>
+          <p:nvPr/>
+        </p:nvSpPr>
+        <p:spPr>
+          <a:xfrm>
+            <a:off x="4389120" y="1600200"/>
+            <a:ext cx="457200" cy="457200"/>
+          </a:xfrm>
+          <a:prstGeom prst="ellipse">
+            <a:avLst/>
+          </a:prstGeom>
+          <a:solidFill>
+            <a:srgbClr val="00D4FF"/>
+          </a:solidFill>
+          <a:ln>
+            <a:noFill/>
+          </a:ln>
+        </p:spPr>
+        <p:style>
+          <a:lnRef idx="1">
+            <a:schemeClr val="accent1"/>
+          </a:lnRef>
+          <a:fillRef idx="3">
+            <a:schemeClr val="accent1"/>
+          </a:fillRef>
+          <a:effectRef idx="2">
+            <a:schemeClr val="accent1"/>
+          </a:effectRef>
+          <a:fontRef idx="minor">
+            <a:schemeClr val="lt1"/>
+          </a:fontRef>
+        </p:style>
+        <p:txBody>
+          <a:bodyPr rtlCol="0" anchor="ctr"/>
+          <a:lstStyle/>
+          <a:p>
+            <a:pPr algn="ctr"/>
+          </a:p>
+        </p:txBody>
+      </p:sp>
+      <p:sp>
+        <p:nvSpPr>
+          <p:cNvPr id="12" name="TextBox 11"/>
+          <p:cNvSpPr txBox="1"/>
+          <p:nvPr/>
+        </p:nvSpPr>
+        <p:spPr>
+          <a:xfrm>
+            <a:off x="4389120" y="1600200"/>
+            <a:ext cx="457200" cy="457200"/>
+          </a:xfrm>
+          <a:prstGeom prst="rect">
+            <a:avLst/>
+          </a:prstGeom>
+          <a:noFill/>
+        </p:spPr>
+        <p:txBody>
+          <a:bodyPr wrap="square">
+            <a:spAutoFit/>
+          </a:bodyPr>
           <a:lstStyle/>
           <a:p>
             <a:pPr algn="ctr">
-              <a:spcBef>
-                <a:spcPts val="0"/>
-              </a:spcBef>
-              <a:spcAft>
-                <a:spcPts val="0"/>
-              </a:spcAft>
               <a:defRPr sz="1400" b="1">
                 <a:solidFill>
                   <a:srgbClr val="FFFFFF"/>
@@ -3680,14 +4126,14 @@
       </p:sp>
       <p:sp>
         <p:nvSpPr>
-          <p:cNvPr id="7" name="TextBox 6"/>
+          <p:cNvPr id="13" name="TextBox 12"/>
           <p:cNvSpPr txBox="1"/>
           <p:nvPr/>
         </p:nvSpPr>
         <p:spPr>
           <a:xfrm>
-            <a:off x="1371600" y="2011680"/>
-            <a:ext cx="4572000" cy="457200"/>
+            <a:off x="4983480" y="1554480"/>
+            <a:ext cx="2468880" cy="640080"/>
           </a:xfrm>
           <a:prstGeom prst="rect">
             <a:avLst/>
@@ -3701,9 +4147,9 @@
           <a:lstStyle/>
           <a:p>
             <a:pPr algn="l">
-              <a:defRPr sz="1600" b="0">
+              <a:defRPr sz="1300" b="0">
                 <a:solidFill>
-                  <a:srgbClr val="B0BCD4"/>
+                  <a:srgbClr val="CBD5E8"/>
                 </a:solidFill>
                 <a:latin typeface="Microsoft YaHei"/>
               </a:defRPr>
@@ -3716,23 +4162,25 @@
       </p:sp>
       <p:sp>
         <p:nvSpPr>
-          <p:cNvPr id="8" name="Oval 7"/>
+          <p:cNvPr id="14" name="Rounded Rectangle 13"/>
           <p:cNvSpPr/>
           <p:nvPr/>
         </p:nvSpPr>
         <p:spPr>
           <a:xfrm>
-            <a:off x="731520" y="2651760"/>
-            <a:ext cx="457200" cy="457200"/>
-          </a:xfrm>
-          <a:prstGeom prst="ellipse">
-            <a:avLst/>
-          </a:prstGeom>
-          <a:solidFill>
-            <a:srgbClr val="00D4FF"/>
-          </a:solidFill>
-          <a:ln>
-            <a:noFill/>
+            <a:off x="7955280" y="1371600"/>
+            <a:ext cx="3383280" cy="1005840"/>
+          </a:xfrm>
+          <a:prstGeom prst="roundRect">
+            <a:avLst/>
+          </a:prstGeom>
+          <a:solidFill>
+            <a:srgbClr val="141E33"/>
+          </a:solidFill>
+          <a:ln w="19050">
+            <a:solidFill>
+              <a:srgbClr val="00D4FF"/>
+            </a:solidFill>
           </a:ln>
         </p:spPr>
         <p:style>
@@ -3750,16 +4198,79 @@
           </a:fontRef>
         </p:style>
         <p:txBody>
-          <a:bodyPr rtlCol="0" anchor="ctr" wrap="none"/>
+          <a:bodyPr rtlCol="0" anchor="ctr"/>
+          <a:lstStyle/>
+          <a:p>
+            <a:pPr algn="ctr"/>
+          </a:p>
+        </p:txBody>
+      </p:sp>
+      <p:sp>
+        <p:nvSpPr>
+          <p:cNvPr id="15" name="Oval 14"/>
+          <p:cNvSpPr/>
+          <p:nvPr/>
+        </p:nvSpPr>
+        <p:spPr>
+          <a:xfrm>
+            <a:off x="8092440" y="1600200"/>
+            <a:ext cx="457200" cy="457200"/>
+          </a:xfrm>
+          <a:prstGeom prst="ellipse">
+            <a:avLst/>
+          </a:prstGeom>
+          <a:solidFill>
+            <a:srgbClr val="00D4FF"/>
+          </a:solidFill>
+          <a:ln>
+            <a:noFill/>
+          </a:ln>
+        </p:spPr>
+        <p:style>
+          <a:lnRef idx="1">
+            <a:schemeClr val="accent1"/>
+          </a:lnRef>
+          <a:fillRef idx="3">
+            <a:schemeClr val="accent1"/>
+          </a:fillRef>
+          <a:effectRef idx="2">
+            <a:schemeClr val="accent1"/>
+          </a:effectRef>
+          <a:fontRef idx="minor">
+            <a:schemeClr val="lt1"/>
+          </a:fontRef>
+        </p:style>
+        <p:txBody>
+          <a:bodyPr rtlCol="0" anchor="ctr"/>
+          <a:lstStyle/>
+          <a:p>
+            <a:pPr algn="ctr"/>
+          </a:p>
+        </p:txBody>
+      </p:sp>
+      <p:sp>
+        <p:nvSpPr>
+          <p:cNvPr id="16" name="TextBox 15"/>
+          <p:cNvSpPr txBox="1"/>
+          <p:nvPr/>
+        </p:nvSpPr>
+        <p:spPr>
+          <a:xfrm>
+            <a:off x="8092440" y="1600200"/>
+            <a:ext cx="457200" cy="457200"/>
+          </a:xfrm>
+          <a:prstGeom prst="rect">
+            <a:avLst/>
+          </a:prstGeom>
+          <a:noFill/>
+        </p:spPr>
+        <p:txBody>
+          <a:bodyPr wrap="square">
+            <a:spAutoFit/>
+          </a:bodyPr>
           <a:lstStyle/>
           <a:p>
             <a:pPr algn="ctr">
-              <a:spcBef>
-                <a:spcPts val="0"/>
-              </a:spcBef>
-              <a:spcAft>
-                <a:spcPts val="0"/>
-              </a:spcAft>
               <a:defRPr sz="1400" b="1">
                 <a:solidFill>
                   <a:srgbClr val="FFFFFF"/>
@@ -3775,14 +4286,14 @@
       </p:sp>
       <p:sp>
         <p:nvSpPr>
-          <p:cNvPr id="9" name="TextBox 8"/>
+          <p:cNvPr id="17" name="TextBox 16"/>
           <p:cNvSpPr txBox="1"/>
           <p:nvPr/>
         </p:nvSpPr>
         <p:spPr>
           <a:xfrm>
-            <a:off x="1371600" y="2651760"/>
-            <a:ext cx="4572000" cy="457200"/>
+            <a:off x="8686800" y="1554480"/>
+            <a:ext cx="2468880" cy="640080"/>
           </a:xfrm>
           <a:prstGeom prst="rect">
             <a:avLst/>
@@ -3796,9 +4307,9 @@
           <a:lstStyle/>
           <a:p>
             <a:pPr algn="l">
-              <a:defRPr sz="1600" b="0">
+              <a:defRPr sz="1300" b="0">
                 <a:solidFill>
-                  <a:srgbClr val="B0BCD4"/>
+                  <a:srgbClr val="CBD5E8"/>
                 </a:solidFill>
                 <a:latin typeface="Microsoft YaHei"/>
               </a:defRPr>
@@ -3811,23 +4322,25 @@
       </p:sp>
       <p:sp>
         <p:nvSpPr>
-          <p:cNvPr id="10" name="Oval 9"/>
+          <p:cNvPr id="18" name="Rounded Rectangle 17"/>
           <p:cNvSpPr/>
           <p:nvPr/>
         </p:nvSpPr>
         <p:spPr>
           <a:xfrm>
-            <a:off x="731520" y="3291839"/>
-            <a:ext cx="457200" cy="457200"/>
-          </a:xfrm>
-          <a:prstGeom prst="ellipse">
-            <a:avLst/>
-          </a:prstGeom>
-          <a:solidFill>
-            <a:srgbClr val="00D4FF"/>
-          </a:solidFill>
-          <a:ln>
-            <a:noFill/>
+            <a:off x="548640" y="2606040"/>
+            <a:ext cx="3383280" cy="1005840"/>
+          </a:xfrm>
+          <a:prstGeom prst="roundRect">
+            <a:avLst/>
+          </a:prstGeom>
+          <a:solidFill>
+            <a:srgbClr val="141E33"/>
+          </a:solidFill>
+          <a:ln w="19050">
+            <a:solidFill>
+              <a:srgbClr val="00D4FF"/>
+            </a:solidFill>
           </a:ln>
         </p:spPr>
         <p:style>
@@ -3845,16 +4358,79 @@
           </a:fontRef>
         </p:style>
         <p:txBody>
-          <a:bodyPr rtlCol="0" anchor="ctr" wrap="none"/>
+          <a:bodyPr rtlCol="0" anchor="ctr"/>
+          <a:lstStyle/>
+          <a:p>
+            <a:pPr algn="ctr"/>
+          </a:p>
+        </p:txBody>
+      </p:sp>
+      <p:sp>
+        <p:nvSpPr>
+          <p:cNvPr id="19" name="Oval 18"/>
+          <p:cNvSpPr/>
+          <p:nvPr/>
+        </p:nvSpPr>
+        <p:spPr>
+          <a:xfrm>
+            <a:off x="685800" y="2834640"/>
+            <a:ext cx="457200" cy="457200"/>
+          </a:xfrm>
+          <a:prstGeom prst="ellipse">
+            <a:avLst/>
+          </a:prstGeom>
+          <a:solidFill>
+            <a:srgbClr val="00D4FF"/>
+          </a:solidFill>
+          <a:ln>
+            <a:noFill/>
+          </a:ln>
+        </p:spPr>
+        <p:style>
+          <a:lnRef idx="1">
+            <a:schemeClr val="accent1"/>
+          </a:lnRef>
+          <a:fillRef idx="3">
+            <a:schemeClr val="accent1"/>
+          </a:fillRef>
+          <a:effectRef idx="2">
+            <a:schemeClr val="accent1"/>
+          </a:effectRef>
+          <a:fontRef idx="minor">
+            <a:schemeClr val="lt1"/>
+          </a:fontRef>
+        </p:style>
+        <p:txBody>
+          <a:bodyPr rtlCol="0" anchor="ctr"/>
+          <a:lstStyle/>
+          <a:p>
+            <a:pPr algn="ctr"/>
+          </a:p>
+        </p:txBody>
+      </p:sp>
+      <p:sp>
+        <p:nvSpPr>
+          <p:cNvPr id="20" name="TextBox 19"/>
+          <p:cNvSpPr txBox="1"/>
+          <p:nvPr/>
+        </p:nvSpPr>
+        <p:spPr>
+          <a:xfrm>
+            <a:off x="685800" y="2834640"/>
+            <a:ext cx="457200" cy="457200"/>
+          </a:xfrm>
+          <a:prstGeom prst="rect">
+            <a:avLst/>
+          </a:prstGeom>
+          <a:noFill/>
+        </p:spPr>
+        <p:txBody>
+          <a:bodyPr wrap="square">
+            <a:spAutoFit/>
+          </a:bodyPr>
           <a:lstStyle/>
           <a:p>
             <a:pPr algn="ctr">
-              <a:spcBef>
-                <a:spcPts val="0"/>
-              </a:spcBef>
-              <a:spcAft>
-                <a:spcPts val="0"/>
-              </a:spcAft>
               <a:defRPr sz="1400" b="1">
                 <a:solidFill>
                   <a:srgbClr val="FFFFFF"/>
@@ -3870,14 +4446,14 @@
       </p:sp>
       <p:sp>
         <p:nvSpPr>
-          <p:cNvPr id="11" name="TextBox 10"/>
+          <p:cNvPr id="21" name="TextBox 20"/>
           <p:cNvSpPr txBox="1"/>
           <p:nvPr/>
         </p:nvSpPr>
         <p:spPr>
           <a:xfrm>
-            <a:off x="1371600" y="3291839"/>
-            <a:ext cx="4572000" cy="457200"/>
+            <a:off x="1280160" y="2788920"/>
+            <a:ext cx="2468880" cy="640080"/>
           </a:xfrm>
           <a:prstGeom prst="rect">
             <a:avLst/>
@@ -3891,9 +4467,9 @@
           <a:lstStyle/>
           <a:p>
             <a:pPr algn="l">
-              <a:defRPr sz="1600" b="0">
+              <a:defRPr sz="1300" b="0">
                 <a:solidFill>
-                  <a:srgbClr val="B0BCD4"/>
+                  <a:srgbClr val="CBD5E8"/>
                 </a:solidFill>
                 <a:latin typeface="Microsoft YaHei"/>
               </a:defRPr>
@@ -3906,23 +4482,25 @@
       </p:sp>
       <p:sp>
         <p:nvSpPr>
-          <p:cNvPr id="12" name="Oval 11"/>
+          <p:cNvPr id="22" name="Rounded Rectangle 21"/>
           <p:cNvSpPr/>
           <p:nvPr/>
         </p:nvSpPr>
         <p:spPr>
           <a:xfrm>
-            <a:off x="731520" y="3931920"/>
-            <a:ext cx="457200" cy="457200"/>
-          </a:xfrm>
-          <a:prstGeom prst="ellipse">
-            <a:avLst/>
-          </a:prstGeom>
-          <a:solidFill>
-            <a:srgbClr val="00D4FF"/>
-          </a:solidFill>
-          <a:ln>
-            <a:noFill/>
+            <a:off x="4251960" y="2606040"/>
+            <a:ext cx="3383280" cy="1005840"/>
+          </a:xfrm>
+          <a:prstGeom prst="roundRect">
+            <a:avLst/>
+          </a:prstGeom>
+          <a:solidFill>
+            <a:srgbClr val="141E33"/>
+          </a:solidFill>
+          <a:ln w="19050">
+            <a:solidFill>
+              <a:srgbClr val="00D4FF"/>
+            </a:solidFill>
           </a:ln>
         </p:spPr>
         <p:style>
@@ -3940,16 +4518,79 @@
           </a:fontRef>
         </p:style>
         <p:txBody>
-          <a:bodyPr rtlCol="0" anchor="ctr" wrap="none"/>
+          <a:bodyPr rtlCol="0" anchor="ctr"/>
+          <a:lstStyle/>
+          <a:p>
+            <a:pPr algn="ctr"/>
+          </a:p>
+        </p:txBody>
+      </p:sp>
+      <p:sp>
+        <p:nvSpPr>
+          <p:cNvPr id="23" name="Oval 22"/>
+          <p:cNvSpPr/>
+          <p:nvPr/>
+        </p:nvSpPr>
+        <p:spPr>
+          <a:xfrm>
+            <a:off x="4389120" y="2834640"/>
+            <a:ext cx="457200" cy="457200"/>
+          </a:xfrm>
+          <a:prstGeom prst="ellipse">
+            <a:avLst/>
+          </a:prstGeom>
+          <a:solidFill>
+            <a:srgbClr val="00D4FF"/>
+          </a:solidFill>
+          <a:ln>
+            <a:noFill/>
+          </a:ln>
+        </p:spPr>
+        <p:style>
+          <a:lnRef idx="1">
+            <a:schemeClr val="accent1"/>
+          </a:lnRef>
+          <a:fillRef idx="3">
+            <a:schemeClr val="accent1"/>
+          </a:fillRef>
+          <a:effectRef idx="2">
+            <a:schemeClr val="accent1"/>
+          </a:effectRef>
+          <a:fontRef idx="minor">
+            <a:schemeClr val="lt1"/>
+          </a:fontRef>
+        </p:style>
+        <p:txBody>
+          <a:bodyPr rtlCol="0" anchor="ctr"/>
+          <a:lstStyle/>
+          <a:p>
+            <a:pPr algn="ctr"/>
+          </a:p>
+        </p:txBody>
+      </p:sp>
+      <p:sp>
+        <p:nvSpPr>
+          <p:cNvPr id="24" name="TextBox 23"/>
+          <p:cNvSpPr txBox="1"/>
+          <p:nvPr/>
+        </p:nvSpPr>
+        <p:spPr>
+          <a:xfrm>
+            <a:off x="4389120" y="2834640"/>
+            <a:ext cx="457200" cy="457200"/>
+          </a:xfrm>
+          <a:prstGeom prst="rect">
+            <a:avLst/>
+          </a:prstGeom>
+          <a:noFill/>
+        </p:spPr>
+        <p:txBody>
+          <a:bodyPr wrap="square">
+            <a:spAutoFit/>
+          </a:bodyPr>
           <a:lstStyle/>
           <a:p>
             <a:pPr algn="ctr">
-              <a:spcBef>
-                <a:spcPts val="0"/>
-              </a:spcBef>
-              <a:spcAft>
-                <a:spcPts val="0"/>
-              </a:spcAft>
               <a:defRPr sz="1400" b="1">
                 <a:solidFill>
                   <a:srgbClr val="FFFFFF"/>
@@ -3965,14 +4606,14 @@
       </p:sp>
       <p:sp>
         <p:nvSpPr>
-          <p:cNvPr id="13" name="TextBox 12"/>
+          <p:cNvPr id="25" name="TextBox 24"/>
           <p:cNvSpPr txBox="1"/>
           <p:nvPr/>
         </p:nvSpPr>
         <p:spPr>
           <a:xfrm>
-            <a:off x="1371600" y="3931920"/>
-            <a:ext cx="4572000" cy="457200"/>
+            <a:off x="4983480" y="2788920"/>
+            <a:ext cx="2468880" cy="640080"/>
           </a:xfrm>
           <a:prstGeom prst="rect">
             <a:avLst/>
@@ -3986,9 +4627,9 @@
           <a:lstStyle/>
           <a:p>
             <a:pPr algn="l">
-              <a:defRPr sz="1600" b="0">
+              <a:defRPr sz="1300" b="0">
                 <a:solidFill>
-                  <a:srgbClr val="B0BCD4"/>
+                  <a:srgbClr val="CBD5E8"/>
                 </a:solidFill>
                 <a:latin typeface="Microsoft YaHei"/>
               </a:defRPr>
@@ -4001,23 +4642,25 @@
       </p:sp>
       <p:sp>
         <p:nvSpPr>
-          <p:cNvPr id="14" name="Oval 13"/>
+          <p:cNvPr id="26" name="Rounded Rectangle 25"/>
           <p:cNvSpPr/>
           <p:nvPr/>
         </p:nvSpPr>
         <p:spPr>
           <a:xfrm>
-            <a:off x="731520" y="4572000"/>
-            <a:ext cx="457200" cy="457200"/>
-          </a:xfrm>
-          <a:prstGeom prst="ellipse">
-            <a:avLst/>
-          </a:prstGeom>
-          <a:solidFill>
-            <a:srgbClr val="00D4FF"/>
-          </a:solidFill>
-          <a:ln>
-            <a:noFill/>
+            <a:off x="7955280" y="2606040"/>
+            <a:ext cx="3383280" cy="1005840"/>
+          </a:xfrm>
+          <a:prstGeom prst="roundRect">
+            <a:avLst/>
+          </a:prstGeom>
+          <a:solidFill>
+            <a:srgbClr val="141E33"/>
+          </a:solidFill>
+          <a:ln w="19050">
+            <a:solidFill>
+              <a:srgbClr val="00D4FF"/>
+            </a:solidFill>
           </a:ln>
         </p:spPr>
         <p:style>
@@ -4035,16 +4678,79 @@
           </a:fontRef>
         </p:style>
         <p:txBody>
-          <a:bodyPr rtlCol="0" anchor="ctr" wrap="none"/>
+          <a:bodyPr rtlCol="0" anchor="ctr"/>
+          <a:lstStyle/>
+          <a:p>
+            <a:pPr algn="ctr"/>
+          </a:p>
+        </p:txBody>
+      </p:sp>
+      <p:sp>
+        <p:nvSpPr>
+          <p:cNvPr id="27" name="Oval 26"/>
+          <p:cNvSpPr/>
+          <p:nvPr/>
+        </p:nvSpPr>
+        <p:spPr>
+          <a:xfrm>
+            <a:off x="8092440" y="2834640"/>
+            <a:ext cx="457200" cy="457200"/>
+          </a:xfrm>
+          <a:prstGeom prst="ellipse">
+            <a:avLst/>
+          </a:prstGeom>
+          <a:solidFill>
+            <a:srgbClr val="00D4FF"/>
+          </a:solidFill>
+          <a:ln>
+            <a:noFill/>
+          </a:ln>
+        </p:spPr>
+        <p:style>
+          <a:lnRef idx="1">
+            <a:schemeClr val="accent1"/>
+          </a:lnRef>
+          <a:fillRef idx="3">
+            <a:schemeClr val="accent1"/>
+          </a:fillRef>
+          <a:effectRef idx="2">
+            <a:schemeClr val="accent1"/>
+          </a:effectRef>
+          <a:fontRef idx="minor">
+            <a:schemeClr val="lt1"/>
+          </a:fontRef>
+        </p:style>
+        <p:txBody>
+          <a:bodyPr rtlCol="0" anchor="ctr"/>
+          <a:lstStyle/>
+          <a:p>
+            <a:pPr algn="ctr"/>
+          </a:p>
+        </p:txBody>
+      </p:sp>
+      <p:sp>
+        <p:nvSpPr>
+          <p:cNvPr id="28" name="TextBox 27"/>
+          <p:cNvSpPr txBox="1"/>
+          <p:nvPr/>
+        </p:nvSpPr>
+        <p:spPr>
+          <a:xfrm>
+            <a:off x="8092440" y="2834640"/>
+            <a:ext cx="457200" cy="457200"/>
+          </a:xfrm>
+          <a:prstGeom prst="rect">
+            <a:avLst/>
+          </a:prstGeom>
+          <a:noFill/>
+        </p:spPr>
+        <p:txBody>
+          <a:bodyPr wrap="square">
+            <a:spAutoFit/>
+          </a:bodyPr>
           <a:lstStyle/>
           <a:p>
             <a:pPr algn="ctr">
-              <a:spcBef>
-                <a:spcPts val="0"/>
-              </a:spcBef>
-              <a:spcAft>
-                <a:spcPts val="0"/>
-              </a:spcAft>
               <a:defRPr sz="1400" b="1">
                 <a:solidFill>
                   <a:srgbClr val="FFFFFF"/>
@@ -4060,14 +4766,14 @@
       </p:sp>
       <p:sp>
         <p:nvSpPr>
-          <p:cNvPr id="15" name="TextBox 14"/>
+          <p:cNvPr id="29" name="TextBox 28"/>
           <p:cNvSpPr txBox="1"/>
           <p:nvPr/>
         </p:nvSpPr>
         <p:spPr>
           <a:xfrm>
-            <a:off x="1371600" y="4572000"/>
-            <a:ext cx="4572000" cy="457200"/>
+            <a:off x="8686800" y="2788920"/>
+            <a:ext cx="2468880" cy="640080"/>
           </a:xfrm>
           <a:prstGeom prst="rect">
             <a:avLst/>
@@ -4081,9 +4787,9 @@
           <a:lstStyle/>
           <a:p>
             <a:pPr algn="l">
-              <a:defRPr sz="1600" b="0">
+              <a:defRPr sz="1300" b="0">
                 <a:solidFill>
-                  <a:srgbClr val="B0BCD4"/>
+                  <a:srgbClr val="CBD5E8"/>
                 </a:solidFill>
                 <a:latin typeface="Microsoft YaHei"/>
               </a:defRPr>
@@ -4096,23 +4802,25 @@
       </p:sp>
       <p:sp>
         <p:nvSpPr>
-          <p:cNvPr id="16" name="Oval 15"/>
+          <p:cNvPr id="30" name="Rounded Rectangle 29"/>
           <p:cNvSpPr/>
           <p:nvPr/>
         </p:nvSpPr>
         <p:spPr>
           <a:xfrm>
-            <a:off x="731520" y="5212079"/>
-            <a:ext cx="457200" cy="457200"/>
-          </a:xfrm>
-          <a:prstGeom prst="ellipse">
-            <a:avLst/>
-          </a:prstGeom>
-          <a:solidFill>
-            <a:srgbClr val="00D4FF"/>
-          </a:solidFill>
-          <a:ln>
-            <a:noFill/>
+            <a:off x="548640" y="3840480"/>
+            <a:ext cx="3383280" cy="1005840"/>
+          </a:xfrm>
+          <a:prstGeom prst="roundRect">
+            <a:avLst/>
+          </a:prstGeom>
+          <a:solidFill>
+            <a:srgbClr val="141E33"/>
+          </a:solidFill>
+          <a:ln w="19050">
+            <a:solidFill>
+              <a:srgbClr val="00D4FF"/>
+            </a:solidFill>
           </a:ln>
         </p:spPr>
         <p:style>
@@ -4130,16 +4838,79 @@
           </a:fontRef>
         </p:style>
         <p:txBody>
-          <a:bodyPr rtlCol="0" anchor="ctr" wrap="none"/>
+          <a:bodyPr rtlCol="0" anchor="ctr"/>
+          <a:lstStyle/>
+          <a:p>
+            <a:pPr algn="ctr"/>
+          </a:p>
+        </p:txBody>
+      </p:sp>
+      <p:sp>
+        <p:nvSpPr>
+          <p:cNvPr id="31" name="Oval 30"/>
+          <p:cNvSpPr/>
+          <p:nvPr/>
+        </p:nvSpPr>
+        <p:spPr>
+          <a:xfrm>
+            <a:off x="685800" y="4069080"/>
+            <a:ext cx="457200" cy="457200"/>
+          </a:xfrm>
+          <a:prstGeom prst="ellipse">
+            <a:avLst/>
+          </a:prstGeom>
+          <a:solidFill>
+            <a:srgbClr val="00D4FF"/>
+          </a:solidFill>
+          <a:ln>
+            <a:noFill/>
+          </a:ln>
+        </p:spPr>
+        <p:style>
+          <a:lnRef idx="1">
+            <a:schemeClr val="accent1"/>
+          </a:lnRef>
+          <a:fillRef idx="3">
+            <a:schemeClr val="accent1"/>
+          </a:fillRef>
+          <a:effectRef idx="2">
+            <a:schemeClr val="accent1"/>
+          </a:effectRef>
+          <a:fontRef idx="minor">
+            <a:schemeClr val="lt1"/>
+          </a:fontRef>
+        </p:style>
+        <p:txBody>
+          <a:bodyPr rtlCol="0" anchor="ctr"/>
+          <a:lstStyle/>
+          <a:p>
+            <a:pPr algn="ctr"/>
+          </a:p>
+        </p:txBody>
+      </p:sp>
+      <p:sp>
+        <p:nvSpPr>
+          <p:cNvPr id="32" name="TextBox 31"/>
+          <p:cNvSpPr txBox="1"/>
+          <p:nvPr/>
+        </p:nvSpPr>
+        <p:spPr>
+          <a:xfrm>
+            <a:off x="685800" y="4069080"/>
+            <a:ext cx="457200" cy="457200"/>
+          </a:xfrm>
+          <a:prstGeom prst="rect">
+            <a:avLst/>
+          </a:prstGeom>
+          <a:noFill/>
+        </p:spPr>
+        <p:txBody>
+          <a:bodyPr wrap="square">
+            <a:spAutoFit/>
+          </a:bodyPr>
           <a:lstStyle/>
           <a:p>
             <a:pPr algn="ctr">
-              <a:spcBef>
-                <a:spcPts val="0"/>
-              </a:spcBef>
-              <a:spcAft>
-                <a:spcPts val="0"/>
-              </a:spcAft>
               <a:defRPr sz="1400" b="1">
                 <a:solidFill>
                   <a:srgbClr val="FFFFFF"/>
@@ -4155,14 +4926,14 @@
       </p:sp>
       <p:sp>
         <p:nvSpPr>
-          <p:cNvPr id="17" name="TextBox 16"/>
+          <p:cNvPr id="33" name="TextBox 32"/>
           <p:cNvSpPr txBox="1"/>
           <p:nvPr/>
         </p:nvSpPr>
         <p:spPr>
           <a:xfrm>
-            <a:off x="1371600" y="5212079"/>
-            <a:ext cx="4572000" cy="457200"/>
+            <a:off x="1280160" y="4023360"/>
+            <a:ext cx="2468880" cy="640080"/>
           </a:xfrm>
           <a:prstGeom prst="rect">
             <a:avLst/>
@@ -4176,9 +4947,9 @@
           <a:lstStyle/>
           <a:p>
             <a:pPr algn="l">
-              <a:defRPr sz="1600" b="0">
+              <a:defRPr sz="1300" b="0">
                 <a:solidFill>
-                  <a:srgbClr val="B0BCD4"/>
+                  <a:srgbClr val="CBD5E8"/>
                 </a:solidFill>
                 <a:latin typeface="Microsoft YaHei"/>
               </a:defRPr>
@@ -4191,23 +4962,25 @@
       </p:sp>
       <p:sp>
         <p:nvSpPr>
-          <p:cNvPr id="18" name="Oval 17"/>
+          <p:cNvPr id="34" name="Rounded Rectangle 33"/>
           <p:cNvSpPr/>
           <p:nvPr/>
         </p:nvSpPr>
         <p:spPr>
           <a:xfrm>
-            <a:off x="731520" y="5852159"/>
-            <a:ext cx="457200" cy="457200"/>
-          </a:xfrm>
-          <a:prstGeom prst="ellipse">
-            <a:avLst/>
-          </a:prstGeom>
-          <a:solidFill>
-            <a:srgbClr val="00D4FF"/>
-          </a:solidFill>
-          <a:ln>
-            <a:noFill/>
+            <a:off x="4251960" y="3840480"/>
+            <a:ext cx="3383280" cy="1005840"/>
+          </a:xfrm>
+          <a:prstGeom prst="roundRect">
+            <a:avLst/>
+          </a:prstGeom>
+          <a:solidFill>
+            <a:srgbClr val="141E33"/>
+          </a:solidFill>
+          <a:ln w="19050">
+            <a:solidFill>
+              <a:srgbClr val="00D4FF"/>
+            </a:solidFill>
           </a:ln>
         </p:spPr>
         <p:style>
@@ -4225,16 +4998,79 @@
           </a:fontRef>
         </p:style>
         <p:txBody>
-          <a:bodyPr rtlCol="0" anchor="ctr" wrap="none"/>
+          <a:bodyPr rtlCol="0" anchor="ctr"/>
+          <a:lstStyle/>
+          <a:p>
+            <a:pPr algn="ctr"/>
+          </a:p>
+        </p:txBody>
+      </p:sp>
+      <p:sp>
+        <p:nvSpPr>
+          <p:cNvPr id="35" name="Oval 34"/>
+          <p:cNvSpPr/>
+          <p:nvPr/>
+        </p:nvSpPr>
+        <p:spPr>
+          <a:xfrm>
+            <a:off x="4389120" y="4069080"/>
+            <a:ext cx="457200" cy="457200"/>
+          </a:xfrm>
+          <a:prstGeom prst="ellipse">
+            <a:avLst/>
+          </a:prstGeom>
+          <a:solidFill>
+            <a:srgbClr val="00D4FF"/>
+          </a:solidFill>
+          <a:ln>
+            <a:noFill/>
+          </a:ln>
+        </p:spPr>
+        <p:style>
+          <a:lnRef idx="1">
+            <a:schemeClr val="accent1"/>
+          </a:lnRef>
+          <a:fillRef idx="3">
+            <a:schemeClr val="accent1"/>
+          </a:fillRef>
+          <a:effectRef idx="2">
+            <a:schemeClr val="accent1"/>
+          </a:effectRef>
+          <a:fontRef idx="minor">
+            <a:schemeClr val="lt1"/>
+          </a:fontRef>
+        </p:style>
+        <p:txBody>
+          <a:bodyPr rtlCol="0" anchor="ctr"/>
+          <a:lstStyle/>
+          <a:p>
+            <a:pPr algn="ctr"/>
+          </a:p>
+        </p:txBody>
+      </p:sp>
+      <p:sp>
+        <p:nvSpPr>
+          <p:cNvPr id="36" name="TextBox 35"/>
+          <p:cNvSpPr txBox="1"/>
+          <p:nvPr/>
+        </p:nvSpPr>
+        <p:spPr>
+          <a:xfrm>
+            <a:off x="4389120" y="4069080"/>
+            <a:ext cx="457200" cy="457200"/>
+          </a:xfrm>
+          <a:prstGeom prst="rect">
+            <a:avLst/>
+          </a:prstGeom>
+          <a:noFill/>
+        </p:spPr>
+        <p:txBody>
+          <a:bodyPr wrap="square">
+            <a:spAutoFit/>
+          </a:bodyPr>
           <a:lstStyle/>
           <a:p>
             <a:pPr algn="ctr">
-              <a:spcBef>
-                <a:spcPts val="0"/>
-              </a:spcBef>
-              <a:spcAft>
-                <a:spcPts val="0"/>
-              </a:spcAft>
               <a:defRPr sz="1400" b="1">
                 <a:solidFill>
                   <a:srgbClr val="FFFFFF"/>
@@ -4250,14 +5086,14 @@
       </p:sp>
       <p:sp>
         <p:nvSpPr>
-          <p:cNvPr id="19" name="TextBox 18"/>
+          <p:cNvPr id="37" name="TextBox 36"/>
           <p:cNvSpPr txBox="1"/>
           <p:nvPr/>
         </p:nvSpPr>
         <p:spPr>
           <a:xfrm>
-            <a:off x="1371600" y="5852159"/>
-            <a:ext cx="4572000" cy="457200"/>
+            <a:off x="4983480" y="4023360"/>
+            <a:ext cx="2468880" cy="640080"/>
           </a:xfrm>
           <a:prstGeom prst="rect">
             <a:avLst/>
@@ -4271,9 +5107,9 @@
           <a:lstStyle/>
           <a:p>
             <a:pPr algn="l">
-              <a:defRPr sz="1600" b="0">
+              <a:defRPr sz="1300" b="0">
                 <a:solidFill>
-                  <a:srgbClr val="B0BCD4"/>
+                  <a:srgbClr val="CBD5E8"/>
                 </a:solidFill>
                 <a:latin typeface="Microsoft YaHei"/>
               </a:defRPr>
@@ -4286,23 +5122,25 @@
       </p:sp>
       <p:sp>
         <p:nvSpPr>
-          <p:cNvPr id="20" name="Oval 19"/>
+          <p:cNvPr id="38" name="Rounded Rectangle 37"/>
           <p:cNvSpPr/>
           <p:nvPr/>
         </p:nvSpPr>
         <p:spPr>
           <a:xfrm>
-            <a:off x="731520" y="6492240"/>
-            <a:ext cx="457200" cy="457200"/>
-          </a:xfrm>
-          <a:prstGeom prst="ellipse">
-            <a:avLst/>
-          </a:prstGeom>
-          <a:solidFill>
-            <a:srgbClr val="00D4FF"/>
-          </a:solidFill>
-          <a:ln>
-            <a:noFill/>
+            <a:off x="7955280" y="3840480"/>
+            <a:ext cx="3383280" cy="1005840"/>
+          </a:xfrm>
+          <a:prstGeom prst="roundRect">
+            <a:avLst/>
+          </a:prstGeom>
+          <a:solidFill>
+            <a:srgbClr val="141E33"/>
+          </a:solidFill>
+          <a:ln w="19050">
+            <a:solidFill>
+              <a:srgbClr val="00D4FF"/>
+            </a:solidFill>
           </a:ln>
         </p:spPr>
         <p:style>
@@ -4320,16 +5158,79 @@
           </a:fontRef>
         </p:style>
         <p:txBody>
-          <a:bodyPr rtlCol="0" anchor="ctr" wrap="none"/>
+          <a:bodyPr rtlCol="0" anchor="ctr"/>
+          <a:lstStyle/>
+          <a:p>
+            <a:pPr algn="ctr"/>
+          </a:p>
+        </p:txBody>
+      </p:sp>
+      <p:sp>
+        <p:nvSpPr>
+          <p:cNvPr id="39" name="Oval 38"/>
+          <p:cNvSpPr/>
+          <p:nvPr/>
+        </p:nvSpPr>
+        <p:spPr>
+          <a:xfrm>
+            <a:off x="8092440" y="4069080"/>
+            <a:ext cx="457200" cy="457200"/>
+          </a:xfrm>
+          <a:prstGeom prst="ellipse">
+            <a:avLst/>
+          </a:prstGeom>
+          <a:solidFill>
+            <a:srgbClr val="00D4FF"/>
+          </a:solidFill>
+          <a:ln>
+            <a:noFill/>
+          </a:ln>
+        </p:spPr>
+        <p:style>
+          <a:lnRef idx="1">
+            <a:schemeClr val="accent1"/>
+          </a:lnRef>
+          <a:fillRef idx="3">
+            <a:schemeClr val="accent1"/>
+          </a:fillRef>
+          <a:effectRef idx="2">
+            <a:schemeClr val="accent1"/>
+          </a:effectRef>
+          <a:fontRef idx="minor">
+            <a:schemeClr val="lt1"/>
+          </a:fontRef>
+        </p:style>
+        <p:txBody>
+          <a:bodyPr rtlCol="0" anchor="ctr"/>
+          <a:lstStyle/>
+          <a:p>
+            <a:pPr algn="ctr"/>
+          </a:p>
+        </p:txBody>
+      </p:sp>
+      <p:sp>
+        <p:nvSpPr>
+          <p:cNvPr id="40" name="TextBox 39"/>
+          <p:cNvSpPr txBox="1"/>
+          <p:nvPr/>
+        </p:nvSpPr>
+        <p:spPr>
+          <a:xfrm>
+            <a:off x="8092440" y="4069080"/>
+            <a:ext cx="457200" cy="457200"/>
+          </a:xfrm>
+          <a:prstGeom prst="rect">
+            <a:avLst/>
+          </a:prstGeom>
+          <a:noFill/>
+        </p:spPr>
+        <p:txBody>
+          <a:bodyPr wrap="square">
+            <a:spAutoFit/>
+          </a:bodyPr>
           <a:lstStyle/>
           <a:p>
             <a:pPr algn="ctr">
-              <a:spcBef>
-                <a:spcPts val="0"/>
-              </a:spcBef>
-              <a:spcAft>
-                <a:spcPts val="0"/>
-              </a:spcAft>
               <a:defRPr sz="1400" b="1">
                 <a:solidFill>
                   <a:srgbClr val="FFFFFF"/>
@@ -4345,14 +5246,14 @@
       </p:sp>
       <p:sp>
         <p:nvSpPr>
-          <p:cNvPr id="21" name="TextBox 20"/>
+          <p:cNvPr id="41" name="TextBox 40"/>
           <p:cNvSpPr txBox="1"/>
           <p:nvPr/>
         </p:nvSpPr>
         <p:spPr>
           <a:xfrm>
-            <a:off x="1371600" y="6492240"/>
-            <a:ext cx="4572000" cy="457200"/>
+            <a:off x="8686800" y="4023360"/>
+            <a:ext cx="2468880" cy="640080"/>
           </a:xfrm>
           <a:prstGeom prst="rect">
             <a:avLst/>
@@ -4366,9 +5267,9 @@
           <a:lstStyle/>
           <a:p>
             <a:pPr algn="l">
-              <a:defRPr sz="1600" b="0">
+              <a:defRPr sz="1300" b="0">
                 <a:solidFill>
-                  <a:srgbClr val="B0BCD4"/>
+                  <a:srgbClr val="CBD5E8"/>
                 </a:solidFill>
                 <a:latin typeface="Microsoft YaHei"/>
               </a:defRPr>
@@ -4381,23 +5282,25 @@
       </p:sp>
       <p:sp>
         <p:nvSpPr>
-          <p:cNvPr id="22" name="Oval 21"/>
+          <p:cNvPr id="42" name="Rounded Rectangle 41"/>
           <p:cNvSpPr/>
           <p:nvPr/>
         </p:nvSpPr>
         <p:spPr>
           <a:xfrm>
-            <a:off x="6217920" y="1371600"/>
-            <a:ext cx="457200" cy="457200"/>
-          </a:xfrm>
-          <a:prstGeom prst="ellipse">
-            <a:avLst/>
-          </a:prstGeom>
-          <a:solidFill>
-            <a:srgbClr val="7C3AED"/>
-          </a:solidFill>
-          <a:ln>
-            <a:noFill/>
+            <a:off x="548640" y="5074920"/>
+            <a:ext cx="3383280" cy="1005840"/>
+          </a:xfrm>
+          <a:prstGeom prst="roundRect">
+            <a:avLst/>
+          </a:prstGeom>
+          <a:solidFill>
+            <a:srgbClr val="141E33"/>
+          </a:solidFill>
+          <a:ln w="19050">
+            <a:solidFill>
+              <a:srgbClr val="00D4FF"/>
+            </a:solidFill>
           </a:ln>
         </p:spPr>
         <p:style>
@@ -4415,16 +5318,79 @@
           </a:fontRef>
         </p:style>
         <p:txBody>
-          <a:bodyPr rtlCol="0" anchor="ctr" wrap="none"/>
+          <a:bodyPr rtlCol="0" anchor="ctr"/>
+          <a:lstStyle/>
+          <a:p>
+            <a:pPr algn="ctr"/>
+          </a:p>
+        </p:txBody>
+      </p:sp>
+      <p:sp>
+        <p:nvSpPr>
+          <p:cNvPr id="43" name="Oval 42"/>
+          <p:cNvSpPr/>
+          <p:nvPr/>
+        </p:nvSpPr>
+        <p:spPr>
+          <a:xfrm>
+            <a:off x="685800" y="5303520"/>
+            <a:ext cx="457200" cy="457200"/>
+          </a:xfrm>
+          <a:prstGeom prst="ellipse">
+            <a:avLst/>
+          </a:prstGeom>
+          <a:solidFill>
+            <a:srgbClr val="00D4FF"/>
+          </a:solidFill>
+          <a:ln>
+            <a:noFill/>
+          </a:ln>
+        </p:spPr>
+        <p:style>
+          <a:lnRef idx="1">
+            <a:schemeClr val="accent1"/>
+          </a:lnRef>
+          <a:fillRef idx="3">
+            <a:schemeClr val="accent1"/>
+          </a:fillRef>
+          <a:effectRef idx="2">
+            <a:schemeClr val="accent1"/>
+          </a:effectRef>
+          <a:fontRef idx="minor">
+            <a:schemeClr val="lt1"/>
+          </a:fontRef>
+        </p:style>
+        <p:txBody>
+          <a:bodyPr rtlCol="0" anchor="ctr"/>
+          <a:lstStyle/>
+          <a:p>
+            <a:pPr algn="ctr"/>
+          </a:p>
+        </p:txBody>
+      </p:sp>
+      <p:sp>
+        <p:nvSpPr>
+          <p:cNvPr id="44" name="TextBox 43"/>
+          <p:cNvSpPr txBox="1"/>
+          <p:nvPr/>
+        </p:nvSpPr>
+        <p:spPr>
+          <a:xfrm>
+            <a:off x="685800" y="5303520"/>
+            <a:ext cx="457200" cy="457200"/>
+          </a:xfrm>
+          <a:prstGeom prst="rect">
+            <a:avLst/>
+          </a:prstGeom>
+          <a:noFill/>
+        </p:spPr>
+        <p:txBody>
+          <a:bodyPr wrap="square">
+            <a:spAutoFit/>
+          </a:bodyPr>
           <a:lstStyle/>
           <a:p>
             <a:pPr algn="ctr">
-              <a:spcBef>
-                <a:spcPts val="0"/>
-              </a:spcBef>
-              <a:spcAft>
-                <a:spcPts val="0"/>
-              </a:spcAft>
               <a:defRPr sz="1400" b="1">
                 <a:solidFill>
                   <a:srgbClr val="FFFFFF"/>
@@ -4440,14 +5406,14 @@
       </p:sp>
       <p:sp>
         <p:nvSpPr>
-          <p:cNvPr id="23" name="TextBox 22"/>
+          <p:cNvPr id="45" name="TextBox 44"/>
           <p:cNvSpPr txBox="1"/>
           <p:nvPr/>
         </p:nvSpPr>
         <p:spPr>
           <a:xfrm>
-            <a:off x="6858000" y="1371600"/>
-            <a:ext cx="4572000" cy="457200"/>
+            <a:off x="1280160" y="5257800"/>
+            <a:ext cx="2468880" cy="640080"/>
           </a:xfrm>
           <a:prstGeom prst="rect">
             <a:avLst/>
@@ -4461,9 +5427,9 @@
           <a:lstStyle/>
           <a:p>
             <a:pPr algn="l">
-              <a:defRPr sz="1600" b="0">
+              <a:defRPr sz="1300" b="0">
                 <a:solidFill>
-                  <a:srgbClr val="B0BCD4"/>
+                  <a:srgbClr val="CBD5E8"/>
                 </a:solidFill>
                 <a:latin typeface="Microsoft YaHei"/>
               </a:defRPr>
@@ -4476,23 +5442,25 @@
       </p:sp>
       <p:sp>
         <p:nvSpPr>
-          <p:cNvPr id="24" name="Oval 23"/>
+          <p:cNvPr id="46" name="Rounded Rectangle 45"/>
           <p:cNvSpPr/>
           <p:nvPr/>
         </p:nvSpPr>
         <p:spPr>
           <a:xfrm>
-            <a:off x="6217920" y="2011680"/>
-            <a:ext cx="457200" cy="457200"/>
-          </a:xfrm>
-          <a:prstGeom prst="ellipse">
-            <a:avLst/>
-          </a:prstGeom>
-          <a:solidFill>
-            <a:srgbClr val="7C3AED"/>
-          </a:solidFill>
-          <a:ln>
-            <a:noFill/>
+            <a:off x="4251960" y="5074920"/>
+            <a:ext cx="3383280" cy="1005840"/>
+          </a:xfrm>
+          <a:prstGeom prst="roundRect">
+            <a:avLst/>
+          </a:prstGeom>
+          <a:solidFill>
+            <a:srgbClr val="141E33"/>
+          </a:solidFill>
+          <a:ln w="19050">
+            <a:solidFill>
+              <a:srgbClr val="00D4FF"/>
+            </a:solidFill>
           </a:ln>
         </p:spPr>
         <p:style>
@@ -4510,16 +5478,79 @@
           </a:fontRef>
         </p:style>
         <p:txBody>
-          <a:bodyPr rtlCol="0" anchor="ctr" wrap="none"/>
+          <a:bodyPr rtlCol="0" anchor="ctr"/>
+          <a:lstStyle/>
+          <a:p>
+            <a:pPr algn="ctr"/>
+          </a:p>
+        </p:txBody>
+      </p:sp>
+      <p:sp>
+        <p:nvSpPr>
+          <p:cNvPr id="47" name="Oval 46"/>
+          <p:cNvSpPr/>
+          <p:nvPr/>
+        </p:nvSpPr>
+        <p:spPr>
+          <a:xfrm>
+            <a:off x="4389120" y="5303520"/>
+            <a:ext cx="457200" cy="457200"/>
+          </a:xfrm>
+          <a:prstGeom prst="ellipse">
+            <a:avLst/>
+          </a:prstGeom>
+          <a:solidFill>
+            <a:srgbClr val="00D4FF"/>
+          </a:solidFill>
+          <a:ln>
+            <a:noFill/>
+          </a:ln>
+        </p:spPr>
+        <p:style>
+          <a:lnRef idx="1">
+            <a:schemeClr val="accent1"/>
+          </a:lnRef>
+          <a:fillRef idx="3">
+            <a:schemeClr val="accent1"/>
+          </a:fillRef>
+          <a:effectRef idx="2">
+            <a:schemeClr val="accent1"/>
+          </a:effectRef>
+          <a:fontRef idx="minor">
+            <a:schemeClr val="lt1"/>
+          </a:fontRef>
+        </p:style>
+        <p:txBody>
+          <a:bodyPr rtlCol="0" anchor="ctr"/>
+          <a:lstStyle/>
+          <a:p>
+            <a:pPr algn="ctr"/>
+          </a:p>
+        </p:txBody>
+      </p:sp>
+      <p:sp>
+        <p:nvSpPr>
+          <p:cNvPr id="48" name="TextBox 47"/>
+          <p:cNvSpPr txBox="1"/>
+          <p:nvPr/>
+        </p:nvSpPr>
+        <p:spPr>
+          <a:xfrm>
+            <a:off x="4389120" y="5303520"/>
+            <a:ext cx="457200" cy="457200"/>
+          </a:xfrm>
+          <a:prstGeom prst="rect">
+            <a:avLst/>
+          </a:prstGeom>
+          <a:noFill/>
+        </p:spPr>
+        <p:txBody>
+          <a:bodyPr wrap="square">
+            <a:spAutoFit/>
+          </a:bodyPr>
           <a:lstStyle/>
           <a:p>
             <a:pPr algn="ctr">
-              <a:spcBef>
-                <a:spcPts val="0"/>
-              </a:spcBef>
-              <a:spcAft>
-                <a:spcPts val="0"/>
-              </a:spcAft>
               <a:defRPr sz="1400" b="1">
                 <a:solidFill>
                   <a:srgbClr val="FFFFFF"/>
@@ -4535,14 +5566,14 @@
       </p:sp>
       <p:sp>
         <p:nvSpPr>
-          <p:cNvPr id="25" name="TextBox 24"/>
+          <p:cNvPr id="49" name="TextBox 48"/>
           <p:cNvSpPr txBox="1"/>
           <p:nvPr/>
         </p:nvSpPr>
         <p:spPr>
           <a:xfrm>
-            <a:off x="6858000" y="2011680"/>
-            <a:ext cx="4572000" cy="457200"/>
+            <a:off x="4983480" y="5257800"/>
+            <a:ext cx="2468880" cy="640080"/>
           </a:xfrm>
           <a:prstGeom prst="rect">
             <a:avLst/>
@@ -4556,9 +5587,9 @@
           <a:lstStyle/>
           <a:p>
             <a:pPr algn="l">
-              <a:defRPr sz="1600" b="0">
+              <a:defRPr sz="1300" b="0">
                 <a:solidFill>
-                  <a:srgbClr val="B0BCD4"/>
+                  <a:srgbClr val="CBD5E8"/>
                 </a:solidFill>
                 <a:latin typeface="Microsoft YaHei"/>
               </a:defRPr>
@@ -4571,23 +5602,25 @@
       </p:sp>
       <p:sp>
         <p:nvSpPr>
-          <p:cNvPr id="26" name="Oval 25"/>
+          <p:cNvPr id="50" name="Rounded Rectangle 49"/>
           <p:cNvSpPr/>
           <p:nvPr/>
         </p:nvSpPr>
         <p:spPr>
           <a:xfrm>
-            <a:off x="6217920" y="2651760"/>
-            <a:ext cx="457200" cy="457200"/>
-          </a:xfrm>
-          <a:prstGeom prst="ellipse">
-            <a:avLst/>
-          </a:prstGeom>
-          <a:solidFill>
-            <a:srgbClr val="7C3AED"/>
-          </a:solidFill>
-          <a:ln>
-            <a:noFill/>
+            <a:off x="7955280" y="5074920"/>
+            <a:ext cx="3383280" cy="1005840"/>
+          </a:xfrm>
+          <a:prstGeom prst="roundRect">
+            <a:avLst/>
+          </a:prstGeom>
+          <a:solidFill>
+            <a:srgbClr val="141E33"/>
+          </a:solidFill>
+          <a:ln w="19050">
+            <a:solidFill>
+              <a:srgbClr val="00D4FF"/>
+            </a:solidFill>
           </a:ln>
         </p:spPr>
         <p:style>
@@ -4605,16 +5638,79 @@
           </a:fontRef>
         </p:style>
         <p:txBody>
-          <a:bodyPr rtlCol="0" anchor="ctr" wrap="none"/>
+          <a:bodyPr rtlCol="0" anchor="ctr"/>
+          <a:lstStyle/>
+          <a:p>
+            <a:pPr algn="ctr"/>
+          </a:p>
+        </p:txBody>
+      </p:sp>
+      <p:sp>
+        <p:nvSpPr>
+          <p:cNvPr id="51" name="Oval 50"/>
+          <p:cNvSpPr/>
+          <p:nvPr/>
+        </p:nvSpPr>
+        <p:spPr>
+          <a:xfrm>
+            <a:off x="8092440" y="5303520"/>
+            <a:ext cx="457200" cy="457200"/>
+          </a:xfrm>
+          <a:prstGeom prst="ellipse">
+            <a:avLst/>
+          </a:prstGeom>
+          <a:solidFill>
+            <a:srgbClr val="00D4FF"/>
+          </a:solidFill>
+          <a:ln>
+            <a:noFill/>
+          </a:ln>
+        </p:spPr>
+        <p:style>
+          <a:lnRef idx="1">
+            <a:schemeClr val="accent1"/>
+          </a:lnRef>
+          <a:fillRef idx="3">
+            <a:schemeClr val="accent1"/>
+          </a:fillRef>
+          <a:effectRef idx="2">
+            <a:schemeClr val="accent1"/>
+          </a:effectRef>
+          <a:fontRef idx="minor">
+            <a:schemeClr val="lt1"/>
+          </a:fontRef>
+        </p:style>
+        <p:txBody>
+          <a:bodyPr rtlCol="0" anchor="ctr"/>
+          <a:lstStyle/>
+          <a:p>
+            <a:pPr algn="ctr"/>
+          </a:p>
+        </p:txBody>
+      </p:sp>
+      <p:sp>
+        <p:nvSpPr>
+          <p:cNvPr id="52" name="TextBox 51"/>
+          <p:cNvSpPr txBox="1"/>
+          <p:nvPr/>
+        </p:nvSpPr>
+        <p:spPr>
+          <a:xfrm>
+            <a:off x="8092440" y="5303520"/>
+            <a:ext cx="457200" cy="457200"/>
+          </a:xfrm>
+          <a:prstGeom prst="rect">
+            <a:avLst/>
+          </a:prstGeom>
+          <a:noFill/>
+        </p:spPr>
+        <p:txBody>
+          <a:bodyPr wrap="square">
+            <a:spAutoFit/>
+          </a:bodyPr>
           <a:lstStyle/>
           <a:p>
             <a:pPr algn="ctr">
-              <a:spcBef>
-                <a:spcPts val="0"/>
-              </a:spcBef>
-              <a:spcAft>
-                <a:spcPts val="0"/>
-              </a:spcAft>
               <a:defRPr sz="1400" b="1">
                 <a:solidFill>
                   <a:srgbClr val="FFFFFF"/>
@@ -4630,14 +5726,14 @@
       </p:sp>
       <p:sp>
         <p:nvSpPr>
-          <p:cNvPr id="27" name="TextBox 26"/>
+          <p:cNvPr id="53" name="TextBox 52"/>
           <p:cNvSpPr txBox="1"/>
           <p:nvPr/>
         </p:nvSpPr>
         <p:spPr>
           <a:xfrm>
-            <a:off x="6858000" y="2651760"/>
-            <a:ext cx="4572000" cy="457200"/>
+            <a:off x="8686800" y="5257800"/>
+            <a:ext cx="2468880" cy="640080"/>
           </a:xfrm>
           <a:prstGeom prst="rect">
             <a:avLst/>
@@ -4651,9 +5747,9 @@
           <a:lstStyle/>
           <a:p>
             <a:pPr algn="l">
-              <a:defRPr sz="1600" b="0">
+              <a:defRPr sz="1300" b="0">
                 <a:solidFill>
-                  <a:srgbClr val="B0BCD4"/>
+                  <a:srgbClr val="CBD5E8"/>
                 </a:solidFill>
                 <a:latin typeface="Microsoft YaHei"/>
               </a:defRPr>
@@ -4666,20 +5762,20 @@
       </p:sp>
       <p:sp>
         <p:nvSpPr>
-          <p:cNvPr id="28" name="Oval 27"/>
+          <p:cNvPr id="54" name="Rectangle 53"/>
           <p:cNvSpPr/>
           <p:nvPr/>
         </p:nvSpPr>
         <p:spPr>
           <a:xfrm>
-            <a:off x="6217920" y="3291839"/>
-            <a:ext cx="457200" cy="457200"/>
-          </a:xfrm>
-          <a:prstGeom prst="ellipse">
-            <a:avLst/>
-          </a:prstGeom>
-          <a:solidFill>
-            <a:srgbClr val="7C3AED"/>
+            <a:off x="0" y="6446520"/>
+            <a:ext cx="12191695" cy="19050"/>
+          </a:xfrm>
+          <a:prstGeom prst="rect">
+            <a:avLst/>
+          </a:prstGeom>
+          <a:solidFill>
+            <a:srgbClr val="2D3B55"/>
           </a:solidFill>
           <a:ln>
             <a:noFill/>
@@ -4700,39 +5796,23 @@
           </a:fontRef>
         </p:style>
         <p:txBody>
-          <a:bodyPr rtlCol="0" anchor="ctr" wrap="none"/>
-          <a:lstStyle/>
-          <a:p>
-            <a:pPr algn="ctr">
-              <a:spcBef>
-                <a:spcPts val="0"/>
-              </a:spcBef>
-              <a:spcAft>
-                <a:spcPts val="0"/>
-              </a:spcAft>
-              <a:defRPr sz="1400" b="1">
-                <a:solidFill>
-                  <a:srgbClr val="FFFFFF"/>
-                </a:solidFill>
-                <a:latin typeface="Microsoft YaHei"/>
-              </a:defRPr>
-            </a:pPr>
-            <a:r>
-              <a:t>13</a:t>
-            </a:r>
-          </a:p>
-        </p:txBody>
-      </p:sp>
-      <p:sp>
-        <p:nvSpPr>
-          <p:cNvPr id="29" name="TextBox 28"/>
+          <a:bodyPr rtlCol="0" anchor="ctr"/>
+          <a:lstStyle/>
+          <a:p>
+            <a:pPr algn="ctr"/>
+          </a:p>
+        </p:txBody>
+      </p:sp>
+      <p:sp>
+        <p:nvSpPr>
+          <p:cNvPr id="55" name="TextBox 54"/>
           <p:cNvSpPr txBox="1"/>
           <p:nvPr/>
         </p:nvSpPr>
         <p:spPr>
           <a:xfrm>
-            <a:off x="6858000" y="3291839"/>
-            <a:ext cx="4572000" cy="457200"/>
+            <a:off x="457200" y="6492240"/>
+            <a:ext cx="5486400" cy="274320"/>
           </a:xfrm>
           <a:prstGeom prst="rect">
             <a:avLst/>
@@ -4746,466 +5826,7 @@
           <a:lstStyle/>
           <a:p>
             <a:pPr algn="l">
-              <a:defRPr sz="1600" b="0">
-                <a:solidFill>
-                  <a:srgbClr val="B0BCD4"/>
-                </a:solidFill>
-                <a:latin typeface="Microsoft YaHei"/>
-              </a:defRPr>
-            </a:pPr>
-            <a:r>
-              <a:t>ComfyUI工作流</a:t>
-            </a:r>
-          </a:p>
-        </p:txBody>
-      </p:sp>
-      <p:sp>
-        <p:nvSpPr>
-          <p:cNvPr id="30" name="Oval 29"/>
-          <p:cNvSpPr/>
-          <p:nvPr/>
-        </p:nvSpPr>
-        <p:spPr>
-          <a:xfrm>
-            <a:off x="6217920" y="3931920"/>
-            <a:ext cx="457200" cy="457200"/>
-          </a:xfrm>
-          <a:prstGeom prst="ellipse">
-            <a:avLst/>
-          </a:prstGeom>
-          <a:solidFill>
-            <a:srgbClr val="7C3AED"/>
-          </a:solidFill>
-          <a:ln>
-            <a:noFill/>
-          </a:ln>
-        </p:spPr>
-        <p:style>
-          <a:lnRef idx="1">
-            <a:schemeClr val="accent1"/>
-          </a:lnRef>
-          <a:fillRef idx="3">
-            <a:schemeClr val="accent1"/>
-          </a:fillRef>
-          <a:effectRef idx="2">
-            <a:schemeClr val="accent1"/>
-          </a:effectRef>
-          <a:fontRef idx="minor">
-            <a:schemeClr val="lt1"/>
-          </a:fontRef>
-        </p:style>
-        <p:txBody>
-          <a:bodyPr rtlCol="0" anchor="ctr" wrap="none"/>
-          <a:lstStyle/>
-          <a:p>
-            <a:pPr algn="ctr">
-              <a:spcBef>
-                <a:spcPts val="0"/>
-              </a:spcBef>
-              <a:spcAft>
-                <a:spcPts val="0"/>
-              </a:spcAft>
-              <a:defRPr sz="1400" b="1">
-                <a:solidFill>
-                  <a:srgbClr val="FFFFFF"/>
-                </a:solidFill>
-                <a:latin typeface="Microsoft YaHei"/>
-              </a:defRPr>
-            </a:pPr>
-            <a:r>
-              <a:t>14</a:t>
-            </a:r>
-          </a:p>
-        </p:txBody>
-      </p:sp>
-      <p:sp>
-        <p:nvSpPr>
-          <p:cNvPr id="31" name="TextBox 30"/>
-          <p:cNvSpPr txBox="1"/>
-          <p:nvPr/>
-        </p:nvSpPr>
-        <p:spPr>
-          <a:xfrm>
-            <a:off x="6858000" y="3931920"/>
-            <a:ext cx="4572000" cy="457200"/>
-          </a:xfrm>
-          <a:prstGeom prst="rect">
-            <a:avLst/>
-          </a:prstGeom>
-          <a:noFill/>
-        </p:spPr>
-        <p:txBody>
-          <a:bodyPr wrap="square">
-            <a:spAutoFit/>
-          </a:bodyPr>
-          <a:lstStyle/>
-          <a:p>
-            <a:pPr algn="l">
-              <a:defRPr sz="1600" b="0">
-                <a:solidFill>
-                  <a:srgbClr val="B0BCD4"/>
-                </a:solidFill>
-                <a:latin typeface="Microsoft YaHei"/>
-              </a:defRPr>
-            </a:pPr>
-            <a:r>
-              <a:t>工业化生产与团队协作</a:t>
-            </a:r>
-          </a:p>
-        </p:txBody>
-      </p:sp>
-      <p:sp>
-        <p:nvSpPr>
-          <p:cNvPr id="32" name="Oval 31"/>
-          <p:cNvSpPr/>
-          <p:nvPr/>
-        </p:nvSpPr>
-        <p:spPr>
-          <a:xfrm>
-            <a:off x="6217920" y="4572000"/>
-            <a:ext cx="457200" cy="457200"/>
-          </a:xfrm>
-          <a:prstGeom prst="ellipse">
-            <a:avLst/>
-          </a:prstGeom>
-          <a:solidFill>
-            <a:srgbClr val="7C3AED"/>
-          </a:solidFill>
-          <a:ln>
-            <a:noFill/>
-          </a:ln>
-        </p:spPr>
-        <p:style>
-          <a:lnRef idx="1">
-            <a:schemeClr val="accent1"/>
-          </a:lnRef>
-          <a:fillRef idx="3">
-            <a:schemeClr val="accent1"/>
-          </a:fillRef>
-          <a:effectRef idx="2">
-            <a:schemeClr val="accent1"/>
-          </a:effectRef>
-          <a:fontRef idx="minor">
-            <a:schemeClr val="lt1"/>
-          </a:fontRef>
-        </p:style>
-        <p:txBody>
-          <a:bodyPr rtlCol="0" anchor="ctr" wrap="none"/>
-          <a:lstStyle/>
-          <a:p>
-            <a:pPr algn="ctr">
-              <a:spcBef>
-                <a:spcPts val="0"/>
-              </a:spcBef>
-              <a:spcAft>
-                <a:spcPts val="0"/>
-              </a:spcAft>
-              <a:defRPr sz="1400" b="1">
-                <a:solidFill>
-                  <a:srgbClr val="FFFFFF"/>
-                </a:solidFill>
-                <a:latin typeface="Microsoft YaHei"/>
-              </a:defRPr>
-            </a:pPr>
-            <a:r>
-              <a:t>15</a:t>
-            </a:r>
-          </a:p>
-        </p:txBody>
-      </p:sp>
-      <p:sp>
-        <p:nvSpPr>
-          <p:cNvPr id="33" name="TextBox 32"/>
-          <p:cNvSpPr txBox="1"/>
-          <p:nvPr/>
-        </p:nvSpPr>
-        <p:spPr>
-          <a:xfrm>
-            <a:off x="6858000" y="4572000"/>
-            <a:ext cx="4572000" cy="457200"/>
-          </a:xfrm>
-          <a:prstGeom prst="rect">
-            <a:avLst/>
-          </a:prstGeom>
-          <a:noFill/>
-        </p:spPr>
-        <p:txBody>
-          <a:bodyPr wrap="square">
-            <a:spAutoFit/>
-          </a:bodyPr>
-          <a:lstStyle/>
-          <a:p>
-            <a:pPr algn="l">
-              <a:defRPr sz="1600" b="0">
-                <a:solidFill>
-                  <a:srgbClr val="B0BCD4"/>
-                </a:solidFill>
-                <a:latin typeface="Microsoft YaHei"/>
-              </a:defRPr>
-            </a:pPr>
-            <a:r>
-              <a:t>平台分发与商业变现</a:t>
-            </a:r>
-          </a:p>
-        </p:txBody>
-      </p:sp>
-      <p:sp>
-        <p:nvSpPr>
-          <p:cNvPr id="34" name="Oval 33"/>
-          <p:cNvSpPr/>
-          <p:nvPr/>
-        </p:nvSpPr>
-        <p:spPr>
-          <a:xfrm>
-            <a:off x="6217920" y="5212079"/>
-            <a:ext cx="457200" cy="457200"/>
-          </a:xfrm>
-          <a:prstGeom prst="ellipse">
-            <a:avLst/>
-          </a:prstGeom>
-          <a:solidFill>
-            <a:srgbClr val="7C3AED"/>
-          </a:solidFill>
-          <a:ln>
-            <a:noFill/>
-          </a:ln>
-        </p:spPr>
-        <p:style>
-          <a:lnRef idx="1">
-            <a:schemeClr val="accent1"/>
-          </a:lnRef>
-          <a:fillRef idx="3">
-            <a:schemeClr val="accent1"/>
-          </a:fillRef>
-          <a:effectRef idx="2">
-            <a:schemeClr val="accent1"/>
-          </a:effectRef>
-          <a:fontRef idx="minor">
-            <a:schemeClr val="lt1"/>
-          </a:fontRef>
-        </p:style>
-        <p:txBody>
-          <a:bodyPr rtlCol="0" anchor="ctr" wrap="none"/>
-          <a:lstStyle/>
-          <a:p>
-            <a:pPr algn="ctr">
-              <a:spcBef>
-                <a:spcPts val="0"/>
-              </a:spcBef>
-              <a:spcAft>
-                <a:spcPts val="0"/>
-              </a:spcAft>
-              <a:defRPr sz="1400" b="1">
-                <a:solidFill>
-                  <a:srgbClr val="FFFFFF"/>
-                </a:solidFill>
-                <a:latin typeface="Microsoft YaHei"/>
-              </a:defRPr>
-            </a:pPr>
-            <a:r>
-              <a:t>16</a:t>
-            </a:r>
-          </a:p>
-        </p:txBody>
-      </p:sp>
-      <p:sp>
-        <p:nvSpPr>
-          <p:cNvPr id="35" name="TextBox 34"/>
-          <p:cNvSpPr txBox="1"/>
-          <p:nvPr/>
-        </p:nvSpPr>
-        <p:spPr>
-          <a:xfrm>
-            <a:off x="6858000" y="5212079"/>
-            <a:ext cx="4572000" cy="457200"/>
-          </a:xfrm>
-          <a:prstGeom prst="rect">
-            <a:avLst/>
-          </a:prstGeom>
-          <a:noFill/>
-        </p:spPr>
-        <p:txBody>
-          <a:bodyPr wrap="square">
-            <a:spAutoFit/>
-          </a:bodyPr>
-          <a:lstStyle/>
-          <a:p>
-            <a:pPr algn="l">
-              <a:defRPr sz="1600" b="0">
-                <a:solidFill>
-                  <a:srgbClr val="B0BCD4"/>
-                </a:solidFill>
-                <a:latin typeface="Microsoft YaHei"/>
-              </a:defRPr>
-            </a:pPr>
-            <a:r>
-              <a:t>合规要求与行业规范</a:t>
-            </a:r>
-          </a:p>
-        </p:txBody>
-      </p:sp>
-      <p:sp>
-        <p:nvSpPr>
-          <p:cNvPr id="36" name="Oval 35"/>
-          <p:cNvSpPr/>
-          <p:nvPr/>
-        </p:nvSpPr>
-        <p:spPr>
-          <a:xfrm>
-            <a:off x="6217920" y="5852159"/>
-            <a:ext cx="457200" cy="457200"/>
-          </a:xfrm>
-          <a:prstGeom prst="ellipse">
-            <a:avLst/>
-          </a:prstGeom>
-          <a:solidFill>
-            <a:srgbClr val="7C3AED"/>
-          </a:solidFill>
-          <a:ln>
-            <a:noFill/>
-          </a:ln>
-        </p:spPr>
-        <p:style>
-          <a:lnRef idx="1">
-            <a:schemeClr val="accent1"/>
-          </a:lnRef>
-          <a:fillRef idx="3">
-            <a:schemeClr val="accent1"/>
-          </a:fillRef>
-          <a:effectRef idx="2">
-            <a:schemeClr val="accent1"/>
-          </a:effectRef>
-          <a:fontRef idx="minor">
-            <a:schemeClr val="lt1"/>
-          </a:fontRef>
-        </p:style>
-        <p:txBody>
-          <a:bodyPr rtlCol="0" anchor="ctr" wrap="none"/>
-          <a:lstStyle/>
-          <a:p>
-            <a:pPr algn="ctr">
-              <a:spcBef>
-                <a:spcPts val="0"/>
-              </a:spcBef>
-              <a:spcAft>
-                <a:spcPts val="0"/>
-              </a:spcAft>
-              <a:defRPr sz="1400" b="1">
-                <a:solidFill>
-                  <a:srgbClr val="FFFFFF"/>
-                </a:solidFill>
-                <a:latin typeface="Microsoft YaHei"/>
-              </a:defRPr>
-            </a:pPr>
-            <a:r>
-              <a:t>17</a:t>
-            </a:r>
-          </a:p>
-        </p:txBody>
-      </p:sp>
-      <p:sp>
-        <p:nvSpPr>
-          <p:cNvPr id="37" name="TextBox 36"/>
-          <p:cNvSpPr txBox="1"/>
-          <p:nvPr/>
-        </p:nvSpPr>
-        <p:spPr>
-          <a:xfrm>
-            <a:off x="6858000" y="5852159"/>
-            <a:ext cx="4572000" cy="457200"/>
-          </a:xfrm>
-          <a:prstGeom prst="rect">
-            <a:avLst/>
-          </a:prstGeom>
-          <a:noFill/>
-        </p:spPr>
-        <p:txBody>
-          <a:bodyPr wrap="square">
-            <a:spAutoFit/>
-          </a:bodyPr>
-          <a:lstStyle/>
-          <a:p>
-            <a:pPr algn="l">
-              <a:defRPr sz="1600" b="0">
-                <a:solidFill>
-                  <a:srgbClr val="B0BCD4"/>
-                </a:solidFill>
-                <a:latin typeface="Microsoft YaHei"/>
-              </a:defRPr>
-            </a:pPr>
-            <a:r>
-              <a:t>综合实战项目</a:t>
-            </a:r>
-          </a:p>
-        </p:txBody>
-      </p:sp>
-      <p:sp>
-        <p:nvSpPr>
-          <p:cNvPr id="38" name="Rectangle 37"/>
-          <p:cNvSpPr/>
-          <p:nvPr/>
-        </p:nvSpPr>
-        <p:spPr>
-          <a:xfrm>
-            <a:off x="0" y="6492240"/>
-            <a:ext cx="12191695" cy="25400"/>
-          </a:xfrm>
-          <a:prstGeom prst="rect">
-            <a:avLst/>
-          </a:prstGeom>
-          <a:solidFill>
-            <a:srgbClr val="2D3B55"/>
-          </a:solidFill>
-          <a:ln>
-            <a:noFill/>
-          </a:ln>
-        </p:spPr>
-        <p:style>
-          <a:lnRef idx="1">
-            <a:schemeClr val="accent1"/>
-          </a:lnRef>
-          <a:fillRef idx="3">
-            <a:schemeClr val="accent1"/>
-          </a:fillRef>
-          <a:effectRef idx="2">
-            <a:schemeClr val="accent1"/>
-          </a:effectRef>
-          <a:fontRef idx="minor">
-            <a:schemeClr val="lt1"/>
-          </a:fontRef>
-        </p:style>
-        <p:txBody>
-          <a:bodyPr rtlCol="0" anchor="ctr"/>
-          <a:lstStyle/>
-          <a:p>
-            <a:pPr algn="ctr"/>
-          </a:p>
-        </p:txBody>
-      </p:sp>
-      <p:sp>
-        <p:nvSpPr>
-          <p:cNvPr id="39" name="TextBox 38"/>
-          <p:cNvSpPr txBox="1"/>
-          <p:nvPr/>
-        </p:nvSpPr>
-        <p:spPr>
-          <a:xfrm>
-            <a:off x="457200" y="6537960"/>
-            <a:ext cx="5486400" cy="274320"/>
-          </a:xfrm>
-          <a:prstGeom prst="rect">
-            <a:avLst/>
-          </a:prstGeom>
-          <a:noFill/>
-        </p:spPr>
-        <p:txBody>
-          <a:bodyPr wrap="square">
-            <a:spAutoFit/>
-          </a:bodyPr>
-          <a:lstStyle/>
-          <a:p>
-            <a:pPr algn="l">
-              <a:defRPr sz="1000" b="0">
+              <a:defRPr sz="900" b="0">
                 <a:solidFill>
                   <a:srgbClr val="6B7B9E"/>
                 </a:solidFill>
@@ -5220,13 +5841,13 @@
       </p:sp>
       <p:sp>
         <p:nvSpPr>
-          <p:cNvPr id="40" name="TextBox 39"/>
+          <p:cNvPr id="56" name="TextBox 55"/>
           <p:cNvSpPr txBox="1"/>
           <p:nvPr/>
         </p:nvSpPr>
         <p:spPr>
           <a:xfrm>
-            <a:off x="10515600" y="6537960"/>
+            <a:off x="10515600" y="6492240"/>
             <a:ext cx="1371600" cy="274320"/>
           </a:xfrm>
           <a:prstGeom prst="rect">
@@ -5241,7 +5862,7 @@
           <a:lstStyle/>
           <a:p>
             <a:pPr algn="r">
-              <a:defRPr sz="1000" b="0">
+              <a:defRPr sz="900" b="0">
                 <a:solidFill>
                   <a:srgbClr val="6B7B9E"/>
                 </a:solidFill>
@@ -5268,7 +5889,7 @@
     <p:bg>
       <p:bgPr>
         <a:solidFill>
-          <a:srgbClr val="0F172A"/>
+          <a:srgbClr val="0B1120"/>
         </a:solidFill>
         <a:effectLst/>
       </p:bgPr>
@@ -5282,14 +5903,100 @@
       <p:grpSpPr/>
       <p:sp>
         <p:nvSpPr>
-          <p:cNvPr id="2" name="TextBox 1"/>
+          <p:cNvPr id="2" name="Rectangle 1"/>
+          <p:cNvSpPr/>
+          <p:nvPr/>
+        </p:nvSpPr>
+        <p:spPr>
+          <a:xfrm>
+            <a:off x="0" y="0"/>
+            <a:ext cx="12191695" cy="1051560"/>
+          </a:xfrm>
+          <a:prstGeom prst="rect">
+            <a:avLst/>
+          </a:prstGeom>
+          <a:solidFill>
+            <a:srgbClr val="141E33"/>
+          </a:solidFill>
+          <a:ln>
+            <a:noFill/>
+          </a:ln>
+        </p:spPr>
+        <p:style>
+          <a:lnRef idx="1">
+            <a:schemeClr val="accent1"/>
+          </a:lnRef>
+          <a:fillRef idx="3">
+            <a:schemeClr val="accent1"/>
+          </a:fillRef>
+          <a:effectRef idx="2">
+            <a:schemeClr val="accent1"/>
+          </a:effectRef>
+          <a:fontRef idx="minor">
+            <a:schemeClr val="lt1"/>
+          </a:fontRef>
+        </p:style>
+        <p:txBody>
+          <a:bodyPr rtlCol="0" anchor="ctr"/>
+          <a:lstStyle/>
+          <a:p>
+            <a:pPr algn="ctr"/>
+          </a:p>
+        </p:txBody>
+      </p:sp>
+      <p:sp>
+        <p:nvSpPr>
+          <p:cNvPr id="3" name="Rectangle 2"/>
+          <p:cNvSpPr/>
+          <p:nvPr/>
+        </p:nvSpPr>
+        <p:spPr>
+          <a:xfrm>
+            <a:off x="0" y="0"/>
+            <a:ext cx="109728" cy="1051560"/>
+          </a:xfrm>
+          <a:prstGeom prst="rect">
+            <a:avLst/>
+          </a:prstGeom>
+          <a:solidFill>
+            <a:srgbClr val="00D4FF"/>
+          </a:solidFill>
+          <a:ln>
+            <a:noFill/>
+          </a:ln>
+        </p:spPr>
+        <p:style>
+          <a:lnRef idx="1">
+            <a:schemeClr val="accent1"/>
+          </a:lnRef>
+          <a:fillRef idx="3">
+            <a:schemeClr val="accent1"/>
+          </a:fillRef>
+          <a:effectRef idx="2">
+            <a:schemeClr val="accent1"/>
+          </a:effectRef>
+          <a:fontRef idx="minor">
+            <a:schemeClr val="lt1"/>
+          </a:fontRef>
+        </p:style>
+        <p:txBody>
+          <a:bodyPr rtlCol="0" anchor="ctr"/>
+          <a:lstStyle/>
+          <a:p>
+            <a:pPr algn="ctr"/>
+          </a:p>
+        </p:txBody>
+      </p:sp>
+      <p:sp>
+        <p:nvSpPr>
+          <p:cNvPr id="4" name="TextBox 3"/>
           <p:cNvSpPr txBox="1"/>
           <p:nvPr/>
         </p:nvSpPr>
         <p:spPr>
           <a:xfrm>
-            <a:off x="731520" y="365760"/>
-            <a:ext cx="10058400" cy="548640"/>
+            <a:off x="548640" y="182880"/>
+            <a:ext cx="10058400" cy="640080"/>
           </a:xfrm>
           <a:prstGeom prst="rect">
             <a:avLst/>
@@ -5318,14 +6025,14 @@
       </p:sp>
       <p:sp>
         <p:nvSpPr>
-          <p:cNvPr id="3" name="Rectangle 2"/>
+          <p:cNvPr id="5" name="Rectangle 4"/>
           <p:cNvSpPr/>
           <p:nvPr/>
         </p:nvSpPr>
         <p:spPr>
           <a:xfrm>
-            <a:off x="731520" y="1005840"/>
-            <a:ext cx="1828800" cy="38100"/>
+            <a:off x="0" y="1051560"/>
+            <a:ext cx="12191695" cy="25400"/>
           </a:xfrm>
           <a:prstGeom prst="rect">
             <a:avLst/>
@@ -5361,20 +6068,20 @@
       </p:sp>
       <p:sp>
         <p:nvSpPr>
-          <p:cNvPr id="4" name="Rectangle 3"/>
+          <p:cNvPr id="6" name="Rounded Rectangle 5"/>
           <p:cNvSpPr/>
           <p:nvPr/>
         </p:nvSpPr>
         <p:spPr>
           <a:xfrm>
-            <a:off x="731520" y="1435100"/>
-            <a:ext cx="101600" cy="101600"/>
-          </a:xfrm>
-          <a:prstGeom prst="rect">
-            <a:avLst/>
-          </a:prstGeom>
-          <a:solidFill>
-            <a:srgbClr val="00D4FF"/>
+            <a:off x="457200" y="1325880"/>
+            <a:ext cx="11247120" cy="731520"/>
+          </a:xfrm>
+          <a:prstGeom prst="roundRect">
+            <a:avLst/>
+          </a:prstGeom>
+          <a:solidFill>
+            <a:srgbClr val="141E33"/>
           </a:solidFill>
           <a:ln>
             <a:noFill/>
@@ -5404,50 +6111,14 @@
       </p:sp>
       <p:sp>
         <p:nvSpPr>
-          <p:cNvPr id="5" name="TextBox 4"/>
-          <p:cNvSpPr txBox="1"/>
-          <p:nvPr/>
-        </p:nvSpPr>
-        <p:spPr>
-          <a:xfrm>
-            <a:off x="1097280" y="1371600"/>
-            <a:ext cx="10058400" cy="640080"/>
-          </a:xfrm>
-          <a:prstGeom prst="rect">
-            <a:avLst/>
-          </a:prstGeom>
-          <a:noFill/>
-        </p:spPr>
-        <p:txBody>
-          <a:bodyPr wrap="square">
-            <a:spAutoFit/>
-          </a:bodyPr>
-          <a:lstStyle/>
-          <a:p>
-            <a:pPr algn="l">
-              <a:defRPr sz="1600" b="0">
-                <a:solidFill>
-                  <a:srgbClr val="B0BCD4"/>
-                </a:solidFill>
-                <a:latin typeface="Microsoft YaHei"/>
-              </a:defRPr>
-            </a:pPr>
-            <a:r>
-              <a:t>掌握AI漫剧从剧本到成片的完整制作流程</a:t>
-            </a:r>
-          </a:p>
-        </p:txBody>
-      </p:sp>
-      <p:sp>
-        <p:nvSpPr>
-          <p:cNvPr id="6" name="Rectangle 5"/>
+          <p:cNvPr id="7" name="Rectangle 6"/>
           <p:cNvSpPr/>
           <p:nvPr/>
         </p:nvSpPr>
         <p:spPr>
           <a:xfrm>
-            <a:off x="731520" y="2212340"/>
-            <a:ext cx="101600" cy="101600"/>
+            <a:off x="457200" y="1325880"/>
+            <a:ext cx="73152" cy="731520"/>
           </a:xfrm>
           <a:prstGeom prst="rect">
             <a:avLst/>
@@ -5483,52 +6154,16 @@
       </p:sp>
       <p:sp>
         <p:nvSpPr>
-          <p:cNvPr id="7" name="TextBox 6"/>
-          <p:cNvSpPr txBox="1"/>
-          <p:nvPr/>
-        </p:nvSpPr>
-        <p:spPr>
-          <a:xfrm>
-            <a:off x="1097280" y="2148840"/>
-            <a:ext cx="10058400" cy="640080"/>
-          </a:xfrm>
-          <a:prstGeom prst="rect">
-            <a:avLst/>
-          </a:prstGeom>
-          <a:noFill/>
-        </p:spPr>
-        <p:txBody>
-          <a:bodyPr wrap="square">
-            <a:spAutoFit/>
-          </a:bodyPr>
-          <a:lstStyle/>
-          <a:p>
-            <a:pPr algn="l">
-              <a:defRPr sz="1600" b="0">
-                <a:solidFill>
-                  <a:srgbClr val="B0BCD4"/>
-                </a:solidFill>
-                <a:latin typeface="Microsoft YaHei"/>
-              </a:defRPr>
-            </a:pPr>
-            <a:r>
-              <a:t>精通即梦AI、可灵AI、Seedance 2.0等核心工具</a:t>
-            </a:r>
-          </a:p>
-        </p:txBody>
-      </p:sp>
-      <p:sp>
-        <p:nvSpPr>
-          <p:cNvPr id="8" name="Rectangle 7"/>
+          <p:cNvPr id="8" name="Oval 7"/>
           <p:cNvSpPr/>
           <p:nvPr/>
         </p:nvSpPr>
         <p:spPr>
           <a:xfrm>
-            <a:off x="731520" y="2989580"/>
-            <a:ext cx="101600" cy="101600"/>
-          </a:xfrm>
-          <a:prstGeom prst="rect">
+            <a:off x="731520" y="1490472"/>
+            <a:ext cx="365760" cy="365760"/>
+          </a:xfrm>
+          <a:prstGeom prst="ellipse">
             <a:avLst/>
           </a:prstGeom>
           <a:solidFill>
@@ -5568,8 +6203,8 @@
         </p:nvSpPr>
         <p:spPr>
           <a:xfrm>
-            <a:off x="1097280" y="2926080"/>
-            <a:ext cx="10058400" cy="640080"/>
+            <a:off x="731520" y="1490472"/>
+            <a:ext cx="365760" cy="365760"/>
           </a:xfrm>
           <a:prstGeom prst="rect">
             <a:avLst/>
@@ -5582,36 +6217,72 @@
           </a:bodyPr>
           <a:lstStyle/>
           <a:p>
-            <a:pPr algn="l">
-              <a:defRPr sz="1600" b="0">
+            <a:pPr algn="ctr">
+              <a:defRPr sz="1100" b="1">
                 <a:solidFill>
-                  <a:srgbClr val="B0BCD4"/>
+                  <a:srgbClr val="FFFFFF"/>
                 </a:solidFill>
                 <a:latin typeface="Microsoft YaHei"/>
               </a:defRPr>
             </a:pPr>
             <a:r>
-              <a:t>能独立制作一集完整的AI漫剧</a:t>
-            </a:r>
-          </a:p>
-        </p:txBody>
-      </p:sp>
-      <p:sp>
-        <p:nvSpPr>
-          <p:cNvPr id="10" name="Rectangle 9"/>
+              <a:t>1</a:t>
+            </a:r>
+          </a:p>
+        </p:txBody>
+      </p:sp>
+      <p:sp>
+        <p:nvSpPr>
+          <p:cNvPr id="10" name="TextBox 9"/>
+          <p:cNvSpPr txBox="1"/>
+          <p:nvPr/>
+        </p:nvSpPr>
+        <p:spPr>
+          <a:xfrm>
+            <a:off x="1280160" y="1417320"/>
+            <a:ext cx="10058400" cy="548640"/>
+          </a:xfrm>
+          <a:prstGeom prst="rect">
+            <a:avLst/>
+          </a:prstGeom>
+          <a:noFill/>
+        </p:spPr>
+        <p:txBody>
+          <a:bodyPr wrap="square">
+            <a:spAutoFit/>
+          </a:bodyPr>
+          <a:lstStyle/>
+          <a:p>
+            <a:pPr algn="l">
+              <a:defRPr sz="1500" b="0">
+                <a:solidFill>
+                  <a:srgbClr val="CBD5E8"/>
+                </a:solidFill>
+                <a:latin typeface="Microsoft YaHei"/>
+              </a:defRPr>
+            </a:pPr>
+            <a:r>
+              <a:t>掌握AI漫剧从剧本到成片的完整制作流程</a:t>
+            </a:r>
+          </a:p>
+        </p:txBody>
+      </p:sp>
+      <p:sp>
+        <p:nvSpPr>
+          <p:cNvPr id="11" name="Rounded Rectangle 10"/>
           <p:cNvSpPr/>
           <p:nvPr/>
         </p:nvSpPr>
         <p:spPr>
           <a:xfrm>
-            <a:off x="731520" y="3766820"/>
-            <a:ext cx="101600" cy="101600"/>
-          </a:xfrm>
-          <a:prstGeom prst="rect">
-            <a:avLst/>
-          </a:prstGeom>
-          <a:solidFill>
-            <a:srgbClr val="00D4FF"/>
+            <a:off x="457200" y="2194560"/>
+            <a:ext cx="11247120" cy="731520"/>
+          </a:xfrm>
+          <a:prstGeom prst="roundRect">
+            <a:avLst/>
+          </a:prstGeom>
+          <a:solidFill>
+            <a:srgbClr val="141E33"/>
           </a:solidFill>
           <a:ln>
             <a:noFill/>
@@ -5641,50 +6312,14 @@
       </p:sp>
       <p:sp>
         <p:nvSpPr>
-          <p:cNvPr id="11" name="TextBox 10"/>
-          <p:cNvSpPr txBox="1"/>
-          <p:nvPr/>
-        </p:nvSpPr>
-        <p:spPr>
-          <a:xfrm>
-            <a:off x="1097280" y="3703320"/>
-            <a:ext cx="10058400" cy="640080"/>
-          </a:xfrm>
-          <a:prstGeom prst="rect">
-            <a:avLst/>
-          </a:prstGeom>
-          <a:noFill/>
-        </p:spPr>
-        <p:txBody>
-          <a:bodyPr wrap="square">
-            <a:spAutoFit/>
-          </a:bodyPr>
-          <a:lstStyle/>
-          <a:p>
-            <a:pPr algn="l">
-              <a:defRPr sz="1600" b="0">
-                <a:solidFill>
-                  <a:srgbClr val="B0BCD4"/>
-                </a:solidFill>
-                <a:latin typeface="Microsoft YaHei"/>
-              </a:defRPr>
-            </a:pPr>
-            <a:r>
-              <a:t>了解平台分发与商业变现的路径</a:t>
-            </a:r>
-          </a:p>
-        </p:txBody>
-      </p:sp>
-      <p:sp>
-        <p:nvSpPr>
           <p:cNvPr id="12" name="Rectangle 11"/>
           <p:cNvSpPr/>
           <p:nvPr/>
         </p:nvSpPr>
         <p:spPr>
           <a:xfrm>
-            <a:off x="731520" y="4544060"/>
-            <a:ext cx="101600" cy="101600"/>
+            <a:off x="457200" y="2194560"/>
+            <a:ext cx="73152" cy="731520"/>
           </a:xfrm>
           <a:prstGeom prst="rect">
             <a:avLst/>
@@ -5720,56 +6355,20 @@
       </p:sp>
       <p:sp>
         <p:nvSpPr>
-          <p:cNvPr id="13" name="TextBox 12"/>
-          <p:cNvSpPr txBox="1"/>
-          <p:nvPr/>
-        </p:nvSpPr>
-        <p:spPr>
-          <a:xfrm>
-            <a:off x="1097280" y="4480560"/>
-            <a:ext cx="10058400" cy="640080"/>
-          </a:xfrm>
-          <a:prstGeom prst="rect">
-            <a:avLst/>
-          </a:prstGeom>
-          <a:noFill/>
-        </p:spPr>
-        <p:txBody>
-          <a:bodyPr wrap="square">
-            <a:spAutoFit/>
-          </a:bodyPr>
-          <a:lstStyle/>
-          <a:p>
-            <a:pPr algn="l">
-              <a:defRPr sz="1600" b="0">
-                <a:solidFill>
-                  <a:srgbClr val="B0BCD4"/>
-                </a:solidFill>
-                <a:latin typeface="Microsoft YaHei"/>
-              </a:defRPr>
-            </a:pPr>
-            <a:r>
-              <a:t>建立工业化生产思维，实现高效量产</a:t>
-            </a:r>
-          </a:p>
-        </p:txBody>
-      </p:sp>
-      <p:sp>
-        <p:nvSpPr>
-          <p:cNvPr id="14" name="Rectangle 13"/>
+          <p:cNvPr id="13" name="Oval 12"/>
           <p:cNvSpPr/>
           <p:nvPr/>
         </p:nvSpPr>
         <p:spPr>
           <a:xfrm>
-            <a:off x="0" y="6492240"/>
-            <a:ext cx="12191695" cy="25400"/>
-          </a:xfrm>
-          <a:prstGeom prst="rect">
-            <a:avLst/>
-          </a:prstGeom>
-          <a:solidFill>
-            <a:srgbClr val="2D3B55"/>
+            <a:off x="731520" y="2359152"/>
+            <a:ext cx="365760" cy="365760"/>
+          </a:xfrm>
+          <a:prstGeom prst="ellipse">
+            <a:avLst/>
+          </a:prstGeom>
+          <a:solidFill>
+            <a:srgbClr val="00D4FF"/>
           </a:solidFill>
           <a:ln>
             <a:noFill/>
@@ -5799,14 +6398,14 @@
       </p:sp>
       <p:sp>
         <p:nvSpPr>
-          <p:cNvPr id="15" name="TextBox 14"/>
+          <p:cNvPr id="14" name="TextBox 13"/>
           <p:cNvSpPr txBox="1"/>
           <p:nvPr/>
         </p:nvSpPr>
         <p:spPr>
           <a:xfrm>
-            <a:off x="457200" y="6537960"/>
-            <a:ext cx="5486400" cy="274320"/>
+            <a:off x="731520" y="2359152"/>
+            <a:ext cx="365760" cy="365760"/>
           </a:xfrm>
           <a:prstGeom prst="rect">
             <a:avLst/>
@@ -5819,8 +6418,726 @@
           </a:bodyPr>
           <a:lstStyle/>
           <a:p>
+            <a:pPr algn="ctr">
+              <a:defRPr sz="1100" b="1">
+                <a:solidFill>
+                  <a:srgbClr val="FFFFFF"/>
+                </a:solidFill>
+                <a:latin typeface="Microsoft YaHei"/>
+              </a:defRPr>
+            </a:pPr>
+            <a:r>
+              <a:t>2</a:t>
+            </a:r>
+          </a:p>
+        </p:txBody>
+      </p:sp>
+      <p:sp>
+        <p:nvSpPr>
+          <p:cNvPr id="15" name="TextBox 14"/>
+          <p:cNvSpPr txBox="1"/>
+          <p:nvPr/>
+        </p:nvSpPr>
+        <p:spPr>
+          <a:xfrm>
+            <a:off x="1280160" y="2286000"/>
+            <a:ext cx="10058400" cy="548640"/>
+          </a:xfrm>
+          <a:prstGeom prst="rect">
+            <a:avLst/>
+          </a:prstGeom>
+          <a:noFill/>
+        </p:spPr>
+        <p:txBody>
+          <a:bodyPr wrap="square">
+            <a:spAutoFit/>
+          </a:bodyPr>
+          <a:lstStyle/>
+          <a:p>
             <a:pPr algn="l">
-              <a:defRPr sz="1000" b="0">
+              <a:defRPr sz="1500" b="0">
+                <a:solidFill>
+                  <a:srgbClr val="CBD5E8"/>
+                </a:solidFill>
+                <a:latin typeface="Microsoft YaHei"/>
+              </a:defRPr>
+            </a:pPr>
+            <a:r>
+              <a:t>精通即梦AI、可灵AI、Seedance 2.0等核心工具</a:t>
+            </a:r>
+          </a:p>
+        </p:txBody>
+      </p:sp>
+      <p:sp>
+        <p:nvSpPr>
+          <p:cNvPr id="16" name="Rounded Rectangle 15"/>
+          <p:cNvSpPr/>
+          <p:nvPr/>
+        </p:nvSpPr>
+        <p:spPr>
+          <a:xfrm>
+            <a:off x="457200" y="3063240"/>
+            <a:ext cx="11247120" cy="731520"/>
+          </a:xfrm>
+          <a:prstGeom prst="roundRect">
+            <a:avLst/>
+          </a:prstGeom>
+          <a:solidFill>
+            <a:srgbClr val="141E33"/>
+          </a:solidFill>
+          <a:ln>
+            <a:noFill/>
+          </a:ln>
+        </p:spPr>
+        <p:style>
+          <a:lnRef idx="1">
+            <a:schemeClr val="accent1"/>
+          </a:lnRef>
+          <a:fillRef idx="3">
+            <a:schemeClr val="accent1"/>
+          </a:fillRef>
+          <a:effectRef idx="2">
+            <a:schemeClr val="accent1"/>
+          </a:effectRef>
+          <a:fontRef idx="minor">
+            <a:schemeClr val="lt1"/>
+          </a:fontRef>
+        </p:style>
+        <p:txBody>
+          <a:bodyPr rtlCol="0" anchor="ctr"/>
+          <a:lstStyle/>
+          <a:p>
+            <a:pPr algn="ctr"/>
+          </a:p>
+        </p:txBody>
+      </p:sp>
+      <p:sp>
+        <p:nvSpPr>
+          <p:cNvPr id="17" name="Rectangle 16"/>
+          <p:cNvSpPr/>
+          <p:nvPr/>
+        </p:nvSpPr>
+        <p:spPr>
+          <a:xfrm>
+            <a:off x="457200" y="3063240"/>
+            <a:ext cx="73152" cy="731520"/>
+          </a:xfrm>
+          <a:prstGeom prst="rect">
+            <a:avLst/>
+          </a:prstGeom>
+          <a:solidFill>
+            <a:srgbClr val="00D4FF"/>
+          </a:solidFill>
+          <a:ln>
+            <a:noFill/>
+          </a:ln>
+        </p:spPr>
+        <p:style>
+          <a:lnRef idx="1">
+            <a:schemeClr val="accent1"/>
+          </a:lnRef>
+          <a:fillRef idx="3">
+            <a:schemeClr val="accent1"/>
+          </a:fillRef>
+          <a:effectRef idx="2">
+            <a:schemeClr val="accent1"/>
+          </a:effectRef>
+          <a:fontRef idx="minor">
+            <a:schemeClr val="lt1"/>
+          </a:fontRef>
+        </p:style>
+        <p:txBody>
+          <a:bodyPr rtlCol="0" anchor="ctr"/>
+          <a:lstStyle/>
+          <a:p>
+            <a:pPr algn="ctr"/>
+          </a:p>
+        </p:txBody>
+      </p:sp>
+      <p:sp>
+        <p:nvSpPr>
+          <p:cNvPr id="18" name="Oval 17"/>
+          <p:cNvSpPr/>
+          <p:nvPr/>
+        </p:nvSpPr>
+        <p:spPr>
+          <a:xfrm>
+            <a:off x="731520" y="3227832"/>
+            <a:ext cx="365760" cy="365760"/>
+          </a:xfrm>
+          <a:prstGeom prst="ellipse">
+            <a:avLst/>
+          </a:prstGeom>
+          <a:solidFill>
+            <a:srgbClr val="00D4FF"/>
+          </a:solidFill>
+          <a:ln>
+            <a:noFill/>
+          </a:ln>
+        </p:spPr>
+        <p:style>
+          <a:lnRef idx="1">
+            <a:schemeClr val="accent1"/>
+          </a:lnRef>
+          <a:fillRef idx="3">
+            <a:schemeClr val="accent1"/>
+          </a:fillRef>
+          <a:effectRef idx="2">
+            <a:schemeClr val="accent1"/>
+          </a:effectRef>
+          <a:fontRef idx="minor">
+            <a:schemeClr val="lt1"/>
+          </a:fontRef>
+        </p:style>
+        <p:txBody>
+          <a:bodyPr rtlCol="0" anchor="ctr"/>
+          <a:lstStyle/>
+          <a:p>
+            <a:pPr algn="ctr"/>
+          </a:p>
+        </p:txBody>
+      </p:sp>
+      <p:sp>
+        <p:nvSpPr>
+          <p:cNvPr id="19" name="TextBox 18"/>
+          <p:cNvSpPr txBox="1"/>
+          <p:nvPr/>
+        </p:nvSpPr>
+        <p:spPr>
+          <a:xfrm>
+            <a:off x="731520" y="3227832"/>
+            <a:ext cx="365760" cy="365760"/>
+          </a:xfrm>
+          <a:prstGeom prst="rect">
+            <a:avLst/>
+          </a:prstGeom>
+          <a:noFill/>
+        </p:spPr>
+        <p:txBody>
+          <a:bodyPr wrap="square">
+            <a:spAutoFit/>
+          </a:bodyPr>
+          <a:lstStyle/>
+          <a:p>
+            <a:pPr algn="ctr">
+              <a:defRPr sz="1100" b="1">
+                <a:solidFill>
+                  <a:srgbClr val="FFFFFF"/>
+                </a:solidFill>
+                <a:latin typeface="Microsoft YaHei"/>
+              </a:defRPr>
+            </a:pPr>
+            <a:r>
+              <a:t>3</a:t>
+            </a:r>
+          </a:p>
+        </p:txBody>
+      </p:sp>
+      <p:sp>
+        <p:nvSpPr>
+          <p:cNvPr id="20" name="TextBox 19"/>
+          <p:cNvSpPr txBox="1"/>
+          <p:nvPr/>
+        </p:nvSpPr>
+        <p:spPr>
+          <a:xfrm>
+            <a:off x="1280160" y="3154680"/>
+            <a:ext cx="10058400" cy="548640"/>
+          </a:xfrm>
+          <a:prstGeom prst="rect">
+            <a:avLst/>
+          </a:prstGeom>
+          <a:noFill/>
+        </p:spPr>
+        <p:txBody>
+          <a:bodyPr wrap="square">
+            <a:spAutoFit/>
+          </a:bodyPr>
+          <a:lstStyle/>
+          <a:p>
+            <a:pPr algn="l">
+              <a:defRPr sz="1500" b="0">
+                <a:solidFill>
+                  <a:srgbClr val="CBD5E8"/>
+                </a:solidFill>
+                <a:latin typeface="Microsoft YaHei"/>
+              </a:defRPr>
+            </a:pPr>
+            <a:r>
+              <a:t>能独立制作一集完整的AI漫剧</a:t>
+            </a:r>
+          </a:p>
+        </p:txBody>
+      </p:sp>
+      <p:sp>
+        <p:nvSpPr>
+          <p:cNvPr id="21" name="Rounded Rectangle 20"/>
+          <p:cNvSpPr/>
+          <p:nvPr/>
+        </p:nvSpPr>
+        <p:spPr>
+          <a:xfrm>
+            <a:off x="457200" y="3931919"/>
+            <a:ext cx="11247120" cy="731520"/>
+          </a:xfrm>
+          <a:prstGeom prst="roundRect">
+            <a:avLst/>
+          </a:prstGeom>
+          <a:solidFill>
+            <a:srgbClr val="141E33"/>
+          </a:solidFill>
+          <a:ln>
+            <a:noFill/>
+          </a:ln>
+        </p:spPr>
+        <p:style>
+          <a:lnRef idx="1">
+            <a:schemeClr val="accent1"/>
+          </a:lnRef>
+          <a:fillRef idx="3">
+            <a:schemeClr val="accent1"/>
+          </a:fillRef>
+          <a:effectRef idx="2">
+            <a:schemeClr val="accent1"/>
+          </a:effectRef>
+          <a:fontRef idx="minor">
+            <a:schemeClr val="lt1"/>
+          </a:fontRef>
+        </p:style>
+        <p:txBody>
+          <a:bodyPr rtlCol="0" anchor="ctr"/>
+          <a:lstStyle/>
+          <a:p>
+            <a:pPr algn="ctr"/>
+          </a:p>
+        </p:txBody>
+      </p:sp>
+      <p:sp>
+        <p:nvSpPr>
+          <p:cNvPr id="22" name="Rectangle 21"/>
+          <p:cNvSpPr/>
+          <p:nvPr/>
+        </p:nvSpPr>
+        <p:spPr>
+          <a:xfrm>
+            <a:off x="457200" y="3931919"/>
+            <a:ext cx="73152" cy="731520"/>
+          </a:xfrm>
+          <a:prstGeom prst="rect">
+            <a:avLst/>
+          </a:prstGeom>
+          <a:solidFill>
+            <a:srgbClr val="00D4FF"/>
+          </a:solidFill>
+          <a:ln>
+            <a:noFill/>
+          </a:ln>
+        </p:spPr>
+        <p:style>
+          <a:lnRef idx="1">
+            <a:schemeClr val="accent1"/>
+          </a:lnRef>
+          <a:fillRef idx="3">
+            <a:schemeClr val="accent1"/>
+          </a:fillRef>
+          <a:effectRef idx="2">
+            <a:schemeClr val="accent1"/>
+          </a:effectRef>
+          <a:fontRef idx="minor">
+            <a:schemeClr val="lt1"/>
+          </a:fontRef>
+        </p:style>
+        <p:txBody>
+          <a:bodyPr rtlCol="0" anchor="ctr"/>
+          <a:lstStyle/>
+          <a:p>
+            <a:pPr algn="ctr"/>
+          </a:p>
+        </p:txBody>
+      </p:sp>
+      <p:sp>
+        <p:nvSpPr>
+          <p:cNvPr id="23" name="Oval 22"/>
+          <p:cNvSpPr/>
+          <p:nvPr/>
+        </p:nvSpPr>
+        <p:spPr>
+          <a:xfrm>
+            <a:off x="731520" y="4096511"/>
+            <a:ext cx="365760" cy="365760"/>
+          </a:xfrm>
+          <a:prstGeom prst="ellipse">
+            <a:avLst/>
+          </a:prstGeom>
+          <a:solidFill>
+            <a:srgbClr val="00D4FF"/>
+          </a:solidFill>
+          <a:ln>
+            <a:noFill/>
+          </a:ln>
+        </p:spPr>
+        <p:style>
+          <a:lnRef idx="1">
+            <a:schemeClr val="accent1"/>
+          </a:lnRef>
+          <a:fillRef idx="3">
+            <a:schemeClr val="accent1"/>
+          </a:fillRef>
+          <a:effectRef idx="2">
+            <a:schemeClr val="accent1"/>
+          </a:effectRef>
+          <a:fontRef idx="minor">
+            <a:schemeClr val="lt1"/>
+          </a:fontRef>
+        </p:style>
+        <p:txBody>
+          <a:bodyPr rtlCol="0" anchor="ctr"/>
+          <a:lstStyle/>
+          <a:p>
+            <a:pPr algn="ctr"/>
+          </a:p>
+        </p:txBody>
+      </p:sp>
+      <p:sp>
+        <p:nvSpPr>
+          <p:cNvPr id="24" name="TextBox 23"/>
+          <p:cNvSpPr txBox="1"/>
+          <p:nvPr/>
+        </p:nvSpPr>
+        <p:spPr>
+          <a:xfrm>
+            <a:off x="731520" y="4096511"/>
+            <a:ext cx="365760" cy="365760"/>
+          </a:xfrm>
+          <a:prstGeom prst="rect">
+            <a:avLst/>
+          </a:prstGeom>
+          <a:noFill/>
+        </p:spPr>
+        <p:txBody>
+          <a:bodyPr wrap="square">
+            <a:spAutoFit/>
+          </a:bodyPr>
+          <a:lstStyle/>
+          <a:p>
+            <a:pPr algn="ctr">
+              <a:defRPr sz="1100" b="1">
+                <a:solidFill>
+                  <a:srgbClr val="FFFFFF"/>
+                </a:solidFill>
+                <a:latin typeface="Microsoft YaHei"/>
+              </a:defRPr>
+            </a:pPr>
+            <a:r>
+              <a:t>4</a:t>
+            </a:r>
+          </a:p>
+        </p:txBody>
+      </p:sp>
+      <p:sp>
+        <p:nvSpPr>
+          <p:cNvPr id="25" name="TextBox 24"/>
+          <p:cNvSpPr txBox="1"/>
+          <p:nvPr/>
+        </p:nvSpPr>
+        <p:spPr>
+          <a:xfrm>
+            <a:off x="1280160" y="4023359"/>
+            <a:ext cx="10058400" cy="548640"/>
+          </a:xfrm>
+          <a:prstGeom prst="rect">
+            <a:avLst/>
+          </a:prstGeom>
+          <a:noFill/>
+        </p:spPr>
+        <p:txBody>
+          <a:bodyPr wrap="square">
+            <a:spAutoFit/>
+          </a:bodyPr>
+          <a:lstStyle/>
+          <a:p>
+            <a:pPr algn="l">
+              <a:defRPr sz="1500" b="0">
+                <a:solidFill>
+                  <a:srgbClr val="CBD5E8"/>
+                </a:solidFill>
+                <a:latin typeface="Microsoft YaHei"/>
+              </a:defRPr>
+            </a:pPr>
+            <a:r>
+              <a:t>了解平台分发与商业变现的路径</a:t>
+            </a:r>
+          </a:p>
+        </p:txBody>
+      </p:sp>
+      <p:sp>
+        <p:nvSpPr>
+          <p:cNvPr id="26" name="Rounded Rectangle 25"/>
+          <p:cNvSpPr/>
+          <p:nvPr/>
+        </p:nvSpPr>
+        <p:spPr>
+          <a:xfrm>
+            <a:off x="457200" y="4800600"/>
+            <a:ext cx="11247120" cy="731520"/>
+          </a:xfrm>
+          <a:prstGeom prst="roundRect">
+            <a:avLst/>
+          </a:prstGeom>
+          <a:solidFill>
+            <a:srgbClr val="141E33"/>
+          </a:solidFill>
+          <a:ln>
+            <a:noFill/>
+          </a:ln>
+        </p:spPr>
+        <p:style>
+          <a:lnRef idx="1">
+            <a:schemeClr val="accent1"/>
+          </a:lnRef>
+          <a:fillRef idx="3">
+            <a:schemeClr val="accent1"/>
+          </a:fillRef>
+          <a:effectRef idx="2">
+            <a:schemeClr val="accent1"/>
+          </a:effectRef>
+          <a:fontRef idx="minor">
+            <a:schemeClr val="lt1"/>
+          </a:fontRef>
+        </p:style>
+        <p:txBody>
+          <a:bodyPr rtlCol="0" anchor="ctr"/>
+          <a:lstStyle/>
+          <a:p>
+            <a:pPr algn="ctr"/>
+          </a:p>
+        </p:txBody>
+      </p:sp>
+      <p:sp>
+        <p:nvSpPr>
+          <p:cNvPr id="27" name="Rectangle 26"/>
+          <p:cNvSpPr/>
+          <p:nvPr/>
+        </p:nvSpPr>
+        <p:spPr>
+          <a:xfrm>
+            <a:off x="457200" y="4800600"/>
+            <a:ext cx="73152" cy="731520"/>
+          </a:xfrm>
+          <a:prstGeom prst="rect">
+            <a:avLst/>
+          </a:prstGeom>
+          <a:solidFill>
+            <a:srgbClr val="00D4FF"/>
+          </a:solidFill>
+          <a:ln>
+            <a:noFill/>
+          </a:ln>
+        </p:spPr>
+        <p:style>
+          <a:lnRef idx="1">
+            <a:schemeClr val="accent1"/>
+          </a:lnRef>
+          <a:fillRef idx="3">
+            <a:schemeClr val="accent1"/>
+          </a:fillRef>
+          <a:effectRef idx="2">
+            <a:schemeClr val="accent1"/>
+          </a:effectRef>
+          <a:fontRef idx="minor">
+            <a:schemeClr val="lt1"/>
+          </a:fontRef>
+        </p:style>
+        <p:txBody>
+          <a:bodyPr rtlCol="0" anchor="ctr"/>
+          <a:lstStyle/>
+          <a:p>
+            <a:pPr algn="ctr"/>
+          </a:p>
+        </p:txBody>
+      </p:sp>
+      <p:sp>
+        <p:nvSpPr>
+          <p:cNvPr id="28" name="Oval 27"/>
+          <p:cNvSpPr/>
+          <p:nvPr/>
+        </p:nvSpPr>
+        <p:spPr>
+          <a:xfrm>
+            <a:off x="731520" y="4965192"/>
+            <a:ext cx="365760" cy="365760"/>
+          </a:xfrm>
+          <a:prstGeom prst="ellipse">
+            <a:avLst/>
+          </a:prstGeom>
+          <a:solidFill>
+            <a:srgbClr val="00D4FF"/>
+          </a:solidFill>
+          <a:ln>
+            <a:noFill/>
+          </a:ln>
+        </p:spPr>
+        <p:style>
+          <a:lnRef idx="1">
+            <a:schemeClr val="accent1"/>
+          </a:lnRef>
+          <a:fillRef idx="3">
+            <a:schemeClr val="accent1"/>
+          </a:fillRef>
+          <a:effectRef idx="2">
+            <a:schemeClr val="accent1"/>
+          </a:effectRef>
+          <a:fontRef idx="minor">
+            <a:schemeClr val="lt1"/>
+          </a:fontRef>
+        </p:style>
+        <p:txBody>
+          <a:bodyPr rtlCol="0" anchor="ctr"/>
+          <a:lstStyle/>
+          <a:p>
+            <a:pPr algn="ctr"/>
+          </a:p>
+        </p:txBody>
+      </p:sp>
+      <p:sp>
+        <p:nvSpPr>
+          <p:cNvPr id="29" name="TextBox 28"/>
+          <p:cNvSpPr txBox="1"/>
+          <p:nvPr/>
+        </p:nvSpPr>
+        <p:spPr>
+          <a:xfrm>
+            <a:off x="731520" y="4965192"/>
+            <a:ext cx="365760" cy="365760"/>
+          </a:xfrm>
+          <a:prstGeom prst="rect">
+            <a:avLst/>
+          </a:prstGeom>
+          <a:noFill/>
+        </p:spPr>
+        <p:txBody>
+          <a:bodyPr wrap="square">
+            <a:spAutoFit/>
+          </a:bodyPr>
+          <a:lstStyle/>
+          <a:p>
+            <a:pPr algn="ctr">
+              <a:defRPr sz="1100" b="1">
+                <a:solidFill>
+                  <a:srgbClr val="FFFFFF"/>
+                </a:solidFill>
+                <a:latin typeface="Microsoft YaHei"/>
+              </a:defRPr>
+            </a:pPr>
+            <a:r>
+              <a:t>5</a:t>
+            </a:r>
+          </a:p>
+        </p:txBody>
+      </p:sp>
+      <p:sp>
+        <p:nvSpPr>
+          <p:cNvPr id="30" name="TextBox 29"/>
+          <p:cNvSpPr txBox="1"/>
+          <p:nvPr/>
+        </p:nvSpPr>
+        <p:spPr>
+          <a:xfrm>
+            <a:off x="1280160" y="4892040"/>
+            <a:ext cx="10058400" cy="548640"/>
+          </a:xfrm>
+          <a:prstGeom prst="rect">
+            <a:avLst/>
+          </a:prstGeom>
+          <a:noFill/>
+        </p:spPr>
+        <p:txBody>
+          <a:bodyPr wrap="square">
+            <a:spAutoFit/>
+          </a:bodyPr>
+          <a:lstStyle/>
+          <a:p>
+            <a:pPr algn="l">
+              <a:defRPr sz="1500" b="0">
+                <a:solidFill>
+                  <a:srgbClr val="CBD5E8"/>
+                </a:solidFill>
+                <a:latin typeface="Microsoft YaHei"/>
+              </a:defRPr>
+            </a:pPr>
+            <a:r>
+              <a:t>建立工业化生产思维，实现高效量产</a:t>
+            </a:r>
+          </a:p>
+        </p:txBody>
+      </p:sp>
+      <p:sp>
+        <p:nvSpPr>
+          <p:cNvPr id="31" name="Rectangle 30"/>
+          <p:cNvSpPr/>
+          <p:nvPr/>
+        </p:nvSpPr>
+        <p:spPr>
+          <a:xfrm>
+            <a:off x="0" y="6446520"/>
+            <a:ext cx="12191695" cy="19050"/>
+          </a:xfrm>
+          <a:prstGeom prst="rect">
+            <a:avLst/>
+          </a:prstGeom>
+          <a:solidFill>
+            <a:srgbClr val="2D3B55"/>
+          </a:solidFill>
+          <a:ln>
+            <a:noFill/>
+          </a:ln>
+        </p:spPr>
+        <p:style>
+          <a:lnRef idx="1">
+            <a:schemeClr val="accent1"/>
+          </a:lnRef>
+          <a:fillRef idx="3">
+            <a:schemeClr val="accent1"/>
+          </a:fillRef>
+          <a:effectRef idx="2">
+            <a:schemeClr val="accent1"/>
+          </a:effectRef>
+          <a:fontRef idx="minor">
+            <a:schemeClr val="lt1"/>
+          </a:fontRef>
+        </p:style>
+        <p:txBody>
+          <a:bodyPr rtlCol="0" anchor="ctr"/>
+          <a:lstStyle/>
+          <a:p>
+            <a:pPr algn="ctr"/>
+          </a:p>
+        </p:txBody>
+      </p:sp>
+      <p:sp>
+        <p:nvSpPr>
+          <p:cNvPr id="32" name="TextBox 31"/>
+          <p:cNvSpPr txBox="1"/>
+          <p:nvPr/>
+        </p:nvSpPr>
+        <p:spPr>
+          <a:xfrm>
+            <a:off x="457200" y="6492240"/>
+            <a:ext cx="5486400" cy="274320"/>
+          </a:xfrm>
+          <a:prstGeom prst="rect">
+            <a:avLst/>
+          </a:prstGeom>
+          <a:noFill/>
+        </p:spPr>
+        <p:txBody>
+          <a:bodyPr wrap="square">
+            <a:spAutoFit/>
+          </a:bodyPr>
+          <a:lstStyle/>
+          <a:p>
+            <a:pPr algn="l">
+              <a:defRPr sz="900" b="0">
                 <a:solidFill>
                   <a:srgbClr val="6B7B9E"/>
                 </a:solidFill>
@@ -5835,13 +7152,13 @@
       </p:sp>
       <p:sp>
         <p:nvSpPr>
-          <p:cNvPr id="16" name="TextBox 15"/>
+          <p:cNvPr id="33" name="TextBox 32"/>
           <p:cNvSpPr txBox="1"/>
           <p:nvPr/>
         </p:nvSpPr>
         <p:spPr>
           <a:xfrm>
-            <a:off x="10515600" y="6537960"/>
+            <a:off x="10515600" y="6492240"/>
             <a:ext cx="1371600" cy="274320"/>
           </a:xfrm>
           <a:prstGeom prst="rect">
@@ -5856,7 +7173,7 @@
           <a:lstStyle/>
           <a:p>
             <a:pPr algn="r">
-              <a:defRPr sz="1000" b="0">
+              <a:defRPr sz="900" b="0">
                 <a:solidFill>
                   <a:srgbClr val="6B7B9E"/>
                 </a:solidFill>
@@ -5883,7 +7200,7 @@
     <p:bg>
       <p:bgPr>
         <a:solidFill>
-          <a:srgbClr val="0F172A"/>
+          <a:srgbClr val="0B1120"/>
         </a:solidFill>
         <a:effectLst/>
       </p:bgPr>
@@ -5897,14 +7214,100 @@
       <p:grpSpPr/>
       <p:sp>
         <p:nvSpPr>
-          <p:cNvPr id="2" name="TextBox 1"/>
+          <p:cNvPr id="2" name="Rectangle 1"/>
+          <p:cNvSpPr/>
+          <p:nvPr/>
+        </p:nvSpPr>
+        <p:spPr>
+          <a:xfrm>
+            <a:off x="0" y="0"/>
+            <a:ext cx="12191695" cy="1051560"/>
+          </a:xfrm>
+          <a:prstGeom prst="rect">
+            <a:avLst/>
+          </a:prstGeom>
+          <a:solidFill>
+            <a:srgbClr val="141E33"/>
+          </a:solidFill>
+          <a:ln>
+            <a:noFill/>
+          </a:ln>
+        </p:spPr>
+        <p:style>
+          <a:lnRef idx="1">
+            <a:schemeClr val="accent1"/>
+          </a:lnRef>
+          <a:fillRef idx="3">
+            <a:schemeClr val="accent1"/>
+          </a:fillRef>
+          <a:effectRef idx="2">
+            <a:schemeClr val="accent1"/>
+          </a:effectRef>
+          <a:fontRef idx="minor">
+            <a:schemeClr val="lt1"/>
+          </a:fontRef>
+        </p:style>
+        <p:txBody>
+          <a:bodyPr rtlCol="0" anchor="ctr"/>
+          <a:lstStyle/>
+          <a:p>
+            <a:pPr algn="ctr"/>
+          </a:p>
+        </p:txBody>
+      </p:sp>
+      <p:sp>
+        <p:nvSpPr>
+          <p:cNvPr id="3" name="Rectangle 2"/>
+          <p:cNvSpPr/>
+          <p:nvPr/>
+        </p:nvSpPr>
+        <p:spPr>
+          <a:xfrm>
+            <a:off x="0" y="0"/>
+            <a:ext cx="109728" cy="1051560"/>
+          </a:xfrm>
+          <a:prstGeom prst="rect">
+            <a:avLst/>
+          </a:prstGeom>
+          <a:solidFill>
+            <a:srgbClr val="00D4FF"/>
+          </a:solidFill>
+          <a:ln>
+            <a:noFill/>
+          </a:ln>
+        </p:spPr>
+        <p:style>
+          <a:lnRef idx="1">
+            <a:schemeClr val="accent1"/>
+          </a:lnRef>
+          <a:fillRef idx="3">
+            <a:schemeClr val="accent1"/>
+          </a:fillRef>
+          <a:effectRef idx="2">
+            <a:schemeClr val="accent1"/>
+          </a:effectRef>
+          <a:fontRef idx="minor">
+            <a:schemeClr val="lt1"/>
+          </a:fontRef>
+        </p:style>
+        <p:txBody>
+          <a:bodyPr rtlCol="0" anchor="ctr"/>
+          <a:lstStyle/>
+          <a:p>
+            <a:pPr algn="ctr"/>
+          </a:p>
+        </p:txBody>
+      </p:sp>
+      <p:sp>
+        <p:nvSpPr>
+          <p:cNvPr id="4" name="TextBox 3"/>
           <p:cNvSpPr txBox="1"/>
           <p:nvPr/>
         </p:nvSpPr>
         <p:spPr>
           <a:xfrm>
-            <a:off x="731520" y="365760"/>
-            <a:ext cx="10058400" cy="548640"/>
+            <a:off x="548640" y="182880"/>
+            <a:ext cx="10058400" cy="640080"/>
           </a:xfrm>
           <a:prstGeom prst="rect">
             <a:avLst/>
@@ -5933,14 +7336,14 @@
       </p:sp>
       <p:sp>
         <p:nvSpPr>
-          <p:cNvPr id="3" name="Rectangle 2"/>
+          <p:cNvPr id="5" name="Rectangle 4"/>
           <p:cNvSpPr/>
           <p:nvPr/>
         </p:nvSpPr>
         <p:spPr>
           <a:xfrm>
-            <a:off x="731520" y="1005840"/>
-            <a:ext cx="1828800" cy="38100"/>
+            <a:off x="0" y="1051560"/>
+            <a:ext cx="12191695" cy="25400"/>
           </a:xfrm>
           <a:prstGeom prst="rect">
             <a:avLst/>
@@ -5976,15 +7379,15 @@
       </p:sp>
       <p:graphicFrame>
         <p:nvGraphicFramePr>
-          <p:cNvPr id="4" name="Table 3"/>
+          <p:cNvPr id="6" name="Table 5"/>
           <p:cNvGraphicFramePr>
             <a:graphicFrameLocks noGrp="1"/>
           </p:cNvGraphicFramePr>
           <p:nvPr/>
         </p:nvGraphicFramePr>
         <p:xfrm>
-          <a:off x="731520" y="1371600"/>
-          <a:ext cx="10515600" cy="2743200"/>
+          <a:off x="548640" y="1463040"/>
+          <a:ext cx="11064240" cy="3566160"/>
         </p:xfrm>
         <a:graphic>
           <a:graphicData uri="http://schemas.openxmlformats.org/drawingml/2006/table">
@@ -5993,17 +7396,17 @@
                 <a:tableStyleId>{5C22544A-7EE6-4342-B048-85BDC9FD1C3A}</a:tableStyleId>
               </a:tblPr>
               <a:tblGrid>
-                <a:gridCol w="5257800"/>
-                <a:gridCol w="5257800"/>
+                <a:gridCol w="5532120"/>
+                <a:gridCol w="5532120"/>
               </a:tblGrid>
-              <a:tr h="457200">
+              <a:tr h="594360">
                 <a:tc>
                   <a:txBody>
                     <a:bodyPr/>
                     <a:lstStyle/>
                     <a:p>
                       <a:pPr algn="ctr">
-                        <a:defRPr sz="1300" b="1">
+                        <a:defRPr sz="1400" b="1">
                           <a:solidFill>
                             <a:srgbClr val="FFFFFF"/>
                           </a:solidFill>
@@ -6015,7 +7418,7 @@
                       </a:r>
                     </a:p>
                   </a:txBody>
-                  <a:tcPr>
+                  <a:tcPr anchor="ctr">
                     <a:solidFill>
                       <a:srgbClr val="00D4FF"/>
                     </a:solidFill>
@@ -6027,7 +7430,7 @@
                     <a:lstStyle/>
                     <a:p>
                       <a:pPr algn="ctr">
-                        <a:defRPr sz="1300" b="1">
+                        <a:defRPr sz="1400" b="1">
                           <a:solidFill>
                             <a:srgbClr val="FFFFFF"/>
                           </a:solidFill>
@@ -6039,23 +7442,23 @@
                       </a:r>
                     </a:p>
                   </a:txBody>
-                  <a:tcPr>
+                  <a:tcPr anchor="ctr">
                     <a:solidFill>
                       <a:srgbClr val="00D4FF"/>
                     </a:solidFill>
                   </a:tcPr>
                 </a:tc>
               </a:tr>
-              <a:tr h="457200">
+              <a:tr h="594360">
                 <a:tc>
                   <a:txBody>
                     <a:bodyPr/>
                     <a:lstStyle/>
                     <a:p>
                       <a:pPr algn="ctr">
-                        <a:defRPr sz="1200">
+                        <a:defRPr sz="1300">
                           <a:solidFill>
-                            <a:srgbClr val="B0BCD4"/>
+                            <a:srgbClr val="CBD5E8"/>
                           </a:solidFill>
                           <a:latin typeface="Microsoft YaHei"/>
                         </a:defRPr>
@@ -6065,9 +7468,9 @@
                       </a:r>
                     </a:p>
                   </a:txBody>
-                  <a:tcPr>
+                  <a:tcPr anchor="ctr">
                     <a:solidFill>
-                      <a:srgbClr val="1A253C"/>
+                      <a:srgbClr val="141E33"/>
                     </a:solidFill>
                   </a:tcPr>
                 </a:tc>
@@ -6077,9 +7480,9 @@
                     <a:lstStyle/>
                     <a:p>
                       <a:pPr algn="ctr">
-                        <a:defRPr sz="1200">
+                        <a:defRPr sz="1300">
                           <a:solidFill>
-                            <a:srgbClr val="B0BCD4"/>
+                            <a:srgbClr val="CBD5E8"/>
                           </a:solidFill>
                           <a:latin typeface="Microsoft YaHei"/>
                         </a:defRPr>
@@ -6089,23 +7492,23 @@
                       </a:r>
                     </a:p>
                   </a:txBody>
-                  <a:tcPr>
+                  <a:tcPr anchor="ctr">
                     <a:solidFill>
-                      <a:srgbClr val="1A253C"/>
+                      <a:srgbClr val="141E33"/>
                     </a:solidFill>
                   </a:tcPr>
                 </a:tc>
               </a:tr>
-              <a:tr h="457200">
+              <a:tr h="594360">
                 <a:tc>
                   <a:txBody>
                     <a:bodyPr/>
                     <a:lstStyle/>
                     <a:p>
                       <a:pPr algn="ctr">
-                        <a:defRPr sz="1200">
+                        <a:defRPr sz="1300">
                           <a:solidFill>
-                            <a:srgbClr val="B0BCD4"/>
+                            <a:srgbClr val="CBD5E8"/>
                           </a:solidFill>
                           <a:latin typeface="Microsoft YaHei"/>
                         </a:defRPr>
@@ -6115,9 +7518,9 @@
                       </a:r>
                     </a:p>
                   </a:txBody>
-                  <a:tcPr>
+                  <a:tcPr anchor="ctr">
                     <a:solidFill>
-                      <a:srgbClr val="0F172A"/>
+                      <a:srgbClr val="1A2842"/>
                     </a:solidFill>
                   </a:tcPr>
                 </a:tc>
@@ -6127,9 +7530,9 @@
                     <a:lstStyle/>
                     <a:p>
                       <a:pPr algn="ctr">
-                        <a:defRPr sz="1200">
+                        <a:defRPr sz="1300">
                           <a:solidFill>
-                            <a:srgbClr val="B0BCD4"/>
+                            <a:srgbClr val="CBD5E8"/>
                           </a:solidFill>
                           <a:latin typeface="Microsoft YaHei"/>
                         </a:defRPr>
@@ -6139,23 +7542,23 @@
                       </a:r>
                     </a:p>
                   </a:txBody>
-                  <a:tcPr>
+                  <a:tcPr anchor="ctr">
                     <a:solidFill>
-                      <a:srgbClr val="0F172A"/>
+                      <a:srgbClr val="1A2842"/>
                     </a:solidFill>
                   </a:tcPr>
                 </a:tc>
               </a:tr>
-              <a:tr h="457200">
+              <a:tr h="594360">
                 <a:tc>
                   <a:txBody>
                     <a:bodyPr/>
                     <a:lstStyle/>
                     <a:p>
                       <a:pPr algn="ctr">
-                        <a:defRPr sz="1200">
+                        <a:defRPr sz="1300">
                           <a:solidFill>
-                            <a:srgbClr val="B0BCD4"/>
+                            <a:srgbClr val="CBD5E8"/>
                           </a:solidFill>
                           <a:latin typeface="Microsoft YaHei"/>
                         </a:defRPr>
@@ -6165,9 +7568,9 @@
                       </a:r>
                     </a:p>
                   </a:txBody>
-                  <a:tcPr>
+                  <a:tcPr anchor="ctr">
                     <a:solidFill>
-                      <a:srgbClr val="1A253C"/>
+                      <a:srgbClr val="141E33"/>
                     </a:solidFill>
                   </a:tcPr>
                 </a:tc>
@@ -6177,9 +7580,9 @@
                     <a:lstStyle/>
                     <a:p>
                       <a:pPr algn="ctr">
-                        <a:defRPr sz="1200">
+                        <a:defRPr sz="1300">
                           <a:solidFill>
-                            <a:srgbClr val="B0BCD4"/>
+                            <a:srgbClr val="CBD5E8"/>
                           </a:solidFill>
                           <a:latin typeface="Microsoft YaHei"/>
                         </a:defRPr>
@@ -6189,23 +7592,23 @@
                       </a:r>
                     </a:p>
                   </a:txBody>
-                  <a:tcPr>
+                  <a:tcPr anchor="ctr">
                     <a:solidFill>
-                      <a:srgbClr val="1A253C"/>
+                      <a:srgbClr val="141E33"/>
                     </a:solidFill>
                   </a:tcPr>
                 </a:tc>
               </a:tr>
-              <a:tr h="457200">
+              <a:tr h="594360">
                 <a:tc>
                   <a:txBody>
                     <a:bodyPr/>
                     <a:lstStyle/>
                     <a:p>
                       <a:pPr algn="ctr">
-                        <a:defRPr sz="1200">
+                        <a:defRPr sz="1300">
                           <a:solidFill>
-                            <a:srgbClr val="B0BCD4"/>
+                            <a:srgbClr val="CBD5E8"/>
                           </a:solidFill>
                           <a:latin typeface="Microsoft YaHei"/>
                         </a:defRPr>
@@ -6215,9 +7618,9 @@
                       </a:r>
                     </a:p>
                   </a:txBody>
-                  <a:tcPr>
+                  <a:tcPr anchor="ctr">
                     <a:solidFill>
-                      <a:srgbClr val="0F172A"/>
+                      <a:srgbClr val="1A2842"/>
                     </a:solidFill>
                   </a:tcPr>
                 </a:tc>
@@ -6227,9 +7630,9 @@
                     <a:lstStyle/>
                     <a:p>
                       <a:pPr algn="ctr">
-                        <a:defRPr sz="1200">
+                        <a:defRPr sz="1300">
                           <a:solidFill>
-                            <a:srgbClr val="B0BCD4"/>
+                            <a:srgbClr val="CBD5E8"/>
                           </a:solidFill>
                           <a:latin typeface="Microsoft YaHei"/>
                         </a:defRPr>
@@ -6239,23 +7642,23 @@
                       </a:r>
                     </a:p>
                   </a:txBody>
-                  <a:tcPr>
+                  <a:tcPr anchor="ctr">
                     <a:solidFill>
-                      <a:srgbClr val="0F172A"/>
+                      <a:srgbClr val="1A2842"/>
                     </a:solidFill>
                   </a:tcPr>
                 </a:tc>
               </a:tr>
-              <a:tr h="457200">
+              <a:tr h="594360">
                 <a:tc>
                   <a:txBody>
                     <a:bodyPr/>
                     <a:lstStyle/>
                     <a:p>
                       <a:pPr algn="ctr">
-                        <a:defRPr sz="1200">
+                        <a:defRPr sz="1300">
                           <a:solidFill>
-                            <a:srgbClr val="B0BCD4"/>
+                            <a:srgbClr val="CBD5E8"/>
                           </a:solidFill>
                           <a:latin typeface="Microsoft YaHei"/>
                         </a:defRPr>
@@ -6265,9 +7668,9 @@
                       </a:r>
                     </a:p>
                   </a:txBody>
-                  <a:tcPr>
+                  <a:tcPr anchor="ctr">
                     <a:solidFill>
-                      <a:srgbClr val="1A253C"/>
+                      <a:srgbClr val="141E33"/>
                     </a:solidFill>
                   </a:tcPr>
                 </a:tc>
@@ -6277,9 +7680,9 @@
                     <a:lstStyle/>
                     <a:p>
                       <a:pPr algn="ctr">
-                        <a:defRPr sz="1200">
+                        <a:defRPr sz="1300">
                           <a:solidFill>
-                            <a:srgbClr val="B0BCD4"/>
+                            <a:srgbClr val="CBD5E8"/>
                           </a:solidFill>
                           <a:latin typeface="Microsoft YaHei"/>
                         </a:defRPr>
@@ -6289,9 +7692,9 @@
                       </a:r>
                     </a:p>
                   </a:txBody>
-                  <a:tcPr>
+                  <a:tcPr anchor="ctr">
                     <a:solidFill>
-                      <a:srgbClr val="1A253C"/>
+                      <a:srgbClr val="141E33"/>
                     </a:solidFill>
                   </a:tcPr>
                 </a:tc>
@@ -6302,14 +7705,14 @@
       </p:graphicFrame>
       <p:sp>
         <p:nvSpPr>
-          <p:cNvPr id="5" name="Rectangle 4"/>
+          <p:cNvPr id="7" name="Rectangle 6"/>
           <p:cNvSpPr/>
           <p:nvPr/>
         </p:nvSpPr>
         <p:spPr>
           <a:xfrm>
-            <a:off x="0" y="6492240"/>
-            <a:ext cx="12191695" cy="25400"/>
+            <a:off x="0" y="6446520"/>
+            <a:ext cx="12191695" cy="19050"/>
           </a:xfrm>
           <a:prstGeom prst="rect">
             <a:avLst/>
@@ -6345,13 +7748,13 @@
       </p:sp>
       <p:sp>
         <p:nvSpPr>
-          <p:cNvPr id="6" name="TextBox 5"/>
+          <p:cNvPr id="8" name="TextBox 7"/>
           <p:cNvSpPr txBox="1"/>
           <p:nvPr/>
         </p:nvSpPr>
         <p:spPr>
           <a:xfrm>
-            <a:off x="457200" y="6537960"/>
+            <a:off x="457200" y="6492240"/>
             <a:ext cx="5486400" cy="274320"/>
           </a:xfrm>
           <a:prstGeom prst="rect">
@@ -6366,7 +7769,7 @@
           <a:lstStyle/>
           <a:p>
             <a:pPr algn="l">
-              <a:defRPr sz="1000" b="0">
+              <a:defRPr sz="900" b="0">
                 <a:solidFill>
                   <a:srgbClr val="6B7B9E"/>
                 </a:solidFill>
@@ -6381,13 +7784,13 @@
       </p:sp>
       <p:sp>
         <p:nvSpPr>
-          <p:cNvPr id="7" name="TextBox 6"/>
+          <p:cNvPr id="9" name="TextBox 8"/>
           <p:cNvSpPr txBox="1"/>
           <p:nvPr/>
         </p:nvSpPr>
         <p:spPr>
           <a:xfrm>
-            <a:off x="10515600" y="6537960"/>
+            <a:off x="10515600" y="6492240"/>
             <a:ext cx="1371600" cy="274320"/>
           </a:xfrm>
           <a:prstGeom prst="rect">
@@ -6402,7 +7805,7 @@
           <a:lstStyle/>
           <a:p>
             <a:pPr algn="r">
-              <a:defRPr sz="1000" b="0">
+              <a:defRPr sz="900" b="0">
                 <a:solidFill>
                   <a:srgbClr val="6B7B9E"/>
                 </a:solidFill>
@@ -6429,7 +7832,7 @@
     <p:bg>
       <p:bgPr>
         <a:solidFill>
-          <a:srgbClr val="0F172A"/>
+          <a:srgbClr val="0B1120"/>
         </a:solidFill>
         <a:effectLst/>
       </p:bgPr>
@@ -6443,14 +7846,100 @@
       <p:grpSpPr/>
       <p:sp>
         <p:nvSpPr>
-          <p:cNvPr id="2" name="TextBox 1"/>
+          <p:cNvPr id="2" name="Rectangle 1"/>
+          <p:cNvSpPr/>
+          <p:nvPr/>
+        </p:nvSpPr>
+        <p:spPr>
+          <a:xfrm>
+            <a:off x="0" y="0"/>
+            <a:ext cx="12191695" cy="1051560"/>
+          </a:xfrm>
+          <a:prstGeom prst="rect">
+            <a:avLst/>
+          </a:prstGeom>
+          <a:solidFill>
+            <a:srgbClr val="141E33"/>
+          </a:solidFill>
+          <a:ln>
+            <a:noFill/>
+          </a:ln>
+        </p:spPr>
+        <p:style>
+          <a:lnRef idx="1">
+            <a:schemeClr val="accent1"/>
+          </a:lnRef>
+          <a:fillRef idx="3">
+            <a:schemeClr val="accent1"/>
+          </a:fillRef>
+          <a:effectRef idx="2">
+            <a:schemeClr val="accent1"/>
+          </a:effectRef>
+          <a:fontRef idx="minor">
+            <a:schemeClr val="lt1"/>
+          </a:fontRef>
+        </p:style>
+        <p:txBody>
+          <a:bodyPr rtlCol="0" anchor="ctr"/>
+          <a:lstStyle/>
+          <a:p>
+            <a:pPr algn="ctr"/>
+          </a:p>
+        </p:txBody>
+      </p:sp>
+      <p:sp>
+        <p:nvSpPr>
+          <p:cNvPr id="3" name="Rectangle 2"/>
+          <p:cNvSpPr/>
+          <p:nvPr/>
+        </p:nvSpPr>
+        <p:spPr>
+          <a:xfrm>
+            <a:off x="0" y="0"/>
+            <a:ext cx="109728" cy="1051560"/>
+          </a:xfrm>
+          <a:prstGeom prst="rect">
+            <a:avLst/>
+          </a:prstGeom>
+          <a:solidFill>
+            <a:srgbClr val="00D4FF"/>
+          </a:solidFill>
+          <a:ln>
+            <a:noFill/>
+          </a:ln>
+        </p:spPr>
+        <p:style>
+          <a:lnRef idx="1">
+            <a:schemeClr val="accent1"/>
+          </a:lnRef>
+          <a:fillRef idx="3">
+            <a:schemeClr val="accent1"/>
+          </a:fillRef>
+          <a:effectRef idx="2">
+            <a:schemeClr val="accent1"/>
+          </a:effectRef>
+          <a:fontRef idx="minor">
+            <a:schemeClr val="lt1"/>
+          </a:fontRef>
+        </p:style>
+        <p:txBody>
+          <a:bodyPr rtlCol="0" anchor="ctr"/>
+          <a:lstStyle/>
+          <a:p>
+            <a:pPr algn="ctr"/>
+          </a:p>
+        </p:txBody>
+      </p:sp>
+      <p:sp>
+        <p:nvSpPr>
+          <p:cNvPr id="4" name="TextBox 3"/>
           <p:cNvSpPr txBox="1"/>
           <p:nvPr/>
         </p:nvSpPr>
         <p:spPr>
           <a:xfrm>
-            <a:off x="731520" y="365760"/>
-            <a:ext cx="10058400" cy="548640"/>
+            <a:off x="548640" y="182880"/>
+            <a:ext cx="10058400" cy="640080"/>
           </a:xfrm>
           <a:prstGeom prst="rect">
             <a:avLst/>
@@ -6479,14 +7968,14 @@
       </p:sp>
       <p:sp>
         <p:nvSpPr>
-          <p:cNvPr id="3" name="Rectangle 2"/>
+          <p:cNvPr id="5" name="Rectangle 4"/>
           <p:cNvSpPr/>
           <p:nvPr/>
         </p:nvSpPr>
         <p:spPr>
           <a:xfrm>
-            <a:off x="731520" y="1005840"/>
-            <a:ext cx="1828800" cy="38100"/>
+            <a:off x="0" y="1051560"/>
+            <a:ext cx="12191695" cy="25400"/>
           </a:xfrm>
           <a:prstGeom prst="rect">
             <a:avLst/>
@@ -6522,20 +8011,20 @@
       </p:sp>
       <p:sp>
         <p:nvSpPr>
-          <p:cNvPr id="4" name="Rounded Rectangle 3"/>
+          <p:cNvPr id="6" name="Rounded Rectangle 5"/>
           <p:cNvSpPr/>
           <p:nvPr/>
         </p:nvSpPr>
         <p:spPr>
           <a:xfrm>
-            <a:off x="457200" y="1371600"/>
-            <a:ext cx="5303520" cy="4754880"/>
+            <a:off x="365760" y="1371600"/>
+            <a:ext cx="5486400" cy="4846320"/>
           </a:xfrm>
           <a:prstGeom prst="roundRect">
             <a:avLst/>
           </a:prstGeom>
           <a:solidFill>
-            <a:srgbClr val="1A253C"/>
+            <a:srgbClr val="141E33"/>
           </a:solidFill>
           <a:ln>
             <a:noFill/>
@@ -6565,14 +8054,57 @@
       </p:sp>
       <p:sp>
         <p:nvSpPr>
-          <p:cNvPr id="5" name="TextBox 4"/>
+          <p:cNvPr id="7" name="Rectangle 6"/>
+          <p:cNvSpPr/>
+          <p:nvPr/>
+        </p:nvSpPr>
+        <p:spPr>
+          <a:xfrm>
+            <a:off x="365760" y="1371600"/>
+            <a:ext cx="5486400" cy="73152"/>
+          </a:xfrm>
+          <a:prstGeom prst="rect">
+            <a:avLst/>
+          </a:prstGeom>
+          <a:solidFill>
+            <a:srgbClr val="00D4FF"/>
+          </a:solidFill>
+          <a:ln>
+            <a:noFill/>
+          </a:ln>
+        </p:spPr>
+        <p:style>
+          <a:lnRef idx="1">
+            <a:schemeClr val="accent1"/>
+          </a:lnRef>
+          <a:fillRef idx="3">
+            <a:schemeClr val="accent1"/>
+          </a:fillRef>
+          <a:effectRef idx="2">
+            <a:schemeClr val="accent1"/>
+          </a:effectRef>
+          <a:fontRef idx="minor">
+            <a:schemeClr val="lt1"/>
+          </a:fontRef>
+        </p:style>
+        <p:txBody>
+          <a:bodyPr rtlCol="0" anchor="ctr"/>
+          <a:lstStyle/>
+          <a:p>
+            <a:pPr algn="ctr"/>
+          </a:p>
+        </p:txBody>
+      </p:sp>
+      <p:sp>
+        <p:nvSpPr>
+          <p:cNvPr id="8" name="TextBox 7"/>
           <p:cNvSpPr txBox="1"/>
           <p:nvPr/>
         </p:nvSpPr>
         <p:spPr>
           <a:xfrm>
-            <a:off x="731520" y="1554480"/>
-            <a:ext cx="4572000" cy="457200"/>
+            <a:off x="640080" y="1645920"/>
+            <a:ext cx="4937760" cy="457200"/>
           </a:xfrm>
           <a:prstGeom prst="rect">
             <a:avLst/>
@@ -6586,7 +8118,7 @@
           <a:lstStyle/>
           <a:p>
             <a:pPr algn="l">
-              <a:defRPr sz="1800" b="1">
+              <a:defRPr sz="2000" b="1">
                 <a:solidFill>
                   <a:srgbClr val="00D4FF"/>
                 </a:solidFill>
@@ -6601,128 +8133,20 @@
       </p:sp>
       <p:sp>
         <p:nvSpPr>
-          <p:cNvPr id="6" name="TextBox 5"/>
-          <p:cNvSpPr txBox="1"/>
-          <p:nvPr/>
-        </p:nvSpPr>
-        <p:spPr>
-          <a:xfrm>
-            <a:off x="914400" y="2194560"/>
-            <a:ext cx="4572000" cy="457200"/>
-          </a:xfrm>
-          <a:prstGeom prst="rect">
-            <a:avLst/>
-          </a:prstGeom>
-          <a:noFill/>
-        </p:spPr>
-        <p:txBody>
-          <a:bodyPr wrap="square">
-            <a:spAutoFit/>
-          </a:bodyPr>
-          <a:lstStyle/>
-          <a:p>
-            <a:pPr algn="l">
-              <a:defRPr sz="1400" b="0">
-                <a:solidFill>
-                  <a:srgbClr val="B0BCD4"/>
-                </a:solidFill>
-                <a:latin typeface="Microsoft YaHei"/>
-              </a:defRPr>
-            </a:pPr>
-            <a:r>
-              <a:t>• 快速上手出作品</a:t>
-            </a:r>
-          </a:p>
-        </p:txBody>
-      </p:sp>
-      <p:sp>
-        <p:nvSpPr>
-          <p:cNvPr id="7" name="TextBox 6"/>
-          <p:cNvSpPr txBox="1"/>
-          <p:nvPr/>
-        </p:nvSpPr>
-        <p:spPr>
-          <a:xfrm>
-            <a:off x="914400" y="2788920"/>
-            <a:ext cx="4572000" cy="457200"/>
-          </a:xfrm>
-          <a:prstGeom prst="rect">
-            <a:avLst/>
-          </a:prstGeom>
-          <a:noFill/>
-        </p:spPr>
-        <p:txBody>
-          <a:bodyPr wrap="square">
-            <a:spAutoFit/>
-          </a:bodyPr>
-          <a:lstStyle/>
-          <a:p>
-            <a:pPr algn="l">
-              <a:defRPr sz="1400" b="0">
-                <a:solidFill>
-                  <a:srgbClr val="B0BCD4"/>
-                </a:solidFill>
-                <a:latin typeface="Microsoft YaHei"/>
-              </a:defRPr>
-            </a:pPr>
-            <a:r>
-              <a:t>• 重点模块：1,2,3,4,6,10,11,12,17</a:t>
-            </a:r>
-          </a:p>
-        </p:txBody>
-      </p:sp>
-      <p:sp>
-        <p:nvSpPr>
-          <p:cNvPr id="8" name="TextBox 7"/>
-          <p:cNvSpPr txBox="1"/>
-          <p:nvPr/>
-        </p:nvSpPr>
-        <p:spPr>
-          <a:xfrm>
-            <a:off x="914400" y="3383280"/>
-            <a:ext cx="4572000" cy="457200"/>
-          </a:xfrm>
-          <a:prstGeom prst="rect">
-            <a:avLst/>
-          </a:prstGeom>
-          <a:noFill/>
-        </p:spPr>
-        <p:txBody>
-          <a:bodyPr wrap="square">
-            <a:spAutoFit/>
-          </a:bodyPr>
-          <a:lstStyle/>
-          <a:p>
-            <a:pPr algn="l">
-              <a:defRPr sz="1400" b="0">
-                <a:solidFill>
-                  <a:srgbClr val="B0BCD4"/>
-                </a:solidFill>
-                <a:latin typeface="Microsoft YaHei"/>
-              </a:defRPr>
-            </a:pPr>
-            <a:r>
-              <a:t>• 适合：想快速入行变现</a:t>
-            </a:r>
-          </a:p>
-        </p:txBody>
-      </p:sp>
-      <p:sp>
-        <p:nvSpPr>
-          <p:cNvPr id="9" name="Rounded Rectangle 8"/>
+          <p:cNvPr id="9" name="Rectangle 8"/>
           <p:cNvSpPr/>
           <p:nvPr/>
         </p:nvSpPr>
         <p:spPr>
           <a:xfrm>
-            <a:off x="6217920" y="1371600"/>
-            <a:ext cx="5303520" cy="4754880"/>
-          </a:xfrm>
-          <a:prstGeom prst="roundRect">
-            <a:avLst/>
-          </a:prstGeom>
-          <a:solidFill>
-            <a:srgbClr val="1A253C"/>
+            <a:off x="640080" y="2194560"/>
+            <a:ext cx="1371600" cy="38100"/>
+          </a:xfrm>
+          <a:prstGeom prst="rect">
+            <a:avLst/>
+          </a:prstGeom>
+          <a:solidFill>
+            <a:srgbClr val="00D4FF"/>
           </a:solidFill>
           <a:ln>
             <a:noFill/>
@@ -6752,14 +8176,57 @@
       </p:sp>
       <p:sp>
         <p:nvSpPr>
-          <p:cNvPr id="10" name="TextBox 9"/>
+          <p:cNvPr id="10" name="Oval 9"/>
+          <p:cNvSpPr/>
+          <p:nvPr/>
+        </p:nvSpPr>
+        <p:spPr>
+          <a:xfrm>
+            <a:off x="731520" y="2542032"/>
+            <a:ext cx="182880" cy="182880"/>
+          </a:xfrm>
+          <a:prstGeom prst="ellipse">
+            <a:avLst/>
+          </a:prstGeom>
+          <a:solidFill>
+            <a:srgbClr val="00D4FF"/>
+          </a:solidFill>
+          <a:ln>
+            <a:noFill/>
+          </a:ln>
+        </p:spPr>
+        <p:style>
+          <a:lnRef idx="1">
+            <a:schemeClr val="accent1"/>
+          </a:lnRef>
+          <a:fillRef idx="3">
+            <a:schemeClr val="accent1"/>
+          </a:fillRef>
+          <a:effectRef idx="2">
+            <a:schemeClr val="accent1"/>
+          </a:effectRef>
+          <a:fontRef idx="minor">
+            <a:schemeClr val="lt1"/>
+          </a:fontRef>
+        </p:style>
+        <p:txBody>
+          <a:bodyPr rtlCol="0" anchor="ctr"/>
+          <a:lstStyle/>
+          <a:p>
+            <a:pPr algn="ctr"/>
+          </a:p>
+        </p:txBody>
+      </p:sp>
+      <p:sp>
+        <p:nvSpPr>
+          <p:cNvPr id="11" name="TextBox 10"/>
           <p:cNvSpPr txBox="1"/>
           <p:nvPr/>
         </p:nvSpPr>
         <p:spPr>
           <a:xfrm>
-            <a:off x="6492240" y="1554480"/>
-            <a:ext cx="4572000" cy="457200"/>
+            <a:off x="1051560" y="2468880"/>
+            <a:ext cx="4572000" cy="502920"/>
           </a:xfrm>
           <a:prstGeom prst="rect">
             <a:avLst/>
@@ -6773,7 +8240,287 @@
           <a:lstStyle/>
           <a:p>
             <a:pPr algn="l">
-              <a:defRPr sz="1800" b="1">
+              <a:defRPr sz="1400" b="0">
+                <a:solidFill>
+                  <a:srgbClr val="CBD5E8"/>
+                </a:solidFill>
+                <a:latin typeface="Microsoft YaHei"/>
+              </a:defRPr>
+            </a:pPr>
+            <a:r>
+              <a:t>快速上手出作品</a:t>
+            </a:r>
+          </a:p>
+        </p:txBody>
+      </p:sp>
+      <p:sp>
+        <p:nvSpPr>
+          <p:cNvPr id="12" name="Oval 11"/>
+          <p:cNvSpPr/>
+          <p:nvPr/>
+        </p:nvSpPr>
+        <p:spPr>
+          <a:xfrm>
+            <a:off x="731520" y="3136392"/>
+            <a:ext cx="182880" cy="182880"/>
+          </a:xfrm>
+          <a:prstGeom prst="ellipse">
+            <a:avLst/>
+          </a:prstGeom>
+          <a:solidFill>
+            <a:srgbClr val="00D4FF"/>
+          </a:solidFill>
+          <a:ln>
+            <a:noFill/>
+          </a:ln>
+        </p:spPr>
+        <p:style>
+          <a:lnRef idx="1">
+            <a:schemeClr val="accent1"/>
+          </a:lnRef>
+          <a:fillRef idx="3">
+            <a:schemeClr val="accent1"/>
+          </a:fillRef>
+          <a:effectRef idx="2">
+            <a:schemeClr val="accent1"/>
+          </a:effectRef>
+          <a:fontRef idx="minor">
+            <a:schemeClr val="lt1"/>
+          </a:fontRef>
+        </p:style>
+        <p:txBody>
+          <a:bodyPr rtlCol="0" anchor="ctr"/>
+          <a:lstStyle/>
+          <a:p>
+            <a:pPr algn="ctr"/>
+          </a:p>
+        </p:txBody>
+      </p:sp>
+      <p:sp>
+        <p:nvSpPr>
+          <p:cNvPr id="13" name="TextBox 12"/>
+          <p:cNvSpPr txBox="1"/>
+          <p:nvPr/>
+        </p:nvSpPr>
+        <p:spPr>
+          <a:xfrm>
+            <a:off x="1051560" y="3063240"/>
+            <a:ext cx="4572000" cy="502920"/>
+          </a:xfrm>
+          <a:prstGeom prst="rect">
+            <a:avLst/>
+          </a:prstGeom>
+          <a:noFill/>
+        </p:spPr>
+        <p:txBody>
+          <a:bodyPr wrap="square">
+            <a:spAutoFit/>
+          </a:bodyPr>
+          <a:lstStyle/>
+          <a:p>
+            <a:pPr algn="l">
+              <a:defRPr sz="1400" b="0">
+                <a:solidFill>
+                  <a:srgbClr val="CBD5E8"/>
+                </a:solidFill>
+                <a:latin typeface="Microsoft YaHei"/>
+              </a:defRPr>
+            </a:pPr>
+            <a:r>
+              <a:t>重点模块：1,2,3,4,6,10,11,12,17</a:t>
+            </a:r>
+          </a:p>
+        </p:txBody>
+      </p:sp>
+      <p:sp>
+        <p:nvSpPr>
+          <p:cNvPr id="14" name="Oval 13"/>
+          <p:cNvSpPr/>
+          <p:nvPr/>
+        </p:nvSpPr>
+        <p:spPr>
+          <a:xfrm>
+            <a:off x="731520" y="3730752"/>
+            <a:ext cx="182880" cy="182880"/>
+          </a:xfrm>
+          <a:prstGeom prst="ellipse">
+            <a:avLst/>
+          </a:prstGeom>
+          <a:solidFill>
+            <a:srgbClr val="00D4FF"/>
+          </a:solidFill>
+          <a:ln>
+            <a:noFill/>
+          </a:ln>
+        </p:spPr>
+        <p:style>
+          <a:lnRef idx="1">
+            <a:schemeClr val="accent1"/>
+          </a:lnRef>
+          <a:fillRef idx="3">
+            <a:schemeClr val="accent1"/>
+          </a:fillRef>
+          <a:effectRef idx="2">
+            <a:schemeClr val="accent1"/>
+          </a:effectRef>
+          <a:fontRef idx="minor">
+            <a:schemeClr val="lt1"/>
+          </a:fontRef>
+        </p:style>
+        <p:txBody>
+          <a:bodyPr rtlCol="0" anchor="ctr"/>
+          <a:lstStyle/>
+          <a:p>
+            <a:pPr algn="ctr"/>
+          </a:p>
+        </p:txBody>
+      </p:sp>
+      <p:sp>
+        <p:nvSpPr>
+          <p:cNvPr id="15" name="TextBox 14"/>
+          <p:cNvSpPr txBox="1"/>
+          <p:nvPr/>
+        </p:nvSpPr>
+        <p:spPr>
+          <a:xfrm>
+            <a:off x="1051560" y="3657600"/>
+            <a:ext cx="4572000" cy="502920"/>
+          </a:xfrm>
+          <a:prstGeom prst="rect">
+            <a:avLst/>
+          </a:prstGeom>
+          <a:noFill/>
+        </p:spPr>
+        <p:txBody>
+          <a:bodyPr wrap="square">
+            <a:spAutoFit/>
+          </a:bodyPr>
+          <a:lstStyle/>
+          <a:p>
+            <a:pPr algn="l">
+              <a:defRPr sz="1400" b="0">
+                <a:solidFill>
+                  <a:srgbClr val="CBD5E8"/>
+                </a:solidFill>
+                <a:latin typeface="Microsoft YaHei"/>
+              </a:defRPr>
+            </a:pPr>
+            <a:r>
+              <a:t>适合：想快速入行变现</a:t>
+            </a:r>
+          </a:p>
+        </p:txBody>
+      </p:sp>
+      <p:sp>
+        <p:nvSpPr>
+          <p:cNvPr id="16" name="Rounded Rectangle 15"/>
+          <p:cNvSpPr/>
+          <p:nvPr/>
+        </p:nvSpPr>
+        <p:spPr>
+          <a:xfrm>
+            <a:off x="6217920" y="1371600"/>
+            <a:ext cx="5486400" cy="4846320"/>
+          </a:xfrm>
+          <a:prstGeom prst="roundRect">
+            <a:avLst/>
+          </a:prstGeom>
+          <a:solidFill>
+            <a:srgbClr val="141E33"/>
+          </a:solidFill>
+          <a:ln>
+            <a:noFill/>
+          </a:ln>
+        </p:spPr>
+        <p:style>
+          <a:lnRef idx="1">
+            <a:schemeClr val="accent1"/>
+          </a:lnRef>
+          <a:fillRef idx="3">
+            <a:schemeClr val="accent1"/>
+          </a:fillRef>
+          <a:effectRef idx="2">
+            <a:schemeClr val="accent1"/>
+          </a:effectRef>
+          <a:fontRef idx="minor">
+            <a:schemeClr val="lt1"/>
+          </a:fontRef>
+        </p:style>
+        <p:txBody>
+          <a:bodyPr rtlCol="0" anchor="ctr"/>
+          <a:lstStyle/>
+          <a:p>
+            <a:pPr algn="ctr"/>
+          </a:p>
+        </p:txBody>
+      </p:sp>
+      <p:sp>
+        <p:nvSpPr>
+          <p:cNvPr id="17" name="Rectangle 16"/>
+          <p:cNvSpPr/>
+          <p:nvPr/>
+        </p:nvSpPr>
+        <p:spPr>
+          <a:xfrm>
+            <a:off x="6217920" y="1371600"/>
+            <a:ext cx="5486400" cy="73152"/>
+          </a:xfrm>
+          <a:prstGeom prst="rect">
+            <a:avLst/>
+          </a:prstGeom>
+          <a:solidFill>
+            <a:srgbClr val="7C3AED"/>
+          </a:solidFill>
+          <a:ln>
+            <a:noFill/>
+          </a:ln>
+        </p:spPr>
+        <p:style>
+          <a:lnRef idx="1">
+            <a:schemeClr val="accent1"/>
+          </a:lnRef>
+          <a:fillRef idx="3">
+            <a:schemeClr val="accent1"/>
+          </a:fillRef>
+          <a:effectRef idx="2">
+            <a:schemeClr val="accent1"/>
+          </a:effectRef>
+          <a:fontRef idx="minor">
+            <a:schemeClr val="lt1"/>
+          </a:fontRef>
+        </p:style>
+        <p:txBody>
+          <a:bodyPr rtlCol="0" anchor="ctr"/>
+          <a:lstStyle/>
+          <a:p>
+            <a:pPr algn="ctr"/>
+          </a:p>
+        </p:txBody>
+      </p:sp>
+      <p:sp>
+        <p:nvSpPr>
+          <p:cNvPr id="18" name="TextBox 17"/>
+          <p:cNvSpPr txBox="1"/>
+          <p:nvPr/>
+        </p:nvSpPr>
+        <p:spPr>
+          <a:xfrm>
+            <a:off x="6492240" y="1645920"/>
+            <a:ext cx="4937760" cy="457200"/>
+          </a:xfrm>
+          <a:prstGeom prst="rect">
+            <a:avLst/>
+          </a:prstGeom>
+          <a:noFill/>
+        </p:spPr>
+        <p:txBody>
+          <a:bodyPr wrap="square">
+            <a:spAutoFit/>
+          </a:bodyPr>
+          <a:lstStyle/>
+          <a:p>
+            <a:pPr algn="l">
+              <a:defRPr sz="2000" b="1">
                 <a:solidFill>
                   <a:srgbClr val="7C3AED"/>
                 </a:solidFill>
@@ -6788,128 +8535,20 @@
       </p:sp>
       <p:sp>
         <p:nvSpPr>
-          <p:cNvPr id="11" name="TextBox 10"/>
-          <p:cNvSpPr txBox="1"/>
-          <p:nvPr/>
-        </p:nvSpPr>
-        <p:spPr>
-          <a:xfrm>
-            <a:off x="6675120" y="2194560"/>
-            <a:ext cx="4572000" cy="457200"/>
-          </a:xfrm>
-          <a:prstGeom prst="rect">
-            <a:avLst/>
-          </a:prstGeom>
-          <a:noFill/>
-        </p:spPr>
-        <p:txBody>
-          <a:bodyPr wrap="square">
-            <a:spAutoFit/>
-          </a:bodyPr>
-          <a:lstStyle/>
-          <a:p>
-            <a:pPr algn="l">
-              <a:defRPr sz="1400" b="0">
-                <a:solidFill>
-                  <a:srgbClr val="B0BCD4"/>
-                </a:solidFill>
-                <a:latin typeface="Microsoft YaHei"/>
-              </a:defRPr>
-            </a:pPr>
-            <a:r>
-              <a:t>• 全面掌握全链路</a:t>
-            </a:r>
-          </a:p>
-        </p:txBody>
-      </p:sp>
-      <p:sp>
-        <p:nvSpPr>
-          <p:cNvPr id="12" name="TextBox 11"/>
-          <p:cNvSpPr txBox="1"/>
-          <p:nvPr/>
-        </p:nvSpPr>
-        <p:spPr>
-          <a:xfrm>
-            <a:off x="6675120" y="2788920"/>
-            <a:ext cx="4572000" cy="457200"/>
-          </a:xfrm>
-          <a:prstGeom prst="rect">
-            <a:avLst/>
-          </a:prstGeom>
-          <a:noFill/>
-        </p:spPr>
-        <p:txBody>
-          <a:bodyPr wrap="square">
-            <a:spAutoFit/>
-          </a:bodyPr>
-          <a:lstStyle/>
-          <a:p>
-            <a:pPr algn="l">
-              <a:defRPr sz="1400" b="0">
-                <a:solidFill>
-                  <a:srgbClr val="B0BCD4"/>
-                </a:solidFill>
-                <a:latin typeface="Microsoft YaHei"/>
-              </a:defRPr>
-            </a:pPr>
-            <a:r>
-              <a:t>• 全部17个模块</a:t>
-            </a:r>
-          </a:p>
-        </p:txBody>
-      </p:sp>
-      <p:sp>
-        <p:nvSpPr>
-          <p:cNvPr id="13" name="TextBox 12"/>
-          <p:cNvSpPr txBox="1"/>
-          <p:nvPr/>
-        </p:nvSpPr>
-        <p:spPr>
-          <a:xfrm>
-            <a:off x="6675120" y="3383280"/>
-            <a:ext cx="4572000" cy="457200"/>
-          </a:xfrm>
-          <a:prstGeom prst="rect">
-            <a:avLst/>
-          </a:prstGeom>
-          <a:noFill/>
-        </p:spPr>
-        <p:txBody>
-          <a:bodyPr wrap="square">
-            <a:spAutoFit/>
-          </a:bodyPr>
-          <a:lstStyle/>
-          <a:p>
-            <a:pPr algn="l">
-              <a:defRPr sz="1400" b="0">
-                <a:solidFill>
-                  <a:srgbClr val="B0BCD4"/>
-                </a:solidFill>
-                <a:latin typeface="Microsoft YaHei"/>
-              </a:defRPr>
-            </a:pPr>
-            <a:r>
-              <a:t>• 适合：追求专业深度</a:t>
-            </a:r>
-          </a:p>
-        </p:txBody>
-      </p:sp>
-      <p:sp>
-        <p:nvSpPr>
-          <p:cNvPr id="14" name="Rectangle 13"/>
+          <p:cNvPr id="19" name="Rectangle 18"/>
           <p:cNvSpPr/>
           <p:nvPr/>
         </p:nvSpPr>
         <p:spPr>
           <a:xfrm>
-            <a:off x="0" y="6492240"/>
-            <a:ext cx="12191695" cy="25400"/>
-          </a:xfrm>
-          <a:prstGeom prst="rect">
-            <a:avLst/>
-          </a:prstGeom>
-          <a:solidFill>
-            <a:srgbClr val="2D3B55"/>
+            <a:off x="6492240" y="2194560"/>
+            <a:ext cx="1371600" cy="38100"/>
+          </a:xfrm>
+          <a:prstGeom prst="rect">
+            <a:avLst/>
+          </a:prstGeom>
+          <a:solidFill>
+            <a:srgbClr val="7C3AED"/>
           </a:solidFill>
           <a:ln>
             <a:noFill/>
@@ -6939,14 +8578,57 @@
       </p:sp>
       <p:sp>
         <p:nvSpPr>
-          <p:cNvPr id="15" name="TextBox 14"/>
+          <p:cNvPr id="20" name="Oval 19"/>
+          <p:cNvSpPr/>
+          <p:nvPr/>
+        </p:nvSpPr>
+        <p:spPr>
+          <a:xfrm>
+            <a:off x="6583680" y="2542032"/>
+            <a:ext cx="182880" cy="182880"/>
+          </a:xfrm>
+          <a:prstGeom prst="ellipse">
+            <a:avLst/>
+          </a:prstGeom>
+          <a:solidFill>
+            <a:srgbClr val="7C3AED"/>
+          </a:solidFill>
+          <a:ln>
+            <a:noFill/>
+          </a:ln>
+        </p:spPr>
+        <p:style>
+          <a:lnRef idx="1">
+            <a:schemeClr val="accent1"/>
+          </a:lnRef>
+          <a:fillRef idx="3">
+            <a:schemeClr val="accent1"/>
+          </a:fillRef>
+          <a:effectRef idx="2">
+            <a:schemeClr val="accent1"/>
+          </a:effectRef>
+          <a:fontRef idx="minor">
+            <a:schemeClr val="lt1"/>
+          </a:fontRef>
+        </p:style>
+        <p:txBody>
+          <a:bodyPr rtlCol="0" anchor="ctr"/>
+          <a:lstStyle/>
+          <a:p>
+            <a:pPr algn="ctr"/>
+          </a:p>
+        </p:txBody>
+      </p:sp>
+      <p:sp>
+        <p:nvSpPr>
+          <p:cNvPr id="21" name="TextBox 20"/>
           <p:cNvSpPr txBox="1"/>
           <p:nvPr/>
         </p:nvSpPr>
         <p:spPr>
           <a:xfrm>
-            <a:off x="457200" y="6537960"/>
-            <a:ext cx="5486400" cy="274320"/>
+            <a:off x="6903720" y="2468880"/>
+            <a:ext cx="4572000" cy="502920"/>
           </a:xfrm>
           <a:prstGeom prst="rect">
             <a:avLst/>
@@ -6960,7 +8642,244 @@
           <a:lstStyle/>
           <a:p>
             <a:pPr algn="l">
-              <a:defRPr sz="1000" b="0">
+              <a:defRPr sz="1400" b="0">
+                <a:solidFill>
+                  <a:srgbClr val="CBD5E8"/>
+                </a:solidFill>
+                <a:latin typeface="Microsoft YaHei"/>
+              </a:defRPr>
+            </a:pPr>
+            <a:r>
+              <a:t>全面掌握全链路</a:t>
+            </a:r>
+          </a:p>
+        </p:txBody>
+      </p:sp>
+      <p:sp>
+        <p:nvSpPr>
+          <p:cNvPr id="22" name="Oval 21"/>
+          <p:cNvSpPr/>
+          <p:nvPr/>
+        </p:nvSpPr>
+        <p:spPr>
+          <a:xfrm>
+            <a:off x="6583680" y="3136392"/>
+            <a:ext cx="182880" cy="182880"/>
+          </a:xfrm>
+          <a:prstGeom prst="ellipse">
+            <a:avLst/>
+          </a:prstGeom>
+          <a:solidFill>
+            <a:srgbClr val="7C3AED"/>
+          </a:solidFill>
+          <a:ln>
+            <a:noFill/>
+          </a:ln>
+        </p:spPr>
+        <p:style>
+          <a:lnRef idx="1">
+            <a:schemeClr val="accent1"/>
+          </a:lnRef>
+          <a:fillRef idx="3">
+            <a:schemeClr val="accent1"/>
+          </a:fillRef>
+          <a:effectRef idx="2">
+            <a:schemeClr val="accent1"/>
+          </a:effectRef>
+          <a:fontRef idx="minor">
+            <a:schemeClr val="lt1"/>
+          </a:fontRef>
+        </p:style>
+        <p:txBody>
+          <a:bodyPr rtlCol="0" anchor="ctr"/>
+          <a:lstStyle/>
+          <a:p>
+            <a:pPr algn="ctr"/>
+          </a:p>
+        </p:txBody>
+      </p:sp>
+      <p:sp>
+        <p:nvSpPr>
+          <p:cNvPr id="23" name="TextBox 22"/>
+          <p:cNvSpPr txBox="1"/>
+          <p:nvPr/>
+        </p:nvSpPr>
+        <p:spPr>
+          <a:xfrm>
+            <a:off x="6903720" y="3063240"/>
+            <a:ext cx="4572000" cy="502920"/>
+          </a:xfrm>
+          <a:prstGeom prst="rect">
+            <a:avLst/>
+          </a:prstGeom>
+          <a:noFill/>
+        </p:spPr>
+        <p:txBody>
+          <a:bodyPr wrap="square">
+            <a:spAutoFit/>
+          </a:bodyPr>
+          <a:lstStyle/>
+          <a:p>
+            <a:pPr algn="l">
+              <a:defRPr sz="1400" b="0">
+                <a:solidFill>
+                  <a:srgbClr val="CBD5E8"/>
+                </a:solidFill>
+                <a:latin typeface="Microsoft YaHei"/>
+              </a:defRPr>
+            </a:pPr>
+            <a:r>
+              <a:t>全部17个模块</a:t>
+            </a:r>
+          </a:p>
+        </p:txBody>
+      </p:sp>
+      <p:sp>
+        <p:nvSpPr>
+          <p:cNvPr id="24" name="Oval 23"/>
+          <p:cNvSpPr/>
+          <p:nvPr/>
+        </p:nvSpPr>
+        <p:spPr>
+          <a:xfrm>
+            <a:off x="6583680" y="3730752"/>
+            <a:ext cx="182880" cy="182880"/>
+          </a:xfrm>
+          <a:prstGeom prst="ellipse">
+            <a:avLst/>
+          </a:prstGeom>
+          <a:solidFill>
+            <a:srgbClr val="7C3AED"/>
+          </a:solidFill>
+          <a:ln>
+            <a:noFill/>
+          </a:ln>
+        </p:spPr>
+        <p:style>
+          <a:lnRef idx="1">
+            <a:schemeClr val="accent1"/>
+          </a:lnRef>
+          <a:fillRef idx="3">
+            <a:schemeClr val="accent1"/>
+          </a:fillRef>
+          <a:effectRef idx="2">
+            <a:schemeClr val="accent1"/>
+          </a:effectRef>
+          <a:fontRef idx="minor">
+            <a:schemeClr val="lt1"/>
+          </a:fontRef>
+        </p:style>
+        <p:txBody>
+          <a:bodyPr rtlCol="0" anchor="ctr"/>
+          <a:lstStyle/>
+          <a:p>
+            <a:pPr algn="ctr"/>
+          </a:p>
+        </p:txBody>
+      </p:sp>
+      <p:sp>
+        <p:nvSpPr>
+          <p:cNvPr id="25" name="TextBox 24"/>
+          <p:cNvSpPr txBox="1"/>
+          <p:nvPr/>
+        </p:nvSpPr>
+        <p:spPr>
+          <a:xfrm>
+            <a:off x="6903720" y="3657600"/>
+            <a:ext cx="4572000" cy="502920"/>
+          </a:xfrm>
+          <a:prstGeom prst="rect">
+            <a:avLst/>
+          </a:prstGeom>
+          <a:noFill/>
+        </p:spPr>
+        <p:txBody>
+          <a:bodyPr wrap="square">
+            <a:spAutoFit/>
+          </a:bodyPr>
+          <a:lstStyle/>
+          <a:p>
+            <a:pPr algn="l">
+              <a:defRPr sz="1400" b="0">
+                <a:solidFill>
+                  <a:srgbClr val="CBD5E8"/>
+                </a:solidFill>
+                <a:latin typeface="Microsoft YaHei"/>
+              </a:defRPr>
+            </a:pPr>
+            <a:r>
+              <a:t>适合：追求专业深度</a:t>
+            </a:r>
+          </a:p>
+        </p:txBody>
+      </p:sp>
+      <p:sp>
+        <p:nvSpPr>
+          <p:cNvPr id="26" name="Rectangle 25"/>
+          <p:cNvSpPr/>
+          <p:nvPr/>
+        </p:nvSpPr>
+        <p:spPr>
+          <a:xfrm>
+            <a:off x="0" y="6446520"/>
+            <a:ext cx="12191695" cy="19050"/>
+          </a:xfrm>
+          <a:prstGeom prst="rect">
+            <a:avLst/>
+          </a:prstGeom>
+          <a:solidFill>
+            <a:srgbClr val="2D3B55"/>
+          </a:solidFill>
+          <a:ln>
+            <a:noFill/>
+          </a:ln>
+        </p:spPr>
+        <p:style>
+          <a:lnRef idx="1">
+            <a:schemeClr val="accent1"/>
+          </a:lnRef>
+          <a:fillRef idx="3">
+            <a:schemeClr val="accent1"/>
+          </a:fillRef>
+          <a:effectRef idx="2">
+            <a:schemeClr val="accent1"/>
+          </a:effectRef>
+          <a:fontRef idx="minor">
+            <a:schemeClr val="lt1"/>
+          </a:fontRef>
+        </p:style>
+        <p:txBody>
+          <a:bodyPr rtlCol="0" anchor="ctr"/>
+          <a:lstStyle/>
+          <a:p>
+            <a:pPr algn="ctr"/>
+          </a:p>
+        </p:txBody>
+      </p:sp>
+      <p:sp>
+        <p:nvSpPr>
+          <p:cNvPr id="27" name="TextBox 26"/>
+          <p:cNvSpPr txBox="1"/>
+          <p:nvPr/>
+        </p:nvSpPr>
+        <p:spPr>
+          <a:xfrm>
+            <a:off x="457200" y="6492240"/>
+            <a:ext cx="5486400" cy="274320"/>
+          </a:xfrm>
+          <a:prstGeom prst="rect">
+            <a:avLst/>
+          </a:prstGeom>
+          <a:noFill/>
+        </p:spPr>
+        <p:txBody>
+          <a:bodyPr wrap="square">
+            <a:spAutoFit/>
+          </a:bodyPr>
+          <a:lstStyle/>
+          <a:p>
+            <a:pPr algn="l">
+              <a:defRPr sz="900" b="0">
                 <a:solidFill>
                   <a:srgbClr val="6B7B9E"/>
                 </a:solidFill>
@@ -6975,13 +8894,13 @@
       </p:sp>
       <p:sp>
         <p:nvSpPr>
-          <p:cNvPr id="16" name="TextBox 15"/>
+          <p:cNvPr id="28" name="TextBox 27"/>
           <p:cNvSpPr txBox="1"/>
           <p:nvPr/>
         </p:nvSpPr>
         <p:spPr>
           <a:xfrm>
-            <a:off x="10515600" y="6537960"/>
+            <a:off x="10515600" y="6492240"/>
             <a:ext cx="1371600" cy="274320"/>
           </a:xfrm>
           <a:prstGeom prst="rect">
@@ -6996,7 +8915,7 @@
           <a:lstStyle/>
           <a:p>
             <a:pPr algn="r">
-              <a:defRPr sz="1000" b="0">
+              <a:defRPr sz="900" b="0">
                 <a:solidFill>
                   <a:srgbClr val="6B7B9E"/>
                 </a:solidFill>
@@ -7023,7 +8942,7 @@
     <p:bg>
       <p:bgPr>
         <a:solidFill>
-          <a:srgbClr val="0F172A"/>
+          <a:srgbClr val="0B1120"/>
         </a:solidFill>
         <a:effectLst/>
       </p:bgPr>
@@ -7037,14 +8956,100 @@
       <p:grpSpPr/>
       <p:sp>
         <p:nvSpPr>
-          <p:cNvPr id="2" name="TextBox 1"/>
+          <p:cNvPr id="2" name="Rectangle 1"/>
+          <p:cNvSpPr/>
+          <p:nvPr/>
+        </p:nvSpPr>
+        <p:spPr>
+          <a:xfrm>
+            <a:off x="0" y="0"/>
+            <a:ext cx="12191695" cy="1051560"/>
+          </a:xfrm>
+          <a:prstGeom prst="rect">
+            <a:avLst/>
+          </a:prstGeom>
+          <a:solidFill>
+            <a:srgbClr val="141E33"/>
+          </a:solidFill>
+          <a:ln>
+            <a:noFill/>
+          </a:ln>
+        </p:spPr>
+        <p:style>
+          <a:lnRef idx="1">
+            <a:schemeClr val="accent1"/>
+          </a:lnRef>
+          <a:fillRef idx="3">
+            <a:schemeClr val="accent1"/>
+          </a:fillRef>
+          <a:effectRef idx="2">
+            <a:schemeClr val="accent1"/>
+          </a:effectRef>
+          <a:fontRef idx="minor">
+            <a:schemeClr val="lt1"/>
+          </a:fontRef>
+        </p:style>
+        <p:txBody>
+          <a:bodyPr rtlCol="0" anchor="ctr"/>
+          <a:lstStyle/>
+          <a:p>
+            <a:pPr algn="ctr"/>
+          </a:p>
+        </p:txBody>
+      </p:sp>
+      <p:sp>
+        <p:nvSpPr>
+          <p:cNvPr id="3" name="Rectangle 2"/>
+          <p:cNvSpPr/>
+          <p:nvPr/>
+        </p:nvSpPr>
+        <p:spPr>
+          <a:xfrm>
+            <a:off x="0" y="0"/>
+            <a:ext cx="109728" cy="1051560"/>
+          </a:xfrm>
+          <a:prstGeom prst="rect">
+            <a:avLst/>
+          </a:prstGeom>
+          <a:solidFill>
+            <a:srgbClr val="00D4FF"/>
+          </a:solidFill>
+          <a:ln>
+            <a:noFill/>
+          </a:ln>
+        </p:spPr>
+        <p:style>
+          <a:lnRef idx="1">
+            <a:schemeClr val="accent1"/>
+          </a:lnRef>
+          <a:fillRef idx="3">
+            <a:schemeClr val="accent1"/>
+          </a:fillRef>
+          <a:effectRef idx="2">
+            <a:schemeClr val="accent1"/>
+          </a:effectRef>
+          <a:fontRef idx="minor">
+            <a:schemeClr val="lt1"/>
+          </a:fontRef>
+        </p:style>
+        <p:txBody>
+          <a:bodyPr rtlCol="0" anchor="ctr"/>
+          <a:lstStyle/>
+          <a:p>
+            <a:pPr algn="ctr"/>
+          </a:p>
+        </p:txBody>
+      </p:sp>
+      <p:sp>
+        <p:nvSpPr>
+          <p:cNvPr id="4" name="TextBox 3"/>
           <p:cNvSpPr txBox="1"/>
           <p:nvPr/>
         </p:nvSpPr>
         <p:spPr>
           <a:xfrm>
-            <a:off x="731520" y="365760"/>
-            <a:ext cx="10058400" cy="548640"/>
+            <a:off x="548640" y="182880"/>
+            <a:ext cx="10058400" cy="640080"/>
           </a:xfrm>
           <a:prstGeom prst="rect">
             <a:avLst/>
@@ -7073,14 +9078,14 @@
       </p:sp>
       <p:sp>
         <p:nvSpPr>
-          <p:cNvPr id="3" name="Rectangle 2"/>
+          <p:cNvPr id="5" name="Rectangle 4"/>
           <p:cNvSpPr/>
           <p:nvPr/>
         </p:nvSpPr>
         <p:spPr>
           <a:xfrm>
-            <a:off x="731520" y="1005840"/>
-            <a:ext cx="1828800" cy="38100"/>
+            <a:off x="0" y="1051560"/>
+            <a:ext cx="12191695" cy="25400"/>
           </a:xfrm>
           <a:prstGeom prst="rect">
             <a:avLst/>
@@ -7116,20 +9121,20 @@
       </p:sp>
       <p:sp>
         <p:nvSpPr>
-          <p:cNvPr id="4" name="Oval 3"/>
+          <p:cNvPr id="6" name="Rounded Rectangle 5"/>
           <p:cNvSpPr/>
           <p:nvPr/>
         </p:nvSpPr>
         <p:spPr>
           <a:xfrm>
-            <a:off x="731520" y="1371600"/>
-            <a:ext cx="457200" cy="457200"/>
-          </a:xfrm>
-          <a:prstGeom prst="ellipse">
-            <a:avLst/>
-          </a:prstGeom>
-          <a:solidFill>
-            <a:srgbClr val="00D4FF"/>
+            <a:off x="457200" y="1371600"/>
+            <a:ext cx="11247120" cy="685800"/>
+          </a:xfrm>
+          <a:prstGeom prst="roundRect">
+            <a:avLst/>
+          </a:prstGeom>
+          <a:solidFill>
+            <a:srgbClr val="141E33"/>
           </a:solidFill>
           <a:ln>
             <a:noFill/>
@@ -7150,17 +9155,123 @@
           </a:fontRef>
         </p:style>
         <p:txBody>
-          <a:bodyPr rtlCol="0" anchor="ctr" wrap="none"/>
+          <a:bodyPr rtlCol="0" anchor="ctr"/>
+          <a:lstStyle/>
+          <a:p>
+            <a:pPr algn="ctr"/>
+          </a:p>
+        </p:txBody>
+      </p:sp>
+      <p:sp>
+        <p:nvSpPr>
+          <p:cNvPr id="7" name="Rectangle 6"/>
+          <p:cNvSpPr/>
+          <p:nvPr/>
+        </p:nvSpPr>
+        <p:spPr>
+          <a:xfrm>
+            <a:off x="457200" y="1371600"/>
+            <a:ext cx="73152" cy="685800"/>
+          </a:xfrm>
+          <a:prstGeom prst="rect">
+            <a:avLst/>
+          </a:prstGeom>
+          <a:solidFill>
+            <a:srgbClr val="00D4FF"/>
+          </a:solidFill>
+          <a:ln>
+            <a:noFill/>
+          </a:ln>
+        </p:spPr>
+        <p:style>
+          <a:lnRef idx="1">
+            <a:schemeClr val="accent1"/>
+          </a:lnRef>
+          <a:fillRef idx="3">
+            <a:schemeClr val="accent1"/>
+          </a:fillRef>
+          <a:effectRef idx="2">
+            <a:schemeClr val="accent1"/>
+          </a:effectRef>
+          <a:fontRef idx="minor">
+            <a:schemeClr val="lt1"/>
+          </a:fontRef>
+        </p:style>
+        <p:txBody>
+          <a:bodyPr rtlCol="0" anchor="ctr"/>
+          <a:lstStyle/>
+          <a:p>
+            <a:pPr algn="ctr"/>
+          </a:p>
+        </p:txBody>
+      </p:sp>
+      <p:sp>
+        <p:nvSpPr>
+          <p:cNvPr id="8" name="Oval 7"/>
+          <p:cNvSpPr/>
+          <p:nvPr/>
+        </p:nvSpPr>
+        <p:spPr>
+          <a:xfrm>
+            <a:off x="731520" y="1481328"/>
+            <a:ext cx="411480" cy="411480"/>
+          </a:xfrm>
+          <a:prstGeom prst="ellipse">
+            <a:avLst/>
+          </a:prstGeom>
+          <a:solidFill>
+            <a:srgbClr val="00D4FF"/>
+          </a:solidFill>
+          <a:ln>
+            <a:noFill/>
+          </a:ln>
+        </p:spPr>
+        <p:style>
+          <a:lnRef idx="1">
+            <a:schemeClr val="accent1"/>
+          </a:lnRef>
+          <a:fillRef idx="3">
+            <a:schemeClr val="accent1"/>
+          </a:fillRef>
+          <a:effectRef idx="2">
+            <a:schemeClr val="accent1"/>
+          </a:effectRef>
+          <a:fontRef idx="minor">
+            <a:schemeClr val="lt1"/>
+          </a:fontRef>
+        </p:style>
+        <p:txBody>
+          <a:bodyPr rtlCol="0" anchor="ctr"/>
+          <a:lstStyle/>
+          <a:p>
+            <a:pPr algn="ctr"/>
+          </a:p>
+        </p:txBody>
+      </p:sp>
+      <p:sp>
+        <p:nvSpPr>
+          <p:cNvPr id="9" name="TextBox 8"/>
+          <p:cNvSpPr txBox="1"/>
+          <p:nvPr/>
+        </p:nvSpPr>
+        <p:spPr>
+          <a:xfrm>
+            <a:off x="731520" y="1481328"/>
+            <a:ext cx="411480" cy="411480"/>
+          </a:xfrm>
+          <a:prstGeom prst="rect">
+            <a:avLst/>
+          </a:prstGeom>
+          <a:noFill/>
+        </p:spPr>
+        <p:txBody>
+          <a:bodyPr wrap="square">
+            <a:spAutoFit/>
+          </a:bodyPr>
           <a:lstStyle/>
           <a:p>
             <a:pPr algn="ctr">
-              <a:spcBef>
-                <a:spcPts val="0"/>
-              </a:spcBef>
-              <a:spcAft>
-                <a:spcPts val="0"/>
-              </a:spcAft>
-              <a:defRPr sz="1400" b="1">
+              <a:defRPr sz="1300" b="1">
                 <a:solidFill>
                   <a:srgbClr val="FFFFFF"/>
                 </a:solidFill>
@@ -7175,20 +9286,56 @@
       </p:sp>
       <p:sp>
         <p:nvSpPr>
-          <p:cNvPr id="5" name="Rectangle 4"/>
+          <p:cNvPr id="10" name="TextBox 9"/>
+          <p:cNvSpPr txBox="1"/>
+          <p:nvPr/>
+        </p:nvSpPr>
+        <p:spPr>
+          <a:xfrm>
+            <a:off x="1371600" y="1463040"/>
+            <a:ext cx="10058400" cy="502920"/>
+          </a:xfrm>
+          <a:prstGeom prst="rect">
+            <a:avLst/>
+          </a:prstGeom>
+          <a:noFill/>
+        </p:spPr>
+        <p:txBody>
+          <a:bodyPr wrap="square">
+            <a:spAutoFit/>
+          </a:bodyPr>
+          <a:lstStyle/>
+          <a:p>
+            <a:pPr algn="l">
+              <a:defRPr sz="1500" b="0">
+                <a:solidFill>
+                  <a:srgbClr val="CBD5E8"/>
+                </a:solidFill>
+                <a:latin typeface="Microsoft YaHei"/>
+              </a:defRPr>
+            </a:pPr>
+            <a:r>
+              <a:t>Step 1：行业认知 → 理解AI漫剧是什么、市场多大</a:t>
+            </a:r>
+          </a:p>
+        </p:txBody>
+      </p:sp>
+      <p:sp>
+        <p:nvSpPr>
+          <p:cNvPr id="11" name="Rectangle 10"/>
           <p:cNvSpPr/>
           <p:nvPr/>
         </p:nvSpPr>
         <p:spPr>
           <a:xfrm>
-            <a:off x="941832" y="1828800"/>
-            <a:ext cx="25400" cy="457200"/>
-          </a:xfrm>
-          <a:prstGeom prst="rect">
-            <a:avLst/>
-          </a:prstGeom>
-          <a:solidFill>
-            <a:srgbClr val="2D3B55"/>
+            <a:off x="914400" y="2057400"/>
+            <a:ext cx="25400" cy="137160"/>
+          </a:xfrm>
+          <a:prstGeom prst="rect">
+            <a:avLst/>
+          </a:prstGeom>
+          <a:solidFill>
+            <a:srgbClr val="00D4FF"/>
           </a:solidFill>
           <a:ln>
             <a:noFill/>
@@ -7218,56 +9365,20 @@
       </p:sp>
       <p:sp>
         <p:nvSpPr>
-          <p:cNvPr id="6" name="TextBox 5"/>
-          <p:cNvSpPr txBox="1"/>
-          <p:nvPr/>
-        </p:nvSpPr>
-        <p:spPr>
-          <a:xfrm>
-            <a:off x="1463040" y="1371600"/>
-            <a:ext cx="9601200" cy="731520"/>
-          </a:xfrm>
-          <a:prstGeom prst="rect">
-            <a:avLst/>
-          </a:prstGeom>
-          <a:noFill/>
-        </p:spPr>
-        <p:txBody>
-          <a:bodyPr wrap="square">
-            <a:spAutoFit/>
-          </a:bodyPr>
-          <a:lstStyle/>
-          <a:p>
-            <a:pPr algn="l">
-              <a:defRPr sz="1600" b="0">
-                <a:solidFill>
-                  <a:srgbClr val="B0BCD4"/>
-                </a:solidFill>
-                <a:latin typeface="Microsoft YaHei"/>
-              </a:defRPr>
-            </a:pPr>
-            <a:r>
-              <a:t>Step 1：行业认知 → 理解AI漫剧是什么、市场多大</a:t>
-            </a:r>
-          </a:p>
-        </p:txBody>
-      </p:sp>
-      <p:sp>
-        <p:nvSpPr>
-          <p:cNvPr id="7" name="Oval 6"/>
+          <p:cNvPr id="12" name="Rounded Rectangle 11"/>
           <p:cNvSpPr/>
           <p:nvPr/>
         </p:nvSpPr>
         <p:spPr>
           <a:xfrm>
-            <a:off x="731520" y="2286000"/>
-            <a:ext cx="457200" cy="457200"/>
-          </a:xfrm>
-          <a:prstGeom prst="ellipse">
-            <a:avLst/>
-          </a:prstGeom>
-          <a:solidFill>
-            <a:srgbClr val="7C3AED"/>
+            <a:off x="457200" y="2194560"/>
+            <a:ext cx="11247120" cy="685800"/>
+          </a:xfrm>
+          <a:prstGeom prst="roundRect">
+            <a:avLst/>
+          </a:prstGeom>
+          <a:solidFill>
+            <a:srgbClr val="141E33"/>
           </a:solidFill>
           <a:ln>
             <a:noFill/>
@@ -7288,17 +9399,123 @@
           </a:fontRef>
         </p:style>
         <p:txBody>
-          <a:bodyPr rtlCol="0" anchor="ctr" wrap="none"/>
+          <a:bodyPr rtlCol="0" anchor="ctr"/>
+          <a:lstStyle/>
+          <a:p>
+            <a:pPr algn="ctr"/>
+          </a:p>
+        </p:txBody>
+      </p:sp>
+      <p:sp>
+        <p:nvSpPr>
+          <p:cNvPr id="13" name="Rectangle 12"/>
+          <p:cNvSpPr/>
+          <p:nvPr/>
+        </p:nvSpPr>
+        <p:spPr>
+          <a:xfrm>
+            <a:off x="457200" y="2194560"/>
+            <a:ext cx="73152" cy="685800"/>
+          </a:xfrm>
+          <a:prstGeom prst="rect">
+            <a:avLst/>
+          </a:prstGeom>
+          <a:solidFill>
+            <a:srgbClr val="7C3AED"/>
+          </a:solidFill>
+          <a:ln>
+            <a:noFill/>
+          </a:ln>
+        </p:spPr>
+        <p:style>
+          <a:lnRef idx="1">
+            <a:schemeClr val="accent1"/>
+          </a:lnRef>
+          <a:fillRef idx="3">
+            <a:schemeClr val="accent1"/>
+          </a:fillRef>
+          <a:effectRef idx="2">
+            <a:schemeClr val="accent1"/>
+          </a:effectRef>
+          <a:fontRef idx="minor">
+            <a:schemeClr val="lt1"/>
+          </a:fontRef>
+        </p:style>
+        <p:txBody>
+          <a:bodyPr rtlCol="0" anchor="ctr"/>
+          <a:lstStyle/>
+          <a:p>
+            <a:pPr algn="ctr"/>
+          </a:p>
+        </p:txBody>
+      </p:sp>
+      <p:sp>
+        <p:nvSpPr>
+          <p:cNvPr id="14" name="Oval 13"/>
+          <p:cNvSpPr/>
+          <p:nvPr/>
+        </p:nvSpPr>
+        <p:spPr>
+          <a:xfrm>
+            <a:off x="731520" y="2304288"/>
+            <a:ext cx="411480" cy="411480"/>
+          </a:xfrm>
+          <a:prstGeom prst="ellipse">
+            <a:avLst/>
+          </a:prstGeom>
+          <a:solidFill>
+            <a:srgbClr val="7C3AED"/>
+          </a:solidFill>
+          <a:ln>
+            <a:noFill/>
+          </a:ln>
+        </p:spPr>
+        <p:style>
+          <a:lnRef idx="1">
+            <a:schemeClr val="accent1"/>
+          </a:lnRef>
+          <a:fillRef idx="3">
+            <a:schemeClr val="accent1"/>
+          </a:fillRef>
+          <a:effectRef idx="2">
+            <a:schemeClr val="accent1"/>
+          </a:effectRef>
+          <a:fontRef idx="minor">
+            <a:schemeClr val="lt1"/>
+          </a:fontRef>
+        </p:style>
+        <p:txBody>
+          <a:bodyPr rtlCol="0" anchor="ctr"/>
+          <a:lstStyle/>
+          <a:p>
+            <a:pPr algn="ctr"/>
+          </a:p>
+        </p:txBody>
+      </p:sp>
+      <p:sp>
+        <p:nvSpPr>
+          <p:cNvPr id="15" name="TextBox 14"/>
+          <p:cNvSpPr txBox="1"/>
+          <p:nvPr/>
+        </p:nvSpPr>
+        <p:spPr>
+          <a:xfrm>
+            <a:off x="731520" y="2304288"/>
+            <a:ext cx="411480" cy="411480"/>
+          </a:xfrm>
+          <a:prstGeom prst="rect">
+            <a:avLst/>
+          </a:prstGeom>
+          <a:noFill/>
+        </p:spPr>
+        <p:txBody>
+          <a:bodyPr wrap="square">
+            <a:spAutoFit/>
+          </a:bodyPr>
           <a:lstStyle/>
           <a:p>
             <a:pPr algn="ctr">
-              <a:spcBef>
-                <a:spcPts val="0"/>
-              </a:spcBef>
-              <a:spcAft>
-                <a:spcPts val="0"/>
-              </a:spcAft>
-              <a:defRPr sz="1400" b="1">
+              <a:defRPr sz="1300" b="1">
                 <a:solidFill>
                   <a:srgbClr val="FFFFFF"/>
                 </a:solidFill>
@@ -7313,20 +9530,56 @@
       </p:sp>
       <p:sp>
         <p:nvSpPr>
-          <p:cNvPr id="8" name="Rectangle 7"/>
+          <p:cNvPr id="16" name="TextBox 15"/>
+          <p:cNvSpPr txBox="1"/>
+          <p:nvPr/>
+        </p:nvSpPr>
+        <p:spPr>
+          <a:xfrm>
+            <a:off x="1371600" y="2286000"/>
+            <a:ext cx="10058400" cy="502920"/>
+          </a:xfrm>
+          <a:prstGeom prst="rect">
+            <a:avLst/>
+          </a:prstGeom>
+          <a:noFill/>
+        </p:spPr>
+        <p:txBody>
+          <a:bodyPr wrap="square">
+            <a:spAutoFit/>
+          </a:bodyPr>
+          <a:lstStyle/>
+          <a:p>
+            <a:pPr algn="l">
+              <a:defRPr sz="1500" b="0">
+                <a:solidFill>
+                  <a:srgbClr val="CBD5E8"/>
+                </a:solidFill>
+                <a:latin typeface="Microsoft YaHei"/>
+              </a:defRPr>
+            </a:pPr>
+            <a:r>
+              <a:t>Step 2：创作技能 → 剧本、分镜、提示词工程</a:t>
+            </a:r>
+          </a:p>
+        </p:txBody>
+      </p:sp>
+      <p:sp>
+        <p:nvSpPr>
+          <p:cNvPr id="17" name="Rectangle 16"/>
           <p:cNvSpPr/>
           <p:nvPr/>
         </p:nvSpPr>
         <p:spPr>
           <a:xfrm>
-            <a:off x="941832" y="2743200"/>
-            <a:ext cx="25400" cy="457200"/>
-          </a:xfrm>
-          <a:prstGeom prst="rect">
-            <a:avLst/>
-          </a:prstGeom>
-          <a:solidFill>
-            <a:srgbClr val="2D3B55"/>
+            <a:off x="914400" y="2880360"/>
+            <a:ext cx="25400" cy="137160"/>
+          </a:xfrm>
+          <a:prstGeom prst="rect">
+            <a:avLst/>
+          </a:prstGeom>
+          <a:solidFill>
+            <a:srgbClr val="7C3AED"/>
           </a:solidFill>
           <a:ln>
             <a:noFill/>
@@ -7356,56 +9609,20 @@
       </p:sp>
       <p:sp>
         <p:nvSpPr>
-          <p:cNvPr id="9" name="TextBox 8"/>
-          <p:cNvSpPr txBox="1"/>
-          <p:nvPr/>
-        </p:nvSpPr>
-        <p:spPr>
-          <a:xfrm>
-            <a:off x="1463040" y="2286000"/>
-            <a:ext cx="9601200" cy="731520"/>
-          </a:xfrm>
-          <a:prstGeom prst="rect">
-            <a:avLst/>
-          </a:prstGeom>
-          <a:noFill/>
-        </p:spPr>
-        <p:txBody>
-          <a:bodyPr wrap="square">
-            <a:spAutoFit/>
-          </a:bodyPr>
-          <a:lstStyle/>
-          <a:p>
-            <a:pPr algn="l">
-              <a:defRPr sz="1600" b="0">
-                <a:solidFill>
-                  <a:srgbClr val="B0BCD4"/>
-                </a:solidFill>
-                <a:latin typeface="Microsoft YaHei"/>
-              </a:defRPr>
-            </a:pPr>
-            <a:r>
-              <a:t>Step 2：创作技能 → 剧本、分镜、提示词工程</a:t>
-            </a:r>
-          </a:p>
-        </p:txBody>
-      </p:sp>
-      <p:sp>
-        <p:nvSpPr>
-          <p:cNvPr id="10" name="Oval 9"/>
+          <p:cNvPr id="18" name="Rounded Rectangle 17"/>
           <p:cNvSpPr/>
           <p:nvPr/>
         </p:nvSpPr>
         <p:spPr>
           <a:xfrm>
-            <a:off x="731520" y="3200400"/>
-            <a:ext cx="457200" cy="457200"/>
-          </a:xfrm>
-          <a:prstGeom prst="ellipse">
-            <a:avLst/>
-          </a:prstGeom>
-          <a:solidFill>
-            <a:srgbClr val="FF6B35"/>
+            <a:off x="457200" y="3017520"/>
+            <a:ext cx="11247120" cy="685800"/>
+          </a:xfrm>
+          <a:prstGeom prst="roundRect">
+            <a:avLst/>
+          </a:prstGeom>
+          <a:solidFill>
+            <a:srgbClr val="141E33"/>
           </a:solidFill>
           <a:ln>
             <a:noFill/>
@@ -7426,17 +9643,123 @@
           </a:fontRef>
         </p:style>
         <p:txBody>
-          <a:bodyPr rtlCol="0" anchor="ctr" wrap="none"/>
+          <a:bodyPr rtlCol="0" anchor="ctr"/>
+          <a:lstStyle/>
+          <a:p>
+            <a:pPr algn="ctr"/>
+          </a:p>
+        </p:txBody>
+      </p:sp>
+      <p:sp>
+        <p:nvSpPr>
+          <p:cNvPr id="19" name="Rectangle 18"/>
+          <p:cNvSpPr/>
+          <p:nvPr/>
+        </p:nvSpPr>
+        <p:spPr>
+          <a:xfrm>
+            <a:off x="457200" y="3017520"/>
+            <a:ext cx="73152" cy="685800"/>
+          </a:xfrm>
+          <a:prstGeom prst="rect">
+            <a:avLst/>
+          </a:prstGeom>
+          <a:solidFill>
+            <a:srgbClr val="FF6B35"/>
+          </a:solidFill>
+          <a:ln>
+            <a:noFill/>
+          </a:ln>
+        </p:spPr>
+        <p:style>
+          <a:lnRef idx="1">
+            <a:schemeClr val="accent1"/>
+          </a:lnRef>
+          <a:fillRef idx="3">
+            <a:schemeClr val="accent1"/>
+          </a:fillRef>
+          <a:effectRef idx="2">
+            <a:schemeClr val="accent1"/>
+          </a:effectRef>
+          <a:fontRef idx="minor">
+            <a:schemeClr val="lt1"/>
+          </a:fontRef>
+        </p:style>
+        <p:txBody>
+          <a:bodyPr rtlCol="0" anchor="ctr"/>
+          <a:lstStyle/>
+          <a:p>
+            <a:pPr algn="ctr"/>
+          </a:p>
+        </p:txBody>
+      </p:sp>
+      <p:sp>
+        <p:nvSpPr>
+          <p:cNvPr id="20" name="Oval 19"/>
+          <p:cNvSpPr/>
+          <p:nvPr/>
+        </p:nvSpPr>
+        <p:spPr>
+          <a:xfrm>
+            <a:off x="731520" y="3127248"/>
+            <a:ext cx="411480" cy="411480"/>
+          </a:xfrm>
+          <a:prstGeom prst="ellipse">
+            <a:avLst/>
+          </a:prstGeom>
+          <a:solidFill>
+            <a:srgbClr val="FF6B35"/>
+          </a:solidFill>
+          <a:ln>
+            <a:noFill/>
+          </a:ln>
+        </p:spPr>
+        <p:style>
+          <a:lnRef idx="1">
+            <a:schemeClr val="accent1"/>
+          </a:lnRef>
+          <a:fillRef idx="3">
+            <a:schemeClr val="accent1"/>
+          </a:fillRef>
+          <a:effectRef idx="2">
+            <a:schemeClr val="accent1"/>
+          </a:effectRef>
+          <a:fontRef idx="minor">
+            <a:schemeClr val="lt1"/>
+          </a:fontRef>
+        </p:style>
+        <p:txBody>
+          <a:bodyPr rtlCol="0" anchor="ctr"/>
+          <a:lstStyle/>
+          <a:p>
+            <a:pPr algn="ctr"/>
+          </a:p>
+        </p:txBody>
+      </p:sp>
+      <p:sp>
+        <p:nvSpPr>
+          <p:cNvPr id="21" name="TextBox 20"/>
+          <p:cNvSpPr txBox="1"/>
+          <p:nvPr/>
+        </p:nvSpPr>
+        <p:spPr>
+          <a:xfrm>
+            <a:off x="731520" y="3127248"/>
+            <a:ext cx="411480" cy="411480"/>
+          </a:xfrm>
+          <a:prstGeom prst="rect">
+            <a:avLst/>
+          </a:prstGeom>
+          <a:noFill/>
+        </p:spPr>
+        <p:txBody>
+          <a:bodyPr wrap="square">
+            <a:spAutoFit/>
+          </a:bodyPr>
           <a:lstStyle/>
           <a:p>
             <a:pPr algn="ctr">
-              <a:spcBef>
-                <a:spcPts val="0"/>
-              </a:spcBef>
-              <a:spcAft>
-                <a:spcPts val="0"/>
-              </a:spcAft>
-              <a:defRPr sz="1400" b="1">
+              <a:defRPr sz="1300" b="1">
                 <a:solidFill>
                   <a:srgbClr val="FFFFFF"/>
                 </a:solidFill>
@@ -7451,20 +9774,56 @@
       </p:sp>
       <p:sp>
         <p:nvSpPr>
-          <p:cNvPr id="11" name="Rectangle 10"/>
+          <p:cNvPr id="22" name="TextBox 21"/>
+          <p:cNvSpPr txBox="1"/>
+          <p:nvPr/>
+        </p:nvSpPr>
+        <p:spPr>
+          <a:xfrm>
+            <a:off x="1371600" y="3108960"/>
+            <a:ext cx="10058400" cy="502920"/>
+          </a:xfrm>
+          <a:prstGeom prst="rect">
+            <a:avLst/>
+          </a:prstGeom>
+          <a:noFill/>
+        </p:spPr>
+        <p:txBody>
+          <a:bodyPr wrap="square">
+            <a:spAutoFit/>
+          </a:bodyPr>
+          <a:lstStyle/>
+          <a:p>
+            <a:pPr algn="l">
+              <a:defRPr sz="1500" b="0">
+                <a:solidFill>
+                  <a:srgbClr val="CBD5E8"/>
+                </a:solidFill>
+                <a:latin typeface="Microsoft YaHei"/>
+              </a:defRPr>
+            </a:pPr>
+            <a:r>
+              <a:t>Step 3：工具精通 → 即梦AI、可灵AI、Seedance等</a:t>
+            </a:r>
+          </a:p>
+        </p:txBody>
+      </p:sp>
+      <p:sp>
+        <p:nvSpPr>
+          <p:cNvPr id="23" name="Rectangle 22"/>
           <p:cNvSpPr/>
           <p:nvPr/>
         </p:nvSpPr>
         <p:spPr>
           <a:xfrm>
-            <a:off x="941832" y="3657600"/>
-            <a:ext cx="25400" cy="457200"/>
-          </a:xfrm>
-          <a:prstGeom prst="rect">
-            <a:avLst/>
-          </a:prstGeom>
-          <a:solidFill>
-            <a:srgbClr val="2D3B55"/>
+            <a:off x="914400" y="3703320"/>
+            <a:ext cx="25400" cy="137160"/>
+          </a:xfrm>
+          <a:prstGeom prst="rect">
+            <a:avLst/>
+          </a:prstGeom>
+          <a:solidFill>
+            <a:srgbClr val="FF6B35"/>
           </a:solidFill>
           <a:ln>
             <a:noFill/>
@@ -7494,56 +9853,20 @@
       </p:sp>
       <p:sp>
         <p:nvSpPr>
-          <p:cNvPr id="12" name="TextBox 11"/>
-          <p:cNvSpPr txBox="1"/>
-          <p:nvPr/>
-        </p:nvSpPr>
-        <p:spPr>
-          <a:xfrm>
-            <a:off x="1463040" y="3200400"/>
-            <a:ext cx="9601200" cy="731520"/>
-          </a:xfrm>
-          <a:prstGeom prst="rect">
-            <a:avLst/>
-          </a:prstGeom>
-          <a:noFill/>
-        </p:spPr>
-        <p:txBody>
-          <a:bodyPr wrap="square">
-            <a:spAutoFit/>
-          </a:bodyPr>
-          <a:lstStyle/>
-          <a:p>
-            <a:pPr algn="l">
-              <a:defRPr sz="1600" b="0">
-                <a:solidFill>
-                  <a:srgbClr val="B0BCD4"/>
-                </a:solidFill>
-                <a:latin typeface="Microsoft YaHei"/>
-              </a:defRPr>
-            </a:pPr>
-            <a:r>
-              <a:t>Step 3：工具精通 → 即梦AI、可灵AI、Seedance等</a:t>
-            </a:r>
-          </a:p>
-        </p:txBody>
-      </p:sp>
-      <p:sp>
-        <p:nvSpPr>
-          <p:cNvPr id="13" name="Oval 12"/>
+          <p:cNvPr id="24" name="Rounded Rectangle 23"/>
           <p:cNvSpPr/>
           <p:nvPr/>
         </p:nvSpPr>
         <p:spPr>
           <a:xfrm>
-            <a:off x="731520" y="4114800"/>
-            <a:ext cx="457200" cy="457200"/>
-          </a:xfrm>
-          <a:prstGeom prst="ellipse">
-            <a:avLst/>
-          </a:prstGeom>
-          <a:solidFill>
-            <a:srgbClr val="10B981"/>
+            <a:off x="457200" y="3840480"/>
+            <a:ext cx="11247120" cy="685800"/>
+          </a:xfrm>
+          <a:prstGeom prst="roundRect">
+            <a:avLst/>
+          </a:prstGeom>
+          <a:solidFill>
+            <a:srgbClr val="141E33"/>
           </a:solidFill>
           <a:ln>
             <a:noFill/>
@@ -7564,17 +9887,123 @@
           </a:fontRef>
         </p:style>
         <p:txBody>
-          <a:bodyPr rtlCol="0" anchor="ctr" wrap="none"/>
+          <a:bodyPr rtlCol="0" anchor="ctr"/>
+          <a:lstStyle/>
+          <a:p>
+            <a:pPr algn="ctr"/>
+          </a:p>
+        </p:txBody>
+      </p:sp>
+      <p:sp>
+        <p:nvSpPr>
+          <p:cNvPr id="25" name="Rectangle 24"/>
+          <p:cNvSpPr/>
+          <p:nvPr/>
+        </p:nvSpPr>
+        <p:spPr>
+          <a:xfrm>
+            <a:off x="457200" y="3840480"/>
+            <a:ext cx="73152" cy="685800"/>
+          </a:xfrm>
+          <a:prstGeom prst="rect">
+            <a:avLst/>
+          </a:prstGeom>
+          <a:solidFill>
+            <a:srgbClr val="10B981"/>
+          </a:solidFill>
+          <a:ln>
+            <a:noFill/>
+          </a:ln>
+        </p:spPr>
+        <p:style>
+          <a:lnRef idx="1">
+            <a:schemeClr val="accent1"/>
+          </a:lnRef>
+          <a:fillRef idx="3">
+            <a:schemeClr val="accent1"/>
+          </a:fillRef>
+          <a:effectRef idx="2">
+            <a:schemeClr val="accent1"/>
+          </a:effectRef>
+          <a:fontRef idx="minor">
+            <a:schemeClr val="lt1"/>
+          </a:fontRef>
+        </p:style>
+        <p:txBody>
+          <a:bodyPr rtlCol="0" anchor="ctr"/>
+          <a:lstStyle/>
+          <a:p>
+            <a:pPr algn="ctr"/>
+          </a:p>
+        </p:txBody>
+      </p:sp>
+      <p:sp>
+        <p:nvSpPr>
+          <p:cNvPr id="26" name="Oval 25"/>
+          <p:cNvSpPr/>
+          <p:nvPr/>
+        </p:nvSpPr>
+        <p:spPr>
+          <a:xfrm>
+            <a:off x="731520" y="3950208"/>
+            <a:ext cx="411480" cy="411480"/>
+          </a:xfrm>
+          <a:prstGeom prst="ellipse">
+            <a:avLst/>
+          </a:prstGeom>
+          <a:solidFill>
+            <a:srgbClr val="10B981"/>
+          </a:solidFill>
+          <a:ln>
+            <a:noFill/>
+          </a:ln>
+        </p:spPr>
+        <p:style>
+          <a:lnRef idx="1">
+            <a:schemeClr val="accent1"/>
+          </a:lnRef>
+          <a:fillRef idx="3">
+            <a:schemeClr val="accent1"/>
+          </a:fillRef>
+          <a:effectRef idx="2">
+            <a:schemeClr val="accent1"/>
+          </a:effectRef>
+          <a:fontRef idx="minor">
+            <a:schemeClr val="lt1"/>
+          </a:fontRef>
+        </p:style>
+        <p:txBody>
+          <a:bodyPr rtlCol="0" anchor="ctr"/>
+          <a:lstStyle/>
+          <a:p>
+            <a:pPr algn="ctr"/>
+          </a:p>
+        </p:txBody>
+      </p:sp>
+      <p:sp>
+        <p:nvSpPr>
+          <p:cNvPr id="27" name="TextBox 26"/>
+          <p:cNvSpPr txBox="1"/>
+          <p:nvPr/>
+        </p:nvSpPr>
+        <p:spPr>
+          <a:xfrm>
+            <a:off x="731520" y="3950208"/>
+            <a:ext cx="411480" cy="411480"/>
+          </a:xfrm>
+          <a:prstGeom prst="rect">
+            <a:avLst/>
+          </a:prstGeom>
+          <a:noFill/>
+        </p:spPr>
+        <p:txBody>
+          <a:bodyPr wrap="square">
+            <a:spAutoFit/>
+          </a:bodyPr>
           <a:lstStyle/>
           <a:p>
             <a:pPr algn="ctr">
-              <a:spcBef>
-                <a:spcPts val="0"/>
-              </a:spcBef>
-              <a:spcAft>
-                <a:spcPts val="0"/>
-              </a:spcAft>
-              <a:defRPr sz="1400" b="1">
+              <a:defRPr sz="1300" b="1">
                 <a:solidFill>
                   <a:srgbClr val="FFFFFF"/>
                 </a:solidFill>
@@ -7589,20 +10018,56 @@
       </p:sp>
       <p:sp>
         <p:nvSpPr>
-          <p:cNvPr id="14" name="Rectangle 13"/>
+          <p:cNvPr id="28" name="TextBox 27"/>
+          <p:cNvSpPr txBox="1"/>
+          <p:nvPr/>
+        </p:nvSpPr>
+        <p:spPr>
+          <a:xfrm>
+            <a:off x="1371600" y="3931920"/>
+            <a:ext cx="10058400" cy="502920"/>
+          </a:xfrm>
+          <a:prstGeom prst="rect">
+            <a:avLst/>
+          </a:prstGeom>
+          <a:noFill/>
+        </p:spPr>
+        <p:txBody>
+          <a:bodyPr wrap="square">
+            <a:spAutoFit/>
+          </a:bodyPr>
+          <a:lstStyle/>
+          <a:p>
+            <a:pPr algn="l">
+              <a:defRPr sz="1500" b="0">
+                <a:solidFill>
+                  <a:srgbClr val="CBD5E8"/>
+                </a:solidFill>
+                <a:latin typeface="Microsoft YaHei"/>
+              </a:defRPr>
+            </a:pPr>
+            <a:r>
+              <a:t>Step 4：后期制作 → 音频、剪辑、调色、成片</a:t>
+            </a:r>
+          </a:p>
+        </p:txBody>
+      </p:sp>
+      <p:sp>
+        <p:nvSpPr>
+          <p:cNvPr id="29" name="Rectangle 28"/>
           <p:cNvSpPr/>
           <p:nvPr/>
         </p:nvSpPr>
         <p:spPr>
           <a:xfrm>
-            <a:off x="941832" y="4572000"/>
-            <a:ext cx="25400" cy="457200"/>
-          </a:xfrm>
-          <a:prstGeom prst="rect">
-            <a:avLst/>
-          </a:prstGeom>
-          <a:solidFill>
-            <a:srgbClr val="2D3B55"/>
+            <a:off x="914400" y="4526280"/>
+            <a:ext cx="25400" cy="137160"/>
+          </a:xfrm>
+          <a:prstGeom prst="rect">
+            <a:avLst/>
+          </a:prstGeom>
+          <a:solidFill>
+            <a:srgbClr val="10B981"/>
           </a:solidFill>
           <a:ln>
             <a:noFill/>
@@ -7632,56 +10097,20 @@
       </p:sp>
       <p:sp>
         <p:nvSpPr>
-          <p:cNvPr id="15" name="TextBox 14"/>
-          <p:cNvSpPr txBox="1"/>
-          <p:nvPr/>
-        </p:nvSpPr>
-        <p:spPr>
-          <a:xfrm>
-            <a:off x="1463040" y="4114800"/>
-            <a:ext cx="9601200" cy="731520"/>
-          </a:xfrm>
-          <a:prstGeom prst="rect">
-            <a:avLst/>
-          </a:prstGeom>
-          <a:noFill/>
-        </p:spPr>
-        <p:txBody>
-          <a:bodyPr wrap="square">
-            <a:spAutoFit/>
-          </a:bodyPr>
-          <a:lstStyle/>
-          <a:p>
-            <a:pPr algn="l">
-              <a:defRPr sz="1600" b="0">
-                <a:solidFill>
-                  <a:srgbClr val="B0BCD4"/>
-                </a:solidFill>
-                <a:latin typeface="Microsoft YaHei"/>
-              </a:defRPr>
-            </a:pPr>
-            <a:r>
-              <a:t>Step 4：后期制作 → 音频、剪辑、调色、成片</a:t>
-            </a:r>
-          </a:p>
-        </p:txBody>
-      </p:sp>
-      <p:sp>
-        <p:nvSpPr>
-          <p:cNvPr id="16" name="Oval 15"/>
+          <p:cNvPr id="30" name="Rounded Rectangle 29"/>
           <p:cNvSpPr/>
           <p:nvPr/>
         </p:nvSpPr>
         <p:spPr>
           <a:xfrm>
-            <a:off x="731520" y="5029200"/>
-            <a:ext cx="457200" cy="457200"/>
-          </a:xfrm>
-          <a:prstGeom prst="ellipse">
-            <a:avLst/>
-          </a:prstGeom>
-          <a:solidFill>
-            <a:srgbClr val="F59E0B"/>
+            <a:off x="457200" y="4663440"/>
+            <a:ext cx="11247120" cy="685800"/>
+          </a:xfrm>
+          <a:prstGeom prst="roundRect">
+            <a:avLst/>
+          </a:prstGeom>
+          <a:solidFill>
+            <a:srgbClr val="141E33"/>
           </a:solidFill>
           <a:ln>
             <a:noFill/>
@@ -7702,17 +10131,123 @@
           </a:fontRef>
         </p:style>
         <p:txBody>
-          <a:bodyPr rtlCol="0" anchor="ctr" wrap="none"/>
+          <a:bodyPr rtlCol="0" anchor="ctr"/>
+          <a:lstStyle/>
+          <a:p>
+            <a:pPr algn="ctr"/>
+          </a:p>
+        </p:txBody>
+      </p:sp>
+      <p:sp>
+        <p:nvSpPr>
+          <p:cNvPr id="31" name="Rectangle 30"/>
+          <p:cNvSpPr/>
+          <p:nvPr/>
+        </p:nvSpPr>
+        <p:spPr>
+          <a:xfrm>
+            <a:off x="457200" y="4663440"/>
+            <a:ext cx="73152" cy="685800"/>
+          </a:xfrm>
+          <a:prstGeom prst="rect">
+            <a:avLst/>
+          </a:prstGeom>
+          <a:solidFill>
+            <a:srgbClr val="F59E0B"/>
+          </a:solidFill>
+          <a:ln>
+            <a:noFill/>
+          </a:ln>
+        </p:spPr>
+        <p:style>
+          <a:lnRef idx="1">
+            <a:schemeClr val="accent1"/>
+          </a:lnRef>
+          <a:fillRef idx="3">
+            <a:schemeClr val="accent1"/>
+          </a:fillRef>
+          <a:effectRef idx="2">
+            <a:schemeClr val="accent1"/>
+          </a:effectRef>
+          <a:fontRef idx="minor">
+            <a:schemeClr val="lt1"/>
+          </a:fontRef>
+        </p:style>
+        <p:txBody>
+          <a:bodyPr rtlCol="0" anchor="ctr"/>
+          <a:lstStyle/>
+          <a:p>
+            <a:pPr algn="ctr"/>
+          </a:p>
+        </p:txBody>
+      </p:sp>
+      <p:sp>
+        <p:nvSpPr>
+          <p:cNvPr id="32" name="Oval 31"/>
+          <p:cNvSpPr/>
+          <p:nvPr/>
+        </p:nvSpPr>
+        <p:spPr>
+          <a:xfrm>
+            <a:off x="731520" y="4773168"/>
+            <a:ext cx="411480" cy="411480"/>
+          </a:xfrm>
+          <a:prstGeom prst="ellipse">
+            <a:avLst/>
+          </a:prstGeom>
+          <a:solidFill>
+            <a:srgbClr val="F59E0B"/>
+          </a:solidFill>
+          <a:ln>
+            <a:noFill/>
+          </a:ln>
+        </p:spPr>
+        <p:style>
+          <a:lnRef idx="1">
+            <a:schemeClr val="accent1"/>
+          </a:lnRef>
+          <a:fillRef idx="3">
+            <a:schemeClr val="accent1"/>
+          </a:fillRef>
+          <a:effectRef idx="2">
+            <a:schemeClr val="accent1"/>
+          </a:effectRef>
+          <a:fontRef idx="minor">
+            <a:schemeClr val="lt1"/>
+          </a:fontRef>
+        </p:style>
+        <p:txBody>
+          <a:bodyPr rtlCol="0" anchor="ctr"/>
+          <a:lstStyle/>
+          <a:p>
+            <a:pPr algn="ctr"/>
+          </a:p>
+        </p:txBody>
+      </p:sp>
+      <p:sp>
+        <p:nvSpPr>
+          <p:cNvPr id="33" name="TextBox 32"/>
+          <p:cNvSpPr txBox="1"/>
+          <p:nvPr/>
+        </p:nvSpPr>
+        <p:spPr>
+          <a:xfrm>
+            <a:off x="731520" y="4773168"/>
+            <a:ext cx="411480" cy="411480"/>
+          </a:xfrm>
+          <a:prstGeom prst="rect">
+            <a:avLst/>
+          </a:prstGeom>
+          <a:noFill/>
+        </p:spPr>
+        <p:txBody>
+          <a:bodyPr wrap="square">
+            <a:spAutoFit/>
+          </a:bodyPr>
           <a:lstStyle/>
           <a:p>
             <a:pPr algn="ctr">
-              <a:spcBef>
-                <a:spcPts val="0"/>
-              </a:spcBef>
-              <a:spcAft>
-                <a:spcPts val="0"/>
-              </a:spcAft>
-              <a:defRPr sz="1400" b="1">
+              <a:defRPr sz="1300" b="1">
                 <a:solidFill>
                   <a:srgbClr val="FFFFFF"/>
                 </a:solidFill>
@@ -7727,20 +10262,56 @@
       </p:sp>
       <p:sp>
         <p:nvSpPr>
-          <p:cNvPr id="17" name="Rectangle 16"/>
+          <p:cNvPr id="34" name="TextBox 33"/>
+          <p:cNvSpPr txBox="1"/>
+          <p:nvPr/>
+        </p:nvSpPr>
+        <p:spPr>
+          <a:xfrm>
+            <a:off x="1371600" y="4754880"/>
+            <a:ext cx="10058400" cy="502920"/>
+          </a:xfrm>
+          <a:prstGeom prst="rect">
+            <a:avLst/>
+          </a:prstGeom>
+          <a:noFill/>
+        </p:spPr>
+        <p:txBody>
+          <a:bodyPr wrap="square">
+            <a:spAutoFit/>
+          </a:bodyPr>
+          <a:lstStyle/>
+          <a:p>
+            <a:pPr algn="l">
+              <a:defRPr sz="1500" b="0">
+                <a:solidFill>
+                  <a:srgbClr val="CBD5E8"/>
+                </a:solidFill>
+                <a:latin typeface="Microsoft YaHei"/>
+              </a:defRPr>
+            </a:pPr>
+            <a:r>
+              <a:t>Step 5：商业运营 → 平台分发、变现、合规</a:t>
+            </a:r>
+          </a:p>
+        </p:txBody>
+      </p:sp>
+      <p:sp>
+        <p:nvSpPr>
+          <p:cNvPr id="35" name="Rectangle 34"/>
           <p:cNvSpPr/>
           <p:nvPr/>
         </p:nvSpPr>
         <p:spPr>
           <a:xfrm>
-            <a:off x="941832" y="5486400"/>
-            <a:ext cx="25400" cy="457200"/>
-          </a:xfrm>
-          <a:prstGeom prst="rect">
-            <a:avLst/>
-          </a:prstGeom>
-          <a:solidFill>
-            <a:srgbClr val="2D3B55"/>
+            <a:off x="914400" y="5349240"/>
+            <a:ext cx="25400" cy="137160"/>
+          </a:xfrm>
+          <a:prstGeom prst="rect">
+            <a:avLst/>
+          </a:prstGeom>
+          <a:solidFill>
+            <a:srgbClr val="F59E0B"/>
           </a:solidFill>
           <a:ln>
             <a:noFill/>
@@ -7770,56 +10341,20 @@
       </p:sp>
       <p:sp>
         <p:nvSpPr>
-          <p:cNvPr id="18" name="TextBox 17"/>
-          <p:cNvSpPr txBox="1"/>
-          <p:nvPr/>
-        </p:nvSpPr>
-        <p:spPr>
-          <a:xfrm>
-            <a:off x="1463040" y="5029200"/>
-            <a:ext cx="9601200" cy="731520"/>
-          </a:xfrm>
-          <a:prstGeom prst="rect">
-            <a:avLst/>
-          </a:prstGeom>
-          <a:noFill/>
-        </p:spPr>
-        <p:txBody>
-          <a:bodyPr wrap="square">
-            <a:spAutoFit/>
-          </a:bodyPr>
-          <a:lstStyle/>
-          <a:p>
-            <a:pPr algn="l">
-              <a:defRPr sz="1600" b="0">
-                <a:solidFill>
-                  <a:srgbClr val="B0BCD4"/>
-                </a:solidFill>
-                <a:latin typeface="Microsoft YaHei"/>
-              </a:defRPr>
-            </a:pPr>
-            <a:r>
-              <a:t>Step 5：商业运营 → 平台分发、变现、合规</a:t>
-            </a:r>
-          </a:p>
-        </p:txBody>
-      </p:sp>
-      <p:sp>
-        <p:nvSpPr>
-          <p:cNvPr id="19" name="Oval 18"/>
+          <p:cNvPr id="36" name="Rounded Rectangle 35"/>
           <p:cNvSpPr/>
           <p:nvPr/>
         </p:nvSpPr>
         <p:spPr>
           <a:xfrm>
-            <a:off x="731520" y="5943600"/>
-            <a:ext cx="457200" cy="457200"/>
-          </a:xfrm>
-          <a:prstGeom prst="ellipse">
-            <a:avLst/>
-          </a:prstGeom>
-          <a:solidFill>
-            <a:srgbClr val="EF4444"/>
+            <a:off x="457200" y="5486400"/>
+            <a:ext cx="11247120" cy="685800"/>
+          </a:xfrm>
+          <a:prstGeom prst="roundRect">
+            <a:avLst/>
+          </a:prstGeom>
+          <a:solidFill>
+            <a:srgbClr val="141E33"/>
           </a:solidFill>
           <a:ln>
             <a:noFill/>
@@ -7840,17 +10375,123 @@
           </a:fontRef>
         </p:style>
         <p:txBody>
-          <a:bodyPr rtlCol="0" anchor="ctr" wrap="none"/>
+          <a:bodyPr rtlCol="0" anchor="ctr"/>
+          <a:lstStyle/>
+          <a:p>
+            <a:pPr algn="ctr"/>
+          </a:p>
+        </p:txBody>
+      </p:sp>
+      <p:sp>
+        <p:nvSpPr>
+          <p:cNvPr id="37" name="Rectangle 36"/>
+          <p:cNvSpPr/>
+          <p:nvPr/>
+        </p:nvSpPr>
+        <p:spPr>
+          <a:xfrm>
+            <a:off x="457200" y="5486400"/>
+            <a:ext cx="73152" cy="685800"/>
+          </a:xfrm>
+          <a:prstGeom prst="rect">
+            <a:avLst/>
+          </a:prstGeom>
+          <a:solidFill>
+            <a:srgbClr val="EF4444"/>
+          </a:solidFill>
+          <a:ln>
+            <a:noFill/>
+          </a:ln>
+        </p:spPr>
+        <p:style>
+          <a:lnRef idx="1">
+            <a:schemeClr val="accent1"/>
+          </a:lnRef>
+          <a:fillRef idx="3">
+            <a:schemeClr val="accent1"/>
+          </a:fillRef>
+          <a:effectRef idx="2">
+            <a:schemeClr val="accent1"/>
+          </a:effectRef>
+          <a:fontRef idx="minor">
+            <a:schemeClr val="lt1"/>
+          </a:fontRef>
+        </p:style>
+        <p:txBody>
+          <a:bodyPr rtlCol="0" anchor="ctr"/>
+          <a:lstStyle/>
+          <a:p>
+            <a:pPr algn="ctr"/>
+          </a:p>
+        </p:txBody>
+      </p:sp>
+      <p:sp>
+        <p:nvSpPr>
+          <p:cNvPr id="38" name="Oval 37"/>
+          <p:cNvSpPr/>
+          <p:nvPr/>
+        </p:nvSpPr>
+        <p:spPr>
+          <a:xfrm>
+            <a:off x="731520" y="5596128"/>
+            <a:ext cx="411480" cy="411480"/>
+          </a:xfrm>
+          <a:prstGeom prst="ellipse">
+            <a:avLst/>
+          </a:prstGeom>
+          <a:solidFill>
+            <a:srgbClr val="EF4444"/>
+          </a:solidFill>
+          <a:ln>
+            <a:noFill/>
+          </a:ln>
+        </p:spPr>
+        <p:style>
+          <a:lnRef idx="1">
+            <a:schemeClr val="accent1"/>
+          </a:lnRef>
+          <a:fillRef idx="3">
+            <a:schemeClr val="accent1"/>
+          </a:fillRef>
+          <a:effectRef idx="2">
+            <a:schemeClr val="accent1"/>
+          </a:effectRef>
+          <a:fontRef idx="minor">
+            <a:schemeClr val="lt1"/>
+          </a:fontRef>
+        </p:style>
+        <p:txBody>
+          <a:bodyPr rtlCol="0" anchor="ctr"/>
+          <a:lstStyle/>
+          <a:p>
+            <a:pPr algn="ctr"/>
+          </a:p>
+        </p:txBody>
+      </p:sp>
+      <p:sp>
+        <p:nvSpPr>
+          <p:cNvPr id="39" name="TextBox 38"/>
+          <p:cNvSpPr txBox="1"/>
+          <p:nvPr/>
+        </p:nvSpPr>
+        <p:spPr>
+          <a:xfrm>
+            <a:off x="731520" y="5596128"/>
+            <a:ext cx="411480" cy="411480"/>
+          </a:xfrm>
+          <a:prstGeom prst="rect">
+            <a:avLst/>
+          </a:prstGeom>
+          <a:noFill/>
+        </p:spPr>
+        <p:txBody>
+          <a:bodyPr wrap="square">
+            <a:spAutoFit/>
+          </a:bodyPr>
           <a:lstStyle/>
           <a:p>
             <a:pPr algn="ctr">
-              <a:spcBef>
-                <a:spcPts val="0"/>
-              </a:spcBef>
-              <a:spcAft>
-                <a:spcPts val="0"/>
-              </a:spcAft>
-              <a:defRPr sz="1400" b="1">
+              <a:defRPr sz="1300" b="1">
                 <a:solidFill>
                   <a:srgbClr val="FFFFFF"/>
                 </a:solidFill>
@@ -7865,14 +10506,14 @@
       </p:sp>
       <p:sp>
         <p:nvSpPr>
-          <p:cNvPr id="20" name="TextBox 19"/>
+          <p:cNvPr id="40" name="TextBox 39"/>
           <p:cNvSpPr txBox="1"/>
           <p:nvPr/>
         </p:nvSpPr>
         <p:spPr>
           <a:xfrm>
-            <a:off x="1463040" y="5943600"/>
-            <a:ext cx="9601200" cy="731520"/>
+            <a:off x="1371600" y="5577840"/>
+            <a:ext cx="10058400" cy="502920"/>
           </a:xfrm>
           <a:prstGeom prst="rect">
             <a:avLst/>
@@ -7886,9 +10527,9 @@
           <a:lstStyle/>
           <a:p>
             <a:pPr algn="l">
-              <a:defRPr sz="1600" b="0">
+              <a:defRPr sz="1500" b="0">
                 <a:solidFill>
-                  <a:srgbClr val="B0BCD4"/>
+                  <a:srgbClr val="CBD5E8"/>
                 </a:solidFill>
                 <a:latin typeface="Microsoft YaHei"/>
               </a:defRPr>
@@ -7901,14 +10542,14 @@
       </p:sp>
       <p:sp>
         <p:nvSpPr>
-          <p:cNvPr id="21" name="Rectangle 20"/>
+          <p:cNvPr id="41" name="Rectangle 40"/>
           <p:cNvSpPr/>
           <p:nvPr/>
         </p:nvSpPr>
         <p:spPr>
           <a:xfrm>
-            <a:off x="0" y="6492240"/>
-            <a:ext cx="12191695" cy="25400"/>
+            <a:off x="0" y="6446520"/>
+            <a:ext cx="12191695" cy="19050"/>
           </a:xfrm>
           <a:prstGeom prst="rect">
             <a:avLst/>
@@ -7944,13 +10585,13 @@
       </p:sp>
       <p:sp>
         <p:nvSpPr>
-          <p:cNvPr id="22" name="TextBox 21"/>
+          <p:cNvPr id="42" name="TextBox 41"/>
           <p:cNvSpPr txBox="1"/>
           <p:nvPr/>
         </p:nvSpPr>
         <p:spPr>
           <a:xfrm>
-            <a:off x="457200" y="6537960"/>
+            <a:off x="457200" y="6492240"/>
             <a:ext cx="5486400" cy="274320"/>
           </a:xfrm>
           <a:prstGeom prst="rect">
@@ -7965,7 +10606,7 @@
           <a:lstStyle/>
           <a:p>
             <a:pPr algn="l">
-              <a:defRPr sz="1000" b="0">
+              <a:defRPr sz="900" b="0">
                 <a:solidFill>
                   <a:srgbClr val="6B7B9E"/>
                 </a:solidFill>
@@ -7980,13 +10621,13 @@
       </p:sp>
       <p:sp>
         <p:nvSpPr>
-          <p:cNvPr id="23" name="TextBox 22"/>
+          <p:cNvPr id="43" name="TextBox 42"/>
           <p:cNvSpPr txBox="1"/>
           <p:nvPr/>
         </p:nvSpPr>
         <p:spPr>
           <a:xfrm>
-            <a:off x="10515600" y="6537960"/>
+            <a:off x="10515600" y="6492240"/>
             <a:ext cx="1371600" cy="274320"/>
           </a:xfrm>
           <a:prstGeom prst="rect">
@@ -8001,7 +10642,7 @@
           <a:lstStyle/>
           <a:p>
             <a:pPr algn="r">
-              <a:defRPr sz="1000" b="0">
+              <a:defRPr sz="900" b="0">
                 <a:solidFill>
                   <a:srgbClr val="6B7B9E"/>
                 </a:solidFill>
@@ -8028,7 +10669,7 @@
     <p:bg>
       <p:bgPr>
         <a:solidFill>
-          <a:srgbClr val="0F172A"/>
+          <a:srgbClr val="0B1120"/>
         </a:solidFill>
         <a:effectLst/>
       </p:bgPr>
@@ -8042,14 +10683,100 @@
       <p:grpSpPr/>
       <p:sp>
         <p:nvSpPr>
-          <p:cNvPr id="2" name="TextBox 1"/>
+          <p:cNvPr id="2" name="Rectangle 1"/>
+          <p:cNvSpPr/>
+          <p:nvPr/>
+        </p:nvSpPr>
+        <p:spPr>
+          <a:xfrm>
+            <a:off x="0" y="0"/>
+            <a:ext cx="12191695" cy="1051560"/>
+          </a:xfrm>
+          <a:prstGeom prst="rect">
+            <a:avLst/>
+          </a:prstGeom>
+          <a:solidFill>
+            <a:srgbClr val="141E33"/>
+          </a:solidFill>
+          <a:ln>
+            <a:noFill/>
+          </a:ln>
+        </p:spPr>
+        <p:style>
+          <a:lnRef idx="1">
+            <a:schemeClr val="accent1"/>
+          </a:lnRef>
+          <a:fillRef idx="3">
+            <a:schemeClr val="accent1"/>
+          </a:fillRef>
+          <a:effectRef idx="2">
+            <a:schemeClr val="accent1"/>
+          </a:effectRef>
+          <a:fontRef idx="minor">
+            <a:schemeClr val="lt1"/>
+          </a:fontRef>
+        </p:style>
+        <p:txBody>
+          <a:bodyPr rtlCol="0" anchor="ctr"/>
+          <a:lstStyle/>
+          <a:p>
+            <a:pPr algn="ctr"/>
+          </a:p>
+        </p:txBody>
+      </p:sp>
+      <p:sp>
+        <p:nvSpPr>
+          <p:cNvPr id="3" name="Rectangle 2"/>
+          <p:cNvSpPr/>
+          <p:nvPr/>
+        </p:nvSpPr>
+        <p:spPr>
+          <a:xfrm>
+            <a:off x="0" y="0"/>
+            <a:ext cx="109728" cy="1051560"/>
+          </a:xfrm>
+          <a:prstGeom prst="rect">
+            <a:avLst/>
+          </a:prstGeom>
+          <a:solidFill>
+            <a:srgbClr val="00D4FF"/>
+          </a:solidFill>
+          <a:ln>
+            <a:noFill/>
+          </a:ln>
+        </p:spPr>
+        <p:style>
+          <a:lnRef idx="1">
+            <a:schemeClr val="accent1"/>
+          </a:lnRef>
+          <a:fillRef idx="3">
+            <a:schemeClr val="accent1"/>
+          </a:fillRef>
+          <a:effectRef idx="2">
+            <a:schemeClr val="accent1"/>
+          </a:effectRef>
+          <a:fontRef idx="minor">
+            <a:schemeClr val="lt1"/>
+          </a:fontRef>
+        </p:style>
+        <p:txBody>
+          <a:bodyPr rtlCol="0" anchor="ctr"/>
+          <a:lstStyle/>
+          <a:p>
+            <a:pPr algn="ctr"/>
+          </a:p>
+        </p:txBody>
+      </p:sp>
+      <p:sp>
+        <p:nvSpPr>
+          <p:cNvPr id="4" name="TextBox 3"/>
           <p:cNvSpPr txBox="1"/>
           <p:nvPr/>
         </p:nvSpPr>
         <p:spPr>
           <a:xfrm>
-            <a:off x="731520" y="365760"/>
-            <a:ext cx="10058400" cy="548640"/>
+            <a:off x="548640" y="182880"/>
+            <a:ext cx="10058400" cy="640080"/>
           </a:xfrm>
           <a:prstGeom prst="rect">
             <a:avLst/>
@@ -8078,14 +10805,14 @@
       </p:sp>
       <p:sp>
         <p:nvSpPr>
-          <p:cNvPr id="3" name="Rectangle 2"/>
+          <p:cNvPr id="5" name="Rectangle 4"/>
           <p:cNvSpPr/>
           <p:nvPr/>
         </p:nvSpPr>
         <p:spPr>
           <a:xfrm>
-            <a:off x="731520" y="1005840"/>
-            <a:ext cx="1828800" cy="38100"/>
+            <a:off x="0" y="1051560"/>
+            <a:ext cx="12191695" cy="25400"/>
           </a:xfrm>
           <a:prstGeom prst="rect">
             <a:avLst/>
@@ -8121,20 +10848,20 @@
       </p:sp>
       <p:sp>
         <p:nvSpPr>
-          <p:cNvPr id="4" name="Rounded Rectangle 3"/>
+          <p:cNvPr id="6" name="Rounded Rectangle 5"/>
           <p:cNvSpPr/>
           <p:nvPr/>
         </p:nvSpPr>
         <p:spPr>
           <a:xfrm>
-            <a:off x="914400" y="1828800"/>
-            <a:ext cx="10058400" cy="2286000"/>
+            <a:off x="731520" y="1645920"/>
+            <a:ext cx="10698480" cy="2743200"/>
           </a:xfrm>
           <a:prstGeom prst="roundRect">
             <a:avLst/>
           </a:prstGeom>
           <a:solidFill>
-            <a:srgbClr val="1A253C"/>
+            <a:srgbClr val="141E33"/>
           </a:solidFill>
           <a:ln>
             <a:noFill/>
@@ -8164,20 +10891,20 @@
       </p:sp>
       <p:sp>
         <p:nvSpPr>
-          <p:cNvPr id="5" name="Rectangle 4"/>
+          <p:cNvPr id="7" name="Rectangle 6"/>
           <p:cNvSpPr/>
           <p:nvPr/>
         </p:nvSpPr>
         <p:spPr>
           <a:xfrm>
-            <a:off x="914400" y="1828800"/>
-            <a:ext cx="76200" cy="2286000"/>
-          </a:xfrm>
-          <a:prstGeom prst="rect">
-            <a:avLst/>
-          </a:prstGeom>
-          <a:solidFill>
-            <a:srgbClr val="F59E0B"/>
+            <a:off x="731520" y="1645920"/>
+            <a:ext cx="10698480" cy="91440"/>
+          </a:xfrm>
+          <a:prstGeom prst="rect">
+            <a:avLst/>
+          </a:prstGeom>
+          <a:solidFill>
+            <a:srgbClr val="00D4FF"/>
           </a:solidFill>
           <a:ln>
             <a:noFill/>
@@ -8207,14 +10934,57 @@
       </p:sp>
       <p:sp>
         <p:nvSpPr>
-          <p:cNvPr id="6" name="TextBox 5"/>
+          <p:cNvPr id="8" name="Rectangle 7"/>
+          <p:cNvSpPr/>
+          <p:nvPr/>
+        </p:nvSpPr>
+        <p:spPr>
+          <a:xfrm>
+            <a:off x="731520" y="1645920"/>
+            <a:ext cx="109728" cy="2743200"/>
+          </a:xfrm>
+          <a:prstGeom prst="rect">
+            <a:avLst/>
+          </a:prstGeom>
+          <a:solidFill>
+            <a:srgbClr val="00D4FF"/>
+          </a:solidFill>
+          <a:ln>
+            <a:noFill/>
+          </a:ln>
+        </p:spPr>
+        <p:style>
+          <a:lnRef idx="1">
+            <a:schemeClr val="accent1"/>
+          </a:lnRef>
+          <a:fillRef idx="3">
+            <a:schemeClr val="accent1"/>
+          </a:fillRef>
+          <a:effectRef idx="2">
+            <a:schemeClr val="accent1"/>
+          </a:effectRef>
+          <a:fontRef idx="minor">
+            <a:schemeClr val="lt1"/>
+          </a:fontRef>
+        </p:style>
+        <p:txBody>
+          <a:bodyPr rtlCol="0" anchor="ctr"/>
+          <a:lstStyle/>
+          <a:p>
+            <a:pPr algn="ctr"/>
+          </a:p>
+        </p:txBody>
+      </p:sp>
+      <p:sp>
+        <p:nvSpPr>
+          <p:cNvPr id="9" name="TextBox 8"/>
           <p:cNvSpPr txBox="1"/>
           <p:nvPr/>
         </p:nvSpPr>
         <p:spPr>
           <a:xfrm>
-            <a:off x="1371600" y="2103120"/>
-            <a:ext cx="9144000" cy="457200"/>
+            <a:off x="1097280" y="1920240"/>
+            <a:ext cx="914400" cy="548640"/>
           </a:xfrm>
           <a:prstGeom prst="rect">
             <a:avLst/>
@@ -8228,29 +10998,29 @@
           <a:lstStyle/>
           <a:p>
             <a:pPr algn="l">
-              <a:defRPr sz="1400" b="1">
+              <a:defRPr sz="3200" b="0">
                 <a:solidFill>
-                  <a:srgbClr val="F59E0B"/>
+                  <a:srgbClr val="00D4FF"/>
                 </a:solidFill>
                 <a:latin typeface="Microsoft YaHei"/>
               </a:defRPr>
             </a:pPr>
             <a:r>
-              <a:t>💡 核心要点</a:t>
-            </a:r>
-          </a:p>
-        </p:txBody>
-      </p:sp>
-      <p:sp>
-        <p:nvSpPr>
-          <p:cNvPr id="7" name="TextBox 6"/>
+              <a:t>💡</a:t>
+            </a:r>
+          </a:p>
+        </p:txBody>
+      </p:sp>
+      <p:sp>
+        <p:nvSpPr>
+          <p:cNvPr id="10" name="TextBox 9"/>
           <p:cNvSpPr txBox="1"/>
           <p:nvPr/>
         </p:nvSpPr>
         <p:spPr>
           <a:xfrm>
-            <a:off x="1371600" y="2651760"/>
-            <a:ext cx="9144000" cy="1097280"/>
+            <a:off x="1645920" y="1965960"/>
+            <a:ext cx="2743200" cy="457200"/>
           </a:xfrm>
           <a:prstGeom prst="rect">
             <a:avLst/>
@@ -8264,7 +11034,43 @@
           <a:lstStyle/>
           <a:p>
             <a:pPr algn="l">
-              <a:defRPr sz="2200" b="1">
+              <a:defRPr sz="1600" b="1">
+                <a:solidFill>
+                  <a:srgbClr val="00D4FF"/>
+                </a:solidFill>
+                <a:latin typeface="Microsoft YaHei"/>
+              </a:defRPr>
+            </a:pPr>
+            <a:r>
+              <a:t>核心要点</a:t>
+            </a:r>
+          </a:p>
+        </p:txBody>
+      </p:sp>
+      <p:sp>
+        <p:nvSpPr>
+          <p:cNvPr id="11" name="TextBox 10"/>
+          <p:cNvSpPr txBox="1"/>
+          <p:nvPr/>
+        </p:nvSpPr>
+        <p:spPr>
+          <a:xfrm>
+            <a:off x="1188720" y="2560320"/>
+            <a:ext cx="9784080" cy="1371600"/>
+          </a:xfrm>
+          <a:prstGeom prst="rect">
+            <a:avLst/>
+          </a:prstGeom>
+          <a:noFill/>
+        </p:spPr>
+        <p:txBody>
+          <a:bodyPr wrap="square">
+            <a:spAutoFit/>
+          </a:bodyPr>
+          <a:lstStyle/>
+          <a:p>
+            <a:pPr algn="l">
+              <a:defRPr sz="2400" b="1">
                 <a:solidFill>
                   <a:srgbClr val="FFFFFF"/>
                 </a:solidFill>
@@ -8279,56 +11085,20 @@
       </p:sp>
       <p:sp>
         <p:nvSpPr>
-          <p:cNvPr id="8" name="TextBox 7"/>
-          <p:cNvSpPr txBox="1"/>
-          <p:nvPr/>
-        </p:nvSpPr>
-        <p:spPr>
-          <a:xfrm>
-            <a:off x="914400" y="4572000"/>
-            <a:ext cx="10058400" cy="1371600"/>
-          </a:xfrm>
-          <a:prstGeom prst="rect">
-            <a:avLst/>
-          </a:prstGeom>
-          <a:noFill/>
-        </p:spPr>
-        <p:txBody>
-          <a:bodyPr wrap="square">
-            <a:spAutoFit/>
-          </a:bodyPr>
-          <a:lstStyle/>
-          <a:p>
-            <a:pPr algn="l">
-              <a:defRPr sz="1500" b="0">
-                <a:solidFill>
-                  <a:srgbClr val="B0BCD4"/>
-                </a:solidFill>
-                <a:latin typeface="Microsoft YaHei"/>
-              </a:defRPr>
-            </a:pPr>
-            <a:r>
-              <a:t>工具会更新迭代，但创意能力和工业化思维是持久的竞争力。本课程不仅教工具操作，更注重培养你的创作思维和生产效率。</a:t>
-            </a:r>
-          </a:p>
-        </p:txBody>
-      </p:sp>
-      <p:sp>
-        <p:nvSpPr>
-          <p:cNvPr id="9" name="Rectangle 8"/>
+          <p:cNvPr id="12" name="Rounded Rectangle 11"/>
           <p:cNvSpPr/>
           <p:nvPr/>
         </p:nvSpPr>
         <p:spPr>
           <a:xfrm>
-            <a:off x="0" y="6492240"/>
-            <a:ext cx="12191695" cy="25400"/>
-          </a:xfrm>
-          <a:prstGeom prst="rect">
-            <a:avLst/>
-          </a:prstGeom>
-          <a:solidFill>
-            <a:srgbClr val="2D3B55"/>
+            <a:off x="731520" y="4754880"/>
+            <a:ext cx="10698480" cy="1371600"/>
+          </a:xfrm>
+          <a:prstGeom prst="roundRect">
+            <a:avLst/>
+          </a:prstGeom>
+          <a:solidFill>
+            <a:srgbClr val="1A2842"/>
           </a:solidFill>
           <a:ln>
             <a:noFill/>
@@ -8358,14 +11128,57 @@
       </p:sp>
       <p:sp>
         <p:nvSpPr>
-          <p:cNvPr id="10" name="TextBox 9"/>
+          <p:cNvPr id="13" name="Rectangle 12"/>
+          <p:cNvSpPr/>
+          <p:nvPr/>
+        </p:nvSpPr>
+        <p:spPr>
+          <a:xfrm>
+            <a:off x="731520" y="4754880"/>
+            <a:ext cx="73152" cy="1371600"/>
+          </a:xfrm>
+          <a:prstGeom prst="rect">
+            <a:avLst/>
+          </a:prstGeom>
+          <a:solidFill>
+            <a:srgbClr val="6B7B9E"/>
+          </a:solidFill>
+          <a:ln>
+            <a:noFill/>
+          </a:ln>
+        </p:spPr>
+        <p:style>
+          <a:lnRef idx="1">
+            <a:schemeClr val="accent1"/>
+          </a:lnRef>
+          <a:fillRef idx="3">
+            <a:schemeClr val="accent1"/>
+          </a:fillRef>
+          <a:effectRef idx="2">
+            <a:schemeClr val="accent1"/>
+          </a:effectRef>
+          <a:fontRef idx="minor">
+            <a:schemeClr val="lt1"/>
+          </a:fontRef>
+        </p:style>
+        <p:txBody>
+          <a:bodyPr rtlCol="0" anchor="ctr"/>
+          <a:lstStyle/>
+          <a:p>
+            <a:pPr algn="ctr"/>
+          </a:p>
+        </p:txBody>
+      </p:sp>
+      <p:sp>
+        <p:nvSpPr>
+          <p:cNvPr id="14" name="TextBox 13"/>
           <p:cNvSpPr txBox="1"/>
           <p:nvPr/>
         </p:nvSpPr>
         <p:spPr>
           <a:xfrm>
-            <a:off x="457200" y="6537960"/>
-            <a:ext cx="5486400" cy="274320"/>
+            <a:off x="1097280" y="4892040"/>
+            <a:ext cx="10058400" cy="1097280"/>
           </a:xfrm>
           <a:prstGeom prst="rect">
             <a:avLst/>
@@ -8379,7 +11192,86 @@
           <a:lstStyle/>
           <a:p>
             <a:pPr algn="l">
-              <a:defRPr sz="1000" b="0">
+              <a:defRPr sz="1400" b="0">
+                <a:solidFill>
+                  <a:srgbClr val="CBD5E8"/>
+                </a:solidFill>
+                <a:latin typeface="Microsoft YaHei"/>
+              </a:defRPr>
+            </a:pPr>
+            <a:r>
+              <a:t>工具会更新迭代，但创意能力和工业化思维是持久的竞争力。本课程不仅教工具操作，更注重培养你的创作思维和生产效率。</a:t>
+            </a:r>
+          </a:p>
+        </p:txBody>
+      </p:sp>
+      <p:sp>
+        <p:nvSpPr>
+          <p:cNvPr id="15" name="Rectangle 14"/>
+          <p:cNvSpPr/>
+          <p:nvPr/>
+        </p:nvSpPr>
+        <p:spPr>
+          <a:xfrm>
+            <a:off x="0" y="6446520"/>
+            <a:ext cx="12191695" cy="19050"/>
+          </a:xfrm>
+          <a:prstGeom prst="rect">
+            <a:avLst/>
+          </a:prstGeom>
+          <a:solidFill>
+            <a:srgbClr val="2D3B55"/>
+          </a:solidFill>
+          <a:ln>
+            <a:noFill/>
+          </a:ln>
+        </p:spPr>
+        <p:style>
+          <a:lnRef idx="1">
+            <a:schemeClr val="accent1"/>
+          </a:lnRef>
+          <a:fillRef idx="3">
+            <a:schemeClr val="accent1"/>
+          </a:fillRef>
+          <a:effectRef idx="2">
+            <a:schemeClr val="accent1"/>
+          </a:effectRef>
+          <a:fontRef idx="minor">
+            <a:schemeClr val="lt1"/>
+          </a:fontRef>
+        </p:style>
+        <p:txBody>
+          <a:bodyPr rtlCol="0" anchor="ctr"/>
+          <a:lstStyle/>
+          <a:p>
+            <a:pPr algn="ctr"/>
+          </a:p>
+        </p:txBody>
+      </p:sp>
+      <p:sp>
+        <p:nvSpPr>
+          <p:cNvPr id="16" name="TextBox 15"/>
+          <p:cNvSpPr txBox="1"/>
+          <p:nvPr/>
+        </p:nvSpPr>
+        <p:spPr>
+          <a:xfrm>
+            <a:off x="457200" y="6492240"/>
+            <a:ext cx="5486400" cy="274320"/>
+          </a:xfrm>
+          <a:prstGeom prst="rect">
+            <a:avLst/>
+          </a:prstGeom>
+          <a:noFill/>
+        </p:spPr>
+        <p:txBody>
+          <a:bodyPr wrap="square">
+            <a:spAutoFit/>
+          </a:bodyPr>
+          <a:lstStyle/>
+          <a:p>
+            <a:pPr algn="l">
+              <a:defRPr sz="900" b="0">
                 <a:solidFill>
                   <a:srgbClr val="6B7B9E"/>
                 </a:solidFill>
@@ -8394,13 +11286,13 @@
       </p:sp>
       <p:sp>
         <p:nvSpPr>
-          <p:cNvPr id="11" name="TextBox 10"/>
+          <p:cNvPr id="17" name="TextBox 16"/>
           <p:cNvSpPr txBox="1"/>
           <p:nvPr/>
         </p:nvSpPr>
         <p:spPr>
           <a:xfrm>
-            <a:off x="10515600" y="6537960"/>
+            <a:off x="10515600" y="6492240"/>
             <a:ext cx="1371600" cy="274320"/>
           </a:xfrm>
           <a:prstGeom prst="rect">
@@ -8415,7 +11307,7 @@
           <a:lstStyle/>
           <a:p>
             <a:pPr algn="r">
-              <a:defRPr sz="1000" b="0">
+              <a:defRPr sz="900" b="0">
                 <a:solidFill>
                   <a:srgbClr val="6B7B9E"/>
                 </a:solidFill>
@@ -8442,7 +11334,7 @@
     <p:bg>
       <p:bgPr>
         <a:solidFill>
-          <a:srgbClr val="0F172A"/>
+          <a:srgbClr val="0B1120"/>
         </a:solidFill>
         <a:effectLst/>
       </p:bgPr>
@@ -8456,16 +11348,16 @@
       <p:grpSpPr/>
       <p:sp>
         <p:nvSpPr>
-          <p:cNvPr id="2" name="Rectangle 1"/>
+          <p:cNvPr id="2" name="Oval 1"/>
           <p:cNvSpPr/>
           <p:nvPr/>
         </p:nvSpPr>
         <p:spPr>
           <a:xfrm>
-            <a:off x="0" y="2926080"/>
-            <a:ext cx="12191695" cy="25400"/>
-          </a:xfrm>
-          <a:prstGeom prst="rect">
+            <a:off x="5029200" y="1371600"/>
+            <a:ext cx="2103120" cy="2103120"/>
+          </a:xfrm>
+          <a:prstGeom prst="ellipse">
             <a:avLst/>
           </a:prstGeom>
           <a:solidFill>
@@ -8505,8 +11397,8 @@
         </p:nvSpPr>
         <p:spPr>
           <a:xfrm>
-            <a:off x="0" y="1828800"/>
-            <a:ext cx="12191695" cy="914400"/>
+            <a:off x="5029200" y="1645920"/>
+            <a:ext cx="2103120" cy="1645920"/>
           </a:xfrm>
           <a:prstGeom prst="rect">
             <a:avLst/>
@@ -8520,7 +11412,7 @@
           <a:lstStyle/>
           <a:p>
             <a:pPr algn="ctr">
-              <a:defRPr sz="3600" b="1">
+              <a:defRPr sz="6000" b="0">
                 <a:solidFill>
                   <a:srgbClr val="FFFFFF"/>
                 </a:solidFill>
@@ -8528,7 +11420,7 @@
               </a:defRPr>
             </a:pPr>
             <a:r>
-              <a:t>✅ 本模块结束</a:t>
+              <a:t>✅</a:t>
             </a:r>
           </a:p>
         </p:txBody>
@@ -8541,8 +11433,8 @@
         </p:nvSpPr>
         <p:spPr>
           <a:xfrm>
-            <a:off x="0" y="3474720"/>
-            <a:ext cx="12191695" cy="457200"/>
+            <a:off x="0" y="3840480"/>
+            <a:ext cx="12191695" cy="731520"/>
           </a:xfrm>
           <a:prstGeom prst="rect">
             <a:avLst/>
@@ -8556,28 +11448,71 @@
           <a:lstStyle/>
           <a:p>
             <a:pPr algn="ctr">
-              <a:defRPr sz="1800" b="0">
+              <a:defRPr sz="3200" b="1">
                 <a:solidFill>
-                  <a:srgbClr val="B0BCD4"/>
+                  <a:srgbClr val="FFFFFF"/>
                 </a:solidFill>
                 <a:latin typeface="Microsoft YaHei"/>
               </a:defRPr>
             </a:pPr>
             <a:r>
-              <a:t>下一模块：行业认知与趋势</a:t>
-            </a:r>
-          </a:p>
-        </p:txBody>
-      </p:sp>
-      <p:sp>
-        <p:nvSpPr>
-          <p:cNvPr id="5" name="TextBox 4"/>
+              <a:t>本模块结束</a:t>
+            </a:r>
+          </a:p>
+        </p:txBody>
+      </p:sp>
+      <p:sp>
+        <p:nvSpPr>
+          <p:cNvPr id="5" name="Rectangle 4"/>
+          <p:cNvSpPr/>
+          <p:nvPr/>
+        </p:nvSpPr>
+        <p:spPr>
+          <a:xfrm>
+            <a:off x="5029200" y="4754880"/>
+            <a:ext cx="2103120" cy="38100"/>
+          </a:xfrm>
+          <a:prstGeom prst="rect">
+            <a:avLst/>
+          </a:prstGeom>
+          <a:solidFill>
+            <a:srgbClr val="00D4FF"/>
+          </a:solidFill>
+          <a:ln>
+            <a:noFill/>
+          </a:ln>
+        </p:spPr>
+        <p:style>
+          <a:lnRef idx="1">
+            <a:schemeClr val="accent1"/>
+          </a:lnRef>
+          <a:fillRef idx="3">
+            <a:schemeClr val="accent1"/>
+          </a:fillRef>
+          <a:effectRef idx="2">
+            <a:schemeClr val="accent1"/>
+          </a:effectRef>
+          <a:fontRef idx="minor">
+            <a:schemeClr val="lt1"/>
+          </a:fontRef>
+        </p:style>
+        <p:txBody>
+          <a:bodyPr rtlCol="0" anchor="ctr"/>
+          <a:lstStyle/>
+          <a:p>
+            <a:pPr algn="ctr"/>
+          </a:p>
+        </p:txBody>
+      </p:sp>
+      <p:sp>
+        <p:nvSpPr>
+          <p:cNvPr id="6" name="TextBox 5"/>
           <p:cNvSpPr txBox="1"/>
           <p:nvPr/>
         </p:nvSpPr>
         <p:spPr>
           <a:xfrm>
-            <a:off x="0" y="4572000"/>
+            <a:off x="0" y="5029200"/>
             <a:ext cx="12191695" cy="457200"/>
           </a:xfrm>
           <a:prstGeom prst="rect">
@@ -8592,7 +11527,43 @@
           <a:lstStyle/>
           <a:p>
             <a:pPr algn="ctr">
-              <a:defRPr sz="1400" b="0">
+              <a:defRPr sz="1800" b="0">
+                <a:solidFill>
+                  <a:srgbClr val="CBD5E8"/>
+                </a:solidFill>
+                <a:latin typeface="Microsoft YaHei"/>
+              </a:defRPr>
+            </a:pPr>
+            <a:r>
+              <a:t>下一模块：行业认知与趋势</a:t>
+            </a:r>
+          </a:p>
+        </p:txBody>
+      </p:sp>
+      <p:sp>
+        <p:nvSpPr>
+          <p:cNvPr id="7" name="TextBox 6"/>
+          <p:cNvSpPr txBox="1"/>
+          <p:nvPr/>
+        </p:nvSpPr>
+        <p:spPr>
+          <a:xfrm>
+            <a:off x="0" y="5943600"/>
+            <a:ext cx="12191695" cy="365760"/>
+          </a:xfrm>
+          <a:prstGeom prst="rect">
+            <a:avLst/>
+          </a:prstGeom>
+          <a:noFill/>
+        </p:spPr>
+        <p:txBody>
+          <a:bodyPr wrap="square">
+            <a:spAutoFit/>
+          </a:bodyPr>
+          <a:lstStyle/>
+          <a:p>
+            <a:pPr algn="ctr">
+              <a:defRPr sz="1200" b="0">
                 <a:solidFill>
                   <a:srgbClr val="6B7B9E"/>
                 </a:solidFill>

--- a/AI漫剧制作课程/PPT课件/00-课程导论.pptx
+++ b/AI漫剧制作课程/PPT课件/00-课程导论.pptx
@@ -3091,7 +3091,7 @@
     <p:bg>
       <p:bgPr>
         <a:solidFill>
-          <a:srgbClr val="0B1120"/>
+          <a:srgbClr val="0A0E1A"/>
         </a:solidFill>
         <a:effectLst/>
       </p:bgPr>
@@ -3112,13 +3112,13 @@
         <p:spPr>
           <a:xfrm>
             <a:off x="0" y="0"/>
-            <a:ext cx="5029200" cy="6858000"/>
-          </a:xfrm>
-          <a:prstGeom prst="rect">
-            <a:avLst/>
-          </a:prstGeom>
-          <a:solidFill>
-            <a:srgbClr val="00D4FF"/>
+            <a:ext cx="4754880" cy="6858000"/>
+          </a:xfrm>
+          <a:prstGeom prst="rect">
+            <a:avLst/>
+          </a:prstGeom>
+          <a:solidFill>
+            <a:srgbClr val="00C8F0"/>
           </a:solidFill>
           <a:ln>
             <a:noFill/>
@@ -3155,13 +3155,13 @@
         <p:spPr>
           <a:xfrm>
             <a:off x="0" y="0"/>
-            <a:ext cx="5029200" cy="109728"/>
-          </a:xfrm>
-          <a:prstGeom prst="rect">
-            <a:avLst/>
-          </a:prstGeom>
-          <a:solidFill>
-            <a:srgbClr val="FFFFFF"/>
+            <a:ext cx="4754880" cy="25400"/>
+          </a:xfrm>
+          <a:prstGeom prst="rect">
+            <a:avLst/>
+          </a:prstGeom>
+          <a:solidFill>
+            <a:srgbClr val="F0F4FC"/>
           </a:solidFill>
           <a:ln>
             <a:noFill/>
@@ -3198,13 +3198,13 @@
         <p:spPr>
           <a:xfrm>
             <a:off x="0" y="0"/>
-            <a:ext cx="109728" cy="6858000"/>
-          </a:xfrm>
-          <a:prstGeom prst="rect">
-            <a:avLst/>
-          </a:prstGeom>
-          <a:solidFill>
-            <a:srgbClr val="FFFFFF"/>
+            <a:ext cx="25400" cy="6858000"/>
+          </a:xfrm>
+          <a:prstGeom prst="rect">
+            <a:avLst/>
+          </a:prstGeom>
+          <a:solidFill>
+            <a:srgbClr val="F0F4FC"/>
           </a:solidFill>
           <a:ln>
             <a:noFill/>
@@ -3240,8 +3240,8 @@
         </p:nvSpPr>
         <p:spPr>
           <a:xfrm>
-            <a:off x="457200" y="1828800"/>
-            <a:ext cx="4114800" cy="1828800"/>
+            <a:off x="548640" y="1645920"/>
+            <a:ext cx="3657600" cy="2286000"/>
           </a:xfrm>
           <a:prstGeom prst="rect">
             <a:avLst/>
@@ -3255,9 +3255,9 @@
           <a:lstStyle/>
           <a:p>
             <a:pPr algn="ctr">
-              <a:defRPr sz="10000" b="0">
+              <a:defRPr sz="8000" b="0">
                 <a:solidFill>
-                  <a:srgbClr val="FFFFFF"/>
+                  <a:srgbClr val="F0F4FC"/>
                 </a:solidFill>
                 <a:latin typeface="Microsoft YaHei"/>
               </a:defRPr>
@@ -3276,14 +3276,14 @@
         </p:nvSpPr>
         <p:spPr>
           <a:xfrm>
-            <a:off x="5669280" y="1371600"/>
-            <a:ext cx="5943600" cy="457200"/>
+            <a:off x="5486400" y="1371600"/>
+            <a:ext cx="5943600" cy="411480"/>
           </a:xfrm>
           <a:prstGeom prst="roundRect">
             <a:avLst/>
           </a:prstGeom>
           <a:solidFill>
-            <a:srgbClr val="00D4FF"/>
+            <a:srgbClr val="00C8F0"/>
           </a:solidFill>
           <a:ln>
             <a:noFill/>
@@ -3319,8 +3319,8 @@
         </p:nvSpPr>
         <p:spPr>
           <a:xfrm>
-            <a:off x="5852160" y="1371600"/>
-            <a:ext cx="5486400" cy="457200"/>
+            <a:off x="5669280" y="1371600"/>
+            <a:ext cx="5577840" cy="411480"/>
           </a:xfrm>
           <a:prstGeom prst="rect">
             <a:avLst/>
@@ -3334,9 +3334,9 @@
           <a:lstStyle/>
           <a:p>
             <a:pPr algn="ctr">
-              <a:defRPr sz="1200" b="0">
+              <a:defRPr sz="1100" b="0">
                 <a:solidFill>
-                  <a:srgbClr val="FFFFFF"/>
+                  <a:srgbClr val="F0F4FC"/>
                 </a:solidFill>
                 <a:latin typeface="Microsoft YaHei"/>
               </a:defRPr>
@@ -3355,8 +3355,8 @@
         </p:nvSpPr>
         <p:spPr>
           <a:xfrm>
-            <a:off x="5669280" y="2286000"/>
-            <a:ext cx="5943600" cy="1645920"/>
+            <a:off x="5486400" y="2377440"/>
+            <a:ext cx="5943600" cy="1463040"/>
           </a:xfrm>
           <a:prstGeom prst="rect">
             <a:avLst/>
@@ -3370,9 +3370,9 @@
           <a:lstStyle/>
           <a:p>
             <a:pPr algn="l">
-              <a:defRPr sz="3600" b="1">
+              <a:defRPr sz="4400" b="1">
                 <a:solidFill>
-                  <a:srgbClr val="FFFFFF"/>
+                  <a:srgbClr val="F0F4FC"/>
                 </a:solidFill>
                 <a:latin typeface="Microsoft YaHei"/>
               </a:defRPr>
@@ -3391,14 +3391,14 @@
         </p:nvSpPr>
         <p:spPr>
           <a:xfrm>
-            <a:off x="5669280" y="4023360"/>
-            <a:ext cx="2743200" cy="38100"/>
-          </a:xfrm>
-          <a:prstGeom prst="rect">
-            <a:avLst/>
-          </a:prstGeom>
-          <a:solidFill>
-            <a:srgbClr val="00D4FF"/>
+            <a:off x="5486400" y="4023360"/>
+            <a:ext cx="2286000" cy="38100"/>
+          </a:xfrm>
+          <a:prstGeom prst="rect">
+            <a:avLst/>
+          </a:prstGeom>
+          <a:solidFill>
+            <a:srgbClr val="00C8F0"/>
           </a:solidFill>
           <a:ln>
             <a:noFill/>
@@ -3434,8 +3434,8 @@
         </p:nvSpPr>
         <p:spPr>
           <a:xfrm>
-            <a:off x="5669280" y="4389120"/>
-            <a:ext cx="5943600" cy="914400"/>
+            <a:off x="5486400" y="4389120"/>
+            <a:ext cx="5943600" cy="731520"/>
           </a:xfrm>
           <a:prstGeom prst="rect">
             <a:avLst/>
@@ -3449,9 +3449,9 @@
           <a:lstStyle/>
           <a:p>
             <a:pPr algn="l">
-              <a:defRPr sz="1800" b="0">
+              <a:defRPr sz="1600" b="0">
                 <a:solidFill>
-                  <a:srgbClr val="CBD5E8"/>
+                  <a:srgbClr val="A0AEC4"/>
                 </a:solidFill>
                 <a:latin typeface="Microsoft YaHei"/>
               </a:defRPr>
@@ -3470,14 +3470,14 @@
         </p:nvSpPr>
         <p:spPr>
           <a:xfrm>
-            <a:off x="5669280" y="5669280"/>
-            <a:ext cx="5943600" cy="640080"/>
-          </a:xfrm>
-          <a:prstGeom prst="rect">
-            <a:avLst/>
-          </a:prstGeom>
-          <a:solidFill>
-            <a:srgbClr val="141E33"/>
+            <a:off x="5486400" y="5486400"/>
+            <a:ext cx="5943600" cy="594360"/>
+          </a:xfrm>
+          <a:prstGeom prst="rect">
+            <a:avLst/>
+          </a:prstGeom>
+          <a:solidFill>
+            <a:srgbClr val="161F35"/>
           </a:solidFill>
           <a:ln>
             <a:noFill/>
@@ -3513,8 +3513,8 @@
         </p:nvSpPr>
         <p:spPr>
           <a:xfrm>
-            <a:off x="5852160" y="5715000"/>
-            <a:ext cx="1371600" cy="548640"/>
+            <a:off x="5669280" y="5532120"/>
+            <a:ext cx="1280160" cy="502920"/>
           </a:xfrm>
           <a:prstGeom prst="rect">
             <a:avLst/>
@@ -3528,9 +3528,9 @@
           <a:lstStyle/>
           <a:p>
             <a:pPr algn="ctr">
-              <a:defRPr sz="1200" b="1">
+              <a:defRPr sz="1100" b="1">
                 <a:solidFill>
-                  <a:srgbClr val="00D4FF"/>
+                  <a:srgbClr val="00C8F0"/>
                 </a:solidFill>
                 <a:latin typeface="Microsoft YaHei"/>
               </a:defRPr>
@@ -3549,8 +3549,8 @@
         </p:nvSpPr>
         <p:spPr>
           <a:xfrm>
-            <a:off x="7315200" y="5715000"/>
-            <a:ext cx="1371600" cy="548640"/>
+            <a:off x="7132320" y="5532120"/>
+            <a:ext cx="1280160" cy="502920"/>
           </a:xfrm>
           <a:prstGeom prst="rect">
             <a:avLst/>
@@ -3564,9 +3564,9 @@
           <a:lstStyle/>
           <a:p>
             <a:pPr algn="ctr">
-              <a:defRPr sz="1200" b="1">
+              <a:defRPr sz="1100" b="1">
                 <a:solidFill>
-                  <a:srgbClr val="00D4FF"/>
+                  <a:srgbClr val="00C8F0"/>
                 </a:solidFill>
                 <a:latin typeface="Microsoft YaHei"/>
               </a:defRPr>
@@ -3585,8 +3585,8 @@
         </p:nvSpPr>
         <p:spPr>
           <a:xfrm>
-            <a:off x="8778240" y="5715000"/>
-            <a:ext cx="1371600" cy="548640"/>
+            <a:off x="8595360" y="5532120"/>
+            <a:ext cx="1280160" cy="502920"/>
           </a:xfrm>
           <a:prstGeom prst="rect">
             <a:avLst/>
@@ -3600,9 +3600,9 @@
           <a:lstStyle/>
           <a:p>
             <a:pPr algn="ctr">
-              <a:defRPr sz="1200" b="1">
+              <a:defRPr sz="1100" b="1">
                 <a:solidFill>
-                  <a:srgbClr val="00D4FF"/>
+                  <a:srgbClr val="00C8F0"/>
                 </a:solidFill>
                 <a:latin typeface="Microsoft YaHei"/>
               </a:defRPr>
@@ -3621,8 +3621,8 @@
         </p:nvSpPr>
         <p:spPr>
           <a:xfrm>
-            <a:off x="10241280" y="5715000"/>
-            <a:ext cx="1371600" cy="548640"/>
+            <a:off x="10058400" y="5532120"/>
+            <a:ext cx="1280160" cy="502920"/>
           </a:xfrm>
           <a:prstGeom prst="rect">
             <a:avLst/>
@@ -3636,9 +3636,9 @@
           <a:lstStyle/>
           <a:p>
             <a:pPr algn="ctr">
-              <a:defRPr sz="1200" b="1">
+              <a:defRPr sz="1100" b="1">
                 <a:solidFill>
-                  <a:srgbClr val="00D4FF"/>
+                  <a:srgbClr val="00C8F0"/>
                 </a:solidFill>
                 <a:latin typeface="Microsoft YaHei"/>
               </a:defRPr>
@@ -3663,7 +3663,7 @@
     <p:bg>
       <p:bgPr>
         <a:solidFill>
-          <a:srgbClr val="0B1120"/>
+          <a:srgbClr val="0A0E1A"/>
         </a:solidFill>
         <a:effectLst/>
       </p:bgPr>
@@ -3684,13 +3684,13 @@
         <p:spPr>
           <a:xfrm>
             <a:off x="0" y="0"/>
-            <a:ext cx="12191695" cy="1051560"/>
-          </a:xfrm>
-          <a:prstGeom prst="rect">
-            <a:avLst/>
-          </a:prstGeom>
-          <a:solidFill>
-            <a:srgbClr val="141E33"/>
+            <a:ext cx="12191695" cy="38100"/>
+          </a:xfrm>
+          <a:prstGeom prst="rect">
+            <a:avLst/>
+          </a:prstGeom>
+          <a:solidFill>
+            <a:srgbClr val="00C8F0"/>
           </a:solidFill>
           <a:ln>
             <a:noFill/>
@@ -3726,14 +3726,14 @@
         </p:nvSpPr>
         <p:spPr>
           <a:xfrm>
-            <a:off x="0" y="0"/>
-            <a:ext cx="109728" cy="1051560"/>
-          </a:xfrm>
-          <a:prstGeom prst="rect">
-            <a:avLst/>
-          </a:prstGeom>
-          <a:solidFill>
-            <a:srgbClr val="00D4FF"/>
+            <a:off x="0" y="38100"/>
+            <a:ext cx="12191695" cy="914400"/>
+          </a:xfrm>
+          <a:prstGeom prst="rect">
+            <a:avLst/>
+          </a:prstGeom>
+          <a:solidFill>
+            <a:srgbClr val="161F35"/>
           </a:solidFill>
           <a:ln>
             <a:noFill/>
@@ -3763,56 +3763,20 @@
       </p:sp>
       <p:sp>
         <p:nvSpPr>
-          <p:cNvPr id="4" name="TextBox 3"/>
-          <p:cNvSpPr txBox="1"/>
-          <p:nvPr/>
-        </p:nvSpPr>
-        <p:spPr>
-          <a:xfrm>
-            <a:off x="548640" y="182880"/>
-            <a:ext cx="10058400" cy="640080"/>
-          </a:xfrm>
-          <a:prstGeom prst="rect">
-            <a:avLst/>
-          </a:prstGeom>
-          <a:noFill/>
-        </p:spPr>
-        <p:txBody>
-          <a:bodyPr wrap="square">
-            <a:spAutoFit/>
-          </a:bodyPr>
-          <a:lstStyle/>
-          <a:p>
-            <a:pPr algn="l">
-              <a:defRPr sz="2600" b="1">
-                <a:solidFill>
-                  <a:srgbClr val="FFFFFF"/>
-                </a:solidFill>
-                <a:latin typeface="Microsoft YaHei"/>
-              </a:defRPr>
-            </a:pPr>
-            <a:r>
-              <a:t>📋 本节内容</a:t>
-            </a:r>
-          </a:p>
-        </p:txBody>
-      </p:sp>
-      <p:sp>
-        <p:nvSpPr>
-          <p:cNvPr id="5" name="Rectangle 4"/>
+          <p:cNvPr id="4" name="Rectangle 3"/>
           <p:cNvSpPr/>
           <p:nvPr/>
         </p:nvSpPr>
         <p:spPr>
           <a:xfrm>
-            <a:off x="0" y="1051560"/>
-            <a:ext cx="12191695" cy="25400"/>
-          </a:xfrm>
-          <a:prstGeom prst="rect">
-            <a:avLst/>
-          </a:prstGeom>
-          <a:solidFill>
-            <a:srgbClr val="00D4FF"/>
+            <a:off x="0" y="38100"/>
+            <a:ext cx="91440" cy="914400"/>
+          </a:xfrm>
+          <a:prstGeom prst="rect">
+            <a:avLst/>
+          </a:prstGeom>
+          <a:solidFill>
+            <a:srgbClr val="00C8F0"/>
           </a:solidFill>
           <a:ln>
             <a:noFill/>
@@ -3842,25 +3806,59 @@
       </p:sp>
       <p:sp>
         <p:nvSpPr>
-          <p:cNvPr id="6" name="Rounded Rectangle 5"/>
+          <p:cNvPr id="5" name="TextBox 4"/>
+          <p:cNvSpPr txBox="1"/>
+          <p:nvPr/>
+        </p:nvSpPr>
+        <p:spPr>
+          <a:xfrm>
+            <a:off x="731520" y="137160"/>
+            <a:ext cx="10728655" cy="640080"/>
+          </a:xfrm>
+          <a:prstGeom prst="rect">
+            <a:avLst/>
+          </a:prstGeom>
+          <a:noFill/>
+        </p:spPr>
+        <p:txBody>
+          <a:bodyPr wrap="square">
+            <a:spAutoFit/>
+          </a:bodyPr>
+          <a:lstStyle/>
+          <a:p>
+            <a:pPr algn="l">
+              <a:defRPr sz="2400" b="1">
+                <a:solidFill>
+                  <a:srgbClr val="F0F4FC"/>
+                </a:solidFill>
+                <a:latin typeface="Microsoft YaHei"/>
+              </a:defRPr>
+            </a:pPr>
+            <a:r>
+              <a:t>📋 本节内容</a:t>
+            </a:r>
+          </a:p>
+        </p:txBody>
+      </p:sp>
+      <p:sp>
+        <p:nvSpPr>
+          <p:cNvPr id="6" name="Rectangle 5"/>
           <p:cNvSpPr/>
           <p:nvPr/>
         </p:nvSpPr>
         <p:spPr>
           <a:xfrm>
-            <a:off x="548640" y="1371600"/>
-            <a:ext cx="3383280" cy="1005840"/>
-          </a:xfrm>
-          <a:prstGeom prst="roundRect">
-            <a:avLst/>
-          </a:prstGeom>
-          <a:solidFill>
-            <a:srgbClr val="141E33"/>
-          </a:solidFill>
-          <a:ln w="19050">
-            <a:solidFill>
-              <a:srgbClr val="00D4FF"/>
-            </a:solidFill>
+            <a:off x="0" y="1078992"/>
+            <a:ext cx="12191695" cy="12700"/>
+          </a:xfrm>
+          <a:prstGeom prst="rect">
+            <a:avLst/>
+          </a:prstGeom>
+          <a:solidFill>
+            <a:srgbClr val="253350"/>
+          </a:solidFill>
+          <a:ln>
+            <a:noFill/>
           </a:ln>
         </p:spPr>
         <p:style>
@@ -3887,23 +3885,25 @@
       </p:sp>
       <p:sp>
         <p:nvSpPr>
-          <p:cNvPr id="7" name="Oval 6"/>
+          <p:cNvPr id="7" name="Rounded Rectangle 6"/>
           <p:cNvSpPr/>
           <p:nvPr/>
         </p:nvSpPr>
         <p:spPr>
           <a:xfrm>
-            <a:off x="685800" y="1600200"/>
-            <a:ext cx="457200" cy="457200"/>
-          </a:xfrm>
-          <a:prstGeom prst="ellipse">
-            <a:avLst/>
-          </a:prstGeom>
-          <a:solidFill>
-            <a:srgbClr val="00D4FF"/>
-          </a:solidFill>
-          <a:ln>
-            <a:noFill/>
+            <a:off x="594360" y="1371600"/>
+            <a:ext cx="3383280" cy="960120"/>
+          </a:xfrm>
+          <a:prstGeom prst="roundRect">
+            <a:avLst/>
+          </a:prstGeom>
+          <a:solidFill>
+            <a:srgbClr val="161F35"/>
+          </a:solidFill>
+          <a:ln w="12700">
+            <a:solidFill>
+              <a:srgbClr val="253350"/>
+            </a:solidFill>
           </a:ln>
         </p:spPr>
         <p:style>
@@ -3930,97 +3930,23 @@
       </p:sp>
       <p:sp>
         <p:nvSpPr>
-          <p:cNvPr id="8" name="TextBox 7"/>
-          <p:cNvSpPr txBox="1"/>
-          <p:nvPr/>
-        </p:nvSpPr>
-        <p:spPr>
-          <a:xfrm>
-            <a:off x="685800" y="1600200"/>
-            <a:ext cx="457200" cy="457200"/>
-          </a:xfrm>
-          <a:prstGeom prst="rect">
-            <a:avLst/>
-          </a:prstGeom>
-          <a:noFill/>
-        </p:spPr>
-        <p:txBody>
-          <a:bodyPr wrap="square">
-            <a:spAutoFit/>
-          </a:bodyPr>
-          <a:lstStyle/>
-          <a:p>
-            <a:pPr algn="ctr">
-              <a:defRPr sz="1400" b="1">
-                <a:solidFill>
-                  <a:srgbClr val="FFFFFF"/>
-                </a:solidFill>
-                <a:latin typeface="Microsoft YaHei"/>
-              </a:defRPr>
-            </a:pPr>
-            <a:r>
-              <a:t>1</a:t>
-            </a:r>
-          </a:p>
-        </p:txBody>
-      </p:sp>
-      <p:sp>
-        <p:nvSpPr>
-          <p:cNvPr id="9" name="TextBox 8"/>
-          <p:cNvSpPr txBox="1"/>
-          <p:nvPr/>
-        </p:nvSpPr>
-        <p:spPr>
-          <a:xfrm>
-            <a:off x="1280160" y="1554480"/>
-            <a:ext cx="2468880" cy="640080"/>
-          </a:xfrm>
-          <a:prstGeom prst="rect">
-            <a:avLst/>
-          </a:prstGeom>
-          <a:noFill/>
-        </p:spPr>
-        <p:txBody>
-          <a:bodyPr wrap="square">
-            <a:spAutoFit/>
-          </a:bodyPr>
-          <a:lstStyle/>
-          <a:p>
-            <a:pPr algn="l">
-              <a:defRPr sz="1300" b="0">
-                <a:solidFill>
-                  <a:srgbClr val="CBD5E8"/>
-                </a:solidFill>
-                <a:latin typeface="Microsoft YaHei"/>
-              </a:defRPr>
-            </a:pPr>
-            <a:r>
-              <a:t>行业认知与趋势</a:t>
-            </a:r>
-          </a:p>
-        </p:txBody>
-      </p:sp>
-      <p:sp>
-        <p:nvSpPr>
-          <p:cNvPr id="10" name="Rounded Rectangle 9"/>
+          <p:cNvPr id="8" name="Oval 7"/>
           <p:cNvSpPr/>
           <p:nvPr/>
         </p:nvSpPr>
         <p:spPr>
           <a:xfrm>
-            <a:off x="4251960" y="1371600"/>
-            <a:ext cx="3383280" cy="1005840"/>
-          </a:xfrm>
-          <a:prstGeom prst="roundRect">
-            <a:avLst/>
-          </a:prstGeom>
-          <a:solidFill>
-            <a:srgbClr val="141E33"/>
-          </a:solidFill>
-          <a:ln w="19050">
-            <a:solidFill>
-              <a:srgbClr val="00D4FF"/>
-            </a:solidFill>
+            <a:off x="704088" y="1572768"/>
+            <a:ext cx="411480" cy="411480"/>
+          </a:xfrm>
+          <a:prstGeom prst="ellipse">
+            <a:avLst/>
+          </a:prstGeom>
+          <a:solidFill>
+            <a:srgbClr val="00C8F0"/>
+          </a:solidFill>
+          <a:ln>
+            <a:noFill/>
           </a:ln>
         </p:spPr>
         <p:style>
@@ -4047,23 +3973,97 @@
       </p:sp>
       <p:sp>
         <p:nvSpPr>
-          <p:cNvPr id="11" name="Oval 10"/>
+          <p:cNvPr id="9" name="TextBox 8"/>
+          <p:cNvSpPr txBox="1"/>
+          <p:nvPr/>
+        </p:nvSpPr>
+        <p:spPr>
+          <a:xfrm>
+            <a:off x="704088" y="1572768"/>
+            <a:ext cx="411480" cy="411480"/>
+          </a:xfrm>
+          <a:prstGeom prst="rect">
+            <a:avLst/>
+          </a:prstGeom>
+          <a:noFill/>
+        </p:spPr>
+        <p:txBody>
+          <a:bodyPr wrap="square">
+            <a:spAutoFit/>
+          </a:bodyPr>
+          <a:lstStyle/>
+          <a:p>
+            <a:pPr algn="ctr">
+              <a:defRPr sz="1200" b="1">
+                <a:solidFill>
+                  <a:srgbClr val="F0F4FC"/>
+                </a:solidFill>
+                <a:latin typeface="Microsoft YaHei"/>
+              </a:defRPr>
+            </a:pPr>
+            <a:r>
+              <a:t>1</a:t>
+            </a:r>
+          </a:p>
+        </p:txBody>
+      </p:sp>
+      <p:sp>
+        <p:nvSpPr>
+          <p:cNvPr id="10" name="TextBox 9"/>
+          <p:cNvSpPr txBox="1"/>
+          <p:nvPr/>
+        </p:nvSpPr>
+        <p:spPr>
+          <a:xfrm>
+            <a:off x="1234440" y="1536192"/>
+            <a:ext cx="2560320" cy="594360"/>
+          </a:xfrm>
+          <a:prstGeom prst="rect">
+            <a:avLst/>
+          </a:prstGeom>
+          <a:noFill/>
+        </p:spPr>
+        <p:txBody>
+          <a:bodyPr wrap="square">
+            <a:spAutoFit/>
+          </a:bodyPr>
+          <a:lstStyle/>
+          <a:p>
+            <a:pPr algn="l">
+              <a:defRPr sz="1200" b="0">
+                <a:solidFill>
+                  <a:srgbClr val="A0AEC4"/>
+                </a:solidFill>
+                <a:latin typeface="Microsoft YaHei"/>
+              </a:defRPr>
+            </a:pPr>
+            <a:r>
+              <a:t>行业认知与趋势</a:t>
+            </a:r>
+          </a:p>
+        </p:txBody>
+      </p:sp>
+      <p:sp>
+        <p:nvSpPr>
+          <p:cNvPr id="11" name="Rounded Rectangle 10"/>
           <p:cNvSpPr/>
           <p:nvPr/>
         </p:nvSpPr>
         <p:spPr>
           <a:xfrm>
-            <a:off x="4389120" y="1600200"/>
-            <a:ext cx="457200" cy="457200"/>
-          </a:xfrm>
-          <a:prstGeom prst="ellipse">
-            <a:avLst/>
-          </a:prstGeom>
-          <a:solidFill>
-            <a:srgbClr val="00D4FF"/>
-          </a:solidFill>
-          <a:ln>
-            <a:noFill/>
+            <a:off x="4251960" y="1371600"/>
+            <a:ext cx="3383280" cy="960120"/>
+          </a:xfrm>
+          <a:prstGeom prst="roundRect">
+            <a:avLst/>
+          </a:prstGeom>
+          <a:solidFill>
+            <a:srgbClr val="161F35"/>
+          </a:solidFill>
+          <a:ln w="12700">
+            <a:solidFill>
+              <a:srgbClr val="253350"/>
+            </a:solidFill>
           </a:ln>
         </p:spPr>
         <p:style>
@@ -4090,97 +4090,23 @@
       </p:sp>
       <p:sp>
         <p:nvSpPr>
-          <p:cNvPr id="12" name="TextBox 11"/>
-          <p:cNvSpPr txBox="1"/>
-          <p:nvPr/>
-        </p:nvSpPr>
-        <p:spPr>
-          <a:xfrm>
-            <a:off x="4389120" y="1600200"/>
-            <a:ext cx="457200" cy="457200"/>
-          </a:xfrm>
-          <a:prstGeom prst="rect">
-            <a:avLst/>
-          </a:prstGeom>
-          <a:noFill/>
-        </p:spPr>
-        <p:txBody>
-          <a:bodyPr wrap="square">
-            <a:spAutoFit/>
-          </a:bodyPr>
-          <a:lstStyle/>
-          <a:p>
-            <a:pPr algn="ctr">
-              <a:defRPr sz="1400" b="1">
-                <a:solidFill>
-                  <a:srgbClr val="FFFFFF"/>
-                </a:solidFill>
-                <a:latin typeface="Microsoft YaHei"/>
-              </a:defRPr>
-            </a:pPr>
-            <a:r>
-              <a:t>2</a:t>
-            </a:r>
-          </a:p>
-        </p:txBody>
-      </p:sp>
-      <p:sp>
-        <p:nvSpPr>
-          <p:cNvPr id="13" name="TextBox 12"/>
-          <p:cNvSpPr txBox="1"/>
-          <p:nvPr/>
-        </p:nvSpPr>
-        <p:spPr>
-          <a:xfrm>
-            <a:off x="4983480" y="1554480"/>
-            <a:ext cx="2468880" cy="640080"/>
-          </a:xfrm>
-          <a:prstGeom prst="rect">
-            <a:avLst/>
-          </a:prstGeom>
-          <a:noFill/>
-        </p:spPr>
-        <p:txBody>
-          <a:bodyPr wrap="square">
-            <a:spAutoFit/>
-          </a:bodyPr>
-          <a:lstStyle/>
-          <a:p>
-            <a:pPr algn="l">
-              <a:defRPr sz="1300" b="0">
-                <a:solidFill>
-                  <a:srgbClr val="CBD5E8"/>
-                </a:solidFill>
-                <a:latin typeface="Microsoft YaHei"/>
-              </a:defRPr>
-            </a:pPr>
-            <a:r>
-              <a:t>大语言模型与剧本创作</a:t>
-            </a:r>
-          </a:p>
-        </p:txBody>
-      </p:sp>
-      <p:sp>
-        <p:nvSpPr>
-          <p:cNvPr id="14" name="Rounded Rectangle 13"/>
+          <p:cNvPr id="12" name="Oval 11"/>
           <p:cNvSpPr/>
           <p:nvPr/>
         </p:nvSpPr>
         <p:spPr>
           <a:xfrm>
-            <a:off x="7955280" y="1371600"/>
-            <a:ext cx="3383280" cy="1005840"/>
-          </a:xfrm>
-          <a:prstGeom prst="roundRect">
-            <a:avLst/>
-          </a:prstGeom>
-          <a:solidFill>
-            <a:srgbClr val="141E33"/>
-          </a:solidFill>
-          <a:ln w="19050">
-            <a:solidFill>
-              <a:srgbClr val="00D4FF"/>
-            </a:solidFill>
+            <a:off x="4361688" y="1572768"/>
+            <a:ext cx="411480" cy="411480"/>
+          </a:xfrm>
+          <a:prstGeom prst="ellipse">
+            <a:avLst/>
+          </a:prstGeom>
+          <a:solidFill>
+            <a:srgbClr val="00C8F0"/>
+          </a:solidFill>
+          <a:ln>
+            <a:noFill/>
           </a:ln>
         </p:spPr>
         <p:style>
@@ -4207,23 +4133,97 @@
       </p:sp>
       <p:sp>
         <p:nvSpPr>
-          <p:cNvPr id="15" name="Oval 14"/>
+          <p:cNvPr id="13" name="TextBox 12"/>
+          <p:cNvSpPr txBox="1"/>
+          <p:nvPr/>
+        </p:nvSpPr>
+        <p:spPr>
+          <a:xfrm>
+            <a:off x="4361688" y="1572768"/>
+            <a:ext cx="411480" cy="411480"/>
+          </a:xfrm>
+          <a:prstGeom prst="rect">
+            <a:avLst/>
+          </a:prstGeom>
+          <a:noFill/>
+        </p:spPr>
+        <p:txBody>
+          <a:bodyPr wrap="square">
+            <a:spAutoFit/>
+          </a:bodyPr>
+          <a:lstStyle/>
+          <a:p>
+            <a:pPr algn="ctr">
+              <a:defRPr sz="1200" b="1">
+                <a:solidFill>
+                  <a:srgbClr val="F0F4FC"/>
+                </a:solidFill>
+                <a:latin typeface="Microsoft YaHei"/>
+              </a:defRPr>
+            </a:pPr>
+            <a:r>
+              <a:t>2</a:t>
+            </a:r>
+          </a:p>
+        </p:txBody>
+      </p:sp>
+      <p:sp>
+        <p:nvSpPr>
+          <p:cNvPr id="14" name="TextBox 13"/>
+          <p:cNvSpPr txBox="1"/>
+          <p:nvPr/>
+        </p:nvSpPr>
+        <p:spPr>
+          <a:xfrm>
+            <a:off x="4892040" y="1536192"/>
+            <a:ext cx="2560320" cy="594360"/>
+          </a:xfrm>
+          <a:prstGeom prst="rect">
+            <a:avLst/>
+          </a:prstGeom>
+          <a:noFill/>
+        </p:spPr>
+        <p:txBody>
+          <a:bodyPr wrap="square">
+            <a:spAutoFit/>
+          </a:bodyPr>
+          <a:lstStyle/>
+          <a:p>
+            <a:pPr algn="l">
+              <a:defRPr sz="1200" b="0">
+                <a:solidFill>
+                  <a:srgbClr val="A0AEC4"/>
+                </a:solidFill>
+                <a:latin typeface="Microsoft YaHei"/>
+              </a:defRPr>
+            </a:pPr>
+            <a:r>
+              <a:t>大语言模型与剧本创作</a:t>
+            </a:r>
+          </a:p>
+        </p:txBody>
+      </p:sp>
+      <p:sp>
+        <p:nvSpPr>
+          <p:cNvPr id="15" name="Rounded Rectangle 14"/>
           <p:cNvSpPr/>
           <p:nvPr/>
         </p:nvSpPr>
         <p:spPr>
           <a:xfrm>
-            <a:off x="8092440" y="1600200"/>
-            <a:ext cx="457200" cy="457200"/>
-          </a:xfrm>
-          <a:prstGeom prst="ellipse">
-            <a:avLst/>
-          </a:prstGeom>
-          <a:solidFill>
-            <a:srgbClr val="00D4FF"/>
-          </a:solidFill>
-          <a:ln>
-            <a:noFill/>
+            <a:off x="7909560" y="1371600"/>
+            <a:ext cx="3383280" cy="960120"/>
+          </a:xfrm>
+          <a:prstGeom prst="roundRect">
+            <a:avLst/>
+          </a:prstGeom>
+          <a:solidFill>
+            <a:srgbClr val="161F35"/>
+          </a:solidFill>
+          <a:ln w="12700">
+            <a:solidFill>
+              <a:srgbClr val="253350"/>
+            </a:solidFill>
           </a:ln>
         </p:spPr>
         <p:style>
@@ -4250,97 +4250,23 @@
       </p:sp>
       <p:sp>
         <p:nvSpPr>
-          <p:cNvPr id="16" name="TextBox 15"/>
-          <p:cNvSpPr txBox="1"/>
-          <p:nvPr/>
-        </p:nvSpPr>
-        <p:spPr>
-          <a:xfrm>
-            <a:off x="8092440" y="1600200"/>
-            <a:ext cx="457200" cy="457200"/>
-          </a:xfrm>
-          <a:prstGeom prst="rect">
-            <a:avLst/>
-          </a:prstGeom>
-          <a:noFill/>
-        </p:spPr>
-        <p:txBody>
-          <a:bodyPr wrap="square">
-            <a:spAutoFit/>
-          </a:bodyPr>
-          <a:lstStyle/>
-          <a:p>
-            <a:pPr algn="ctr">
-              <a:defRPr sz="1400" b="1">
-                <a:solidFill>
-                  <a:srgbClr val="FFFFFF"/>
-                </a:solidFill>
-                <a:latin typeface="Microsoft YaHei"/>
-              </a:defRPr>
-            </a:pPr>
-            <a:r>
-              <a:t>3</a:t>
-            </a:r>
-          </a:p>
-        </p:txBody>
-      </p:sp>
-      <p:sp>
-        <p:nvSpPr>
-          <p:cNvPr id="17" name="TextBox 16"/>
-          <p:cNvSpPr txBox="1"/>
-          <p:nvPr/>
-        </p:nvSpPr>
-        <p:spPr>
-          <a:xfrm>
-            <a:off x="8686800" y="1554480"/>
-            <a:ext cx="2468880" cy="640080"/>
-          </a:xfrm>
-          <a:prstGeom prst="rect">
-            <a:avLst/>
-          </a:prstGeom>
-          <a:noFill/>
-        </p:spPr>
-        <p:txBody>
-          <a:bodyPr wrap="square">
-            <a:spAutoFit/>
-          </a:bodyPr>
-          <a:lstStyle/>
-          <a:p>
-            <a:pPr algn="l">
-              <a:defRPr sz="1300" b="0">
-                <a:solidFill>
-                  <a:srgbClr val="CBD5E8"/>
-                </a:solidFill>
-                <a:latin typeface="Microsoft YaHei"/>
-              </a:defRPr>
-            </a:pPr>
-            <a:r>
-              <a:t>分镜设计与提示词工程</a:t>
-            </a:r>
-          </a:p>
-        </p:txBody>
-      </p:sp>
-      <p:sp>
-        <p:nvSpPr>
-          <p:cNvPr id="18" name="Rounded Rectangle 17"/>
+          <p:cNvPr id="16" name="Oval 15"/>
           <p:cNvSpPr/>
           <p:nvPr/>
         </p:nvSpPr>
         <p:spPr>
           <a:xfrm>
-            <a:off x="548640" y="2606040"/>
-            <a:ext cx="3383280" cy="1005840"/>
-          </a:xfrm>
-          <a:prstGeom prst="roundRect">
-            <a:avLst/>
-          </a:prstGeom>
-          <a:solidFill>
-            <a:srgbClr val="141E33"/>
-          </a:solidFill>
-          <a:ln w="19050">
-            <a:solidFill>
-              <a:srgbClr val="00D4FF"/>
-            </a:solidFill>
+            <a:off x="8019288" y="1572768"/>
+            <a:ext cx="411480" cy="411480"/>
+          </a:xfrm>
+          <a:prstGeom prst="ellipse">
+            <a:avLst/>
+          </a:prstGeom>
+          <a:solidFill>
+            <a:srgbClr val="00C8F0"/>
+          </a:solidFill>
+          <a:ln>
+            <a:noFill/>
           </a:ln>
         </p:spPr>
         <p:style>
@@ -4367,23 +4293,97 @@
       </p:sp>
       <p:sp>
         <p:nvSpPr>
-          <p:cNvPr id="19" name="Oval 18"/>
+          <p:cNvPr id="17" name="TextBox 16"/>
+          <p:cNvSpPr txBox="1"/>
+          <p:nvPr/>
+        </p:nvSpPr>
+        <p:spPr>
+          <a:xfrm>
+            <a:off x="8019288" y="1572768"/>
+            <a:ext cx="411480" cy="411480"/>
+          </a:xfrm>
+          <a:prstGeom prst="rect">
+            <a:avLst/>
+          </a:prstGeom>
+          <a:noFill/>
+        </p:spPr>
+        <p:txBody>
+          <a:bodyPr wrap="square">
+            <a:spAutoFit/>
+          </a:bodyPr>
+          <a:lstStyle/>
+          <a:p>
+            <a:pPr algn="ctr">
+              <a:defRPr sz="1200" b="1">
+                <a:solidFill>
+                  <a:srgbClr val="F0F4FC"/>
+                </a:solidFill>
+                <a:latin typeface="Microsoft YaHei"/>
+              </a:defRPr>
+            </a:pPr>
+            <a:r>
+              <a:t>3</a:t>
+            </a:r>
+          </a:p>
+        </p:txBody>
+      </p:sp>
+      <p:sp>
+        <p:nvSpPr>
+          <p:cNvPr id="18" name="TextBox 17"/>
+          <p:cNvSpPr txBox="1"/>
+          <p:nvPr/>
+        </p:nvSpPr>
+        <p:spPr>
+          <a:xfrm>
+            <a:off x="8549640" y="1536192"/>
+            <a:ext cx="2560320" cy="594360"/>
+          </a:xfrm>
+          <a:prstGeom prst="rect">
+            <a:avLst/>
+          </a:prstGeom>
+          <a:noFill/>
+        </p:spPr>
+        <p:txBody>
+          <a:bodyPr wrap="square">
+            <a:spAutoFit/>
+          </a:bodyPr>
+          <a:lstStyle/>
+          <a:p>
+            <a:pPr algn="l">
+              <a:defRPr sz="1200" b="0">
+                <a:solidFill>
+                  <a:srgbClr val="A0AEC4"/>
+                </a:solidFill>
+                <a:latin typeface="Microsoft YaHei"/>
+              </a:defRPr>
+            </a:pPr>
+            <a:r>
+              <a:t>分镜设计与提示词工程</a:t>
+            </a:r>
+          </a:p>
+        </p:txBody>
+      </p:sp>
+      <p:sp>
+        <p:nvSpPr>
+          <p:cNvPr id="19" name="Rounded Rectangle 18"/>
           <p:cNvSpPr/>
           <p:nvPr/>
         </p:nvSpPr>
         <p:spPr>
           <a:xfrm>
-            <a:off x="685800" y="2834640"/>
-            <a:ext cx="457200" cy="457200"/>
-          </a:xfrm>
-          <a:prstGeom prst="ellipse">
-            <a:avLst/>
-          </a:prstGeom>
-          <a:solidFill>
-            <a:srgbClr val="00D4FF"/>
-          </a:solidFill>
-          <a:ln>
-            <a:noFill/>
+            <a:off x="594360" y="2606040"/>
+            <a:ext cx="3383280" cy="960120"/>
+          </a:xfrm>
+          <a:prstGeom prst="roundRect">
+            <a:avLst/>
+          </a:prstGeom>
+          <a:solidFill>
+            <a:srgbClr val="161F35"/>
+          </a:solidFill>
+          <a:ln w="12700">
+            <a:solidFill>
+              <a:srgbClr val="253350"/>
+            </a:solidFill>
           </a:ln>
         </p:spPr>
         <p:style>
@@ -4410,97 +4410,23 @@
       </p:sp>
       <p:sp>
         <p:nvSpPr>
-          <p:cNvPr id="20" name="TextBox 19"/>
-          <p:cNvSpPr txBox="1"/>
-          <p:nvPr/>
-        </p:nvSpPr>
-        <p:spPr>
-          <a:xfrm>
-            <a:off x="685800" y="2834640"/>
-            <a:ext cx="457200" cy="457200"/>
-          </a:xfrm>
-          <a:prstGeom prst="rect">
-            <a:avLst/>
-          </a:prstGeom>
-          <a:noFill/>
-        </p:spPr>
-        <p:txBody>
-          <a:bodyPr wrap="square">
-            <a:spAutoFit/>
-          </a:bodyPr>
-          <a:lstStyle/>
-          <a:p>
-            <a:pPr algn="ctr">
-              <a:defRPr sz="1400" b="1">
-                <a:solidFill>
-                  <a:srgbClr val="FFFFFF"/>
-                </a:solidFill>
-                <a:latin typeface="Microsoft YaHei"/>
-              </a:defRPr>
-            </a:pPr>
-            <a:r>
-              <a:t>4</a:t>
-            </a:r>
-          </a:p>
-        </p:txBody>
-      </p:sp>
-      <p:sp>
-        <p:nvSpPr>
-          <p:cNvPr id="21" name="TextBox 20"/>
-          <p:cNvSpPr txBox="1"/>
-          <p:nvPr/>
-        </p:nvSpPr>
-        <p:spPr>
-          <a:xfrm>
-            <a:off x="1280160" y="2788920"/>
-            <a:ext cx="2468880" cy="640080"/>
-          </a:xfrm>
-          <a:prstGeom prst="rect">
-            <a:avLst/>
-          </a:prstGeom>
-          <a:noFill/>
-        </p:spPr>
-        <p:txBody>
-          <a:bodyPr wrap="square">
-            <a:spAutoFit/>
-          </a:bodyPr>
-          <a:lstStyle/>
-          <a:p>
-            <a:pPr algn="l">
-              <a:defRPr sz="1300" b="0">
-                <a:solidFill>
-                  <a:srgbClr val="CBD5E8"/>
-                </a:solidFill>
-                <a:latin typeface="Microsoft YaHei"/>
-              </a:defRPr>
-            </a:pPr>
-            <a:r>
-              <a:t>即梦AI深度精通</a:t>
-            </a:r>
-          </a:p>
-        </p:txBody>
-      </p:sp>
-      <p:sp>
-        <p:nvSpPr>
-          <p:cNvPr id="22" name="Rounded Rectangle 21"/>
+          <p:cNvPr id="20" name="Oval 19"/>
           <p:cNvSpPr/>
           <p:nvPr/>
         </p:nvSpPr>
         <p:spPr>
           <a:xfrm>
-            <a:off x="4251960" y="2606040"/>
-            <a:ext cx="3383280" cy="1005840"/>
-          </a:xfrm>
-          <a:prstGeom prst="roundRect">
-            <a:avLst/>
-          </a:prstGeom>
-          <a:solidFill>
-            <a:srgbClr val="141E33"/>
-          </a:solidFill>
-          <a:ln w="19050">
-            <a:solidFill>
-              <a:srgbClr val="00D4FF"/>
-            </a:solidFill>
+            <a:off x="704088" y="2807208"/>
+            <a:ext cx="411480" cy="411480"/>
+          </a:xfrm>
+          <a:prstGeom prst="ellipse">
+            <a:avLst/>
+          </a:prstGeom>
+          <a:solidFill>
+            <a:srgbClr val="00C8F0"/>
+          </a:solidFill>
+          <a:ln>
+            <a:noFill/>
           </a:ln>
         </p:spPr>
         <p:style>
@@ -4527,23 +4453,97 @@
       </p:sp>
       <p:sp>
         <p:nvSpPr>
-          <p:cNvPr id="23" name="Oval 22"/>
+          <p:cNvPr id="21" name="TextBox 20"/>
+          <p:cNvSpPr txBox="1"/>
+          <p:nvPr/>
+        </p:nvSpPr>
+        <p:spPr>
+          <a:xfrm>
+            <a:off x="704088" y="2807208"/>
+            <a:ext cx="411480" cy="411480"/>
+          </a:xfrm>
+          <a:prstGeom prst="rect">
+            <a:avLst/>
+          </a:prstGeom>
+          <a:noFill/>
+        </p:spPr>
+        <p:txBody>
+          <a:bodyPr wrap="square">
+            <a:spAutoFit/>
+          </a:bodyPr>
+          <a:lstStyle/>
+          <a:p>
+            <a:pPr algn="ctr">
+              <a:defRPr sz="1200" b="1">
+                <a:solidFill>
+                  <a:srgbClr val="F0F4FC"/>
+                </a:solidFill>
+                <a:latin typeface="Microsoft YaHei"/>
+              </a:defRPr>
+            </a:pPr>
+            <a:r>
+              <a:t>4</a:t>
+            </a:r>
+          </a:p>
+        </p:txBody>
+      </p:sp>
+      <p:sp>
+        <p:nvSpPr>
+          <p:cNvPr id="22" name="TextBox 21"/>
+          <p:cNvSpPr txBox="1"/>
+          <p:nvPr/>
+        </p:nvSpPr>
+        <p:spPr>
+          <a:xfrm>
+            <a:off x="1234440" y="2770632"/>
+            <a:ext cx="2560320" cy="594360"/>
+          </a:xfrm>
+          <a:prstGeom prst="rect">
+            <a:avLst/>
+          </a:prstGeom>
+          <a:noFill/>
+        </p:spPr>
+        <p:txBody>
+          <a:bodyPr wrap="square">
+            <a:spAutoFit/>
+          </a:bodyPr>
+          <a:lstStyle/>
+          <a:p>
+            <a:pPr algn="l">
+              <a:defRPr sz="1200" b="0">
+                <a:solidFill>
+                  <a:srgbClr val="A0AEC4"/>
+                </a:solidFill>
+                <a:latin typeface="Microsoft YaHei"/>
+              </a:defRPr>
+            </a:pPr>
+            <a:r>
+              <a:t>即梦AI深度精通</a:t>
+            </a:r>
+          </a:p>
+        </p:txBody>
+      </p:sp>
+      <p:sp>
+        <p:nvSpPr>
+          <p:cNvPr id="23" name="Rounded Rectangle 22"/>
           <p:cNvSpPr/>
           <p:nvPr/>
         </p:nvSpPr>
         <p:spPr>
           <a:xfrm>
-            <a:off x="4389120" y="2834640"/>
-            <a:ext cx="457200" cy="457200"/>
-          </a:xfrm>
-          <a:prstGeom prst="ellipse">
-            <a:avLst/>
-          </a:prstGeom>
-          <a:solidFill>
-            <a:srgbClr val="00D4FF"/>
-          </a:solidFill>
-          <a:ln>
-            <a:noFill/>
+            <a:off x="4251960" y="2606040"/>
+            <a:ext cx="3383280" cy="960120"/>
+          </a:xfrm>
+          <a:prstGeom prst="roundRect">
+            <a:avLst/>
+          </a:prstGeom>
+          <a:solidFill>
+            <a:srgbClr val="161F35"/>
+          </a:solidFill>
+          <a:ln w="12700">
+            <a:solidFill>
+              <a:srgbClr val="253350"/>
+            </a:solidFill>
           </a:ln>
         </p:spPr>
         <p:style>
@@ -4570,97 +4570,23 @@
       </p:sp>
       <p:sp>
         <p:nvSpPr>
-          <p:cNvPr id="24" name="TextBox 23"/>
-          <p:cNvSpPr txBox="1"/>
-          <p:nvPr/>
-        </p:nvSpPr>
-        <p:spPr>
-          <a:xfrm>
-            <a:off x="4389120" y="2834640"/>
-            <a:ext cx="457200" cy="457200"/>
-          </a:xfrm>
-          <a:prstGeom prst="rect">
-            <a:avLst/>
-          </a:prstGeom>
-          <a:noFill/>
-        </p:spPr>
-        <p:txBody>
-          <a:bodyPr wrap="square">
-            <a:spAutoFit/>
-          </a:bodyPr>
-          <a:lstStyle/>
-          <a:p>
-            <a:pPr algn="ctr">
-              <a:defRPr sz="1400" b="1">
-                <a:solidFill>
-                  <a:srgbClr val="FFFFFF"/>
-                </a:solidFill>
-                <a:latin typeface="Microsoft YaHei"/>
-              </a:defRPr>
-            </a:pPr>
-            <a:r>
-              <a:t>5</a:t>
-            </a:r>
-          </a:p>
-        </p:txBody>
-      </p:sp>
-      <p:sp>
-        <p:nvSpPr>
-          <p:cNvPr id="25" name="TextBox 24"/>
-          <p:cNvSpPr txBox="1"/>
-          <p:nvPr/>
-        </p:nvSpPr>
-        <p:spPr>
-          <a:xfrm>
-            <a:off x="4983480" y="2788920"/>
-            <a:ext cx="2468880" cy="640080"/>
-          </a:xfrm>
-          <a:prstGeom prst="rect">
-            <a:avLst/>
-          </a:prstGeom>
-          <a:noFill/>
-        </p:spPr>
-        <p:txBody>
-          <a:bodyPr wrap="square">
-            <a:spAutoFit/>
-          </a:bodyPr>
-          <a:lstStyle/>
-          <a:p>
-            <a:pPr algn="l">
-              <a:defRPr sz="1300" b="0">
-                <a:solidFill>
-                  <a:srgbClr val="CBD5E8"/>
-                </a:solidFill>
-                <a:latin typeface="Microsoft YaHei"/>
-              </a:defRPr>
-            </a:pPr>
-            <a:r>
-              <a:t>其他图像生成工具</a:t>
-            </a:r>
-          </a:p>
-        </p:txBody>
-      </p:sp>
-      <p:sp>
-        <p:nvSpPr>
-          <p:cNvPr id="26" name="Rounded Rectangle 25"/>
+          <p:cNvPr id="24" name="Oval 23"/>
           <p:cNvSpPr/>
           <p:nvPr/>
         </p:nvSpPr>
         <p:spPr>
           <a:xfrm>
-            <a:off x="7955280" y="2606040"/>
-            <a:ext cx="3383280" cy="1005840"/>
-          </a:xfrm>
-          <a:prstGeom prst="roundRect">
-            <a:avLst/>
-          </a:prstGeom>
-          <a:solidFill>
-            <a:srgbClr val="141E33"/>
-          </a:solidFill>
-          <a:ln w="19050">
-            <a:solidFill>
-              <a:srgbClr val="00D4FF"/>
-            </a:solidFill>
+            <a:off x="4361688" y="2807208"/>
+            <a:ext cx="411480" cy="411480"/>
+          </a:xfrm>
+          <a:prstGeom prst="ellipse">
+            <a:avLst/>
+          </a:prstGeom>
+          <a:solidFill>
+            <a:srgbClr val="00C8F0"/>
+          </a:solidFill>
+          <a:ln>
+            <a:noFill/>
           </a:ln>
         </p:spPr>
         <p:style>
@@ -4687,23 +4613,97 @@
       </p:sp>
       <p:sp>
         <p:nvSpPr>
-          <p:cNvPr id="27" name="Oval 26"/>
+          <p:cNvPr id="25" name="TextBox 24"/>
+          <p:cNvSpPr txBox="1"/>
+          <p:nvPr/>
+        </p:nvSpPr>
+        <p:spPr>
+          <a:xfrm>
+            <a:off x="4361688" y="2807208"/>
+            <a:ext cx="411480" cy="411480"/>
+          </a:xfrm>
+          <a:prstGeom prst="rect">
+            <a:avLst/>
+          </a:prstGeom>
+          <a:noFill/>
+        </p:spPr>
+        <p:txBody>
+          <a:bodyPr wrap="square">
+            <a:spAutoFit/>
+          </a:bodyPr>
+          <a:lstStyle/>
+          <a:p>
+            <a:pPr algn="ctr">
+              <a:defRPr sz="1200" b="1">
+                <a:solidFill>
+                  <a:srgbClr val="F0F4FC"/>
+                </a:solidFill>
+                <a:latin typeface="Microsoft YaHei"/>
+              </a:defRPr>
+            </a:pPr>
+            <a:r>
+              <a:t>5</a:t>
+            </a:r>
+          </a:p>
+        </p:txBody>
+      </p:sp>
+      <p:sp>
+        <p:nvSpPr>
+          <p:cNvPr id="26" name="TextBox 25"/>
+          <p:cNvSpPr txBox="1"/>
+          <p:nvPr/>
+        </p:nvSpPr>
+        <p:spPr>
+          <a:xfrm>
+            <a:off x="4892040" y="2770632"/>
+            <a:ext cx="2560320" cy="594360"/>
+          </a:xfrm>
+          <a:prstGeom prst="rect">
+            <a:avLst/>
+          </a:prstGeom>
+          <a:noFill/>
+        </p:spPr>
+        <p:txBody>
+          <a:bodyPr wrap="square">
+            <a:spAutoFit/>
+          </a:bodyPr>
+          <a:lstStyle/>
+          <a:p>
+            <a:pPr algn="l">
+              <a:defRPr sz="1200" b="0">
+                <a:solidFill>
+                  <a:srgbClr val="A0AEC4"/>
+                </a:solidFill>
+                <a:latin typeface="Microsoft YaHei"/>
+              </a:defRPr>
+            </a:pPr>
+            <a:r>
+              <a:t>其他图像生成工具</a:t>
+            </a:r>
+          </a:p>
+        </p:txBody>
+      </p:sp>
+      <p:sp>
+        <p:nvSpPr>
+          <p:cNvPr id="27" name="Rounded Rectangle 26"/>
           <p:cNvSpPr/>
           <p:nvPr/>
         </p:nvSpPr>
         <p:spPr>
           <a:xfrm>
-            <a:off x="8092440" y="2834640"/>
-            <a:ext cx="457200" cy="457200"/>
-          </a:xfrm>
-          <a:prstGeom prst="ellipse">
-            <a:avLst/>
-          </a:prstGeom>
-          <a:solidFill>
-            <a:srgbClr val="00D4FF"/>
-          </a:solidFill>
-          <a:ln>
-            <a:noFill/>
+            <a:off x="7909560" y="2606040"/>
+            <a:ext cx="3383280" cy="960120"/>
+          </a:xfrm>
+          <a:prstGeom prst="roundRect">
+            <a:avLst/>
+          </a:prstGeom>
+          <a:solidFill>
+            <a:srgbClr val="161F35"/>
+          </a:solidFill>
+          <a:ln w="12700">
+            <a:solidFill>
+              <a:srgbClr val="253350"/>
+            </a:solidFill>
           </a:ln>
         </p:spPr>
         <p:style>
@@ -4730,97 +4730,23 @@
       </p:sp>
       <p:sp>
         <p:nvSpPr>
-          <p:cNvPr id="28" name="TextBox 27"/>
-          <p:cNvSpPr txBox="1"/>
-          <p:nvPr/>
-        </p:nvSpPr>
-        <p:spPr>
-          <a:xfrm>
-            <a:off x="8092440" y="2834640"/>
-            <a:ext cx="457200" cy="457200"/>
-          </a:xfrm>
-          <a:prstGeom prst="rect">
-            <a:avLst/>
-          </a:prstGeom>
-          <a:noFill/>
-        </p:spPr>
-        <p:txBody>
-          <a:bodyPr wrap="square">
-            <a:spAutoFit/>
-          </a:bodyPr>
-          <a:lstStyle/>
-          <a:p>
-            <a:pPr algn="ctr">
-              <a:defRPr sz="1400" b="1">
-                <a:solidFill>
-                  <a:srgbClr val="FFFFFF"/>
-                </a:solidFill>
-                <a:latin typeface="Microsoft YaHei"/>
-              </a:defRPr>
-            </a:pPr>
-            <a:r>
-              <a:t>6</a:t>
-            </a:r>
-          </a:p>
-        </p:txBody>
-      </p:sp>
-      <p:sp>
-        <p:nvSpPr>
-          <p:cNvPr id="29" name="TextBox 28"/>
-          <p:cNvSpPr txBox="1"/>
-          <p:nvPr/>
-        </p:nvSpPr>
-        <p:spPr>
-          <a:xfrm>
-            <a:off x="8686800" y="2788920"/>
-            <a:ext cx="2468880" cy="640080"/>
-          </a:xfrm>
-          <a:prstGeom prst="rect">
-            <a:avLst/>
-          </a:prstGeom>
-          <a:noFill/>
-        </p:spPr>
-        <p:txBody>
-          <a:bodyPr wrap="square">
-            <a:spAutoFit/>
-          </a:bodyPr>
-          <a:lstStyle/>
-          <a:p>
-            <a:pPr algn="l">
-              <a:defRPr sz="1300" b="0">
-                <a:solidFill>
-                  <a:srgbClr val="CBD5E8"/>
-                </a:solidFill>
-                <a:latin typeface="Microsoft YaHei"/>
-              </a:defRPr>
-            </a:pPr>
-            <a:r>
-              <a:t>可灵AI深度精通</a:t>
-            </a:r>
-          </a:p>
-        </p:txBody>
-      </p:sp>
-      <p:sp>
-        <p:nvSpPr>
-          <p:cNvPr id="30" name="Rounded Rectangle 29"/>
+          <p:cNvPr id="28" name="Oval 27"/>
           <p:cNvSpPr/>
           <p:nvPr/>
         </p:nvSpPr>
         <p:spPr>
           <a:xfrm>
-            <a:off x="548640" y="3840480"/>
-            <a:ext cx="3383280" cy="1005840"/>
-          </a:xfrm>
-          <a:prstGeom prst="roundRect">
-            <a:avLst/>
-          </a:prstGeom>
-          <a:solidFill>
-            <a:srgbClr val="141E33"/>
-          </a:solidFill>
-          <a:ln w="19050">
-            <a:solidFill>
-              <a:srgbClr val="00D4FF"/>
-            </a:solidFill>
+            <a:off x="8019288" y="2807208"/>
+            <a:ext cx="411480" cy="411480"/>
+          </a:xfrm>
+          <a:prstGeom prst="ellipse">
+            <a:avLst/>
+          </a:prstGeom>
+          <a:solidFill>
+            <a:srgbClr val="00C8F0"/>
+          </a:solidFill>
+          <a:ln>
+            <a:noFill/>
           </a:ln>
         </p:spPr>
         <p:style>
@@ -4847,23 +4773,97 @@
       </p:sp>
       <p:sp>
         <p:nvSpPr>
-          <p:cNvPr id="31" name="Oval 30"/>
+          <p:cNvPr id="29" name="TextBox 28"/>
+          <p:cNvSpPr txBox="1"/>
+          <p:nvPr/>
+        </p:nvSpPr>
+        <p:spPr>
+          <a:xfrm>
+            <a:off x="8019288" y="2807208"/>
+            <a:ext cx="411480" cy="411480"/>
+          </a:xfrm>
+          <a:prstGeom prst="rect">
+            <a:avLst/>
+          </a:prstGeom>
+          <a:noFill/>
+        </p:spPr>
+        <p:txBody>
+          <a:bodyPr wrap="square">
+            <a:spAutoFit/>
+          </a:bodyPr>
+          <a:lstStyle/>
+          <a:p>
+            <a:pPr algn="ctr">
+              <a:defRPr sz="1200" b="1">
+                <a:solidFill>
+                  <a:srgbClr val="F0F4FC"/>
+                </a:solidFill>
+                <a:latin typeface="Microsoft YaHei"/>
+              </a:defRPr>
+            </a:pPr>
+            <a:r>
+              <a:t>6</a:t>
+            </a:r>
+          </a:p>
+        </p:txBody>
+      </p:sp>
+      <p:sp>
+        <p:nvSpPr>
+          <p:cNvPr id="30" name="TextBox 29"/>
+          <p:cNvSpPr txBox="1"/>
+          <p:nvPr/>
+        </p:nvSpPr>
+        <p:spPr>
+          <a:xfrm>
+            <a:off x="8549640" y="2770632"/>
+            <a:ext cx="2560320" cy="594360"/>
+          </a:xfrm>
+          <a:prstGeom prst="rect">
+            <a:avLst/>
+          </a:prstGeom>
+          <a:noFill/>
+        </p:spPr>
+        <p:txBody>
+          <a:bodyPr wrap="square">
+            <a:spAutoFit/>
+          </a:bodyPr>
+          <a:lstStyle/>
+          <a:p>
+            <a:pPr algn="l">
+              <a:defRPr sz="1200" b="0">
+                <a:solidFill>
+                  <a:srgbClr val="A0AEC4"/>
+                </a:solidFill>
+                <a:latin typeface="Microsoft YaHei"/>
+              </a:defRPr>
+            </a:pPr>
+            <a:r>
+              <a:t>可灵AI深度精通</a:t>
+            </a:r>
+          </a:p>
+        </p:txBody>
+      </p:sp>
+      <p:sp>
+        <p:nvSpPr>
+          <p:cNvPr id="31" name="Rounded Rectangle 30"/>
           <p:cNvSpPr/>
           <p:nvPr/>
         </p:nvSpPr>
         <p:spPr>
           <a:xfrm>
-            <a:off x="685800" y="4069080"/>
-            <a:ext cx="457200" cy="457200"/>
-          </a:xfrm>
-          <a:prstGeom prst="ellipse">
-            <a:avLst/>
-          </a:prstGeom>
-          <a:solidFill>
-            <a:srgbClr val="00D4FF"/>
-          </a:solidFill>
-          <a:ln>
-            <a:noFill/>
+            <a:off x="594360" y="3840480"/>
+            <a:ext cx="3383280" cy="960120"/>
+          </a:xfrm>
+          <a:prstGeom prst="roundRect">
+            <a:avLst/>
+          </a:prstGeom>
+          <a:solidFill>
+            <a:srgbClr val="161F35"/>
+          </a:solidFill>
+          <a:ln w="12700">
+            <a:solidFill>
+              <a:srgbClr val="253350"/>
+            </a:solidFill>
           </a:ln>
         </p:spPr>
         <p:style>
@@ -4890,97 +4890,23 @@
       </p:sp>
       <p:sp>
         <p:nvSpPr>
-          <p:cNvPr id="32" name="TextBox 31"/>
-          <p:cNvSpPr txBox="1"/>
-          <p:nvPr/>
-        </p:nvSpPr>
-        <p:spPr>
-          <a:xfrm>
-            <a:off x="685800" y="4069080"/>
-            <a:ext cx="457200" cy="457200"/>
-          </a:xfrm>
-          <a:prstGeom prst="rect">
-            <a:avLst/>
-          </a:prstGeom>
-          <a:noFill/>
-        </p:spPr>
-        <p:txBody>
-          <a:bodyPr wrap="square">
-            <a:spAutoFit/>
-          </a:bodyPr>
-          <a:lstStyle/>
-          <a:p>
-            <a:pPr algn="ctr">
-              <a:defRPr sz="1400" b="1">
-                <a:solidFill>
-                  <a:srgbClr val="FFFFFF"/>
-                </a:solidFill>
-                <a:latin typeface="Microsoft YaHei"/>
-              </a:defRPr>
-            </a:pPr>
-            <a:r>
-              <a:t>7</a:t>
-            </a:r>
-          </a:p>
-        </p:txBody>
-      </p:sp>
-      <p:sp>
-        <p:nvSpPr>
-          <p:cNvPr id="33" name="TextBox 32"/>
-          <p:cNvSpPr txBox="1"/>
-          <p:nvPr/>
-        </p:nvSpPr>
-        <p:spPr>
-          <a:xfrm>
-            <a:off x="1280160" y="4023360"/>
-            <a:ext cx="2468880" cy="640080"/>
-          </a:xfrm>
-          <a:prstGeom prst="rect">
-            <a:avLst/>
-          </a:prstGeom>
-          <a:noFill/>
-        </p:spPr>
-        <p:txBody>
-          <a:bodyPr wrap="square">
-            <a:spAutoFit/>
-          </a:bodyPr>
-          <a:lstStyle/>
-          <a:p>
-            <a:pPr algn="l">
-              <a:defRPr sz="1300" b="0">
-                <a:solidFill>
-                  <a:srgbClr val="CBD5E8"/>
-                </a:solidFill>
-                <a:latin typeface="Microsoft YaHei"/>
-              </a:defRPr>
-            </a:pPr>
-            <a:r>
-              <a:t>Seedance 2.0深度精通</a:t>
-            </a:r>
-          </a:p>
-        </p:txBody>
-      </p:sp>
-      <p:sp>
-        <p:nvSpPr>
-          <p:cNvPr id="34" name="Rounded Rectangle 33"/>
+          <p:cNvPr id="32" name="Oval 31"/>
           <p:cNvSpPr/>
           <p:nvPr/>
         </p:nvSpPr>
         <p:spPr>
           <a:xfrm>
-            <a:off x="4251960" y="3840480"/>
-            <a:ext cx="3383280" cy="1005840"/>
-          </a:xfrm>
-          <a:prstGeom prst="roundRect">
-            <a:avLst/>
-          </a:prstGeom>
-          <a:solidFill>
-            <a:srgbClr val="141E33"/>
-          </a:solidFill>
-          <a:ln w="19050">
-            <a:solidFill>
-              <a:srgbClr val="00D4FF"/>
-            </a:solidFill>
+            <a:off x="704088" y="4041648"/>
+            <a:ext cx="411480" cy="411480"/>
+          </a:xfrm>
+          <a:prstGeom prst="ellipse">
+            <a:avLst/>
+          </a:prstGeom>
+          <a:solidFill>
+            <a:srgbClr val="00C8F0"/>
+          </a:solidFill>
+          <a:ln>
+            <a:noFill/>
           </a:ln>
         </p:spPr>
         <p:style>
@@ -5007,23 +4933,97 @@
       </p:sp>
       <p:sp>
         <p:nvSpPr>
-          <p:cNvPr id="35" name="Oval 34"/>
+          <p:cNvPr id="33" name="TextBox 32"/>
+          <p:cNvSpPr txBox="1"/>
+          <p:nvPr/>
+        </p:nvSpPr>
+        <p:spPr>
+          <a:xfrm>
+            <a:off x="704088" y="4041648"/>
+            <a:ext cx="411480" cy="411480"/>
+          </a:xfrm>
+          <a:prstGeom prst="rect">
+            <a:avLst/>
+          </a:prstGeom>
+          <a:noFill/>
+        </p:spPr>
+        <p:txBody>
+          <a:bodyPr wrap="square">
+            <a:spAutoFit/>
+          </a:bodyPr>
+          <a:lstStyle/>
+          <a:p>
+            <a:pPr algn="ctr">
+              <a:defRPr sz="1200" b="1">
+                <a:solidFill>
+                  <a:srgbClr val="F0F4FC"/>
+                </a:solidFill>
+                <a:latin typeface="Microsoft YaHei"/>
+              </a:defRPr>
+            </a:pPr>
+            <a:r>
+              <a:t>7</a:t>
+            </a:r>
+          </a:p>
+        </p:txBody>
+      </p:sp>
+      <p:sp>
+        <p:nvSpPr>
+          <p:cNvPr id="34" name="TextBox 33"/>
+          <p:cNvSpPr txBox="1"/>
+          <p:nvPr/>
+        </p:nvSpPr>
+        <p:spPr>
+          <a:xfrm>
+            <a:off x="1234440" y="4005072"/>
+            <a:ext cx="2560320" cy="594360"/>
+          </a:xfrm>
+          <a:prstGeom prst="rect">
+            <a:avLst/>
+          </a:prstGeom>
+          <a:noFill/>
+        </p:spPr>
+        <p:txBody>
+          <a:bodyPr wrap="square">
+            <a:spAutoFit/>
+          </a:bodyPr>
+          <a:lstStyle/>
+          <a:p>
+            <a:pPr algn="l">
+              <a:defRPr sz="1200" b="0">
+                <a:solidFill>
+                  <a:srgbClr val="A0AEC4"/>
+                </a:solidFill>
+                <a:latin typeface="Microsoft YaHei"/>
+              </a:defRPr>
+            </a:pPr>
+            <a:r>
+              <a:t>Seedance 2.0深度精通</a:t>
+            </a:r>
+          </a:p>
+        </p:txBody>
+      </p:sp>
+      <p:sp>
+        <p:nvSpPr>
+          <p:cNvPr id="35" name="Rounded Rectangle 34"/>
           <p:cNvSpPr/>
           <p:nvPr/>
         </p:nvSpPr>
         <p:spPr>
           <a:xfrm>
-            <a:off x="4389120" y="4069080"/>
-            <a:ext cx="457200" cy="457200"/>
-          </a:xfrm>
-          <a:prstGeom prst="ellipse">
-            <a:avLst/>
-          </a:prstGeom>
-          <a:solidFill>
-            <a:srgbClr val="00D4FF"/>
-          </a:solidFill>
-          <a:ln>
-            <a:noFill/>
+            <a:off x="4251960" y="3840480"/>
+            <a:ext cx="3383280" cy="960120"/>
+          </a:xfrm>
+          <a:prstGeom prst="roundRect">
+            <a:avLst/>
+          </a:prstGeom>
+          <a:solidFill>
+            <a:srgbClr val="161F35"/>
+          </a:solidFill>
+          <a:ln w="12700">
+            <a:solidFill>
+              <a:srgbClr val="253350"/>
+            </a:solidFill>
           </a:ln>
         </p:spPr>
         <p:style>
@@ -5050,97 +5050,23 @@
       </p:sp>
       <p:sp>
         <p:nvSpPr>
-          <p:cNvPr id="36" name="TextBox 35"/>
-          <p:cNvSpPr txBox="1"/>
-          <p:nvPr/>
-        </p:nvSpPr>
-        <p:spPr>
-          <a:xfrm>
-            <a:off x="4389120" y="4069080"/>
-            <a:ext cx="457200" cy="457200"/>
-          </a:xfrm>
-          <a:prstGeom prst="rect">
-            <a:avLst/>
-          </a:prstGeom>
-          <a:noFill/>
-        </p:spPr>
-        <p:txBody>
-          <a:bodyPr wrap="square">
-            <a:spAutoFit/>
-          </a:bodyPr>
-          <a:lstStyle/>
-          <a:p>
-            <a:pPr algn="ctr">
-              <a:defRPr sz="1400" b="1">
-                <a:solidFill>
-                  <a:srgbClr val="FFFFFF"/>
-                </a:solidFill>
-                <a:latin typeface="Microsoft YaHei"/>
-              </a:defRPr>
-            </a:pPr>
-            <a:r>
-              <a:t>8</a:t>
-            </a:r>
-          </a:p>
-        </p:txBody>
-      </p:sp>
-      <p:sp>
-        <p:nvSpPr>
-          <p:cNvPr id="37" name="TextBox 36"/>
-          <p:cNvSpPr txBox="1"/>
-          <p:nvPr/>
-        </p:nvSpPr>
-        <p:spPr>
-          <a:xfrm>
-            <a:off x="4983480" y="4023360"/>
-            <a:ext cx="2468880" cy="640080"/>
-          </a:xfrm>
-          <a:prstGeom prst="rect">
-            <a:avLst/>
-          </a:prstGeom>
-          <a:noFill/>
-        </p:spPr>
-        <p:txBody>
-          <a:bodyPr wrap="square">
-            <a:spAutoFit/>
-          </a:bodyPr>
-          <a:lstStyle/>
-          <a:p>
-            <a:pPr algn="l">
-              <a:defRPr sz="1300" b="0">
-                <a:solidFill>
-                  <a:srgbClr val="CBD5E8"/>
-                </a:solidFill>
-                <a:latin typeface="Microsoft YaHei"/>
-              </a:defRPr>
-            </a:pPr>
-            <a:r>
-              <a:t>海螺AI与Vidu</a:t>
-            </a:r>
-          </a:p>
-        </p:txBody>
-      </p:sp>
-      <p:sp>
-        <p:nvSpPr>
-          <p:cNvPr id="38" name="Rounded Rectangle 37"/>
+          <p:cNvPr id="36" name="Oval 35"/>
           <p:cNvSpPr/>
           <p:nvPr/>
         </p:nvSpPr>
         <p:spPr>
           <a:xfrm>
-            <a:off x="7955280" y="3840480"/>
-            <a:ext cx="3383280" cy="1005840"/>
-          </a:xfrm>
-          <a:prstGeom prst="roundRect">
-            <a:avLst/>
-          </a:prstGeom>
-          <a:solidFill>
-            <a:srgbClr val="141E33"/>
-          </a:solidFill>
-          <a:ln w="19050">
-            <a:solidFill>
-              <a:srgbClr val="00D4FF"/>
-            </a:solidFill>
+            <a:off x="4361688" y="4041648"/>
+            <a:ext cx="411480" cy="411480"/>
+          </a:xfrm>
+          <a:prstGeom prst="ellipse">
+            <a:avLst/>
+          </a:prstGeom>
+          <a:solidFill>
+            <a:srgbClr val="00C8F0"/>
+          </a:solidFill>
+          <a:ln>
+            <a:noFill/>
           </a:ln>
         </p:spPr>
         <p:style>
@@ -5167,23 +5093,97 @@
       </p:sp>
       <p:sp>
         <p:nvSpPr>
-          <p:cNvPr id="39" name="Oval 38"/>
+          <p:cNvPr id="37" name="TextBox 36"/>
+          <p:cNvSpPr txBox="1"/>
+          <p:nvPr/>
+        </p:nvSpPr>
+        <p:spPr>
+          <a:xfrm>
+            <a:off x="4361688" y="4041648"/>
+            <a:ext cx="411480" cy="411480"/>
+          </a:xfrm>
+          <a:prstGeom prst="rect">
+            <a:avLst/>
+          </a:prstGeom>
+          <a:noFill/>
+        </p:spPr>
+        <p:txBody>
+          <a:bodyPr wrap="square">
+            <a:spAutoFit/>
+          </a:bodyPr>
+          <a:lstStyle/>
+          <a:p>
+            <a:pPr algn="ctr">
+              <a:defRPr sz="1200" b="1">
+                <a:solidFill>
+                  <a:srgbClr val="F0F4FC"/>
+                </a:solidFill>
+                <a:latin typeface="Microsoft YaHei"/>
+              </a:defRPr>
+            </a:pPr>
+            <a:r>
+              <a:t>8</a:t>
+            </a:r>
+          </a:p>
+        </p:txBody>
+      </p:sp>
+      <p:sp>
+        <p:nvSpPr>
+          <p:cNvPr id="38" name="TextBox 37"/>
+          <p:cNvSpPr txBox="1"/>
+          <p:nvPr/>
+        </p:nvSpPr>
+        <p:spPr>
+          <a:xfrm>
+            <a:off x="4892040" y="4005072"/>
+            <a:ext cx="2560320" cy="594360"/>
+          </a:xfrm>
+          <a:prstGeom prst="rect">
+            <a:avLst/>
+          </a:prstGeom>
+          <a:noFill/>
+        </p:spPr>
+        <p:txBody>
+          <a:bodyPr wrap="square">
+            <a:spAutoFit/>
+          </a:bodyPr>
+          <a:lstStyle/>
+          <a:p>
+            <a:pPr algn="l">
+              <a:defRPr sz="1200" b="0">
+                <a:solidFill>
+                  <a:srgbClr val="A0AEC4"/>
+                </a:solidFill>
+                <a:latin typeface="Microsoft YaHei"/>
+              </a:defRPr>
+            </a:pPr>
+            <a:r>
+              <a:t>海螺AI与Vidu</a:t>
+            </a:r>
+          </a:p>
+        </p:txBody>
+      </p:sp>
+      <p:sp>
+        <p:nvSpPr>
+          <p:cNvPr id="39" name="Rounded Rectangle 38"/>
           <p:cNvSpPr/>
           <p:nvPr/>
         </p:nvSpPr>
         <p:spPr>
           <a:xfrm>
-            <a:off x="8092440" y="4069080"/>
-            <a:ext cx="457200" cy="457200"/>
-          </a:xfrm>
-          <a:prstGeom prst="ellipse">
-            <a:avLst/>
-          </a:prstGeom>
-          <a:solidFill>
-            <a:srgbClr val="00D4FF"/>
-          </a:solidFill>
-          <a:ln>
-            <a:noFill/>
+            <a:off x="7909560" y="3840480"/>
+            <a:ext cx="3383280" cy="960120"/>
+          </a:xfrm>
+          <a:prstGeom prst="roundRect">
+            <a:avLst/>
+          </a:prstGeom>
+          <a:solidFill>
+            <a:srgbClr val="161F35"/>
+          </a:solidFill>
+          <a:ln w="12700">
+            <a:solidFill>
+              <a:srgbClr val="253350"/>
+            </a:solidFill>
           </a:ln>
         </p:spPr>
         <p:style>
@@ -5210,97 +5210,23 @@
       </p:sp>
       <p:sp>
         <p:nvSpPr>
-          <p:cNvPr id="40" name="TextBox 39"/>
-          <p:cNvSpPr txBox="1"/>
-          <p:nvPr/>
-        </p:nvSpPr>
-        <p:spPr>
-          <a:xfrm>
-            <a:off x="8092440" y="4069080"/>
-            <a:ext cx="457200" cy="457200"/>
-          </a:xfrm>
-          <a:prstGeom prst="rect">
-            <a:avLst/>
-          </a:prstGeom>
-          <a:noFill/>
-        </p:spPr>
-        <p:txBody>
-          <a:bodyPr wrap="square">
-            <a:spAutoFit/>
-          </a:bodyPr>
-          <a:lstStyle/>
-          <a:p>
-            <a:pPr algn="ctr">
-              <a:defRPr sz="1400" b="1">
-                <a:solidFill>
-                  <a:srgbClr val="FFFFFF"/>
-                </a:solidFill>
-                <a:latin typeface="Microsoft YaHei"/>
-              </a:defRPr>
-            </a:pPr>
-            <a:r>
-              <a:t>9</a:t>
-            </a:r>
-          </a:p>
-        </p:txBody>
-      </p:sp>
-      <p:sp>
-        <p:nvSpPr>
-          <p:cNvPr id="41" name="TextBox 40"/>
-          <p:cNvSpPr txBox="1"/>
-          <p:nvPr/>
-        </p:nvSpPr>
-        <p:spPr>
-          <a:xfrm>
-            <a:off x="8686800" y="4023360"/>
-            <a:ext cx="2468880" cy="640080"/>
-          </a:xfrm>
-          <a:prstGeom prst="rect">
-            <a:avLst/>
-          </a:prstGeom>
-          <a:noFill/>
-        </p:spPr>
-        <p:txBody>
-          <a:bodyPr wrap="square">
-            <a:spAutoFit/>
-          </a:bodyPr>
-          <a:lstStyle/>
-          <a:p>
-            <a:pPr algn="l">
-              <a:defRPr sz="1300" b="0">
-                <a:solidFill>
-                  <a:srgbClr val="CBD5E8"/>
-                </a:solidFill>
-                <a:latin typeface="Microsoft YaHei"/>
-              </a:defRPr>
-            </a:pPr>
-            <a:r>
-              <a:t>角色一致性攻克</a:t>
-            </a:r>
-          </a:p>
-        </p:txBody>
-      </p:sp>
-      <p:sp>
-        <p:nvSpPr>
-          <p:cNvPr id="42" name="Rounded Rectangle 41"/>
+          <p:cNvPr id="40" name="Oval 39"/>
           <p:cNvSpPr/>
           <p:nvPr/>
         </p:nvSpPr>
         <p:spPr>
           <a:xfrm>
-            <a:off x="548640" y="5074920"/>
-            <a:ext cx="3383280" cy="1005840"/>
-          </a:xfrm>
-          <a:prstGeom prst="roundRect">
-            <a:avLst/>
-          </a:prstGeom>
-          <a:solidFill>
-            <a:srgbClr val="141E33"/>
-          </a:solidFill>
-          <a:ln w="19050">
-            <a:solidFill>
-              <a:srgbClr val="00D4FF"/>
-            </a:solidFill>
+            <a:off x="8019288" y="4041648"/>
+            <a:ext cx="411480" cy="411480"/>
+          </a:xfrm>
+          <a:prstGeom prst="ellipse">
+            <a:avLst/>
+          </a:prstGeom>
+          <a:solidFill>
+            <a:srgbClr val="00C8F0"/>
+          </a:solidFill>
+          <a:ln>
+            <a:noFill/>
           </a:ln>
         </p:spPr>
         <p:style>
@@ -5327,23 +5253,97 @@
       </p:sp>
       <p:sp>
         <p:nvSpPr>
-          <p:cNvPr id="43" name="Oval 42"/>
+          <p:cNvPr id="41" name="TextBox 40"/>
+          <p:cNvSpPr txBox="1"/>
+          <p:nvPr/>
+        </p:nvSpPr>
+        <p:spPr>
+          <a:xfrm>
+            <a:off x="8019288" y="4041648"/>
+            <a:ext cx="411480" cy="411480"/>
+          </a:xfrm>
+          <a:prstGeom prst="rect">
+            <a:avLst/>
+          </a:prstGeom>
+          <a:noFill/>
+        </p:spPr>
+        <p:txBody>
+          <a:bodyPr wrap="square">
+            <a:spAutoFit/>
+          </a:bodyPr>
+          <a:lstStyle/>
+          <a:p>
+            <a:pPr algn="ctr">
+              <a:defRPr sz="1200" b="1">
+                <a:solidFill>
+                  <a:srgbClr val="F0F4FC"/>
+                </a:solidFill>
+                <a:latin typeface="Microsoft YaHei"/>
+              </a:defRPr>
+            </a:pPr>
+            <a:r>
+              <a:t>9</a:t>
+            </a:r>
+          </a:p>
+        </p:txBody>
+      </p:sp>
+      <p:sp>
+        <p:nvSpPr>
+          <p:cNvPr id="42" name="TextBox 41"/>
+          <p:cNvSpPr txBox="1"/>
+          <p:nvPr/>
+        </p:nvSpPr>
+        <p:spPr>
+          <a:xfrm>
+            <a:off x="8549640" y="4005072"/>
+            <a:ext cx="2560320" cy="594360"/>
+          </a:xfrm>
+          <a:prstGeom prst="rect">
+            <a:avLst/>
+          </a:prstGeom>
+          <a:noFill/>
+        </p:spPr>
+        <p:txBody>
+          <a:bodyPr wrap="square">
+            <a:spAutoFit/>
+          </a:bodyPr>
+          <a:lstStyle/>
+          <a:p>
+            <a:pPr algn="l">
+              <a:defRPr sz="1200" b="0">
+                <a:solidFill>
+                  <a:srgbClr val="A0AEC4"/>
+                </a:solidFill>
+                <a:latin typeface="Microsoft YaHei"/>
+              </a:defRPr>
+            </a:pPr>
+            <a:r>
+              <a:t>角色一致性攻克</a:t>
+            </a:r>
+          </a:p>
+        </p:txBody>
+      </p:sp>
+      <p:sp>
+        <p:nvSpPr>
+          <p:cNvPr id="43" name="Rounded Rectangle 42"/>
           <p:cNvSpPr/>
           <p:nvPr/>
         </p:nvSpPr>
         <p:spPr>
           <a:xfrm>
-            <a:off x="685800" y="5303520"/>
-            <a:ext cx="457200" cy="457200"/>
-          </a:xfrm>
-          <a:prstGeom prst="ellipse">
-            <a:avLst/>
-          </a:prstGeom>
-          <a:solidFill>
-            <a:srgbClr val="00D4FF"/>
-          </a:solidFill>
-          <a:ln>
-            <a:noFill/>
+            <a:off x="594360" y="5074920"/>
+            <a:ext cx="3383280" cy="960120"/>
+          </a:xfrm>
+          <a:prstGeom prst="roundRect">
+            <a:avLst/>
+          </a:prstGeom>
+          <a:solidFill>
+            <a:srgbClr val="161F35"/>
+          </a:solidFill>
+          <a:ln w="12700">
+            <a:solidFill>
+              <a:srgbClr val="253350"/>
+            </a:solidFill>
           </a:ln>
         </p:spPr>
         <p:style>
@@ -5370,97 +5370,23 @@
       </p:sp>
       <p:sp>
         <p:nvSpPr>
-          <p:cNvPr id="44" name="TextBox 43"/>
-          <p:cNvSpPr txBox="1"/>
-          <p:nvPr/>
-        </p:nvSpPr>
-        <p:spPr>
-          <a:xfrm>
-            <a:off x="685800" y="5303520"/>
-            <a:ext cx="457200" cy="457200"/>
-          </a:xfrm>
-          <a:prstGeom prst="rect">
-            <a:avLst/>
-          </a:prstGeom>
-          <a:noFill/>
-        </p:spPr>
-        <p:txBody>
-          <a:bodyPr wrap="square">
-            <a:spAutoFit/>
-          </a:bodyPr>
-          <a:lstStyle/>
-          <a:p>
-            <a:pPr algn="ctr">
-              <a:defRPr sz="1400" b="1">
-                <a:solidFill>
-                  <a:srgbClr val="FFFFFF"/>
-                </a:solidFill>
-                <a:latin typeface="Microsoft YaHei"/>
-              </a:defRPr>
-            </a:pPr>
-            <a:r>
-              <a:t>10</a:t>
-            </a:r>
-          </a:p>
-        </p:txBody>
-      </p:sp>
-      <p:sp>
-        <p:nvSpPr>
-          <p:cNvPr id="45" name="TextBox 44"/>
-          <p:cNvSpPr txBox="1"/>
-          <p:nvPr/>
-        </p:nvSpPr>
-        <p:spPr>
-          <a:xfrm>
-            <a:off x="1280160" y="5257800"/>
-            <a:ext cx="2468880" cy="640080"/>
-          </a:xfrm>
-          <a:prstGeom prst="rect">
-            <a:avLst/>
-          </a:prstGeom>
-          <a:noFill/>
-        </p:spPr>
-        <p:txBody>
-          <a:bodyPr wrap="square">
-            <a:spAutoFit/>
-          </a:bodyPr>
-          <a:lstStyle/>
-          <a:p>
-            <a:pPr algn="l">
-              <a:defRPr sz="1300" b="0">
-                <a:solidFill>
-                  <a:srgbClr val="CBD5E8"/>
-                </a:solidFill>
-                <a:latin typeface="Microsoft YaHei"/>
-              </a:defRPr>
-            </a:pPr>
-            <a:r>
-              <a:t>配音配乐与音画同步</a:t>
-            </a:r>
-          </a:p>
-        </p:txBody>
-      </p:sp>
-      <p:sp>
-        <p:nvSpPr>
-          <p:cNvPr id="46" name="Rounded Rectangle 45"/>
+          <p:cNvPr id="44" name="Oval 43"/>
           <p:cNvSpPr/>
           <p:nvPr/>
         </p:nvSpPr>
         <p:spPr>
           <a:xfrm>
-            <a:off x="4251960" y="5074920"/>
-            <a:ext cx="3383280" cy="1005840"/>
-          </a:xfrm>
-          <a:prstGeom prst="roundRect">
-            <a:avLst/>
-          </a:prstGeom>
-          <a:solidFill>
-            <a:srgbClr val="141E33"/>
-          </a:solidFill>
-          <a:ln w="19050">
-            <a:solidFill>
-              <a:srgbClr val="00D4FF"/>
-            </a:solidFill>
+            <a:off x="704088" y="5276088"/>
+            <a:ext cx="411480" cy="411480"/>
+          </a:xfrm>
+          <a:prstGeom prst="ellipse">
+            <a:avLst/>
+          </a:prstGeom>
+          <a:solidFill>
+            <a:srgbClr val="00C8F0"/>
+          </a:solidFill>
+          <a:ln>
+            <a:noFill/>
           </a:ln>
         </p:spPr>
         <p:style>
@@ -5487,23 +5413,97 @@
       </p:sp>
       <p:sp>
         <p:nvSpPr>
-          <p:cNvPr id="47" name="Oval 46"/>
+          <p:cNvPr id="45" name="TextBox 44"/>
+          <p:cNvSpPr txBox="1"/>
+          <p:nvPr/>
+        </p:nvSpPr>
+        <p:spPr>
+          <a:xfrm>
+            <a:off x="704088" y="5276088"/>
+            <a:ext cx="411480" cy="411480"/>
+          </a:xfrm>
+          <a:prstGeom prst="rect">
+            <a:avLst/>
+          </a:prstGeom>
+          <a:noFill/>
+        </p:spPr>
+        <p:txBody>
+          <a:bodyPr wrap="square">
+            <a:spAutoFit/>
+          </a:bodyPr>
+          <a:lstStyle/>
+          <a:p>
+            <a:pPr algn="ctr">
+              <a:defRPr sz="1200" b="1">
+                <a:solidFill>
+                  <a:srgbClr val="F0F4FC"/>
+                </a:solidFill>
+                <a:latin typeface="Microsoft YaHei"/>
+              </a:defRPr>
+            </a:pPr>
+            <a:r>
+              <a:t>10</a:t>
+            </a:r>
+          </a:p>
+        </p:txBody>
+      </p:sp>
+      <p:sp>
+        <p:nvSpPr>
+          <p:cNvPr id="46" name="TextBox 45"/>
+          <p:cNvSpPr txBox="1"/>
+          <p:nvPr/>
+        </p:nvSpPr>
+        <p:spPr>
+          <a:xfrm>
+            <a:off x="1234440" y="5239512"/>
+            <a:ext cx="2560320" cy="594360"/>
+          </a:xfrm>
+          <a:prstGeom prst="rect">
+            <a:avLst/>
+          </a:prstGeom>
+          <a:noFill/>
+        </p:spPr>
+        <p:txBody>
+          <a:bodyPr wrap="square">
+            <a:spAutoFit/>
+          </a:bodyPr>
+          <a:lstStyle/>
+          <a:p>
+            <a:pPr algn="l">
+              <a:defRPr sz="1200" b="0">
+                <a:solidFill>
+                  <a:srgbClr val="A0AEC4"/>
+                </a:solidFill>
+                <a:latin typeface="Microsoft YaHei"/>
+              </a:defRPr>
+            </a:pPr>
+            <a:r>
+              <a:t>配音配乐与音画同步</a:t>
+            </a:r>
+          </a:p>
+        </p:txBody>
+      </p:sp>
+      <p:sp>
+        <p:nvSpPr>
+          <p:cNvPr id="47" name="Rounded Rectangle 46"/>
           <p:cNvSpPr/>
           <p:nvPr/>
         </p:nvSpPr>
         <p:spPr>
           <a:xfrm>
-            <a:off x="4389120" y="5303520"/>
-            <a:ext cx="457200" cy="457200"/>
-          </a:xfrm>
-          <a:prstGeom prst="ellipse">
-            <a:avLst/>
-          </a:prstGeom>
-          <a:solidFill>
-            <a:srgbClr val="00D4FF"/>
-          </a:solidFill>
-          <a:ln>
-            <a:noFill/>
+            <a:off x="4251960" y="5074920"/>
+            <a:ext cx="3383280" cy="960120"/>
+          </a:xfrm>
+          <a:prstGeom prst="roundRect">
+            <a:avLst/>
+          </a:prstGeom>
+          <a:solidFill>
+            <a:srgbClr val="161F35"/>
+          </a:solidFill>
+          <a:ln w="12700">
+            <a:solidFill>
+              <a:srgbClr val="253350"/>
+            </a:solidFill>
           </a:ln>
         </p:spPr>
         <p:style>
@@ -5530,97 +5530,23 @@
       </p:sp>
       <p:sp>
         <p:nvSpPr>
-          <p:cNvPr id="48" name="TextBox 47"/>
-          <p:cNvSpPr txBox="1"/>
-          <p:nvPr/>
-        </p:nvSpPr>
-        <p:spPr>
-          <a:xfrm>
-            <a:off x="4389120" y="5303520"/>
-            <a:ext cx="457200" cy="457200"/>
-          </a:xfrm>
-          <a:prstGeom prst="rect">
-            <a:avLst/>
-          </a:prstGeom>
-          <a:noFill/>
-        </p:spPr>
-        <p:txBody>
-          <a:bodyPr wrap="square">
-            <a:spAutoFit/>
-          </a:bodyPr>
-          <a:lstStyle/>
-          <a:p>
-            <a:pPr algn="ctr">
-              <a:defRPr sz="1400" b="1">
-                <a:solidFill>
-                  <a:srgbClr val="FFFFFF"/>
-                </a:solidFill>
-                <a:latin typeface="Microsoft YaHei"/>
-              </a:defRPr>
-            </a:pPr>
-            <a:r>
-              <a:t>11</a:t>
-            </a:r>
-          </a:p>
-        </p:txBody>
-      </p:sp>
-      <p:sp>
-        <p:nvSpPr>
-          <p:cNvPr id="49" name="TextBox 48"/>
-          <p:cNvSpPr txBox="1"/>
-          <p:nvPr/>
-        </p:nvSpPr>
-        <p:spPr>
-          <a:xfrm>
-            <a:off x="4983480" y="5257800"/>
-            <a:ext cx="2468880" cy="640080"/>
-          </a:xfrm>
-          <a:prstGeom prst="rect">
-            <a:avLst/>
-          </a:prstGeom>
-          <a:noFill/>
-        </p:spPr>
-        <p:txBody>
-          <a:bodyPr wrap="square">
-            <a:spAutoFit/>
-          </a:bodyPr>
-          <a:lstStyle/>
-          <a:p>
-            <a:pPr algn="l">
-              <a:defRPr sz="1300" b="0">
-                <a:solidFill>
-                  <a:srgbClr val="CBD5E8"/>
-                </a:solidFill>
-                <a:latin typeface="Microsoft YaHei"/>
-              </a:defRPr>
-            </a:pPr>
-            <a:r>
-              <a:t>剪辑与后期全流程</a:t>
-            </a:r>
-          </a:p>
-        </p:txBody>
-      </p:sp>
-      <p:sp>
-        <p:nvSpPr>
-          <p:cNvPr id="50" name="Rounded Rectangle 49"/>
+          <p:cNvPr id="48" name="Oval 47"/>
           <p:cNvSpPr/>
           <p:nvPr/>
         </p:nvSpPr>
         <p:spPr>
           <a:xfrm>
-            <a:off x="7955280" y="5074920"/>
-            <a:ext cx="3383280" cy="1005840"/>
-          </a:xfrm>
-          <a:prstGeom prst="roundRect">
-            <a:avLst/>
-          </a:prstGeom>
-          <a:solidFill>
-            <a:srgbClr val="141E33"/>
-          </a:solidFill>
-          <a:ln w="19050">
-            <a:solidFill>
-              <a:srgbClr val="00D4FF"/>
-            </a:solidFill>
+            <a:off x="4361688" y="5276088"/>
+            <a:ext cx="411480" cy="411480"/>
+          </a:xfrm>
+          <a:prstGeom prst="ellipse">
+            <a:avLst/>
+          </a:prstGeom>
+          <a:solidFill>
+            <a:srgbClr val="00C8F0"/>
+          </a:solidFill>
+          <a:ln>
+            <a:noFill/>
           </a:ln>
         </p:spPr>
         <p:style>
@@ -5647,23 +5573,97 @@
       </p:sp>
       <p:sp>
         <p:nvSpPr>
-          <p:cNvPr id="51" name="Oval 50"/>
+          <p:cNvPr id="49" name="TextBox 48"/>
+          <p:cNvSpPr txBox="1"/>
+          <p:nvPr/>
+        </p:nvSpPr>
+        <p:spPr>
+          <a:xfrm>
+            <a:off x="4361688" y="5276088"/>
+            <a:ext cx="411480" cy="411480"/>
+          </a:xfrm>
+          <a:prstGeom prst="rect">
+            <a:avLst/>
+          </a:prstGeom>
+          <a:noFill/>
+        </p:spPr>
+        <p:txBody>
+          <a:bodyPr wrap="square">
+            <a:spAutoFit/>
+          </a:bodyPr>
+          <a:lstStyle/>
+          <a:p>
+            <a:pPr algn="ctr">
+              <a:defRPr sz="1200" b="1">
+                <a:solidFill>
+                  <a:srgbClr val="F0F4FC"/>
+                </a:solidFill>
+                <a:latin typeface="Microsoft YaHei"/>
+              </a:defRPr>
+            </a:pPr>
+            <a:r>
+              <a:t>11</a:t>
+            </a:r>
+          </a:p>
+        </p:txBody>
+      </p:sp>
+      <p:sp>
+        <p:nvSpPr>
+          <p:cNvPr id="50" name="TextBox 49"/>
+          <p:cNvSpPr txBox="1"/>
+          <p:nvPr/>
+        </p:nvSpPr>
+        <p:spPr>
+          <a:xfrm>
+            <a:off x="4892040" y="5239512"/>
+            <a:ext cx="2560320" cy="594360"/>
+          </a:xfrm>
+          <a:prstGeom prst="rect">
+            <a:avLst/>
+          </a:prstGeom>
+          <a:noFill/>
+        </p:spPr>
+        <p:txBody>
+          <a:bodyPr wrap="square">
+            <a:spAutoFit/>
+          </a:bodyPr>
+          <a:lstStyle/>
+          <a:p>
+            <a:pPr algn="l">
+              <a:defRPr sz="1200" b="0">
+                <a:solidFill>
+                  <a:srgbClr val="A0AEC4"/>
+                </a:solidFill>
+                <a:latin typeface="Microsoft YaHei"/>
+              </a:defRPr>
+            </a:pPr>
+            <a:r>
+              <a:t>剪辑与后期全流程</a:t>
+            </a:r>
+          </a:p>
+        </p:txBody>
+      </p:sp>
+      <p:sp>
+        <p:nvSpPr>
+          <p:cNvPr id="51" name="Rounded Rectangle 50"/>
           <p:cNvSpPr/>
           <p:nvPr/>
         </p:nvSpPr>
         <p:spPr>
           <a:xfrm>
-            <a:off x="8092440" y="5303520"/>
-            <a:ext cx="457200" cy="457200"/>
-          </a:xfrm>
-          <a:prstGeom prst="ellipse">
-            <a:avLst/>
-          </a:prstGeom>
-          <a:solidFill>
-            <a:srgbClr val="00D4FF"/>
-          </a:solidFill>
-          <a:ln>
-            <a:noFill/>
+            <a:off x="7909560" y="5074920"/>
+            <a:ext cx="3383280" cy="960120"/>
+          </a:xfrm>
+          <a:prstGeom prst="roundRect">
+            <a:avLst/>
+          </a:prstGeom>
+          <a:solidFill>
+            <a:srgbClr val="161F35"/>
+          </a:solidFill>
+          <a:ln w="12700">
+            <a:solidFill>
+              <a:srgbClr val="253350"/>
+            </a:solidFill>
           </a:ln>
         </p:spPr>
         <p:style>
@@ -5690,92 +5690,20 @@
       </p:sp>
       <p:sp>
         <p:nvSpPr>
-          <p:cNvPr id="52" name="TextBox 51"/>
-          <p:cNvSpPr txBox="1"/>
-          <p:nvPr/>
-        </p:nvSpPr>
-        <p:spPr>
-          <a:xfrm>
-            <a:off x="8092440" y="5303520"/>
-            <a:ext cx="457200" cy="457200"/>
-          </a:xfrm>
-          <a:prstGeom prst="rect">
-            <a:avLst/>
-          </a:prstGeom>
-          <a:noFill/>
-        </p:spPr>
-        <p:txBody>
-          <a:bodyPr wrap="square">
-            <a:spAutoFit/>
-          </a:bodyPr>
-          <a:lstStyle/>
-          <a:p>
-            <a:pPr algn="ctr">
-              <a:defRPr sz="1400" b="1">
-                <a:solidFill>
-                  <a:srgbClr val="FFFFFF"/>
-                </a:solidFill>
-                <a:latin typeface="Microsoft YaHei"/>
-              </a:defRPr>
-            </a:pPr>
-            <a:r>
-              <a:t>12</a:t>
-            </a:r>
-          </a:p>
-        </p:txBody>
-      </p:sp>
-      <p:sp>
-        <p:nvSpPr>
-          <p:cNvPr id="53" name="TextBox 52"/>
-          <p:cNvSpPr txBox="1"/>
-          <p:nvPr/>
-        </p:nvSpPr>
-        <p:spPr>
-          <a:xfrm>
-            <a:off x="8686800" y="5257800"/>
-            <a:ext cx="2468880" cy="640080"/>
-          </a:xfrm>
-          <a:prstGeom prst="rect">
-            <a:avLst/>
-          </a:prstGeom>
-          <a:noFill/>
-        </p:spPr>
-        <p:txBody>
-          <a:bodyPr wrap="square">
-            <a:spAutoFit/>
-          </a:bodyPr>
-          <a:lstStyle/>
-          <a:p>
-            <a:pPr algn="l">
-              <a:defRPr sz="1300" b="0">
-                <a:solidFill>
-                  <a:srgbClr val="CBD5E8"/>
-                </a:solidFill>
-                <a:latin typeface="Microsoft YaHei"/>
-              </a:defRPr>
-            </a:pPr>
-            <a:r>
-              <a:t>一站式平台精讲</a:t>
-            </a:r>
-          </a:p>
-        </p:txBody>
-      </p:sp>
-      <p:sp>
-        <p:nvSpPr>
-          <p:cNvPr id="54" name="Rectangle 53"/>
+          <p:cNvPr id="52" name="Oval 51"/>
           <p:cNvSpPr/>
           <p:nvPr/>
         </p:nvSpPr>
         <p:spPr>
           <a:xfrm>
-            <a:off x="0" y="6446520"/>
-            <a:ext cx="12191695" cy="19050"/>
-          </a:xfrm>
-          <a:prstGeom prst="rect">
-            <a:avLst/>
-          </a:prstGeom>
-          <a:solidFill>
-            <a:srgbClr val="2D3B55"/>
+            <a:off x="8019288" y="5276088"/>
+            <a:ext cx="411480" cy="411480"/>
+          </a:xfrm>
+          <a:prstGeom prst="ellipse">
+            <a:avLst/>
+          </a:prstGeom>
+          <a:solidFill>
+            <a:srgbClr val="00C8F0"/>
           </a:solidFill>
           <a:ln>
             <a:noFill/>
@@ -5805,14 +5733,14 @@
       </p:sp>
       <p:sp>
         <p:nvSpPr>
-          <p:cNvPr id="55" name="TextBox 54"/>
+          <p:cNvPr id="53" name="TextBox 52"/>
           <p:cNvSpPr txBox="1"/>
           <p:nvPr/>
         </p:nvSpPr>
         <p:spPr>
           <a:xfrm>
-            <a:off x="457200" y="6492240"/>
-            <a:ext cx="5486400" cy="274320"/>
+            <a:off x="8019288" y="5276088"/>
+            <a:ext cx="411480" cy="411480"/>
           </a:xfrm>
           <a:prstGeom prst="rect">
             <a:avLst/>
@@ -5825,30 +5753,30 @@
           </a:bodyPr>
           <a:lstStyle/>
           <a:p>
-            <a:pPr algn="l">
-              <a:defRPr sz="900" b="0">
+            <a:pPr algn="ctr">
+              <a:defRPr sz="1200" b="1">
                 <a:solidFill>
-                  <a:srgbClr val="6B7B9E"/>
+                  <a:srgbClr val="F0F4FC"/>
                 </a:solidFill>
                 <a:latin typeface="Microsoft YaHei"/>
               </a:defRPr>
             </a:pPr>
             <a:r>
-              <a:t>模块00：课程导论</a:t>
-            </a:r>
-          </a:p>
-        </p:txBody>
-      </p:sp>
-      <p:sp>
-        <p:nvSpPr>
-          <p:cNvPr id="56" name="TextBox 55"/>
+              <a:t>12</a:t>
+            </a:r>
+          </a:p>
+        </p:txBody>
+      </p:sp>
+      <p:sp>
+        <p:nvSpPr>
+          <p:cNvPr id="54" name="TextBox 53"/>
           <p:cNvSpPr txBox="1"/>
           <p:nvPr/>
         </p:nvSpPr>
         <p:spPr>
           <a:xfrm>
-            <a:off x="10515600" y="6492240"/>
-            <a:ext cx="1371600" cy="274320"/>
+            <a:off x="8549640" y="5239512"/>
+            <a:ext cx="2560320" cy="594360"/>
           </a:xfrm>
           <a:prstGeom prst="rect">
             <a:avLst/>
@@ -5861,10 +5789,125 @@
           </a:bodyPr>
           <a:lstStyle/>
           <a:p>
+            <a:pPr algn="l">
+              <a:defRPr sz="1200" b="0">
+                <a:solidFill>
+                  <a:srgbClr val="A0AEC4"/>
+                </a:solidFill>
+                <a:latin typeface="Microsoft YaHei"/>
+              </a:defRPr>
+            </a:pPr>
+            <a:r>
+              <a:t>一站式平台精讲</a:t>
+            </a:r>
+          </a:p>
+        </p:txBody>
+      </p:sp>
+      <p:sp>
+        <p:nvSpPr>
+          <p:cNvPr id="55" name="Rectangle 54"/>
+          <p:cNvSpPr/>
+          <p:nvPr/>
+        </p:nvSpPr>
+        <p:spPr>
+          <a:xfrm>
+            <a:off x="0" y="6446520"/>
+            <a:ext cx="12191695" cy="12700"/>
+          </a:xfrm>
+          <a:prstGeom prst="rect">
+            <a:avLst/>
+          </a:prstGeom>
+          <a:solidFill>
+            <a:srgbClr val="253350"/>
+          </a:solidFill>
+          <a:ln>
+            <a:noFill/>
+          </a:ln>
+        </p:spPr>
+        <p:style>
+          <a:lnRef idx="1">
+            <a:schemeClr val="accent1"/>
+          </a:lnRef>
+          <a:fillRef idx="3">
+            <a:schemeClr val="accent1"/>
+          </a:fillRef>
+          <a:effectRef idx="2">
+            <a:schemeClr val="accent1"/>
+          </a:effectRef>
+          <a:fontRef idx="minor">
+            <a:schemeClr val="lt1"/>
+          </a:fontRef>
+        </p:style>
+        <p:txBody>
+          <a:bodyPr rtlCol="0" anchor="ctr"/>
+          <a:lstStyle/>
+          <a:p>
+            <a:pPr algn="ctr"/>
+          </a:p>
+        </p:txBody>
+      </p:sp>
+      <p:sp>
+        <p:nvSpPr>
+          <p:cNvPr id="56" name="TextBox 55"/>
+          <p:cNvSpPr txBox="1"/>
+          <p:nvPr/>
+        </p:nvSpPr>
+        <p:spPr>
+          <a:xfrm>
+            <a:off x="731520" y="6492240"/>
+            <a:ext cx="4572000" cy="274320"/>
+          </a:xfrm>
+          <a:prstGeom prst="rect">
+            <a:avLst/>
+          </a:prstGeom>
+          <a:noFill/>
+        </p:spPr>
+        <p:txBody>
+          <a:bodyPr wrap="square">
+            <a:spAutoFit/>
+          </a:bodyPr>
+          <a:lstStyle/>
+          <a:p>
+            <a:pPr algn="l">
+              <a:defRPr sz="900" b="0">
+                <a:solidFill>
+                  <a:srgbClr val="607090"/>
+                </a:solidFill>
+                <a:latin typeface="Microsoft YaHei"/>
+              </a:defRPr>
+            </a:pPr>
+            <a:r>
+              <a:t>模块00 · 课程导论</a:t>
+            </a:r>
+          </a:p>
+        </p:txBody>
+      </p:sp>
+      <p:sp>
+        <p:nvSpPr>
+          <p:cNvPr id="57" name="TextBox 56"/>
+          <p:cNvSpPr txBox="1"/>
+          <p:nvPr/>
+        </p:nvSpPr>
+        <p:spPr>
+          <a:xfrm>
+            <a:off x="10515600" y="6492240"/>
+            <a:ext cx="1371600" cy="274320"/>
+          </a:xfrm>
+          <a:prstGeom prst="rect">
+            <a:avLst/>
+          </a:prstGeom>
+          <a:noFill/>
+        </p:spPr>
+        <p:txBody>
+          <a:bodyPr wrap="square">
+            <a:spAutoFit/>
+          </a:bodyPr>
+          <a:lstStyle/>
+          <a:p>
             <a:pPr algn="r">
               <a:defRPr sz="900" b="0">
                 <a:solidFill>
-                  <a:srgbClr val="6B7B9E"/>
+                  <a:srgbClr val="607090"/>
                 </a:solidFill>
                 <a:latin typeface="Microsoft YaHei"/>
               </a:defRPr>
@@ -5889,7 +5932,7 @@
     <p:bg>
       <p:bgPr>
         <a:solidFill>
-          <a:srgbClr val="0B1120"/>
+          <a:srgbClr val="0A0E1A"/>
         </a:solidFill>
         <a:effectLst/>
       </p:bgPr>
@@ -5910,13 +5953,13 @@
         <p:spPr>
           <a:xfrm>
             <a:off x="0" y="0"/>
-            <a:ext cx="12191695" cy="1051560"/>
-          </a:xfrm>
-          <a:prstGeom prst="rect">
-            <a:avLst/>
-          </a:prstGeom>
-          <a:solidFill>
-            <a:srgbClr val="141E33"/>
+            <a:ext cx="12191695" cy="38100"/>
+          </a:xfrm>
+          <a:prstGeom prst="rect">
+            <a:avLst/>
+          </a:prstGeom>
+          <a:solidFill>
+            <a:srgbClr val="00C8F0"/>
           </a:solidFill>
           <a:ln>
             <a:noFill/>
@@ -5952,14 +5995,14 @@
         </p:nvSpPr>
         <p:spPr>
           <a:xfrm>
-            <a:off x="0" y="0"/>
-            <a:ext cx="109728" cy="1051560"/>
-          </a:xfrm>
-          <a:prstGeom prst="rect">
-            <a:avLst/>
-          </a:prstGeom>
-          <a:solidFill>
-            <a:srgbClr val="00D4FF"/>
+            <a:off x="0" y="38100"/>
+            <a:ext cx="12191695" cy="914400"/>
+          </a:xfrm>
+          <a:prstGeom prst="rect">
+            <a:avLst/>
+          </a:prstGeom>
+          <a:solidFill>
+            <a:srgbClr val="161F35"/>
           </a:solidFill>
           <a:ln>
             <a:noFill/>
@@ -5989,56 +6032,20 @@
       </p:sp>
       <p:sp>
         <p:nvSpPr>
-          <p:cNvPr id="4" name="TextBox 3"/>
-          <p:cNvSpPr txBox="1"/>
-          <p:nvPr/>
-        </p:nvSpPr>
-        <p:spPr>
-          <a:xfrm>
-            <a:off x="548640" y="182880"/>
-            <a:ext cx="10058400" cy="640080"/>
-          </a:xfrm>
-          <a:prstGeom prst="rect">
-            <a:avLst/>
-          </a:prstGeom>
-          <a:noFill/>
-        </p:spPr>
-        <p:txBody>
-          <a:bodyPr wrap="square">
-            <a:spAutoFit/>
-          </a:bodyPr>
-          <a:lstStyle/>
-          <a:p>
-            <a:pPr algn="l">
-              <a:defRPr sz="2600" b="1">
-                <a:solidFill>
-                  <a:srgbClr val="FFFFFF"/>
-                </a:solidFill>
-                <a:latin typeface="Microsoft YaHei"/>
-              </a:defRPr>
-            </a:pPr>
-            <a:r>
-              <a:t>课程目标</a:t>
-            </a:r>
-          </a:p>
-        </p:txBody>
-      </p:sp>
-      <p:sp>
-        <p:nvSpPr>
-          <p:cNvPr id="5" name="Rectangle 4"/>
+          <p:cNvPr id="4" name="Rectangle 3"/>
           <p:cNvSpPr/>
           <p:nvPr/>
         </p:nvSpPr>
         <p:spPr>
           <a:xfrm>
-            <a:off x="0" y="1051560"/>
-            <a:ext cx="12191695" cy="25400"/>
-          </a:xfrm>
-          <a:prstGeom prst="rect">
-            <a:avLst/>
-          </a:prstGeom>
-          <a:solidFill>
-            <a:srgbClr val="00D4FF"/>
+            <a:off x="0" y="38100"/>
+            <a:ext cx="91440" cy="914400"/>
+          </a:xfrm>
+          <a:prstGeom prst="rect">
+            <a:avLst/>
+          </a:prstGeom>
+          <a:solidFill>
+            <a:srgbClr val="00C8F0"/>
           </a:solidFill>
           <a:ln>
             <a:noFill/>
@@ -6068,20 +6075,56 @@
       </p:sp>
       <p:sp>
         <p:nvSpPr>
-          <p:cNvPr id="6" name="Rounded Rectangle 5"/>
+          <p:cNvPr id="5" name="TextBox 4"/>
+          <p:cNvSpPr txBox="1"/>
+          <p:nvPr/>
+        </p:nvSpPr>
+        <p:spPr>
+          <a:xfrm>
+            <a:off x="731520" y="137160"/>
+            <a:ext cx="10728655" cy="640080"/>
+          </a:xfrm>
+          <a:prstGeom prst="rect">
+            <a:avLst/>
+          </a:prstGeom>
+          <a:noFill/>
+        </p:spPr>
+        <p:txBody>
+          <a:bodyPr wrap="square">
+            <a:spAutoFit/>
+          </a:bodyPr>
+          <a:lstStyle/>
+          <a:p>
+            <a:pPr algn="l">
+              <a:defRPr sz="2400" b="1">
+                <a:solidFill>
+                  <a:srgbClr val="F0F4FC"/>
+                </a:solidFill>
+                <a:latin typeface="Microsoft YaHei"/>
+              </a:defRPr>
+            </a:pPr>
+            <a:r>
+              <a:t>课程目标</a:t>
+            </a:r>
+          </a:p>
+        </p:txBody>
+      </p:sp>
+      <p:sp>
+        <p:nvSpPr>
+          <p:cNvPr id="6" name="Rectangle 5"/>
           <p:cNvSpPr/>
           <p:nvPr/>
         </p:nvSpPr>
         <p:spPr>
           <a:xfrm>
-            <a:off x="457200" y="1325880"/>
-            <a:ext cx="11247120" cy="731520"/>
-          </a:xfrm>
-          <a:prstGeom prst="roundRect">
-            <a:avLst/>
-          </a:prstGeom>
-          <a:solidFill>
-            <a:srgbClr val="141E33"/>
+            <a:off x="0" y="1078992"/>
+            <a:ext cx="12191695" cy="12700"/>
+          </a:xfrm>
+          <a:prstGeom prst="rect">
+            <a:avLst/>
+          </a:prstGeom>
+          <a:solidFill>
+            <a:srgbClr val="253350"/>
           </a:solidFill>
           <a:ln>
             <a:noFill/>
@@ -6111,20 +6154,20 @@
       </p:sp>
       <p:sp>
         <p:nvSpPr>
-          <p:cNvPr id="7" name="Rectangle 6"/>
+          <p:cNvPr id="7" name="Rounded Rectangle 6"/>
           <p:cNvSpPr/>
           <p:nvPr/>
         </p:nvSpPr>
         <p:spPr>
           <a:xfrm>
-            <a:off x="457200" y="1325880"/>
-            <a:ext cx="73152" cy="731520"/>
-          </a:xfrm>
-          <a:prstGeom prst="rect">
-            <a:avLst/>
-          </a:prstGeom>
-          <a:solidFill>
-            <a:srgbClr val="00D4FF"/>
+            <a:off x="457200" y="1280160"/>
+            <a:ext cx="11247120" cy="685800"/>
+          </a:xfrm>
+          <a:prstGeom prst="roundRect">
+            <a:avLst/>
+          </a:prstGeom>
+          <a:solidFill>
+            <a:srgbClr val="161F35"/>
           </a:solidFill>
           <a:ln>
             <a:noFill/>
@@ -6154,20 +6197,20 @@
       </p:sp>
       <p:sp>
         <p:nvSpPr>
-          <p:cNvPr id="8" name="Oval 7"/>
+          <p:cNvPr id="8" name="Rectangle 7"/>
           <p:cNvSpPr/>
           <p:nvPr/>
         </p:nvSpPr>
         <p:spPr>
           <a:xfrm>
-            <a:off x="731520" y="1490472"/>
-            <a:ext cx="365760" cy="365760"/>
-          </a:xfrm>
-          <a:prstGeom prst="ellipse">
-            <a:avLst/>
-          </a:prstGeom>
-          <a:solidFill>
-            <a:srgbClr val="00D4FF"/>
+            <a:off x="457200" y="1280160"/>
+            <a:ext cx="54864" cy="685800"/>
+          </a:xfrm>
+          <a:prstGeom prst="rect">
+            <a:avLst/>
+          </a:prstGeom>
+          <a:solidFill>
+            <a:srgbClr val="00C8F0"/>
           </a:solidFill>
           <a:ln>
             <a:noFill/>
@@ -6197,92 +6240,20 @@
       </p:sp>
       <p:sp>
         <p:nvSpPr>
-          <p:cNvPr id="9" name="TextBox 8"/>
-          <p:cNvSpPr txBox="1"/>
-          <p:nvPr/>
-        </p:nvSpPr>
-        <p:spPr>
-          <a:xfrm>
-            <a:off x="731520" y="1490472"/>
-            <a:ext cx="365760" cy="365760"/>
-          </a:xfrm>
-          <a:prstGeom prst="rect">
-            <a:avLst/>
-          </a:prstGeom>
-          <a:noFill/>
-        </p:spPr>
-        <p:txBody>
-          <a:bodyPr wrap="square">
-            <a:spAutoFit/>
-          </a:bodyPr>
-          <a:lstStyle/>
-          <a:p>
-            <a:pPr algn="ctr">
-              <a:defRPr sz="1100" b="1">
-                <a:solidFill>
-                  <a:srgbClr val="FFFFFF"/>
-                </a:solidFill>
-                <a:latin typeface="Microsoft YaHei"/>
-              </a:defRPr>
-            </a:pPr>
-            <a:r>
-              <a:t>1</a:t>
-            </a:r>
-          </a:p>
-        </p:txBody>
-      </p:sp>
-      <p:sp>
-        <p:nvSpPr>
-          <p:cNvPr id="10" name="TextBox 9"/>
-          <p:cNvSpPr txBox="1"/>
-          <p:nvPr/>
-        </p:nvSpPr>
-        <p:spPr>
-          <a:xfrm>
-            <a:off x="1280160" y="1417320"/>
-            <a:ext cx="10058400" cy="548640"/>
-          </a:xfrm>
-          <a:prstGeom prst="rect">
-            <a:avLst/>
-          </a:prstGeom>
-          <a:noFill/>
-        </p:spPr>
-        <p:txBody>
-          <a:bodyPr wrap="square">
-            <a:spAutoFit/>
-          </a:bodyPr>
-          <a:lstStyle/>
-          <a:p>
-            <a:pPr algn="l">
-              <a:defRPr sz="1500" b="0">
-                <a:solidFill>
-                  <a:srgbClr val="CBD5E8"/>
-                </a:solidFill>
-                <a:latin typeface="Microsoft YaHei"/>
-              </a:defRPr>
-            </a:pPr>
-            <a:r>
-              <a:t>掌握AI漫剧从剧本到成片的完整制作流程</a:t>
-            </a:r>
-          </a:p>
-        </p:txBody>
-      </p:sp>
-      <p:sp>
-        <p:nvSpPr>
-          <p:cNvPr id="11" name="Rounded Rectangle 10"/>
+          <p:cNvPr id="9" name="Oval 8"/>
           <p:cNvSpPr/>
           <p:nvPr/>
         </p:nvSpPr>
         <p:spPr>
           <a:xfrm>
-            <a:off x="457200" y="2194560"/>
-            <a:ext cx="11247120" cy="731520"/>
-          </a:xfrm>
-          <a:prstGeom prst="roundRect">
-            <a:avLst/>
-          </a:prstGeom>
-          <a:solidFill>
-            <a:srgbClr val="141E33"/>
+            <a:off x="685800" y="1463040"/>
+            <a:ext cx="320040" cy="320040"/>
+          </a:xfrm>
+          <a:prstGeom prst="ellipse">
+            <a:avLst/>
+          </a:prstGeom>
+          <a:solidFill>
+            <a:srgbClr val="00C8F0"/>
           </a:solidFill>
           <a:ln>
             <a:noFill/>
@@ -6312,20 +6283,92 @@
       </p:sp>
       <p:sp>
         <p:nvSpPr>
-          <p:cNvPr id="12" name="Rectangle 11"/>
+          <p:cNvPr id="10" name="TextBox 9"/>
+          <p:cNvSpPr txBox="1"/>
+          <p:nvPr/>
+        </p:nvSpPr>
+        <p:spPr>
+          <a:xfrm>
+            <a:off x="685800" y="1463040"/>
+            <a:ext cx="320040" cy="320040"/>
+          </a:xfrm>
+          <a:prstGeom prst="rect">
+            <a:avLst/>
+          </a:prstGeom>
+          <a:noFill/>
+        </p:spPr>
+        <p:txBody>
+          <a:bodyPr wrap="square">
+            <a:spAutoFit/>
+          </a:bodyPr>
+          <a:lstStyle/>
+          <a:p>
+            <a:pPr algn="ctr">
+              <a:defRPr sz="1000" b="1">
+                <a:solidFill>
+                  <a:srgbClr val="F0F4FC"/>
+                </a:solidFill>
+                <a:latin typeface="Microsoft YaHei"/>
+              </a:defRPr>
+            </a:pPr>
+            <a:r>
+              <a:t>1</a:t>
+            </a:r>
+          </a:p>
+        </p:txBody>
+      </p:sp>
+      <p:sp>
+        <p:nvSpPr>
+          <p:cNvPr id="11" name="TextBox 10"/>
+          <p:cNvSpPr txBox="1"/>
+          <p:nvPr/>
+        </p:nvSpPr>
+        <p:spPr>
+          <a:xfrm>
+            <a:off x="1188720" y="1440180"/>
+            <a:ext cx="10058400" cy="365760"/>
+          </a:xfrm>
+          <a:prstGeom prst="rect">
+            <a:avLst/>
+          </a:prstGeom>
+          <a:noFill/>
+        </p:spPr>
+        <p:txBody>
+          <a:bodyPr wrap="square">
+            <a:spAutoFit/>
+          </a:bodyPr>
+          <a:lstStyle/>
+          <a:p>
+            <a:pPr algn="l">
+              <a:defRPr sz="1400" b="0">
+                <a:solidFill>
+                  <a:srgbClr val="A0AEC4"/>
+                </a:solidFill>
+                <a:latin typeface="Microsoft YaHei"/>
+              </a:defRPr>
+            </a:pPr>
+            <a:r>
+              <a:t>掌握AI漫剧从剧本到成片的完整制作流程</a:t>
+            </a:r>
+          </a:p>
+        </p:txBody>
+      </p:sp>
+      <p:sp>
+        <p:nvSpPr>
+          <p:cNvPr id="12" name="Rounded Rectangle 11"/>
           <p:cNvSpPr/>
           <p:nvPr/>
         </p:nvSpPr>
         <p:spPr>
           <a:xfrm>
-            <a:off x="457200" y="2194560"/>
-            <a:ext cx="73152" cy="731520"/>
-          </a:xfrm>
-          <a:prstGeom prst="rect">
-            <a:avLst/>
-          </a:prstGeom>
-          <a:solidFill>
-            <a:srgbClr val="00D4FF"/>
+            <a:off x="457200" y="2297430"/>
+            <a:ext cx="11247120" cy="685800"/>
+          </a:xfrm>
+          <a:prstGeom prst="roundRect">
+            <a:avLst/>
+          </a:prstGeom>
+          <a:solidFill>
+            <a:srgbClr val="161F35"/>
           </a:solidFill>
           <a:ln>
             <a:noFill/>
@@ -6355,20 +6398,20 @@
       </p:sp>
       <p:sp>
         <p:nvSpPr>
-          <p:cNvPr id="13" name="Oval 12"/>
+          <p:cNvPr id="13" name="Rectangle 12"/>
           <p:cNvSpPr/>
           <p:nvPr/>
         </p:nvSpPr>
         <p:spPr>
           <a:xfrm>
-            <a:off x="731520" y="2359152"/>
-            <a:ext cx="365760" cy="365760"/>
-          </a:xfrm>
-          <a:prstGeom prst="ellipse">
-            <a:avLst/>
-          </a:prstGeom>
-          <a:solidFill>
-            <a:srgbClr val="00D4FF"/>
+            <a:off x="457200" y="2297430"/>
+            <a:ext cx="54864" cy="685800"/>
+          </a:xfrm>
+          <a:prstGeom prst="rect">
+            <a:avLst/>
+          </a:prstGeom>
+          <a:solidFill>
+            <a:srgbClr val="00C8F0"/>
           </a:solidFill>
           <a:ln>
             <a:noFill/>
@@ -6398,92 +6441,20 @@
       </p:sp>
       <p:sp>
         <p:nvSpPr>
-          <p:cNvPr id="14" name="TextBox 13"/>
-          <p:cNvSpPr txBox="1"/>
-          <p:nvPr/>
-        </p:nvSpPr>
-        <p:spPr>
-          <a:xfrm>
-            <a:off x="731520" y="2359152"/>
-            <a:ext cx="365760" cy="365760"/>
-          </a:xfrm>
-          <a:prstGeom prst="rect">
-            <a:avLst/>
-          </a:prstGeom>
-          <a:noFill/>
-        </p:spPr>
-        <p:txBody>
-          <a:bodyPr wrap="square">
-            <a:spAutoFit/>
-          </a:bodyPr>
-          <a:lstStyle/>
-          <a:p>
-            <a:pPr algn="ctr">
-              <a:defRPr sz="1100" b="1">
-                <a:solidFill>
-                  <a:srgbClr val="FFFFFF"/>
-                </a:solidFill>
-                <a:latin typeface="Microsoft YaHei"/>
-              </a:defRPr>
-            </a:pPr>
-            <a:r>
-              <a:t>2</a:t>
-            </a:r>
-          </a:p>
-        </p:txBody>
-      </p:sp>
-      <p:sp>
-        <p:nvSpPr>
-          <p:cNvPr id="15" name="TextBox 14"/>
-          <p:cNvSpPr txBox="1"/>
-          <p:nvPr/>
-        </p:nvSpPr>
-        <p:spPr>
-          <a:xfrm>
-            <a:off x="1280160" y="2286000"/>
-            <a:ext cx="10058400" cy="548640"/>
-          </a:xfrm>
-          <a:prstGeom prst="rect">
-            <a:avLst/>
-          </a:prstGeom>
-          <a:noFill/>
-        </p:spPr>
-        <p:txBody>
-          <a:bodyPr wrap="square">
-            <a:spAutoFit/>
-          </a:bodyPr>
-          <a:lstStyle/>
-          <a:p>
-            <a:pPr algn="l">
-              <a:defRPr sz="1500" b="0">
-                <a:solidFill>
-                  <a:srgbClr val="CBD5E8"/>
-                </a:solidFill>
-                <a:latin typeface="Microsoft YaHei"/>
-              </a:defRPr>
-            </a:pPr>
-            <a:r>
-              <a:t>精通即梦AI、可灵AI、Seedance 2.0等核心工具</a:t>
-            </a:r>
-          </a:p>
-        </p:txBody>
-      </p:sp>
-      <p:sp>
-        <p:nvSpPr>
-          <p:cNvPr id="16" name="Rounded Rectangle 15"/>
+          <p:cNvPr id="14" name="Oval 13"/>
           <p:cNvSpPr/>
           <p:nvPr/>
         </p:nvSpPr>
         <p:spPr>
           <a:xfrm>
-            <a:off x="457200" y="3063240"/>
-            <a:ext cx="11247120" cy="731520"/>
-          </a:xfrm>
-          <a:prstGeom prst="roundRect">
-            <a:avLst/>
-          </a:prstGeom>
-          <a:solidFill>
-            <a:srgbClr val="141E33"/>
+            <a:off x="685800" y="2480310"/>
+            <a:ext cx="320040" cy="320040"/>
+          </a:xfrm>
+          <a:prstGeom prst="ellipse">
+            <a:avLst/>
+          </a:prstGeom>
+          <a:solidFill>
+            <a:srgbClr val="00C8F0"/>
           </a:solidFill>
           <a:ln>
             <a:noFill/>
@@ -6513,20 +6484,92 @@
       </p:sp>
       <p:sp>
         <p:nvSpPr>
-          <p:cNvPr id="17" name="Rectangle 16"/>
+          <p:cNvPr id="15" name="TextBox 14"/>
+          <p:cNvSpPr txBox="1"/>
+          <p:nvPr/>
+        </p:nvSpPr>
+        <p:spPr>
+          <a:xfrm>
+            <a:off x="685800" y="2480310"/>
+            <a:ext cx="320040" cy="320040"/>
+          </a:xfrm>
+          <a:prstGeom prst="rect">
+            <a:avLst/>
+          </a:prstGeom>
+          <a:noFill/>
+        </p:spPr>
+        <p:txBody>
+          <a:bodyPr wrap="square">
+            <a:spAutoFit/>
+          </a:bodyPr>
+          <a:lstStyle/>
+          <a:p>
+            <a:pPr algn="ctr">
+              <a:defRPr sz="1000" b="1">
+                <a:solidFill>
+                  <a:srgbClr val="F0F4FC"/>
+                </a:solidFill>
+                <a:latin typeface="Microsoft YaHei"/>
+              </a:defRPr>
+            </a:pPr>
+            <a:r>
+              <a:t>2</a:t>
+            </a:r>
+          </a:p>
+        </p:txBody>
+      </p:sp>
+      <p:sp>
+        <p:nvSpPr>
+          <p:cNvPr id="16" name="TextBox 15"/>
+          <p:cNvSpPr txBox="1"/>
+          <p:nvPr/>
+        </p:nvSpPr>
+        <p:spPr>
+          <a:xfrm>
+            <a:off x="1188720" y="2457450"/>
+            <a:ext cx="10058400" cy="365760"/>
+          </a:xfrm>
+          <a:prstGeom prst="rect">
+            <a:avLst/>
+          </a:prstGeom>
+          <a:noFill/>
+        </p:spPr>
+        <p:txBody>
+          <a:bodyPr wrap="square">
+            <a:spAutoFit/>
+          </a:bodyPr>
+          <a:lstStyle/>
+          <a:p>
+            <a:pPr algn="l">
+              <a:defRPr sz="1400" b="0">
+                <a:solidFill>
+                  <a:srgbClr val="A0AEC4"/>
+                </a:solidFill>
+                <a:latin typeface="Microsoft YaHei"/>
+              </a:defRPr>
+            </a:pPr>
+            <a:r>
+              <a:t>精通即梦AI、可灵AI、Seedance 2.0等核心工具</a:t>
+            </a:r>
+          </a:p>
+        </p:txBody>
+      </p:sp>
+      <p:sp>
+        <p:nvSpPr>
+          <p:cNvPr id="17" name="Rounded Rectangle 16"/>
           <p:cNvSpPr/>
           <p:nvPr/>
         </p:nvSpPr>
         <p:spPr>
           <a:xfrm>
-            <a:off x="457200" y="3063240"/>
-            <a:ext cx="73152" cy="731520"/>
-          </a:xfrm>
-          <a:prstGeom prst="rect">
-            <a:avLst/>
-          </a:prstGeom>
-          <a:solidFill>
-            <a:srgbClr val="00D4FF"/>
+            <a:off x="457200" y="3314700"/>
+            <a:ext cx="11247120" cy="685800"/>
+          </a:xfrm>
+          <a:prstGeom prst="roundRect">
+            <a:avLst/>
+          </a:prstGeom>
+          <a:solidFill>
+            <a:srgbClr val="161F35"/>
           </a:solidFill>
           <a:ln>
             <a:noFill/>
@@ -6556,20 +6599,20 @@
       </p:sp>
       <p:sp>
         <p:nvSpPr>
-          <p:cNvPr id="18" name="Oval 17"/>
+          <p:cNvPr id="18" name="Rectangle 17"/>
           <p:cNvSpPr/>
           <p:nvPr/>
         </p:nvSpPr>
         <p:spPr>
           <a:xfrm>
-            <a:off x="731520" y="3227832"/>
-            <a:ext cx="365760" cy="365760"/>
-          </a:xfrm>
-          <a:prstGeom prst="ellipse">
-            <a:avLst/>
-          </a:prstGeom>
-          <a:solidFill>
-            <a:srgbClr val="00D4FF"/>
+            <a:off x="457200" y="3314700"/>
+            <a:ext cx="54864" cy="685800"/>
+          </a:xfrm>
+          <a:prstGeom prst="rect">
+            <a:avLst/>
+          </a:prstGeom>
+          <a:solidFill>
+            <a:srgbClr val="00C8F0"/>
           </a:solidFill>
           <a:ln>
             <a:noFill/>
@@ -6599,92 +6642,20 @@
       </p:sp>
       <p:sp>
         <p:nvSpPr>
-          <p:cNvPr id="19" name="TextBox 18"/>
-          <p:cNvSpPr txBox="1"/>
-          <p:nvPr/>
-        </p:nvSpPr>
-        <p:spPr>
-          <a:xfrm>
-            <a:off x="731520" y="3227832"/>
-            <a:ext cx="365760" cy="365760"/>
-          </a:xfrm>
-          <a:prstGeom prst="rect">
-            <a:avLst/>
-          </a:prstGeom>
-          <a:noFill/>
-        </p:spPr>
-        <p:txBody>
-          <a:bodyPr wrap="square">
-            <a:spAutoFit/>
-          </a:bodyPr>
-          <a:lstStyle/>
-          <a:p>
-            <a:pPr algn="ctr">
-              <a:defRPr sz="1100" b="1">
-                <a:solidFill>
-                  <a:srgbClr val="FFFFFF"/>
-                </a:solidFill>
-                <a:latin typeface="Microsoft YaHei"/>
-              </a:defRPr>
-            </a:pPr>
-            <a:r>
-              <a:t>3</a:t>
-            </a:r>
-          </a:p>
-        </p:txBody>
-      </p:sp>
-      <p:sp>
-        <p:nvSpPr>
-          <p:cNvPr id="20" name="TextBox 19"/>
-          <p:cNvSpPr txBox="1"/>
-          <p:nvPr/>
-        </p:nvSpPr>
-        <p:spPr>
-          <a:xfrm>
-            <a:off x="1280160" y="3154680"/>
-            <a:ext cx="10058400" cy="548640"/>
-          </a:xfrm>
-          <a:prstGeom prst="rect">
-            <a:avLst/>
-          </a:prstGeom>
-          <a:noFill/>
-        </p:spPr>
-        <p:txBody>
-          <a:bodyPr wrap="square">
-            <a:spAutoFit/>
-          </a:bodyPr>
-          <a:lstStyle/>
-          <a:p>
-            <a:pPr algn="l">
-              <a:defRPr sz="1500" b="0">
-                <a:solidFill>
-                  <a:srgbClr val="CBD5E8"/>
-                </a:solidFill>
-                <a:latin typeface="Microsoft YaHei"/>
-              </a:defRPr>
-            </a:pPr>
-            <a:r>
-              <a:t>能独立制作一集完整的AI漫剧</a:t>
-            </a:r>
-          </a:p>
-        </p:txBody>
-      </p:sp>
-      <p:sp>
-        <p:nvSpPr>
-          <p:cNvPr id="21" name="Rounded Rectangle 20"/>
+          <p:cNvPr id="19" name="Oval 18"/>
           <p:cNvSpPr/>
           <p:nvPr/>
         </p:nvSpPr>
         <p:spPr>
           <a:xfrm>
-            <a:off x="457200" y="3931919"/>
-            <a:ext cx="11247120" cy="731520"/>
-          </a:xfrm>
-          <a:prstGeom prst="roundRect">
-            <a:avLst/>
-          </a:prstGeom>
-          <a:solidFill>
-            <a:srgbClr val="141E33"/>
+            <a:off x="685800" y="3497580"/>
+            <a:ext cx="320040" cy="320040"/>
+          </a:xfrm>
+          <a:prstGeom prst="ellipse">
+            <a:avLst/>
+          </a:prstGeom>
+          <a:solidFill>
+            <a:srgbClr val="00C8F0"/>
           </a:solidFill>
           <a:ln>
             <a:noFill/>
@@ -6714,20 +6685,92 @@
       </p:sp>
       <p:sp>
         <p:nvSpPr>
-          <p:cNvPr id="22" name="Rectangle 21"/>
+          <p:cNvPr id="20" name="TextBox 19"/>
+          <p:cNvSpPr txBox="1"/>
+          <p:nvPr/>
+        </p:nvSpPr>
+        <p:spPr>
+          <a:xfrm>
+            <a:off x="685800" y="3497580"/>
+            <a:ext cx="320040" cy="320040"/>
+          </a:xfrm>
+          <a:prstGeom prst="rect">
+            <a:avLst/>
+          </a:prstGeom>
+          <a:noFill/>
+        </p:spPr>
+        <p:txBody>
+          <a:bodyPr wrap="square">
+            <a:spAutoFit/>
+          </a:bodyPr>
+          <a:lstStyle/>
+          <a:p>
+            <a:pPr algn="ctr">
+              <a:defRPr sz="1000" b="1">
+                <a:solidFill>
+                  <a:srgbClr val="F0F4FC"/>
+                </a:solidFill>
+                <a:latin typeface="Microsoft YaHei"/>
+              </a:defRPr>
+            </a:pPr>
+            <a:r>
+              <a:t>3</a:t>
+            </a:r>
+          </a:p>
+        </p:txBody>
+      </p:sp>
+      <p:sp>
+        <p:nvSpPr>
+          <p:cNvPr id="21" name="TextBox 20"/>
+          <p:cNvSpPr txBox="1"/>
+          <p:nvPr/>
+        </p:nvSpPr>
+        <p:spPr>
+          <a:xfrm>
+            <a:off x="1188720" y="3474720"/>
+            <a:ext cx="10058400" cy="365760"/>
+          </a:xfrm>
+          <a:prstGeom prst="rect">
+            <a:avLst/>
+          </a:prstGeom>
+          <a:noFill/>
+        </p:spPr>
+        <p:txBody>
+          <a:bodyPr wrap="square">
+            <a:spAutoFit/>
+          </a:bodyPr>
+          <a:lstStyle/>
+          <a:p>
+            <a:pPr algn="l">
+              <a:defRPr sz="1400" b="0">
+                <a:solidFill>
+                  <a:srgbClr val="A0AEC4"/>
+                </a:solidFill>
+                <a:latin typeface="Microsoft YaHei"/>
+              </a:defRPr>
+            </a:pPr>
+            <a:r>
+              <a:t>能独立制作一集完整的AI漫剧</a:t>
+            </a:r>
+          </a:p>
+        </p:txBody>
+      </p:sp>
+      <p:sp>
+        <p:nvSpPr>
+          <p:cNvPr id="22" name="Rounded Rectangle 21"/>
           <p:cNvSpPr/>
           <p:nvPr/>
         </p:nvSpPr>
         <p:spPr>
           <a:xfrm>
-            <a:off x="457200" y="3931919"/>
-            <a:ext cx="73152" cy="731520"/>
-          </a:xfrm>
-          <a:prstGeom prst="rect">
-            <a:avLst/>
-          </a:prstGeom>
-          <a:solidFill>
-            <a:srgbClr val="00D4FF"/>
+            <a:off x="457200" y="4331970"/>
+            <a:ext cx="11247120" cy="685800"/>
+          </a:xfrm>
+          <a:prstGeom prst="roundRect">
+            <a:avLst/>
+          </a:prstGeom>
+          <a:solidFill>
+            <a:srgbClr val="161F35"/>
           </a:solidFill>
           <a:ln>
             <a:noFill/>
@@ -6757,20 +6800,20 @@
       </p:sp>
       <p:sp>
         <p:nvSpPr>
-          <p:cNvPr id="23" name="Oval 22"/>
+          <p:cNvPr id="23" name="Rectangle 22"/>
           <p:cNvSpPr/>
           <p:nvPr/>
         </p:nvSpPr>
         <p:spPr>
           <a:xfrm>
-            <a:off x="731520" y="4096511"/>
-            <a:ext cx="365760" cy="365760"/>
-          </a:xfrm>
-          <a:prstGeom prst="ellipse">
-            <a:avLst/>
-          </a:prstGeom>
-          <a:solidFill>
-            <a:srgbClr val="00D4FF"/>
+            <a:off x="457200" y="4331970"/>
+            <a:ext cx="54864" cy="685800"/>
+          </a:xfrm>
+          <a:prstGeom prst="rect">
+            <a:avLst/>
+          </a:prstGeom>
+          <a:solidFill>
+            <a:srgbClr val="00C8F0"/>
           </a:solidFill>
           <a:ln>
             <a:noFill/>
@@ -6800,92 +6843,20 @@
       </p:sp>
       <p:sp>
         <p:nvSpPr>
-          <p:cNvPr id="24" name="TextBox 23"/>
-          <p:cNvSpPr txBox="1"/>
-          <p:nvPr/>
-        </p:nvSpPr>
-        <p:spPr>
-          <a:xfrm>
-            <a:off x="731520" y="4096511"/>
-            <a:ext cx="365760" cy="365760"/>
-          </a:xfrm>
-          <a:prstGeom prst="rect">
-            <a:avLst/>
-          </a:prstGeom>
-          <a:noFill/>
-        </p:spPr>
-        <p:txBody>
-          <a:bodyPr wrap="square">
-            <a:spAutoFit/>
-          </a:bodyPr>
-          <a:lstStyle/>
-          <a:p>
-            <a:pPr algn="ctr">
-              <a:defRPr sz="1100" b="1">
-                <a:solidFill>
-                  <a:srgbClr val="FFFFFF"/>
-                </a:solidFill>
-                <a:latin typeface="Microsoft YaHei"/>
-              </a:defRPr>
-            </a:pPr>
-            <a:r>
-              <a:t>4</a:t>
-            </a:r>
-          </a:p>
-        </p:txBody>
-      </p:sp>
-      <p:sp>
-        <p:nvSpPr>
-          <p:cNvPr id="25" name="TextBox 24"/>
-          <p:cNvSpPr txBox="1"/>
-          <p:nvPr/>
-        </p:nvSpPr>
-        <p:spPr>
-          <a:xfrm>
-            <a:off x="1280160" y="4023359"/>
-            <a:ext cx="10058400" cy="548640"/>
-          </a:xfrm>
-          <a:prstGeom prst="rect">
-            <a:avLst/>
-          </a:prstGeom>
-          <a:noFill/>
-        </p:spPr>
-        <p:txBody>
-          <a:bodyPr wrap="square">
-            <a:spAutoFit/>
-          </a:bodyPr>
-          <a:lstStyle/>
-          <a:p>
-            <a:pPr algn="l">
-              <a:defRPr sz="1500" b="0">
-                <a:solidFill>
-                  <a:srgbClr val="CBD5E8"/>
-                </a:solidFill>
-                <a:latin typeface="Microsoft YaHei"/>
-              </a:defRPr>
-            </a:pPr>
-            <a:r>
-              <a:t>了解平台分发与商业变现的路径</a:t>
-            </a:r>
-          </a:p>
-        </p:txBody>
-      </p:sp>
-      <p:sp>
-        <p:nvSpPr>
-          <p:cNvPr id="26" name="Rounded Rectangle 25"/>
+          <p:cNvPr id="24" name="Oval 23"/>
           <p:cNvSpPr/>
           <p:nvPr/>
         </p:nvSpPr>
         <p:spPr>
           <a:xfrm>
-            <a:off x="457200" y="4800600"/>
-            <a:ext cx="11247120" cy="731520"/>
-          </a:xfrm>
-          <a:prstGeom prst="roundRect">
-            <a:avLst/>
-          </a:prstGeom>
-          <a:solidFill>
-            <a:srgbClr val="141E33"/>
+            <a:off x="685800" y="4514850"/>
+            <a:ext cx="320040" cy="320040"/>
+          </a:xfrm>
+          <a:prstGeom prst="ellipse">
+            <a:avLst/>
+          </a:prstGeom>
+          <a:solidFill>
+            <a:srgbClr val="00C8F0"/>
           </a:solidFill>
           <a:ln>
             <a:noFill/>
@@ -6915,20 +6886,92 @@
       </p:sp>
       <p:sp>
         <p:nvSpPr>
-          <p:cNvPr id="27" name="Rectangle 26"/>
+          <p:cNvPr id="25" name="TextBox 24"/>
+          <p:cNvSpPr txBox="1"/>
+          <p:nvPr/>
+        </p:nvSpPr>
+        <p:spPr>
+          <a:xfrm>
+            <a:off x="685800" y="4514850"/>
+            <a:ext cx="320040" cy="320040"/>
+          </a:xfrm>
+          <a:prstGeom prst="rect">
+            <a:avLst/>
+          </a:prstGeom>
+          <a:noFill/>
+        </p:spPr>
+        <p:txBody>
+          <a:bodyPr wrap="square">
+            <a:spAutoFit/>
+          </a:bodyPr>
+          <a:lstStyle/>
+          <a:p>
+            <a:pPr algn="ctr">
+              <a:defRPr sz="1000" b="1">
+                <a:solidFill>
+                  <a:srgbClr val="F0F4FC"/>
+                </a:solidFill>
+                <a:latin typeface="Microsoft YaHei"/>
+              </a:defRPr>
+            </a:pPr>
+            <a:r>
+              <a:t>4</a:t>
+            </a:r>
+          </a:p>
+        </p:txBody>
+      </p:sp>
+      <p:sp>
+        <p:nvSpPr>
+          <p:cNvPr id="26" name="TextBox 25"/>
+          <p:cNvSpPr txBox="1"/>
+          <p:nvPr/>
+        </p:nvSpPr>
+        <p:spPr>
+          <a:xfrm>
+            <a:off x="1188720" y="4491990"/>
+            <a:ext cx="10058400" cy="365760"/>
+          </a:xfrm>
+          <a:prstGeom prst="rect">
+            <a:avLst/>
+          </a:prstGeom>
+          <a:noFill/>
+        </p:spPr>
+        <p:txBody>
+          <a:bodyPr wrap="square">
+            <a:spAutoFit/>
+          </a:bodyPr>
+          <a:lstStyle/>
+          <a:p>
+            <a:pPr algn="l">
+              <a:defRPr sz="1400" b="0">
+                <a:solidFill>
+                  <a:srgbClr val="A0AEC4"/>
+                </a:solidFill>
+                <a:latin typeface="Microsoft YaHei"/>
+              </a:defRPr>
+            </a:pPr>
+            <a:r>
+              <a:t>了解平台分发与商业变现的路径</a:t>
+            </a:r>
+          </a:p>
+        </p:txBody>
+      </p:sp>
+      <p:sp>
+        <p:nvSpPr>
+          <p:cNvPr id="27" name="Rounded Rectangle 26"/>
           <p:cNvSpPr/>
           <p:nvPr/>
         </p:nvSpPr>
         <p:spPr>
           <a:xfrm>
-            <a:off x="457200" y="4800600"/>
-            <a:ext cx="73152" cy="731520"/>
-          </a:xfrm>
-          <a:prstGeom prst="rect">
-            <a:avLst/>
-          </a:prstGeom>
-          <a:solidFill>
-            <a:srgbClr val="00D4FF"/>
+            <a:off x="457200" y="5349240"/>
+            <a:ext cx="11247120" cy="685800"/>
+          </a:xfrm>
+          <a:prstGeom prst="roundRect">
+            <a:avLst/>
+          </a:prstGeom>
+          <a:solidFill>
+            <a:srgbClr val="161F35"/>
           </a:solidFill>
           <a:ln>
             <a:noFill/>
@@ -6958,20 +7001,20 @@
       </p:sp>
       <p:sp>
         <p:nvSpPr>
-          <p:cNvPr id="28" name="Oval 27"/>
+          <p:cNvPr id="28" name="Rectangle 27"/>
           <p:cNvSpPr/>
           <p:nvPr/>
         </p:nvSpPr>
         <p:spPr>
           <a:xfrm>
-            <a:off x="731520" y="4965192"/>
-            <a:ext cx="365760" cy="365760"/>
-          </a:xfrm>
-          <a:prstGeom prst="ellipse">
-            <a:avLst/>
-          </a:prstGeom>
-          <a:solidFill>
-            <a:srgbClr val="00D4FF"/>
+            <a:off x="457200" y="5349240"/>
+            <a:ext cx="54864" cy="685800"/>
+          </a:xfrm>
+          <a:prstGeom prst="rect">
+            <a:avLst/>
+          </a:prstGeom>
+          <a:solidFill>
+            <a:srgbClr val="00C8F0"/>
           </a:solidFill>
           <a:ln>
             <a:noFill/>
@@ -7001,92 +7044,20 @@
       </p:sp>
       <p:sp>
         <p:nvSpPr>
-          <p:cNvPr id="29" name="TextBox 28"/>
-          <p:cNvSpPr txBox="1"/>
-          <p:nvPr/>
-        </p:nvSpPr>
-        <p:spPr>
-          <a:xfrm>
-            <a:off x="731520" y="4965192"/>
-            <a:ext cx="365760" cy="365760"/>
-          </a:xfrm>
-          <a:prstGeom prst="rect">
-            <a:avLst/>
-          </a:prstGeom>
-          <a:noFill/>
-        </p:spPr>
-        <p:txBody>
-          <a:bodyPr wrap="square">
-            <a:spAutoFit/>
-          </a:bodyPr>
-          <a:lstStyle/>
-          <a:p>
-            <a:pPr algn="ctr">
-              <a:defRPr sz="1100" b="1">
-                <a:solidFill>
-                  <a:srgbClr val="FFFFFF"/>
-                </a:solidFill>
-                <a:latin typeface="Microsoft YaHei"/>
-              </a:defRPr>
-            </a:pPr>
-            <a:r>
-              <a:t>5</a:t>
-            </a:r>
-          </a:p>
-        </p:txBody>
-      </p:sp>
-      <p:sp>
-        <p:nvSpPr>
-          <p:cNvPr id="30" name="TextBox 29"/>
-          <p:cNvSpPr txBox="1"/>
-          <p:nvPr/>
-        </p:nvSpPr>
-        <p:spPr>
-          <a:xfrm>
-            <a:off x="1280160" y="4892040"/>
-            <a:ext cx="10058400" cy="548640"/>
-          </a:xfrm>
-          <a:prstGeom prst="rect">
-            <a:avLst/>
-          </a:prstGeom>
-          <a:noFill/>
-        </p:spPr>
-        <p:txBody>
-          <a:bodyPr wrap="square">
-            <a:spAutoFit/>
-          </a:bodyPr>
-          <a:lstStyle/>
-          <a:p>
-            <a:pPr algn="l">
-              <a:defRPr sz="1500" b="0">
-                <a:solidFill>
-                  <a:srgbClr val="CBD5E8"/>
-                </a:solidFill>
-                <a:latin typeface="Microsoft YaHei"/>
-              </a:defRPr>
-            </a:pPr>
-            <a:r>
-              <a:t>建立工业化生产思维，实现高效量产</a:t>
-            </a:r>
-          </a:p>
-        </p:txBody>
-      </p:sp>
-      <p:sp>
-        <p:nvSpPr>
-          <p:cNvPr id="31" name="Rectangle 30"/>
+          <p:cNvPr id="29" name="Oval 28"/>
           <p:cNvSpPr/>
           <p:nvPr/>
         </p:nvSpPr>
         <p:spPr>
           <a:xfrm>
-            <a:off x="0" y="6446520"/>
-            <a:ext cx="12191695" cy="19050"/>
-          </a:xfrm>
-          <a:prstGeom prst="rect">
-            <a:avLst/>
-          </a:prstGeom>
-          <a:solidFill>
-            <a:srgbClr val="2D3B55"/>
+            <a:off x="685800" y="5532120"/>
+            <a:ext cx="320040" cy="320040"/>
+          </a:xfrm>
+          <a:prstGeom prst="ellipse">
+            <a:avLst/>
+          </a:prstGeom>
+          <a:solidFill>
+            <a:srgbClr val="00C8F0"/>
           </a:solidFill>
           <a:ln>
             <a:noFill/>
@@ -7116,14 +7087,14 @@
       </p:sp>
       <p:sp>
         <p:nvSpPr>
-          <p:cNvPr id="32" name="TextBox 31"/>
+          <p:cNvPr id="30" name="TextBox 29"/>
           <p:cNvSpPr txBox="1"/>
           <p:nvPr/>
         </p:nvSpPr>
         <p:spPr>
           <a:xfrm>
-            <a:off x="457200" y="6492240"/>
-            <a:ext cx="5486400" cy="274320"/>
+            <a:off x="685800" y="5532120"/>
+            <a:ext cx="320040" cy="320040"/>
           </a:xfrm>
           <a:prstGeom prst="rect">
             <a:avLst/>
@@ -7136,30 +7107,30 @@
           </a:bodyPr>
           <a:lstStyle/>
           <a:p>
-            <a:pPr algn="l">
-              <a:defRPr sz="900" b="0">
+            <a:pPr algn="ctr">
+              <a:defRPr sz="1000" b="1">
                 <a:solidFill>
-                  <a:srgbClr val="6B7B9E"/>
+                  <a:srgbClr val="F0F4FC"/>
                 </a:solidFill>
                 <a:latin typeface="Microsoft YaHei"/>
               </a:defRPr>
             </a:pPr>
             <a:r>
-              <a:t>模块00：课程导论</a:t>
-            </a:r>
-          </a:p>
-        </p:txBody>
-      </p:sp>
-      <p:sp>
-        <p:nvSpPr>
-          <p:cNvPr id="33" name="TextBox 32"/>
+              <a:t>5</a:t>
+            </a:r>
+          </a:p>
+        </p:txBody>
+      </p:sp>
+      <p:sp>
+        <p:nvSpPr>
+          <p:cNvPr id="31" name="TextBox 30"/>
           <p:cNvSpPr txBox="1"/>
           <p:nvPr/>
         </p:nvSpPr>
         <p:spPr>
           <a:xfrm>
-            <a:off x="10515600" y="6492240"/>
-            <a:ext cx="1371600" cy="274320"/>
+            <a:off x="1188720" y="5509260"/>
+            <a:ext cx="10058400" cy="365760"/>
           </a:xfrm>
           <a:prstGeom prst="rect">
             <a:avLst/>
@@ -7172,10 +7143,125 @@
           </a:bodyPr>
           <a:lstStyle/>
           <a:p>
+            <a:pPr algn="l">
+              <a:defRPr sz="1400" b="0">
+                <a:solidFill>
+                  <a:srgbClr val="A0AEC4"/>
+                </a:solidFill>
+                <a:latin typeface="Microsoft YaHei"/>
+              </a:defRPr>
+            </a:pPr>
+            <a:r>
+              <a:t>建立工业化生产思维，实现高效量产</a:t>
+            </a:r>
+          </a:p>
+        </p:txBody>
+      </p:sp>
+      <p:sp>
+        <p:nvSpPr>
+          <p:cNvPr id="32" name="Rectangle 31"/>
+          <p:cNvSpPr/>
+          <p:nvPr/>
+        </p:nvSpPr>
+        <p:spPr>
+          <a:xfrm>
+            <a:off x="0" y="6446520"/>
+            <a:ext cx="12191695" cy="12700"/>
+          </a:xfrm>
+          <a:prstGeom prst="rect">
+            <a:avLst/>
+          </a:prstGeom>
+          <a:solidFill>
+            <a:srgbClr val="253350"/>
+          </a:solidFill>
+          <a:ln>
+            <a:noFill/>
+          </a:ln>
+        </p:spPr>
+        <p:style>
+          <a:lnRef idx="1">
+            <a:schemeClr val="accent1"/>
+          </a:lnRef>
+          <a:fillRef idx="3">
+            <a:schemeClr val="accent1"/>
+          </a:fillRef>
+          <a:effectRef idx="2">
+            <a:schemeClr val="accent1"/>
+          </a:effectRef>
+          <a:fontRef idx="minor">
+            <a:schemeClr val="lt1"/>
+          </a:fontRef>
+        </p:style>
+        <p:txBody>
+          <a:bodyPr rtlCol="0" anchor="ctr"/>
+          <a:lstStyle/>
+          <a:p>
+            <a:pPr algn="ctr"/>
+          </a:p>
+        </p:txBody>
+      </p:sp>
+      <p:sp>
+        <p:nvSpPr>
+          <p:cNvPr id="33" name="TextBox 32"/>
+          <p:cNvSpPr txBox="1"/>
+          <p:nvPr/>
+        </p:nvSpPr>
+        <p:spPr>
+          <a:xfrm>
+            <a:off x="731520" y="6492240"/>
+            <a:ext cx="4572000" cy="274320"/>
+          </a:xfrm>
+          <a:prstGeom prst="rect">
+            <a:avLst/>
+          </a:prstGeom>
+          <a:noFill/>
+        </p:spPr>
+        <p:txBody>
+          <a:bodyPr wrap="square">
+            <a:spAutoFit/>
+          </a:bodyPr>
+          <a:lstStyle/>
+          <a:p>
+            <a:pPr algn="l">
+              <a:defRPr sz="900" b="0">
+                <a:solidFill>
+                  <a:srgbClr val="607090"/>
+                </a:solidFill>
+                <a:latin typeface="Microsoft YaHei"/>
+              </a:defRPr>
+            </a:pPr>
+            <a:r>
+              <a:t>模块00 · 课程导论</a:t>
+            </a:r>
+          </a:p>
+        </p:txBody>
+      </p:sp>
+      <p:sp>
+        <p:nvSpPr>
+          <p:cNvPr id="34" name="TextBox 33"/>
+          <p:cNvSpPr txBox="1"/>
+          <p:nvPr/>
+        </p:nvSpPr>
+        <p:spPr>
+          <a:xfrm>
+            <a:off x="10515600" y="6492240"/>
+            <a:ext cx="1371600" cy="274320"/>
+          </a:xfrm>
+          <a:prstGeom prst="rect">
+            <a:avLst/>
+          </a:prstGeom>
+          <a:noFill/>
+        </p:spPr>
+        <p:txBody>
+          <a:bodyPr wrap="square">
+            <a:spAutoFit/>
+          </a:bodyPr>
+          <a:lstStyle/>
+          <a:p>
             <a:pPr algn="r">
               <a:defRPr sz="900" b="0">
                 <a:solidFill>
-                  <a:srgbClr val="6B7B9E"/>
+                  <a:srgbClr val="607090"/>
                 </a:solidFill>
                 <a:latin typeface="Microsoft YaHei"/>
               </a:defRPr>
@@ -7200,7 +7286,7 @@
     <p:bg>
       <p:bgPr>
         <a:solidFill>
-          <a:srgbClr val="0B1120"/>
+          <a:srgbClr val="0A0E1A"/>
         </a:solidFill>
         <a:effectLst/>
       </p:bgPr>
@@ -7221,13 +7307,13 @@
         <p:spPr>
           <a:xfrm>
             <a:off x="0" y="0"/>
-            <a:ext cx="12191695" cy="1051560"/>
-          </a:xfrm>
-          <a:prstGeom prst="rect">
-            <a:avLst/>
-          </a:prstGeom>
-          <a:solidFill>
-            <a:srgbClr val="141E33"/>
+            <a:ext cx="12191695" cy="38100"/>
+          </a:xfrm>
+          <a:prstGeom prst="rect">
+            <a:avLst/>
+          </a:prstGeom>
+          <a:solidFill>
+            <a:srgbClr val="00C8F0"/>
           </a:solidFill>
           <a:ln>
             <a:noFill/>
@@ -7263,14 +7349,14 @@
         </p:nvSpPr>
         <p:spPr>
           <a:xfrm>
-            <a:off x="0" y="0"/>
-            <a:ext cx="109728" cy="1051560"/>
-          </a:xfrm>
-          <a:prstGeom prst="rect">
-            <a:avLst/>
-          </a:prstGeom>
-          <a:solidFill>
-            <a:srgbClr val="00D4FF"/>
+            <a:off x="0" y="38100"/>
+            <a:ext cx="12191695" cy="914400"/>
+          </a:xfrm>
+          <a:prstGeom prst="rect">
+            <a:avLst/>
+          </a:prstGeom>
+          <a:solidFill>
+            <a:srgbClr val="161F35"/>
           </a:solidFill>
           <a:ln>
             <a:noFill/>
@@ -7300,56 +7386,20 @@
       </p:sp>
       <p:sp>
         <p:nvSpPr>
-          <p:cNvPr id="4" name="TextBox 3"/>
-          <p:cNvSpPr txBox="1"/>
-          <p:nvPr/>
-        </p:nvSpPr>
-        <p:spPr>
-          <a:xfrm>
-            <a:off x="548640" y="182880"/>
-            <a:ext cx="10058400" cy="640080"/>
-          </a:xfrm>
-          <a:prstGeom prst="rect">
-            <a:avLst/>
-          </a:prstGeom>
-          <a:noFill/>
-        </p:spPr>
-        <p:txBody>
-          <a:bodyPr wrap="square">
-            <a:spAutoFit/>
-          </a:bodyPr>
-          <a:lstStyle/>
-          <a:p>
-            <a:pPr algn="l">
-              <a:defRPr sz="2600" b="1">
-                <a:solidFill>
-                  <a:srgbClr val="FFFFFF"/>
-                </a:solidFill>
-                <a:latin typeface="Microsoft YaHei"/>
-              </a:defRPr>
-            </a:pPr>
-            <a:r>
-              <a:t>行业数据一览</a:t>
-            </a:r>
-          </a:p>
-        </p:txBody>
-      </p:sp>
-      <p:sp>
-        <p:nvSpPr>
-          <p:cNvPr id="5" name="Rectangle 4"/>
+          <p:cNvPr id="4" name="Rectangle 3"/>
           <p:cNvSpPr/>
           <p:nvPr/>
         </p:nvSpPr>
         <p:spPr>
           <a:xfrm>
-            <a:off x="0" y="1051560"/>
-            <a:ext cx="12191695" cy="25400"/>
-          </a:xfrm>
-          <a:prstGeom prst="rect">
-            <a:avLst/>
-          </a:prstGeom>
-          <a:solidFill>
-            <a:srgbClr val="00D4FF"/>
+            <a:off x="0" y="38100"/>
+            <a:ext cx="91440" cy="914400"/>
+          </a:xfrm>
+          <a:prstGeom prst="rect">
+            <a:avLst/>
+          </a:prstGeom>
+          <a:solidFill>
+            <a:srgbClr val="00C8F0"/>
           </a:solidFill>
           <a:ln>
             <a:noFill/>
@@ -7377,17 +7427,96 @@
           </a:p>
         </p:txBody>
       </p:sp>
+      <p:sp>
+        <p:nvSpPr>
+          <p:cNvPr id="5" name="TextBox 4"/>
+          <p:cNvSpPr txBox="1"/>
+          <p:nvPr/>
+        </p:nvSpPr>
+        <p:spPr>
+          <a:xfrm>
+            <a:off x="731520" y="137160"/>
+            <a:ext cx="10728655" cy="640080"/>
+          </a:xfrm>
+          <a:prstGeom prst="rect">
+            <a:avLst/>
+          </a:prstGeom>
+          <a:noFill/>
+        </p:spPr>
+        <p:txBody>
+          <a:bodyPr wrap="square">
+            <a:spAutoFit/>
+          </a:bodyPr>
+          <a:lstStyle/>
+          <a:p>
+            <a:pPr algn="l">
+              <a:defRPr sz="2400" b="1">
+                <a:solidFill>
+                  <a:srgbClr val="F0F4FC"/>
+                </a:solidFill>
+                <a:latin typeface="Microsoft YaHei"/>
+              </a:defRPr>
+            </a:pPr>
+            <a:r>
+              <a:t>行业数据一览</a:t>
+            </a:r>
+          </a:p>
+        </p:txBody>
+      </p:sp>
+      <p:sp>
+        <p:nvSpPr>
+          <p:cNvPr id="6" name="Rectangle 5"/>
+          <p:cNvSpPr/>
+          <p:nvPr/>
+        </p:nvSpPr>
+        <p:spPr>
+          <a:xfrm>
+            <a:off x="0" y="1078992"/>
+            <a:ext cx="12191695" cy="12700"/>
+          </a:xfrm>
+          <a:prstGeom prst="rect">
+            <a:avLst/>
+          </a:prstGeom>
+          <a:solidFill>
+            <a:srgbClr val="253350"/>
+          </a:solidFill>
+          <a:ln>
+            <a:noFill/>
+          </a:ln>
+        </p:spPr>
+        <p:style>
+          <a:lnRef idx="1">
+            <a:schemeClr val="accent1"/>
+          </a:lnRef>
+          <a:fillRef idx="3">
+            <a:schemeClr val="accent1"/>
+          </a:fillRef>
+          <a:effectRef idx="2">
+            <a:schemeClr val="accent1"/>
+          </a:effectRef>
+          <a:fontRef idx="minor">
+            <a:schemeClr val="lt1"/>
+          </a:fontRef>
+        </p:style>
+        <p:txBody>
+          <a:bodyPr rtlCol="0" anchor="ctr"/>
+          <a:lstStyle/>
+          <a:p>
+            <a:pPr algn="ctr"/>
+          </a:p>
+        </p:txBody>
+      </p:sp>
       <p:graphicFrame>
         <p:nvGraphicFramePr>
-          <p:cNvPr id="6" name="Table 5"/>
+          <p:cNvPr id="7" name="Table 6"/>
           <p:cNvGraphicFramePr>
             <a:graphicFrameLocks noGrp="1"/>
           </p:cNvGraphicFramePr>
           <p:nvPr/>
         </p:nvGraphicFramePr>
         <p:xfrm>
-          <a:off x="548640" y="1463040"/>
-          <a:ext cx="11064240" cy="3566160"/>
+          <a:off x="548640" y="1371600"/>
+          <a:ext cx="11064240" cy="3291840"/>
         </p:xfrm>
         <a:graphic>
           <a:graphicData uri="http://schemas.openxmlformats.org/drawingml/2006/table">
@@ -7399,16 +7528,16 @@
                 <a:gridCol w="5532120"/>
                 <a:gridCol w="5532120"/>
               </a:tblGrid>
-              <a:tr h="594360">
+              <a:tr h="548640">
                 <a:tc>
                   <a:txBody>
                     <a:bodyPr/>
                     <a:lstStyle/>
                     <a:p>
                       <a:pPr algn="ctr">
-                        <a:defRPr sz="1400" b="1">
+                        <a:defRPr sz="1300" b="1">
                           <a:solidFill>
-                            <a:srgbClr val="FFFFFF"/>
+                            <a:srgbClr val="F0F4FC"/>
                           </a:solidFill>
                           <a:latin typeface="Microsoft YaHei"/>
                         </a:defRPr>
@@ -7420,7 +7549,7 @@
                   </a:txBody>
                   <a:tcPr anchor="ctr">
                     <a:solidFill>
-                      <a:srgbClr val="00D4FF"/>
+                      <a:srgbClr val="00C8F0"/>
                     </a:solidFill>
                   </a:tcPr>
                 </a:tc>
@@ -7430,9 +7559,9 @@
                     <a:lstStyle/>
                     <a:p>
                       <a:pPr algn="ctr">
-                        <a:defRPr sz="1400" b="1">
+                        <a:defRPr sz="1300" b="1">
                           <a:solidFill>
-                            <a:srgbClr val="FFFFFF"/>
+                            <a:srgbClr val="F0F4FC"/>
                           </a:solidFill>
                           <a:latin typeface="Microsoft YaHei"/>
                         </a:defRPr>
@@ -7444,21 +7573,21 @@
                   </a:txBody>
                   <a:tcPr anchor="ctr">
                     <a:solidFill>
-                      <a:srgbClr val="00D4FF"/>
+                      <a:srgbClr val="00C8F0"/>
                     </a:solidFill>
                   </a:tcPr>
                 </a:tc>
               </a:tr>
-              <a:tr h="594360">
+              <a:tr h="548640">
                 <a:tc>
                   <a:txBody>
                     <a:bodyPr/>
                     <a:lstStyle/>
                     <a:p>
                       <a:pPr algn="ctr">
-                        <a:defRPr sz="1300">
+                        <a:defRPr sz="1200">
                           <a:solidFill>
-                            <a:srgbClr val="CBD5E8"/>
+                            <a:srgbClr val="A0AEC4"/>
                           </a:solidFill>
                           <a:latin typeface="Microsoft YaHei"/>
                         </a:defRPr>
@@ -7470,7 +7599,7 @@
                   </a:txBody>
                   <a:tcPr anchor="ctr">
                     <a:solidFill>
-                      <a:srgbClr val="141E33"/>
+                      <a:srgbClr val="161F35"/>
                     </a:solidFill>
                   </a:tcPr>
                 </a:tc>
@@ -7480,9 +7609,9 @@
                     <a:lstStyle/>
                     <a:p>
                       <a:pPr algn="ctr">
-                        <a:defRPr sz="1300">
+                        <a:defRPr sz="1200">
                           <a:solidFill>
-                            <a:srgbClr val="CBD5E8"/>
+                            <a:srgbClr val="A0AEC4"/>
                           </a:solidFill>
                           <a:latin typeface="Microsoft YaHei"/>
                         </a:defRPr>
@@ -7494,21 +7623,21 @@
                   </a:txBody>
                   <a:tcPr anchor="ctr">
                     <a:solidFill>
-                      <a:srgbClr val="141E33"/>
+                      <a:srgbClr val="161F35"/>
                     </a:solidFill>
                   </a:tcPr>
                 </a:tc>
               </a:tr>
-              <a:tr h="594360">
+              <a:tr h="548640">
                 <a:tc>
                   <a:txBody>
                     <a:bodyPr/>
                     <a:lstStyle/>
                     <a:p>
                       <a:pPr algn="ctr">
-                        <a:defRPr sz="1300">
+                        <a:defRPr sz="1200">
                           <a:solidFill>
-                            <a:srgbClr val="CBD5E8"/>
+                            <a:srgbClr val="A0AEC4"/>
                           </a:solidFill>
                           <a:latin typeface="Microsoft YaHei"/>
                         </a:defRPr>
@@ -7520,7 +7649,7 @@
                   </a:txBody>
                   <a:tcPr anchor="ctr">
                     <a:solidFill>
-                      <a:srgbClr val="1A2842"/>
+                      <a:srgbClr val="1C2842"/>
                     </a:solidFill>
                   </a:tcPr>
                 </a:tc>
@@ -7530,9 +7659,9 @@
                     <a:lstStyle/>
                     <a:p>
                       <a:pPr algn="ctr">
-                        <a:defRPr sz="1300">
+                        <a:defRPr sz="1200">
                           <a:solidFill>
-                            <a:srgbClr val="CBD5E8"/>
+                            <a:srgbClr val="A0AEC4"/>
                           </a:solidFill>
                           <a:latin typeface="Microsoft YaHei"/>
                         </a:defRPr>
@@ -7544,21 +7673,21 @@
                   </a:txBody>
                   <a:tcPr anchor="ctr">
                     <a:solidFill>
-                      <a:srgbClr val="1A2842"/>
+                      <a:srgbClr val="1C2842"/>
                     </a:solidFill>
                   </a:tcPr>
                 </a:tc>
               </a:tr>
-              <a:tr h="594360">
+              <a:tr h="548640">
                 <a:tc>
                   <a:txBody>
                     <a:bodyPr/>
                     <a:lstStyle/>
                     <a:p>
                       <a:pPr algn="ctr">
-                        <a:defRPr sz="1300">
+                        <a:defRPr sz="1200">
                           <a:solidFill>
-                            <a:srgbClr val="CBD5E8"/>
+                            <a:srgbClr val="A0AEC4"/>
                           </a:solidFill>
                           <a:latin typeface="Microsoft YaHei"/>
                         </a:defRPr>
@@ -7570,7 +7699,7 @@
                   </a:txBody>
                   <a:tcPr anchor="ctr">
                     <a:solidFill>
-                      <a:srgbClr val="141E33"/>
+                      <a:srgbClr val="161F35"/>
                     </a:solidFill>
                   </a:tcPr>
                 </a:tc>
@@ -7580,9 +7709,9 @@
                     <a:lstStyle/>
                     <a:p>
                       <a:pPr algn="ctr">
-                        <a:defRPr sz="1300">
+                        <a:defRPr sz="1200">
                           <a:solidFill>
-                            <a:srgbClr val="CBD5E8"/>
+                            <a:srgbClr val="A0AEC4"/>
                           </a:solidFill>
                           <a:latin typeface="Microsoft YaHei"/>
                         </a:defRPr>
@@ -7594,21 +7723,21 @@
                   </a:txBody>
                   <a:tcPr anchor="ctr">
                     <a:solidFill>
-                      <a:srgbClr val="141E33"/>
+                      <a:srgbClr val="161F35"/>
                     </a:solidFill>
                   </a:tcPr>
                 </a:tc>
               </a:tr>
-              <a:tr h="594360">
+              <a:tr h="548640">
                 <a:tc>
                   <a:txBody>
                     <a:bodyPr/>
                     <a:lstStyle/>
                     <a:p>
                       <a:pPr algn="ctr">
-                        <a:defRPr sz="1300">
+                        <a:defRPr sz="1200">
                           <a:solidFill>
-                            <a:srgbClr val="CBD5E8"/>
+                            <a:srgbClr val="A0AEC4"/>
                           </a:solidFill>
                           <a:latin typeface="Microsoft YaHei"/>
                         </a:defRPr>
@@ -7620,7 +7749,7 @@
                   </a:txBody>
                   <a:tcPr anchor="ctr">
                     <a:solidFill>
-                      <a:srgbClr val="1A2842"/>
+                      <a:srgbClr val="1C2842"/>
                     </a:solidFill>
                   </a:tcPr>
                 </a:tc>
@@ -7630,9 +7759,9 @@
                     <a:lstStyle/>
                     <a:p>
                       <a:pPr algn="ctr">
-                        <a:defRPr sz="1300">
+                        <a:defRPr sz="1200">
                           <a:solidFill>
-                            <a:srgbClr val="CBD5E8"/>
+                            <a:srgbClr val="A0AEC4"/>
                           </a:solidFill>
                           <a:latin typeface="Microsoft YaHei"/>
                         </a:defRPr>
@@ -7644,21 +7773,21 @@
                   </a:txBody>
                   <a:tcPr anchor="ctr">
                     <a:solidFill>
-                      <a:srgbClr val="1A2842"/>
+                      <a:srgbClr val="1C2842"/>
                     </a:solidFill>
                   </a:tcPr>
                 </a:tc>
               </a:tr>
-              <a:tr h="594360">
+              <a:tr h="548640">
                 <a:tc>
                   <a:txBody>
                     <a:bodyPr/>
                     <a:lstStyle/>
                     <a:p>
                       <a:pPr algn="ctr">
-                        <a:defRPr sz="1300">
+                        <a:defRPr sz="1200">
                           <a:solidFill>
-                            <a:srgbClr val="CBD5E8"/>
+                            <a:srgbClr val="A0AEC4"/>
                           </a:solidFill>
                           <a:latin typeface="Microsoft YaHei"/>
                         </a:defRPr>
@@ -7670,7 +7799,7 @@
                   </a:txBody>
                   <a:tcPr anchor="ctr">
                     <a:solidFill>
-                      <a:srgbClr val="141E33"/>
+                      <a:srgbClr val="161F35"/>
                     </a:solidFill>
                   </a:tcPr>
                 </a:tc>
@@ -7680,9 +7809,9 @@
                     <a:lstStyle/>
                     <a:p>
                       <a:pPr algn="ctr">
-                        <a:defRPr sz="1300">
+                        <a:defRPr sz="1200">
                           <a:solidFill>
-                            <a:srgbClr val="CBD5E8"/>
+                            <a:srgbClr val="A0AEC4"/>
                           </a:solidFill>
                           <a:latin typeface="Microsoft YaHei"/>
                         </a:defRPr>
@@ -7694,7 +7823,7 @@
                   </a:txBody>
                   <a:tcPr anchor="ctr">
                     <a:solidFill>
-                      <a:srgbClr val="141E33"/>
+                      <a:srgbClr val="161F35"/>
                     </a:solidFill>
                   </a:tcPr>
                 </a:tc>
@@ -7705,20 +7834,20 @@
       </p:graphicFrame>
       <p:sp>
         <p:nvSpPr>
-          <p:cNvPr id="7" name="Rectangle 6"/>
+          <p:cNvPr id="8" name="Rectangle 7"/>
           <p:cNvSpPr/>
           <p:nvPr/>
         </p:nvSpPr>
         <p:spPr>
           <a:xfrm>
             <a:off x="0" y="6446520"/>
-            <a:ext cx="12191695" cy="19050"/>
-          </a:xfrm>
-          <a:prstGeom prst="rect">
-            <a:avLst/>
-          </a:prstGeom>
-          <a:solidFill>
-            <a:srgbClr val="2D3B55"/>
+            <a:ext cx="12191695" cy="12700"/>
+          </a:xfrm>
+          <a:prstGeom prst="rect">
+            <a:avLst/>
+          </a:prstGeom>
+          <a:solidFill>
+            <a:srgbClr val="253350"/>
           </a:solidFill>
           <a:ln>
             <a:noFill/>
@@ -7748,14 +7877,14 @@
       </p:sp>
       <p:sp>
         <p:nvSpPr>
-          <p:cNvPr id="8" name="TextBox 7"/>
+          <p:cNvPr id="9" name="TextBox 8"/>
           <p:cNvSpPr txBox="1"/>
           <p:nvPr/>
         </p:nvSpPr>
         <p:spPr>
           <a:xfrm>
-            <a:off x="457200" y="6492240"/>
-            <a:ext cx="5486400" cy="274320"/>
+            <a:off x="731520" y="6492240"/>
+            <a:ext cx="4572000" cy="274320"/>
           </a:xfrm>
           <a:prstGeom prst="rect">
             <a:avLst/>
@@ -7771,20 +7900,20 @@
             <a:pPr algn="l">
               <a:defRPr sz="900" b="0">
                 <a:solidFill>
-                  <a:srgbClr val="6B7B9E"/>
+                  <a:srgbClr val="607090"/>
                 </a:solidFill>
                 <a:latin typeface="Microsoft YaHei"/>
               </a:defRPr>
             </a:pPr>
             <a:r>
-              <a:t>模块00：课程导论</a:t>
-            </a:r>
-          </a:p>
-        </p:txBody>
-      </p:sp>
-      <p:sp>
-        <p:nvSpPr>
-          <p:cNvPr id="9" name="TextBox 8"/>
+              <a:t>模块00 · 课程导论</a:t>
+            </a:r>
+          </a:p>
+        </p:txBody>
+      </p:sp>
+      <p:sp>
+        <p:nvSpPr>
+          <p:cNvPr id="10" name="TextBox 9"/>
           <p:cNvSpPr txBox="1"/>
           <p:nvPr/>
         </p:nvSpPr>
@@ -7807,7 +7936,7 @@
             <a:pPr algn="r">
               <a:defRPr sz="900" b="0">
                 <a:solidFill>
-                  <a:srgbClr val="6B7B9E"/>
+                  <a:srgbClr val="607090"/>
                 </a:solidFill>
                 <a:latin typeface="Microsoft YaHei"/>
               </a:defRPr>
@@ -7832,7 +7961,7 @@
     <p:bg>
       <p:bgPr>
         <a:solidFill>
-          <a:srgbClr val="0B1120"/>
+          <a:srgbClr val="0A0E1A"/>
         </a:solidFill>
         <a:effectLst/>
       </p:bgPr>
@@ -7853,13 +7982,13 @@
         <p:spPr>
           <a:xfrm>
             <a:off x="0" y="0"/>
-            <a:ext cx="12191695" cy="1051560"/>
-          </a:xfrm>
-          <a:prstGeom prst="rect">
-            <a:avLst/>
-          </a:prstGeom>
-          <a:solidFill>
-            <a:srgbClr val="141E33"/>
+            <a:ext cx="12191695" cy="38100"/>
+          </a:xfrm>
+          <a:prstGeom prst="rect">
+            <a:avLst/>
+          </a:prstGeom>
+          <a:solidFill>
+            <a:srgbClr val="00C8F0"/>
           </a:solidFill>
           <a:ln>
             <a:noFill/>
@@ -7895,14 +8024,14 @@
         </p:nvSpPr>
         <p:spPr>
           <a:xfrm>
-            <a:off x="0" y="0"/>
-            <a:ext cx="109728" cy="1051560"/>
-          </a:xfrm>
-          <a:prstGeom prst="rect">
-            <a:avLst/>
-          </a:prstGeom>
-          <a:solidFill>
-            <a:srgbClr val="00D4FF"/>
+            <a:off x="0" y="38100"/>
+            <a:ext cx="12191695" cy="914400"/>
+          </a:xfrm>
+          <a:prstGeom prst="rect">
+            <a:avLst/>
+          </a:prstGeom>
+          <a:solidFill>
+            <a:srgbClr val="161F35"/>
           </a:solidFill>
           <a:ln>
             <a:noFill/>
@@ -7932,56 +8061,20 @@
       </p:sp>
       <p:sp>
         <p:nvSpPr>
-          <p:cNvPr id="4" name="TextBox 3"/>
-          <p:cNvSpPr txBox="1"/>
-          <p:nvPr/>
-        </p:nvSpPr>
-        <p:spPr>
-          <a:xfrm>
-            <a:off x="548640" y="182880"/>
-            <a:ext cx="10058400" cy="640080"/>
-          </a:xfrm>
-          <a:prstGeom prst="rect">
-            <a:avLst/>
-          </a:prstGeom>
-          <a:noFill/>
-        </p:spPr>
-        <p:txBody>
-          <a:bodyPr wrap="square">
-            <a:spAutoFit/>
-          </a:bodyPr>
-          <a:lstStyle/>
-          <a:p>
-            <a:pPr algn="l">
-              <a:defRPr sz="2600" b="1">
-                <a:solidFill>
-                  <a:srgbClr val="FFFFFF"/>
-                </a:solidFill>
-                <a:latin typeface="Microsoft YaHei"/>
-              </a:defRPr>
-            </a:pPr>
-            <a:r>
-              <a:t>学习路径选择</a:t>
-            </a:r>
-          </a:p>
-        </p:txBody>
-      </p:sp>
-      <p:sp>
-        <p:nvSpPr>
-          <p:cNvPr id="5" name="Rectangle 4"/>
+          <p:cNvPr id="4" name="Rectangle 3"/>
           <p:cNvSpPr/>
           <p:nvPr/>
         </p:nvSpPr>
         <p:spPr>
           <a:xfrm>
-            <a:off x="0" y="1051560"/>
-            <a:ext cx="12191695" cy="25400"/>
-          </a:xfrm>
-          <a:prstGeom prst="rect">
-            <a:avLst/>
-          </a:prstGeom>
-          <a:solidFill>
-            <a:srgbClr val="00D4FF"/>
+            <a:off x="0" y="38100"/>
+            <a:ext cx="91440" cy="914400"/>
+          </a:xfrm>
+          <a:prstGeom prst="rect">
+            <a:avLst/>
+          </a:prstGeom>
+          <a:solidFill>
+            <a:srgbClr val="00C8F0"/>
           </a:solidFill>
           <a:ln>
             <a:noFill/>
@@ -8011,20 +8104,56 @@
       </p:sp>
       <p:sp>
         <p:nvSpPr>
-          <p:cNvPr id="6" name="Rounded Rectangle 5"/>
+          <p:cNvPr id="5" name="TextBox 4"/>
+          <p:cNvSpPr txBox="1"/>
+          <p:nvPr/>
+        </p:nvSpPr>
+        <p:spPr>
+          <a:xfrm>
+            <a:off x="731520" y="137160"/>
+            <a:ext cx="10728655" cy="640080"/>
+          </a:xfrm>
+          <a:prstGeom prst="rect">
+            <a:avLst/>
+          </a:prstGeom>
+          <a:noFill/>
+        </p:spPr>
+        <p:txBody>
+          <a:bodyPr wrap="square">
+            <a:spAutoFit/>
+          </a:bodyPr>
+          <a:lstStyle/>
+          <a:p>
+            <a:pPr algn="l">
+              <a:defRPr sz="2400" b="1">
+                <a:solidFill>
+                  <a:srgbClr val="F0F4FC"/>
+                </a:solidFill>
+                <a:latin typeface="Microsoft YaHei"/>
+              </a:defRPr>
+            </a:pPr>
+            <a:r>
+              <a:t>学习路径选择</a:t>
+            </a:r>
+          </a:p>
+        </p:txBody>
+      </p:sp>
+      <p:sp>
+        <p:nvSpPr>
+          <p:cNvPr id="6" name="Rectangle 5"/>
           <p:cNvSpPr/>
           <p:nvPr/>
         </p:nvSpPr>
         <p:spPr>
           <a:xfrm>
-            <a:off x="365760" y="1371600"/>
-            <a:ext cx="5486400" cy="4846320"/>
-          </a:xfrm>
-          <a:prstGeom prst="roundRect">
-            <a:avLst/>
-          </a:prstGeom>
-          <a:solidFill>
-            <a:srgbClr val="141E33"/>
+            <a:off x="0" y="1078992"/>
+            <a:ext cx="12191695" cy="12700"/>
+          </a:xfrm>
+          <a:prstGeom prst="rect">
+            <a:avLst/>
+          </a:prstGeom>
+          <a:solidFill>
+            <a:srgbClr val="253350"/>
           </a:solidFill>
           <a:ln>
             <a:noFill/>
@@ -8054,20 +8183,20 @@
       </p:sp>
       <p:sp>
         <p:nvSpPr>
-          <p:cNvPr id="7" name="Rectangle 6"/>
+          <p:cNvPr id="7" name="Rounded Rectangle 6"/>
           <p:cNvSpPr/>
           <p:nvPr/>
         </p:nvSpPr>
         <p:spPr>
           <a:xfrm>
-            <a:off x="365760" y="1371600"/>
-            <a:ext cx="5486400" cy="73152"/>
-          </a:xfrm>
-          <a:prstGeom prst="rect">
-            <a:avLst/>
-          </a:prstGeom>
-          <a:solidFill>
-            <a:srgbClr val="00D4FF"/>
+            <a:off x="457200" y="1371600"/>
+            <a:ext cx="5349240" cy="4754880"/>
+          </a:xfrm>
+          <a:prstGeom prst="roundRect">
+            <a:avLst/>
+          </a:prstGeom>
+          <a:solidFill>
+            <a:srgbClr val="161F35"/>
           </a:solidFill>
           <a:ln>
             <a:noFill/>
@@ -8097,56 +8226,20 @@
       </p:sp>
       <p:sp>
         <p:nvSpPr>
-          <p:cNvPr id="8" name="TextBox 7"/>
-          <p:cNvSpPr txBox="1"/>
-          <p:nvPr/>
-        </p:nvSpPr>
-        <p:spPr>
-          <a:xfrm>
-            <a:off x="640080" y="1645920"/>
-            <a:ext cx="4937760" cy="457200"/>
-          </a:xfrm>
-          <a:prstGeom prst="rect">
-            <a:avLst/>
-          </a:prstGeom>
-          <a:noFill/>
-        </p:spPr>
-        <p:txBody>
-          <a:bodyPr wrap="square">
-            <a:spAutoFit/>
-          </a:bodyPr>
-          <a:lstStyle/>
-          <a:p>
-            <a:pPr algn="l">
-              <a:defRPr sz="2000" b="1">
-                <a:solidFill>
-                  <a:srgbClr val="00D4FF"/>
-                </a:solidFill>
-                <a:latin typeface="Microsoft YaHei"/>
-              </a:defRPr>
-            </a:pPr>
-            <a:r>
-              <a:t>🅰️ 零基础速成（8周）</a:t>
-            </a:r>
-          </a:p>
-        </p:txBody>
-      </p:sp>
-      <p:sp>
-        <p:nvSpPr>
-          <p:cNvPr id="9" name="Rectangle 8"/>
+          <p:cNvPr id="8" name="Rectangle 7"/>
           <p:cNvSpPr/>
           <p:nvPr/>
         </p:nvSpPr>
         <p:spPr>
           <a:xfrm>
-            <a:off x="640080" y="2194560"/>
-            <a:ext cx="1371600" cy="38100"/>
-          </a:xfrm>
-          <a:prstGeom prst="rect">
-            <a:avLst/>
-          </a:prstGeom>
-          <a:solidFill>
-            <a:srgbClr val="00D4FF"/>
+            <a:off x="457200" y="1371600"/>
+            <a:ext cx="5349240" cy="38100"/>
+          </a:xfrm>
+          <a:prstGeom prst="rect">
+            <a:avLst/>
+          </a:prstGeom>
+          <a:solidFill>
+            <a:srgbClr val="00C8F0"/>
           </a:solidFill>
           <a:ln>
             <a:noFill/>
@@ -8176,20 +8269,56 @@
       </p:sp>
       <p:sp>
         <p:nvSpPr>
-          <p:cNvPr id="10" name="Oval 9"/>
+          <p:cNvPr id="9" name="TextBox 8"/>
+          <p:cNvSpPr txBox="1"/>
+          <p:nvPr/>
+        </p:nvSpPr>
+        <p:spPr>
+          <a:xfrm>
+            <a:off x="731520" y="1600200"/>
+            <a:ext cx="4754880" cy="411480"/>
+          </a:xfrm>
+          <a:prstGeom prst="rect">
+            <a:avLst/>
+          </a:prstGeom>
+          <a:noFill/>
+        </p:spPr>
+        <p:txBody>
+          <a:bodyPr wrap="square">
+            <a:spAutoFit/>
+          </a:bodyPr>
+          <a:lstStyle/>
+          <a:p>
+            <a:pPr algn="l">
+              <a:defRPr sz="1800" b="1">
+                <a:solidFill>
+                  <a:srgbClr val="00C8F0"/>
+                </a:solidFill>
+                <a:latin typeface="Microsoft YaHei"/>
+              </a:defRPr>
+            </a:pPr>
+            <a:r>
+              <a:t>🅰️ 零基础速成（8周）</a:t>
+            </a:r>
+          </a:p>
+        </p:txBody>
+      </p:sp>
+      <p:sp>
+        <p:nvSpPr>
+          <p:cNvPr id="10" name="Rectangle 9"/>
           <p:cNvSpPr/>
           <p:nvPr/>
         </p:nvSpPr>
         <p:spPr>
           <a:xfrm>
-            <a:off x="731520" y="2542032"/>
-            <a:ext cx="182880" cy="182880"/>
-          </a:xfrm>
-          <a:prstGeom prst="ellipse">
-            <a:avLst/>
-          </a:prstGeom>
-          <a:solidFill>
-            <a:srgbClr val="00D4FF"/>
+            <a:off x="731520" y="2103120"/>
+            <a:ext cx="1097280" cy="25400"/>
+          </a:xfrm>
+          <a:prstGeom prst="rect">
+            <a:avLst/>
+          </a:prstGeom>
+          <a:solidFill>
+            <a:srgbClr val="00C8F0"/>
           </a:solidFill>
           <a:ln>
             <a:noFill/>
@@ -8219,56 +8348,20 @@
       </p:sp>
       <p:sp>
         <p:nvSpPr>
-          <p:cNvPr id="11" name="TextBox 10"/>
-          <p:cNvSpPr txBox="1"/>
-          <p:nvPr/>
-        </p:nvSpPr>
-        <p:spPr>
-          <a:xfrm>
-            <a:off x="1051560" y="2468880"/>
-            <a:ext cx="4572000" cy="502920"/>
-          </a:xfrm>
-          <a:prstGeom prst="rect">
-            <a:avLst/>
-          </a:prstGeom>
-          <a:noFill/>
-        </p:spPr>
-        <p:txBody>
-          <a:bodyPr wrap="square">
-            <a:spAutoFit/>
-          </a:bodyPr>
-          <a:lstStyle/>
-          <a:p>
-            <a:pPr algn="l">
-              <a:defRPr sz="1400" b="0">
-                <a:solidFill>
-                  <a:srgbClr val="CBD5E8"/>
-                </a:solidFill>
-                <a:latin typeface="Microsoft YaHei"/>
-              </a:defRPr>
-            </a:pPr>
-            <a:r>
-              <a:t>快速上手出作品</a:t>
-            </a:r>
-          </a:p>
-        </p:txBody>
-      </p:sp>
-      <p:sp>
-        <p:nvSpPr>
-          <p:cNvPr id="12" name="Oval 11"/>
+          <p:cNvPr id="11" name="Oval 10"/>
           <p:cNvSpPr/>
           <p:nvPr/>
         </p:nvSpPr>
         <p:spPr>
           <a:xfrm>
-            <a:off x="731520" y="3136392"/>
-            <a:ext cx="182880" cy="182880"/>
+            <a:off x="731520" y="2432304"/>
+            <a:ext cx="164592" cy="164592"/>
           </a:xfrm>
           <a:prstGeom prst="ellipse">
             <a:avLst/>
           </a:prstGeom>
           <a:solidFill>
-            <a:srgbClr val="00D4FF"/>
+            <a:srgbClr val="00C8F0"/>
           </a:solidFill>
           <a:ln>
             <a:noFill/>
@@ -8298,14 +8391,14 @@
       </p:sp>
       <p:sp>
         <p:nvSpPr>
-          <p:cNvPr id="13" name="TextBox 12"/>
+          <p:cNvPr id="12" name="TextBox 11"/>
           <p:cNvSpPr txBox="1"/>
           <p:nvPr/>
         </p:nvSpPr>
         <p:spPr>
           <a:xfrm>
-            <a:off x="1051560" y="3063240"/>
-            <a:ext cx="4572000" cy="502920"/>
+            <a:off x="1051560" y="2377440"/>
+            <a:ext cx="4572000" cy="411480"/>
           </a:xfrm>
           <a:prstGeom prst="rect">
             <a:avLst/>
@@ -8321,33 +8414,33 @@
             <a:pPr algn="l">
               <a:defRPr sz="1400" b="0">
                 <a:solidFill>
-                  <a:srgbClr val="CBD5E8"/>
+                  <a:srgbClr val="A0AEC4"/>
                 </a:solidFill>
                 <a:latin typeface="Microsoft YaHei"/>
               </a:defRPr>
             </a:pPr>
             <a:r>
-              <a:t>重点模块：1,2,3,4,6,10,11,12,17</a:t>
-            </a:r>
-          </a:p>
-        </p:txBody>
-      </p:sp>
-      <p:sp>
-        <p:nvSpPr>
-          <p:cNvPr id="14" name="Oval 13"/>
+              <a:t>快速上手出作品</a:t>
+            </a:r>
+          </a:p>
+        </p:txBody>
+      </p:sp>
+      <p:sp>
+        <p:nvSpPr>
+          <p:cNvPr id="13" name="Oval 12"/>
           <p:cNvSpPr/>
           <p:nvPr/>
         </p:nvSpPr>
         <p:spPr>
           <a:xfrm>
-            <a:off x="731520" y="3730752"/>
-            <a:ext cx="182880" cy="182880"/>
+            <a:off x="731520" y="2935224"/>
+            <a:ext cx="164592" cy="164592"/>
           </a:xfrm>
           <a:prstGeom prst="ellipse">
             <a:avLst/>
           </a:prstGeom>
           <a:solidFill>
-            <a:srgbClr val="00D4FF"/>
+            <a:srgbClr val="00C8F0"/>
           </a:solidFill>
           <a:ln>
             <a:noFill/>
@@ -8377,14 +8470,14 @@
       </p:sp>
       <p:sp>
         <p:nvSpPr>
-          <p:cNvPr id="15" name="TextBox 14"/>
+          <p:cNvPr id="14" name="TextBox 13"/>
           <p:cNvSpPr txBox="1"/>
           <p:nvPr/>
         </p:nvSpPr>
         <p:spPr>
           <a:xfrm>
-            <a:off x="1051560" y="3657600"/>
-            <a:ext cx="4572000" cy="502920"/>
+            <a:off x="1051560" y="2880360"/>
+            <a:ext cx="4572000" cy="411480"/>
           </a:xfrm>
           <a:prstGeom prst="rect">
             <a:avLst/>
@@ -8400,33 +8493,33 @@
             <a:pPr algn="l">
               <a:defRPr sz="1400" b="0">
                 <a:solidFill>
-                  <a:srgbClr val="CBD5E8"/>
+                  <a:srgbClr val="A0AEC4"/>
                 </a:solidFill>
                 <a:latin typeface="Microsoft YaHei"/>
               </a:defRPr>
             </a:pPr>
             <a:r>
-              <a:t>适合：想快速入行变现</a:t>
-            </a:r>
-          </a:p>
-        </p:txBody>
-      </p:sp>
-      <p:sp>
-        <p:nvSpPr>
-          <p:cNvPr id="16" name="Rounded Rectangle 15"/>
+              <a:t>重点模块：1,2,3,4,6,10,11,12,17</a:t>
+            </a:r>
+          </a:p>
+        </p:txBody>
+      </p:sp>
+      <p:sp>
+        <p:nvSpPr>
+          <p:cNvPr id="15" name="Oval 14"/>
           <p:cNvSpPr/>
           <p:nvPr/>
         </p:nvSpPr>
         <p:spPr>
           <a:xfrm>
-            <a:off x="6217920" y="1371600"/>
-            <a:ext cx="5486400" cy="4846320"/>
-          </a:xfrm>
-          <a:prstGeom prst="roundRect">
-            <a:avLst/>
-          </a:prstGeom>
-          <a:solidFill>
-            <a:srgbClr val="141E33"/>
+            <a:off x="731520" y="3438144"/>
+            <a:ext cx="164592" cy="164592"/>
+          </a:xfrm>
+          <a:prstGeom prst="ellipse">
+            <a:avLst/>
+          </a:prstGeom>
+          <a:solidFill>
+            <a:srgbClr val="00C8F0"/>
           </a:solidFill>
           <a:ln>
             <a:noFill/>
@@ -8456,20 +8549,56 @@
       </p:sp>
       <p:sp>
         <p:nvSpPr>
-          <p:cNvPr id="17" name="Rectangle 16"/>
+          <p:cNvPr id="16" name="TextBox 15"/>
+          <p:cNvSpPr txBox="1"/>
+          <p:nvPr/>
+        </p:nvSpPr>
+        <p:spPr>
+          <a:xfrm>
+            <a:off x="1051560" y="3383280"/>
+            <a:ext cx="4572000" cy="411480"/>
+          </a:xfrm>
+          <a:prstGeom prst="rect">
+            <a:avLst/>
+          </a:prstGeom>
+          <a:noFill/>
+        </p:spPr>
+        <p:txBody>
+          <a:bodyPr wrap="square">
+            <a:spAutoFit/>
+          </a:bodyPr>
+          <a:lstStyle/>
+          <a:p>
+            <a:pPr algn="l">
+              <a:defRPr sz="1400" b="0">
+                <a:solidFill>
+                  <a:srgbClr val="A0AEC4"/>
+                </a:solidFill>
+                <a:latin typeface="Microsoft YaHei"/>
+              </a:defRPr>
+            </a:pPr>
+            <a:r>
+              <a:t>适合：想快速入行变现</a:t>
+            </a:r>
+          </a:p>
+        </p:txBody>
+      </p:sp>
+      <p:sp>
+        <p:nvSpPr>
+          <p:cNvPr id="17" name="Rounded Rectangle 16"/>
           <p:cNvSpPr/>
           <p:nvPr/>
         </p:nvSpPr>
         <p:spPr>
           <a:xfrm>
-            <a:off x="6217920" y="1371600"/>
-            <a:ext cx="5486400" cy="73152"/>
-          </a:xfrm>
-          <a:prstGeom prst="rect">
-            <a:avLst/>
-          </a:prstGeom>
-          <a:solidFill>
-            <a:srgbClr val="7C3AED"/>
+            <a:off x="6263640" y="1371600"/>
+            <a:ext cx="5349240" cy="4754880"/>
+          </a:xfrm>
+          <a:prstGeom prst="roundRect">
+            <a:avLst/>
+          </a:prstGeom>
+          <a:solidFill>
+            <a:srgbClr val="161F35"/>
           </a:solidFill>
           <a:ln>
             <a:noFill/>
@@ -8499,56 +8628,20 @@
       </p:sp>
       <p:sp>
         <p:nvSpPr>
-          <p:cNvPr id="18" name="TextBox 17"/>
-          <p:cNvSpPr txBox="1"/>
-          <p:nvPr/>
-        </p:nvSpPr>
-        <p:spPr>
-          <a:xfrm>
-            <a:off x="6492240" y="1645920"/>
-            <a:ext cx="4937760" cy="457200"/>
-          </a:xfrm>
-          <a:prstGeom prst="rect">
-            <a:avLst/>
-          </a:prstGeom>
-          <a:noFill/>
-        </p:spPr>
-        <p:txBody>
-          <a:bodyPr wrap="square">
-            <a:spAutoFit/>
-          </a:bodyPr>
-          <a:lstStyle/>
-          <a:p>
-            <a:pPr algn="l">
-              <a:defRPr sz="2000" b="1">
-                <a:solidFill>
-                  <a:srgbClr val="7C3AED"/>
-                </a:solidFill>
-                <a:latin typeface="Microsoft YaHei"/>
-              </a:defRPr>
-            </a:pPr>
-            <a:r>
-              <a:t>🅱️ 专业进阶（16周）</a:t>
-            </a:r>
-          </a:p>
-        </p:txBody>
-      </p:sp>
-      <p:sp>
-        <p:nvSpPr>
-          <p:cNvPr id="19" name="Rectangle 18"/>
+          <p:cNvPr id="18" name="Rectangle 17"/>
           <p:cNvSpPr/>
           <p:nvPr/>
         </p:nvSpPr>
         <p:spPr>
           <a:xfrm>
-            <a:off x="6492240" y="2194560"/>
-            <a:ext cx="1371600" cy="38100"/>
-          </a:xfrm>
-          <a:prstGeom prst="rect">
-            <a:avLst/>
-          </a:prstGeom>
-          <a:solidFill>
-            <a:srgbClr val="7C3AED"/>
+            <a:off x="6263640" y="1371600"/>
+            <a:ext cx="5349240" cy="38100"/>
+          </a:xfrm>
+          <a:prstGeom prst="rect">
+            <a:avLst/>
+          </a:prstGeom>
+          <a:solidFill>
+            <a:srgbClr val="8B5CF6"/>
           </a:solidFill>
           <a:ln>
             <a:noFill/>
@@ -8578,20 +8671,56 @@
       </p:sp>
       <p:sp>
         <p:nvSpPr>
-          <p:cNvPr id="20" name="Oval 19"/>
+          <p:cNvPr id="19" name="TextBox 18"/>
+          <p:cNvSpPr txBox="1"/>
+          <p:nvPr/>
+        </p:nvSpPr>
+        <p:spPr>
+          <a:xfrm>
+            <a:off x="6537960" y="1600200"/>
+            <a:ext cx="4754880" cy="411480"/>
+          </a:xfrm>
+          <a:prstGeom prst="rect">
+            <a:avLst/>
+          </a:prstGeom>
+          <a:noFill/>
+        </p:spPr>
+        <p:txBody>
+          <a:bodyPr wrap="square">
+            <a:spAutoFit/>
+          </a:bodyPr>
+          <a:lstStyle/>
+          <a:p>
+            <a:pPr algn="l">
+              <a:defRPr sz="1800" b="1">
+                <a:solidFill>
+                  <a:srgbClr val="8B5CF6"/>
+                </a:solidFill>
+                <a:latin typeface="Microsoft YaHei"/>
+              </a:defRPr>
+            </a:pPr>
+            <a:r>
+              <a:t>🅱️ 专业进阶（16周）</a:t>
+            </a:r>
+          </a:p>
+        </p:txBody>
+      </p:sp>
+      <p:sp>
+        <p:nvSpPr>
+          <p:cNvPr id="20" name="Rectangle 19"/>
           <p:cNvSpPr/>
           <p:nvPr/>
         </p:nvSpPr>
         <p:spPr>
           <a:xfrm>
-            <a:off x="6583680" y="2542032"/>
-            <a:ext cx="182880" cy="182880"/>
-          </a:xfrm>
-          <a:prstGeom prst="ellipse">
-            <a:avLst/>
-          </a:prstGeom>
-          <a:solidFill>
-            <a:srgbClr val="7C3AED"/>
+            <a:off x="6537960" y="2103120"/>
+            <a:ext cx="1097280" cy="25400"/>
+          </a:xfrm>
+          <a:prstGeom prst="rect">
+            <a:avLst/>
+          </a:prstGeom>
+          <a:solidFill>
+            <a:srgbClr val="8B5CF6"/>
           </a:solidFill>
           <a:ln>
             <a:noFill/>
@@ -8621,56 +8750,20 @@
       </p:sp>
       <p:sp>
         <p:nvSpPr>
-          <p:cNvPr id="21" name="TextBox 20"/>
-          <p:cNvSpPr txBox="1"/>
-          <p:nvPr/>
-        </p:nvSpPr>
-        <p:spPr>
-          <a:xfrm>
-            <a:off x="6903720" y="2468880"/>
-            <a:ext cx="4572000" cy="502920"/>
-          </a:xfrm>
-          <a:prstGeom prst="rect">
-            <a:avLst/>
-          </a:prstGeom>
-          <a:noFill/>
-        </p:spPr>
-        <p:txBody>
-          <a:bodyPr wrap="square">
-            <a:spAutoFit/>
-          </a:bodyPr>
-          <a:lstStyle/>
-          <a:p>
-            <a:pPr algn="l">
-              <a:defRPr sz="1400" b="0">
-                <a:solidFill>
-                  <a:srgbClr val="CBD5E8"/>
-                </a:solidFill>
-                <a:latin typeface="Microsoft YaHei"/>
-              </a:defRPr>
-            </a:pPr>
-            <a:r>
-              <a:t>全面掌握全链路</a:t>
-            </a:r>
-          </a:p>
-        </p:txBody>
-      </p:sp>
-      <p:sp>
-        <p:nvSpPr>
-          <p:cNvPr id="22" name="Oval 21"/>
+          <p:cNvPr id="21" name="Oval 20"/>
           <p:cNvSpPr/>
           <p:nvPr/>
         </p:nvSpPr>
         <p:spPr>
           <a:xfrm>
-            <a:off x="6583680" y="3136392"/>
-            <a:ext cx="182880" cy="182880"/>
+            <a:off x="6537960" y="2432304"/>
+            <a:ext cx="164592" cy="164592"/>
           </a:xfrm>
           <a:prstGeom prst="ellipse">
             <a:avLst/>
           </a:prstGeom>
           <a:solidFill>
-            <a:srgbClr val="7C3AED"/>
+            <a:srgbClr val="8B5CF6"/>
           </a:solidFill>
           <a:ln>
             <a:noFill/>
@@ -8700,14 +8793,14 @@
       </p:sp>
       <p:sp>
         <p:nvSpPr>
-          <p:cNvPr id="23" name="TextBox 22"/>
+          <p:cNvPr id="22" name="TextBox 21"/>
           <p:cNvSpPr txBox="1"/>
           <p:nvPr/>
         </p:nvSpPr>
         <p:spPr>
           <a:xfrm>
-            <a:off x="6903720" y="3063240"/>
-            <a:ext cx="4572000" cy="502920"/>
+            <a:off x="6858000" y="2377440"/>
+            <a:ext cx="4572000" cy="411480"/>
           </a:xfrm>
           <a:prstGeom prst="rect">
             <a:avLst/>
@@ -8723,33 +8816,33 @@
             <a:pPr algn="l">
               <a:defRPr sz="1400" b="0">
                 <a:solidFill>
-                  <a:srgbClr val="CBD5E8"/>
+                  <a:srgbClr val="A0AEC4"/>
                 </a:solidFill>
                 <a:latin typeface="Microsoft YaHei"/>
               </a:defRPr>
             </a:pPr>
             <a:r>
-              <a:t>全部17个模块</a:t>
-            </a:r>
-          </a:p>
-        </p:txBody>
-      </p:sp>
-      <p:sp>
-        <p:nvSpPr>
-          <p:cNvPr id="24" name="Oval 23"/>
+              <a:t>全面掌握全链路</a:t>
+            </a:r>
+          </a:p>
+        </p:txBody>
+      </p:sp>
+      <p:sp>
+        <p:nvSpPr>
+          <p:cNvPr id="23" name="Oval 22"/>
           <p:cNvSpPr/>
           <p:nvPr/>
         </p:nvSpPr>
         <p:spPr>
           <a:xfrm>
-            <a:off x="6583680" y="3730752"/>
-            <a:ext cx="182880" cy="182880"/>
+            <a:off x="6537960" y="2935224"/>
+            <a:ext cx="164592" cy="164592"/>
           </a:xfrm>
           <a:prstGeom prst="ellipse">
             <a:avLst/>
           </a:prstGeom>
           <a:solidFill>
-            <a:srgbClr val="7C3AED"/>
+            <a:srgbClr val="8B5CF6"/>
           </a:solidFill>
           <a:ln>
             <a:noFill/>
@@ -8779,14 +8872,14 @@
       </p:sp>
       <p:sp>
         <p:nvSpPr>
-          <p:cNvPr id="25" name="TextBox 24"/>
+          <p:cNvPr id="24" name="TextBox 23"/>
           <p:cNvSpPr txBox="1"/>
           <p:nvPr/>
         </p:nvSpPr>
         <p:spPr>
           <a:xfrm>
-            <a:off x="6903720" y="3657600"/>
-            <a:ext cx="4572000" cy="502920"/>
+            <a:off x="6858000" y="2880360"/>
+            <a:ext cx="4572000" cy="411480"/>
           </a:xfrm>
           <a:prstGeom prst="rect">
             <a:avLst/>
@@ -8802,33 +8895,33 @@
             <a:pPr algn="l">
               <a:defRPr sz="1400" b="0">
                 <a:solidFill>
-                  <a:srgbClr val="CBD5E8"/>
+                  <a:srgbClr val="A0AEC4"/>
                 </a:solidFill>
                 <a:latin typeface="Microsoft YaHei"/>
               </a:defRPr>
             </a:pPr>
             <a:r>
-              <a:t>适合：追求专业深度</a:t>
-            </a:r>
-          </a:p>
-        </p:txBody>
-      </p:sp>
-      <p:sp>
-        <p:nvSpPr>
-          <p:cNvPr id="26" name="Rectangle 25"/>
+              <a:t>全部17个模块</a:t>
+            </a:r>
+          </a:p>
+        </p:txBody>
+      </p:sp>
+      <p:sp>
+        <p:nvSpPr>
+          <p:cNvPr id="25" name="Oval 24"/>
           <p:cNvSpPr/>
           <p:nvPr/>
         </p:nvSpPr>
         <p:spPr>
           <a:xfrm>
-            <a:off x="0" y="6446520"/>
-            <a:ext cx="12191695" cy="19050"/>
-          </a:xfrm>
-          <a:prstGeom prst="rect">
-            <a:avLst/>
-          </a:prstGeom>
-          <a:solidFill>
-            <a:srgbClr val="2D3B55"/>
+            <a:off x="6537960" y="3438144"/>
+            <a:ext cx="164592" cy="164592"/>
+          </a:xfrm>
+          <a:prstGeom prst="ellipse">
+            <a:avLst/>
+          </a:prstGeom>
+          <a:solidFill>
+            <a:srgbClr val="8B5CF6"/>
           </a:solidFill>
           <a:ln>
             <a:noFill/>
@@ -8858,14 +8951,14 @@
       </p:sp>
       <p:sp>
         <p:nvSpPr>
-          <p:cNvPr id="27" name="TextBox 26"/>
+          <p:cNvPr id="26" name="TextBox 25"/>
           <p:cNvSpPr txBox="1"/>
           <p:nvPr/>
         </p:nvSpPr>
         <p:spPr>
           <a:xfrm>
-            <a:off x="457200" y="6492240"/>
-            <a:ext cx="5486400" cy="274320"/>
+            <a:off x="6858000" y="3383280"/>
+            <a:ext cx="4572000" cy="411480"/>
           </a:xfrm>
           <a:prstGeom prst="rect">
             <a:avLst/>
@@ -8879,16 +8972,59 @@
           <a:lstStyle/>
           <a:p>
             <a:pPr algn="l">
-              <a:defRPr sz="900" b="0">
+              <a:defRPr sz="1400" b="0">
                 <a:solidFill>
-                  <a:srgbClr val="6B7B9E"/>
+                  <a:srgbClr val="A0AEC4"/>
                 </a:solidFill>
                 <a:latin typeface="Microsoft YaHei"/>
               </a:defRPr>
             </a:pPr>
             <a:r>
-              <a:t>模块00：课程导论</a:t>
-            </a:r>
+              <a:t>适合：追求专业深度</a:t>
+            </a:r>
+          </a:p>
+        </p:txBody>
+      </p:sp>
+      <p:sp>
+        <p:nvSpPr>
+          <p:cNvPr id="27" name="Rectangle 26"/>
+          <p:cNvSpPr/>
+          <p:nvPr/>
+        </p:nvSpPr>
+        <p:spPr>
+          <a:xfrm>
+            <a:off x="0" y="6446520"/>
+            <a:ext cx="12191695" cy="12700"/>
+          </a:xfrm>
+          <a:prstGeom prst="rect">
+            <a:avLst/>
+          </a:prstGeom>
+          <a:solidFill>
+            <a:srgbClr val="253350"/>
+          </a:solidFill>
+          <a:ln>
+            <a:noFill/>
+          </a:ln>
+        </p:spPr>
+        <p:style>
+          <a:lnRef idx="1">
+            <a:schemeClr val="accent1"/>
+          </a:lnRef>
+          <a:fillRef idx="3">
+            <a:schemeClr val="accent1"/>
+          </a:fillRef>
+          <a:effectRef idx="2">
+            <a:schemeClr val="accent1"/>
+          </a:effectRef>
+          <a:fontRef idx="minor">
+            <a:schemeClr val="lt1"/>
+          </a:fontRef>
+        </p:style>
+        <p:txBody>
+          <a:bodyPr rtlCol="0" anchor="ctr"/>
+          <a:lstStyle/>
+          <a:p>
+            <a:pPr algn="ctr"/>
           </a:p>
         </p:txBody>
       </p:sp>
@@ -8900,8 +9036,8 @@
         </p:nvSpPr>
         <p:spPr>
           <a:xfrm>
-            <a:off x="10515600" y="6492240"/>
-            <a:ext cx="1371600" cy="274320"/>
+            <a:off x="731520" y="6492240"/>
+            <a:ext cx="4572000" cy="274320"/>
           </a:xfrm>
           <a:prstGeom prst="rect">
             <a:avLst/>
@@ -8914,10 +9050,46 @@
           </a:bodyPr>
           <a:lstStyle/>
           <a:p>
+            <a:pPr algn="l">
+              <a:defRPr sz="900" b="0">
+                <a:solidFill>
+                  <a:srgbClr val="607090"/>
+                </a:solidFill>
+                <a:latin typeface="Microsoft YaHei"/>
+              </a:defRPr>
+            </a:pPr>
+            <a:r>
+              <a:t>模块00 · 课程导论</a:t>
+            </a:r>
+          </a:p>
+        </p:txBody>
+      </p:sp>
+      <p:sp>
+        <p:nvSpPr>
+          <p:cNvPr id="29" name="TextBox 28"/>
+          <p:cNvSpPr txBox="1"/>
+          <p:nvPr/>
+        </p:nvSpPr>
+        <p:spPr>
+          <a:xfrm>
+            <a:off x="10515600" y="6492240"/>
+            <a:ext cx="1371600" cy="274320"/>
+          </a:xfrm>
+          <a:prstGeom prst="rect">
+            <a:avLst/>
+          </a:prstGeom>
+          <a:noFill/>
+        </p:spPr>
+        <p:txBody>
+          <a:bodyPr wrap="square">
+            <a:spAutoFit/>
+          </a:bodyPr>
+          <a:lstStyle/>
+          <a:p>
             <a:pPr algn="r">
               <a:defRPr sz="900" b="0">
                 <a:solidFill>
-                  <a:srgbClr val="6B7B9E"/>
+                  <a:srgbClr val="607090"/>
                 </a:solidFill>
                 <a:latin typeface="Microsoft YaHei"/>
               </a:defRPr>
@@ -8942,7 +9114,7 @@
     <p:bg>
       <p:bgPr>
         <a:solidFill>
-          <a:srgbClr val="0B1120"/>
+          <a:srgbClr val="0A0E1A"/>
         </a:solidFill>
         <a:effectLst/>
       </p:bgPr>
@@ -8963,13 +9135,13 @@
         <p:spPr>
           <a:xfrm>
             <a:off x="0" y="0"/>
-            <a:ext cx="12191695" cy="1051560"/>
-          </a:xfrm>
-          <a:prstGeom prst="rect">
-            <a:avLst/>
-          </a:prstGeom>
-          <a:solidFill>
-            <a:srgbClr val="141E33"/>
+            <a:ext cx="12191695" cy="38100"/>
+          </a:xfrm>
+          <a:prstGeom prst="rect">
+            <a:avLst/>
+          </a:prstGeom>
+          <a:solidFill>
+            <a:srgbClr val="00C8F0"/>
           </a:solidFill>
           <a:ln>
             <a:noFill/>
@@ -9005,14 +9177,14 @@
         </p:nvSpPr>
         <p:spPr>
           <a:xfrm>
-            <a:off x="0" y="0"/>
-            <a:ext cx="109728" cy="1051560"/>
-          </a:xfrm>
-          <a:prstGeom prst="rect">
-            <a:avLst/>
-          </a:prstGeom>
-          <a:solidFill>
-            <a:srgbClr val="00D4FF"/>
+            <a:off x="0" y="38100"/>
+            <a:ext cx="12191695" cy="914400"/>
+          </a:xfrm>
+          <a:prstGeom prst="rect">
+            <a:avLst/>
+          </a:prstGeom>
+          <a:solidFill>
+            <a:srgbClr val="161F35"/>
           </a:solidFill>
           <a:ln>
             <a:noFill/>
@@ -9042,56 +9214,20 @@
       </p:sp>
       <p:sp>
         <p:nvSpPr>
-          <p:cNvPr id="4" name="TextBox 3"/>
-          <p:cNvSpPr txBox="1"/>
-          <p:nvPr/>
-        </p:nvSpPr>
-        <p:spPr>
-          <a:xfrm>
-            <a:off x="548640" y="182880"/>
-            <a:ext cx="10058400" cy="640080"/>
-          </a:xfrm>
-          <a:prstGeom prst="rect">
-            <a:avLst/>
-          </a:prstGeom>
-          <a:noFill/>
-        </p:spPr>
-        <p:txBody>
-          <a:bodyPr wrap="square">
-            <a:spAutoFit/>
-          </a:bodyPr>
-          <a:lstStyle/>
-          <a:p>
-            <a:pPr algn="l">
-              <a:defRPr sz="2600" b="1">
-                <a:solidFill>
-                  <a:srgbClr val="FFFFFF"/>
-                </a:solidFill>
-                <a:latin typeface="Microsoft YaHei"/>
-              </a:defRPr>
-            </a:pPr>
-            <a:r>
-              <a:t>课程学习路线图</a:t>
-            </a:r>
-          </a:p>
-        </p:txBody>
-      </p:sp>
-      <p:sp>
-        <p:nvSpPr>
-          <p:cNvPr id="5" name="Rectangle 4"/>
+          <p:cNvPr id="4" name="Rectangle 3"/>
           <p:cNvSpPr/>
           <p:nvPr/>
         </p:nvSpPr>
         <p:spPr>
           <a:xfrm>
-            <a:off x="0" y="1051560"/>
-            <a:ext cx="12191695" cy="25400"/>
-          </a:xfrm>
-          <a:prstGeom prst="rect">
-            <a:avLst/>
-          </a:prstGeom>
-          <a:solidFill>
-            <a:srgbClr val="00D4FF"/>
+            <a:off x="0" y="38100"/>
+            <a:ext cx="91440" cy="914400"/>
+          </a:xfrm>
+          <a:prstGeom prst="rect">
+            <a:avLst/>
+          </a:prstGeom>
+          <a:solidFill>
+            <a:srgbClr val="00C8F0"/>
           </a:solidFill>
           <a:ln>
             <a:noFill/>
@@ -9121,20 +9257,56 @@
       </p:sp>
       <p:sp>
         <p:nvSpPr>
-          <p:cNvPr id="6" name="Rounded Rectangle 5"/>
+          <p:cNvPr id="5" name="TextBox 4"/>
+          <p:cNvSpPr txBox="1"/>
+          <p:nvPr/>
+        </p:nvSpPr>
+        <p:spPr>
+          <a:xfrm>
+            <a:off x="731520" y="137160"/>
+            <a:ext cx="10728655" cy="640080"/>
+          </a:xfrm>
+          <a:prstGeom prst="rect">
+            <a:avLst/>
+          </a:prstGeom>
+          <a:noFill/>
+        </p:spPr>
+        <p:txBody>
+          <a:bodyPr wrap="square">
+            <a:spAutoFit/>
+          </a:bodyPr>
+          <a:lstStyle/>
+          <a:p>
+            <a:pPr algn="l">
+              <a:defRPr sz="2400" b="1">
+                <a:solidFill>
+                  <a:srgbClr val="F0F4FC"/>
+                </a:solidFill>
+                <a:latin typeface="Microsoft YaHei"/>
+              </a:defRPr>
+            </a:pPr>
+            <a:r>
+              <a:t>课程学习路线图</a:t>
+            </a:r>
+          </a:p>
+        </p:txBody>
+      </p:sp>
+      <p:sp>
+        <p:nvSpPr>
+          <p:cNvPr id="6" name="Rectangle 5"/>
           <p:cNvSpPr/>
           <p:nvPr/>
         </p:nvSpPr>
         <p:spPr>
           <a:xfrm>
-            <a:off x="457200" y="1371600"/>
-            <a:ext cx="11247120" cy="685800"/>
-          </a:xfrm>
-          <a:prstGeom prst="roundRect">
-            <a:avLst/>
-          </a:prstGeom>
-          <a:solidFill>
-            <a:srgbClr val="141E33"/>
+            <a:off x="0" y="1078992"/>
+            <a:ext cx="12191695" cy="12700"/>
+          </a:xfrm>
+          <a:prstGeom prst="rect">
+            <a:avLst/>
+          </a:prstGeom>
+          <a:solidFill>
+            <a:srgbClr val="253350"/>
           </a:solidFill>
           <a:ln>
             <a:noFill/>
@@ -9164,20 +9336,20 @@
       </p:sp>
       <p:sp>
         <p:nvSpPr>
-          <p:cNvPr id="7" name="Rectangle 6"/>
+          <p:cNvPr id="7" name="Rounded Rectangle 6"/>
           <p:cNvSpPr/>
           <p:nvPr/>
         </p:nvSpPr>
         <p:spPr>
           <a:xfrm>
-            <a:off x="457200" y="1371600"/>
-            <a:ext cx="73152" cy="685800"/>
-          </a:xfrm>
-          <a:prstGeom prst="rect">
-            <a:avLst/>
-          </a:prstGeom>
-          <a:solidFill>
-            <a:srgbClr val="00D4FF"/>
+            <a:off x="457200" y="1280160"/>
+            <a:ext cx="11247120" cy="658368"/>
+          </a:xfrm>
+          <a:prstGeom prst="roundRect">
+            <a:avLst/>
+          </a:prstGeom>
+          <a:solidFill>
+            <a:srgbClr val="161F35"/>
           </a:solidFill>
           <a:ln>
             <a:noFill/>
@@ -9207,20 +9379,20 @@
       </p:sp>
       <p:sp>
         <p:nvSpPr>
-          <p:cNvPr id="8" name="Oval 7"/>
+          <p:cNvPr id="8" name="Rectangle 7"/>
           <p:cNvSpPr/>
           <p:nvPr/>
         </p:nvSpPr>
         <p:spPr>
           <a:xfrm>
-            <a:off x="731520" y="1481328"/>
-            <a:ext cx="411480" cy="411480"/>
-          </a:xfrm>
-          <a:prstGeom prst="ellipse">
-            <a:avLst/>
-          </a:prstGeom>
-          <a:solidFill>
-            <a:srgbClr val="00D4FF"/>
+            <a:off x="457200" y="1280160"/>
+            <a:ext cx="54864" cy="658368"/>
+          </a:xfrm>
+          <a:prstGeom prst="rect">
+            <a:avLst/>
+          </a:prstGeom>
+          <a:solidFill>
+            <a:srgbClr val="00C8F0"/>
           </a:solidFill>
           <a:ln>
             <a:noFill/>
@@ -9250,92 +9422,20 @@
       </p:sp>
       <p:sp>
         <p:nvSpPr>
-          <p:cNvPr id="9" name="TextBox 8"/>
-          <p:cNvSpPr txBox="1"/>
-          <p:nvPr/>
-        </p:nvSpPr>
-        <p:spPr>
-          <a:xfrm>
-            <a:off x="731520" y="1481328"/>
-            <a:ext cx="411480" cy="411480"/>
-          </a:xfrm>
-          <a:prstGeom prst="rect">
-            <a:avLst/>
-          </a:prstGeom>
-          <a:noFill/>
-        </p:spPr>
-        <p:txBody>
-          <a:bodyPr wrap="square">
-            <a:spAutoFit/>
-          </a:bodyPr>
-          <a:lstStyle/>
-          <a:p>
-            <a:pPr algn="ctr">
-              <a:defRPr sz="1300" b="1">
-                <a:solidFill>
-                  <a:srgbClr val="FFFFFF"/>
-                </a:solidFill>
-                <a:latin typeface="Microsoft YaHei"/>
-              </a:defRPr>
-            </a:pPr>
-            <a:r>
-              <a:t>1</a:t>
-            </a:r>
-          </a:p>
-        </p:txBody>
-      </p:sp>
-      <p:sp>
-        <p:nvSpPr>
-          <p:cNvPr id="10" name="TextBox 9"/>
-          <p:cNvSpPr txBox="1"/>
-          <p:nvPr/>
-        </p:nvSpPr>
-        <p:spPr>
-          <a:xfrm>
-            <a:off x="1371600" y="1463040"/>
-            <a:ext cx="10058400" cy="502920"/>
-          </a:xfrm>
-          <a:prstGeom prst="rect">
-            <a:avLst/>
-          </a:prstGeom>
-          <a:noFill/>
-        </p:spPr>
-        <p:txBody>
-          <a:bodyPr wrap="square">
-            <a:spAutoFit/>
-          </a:bodyPr>
-          <a:lstStyle/>
-          <a:p>
-            <a:pPr algn="l">
-              <a:defRPr sz="1500" b="0">
-                <a:solidFill>
-                  <a:srgbClr val="CBD5E8"/>
-                </a:solidFill>
-                <a:latin typeface="Microsoft YaHei"/>
-              </a:defRPr>
-            </a:pPr>
-            <a:r>
-              <a:t>Step 1：行业认知 → 理解AI漫剧是什么、市场多大</a:t>
-            </a:r>
-          </a:p>
-        </p:txBody>
-      </p:sp>
-      <p:sp>
-        <p:nvSpPr>
-          <p:cNvPr id="11" name="Rectangle 10"/>
+          <p:cNvPr id="9" name="Oval 8"/>
           <p:cNvSpPr/>
           <p:nvPr/>
         </p:nvSpPr>
         <p:spPr>
           <a:xfrm>
-            <a:off x="914400" y="2057400"/>
-            <a:ext cx="25400" cy="137160"/>
-          </a:xfrm>
-          <a:prstGeom prst="rect">
-            <a:avLst/>
-          </a:prstGeom>
-          <a:solidFill>
-            <a:srgbClr val="00D4FF"/>
+            <a:off x="685800" y="1399032"/>
+            <a:ext cx="365760" cy="365760"/>
+          </a:xfrm>
+          <a:prstGeom prst="ellipse">
+            <a:avLst/>
+          </a:prstGeom>
+          <a:solidFill>
+            <a:srgbClr val="00C8F0"/>
           </a:solidFill>
           <a:ln>
             <a:noFill/>
@@ -9365,20 +9465,92 @@
       </p:sp>
       <p:sp>
         <p:nvSpPr>
-          <p:cNvPr id="12" name="Rounded Rectangle 11"/>
+          <p:cNvPr id="10" name="TextBox 9"/>
+          <p:cNvSpPr txBox="1"/>
+          <p:nvPr/>
+        </p:nvSpPr>
+        <p:spPr>
+          <a:xfrm>
+            <a:off x="685800" y="1399032"/>
+            <a:ext cx="365760" cy="365760"/>
+          </a:xfrm>
+          <a:prstGeom prst="rect">
+            <a:avLst/>
+          </a:prstGeom>
+          <a:noFill/>
+        </p:spPr>
+        <p:txBody>
+          <a:bodyPr wrap="square">
+            <a:spAutoFit/>
+          </a:bodyPr>
+          <a:lstStyle/>
+          <a:p>
+            <a:pPr algn="ctr">
+              <a:defRPr sz="1200" b="1">
+                <a:solidFill>
+                  <a:srgbClr val="F0F4FC"/>
+                </a:solidFill>
+                <a:latin typeface="Microsoft YaHei"/>
+              </a:defRPr>
+            </a:pPr>
+            <a:r>
+              <a:t>1</a:t>
+            </a:r>
+          </a:p>
+        </p:txBody>
+      </p:sp>
+      <p:sp>
+        <p:nvSpPr>
+          <p:cNvPr id="11" name="TextBox 10"/>
+          <p:cNvSpPr txBox="1"/>
+          <p:nvPr/>
+        </p:nvSpPr>
+        <p:spPr>
+          <a:xfrm>
+            <a:off x="1234440" y="1371600"/>
+            <a:ext cx="10058400" cy="457200"/>
+          </a:xfrm>
+          <a:prstGeom prst="rect">
+            <a:avLst/>
+          </a:prstGeom>
+          <a:noFill/>
+        </p:spPr>
+        <p:txBody>
+          <a:bodyPr wrap="square">
+            <a:spAutoFit/>
+          </a:bodyPr>
+          <a:lstStyle/>
+          <a:p>
+            <a:pPr algn="l">
+              <a:defRPr sz="1400" b="0">
+                <a:solidFill>
+                  <a:srgbClr val="A0AEC4"/>
+                </a:solidFill>
+                <a:latin typeface="Microsoft YaHei"/>
+              </a:defRPr>
+            </a:pPr>
+            <a:r>
+              <a:t>Step 1：行业认知 → 理解AI漫剧是什么、市场多大</a:t>
+            </a:r>
+          </a:p>
+        </p:txBody>
+      </p:sp>
+      <p:sp>
+        <p:nvSpPr>
+          <p:cNvPr id="12" name="Rectangle 11"/>
           <p:cNvSpPr/>
           <p:nvPr/>
         </p:nvSpPr>
         <p:spPr>
           <a:xfrm>
-            <a:off x="457200" y="2194560"/>
-            <a:ext cx="11247120" cy="685800"/>
-          </a:xfrm>
-          <a:prstGeom prst="roundRect">
-            <a:avLst/>
-          </a:prstGeom>
-          <a:solidFill>
-            <a:srgbClr val="141E33"/>
+            <a:off x="850392" y="1938528"/>
+            <a:ext cx="19050" cy="146304"/>
+          </a:xfrm>
+          <a:prstGeom prst="rect">
+            <a:avLst/>
+          </a:prstGeom>
+          <a:solidFill>
+            <a:srgbClr val="00C8F0"/>
           </a:solidFill>
           <a:ln>
             <a:noFill/>
@@ -9408,20 +9580,20 @@
       </p:sp>
       <p:sp>
         <p:nvSpPr>
-          <p:cNvPr id="13" name="Rectangle 12"/>
+          <p:cNvPr id="13" name="Rounded Rectangle 12"/>
           <p:cNvSpPr/>
           <p:nvPr/>
         </p:nvSpPr>
         <p:spPr>
           <a:xfrm>
-            <a:off x="457200" y="2194560"/>
-            <a:ext cx="73152" cy="685800"/>
-          </a:xfrm>
-          <a:prstGeom prst="rect">
-            <a:avLst/>
-          </a:prstGeom>
-          <a:solidFill>
-            <a:srgbClr val="7C3AED"/>
+            <a:off x="457200" y="2084832"/>
+            <a:ext cx="11247120" cy="658368"/>
+          </a:xfrm>
+          <a:prstGeom prst="roundRect">
+            <a:avLst/>
+          </a:prstGeom>
+          <a:solidFill>
+            <a:srgbClr val="161F35"/>
           </a:solidFill>
           <a:ln>
             <a:noFill/>
@@ -9451,20 +9623,20 @@
       </p:sp>
       <p:sp>
         <p:nvSpPr>
-          <p:cNvPr id="14" name="Oval 13"/>
+          <p:cNvPr id="14" name="Rectangle 13"/>
           <p:cNvSpPr/>
           <p:nvPr/>
         </p:nvSpPr>
         <p:spPr>
           <a:xfrm>
-            <a:off x="731520" y="2304288"/>
-            <a:ext cx="411480" cy="411480"/>
-          </a:xfrm>
-          <a:prstGeom prst="ellipse">
-            <a:avLst/>
-          </a:prstGeom>
-          <a:solidFill>
-            <a:srgbClr val="7C3AED"/>
+            <a:off x="457200" y="2084832"/>
+            <a:ext cx="54864" cy="658368"/>
+          </a:xfrm>
+          <a:prstGeom prst="rect">
+            <a:avLst/>
+          </a:prstGeom>
+          <a:solidFill>
+            <a:srgbClr val="8B5CF6"/>
           </a:solidFill>
           <a:ln>
             <a:noFill/>
@@ -9494,92 +9666,20 @@
       </p:sp>
       <p:sp>
         <p:nvSpPr>
-          <p:cNvPr id="15" name="TextBox 14"/>
-          <p:cNvSpPr txBox="1"/>
-          <p:nvPr/>
-        </p:nvSpPr>
-        <p:spPr>
-          <a:xfrm>
-            <a:off x="731520" y="2304288"/>
-            <a:ext cx="411480" cy="411480"/>
-          </a:xfrm>
-          <a:prstGeom prst="rect">
-            <a:avLst/>
-          </a:prstGeom>
-          <a:noFill/>
-        </p:spPr>
-        <p:txBody>
-          <a:bodyPr wrap="square">
-            <a:spAutoFit/>
-          </a:bodyPr>
-          <a:lstStyle/>
-          <a:p>
-            <a:pPr algn="ctr">
-              <a:defRPr sz="1300" b="1">
-                <a:solidFill>
-                  <a:srgbClr val="FFFFFF"/>
-                </a:solidFill>
-                <a:latin typeface="Microsoft YaHei"/>
-              </a:defRPr>
-            </a:pPr>
-            <a:r>
-              <a:t>2</a:t>
-            </a:r>
-          </a:p>
-        </p:txBody>
-      </p:sp>
-      <p:sp>
-        <p:nvSpPr>
-          <p:cNvPr id="16" name="TextBox 15"/>
-          <p:cNvSpPr txBox="1"/>
-          <p:nvPr/>
-        </p:nvSpPr>
-        <p:spPr>
-          <a:xfrm>
-            <a:off x="1371600" y="2286000"/>
-            <a:ext cx="10058400" cy="502920"/>
-          </a:xfrm>
-          <a:prstGeom prst="rect">
-            <a:avLst/>
-          </a:prstGeom>
-          <a:noFill/>
-        </p:spPr>
-        <p:txBody>
-          <a:bodyPr wrap="square">
-            <a:spAutoFit/>
-          </a:bodyPr>
-          <a:lstStyle/>
-          <a:p>
-            <a:pPr algn="l">
-              <a:defRPr sz="1500" b="0">
-                <a:solidFill>
-                  <a:srgbClr val="CBD5E8"/>
-                </a:solidFill>
-                <a:latin typeface="Microsoft YaHei"/>
-              </a:defRPr>
-            </a:pPr>
-            <a:r>
-              <a:t>Step 2：创作技能 → 剧本、分镜、提示词工程</a:t>
-            </a:r>
-          </a:p>
-        </p:txBody>
-      </p:sp>
-      <p:sp>
-        <p:nvSpPr>
-          <p:cNvPr id="17" name="Rectangle 16"/>
+          <p:cNvPr id="15" name="Oval 14"/>
           <p:cNvSpPr/>
           <p:nvPr/>
         </p:nvSpPr>
         <p:spPr>
           <a:xfrm>
-            <a:off x="914400" y="2880360"/>
-            <a:ext cx="25400" cy="137160"/>
-          </a:xfrm>
-          <a:prstGeom prst="rect">
-            <a:avLst/>
-          </a:prstGeom>
-          <a:solidFill>
-            <a:srgbClr val="7C3AED"/>
+            <a:off x="685800" y="2203704"/>
+            <a:ext cx="365760" cy="365760"/>
+          </a:xfrm>
+          <a:prstGeom prst="ellipse">
+            <a:avLst/>
+          </a:prstGeom>
+          <a:solidFill>
+            <a:srgbClr val="8B5CF6"/>
           </a:solidFill>
           <a:ln>
             <a:noFill/>
@@ -9609,20 +9709,92 @@
       </p:sp>
       <p:sp>
         <p:nvSpPr>
-          <p:cNvPr id="18" name="Rounded Rectangle 17"/>
+          <p:cNvPr id="16" name="TextBox 15"/>
+          <p:cNvSpPr txBox="1"/>
+          <p:nvPr/>
+        </p:nvSpPr>
+        <p:spPr>
+          <a:xfrm>
+            <a:off x="685800" y="2203704"/>
+            <a:ext cx="365760" cy="365760"/>
+          </a:xfrm>
+          <a:prstGeom prst="rect">
+            <a:avLst/>
+          </a:prstGeom>
+          <a:noFill/>
+        </p:spPr>
+        <p:txBody>
+          <a:bodyPr wrap="square">
+            <a:spAutoFit/>
+          </a:bodyPr>
+          <a:lstStyle/>
+          <a:p>
+            <a:pPr algn="ctr">
+              <a:defRPr sz="1200" b="1">
+                <a:solidFill>
+                  <a:srgbClr val="F0F4FC"/>
+                </a:solidFill>
+                <a:latin typeface="Microsoft YaHei"/>
+              </a:defRPr>
+            </a:pPr>
+            <a:r>
+              <a:t>2</a:t>
+            </a:r>
+          </a:p>
+        </p:txBody>
+      </p:sp>
+      <p:sp>
+        <p:nvSpPr>
+          <p:cNvPr id="17" name="TextBox 16"/>
+          <p:cNvSpPr txBox="1"/>
+          <p:nvPr/>
+        </p:nvSpPr>
+        <p:spPr>
+          <a:xfrm>
+            <a:off x="1234440" y="2176272"/>
+            <a:ext cx="10058400" cy="457200"/>
+          </a:xfrm>
+          <a:prstGeom prst="rect">
+            <a:avLst/>
+          </a:prstGeom>
+          <a:noFill/>
+        </p:spPr>
+        <p:txBody>
+          <a:bodyPr wrap="square">
+            <a:spAutoFit/>
+          </a:bodyPr>
+          <a:lstStyle/>
+          <a:p>
+            <a:pPr algn="l">
+              <a:defRPr sz="1400" b="0">
+                <a:solidFill>
+                  <a:srgbClr val="A0AEC4"/>
+                </a:solidFill>
+                <a:latin typeface="Microsoft YaHei"/>
+              </a:defRPr>
+            </a:pPr>
+            <a:r>
+              <a:t>Step 2：创作技能 → 剧本、分镜、提示词工程</a:t>
+            </a:r>
+          </a:p>
+        </p:txBody>
+      </p:sp>
+      <p:sp>
+        <p:nvSpPr>
+          <p:cNvPr id="18" name="Rectangle 17"/>
           <p:cNvSpPr/>
           <p:nvPr/>
         </p:nvSpPr>
         <p:spPr>
           <a:xfrm>
-            <a:off x="457200" y="3017520"/>
-            <a:ext cx="11247120" cy="685800"/>
-          </a:xfrm>
-          <a:prstGeom prst="roundRect">
-            <a:avLst/>
-          </a:prstGeom>
-          <a:solidFill>
-            <a:srgbClr val="141E33"/>
+            <a:off x="850392" y="2743200"/>
+            <a:ext cx="19050" cy="146304"/>
+          </a:xfrm>
+          <a:prstGeom prst="rect">
+            <a:avLst/>
+          </a:prstGeom>
+          <a:solidFill>
+            <a:srgbClr val="8B5CF6"/>
           </a:solidFill>
           <a:ln>
             <a:noFill/>
@@ -9652,20 +9824,20 @@
       </p:sp>
       <p:sp>
         <p:nvSpPr>
-          <p:cNvPr id="19" name="Rectangle 18"/>
+          <p:cNvPr id="19" name="Rounded Rectangle 18"/>
           <p:cNvSpPr/>
           <p:nvPr/>
         </p:nvSpPr>
         <p:spPr>
           <a:xfrm>
-            <a:off x="457200" y="3017520"/>
-            <a:ext cx="73152" cy="685800"/>
-          </a:xfrm>
-          <a:prstGeom prst="rect">
-            <a:avLst/>
-          </a:prstGeom>
-          <a:solidFill>
-            <a:srgbClr val="FF6B35"/>
+            <a:off x="457200" y="2889504"/>
+            <a:ext cx="11247120" cy="658368"/>
+          </a:xfrm>
+          <a:prstGeom prst="roundRect">
+            <a:avLst/>
+          </a:prstGeom>
+          <a:solidFill>
+            <a:srgbClr val="161F35"/>
           </a:solidFill>
           <a:ln>
             <a:noFill/>
@@ -9695,20 +9867,20 @@
       </p:sp>
       <p:sp>
         <p:nvSpPr>
-          <p:cNvPr id="20" name="Oval 19"/>
+          <p:cNvPr id="20" name="Rectangle 19"/>
           <p:cNvSpPr/>
           <p:nvPr/>
         </p:nvSpPr>
         <p:spPr>
           <a:xfrm>
-            <a:off x="731520" y="3127248"/>
-            <a:ext cx="411480" cy="411480"/>
-          </a:xfrm>
-          <a:prstGeom prst="ellipse">
-            <a:avLst/>
-          </a:prstGeom>
-          <a:solidFill>
-            <a:srgbClr val="FF6B35"/>
+            <a:off x="457200" y="2889504"/>
+            <a:ext cx="54864" cy="658368"/>
+          </a:xfrm>
+          <a:prstGeom prst="rect">
+            <a:avLst/>
+          </a:prstGeom>
+          <a:solidFill>
+            <a:srgbClr val="F07A35"/>
           </a:solidFill>
           <a:ln>
             <a:noFill/>
@@ -9738,92 +9910,20 @@
       </p:sp>
       <p:sp>
         <p:nvSpPr>
-          <p:cNvPr id="21" name="TextBox 20"/>
-          <p:cNvSpPr txBox="1"/>
-          <p:nvPr/>
-        </p:nvSpPr>
-        <p:spPr>
-          <a:xfrm>
-            <a:off x="731520" y="3127248"/>
-            <a:ext cx="411480" cy="411480"/>
-          </a:xfrm>
-          <a:prstGeom prst="rect">
-            <a:avLst/>
-          </a:prstGeom>
-          <a:noFill/>
-        </p:spPr>
-        <p:txBody>
-          <a:bodyPr wrap="square">
-            <a:spAutoFit/>
-          </a:bodyPr>
-          <a:lstStyle/>
-          <a:p>
-            <a:pPr algn="ctr">
-              <a:defRPr sz="1300" b="1">
-                <a:solidFill>
-                  <a:srgbClr val="FFFFFF"/>
-                </a:solidFill>
-                <a:latin typeface="Microsoft YaHei"/>
-              </a:defRPr>
-            </a:pPr>
-            <a:r>
-              <a:t>3</a:t>
-            </a:r>
-          </a:p>
-        </p:txBody>
-      </p:sp>
-      <p:sp>
-        <p:nvSpPr>
-          <p:cNvPr id="22" name="TextBox 21"/>
-          <p:cNvSpPr txBox="1"/>
-          <p:nvPr/>
-        </p:nvSpPr>
-        <p:spPr>
-          <a:xfrm>
-            <a:off x="1371600" y="3108960"/>
-            <a:ext cx="10058400" cy="502920"/>
-          </a:xfrm>
-          <a:prstGeom prst="rect">
-            <a:avLst/>
-          </a:prstGeom>
-          <a:noFill/>
-        </p:spPr>
-        <p:txBody>
-          <a:bodyPr wrap="square">
-            <a:spAutoFit/>
-          </a:bodyPr>
-          <a:lstStyle/>
-          <a:p>
-            <a:pPr algn="l">
-              <a:defRPr sz="1500" b="0">
-                <a:solidFill>
-                  <a:srgbClr val="CBD5E8"/>
-                </a:solidFill>
-                <a:latin typeface="Microsoft YaHei"/>
-              </a:defRPr>
-            </a:pPr>
-            <a:r>
-              <a:t>Step 3：工具精通 → 即梦AI、可灵AI、Seedance等</a:t>
-            </a:r>
-          </a:p>
-        </p:txBody>
-      </p:sp>
-      <p:sp>
-        <p:nvSpPr>
-          <p:cNvPr id="23" name="Rectangle 22"/>
+          <p:cNvPr id="21" name="Oval 20"/>
           <p:cNvSpPr/>
           <p:nvPr/>
         </p:nvSpPr>
         <p:spPr>
           <a:xfrm>
-            <a:off x="914400" y="3703320"/>
-            <a:ext cx="25400" cy="137160"/>
-          </a:xfrm>
-          <a:prstGeom prst="rect">
-            <a:avLst/>
-          </a:prstGeom>
-          <a:solidFill>
-            <a:srgbClr val="FF6B35"/>
+            <a:off x="685800" y="3008376"/>
+            <a:ext cx="365760" cy="365760"/>
+          </a:xfrm>
+          <a:prstGeom prst="ellipse">
+            <a:avLst/>
+          </a:prstGeom>
+          <a:solidFill>
+            <a:srgbClr val="F07A35"/>
           </a:solidFill>
           <a:ln>
             <a:noFill/>
@@ -9853,20 +9953,92 @@
       </p:sp>
       <p:sp>
         <p:nvSpPr>
-          <p:cNvPr id="24" name="Rounded Rectangle 23"/>
+          <p:cNvPr id="22" name="TextBox 21"/>
+          <p:cNvSpPr txBox="1"/>
+          <p:nvPr/>
+        </p:nvSpPr>
+        <p:spPr>
+          <a:xfrm>
+            <a:off x="685800" y="3008376"/>
+            <a:ext cx="365760" cy="365760"/>
+          </a:xfrm>
+          <a:prstGeom prst="rect">
+            <a:avLst/>
+          </a:prstGeom>
+          <a:noFill/>
+        </p:spPr>
+        <p:txBody>
+          <a:bodyPr wrap="square">
+            <a:spAutoFit/>
+          </a:bodyPr>
+          <a:lstStyle/>
+          <a:p>
+            <a:pPr algn="ctr">
+              <a:defRPr sz="1200" b="1">
+                <a:solidFill>
+                  <a:srgbClr val="F0F4FC"/>
+                </a:solidFill>
+                <a:latin typeface="Microsoft YaHei"/>
+              </a:defRPr>
+            </a:pPr>
+            <a:r>
+              <a:t>3</a:t>
+            </a:r>
+          </a:p>
+        </p:txBody>
+      </p:sp>
+      <p:sp>
+        <p:nvSpPr>
+          <p:cNvPr id="23" name="TextBox 22"/>
+          <p:cNvSpPr txBox="1"/>
+          <p:nvPr/>
+        </p:nvSpPr>
+        <p:spPr>
+          <a:xfrm>
+            <a:off x="1234440" y="2980944"/>
+            <a:ext cx="10058400" cy="457200"/>
+          </a:xfrm>
+          <a:prstGeom prst="rect">
+            <a:avLst/>
+          </a:prstGeom>
+          <a:noFill/>
+        </p:spPr>
+        <p:txBody>
+          <a:bodyPr wrap="square">
+            <a:spAutoFit/>
+          </a:bodyPr>
+          <a:lstStyle/>
+          <a:p>
+            <a:pPr algn="l">
+              <a:defRPr sz="1400" b="0">
+                <a:solidFill>
+                  <a:srgbClr val="A0AEC4"/>
+                </a:solidFill>
+                <a:latin typeface="Microsoft YaHei"/>
+              </a:defRPr>
+            </a:pPr>
+            <a:r>
+              <a:t>Step 3：工具精通 → 即梦AI、可灵AI、Seedance等</a:t>
+            </a:r>
+          </a:p>
+        </p:txBody>
+      </p:sp>
+      <p:sp>
+        <p:nvSpPr>
+          <p:cNvPr id="24" name="Rectangle 23"/>
           <p:cNvSpPr/>
           <p:nvPr/>
         </p:nvSpPr>
         <p:spPr>
           <a:xfrm>
-            <a:off x="457200" y="3840480"/>
-            <a:ext cx="11247120" cy="685800"/>
-          </a:xfrm>
-          <a:prstGeom prst="roundRect">
-            <a:avLst/>
-          </a:prstGeom>
-          <a:solidFill>
-            <a:srgbClr val="141E33"/>
+            <a:off x="850392" y="3547872"/>
+            <a:ext cx="19050" cy="146304"/>
+          </a:xfrm>
+          <a:prstGeom prst="rect">
+            <a:avLst/>
+          </a:prstGeom>
+          <a:solidFill>
+            <a:srgbClr val="F07A35"/>
           </a:solidFill>
           <a:ln>
             <a:noFill/>
@@ -9896,20 +10068,20 @@
       </p:sp>
       <p:sp>
         <p:nvSpPr>
-          <p:cNvPr id="25" name="Rectangle 24"/>
+          <p:cNvPr id="25" name="Rounded Rectangle 24"/>
           <p:cNvSpPr/>
           <p:nvPr/>
         </p:nvSpPr>
         <p:spPr>
           <a:xfrm>
-            <a:off x="457200" y="3840480"/>
-            <a:ext cx="73152" cy="685800"/>
-          </a:xfrm>
-          <a:prstGeom prst="rect">
-            <a:avLst/>
-          </a:prstGeom>
-          <a:solidFill>
-            <a:srgbClr val="10B981"/>
+            <a:off x="457200" y="3694176"/>
+            <a:ext cx="11247120" cy="658368"/>
+          </a:xfrm>
+          <a:prstGeom prst="roundRect">
+            <a:avLst/>
+          </a:prstGeom>
+          <a:solidFill>
+            <a:srgbClr val="161F35"/>
           </a:solidFill>
           <a:ln>
             <a:noFill/>
@@ -9939,16 +10111,16 @@
       </p:sp>
       <p:sp>
         <p:nvSpPr>
-          <p:cNvPr id="26" name="Oval 25"/>
+          <p:cNvPr id="26" name="Rectangle 25"/>
           <p:cNvSpPr/>
           <p:nvPr/>
         </p:nvSpPr>
         <p:spPr>
           <a:xfrm>
-            <a:off x="731520" y="3950208"/>
-            <a:ext cx="411480" cy="411480"/>
-          </a:xfrm>
-          <a:prstGeom prst="ellipse">
+            <a:off x="457200" y="3694176"/>
+            <a:ext cx="54864" cy="658368"/>
+          </a:xfrm>
+          <a:prstGeom prst="rect">
             <a:avLst/>
           </a:prstGeom>
           <a:solidFill>
@@ -9982,88 +10154,16 @@
       </p:sp>
       <p:sp>
         <p:nvSpPr>
-          <p:cNvPr id="27" name="TextBox 26"/>
-          <p:cNvSpPr txBox="1"/>
-          <p:nvPr/>
-        </p:nvSpPr>
-        <p:spPr>
-          <a:xfrm>
-            <a:off x="731520" y="3950208"/>
-            <a:ext cx="411480" cy="411480"/>
-          </a:xfrm>
-          <a:prstGeom prst="rect">
-            <a:avLst/>
-          </a:prstGeom>
-          <a:noFill/>
-        </p:spPr>
-        <p:txBody>
-          <a:bodyPr wrap="square">
-            <a:spAutoFit/>
-          </a:bodyPr>
-          <a:lstStyle/>
-          <a:p>
-            <a:pPr algn="ctr">
-              <a:defRPr sz="1300" b="1">
-                <a:solidFill>
-                  <a:srgbClr val="FFFFFF"/>
-                </a:solidFill>
-                <a:latin typeface="Microsoft YaHei"/>
-              </a:defRPr>
-            </a:pPr>
-            <a:r>
-              <a:t>4</a:t>
-            </a:r>
-          </a:p>
-        </p:txBody>
-      </p:sp>
-      <p:sp>
-        <p:nvSpPr>
-          <p:cNvPr id="28" name="TextBox 27"/>
-          <p:cNvSpPr txBox="1"/>
-          <p:nvPr/>
-        </p:nvSpPr>
-        <p:spPr>
-          <a:xfrm>
-            <a:off x="1371600" y="3931920"/>
-            <a:ext cx="10058400" cy="502920"/>
-          </a:xfrm>
-          <a:prstGeom prst="rect">
-            <a:avLst/>
-          </a:prstGeom>
-          <a:noFill/>
-        </p:spPr>
-        <p:txBody>
-          <a:bodyPr wrap="square">
-            <a:spAutoFit/>
-          </a:bodyPr>
-          <a:lstStyle/>
-          <a:p>
-            <a:pPr algn="l">
-              <a:defRPr sz="1500" b="0">
-                <a:solidFill>
-                  <a:srgbClr val="CBD5E8"/>
-                </a:solidFill>
-                <a:latin typeface="Microsoft YaHei"/>
-              </a:defRPr>
-            </a:pPr>
-            <a:r>
-              <a:t>Step 4：后期制作 → 音频、剪辑、调色、成片</a:t>
-            </a:r>
-          </a:p>
-        </p:txBody>
-      </p:sp>
-      <p:sp>
-        <p:nvSpPr>
-          <p:cNvPr id="29" name="Rectangle 28"/>
+          <p:cNvPr id="27" name="Oval 26"/>
           <p:cNvSpPr/>
           <p:nvPr/>
         </p:nvSpPr>
         <p:spPr>
           <a:xfrm>
-            <a:off x="914400" y="4526280"/>
-            <a:ext cx="25400" cy="137160"/>
-          </a:xfrm>
-          <a:prstGeom prst="rect">
+            <a:off x="685800" y="3813048"/>
+            <a:ext cx="365760" cy="365760"/>
+          </a:xfrm>
+          <a:prstGeom prst="ellipse">
             <a:avLst/>
           </a:prstGeom>
           <a:solidFill>
@@ -10097,20 +10197,92 @@
       </p:sp>
       <p:sp>
         <p:nvSpPr>
-          <p:cNvPr id="30" name="Rounded Rectangle 29"/>
+          <p:cNvPr id="28" name="TextBox 27"/>
+          <p:cNvSpPr txBox="1"/>
+          <p:nvPr/>
+        </p:nvSpPr>
+        <p:spPr>
+          <a:xfrm>
+            <a:off x="685800" y="3813048"/>
+            <a:ext cx="365760" cy="365760"/>
+          </a:xfrm>
+          <a:prstGeom prst="rect">
+            <a:avLst/>
+          </a:prstGeom>
+          <a:noFill/>
+        </p:spPr>
+        <p:txBody>
+          <a:bodyPr wrap="square">
+            <a:spAutoFit/>
+          </a:bodyPr>
+          <a:lstStyle/>
+          <a:p>
+            <a:pPr algn="ctr">
+              <a:defRPr sz="1200" b="1">
+                <a:solidFill>
+                  <a:srgbClr val="F0F4FC"/>
+                </a:solidFill>
+                <a:latin typeface="Microsoft YaHei"/>
+              </a:defRPr>
+            </a:pPr>
+            <a:r>
+              <a:t>4</a:t>
+            </a:r>
+          </a:p>
+        </p:txBody>
+      </p:sp>
+      <p:sp>
+        <p:nvSpPr>
+          <p:cNvPr id="29" name="TextBox 28"/>
+          <p:cNvSpPr txBox="1"/>
+          <p:nvPr/>
+        </p:nvSpPr>
+        <p:spPr>
+          <a:xfrm>
+            <a:off x="1234440" y="3785616"/>
+            <a:ext cx="10058400" cy="457200"/>
+          </a:xfrm>
+          <a:prstGeom prst="rect">
+            <a:avLst/>
+          </a:prstGeom>
+          <a:noFill/>
+        </p:spPr>
+        <p:txBody>
+          <a:bodyPr wrap="square">
+            <a:spAutoFit/>
+          </a:bodyPr>
+          <a:lstStyle/>
+          <a:p>
+            <a:pPr algn="l">
+              <a:defRPr sz="1400" b="0">
+                <a:solidFill>
+                  <a:srgbClr val="A0AEC4"/>
+                </a:solidFill>
+                <a:latin typeface="Microsoft YaHei"/>
+              </a:defRPr>
+            </a:pPr>
+            <a:r>
+              <a:t>Step 4：后期制作 → 音频、剪辑、调色、成片</a:t>
+            </a:r>
+          </a:p>
+        </p:txBody>
+      </p:sp>
+      <p:sp>
+        <p:nvSpPr>
+          <p:cNvPr id="30" name="Rectangle 29"/>
           <p:cNvSpPr/>
           <p:nvPr/>
         </p:nvSpPr>
         <p:spPr>
           <a:xfrm>
-            <a:off x="457200" y="4663440"/>
-            <a:ext cx="11247120" cy="685800"/>
-          </a:xfrm>
-          <a:prstGeom prst="roundRect">
-            <a:avLst/>
-          </a:prstGeom>
-          <a:solidFill>
-            <a:srgbClr val="141E33"/>
+            <a:off x="850392" y="4352544"/>
+            <a:ext cx="19050" cy="146304"/>
+          </a:xfrm>
+          <a:prstGeom prst="rect">
+            <a:avLst/>
+          </a:prstGeom>
+          <a:solidFill>
+            <a:srgbClr val="10B981"/>
           </a:solidFill>
           <a:ln>
             <a:noFill/>
@@ -10140,20 +10312,20 @@
       </p:sp>
       <p:sp>
         <p:nvSpPr>
-          <p:cNvPr id="31" name="Rectangle 30"/>
+          <p:cNvPr id="31" name="Rounded Rectangle 30"/>
           <p:cNvSpPr/>
           <p:nvPr/>
         </p:nvSpPr>
         <p:spPr>
           <a:xfrm>
-            <a:off x="457200" y="4663440"/>
-            <a:ext cx="73152" cy="685800"/>
-          </a:xfrm>
-          <a:prstGeom prst="rect">
-            <a:avLst/>
-          </a:prstGeom>
-          <a:solidFill>
-            <a:srgbClr val="F59E0B"/>
+            <a:off x="457200" y="4498848"/>
+            <a:ext cx="11247120" cy="658368"/>
+          </a:xfrm>
+          <a:prstGeom prst="roundRect">
+            <a:avLst/>
+          </a:prstGeom>
+          <a:solidFill>
+            <a:srgbClr val="161F35"/>
           </a:solidFill>
           <a:ln>
             <a:noFill/>
@@ -10183,16 +10355,16 @@
       </p:sp>
       <p:sp>
         <p:nvSpPr>
-          <p:cNvPr id="32" name="Oval 31"/>
+          <p:cNvPr id="32" name="Rectangle 31"/>
           <p:cNvSpPr/>
           <p:nvPr/>
         </p:nvSpPr>
         <p:spPr>
           <a:xfrm>
-            <a:off x="731520" y="4773168"/>
-            <a:ext cx="411480" cy="411480"/>
-          </a:xfrm>
-          <a:prstGeom prst="ellipse">
+            <a:off x="457200" y="4498848"/>
+            <a:ext cx="54864" cy="658368"/>
+          </a:xfrm>
+          <a:prstGeom prst="rect">
             <a:avLst/>
           </a:prstGeom>
           <a:solidFill>
@@ -10226,88 +10398,16 @@
       </p:sp>
       <p:sp>
         <p:nvSpPr>
-          <p:cNvPr id="33" name="TextBox 32"/>
-          <p:cNvSpPr txBox="1"/>
-          <p:nvPr/>
-        </p:nvSpPr>
-        <p:spPr>
-          <a:xfrm>
-            <a:off x="731520" y="4773168"/>
-            <a:ext cx="411480" cy="411480"/>
-          </a:xfrm>
-          <a:prstGeom prst="rect">
-            <a:avLst/>
-          </a:prstGeom>
-          <a:noFill/>
-        </p:spPr>
-        <p:txBody>
-          <a:bodyPr wrap="square">
-            <a:spAutoFit/>
-          </a:bodyPr>
-          <a:lstStyle/>
-          <a:p>
-            <a:pPr algn="ctr">
-              <a:defRPr sz="1300" b="1">
-                <a:solidFill>
-                  <a:srgbClr val="FFFFFF"/>
-                </a:solidFill>
-                <a:latin typeface="Microsoft YaHei"/>
-              </a:defRPr>
-            </a:pPr>
-            <a:r>
-              <a:t>5</a:t>
-            </a:r>
-          </a:p>
-        </p:txBody>
-      </p:sp>
-      <p:sp>
-        <p:nvSpPr>
-          <p:cNvPr id="34" name="TextBox 33"/>
-          <p:cNvSpPr txBox="1"/>
-          <p:nvPr/>
-        </p:nvSpPr>
-        <p:spPr>
-          <a:xfrm>
-            <a:off x="1371600" y="4754880"/>
-            <a:ext cx="10058400" cy="502920"/>
-          </a:xfrm>
-          <a:prstGeom prst="rect">
-            <a:avLst/>
-          </a:prstGeom>
-          <a:noFill/>
-        </p:spPr>
-        <p:txBody>
-          <a:bodyPr wrap="square">
-            <a:spAutoFit/>
-          </a:bodyPr>
-          <a:lstStyle/>
-          <a:p>
-            <a:pPr algn="l">
-              <a:defRPr sz="1500" b="0">
-                <a:solidFill>
-                  <a:srgbClr val="CBD5E8"/>
-                </a:solidFill>
-                <a:latin typeface="Microsoft YaHei"/>
-              </a:defRPr>
-            </a:pPr>
-            <a:r>
-              <a:t>Step 5：商业运营 → 平台分发、变现、合规</a:t>
-            </a:r>
-          </a:p>
-        </p:txBody>
-      </p:sp>
-      <p:sp>
-        <p:nvSpPr>
-          <p:cNvPr id="35" name="Rectangle 34"/>
+          <p:cNvPr id="33" name="Oval 32"/>
           <p:cNvSpPr/>
           <p:nvPr/>
         </p:nvSpPr>
         <p:spPr>
           <a:xfrm>
-            <a:off x="914400" y="5349240"/>
-            <a:ext cx="25400" cy="137160"/>
-          </a:xfrm>
-          <a:prstGeom prst="rect">
+            <a:off x="685800" y="4617720"/>
+            <a:ext cx="365760" cy="365760"/>
+          </a:xfrm>
+          <a:prstGeom prst="ellipse">
             <a:avLst/>
           </a:prstGeom>
           <a:solidFill>
@@ -10341,20 +10441,92 @@
       </p:sp>
       <p:sp>
         <p:nvSpPr>
-          <p:cNvPr id="36" name="Rounded Rectangle 35"/>
+          <p:cNvPr id="34" name="TextBox 33"/>
+          <p:cNvSpPr txBox="1"/>
+          <p:nvPr/>
+        </p:nvSpPr>
+        <p:spPr>
+          <a:xfrm>
+            <a:off x="685800" y="4617720"/>
+            <a:ext cx="365760" cy="365760"/>
+          </a:xfrm>
+          <a:prstGeom prst="rect">
+            <a:avLst/>
+          </a:prstGeom>
+          <a:noFill/>
+        </p:spPr>
+        <p:txBody>
+          <a:bodyPr wrap="square">
+            <a:spAutoFit/>
+          </a:bodyPr>
+          <a:lstStyle/>
+          <a:p>
+            <a:pPr algn="ctr">
+              <a:defRPr sz="1200" b="1">
+                <a:solidFill>
+                  <a:srgbClr val="F0F4FC"/>
+                </a:solidFill>
+                <a:latin typeface="Microsoft YaHei"/>
+              </a:defRPr>
+            </a:pPr>
+            <a:r>
+              <a:t>5</a:t>
+            </a:r>
+          </a:p>
+        </p:txBody>
+      </p:sp>
+      <p:sp>
+        <p:nvSpPr>
+          <p:cNvPr id="35" name="TextBox 34"/>
+          <p:cNvSpPr txBox="1"/>
+          <p:nvPr/>
+        </p:nvSpPr>
+        <p:spPr>
+          <a:xfrm>
+            <a:off x="1234440" y="4590288"/>
+            <a:ext cx="10058400" cy="457200"/>
+          </a:xfrm>
+          <a:prstGeom prst="rect">
+            <a:avLst/>
+          </a:prstGeom>
+          <a:noFill/>
+        </p:spPr>
+        <p:txBody>
+          <a:bodyPr wrap="square">
+            <a:spAutoFit/>
+          </a:bodyPr>
+          <a:lstStyle/>
+          <a:p>
+            <a:pPr algn="l">
+              <a:defRPr sz="1400" b="0">
+                <a:solidFill>
+                  <a:srgbClr val="A0AEC4"/>
+                </a:solidFill>
+                <a:latin typeface="Microsoft YaHei"/>
+              </a:defRPr>
+            </a:pPr>
+            <a:r>
+              <a:t>Step 5：商业运营 → 平台分发、变现、合规</a:t>
+            </a:r>
+          </a:p>
+        </p:txBody>
+      </p:sp>
+      <p:sp>
+        <p:nvSpPr>
+          <p:cNvPr id="36" name="Rectangle 35"/>
           <p:cNvSpPr/>
           <p:nvPr/>
         </p:nvSpPr>
         <p:spPr>
           <a:xfrm>
-            <a:off x="457200" y="5486400"/>
-            <a:ext cx="11247120" cy="685800"/>
-          </a:xfrm>
-          <a:prstGeom prst="roundRect">
-            <a:avLst/>
-          </a:prstGeom>
-          <a:solidFill>
-            <a:srgbClr val="141E33"/>
+            <a:off x="850392" y="5157216"/>
+            <a:ext cx="19050" cy="146304"/>
+          </a:xfrm>
+          <a:prstGeom prst="rect">
+            <a:avLst/>
+          </a:prstGeom>
+          <a:solidFill>
+            <a:srgbClr val="F59E0B"/>
           </a:solidFill>
           <a:ln>
             <a:noFill/>
@@ -10384,20 +10556,20 @@
       </p:sp>
       <p:sp>
         <p:nvSpPr>
-          <p:cNvPr id="37" name="Rectangle 36"/>
+          <p:cNvPr id="37" name="Rounded Rectangle 36"/>
           <p:cNvSpPr/>
           <p:nvPr/>
         </p:nvSpPr>
         <p:spPr>
           <a:xfrm>
-            <a:off x="457200" y="5486400"/>
-            <a:ext cx="73152" cy="685800"/>
-          </a:xfrm>
-          <a:prstGeom prst="rect">
-            <a:avLst/>
-          </a:prstGeom>
-          <a:solidFill>
-            <a:srgbClr val="EF4444"/>
+            <a:off x="457200" y="5303520"/>
+            <a:ext cx="11247120" cy="658368"/>
+          </a:xfrm>
+          <a:prstGeom prst="roundRect">
+            <a:avLst/>
+          </a:prstGeom>
+          <a:solidFill>
+            <a:srgbClr val="161F35"/>
           </a:solidFill>
           <a:ln>
             <a:noFill/>
@@ -10427,20 +10599,20 @@
       </p:sp>
       <p:sp>
         <p:nvSpPr>
-          <p:cNvPr id="38" name="Oval 37"/>
+          <p:cNvPr id="38" name="Rectangle 37"/>
           <p:cNvSpPr/>
           <p:nvPr/>
         </p:nvSpPr>
         <p:spPr>
           <a:xfrm>
-            <a:off x="731520" y="5596128"/>
-            <a:ext cx="411480" cy="411480"/>
-          </a:xfrm>
-          <a:prstGeom prst="ellipse">
-            <a:avLst/>
-          </a:prstGeom>
-          <a:solidFill>
-            <a:srgbClr val="EF4444"/>
+            <a:off x="457200" y="5303520"/>
+            <a:ext cx="54864" cy="658368"/>
+          </a:xfrm>
+          <a:prstGeom prst="rect">
+            <a:avLst/>
+          </a:prstGeom>
+          <a:solidFill>
+            <a:srgbClr val="F43F5E"/>
           </a:solidFill>
           <a:ln>
             <a:noFill/>
@@ -10470,92 +10642,20 @@
       </p:sp>
       <p:sp>
         <p:nvSpPr>
-          <p:cNvPr id="39" name="TextBox 38"/>
-          <p:cNvSpPr txBox="1"/>
-          <p:nvPr/>
-        </p:nvSpPr>
-        <p:spPr>
-          <a:xfrm>
-            <a:off x="731520" y="5596128"/>
-            <a:ext cx="411480" cy="411480"/>
-          </a:xfrm>
-          <a:prstGeom prst="rect">
-            <a:avLst/>
-          </a:prstGeom>
-          <a:noFill/>
-        </p:spPr>
-        <p:txBody>
-          <a:bodyPr wrap="square">
-            <a:spAutoFit/>
-          </a:bodyPr>
-          <a:lstStyle/>
-          <a:p>
-            <a:pPr algn="ctr">
-              <a:defRPr sz="1300" b="1">
-                <a:solidFill>
-                  <a:srgbClr val="FFFFFF"/>
-                </a:solidFill>
-                <a:latin typeface="Microsoft YaHei"/>
-              </a:defRPr>
-            </a:pPr>
-            <a:r>
-              <a:t>6</a:t>
-            </a:r>
-          </a:p>
-        </p:txBody>
-      </p:sp>
-      <p:sp>
-        <p:nvSpPr>
-          <p:cNvPr id="40" name="TextBox 39"/>
-          <p:cNvSpPr txBox="1"/>
-          <p:nvPr/>
-        </p:nvSpPr>
-        <p:spPr>
-          <a:xfrm>
-            <a:off x="1371600" y="5577840"/>
-            <a:ext cx="10058400" cy="502920"/>
-          </a:xfrm>
-          <a:prstGeom prst="rect">
-            <a:avLst/>
-          </a:prstGeom>
-          <a:noFill/>
-        </p:spPr>
-        <p:txBody>
-          <a:bodyPr wrap="square">
-            <a:spAutoFit/>
-          </a:bodyPr>
-          <a:lstStyle/>
-          <a:p>
-            <a:pPr algn="l">
-              <a:defRPr sz="1500" b="0">
-                <a:solidFill>
-                  <a:srgbClr val="CBD5E8"/>
-                </a:solidFill>
-                <a:latin typeface="Microsoft YaHei"/>
-              </a:defRPr>
-            </a:pPr>
-            <a:r>
-              <a:t>Step 6：综合实战 → 从0到1独立完成一集AI漫剧</a:t>
-            </a:r>
-          </a:p>
-        </p:txBody>
-      </p:sp>
-      <p:sp>
-        <p:nvSpPr>
-          <p:cNvPr id="41" name="Rectangle 40"/>
+          <p:cNvPr id="39" name="Oval 38"/>
           <p:cNvSpPr/>
           <p:nvPr/>
         </p:nvSpPr>
         <p:spPr>
           <a:xfrm>
-            <a:off x="0" y="6446520"/>
-            <a:ext cx="12191695" cy="19050"/>
-          </a:xfrm>
-          <a:prstGeom prst="rect">
-            <a:avLst/>
-          </a:prstGeom>
-          <a:solidFill>
-            <a:srgbClr val="2D3B55"/>
+            <a:off x="685800" y="5422392"/>
+            <a:ext cx="365760" cy="365760"/>
+          </a:xfrm>
+          <a:prstGeom prst="ellipse">
+            <a:avLst/>
+          </a:prstGeom>
+          <a:solidFill>
+            <a:srgbClr val="F43F5E"/>
           </a:solidFill>
           <a:ln>
             <a:noFill/>
@@ -10585,14 +10685,14 @@
       </p:sp>
       <p:sp>
         <p:nvSpPr>
-          <p:cNvPr id="42" name="TextBox 41"/>
+          <p:cNvPr id="40" name="TextBox 39"/>
           <p:cNvSpPr txBox="1"/>
           <p:nvPr/>
         </p:nvSpPr>
         <p:spPr>
           <a:xfrm>
-            <a:off x="457200" y="6492240"/>
-            <a:ext cx="5486400" cy="274320"/>
+            <a:off x="685800" y="5422392"/>
+            <a:ext cx="365760" cy="365760"/>
           </a:xfrm>
           <a:prstGeom prst="rect">
             <a:avLst/>
@@ -10605,30 +10705,30 @@
           </a:bodyPr>
           <a:lstStyle/>
           <a:p>
-            <a:pPr algn="l">
-              <a:defRPr sz="900" b="0">
+            <a:pPr algn="ctr">
+              <a:defRPr sz="1200" b="1">
                 <a:solidFill>
-                  <a:srgbClr val="6B7B9E"/>
+                  <a:srgbClr val="F0F4FC"/>
                 </a:solidFill>
                 <a:latin typeface="Microsoft YaHei"/>
               </a:defRPr>
             </a:pPr>
             <a:r>
-              <a:t>模块00：课程导论</a:t>
-            </a:r>
-          </a:p>
-        </p:txBody>
-      </p:sp>
-      <p:sp>
-        <p:nvSpPr>
-          <p:cNvPr id="43" name="TextBox 42"/>
+              <a:t>6</a:t>
+            </a:r>
+          </a:p>
+        </p:txBody>
+      </p:sp>
+      <p:sp>
+        <p:nvSpPr>
+          <p:cNvPr id="41" name="TextBox 40"/>
           <p:cNvSpPr txBox="1"/>
           <p:nvPr/>
         </p:nvSpPr>
         <p:spPr>
           <a:xfrm>
-            <a:off x="10515600" y="6492240"/>
-            <a:ext cx="1371600" cy="274320"/>
+            <a:off x="1234440" y="5394960"/>
+            <a:ext cx="10058400" cy="457200"/>
           </a:xfrm>
           <a:prstGeom prst="rect">
             <a:avLst/>
@@ -10641,10 +10741,125 @@
           </a:bodyPr>
           <a:lstStyle/>
           <a:p>
+            <a:pPr algn="l">
+              <a:defRPr sz="1400" b="0">
+                <a:solidFill>
+                  <a:srgbClr val="A0AEC4"/>
+                </a:solidFill>
+                <a:latin typeface="Microsoft YaHei"/>
+              </a:defRPr>
+            </a:pPr>
+            <a:r>
+              <a:t>Step 6：综合实战 → 从0到1独立完成一集AI漫剧</a:t>
+            </a:r>
+          </a:p>
+        </p:txBody>
+      </p:sp>
+      <p:sp>
+        <p:nvSpPr>
+          <p:cNvPr id="42" name="Rectangle 41"/>
+          <p:cNvSpPr/>
+          <p:nvPr/>
+        </p:nvSpPr>
+        <p:spPr>
+          <a:xfrm>
+            <a:off x="0" y="6446520"/>
+            <a:ext cx="12191695" cy="12700"/>
+          </a:xfrm>
+          <a:prstGeom prst="rect">
+            <a:avLst/>
+          </a:prstGeom>
+          <a:solidFill>
+            <a:srgbClr val="253350"/>
+          </a:solidFill>
+          <a:ln>
+            <a:noFill/>
+          </a:ln>
+        </p:spPr>
+        <p:style>
+          <a:lnRef idx="1">
+            <a:schemeClr val="accent1"/>
+          </a:lnRef>
+          <a:fillRef idx="3">
+            <a:schemeClr val="accent1"/>
+          </a:fillRef>
+          <a:effectRef idx="2">
+            <a:schemeClr val="accent1"/>
+          </a:effectRef>
+          <a:fontRef idx="minor">
+            <a:schemeClr val="lt1"/>
+          </a:fontRef>
+        </p:style>
+        <p:txBody>
+          <a:bodyPr rtlCol="0" anchor="ctr"/>
+          <a:lstStyle/>
+          <a:p>
+            <a:pPr algn="ctr"/>
+          </a:p>
+        </p:txBody>
+      </p:sp>
+      <p:sp>
+        <p:nvSpPr>
+          <p:cNvPr id="43" name="TextBox 42"/>
+          <p:cNvSpPr txBox="1"/>
+          <p:nvPr/>
+        </p:nvSpPr>
+        <p:spPr>
+          <a:xfrm>
+            <a:off x="731520" y="6492240"/>
+            <a:ext cx="4572000" cy="274320"/>
+          </a:xfrm>
+          <a:prstGeom prst="rect">
+            <a:avLst/>
+          </a:prstGeom>
+          <a:noFill/>
+        </p:spPr>
+        <p:txBody>
+          <a:bodyPr wrap="square">
+            <a:spAutoFit/>
+          </a:bodyPr>
+          <a:lstStyle/>
+          <a:p>
+            <a:pPr algn="l">
+              <a:defRPr sz="900" b="0">
+                <a:solidFill>
+                  <a:srgbClr val="607090"/>
+                </a:solidFill>
+                <a:latin typeface="Microsoft YaHei"/>
+              </a:defRPr>
+            </a:pPr>
+            <a:r>
+              <a:t>模块00 · 课程导论</a:t>
+            </a:r>
+          </a:p>
+        </p:txBody>
+      </p:sp>
+      <p:sp>
+        <p:nvSpPr>
+          <p:cNvPr id="44" name="TextBox 43"/>
+          <p:cNvSpPr txBox="1"/>
+          <p:nvPr/>
+        </p:nvSpPr>
+        <p:spPr>
+          <a:xfrm>
+            <a:off x="10515600" y="6492240"/>
+            <a:ext cx="1371600" cy="274320"/>
+          </a:xfrm>
+          <a:prstGeom prst="rect">
+            <a:avLst/>
+          </a:prstGeom>
+          <a:noFill/>
+        </p:spPr>
+        <p:txBody>
+          <a:bodyPr wrap="square">
+            <a:spAutoFit/>
+          </a:bodyPr>
+          <a:lstStyle/>
+          <a:p>
             <a:pPr algn="r">
               <a:defRPr sz="900" b="0">
                 <a:solidFill>
-                  <a:srgbClr val="6B7B9E"/>
+                  <a:srgbClr val="607090"/>
                 </a:solidFill>
                 <a:latin typeface="Microsoft YaHei"/>
               </a:defRPr>
@@ -10669,7 +10884,7 @@
     <p:bg>
       <p:bgPr>
         <a:solidFill>
-          <a:srgbClr val="0B1120"/>
+          <a:srgbClr val="0A0E1A"/>
         </a:solidFill>
         <a:effectLst/>
       </p:bgPr>
@@ -10690,13 +10905,13 @@
         <p:spPr>
           <a:xfrm>
             <a:off x="0" y="0"/>
-            <a:ext cx="12191695" cy="1051560"/>
-          </a:xfrm>
-          <a:prstGeom prst="rect">
-            <a:avLst/>
-          </a:prstGeom>
-          <a:solidFill>
-            <a:srgbClr val="141E33"/>
+            <a:ext cx="12191695" cy="38100"/>
+          </a:xfrm>
+          <a:prstGeom prst="rect">
+            <a:avLst/>
+          </a:prstGeom>
+          <a:solidFill>
+            <a:srgbClr val="00C8F0"/>
           </a:solidFill>
           <a:ln>
             <a:noFill/>
@@ -10732,14 +10947,14 @@
         </p:nvSpPr>
         <p:spPr>
           <a:xfrm>
-            <a:off x="0" y="0"/>
-            <a:ext cx="109728" cy="1051560"/>
-          </a:xfrm>
-          <a:prstGeom prst="rect">
-            <a:avLst/>
-          </a:prstGeom>
-          <a:solidFill>
-            <a:srgbClr val="00D4FF"/>
+            <a:off x="0" y="38100"/>
+            <a:ext cx="12191695" cy="914400"/>
+          </a:xfrm>
+          <a:prstGeom prst="rect">
+            <a:avLst/>
+          </a:prstGeom>
+          <a:solidFill>
+            <a:srgbClr val="161F35"/>
           </a:solidFill>
           <a:ln>
             <a:noFill/>
@@ -10769,56 +10984,20 @@
       </p:sp>
       <p:sp>
         <p:nvSpPr>
-          <p:cNvPr id="4" name="TextBox 3"/>
-          <p:cNvSpPr txBox="1"/>
-          <p:nvPr/>
-        </p:nvSpPr>
-        <p:spPr>
-          <a:xfrm>
-            <a:off x="548640" y="182880"/>
-            <a:ext cx="10058400" cy="640080"/>
-          </a:xfrm>
-          <a:prstGeom prst="rect">
-            <a:avLst/>
-          </a:prstGeom>
-          <a:noFill/>
-        </p:spPr>
-        <p:txBody>
-          <a:bodyPr wrap="square">
-            <a:spAutoFit/>
-          </a:bodyPr>
-          <a:lstStyle/>
-          <a:p>
-            <a:pPr algn="l">
-              <a:defRPr sz="2600" b="1">
-                <a:solidFill>
-                  <a:srgbClr val="FFFFFF"/>
-                </a:solidFill>
-                <a:latin typeface="Microsoft YaHei"/>
-              </a:defRPr>
-            </a:pPr>
-            <a:r>
-              <a:t>核心竞争力</a:t>
-            </a:r>
-          </a:p>
-        </p:txBody>
-      </p:sp>
-      <p:sp>
-        <p:nvSpPr>
-          <p:cNvPr id="5" name="Rectangle 4"/>
+          <p:cNvPr id="4" name="Rectangle 3"/>
           <p:cNvSpPr/>
           <p:nvPr/>
         </p:nvSpPr>
         <p:spPr>
           <a:xfrm>
-            <a:off x="0" y="1051560"/>
-            <a:ext cx="12191695" cy="25400"/>
-          </a:xfrm>
-          <a:prstGeom prst="rect">
-            <a:avLst/>
-          </a:prstGeom>
-          <a:solidFill>
-            <a:srgbClr val="00D4FF"/>
+            <a:off x="0" y="38100"/>
+            <a:ext cx="91440" cy="914400"/>
+          </a:xfrm>
+          <a:prstGeom prst="rect">
+            <a:avLst/>
+          </a:prstGeom>
+          <a:solidFill>
+            <a:srgbClr val="00C8F0"/>
           </a:solidFill>
           <a:ln>
             <a:noFill/>
@@ -10848,20 +11027,56 @@
       </p:sp>
       <p:sp>
         <p:nvSpPr>
-          <p:cNvPr id="6" name="Rounded Rectangle 5"/>
+          <p:cNvPr id="5" name="TextBox 4"/>
+          <p:cNvSpPr txBox="1"/>
+          <p:nvPr/>
+        </p:nvSpPr>
+        <p:spPr>
+          <a:xfrm>
+            <a:off x="731520" y="137160"/>
+            <a:ext cx="10728655" cy="640080"/>
+          </a:xfrm>
+          <a:prstGeom prst="rect">
+            <a:avLst/>
+          </a:prstGeom>
+          <a:noFill/>
+        </p:spPr>
+        <p:txBody>
+          <a:bodyPr wrap="square">
+            <a:spAutoFit/>
+          </a:bodyPr>
+          <a:lstStyle/>
+          <a:p>
+            <a:pPr algn="l">
+              <a:defRPr sz="2400" b="1">
+                <a:solidFill>
+                  <a:srgbClr val="F0F4FC"/>
+                </a:solidFill>
+                <a:latin typeface="Microsoft YaHei"/>
+              </a:defRPr>
+            </a:pPr>
+            <a:r>
+              <a:t>💡 核心竞争力</a:t>
+            </a:r>
+          </a:p>
+        </p:txBody>
+      </p:sp>
+      <p:sp>
+        <p:nvSpPr>
+          <p:cNvPr id="6" name="Rectangle 5"/>
           <p:cNvSpPr/>
           <p:nvPr/>
         </p:nvSpPr>
         <p:spPr>
           <a:xfrm>
-            <a:off x="731520" y="1645920"/>
-            <a:ext cx="10698480" cy="2743200"/>
-          </a:xfrm>
-          <a:prstGeom prst="roundRect">
-            <a:avLst/>
-          </a:prstGeom>
-          <a:solidFill>
-            <a:srgbClr val="141E33"/>
+            <a:off x="0" y="1078992"/>
+            <a:ext cx="12191695" cy="12700"/>
+          </a:xfrm>
+          <a:prstGeom prst="rect">
+            <a:avLst/>
+          </a:prstGeom>
+          <a:solidFill>
+            <a:srgbClr val="253350"/>
           </a:solidFill>
           <a:ln>
             <a:noFill/>
@@ -10891,20 +11106,20 @@
       </p:sp>
       <p:sp>
         <p:nvSpPr>
-          <p:cNvPr id="7" name="Rectangle 6"/>
+          <p:cNvPr id="7" name="Rounded Rectangle 6"/>
           <p:cNvSpPr/>
           <p:nvPr/>
         </p:nvSpPr>
         <p:spPr>
           <a:xfrm>
-            <a:off x="731520" y="1645920"/>
-            <a:ext cx="10698480" cy="91440"/>
-          </a:xfrm>
-          <a:prstGeom prst="rect">
-            <a:avLst/>
-          </a:prstGeom>
-          <a:solidFill>
-            <a:srgbClr val="00D4FF"/>
+            <a:off x="731520" y="1463040"/>
+            <a:ext cx="10698480" cy="2926080"/>
+          </a:xfrm>
+          <a:prstGeom prst="roundRect">
+            <a:avLst/>
+          </a:prstGeom>
+          <a:solidFill>
+            <a:srgbClr val="161F35"/>
           </a:solidFill>
           <a:ln>
             <a:noFill/>
@@ -10940,14 +11155,14 @@
         </p:nvSpPr>
         <p:spPr>
           <a:xfrm>
-            <a:off x="731520" y="1645920"/>
-            <a:ext cx="109728" cy="2743200"/>
-          </a:xfrm>
-          <a:prstGeom prst="rect">
-            <a:avLst/>
-          </a:prstGeom>
-          <a:solidFill>
-            <a:srgbClr val="00D4FF"/>
+            <a:off x="731520" y="1463040"/>
+            <a:ext cx="10698480" cy="50800"/>
+          </a:xfrm>
+          <a:prstGeom prst="rect">
+            <a:avLst/>
+          </a:prstGeom>
+          <a:solidFill>
+            <a:srgbClr val="00C8F0"/>
           </a:solidFill>
           <a:ln>
             <a:noFill/>
@@ -10977,128 +11192,20 @@
       </p:sp>
       <p:sp>
         <p:nvSpPr>
-          <p:cNvPr id="9" name="TextBox 8"/>
-          <p:cNvSpPr txBox="1"/>
-          <p:nvPr/>
-        </p:nvSpPr>
-        <p:spPr>
-          <a:xfrm>
-            <a:off x="1097280" y="1920240"/>
-            <a:ext cx="914400" cy="548640"/>
-          </a:xfrm>
-          <a:prstGeom prst="rect">
-            <a:avLst/>
-          </a:prstGeom>
-          <a:noFill/>
-        </p:spPr>
-        <p:txBody>
-          <a:bodyPr wrap="square">
-            <a:spAutoFit/>
-          </a:bodyPr>
-          <a:lstStyle/>
-          <a:p>
-            <a:pPr algn="l">
-              <a:defRPr sz="3200" b="0">
-                <a:solidFill>
-                  <a:srgbClr val="00D4FF"/>
-                </a:solidFill>
-                <a:latin typeface="Microsoft YaHei"/>
-              </a:defRPr>
-            </a:pPr>
-            <a:r>
-              <a:t>💡</a:t>
-            </a:r>
-          </a:p>
-        </p:txBody>
-      </p:sp>
-      <p:sp>
-        <p:nvSpPr>
-          <p:cNvPr id="10" name="TextBox 9"/>
-          <p:cNvSpPr txBox="1"/>
-          <p:nvPr/>
-        </p:nvSpPr>
-        <p:spPr>
-          <a:xfrm>
-            <a:off x="1645920" y="1965960"/>
-            <a:ext cx="2743200" cy="457200"/>
-          </a:xfrm>
-          <a:prstGeom prst="rect">
-            <a:avLst/>
-          </a:prstGeom>
-          <a:noFill/>
-        </p:spPr>
-        <p:txBody>
-          <a:bodyPr wrap="square">
-            <a:spAutoFit/>
-          </a:bodyPr>
-          <a:lstStyle/>
-          <a:p>
-            <a:pPr algn="l">
-              <a:defRPr sz="1600" b="1">
-                <a:solidFill>
-                  <a:srgbClr val="00D4FF"/>
-                </a:solidFill>
-                <a:latin typeface="Microsoft YaHei"/>
-              </a:defRPr>
-            </a:pPr>
-            <a:r>
-              <a:t>核心要点</a:t>
-            </a:r>
-          </a:p>
-        </p:txBody>
-      </p:sp>
-      <p:sp>
-        <p:nvSpPr>
-          <p:cNvPr id="11" name="TextBox 10"/>
-          <p:cNvSpPr txBox="1"/>
-          <p:nvPr/>
-        </p:nvSpPr>
-        <p:spPr>
-          <a:xfrm>
-            <a:off x="1188720" y="2560320"/>
-            <a:ext cx="9784080" cy="1371600"/>
-          </a:xfrm>
-          <a:prstGeom prst="rect">
-            <a:avLst/>
-          </a:prstGeom>
-          <a:noFill/>
-        </p:spPr>
-        <p:txBody>
-          <a:bodyPr wrap="square">
-            <a:spAutoFit/>
-          </a:bodyPr>
-          <a:lstStyle/>
-          <a:p>
-            <a:pPr algn="l">
-              <a:defRPr sz="2400" b="1">
-                <a:solidFill>
-                  <a:srgbClr val="FFFFFF"/>
-                </a:solidFill>
-                <a:latin typeface="Microsoft YaHei"/>
-              </a:defRPr>
-            </a:pPr>
-            <a:r>
-              <a:t>AI漫剧的核心竞争力 = 创意 × 工具熟练度 × 量产能力</a:t>
-            </a:r>
-          </a:p>
-        </p:txBody>
-      </p:sp>
-      <p:sp>
-        <p:nvSpPr>
-          <p:cNvPr id="12" name="Rounded Rectangle 11"/>
+          <p:cNvPr id="9" name="Rectangle 8"/>
           <p:cNvSpPr/>
           <p:nvPr/>
         </p:nvSpPr>
         <p:spPr>
           <a:xfrm>
-            <a:off x="731520" y="4754880"/>
-            <a:ext cx="10698480" cy="1371600"/>
-          </a:xfrm>
-          <a:prstGeom prst="roundRect">
-            <a:avLst/>
-          </a:prstGeom>
-          <a:solidFill>
-            <a:srgbClr val="1A2842"/>
+            <a:off x="731520" y="1463040"/>
+            <a:ext cx="63500" cy="2926080"/>
+          </a:xfrm>
+          <a:prstGeom prst="rect">
+            <a:avLst/>
+          </a:prstGeom>
+          <a:solidFill>
+            <a:srgbClr val="00C8F0"/>
           </a:solidFill>
           <a:ln>
             <a:noFill/>
@@ -11128,20 +11235,56 @@
       </p:sp>
       <p:sp>
         <p:nvSpPr>
-          <p:cNvPr id="13" name="Rectangle 12"/>
+          <p:cNvPr id="10" name="TextBox 9"/>
+          <p:cNvSpPr txBox="1"/>
+          <p:nvPr/>
+        </p:nvSpPr>
+        <p:spPr>
+          <a:xfrm>
+            <a:off x="1188720" y="1920240"/>
+            <a:ext cx="9784080" cy="2011680"/>
+          </a:xfrm>
+          <a:prstGeom prst="rect">
+            <a:avLst/>
+          </a:prstGeom>
+          <a:noFill/>
+        </p:spPr>
+        <p:txBody>
+          <a:bodyPr wrap="square">
+            <a:spAutoFit/>
+          </a:bodyPr>
+          <a:lstStyle/>
+          <a:p>
+            <a:pPr algn="l">
+              <a:defRPr sz="3200" b="1">
+                <a:solidFill>
+                  <a:srgbClr val="F0F4FC"/>
+                </a:solidFill>
+                <a:latin typeface="Microsoft YaHei"/>
+              </a:defRPr>
+            </a:pPr>
+            <a:r>
+              <a:t>AI漫剧的核心竞争力 = 创意 × 工具熟练度 × 量产能力</a:t>
+            </a:r>
+          </a:p>
+        </p:txBody>
+      </p:sp>
+      <p:sp>
+        <p:nvSpPr>
+          <p:cNvPr id="11" name="Rounded Rectangle 10"/>
           <p:cNvSpPr/>
           <p:nvPr/>
         </p:nvSpPr>
         <p:spPr>
           <a:xfrm>
-            <a:off x="731520" y="4754880"/>
-            <a:ext cx="73152" cy="1371600"/>
-          </a:xfrm>
-          <a:prstGeom prst="rect">
-            <a:avLst/>
-          </a:prstGeom>
-          <a:solidFill>
-            <a:srgbClr val="6B7B9E"/>
+            <a:off x="731520" y="4663440"/>
+            <a:ext cx="10698480" cy="1463040"/>
+          </a:xfrm>
+          <a:prstGeom prst="roundRect">
+            <a:avLst/>
+          </a:prstGeom>
+          <a:solidFill>
+            <a:srgbClr val="1C2842"/>
           </a:solidFill>
           <a:ln>
             <a:noFill/>
@@ -11171,56 +11314,20 @@
       </p:sp>
       <p:sp>
         <p:nvSpPr>
-          <p:cNvPr id="14" name="TextBox 13"/>
-          <p:cNvSpPr txBox="1"/>
-          <p:nvPr/>
-        </p:nvSpPr>
-        <p:spPr>
-          <a:xfrm>
-            <a:off x="1097280" y="4892040"/>
-            <a:ext cx="10058400" cy="1097280"/>
-          </a:xfrm>
-          <a:prstGeom prst="rect">
-            <a:avLst/>
-          </a:prstGeom>
-          <a:noFill/>
-        </p:spPr>
-        <p:txBody>
-          <a:bodyPr wrap="square">
-            <a:spAutoFit/>
-          </a:bodyPr>
-          <a:lstStyle/>
-          <a:p>
-            <a:pPr algn="l">
-              <a:defRPr sz="1400" b="0">
-                <a:solidFill>
-                  <a:srgbClr val="CBD5E8"/>
-                </a:solidFill>
-                <a:latin typeface="Microsoft YaHei"/>
-              </a:defRPr>
-            </a:pPr>
-            <a:r>
-              <a:t>工具会更新迭代，但创意能力和工业化思维是持久的竞争力。本课程不仅教工具操作，更注重培养你的创作思维和生产效率。</a:t>
-            </a:r>
-          </a:p>
-        </p:txBody>
-      </p:sp>
-      <p:sp>
-        <p:nvSpPr>
-          <p:cNvPr id="15" name="Rectangle 14"/>
+          <p:cNvPr id="12" name="Rectangle 11"/>
           <p:cNvSpPr/>
           <p:nvPr/>
         </p:nvSpPr>
         <p:spPr>
           <a:xfrm>
-            <a:off x="0" y="6446520"/>
-            <a:ext cx="12191695" cy="19050"/>
-          </a:xfrm>
-          <a:prstGeom prst="rect">
-            <a:avLst/>
-          </a:prstGeom>
-          <a:solidFill>
-            <a:srgbClr val="2D3B55"/>
+            <a:off x="731520" y="4663440"/>
+            <a:ext cx="50800" cy="1463040"/>
+          </a:xfrm>
+          <a:prstGeom prst="rect">
+            <a:avLst/>
+          </a:prstGeom>
+          <a:solidFill>
+            <a:srgbClr val="607090"/>
           </a:solidFill>
           <a:ln>
             <a:noFill/>
@@ -11250,14 +11357,14 @@
       </p:sp>
       <p:sp>
         <p:nvSpPr>
-          <p:cNvPr id="16" name="TextBox 15"/>
+          <p:cNvPr id="13" name="TextBox 12"/>
           <p:cNvSpPr txBox="1"/>
           <p:nvPr/>
         </p:nvSpPr>
         <p:spPr>
           <a:xfrm>
-            <a:off x="457200" y="6492240"/>
-            <a:ext cx="5486400" cy="274320"/>
+            <a:off x="1188720" y="4800600"/>
+            <a:ext cx="9875520" cy="1188720"/>
           </a:xfrm>
           <a:prstGeom prst="rect">
             <a:avLst/>
@@ -11271,29 +11378,72 @@
           <a:lstStyle/>
           <a:p>
             <a:pPr algn="l">
-              <a:defRPr sz="900" b="0">
+              <a:defRPr sz="1400" b="0">
                 <a:solidFill>
-                  <a:srgbClr val="6B7B9E"/>
+                  <a:srgbClr val="A0AEC4"/>
                 </a:solidFill>
                 <a:latin typeface="Microsoft YaHei"/>
               </a:defRPr>
             </a:pPr>
             <a:r>
-              <a:t>模块00：课程导论</a:t>
-            </a:r>
-          </a:p>
-        </p:txBody>
-      </p:sp>
-      <p:sp>
-        <p:nvSpPr>
-          <p:cNvPr id="17" name="TextBox 16"/>
+              <a:t>工具会更新迭代，但创意能力和工业化思维是持久的竞争力。本课程不仅教工具操作，更注重培养你的创作思维和生产效率。</a:t>
+            </a:r>
+          </a:p>
+        </p:txBody>
+      </p:sp>
+      <p:sp>
+        <p:nvSpPr>
+          <p:cNvPr id="14" name="Rectangle 13"/>
+          <p:cNvSpPr/>
+          <p:nvPr/>
+        </p:nvSpPr>
+        <p:spPr>
+          <a:xfrm>
+            <a:off x="0" y="6446520"/>
+            <a:ext cx="12191695" cy="12700"/>
+          </a:xfrm>
+          <a:prstGeom prst="rect">
+            <a:avLst/>
+          </a:prstGeom>
+          <a:solidFill>
+            <a:srgbClr val="253350"/>
+          </a:solidFill>
+          <a:ln>
+            <a:noFill/>
+          </a:ln>
+        </p:spPr>
+        <p:style>
+          <a:lnRef idx="1">
+            <a:schemeClr val="accent1"/>
+          </a:lnRef>
+          <a:fillRef idx="3">
+            <a:schemeClr val="accent1"/>
+          </a:fillRef>
+          <a:effectRef idx="2">
+            <a:schemeClr val="accent1"/>
+          </a:effectRef>
+          <a:fontRef idx="minor">
+            <a:schemeClr val="lt1"/>
+          </a:fontRef>
+        </p:style>
+        <p:txBody>
+          <a:bodyPr rtlCol="0" anchor="ctr"/>
+          <a:lstStyle/>
+          <a:p>
+            <a:pPr algn="ctr"/>
+          </a:p>
+        </p:txBody>
+      </p:sp>
+      <p:sp>
+        <p:nvSpPr>
+          <p:cNvPr id="15" name="TextBox 14"/>
           <p:cNvSpPr txBox="1"/>
           <p:nvPr/>
         </p:nvSpPr>
         <p:spPr>
           <a:xfrm>
-            <a:off x="10515600" y="6492240"/>
-            <a:ext cx="1371600" cy="274320"/>
+            <a:off x="731520" y="6492240"/>
+            <a:ext cx="4572000" cy="274320"/>
           </a:xfrm>
           <a:prstGeom prst="rect">
             <a:avLst/>
@@ -11306,10 +11456,46 @@
           </a:bodyPr>
           <a:lstStyle/>
           <a:p>
+            <a:pPr algn="l">
+              <a:defRPr sz="900" b="0">
+                <a:solidFill>
+                  <a:srgbClr val="607090"/>
+                </a:solidFill>
+                <a:latin typeface="Microsoft YaHei"/>
+              </a:defRPr>
+            </a:pPr>
+            <a:r>
+              <a:t>模块00 · 课程导论</a:t>
+            </a:r>
+          </a:p>
+        </p:txBody>
+      </p:sp>
+      <p:sp>
+        <p:nvSpPr>
+          <p:cNvPr id="16" name="TextBox 15"/>
+          <p:cNvSpPr txBox="1"/>
+          <p:nvPr/>
+        </p:nvSpPr>
+        <p:spPr>
+          <a:xfrm>
+            <a:off x="10515600" y="6492240"/>
+            <a:ext cx="1371600" cy="274320"/>
+          </a:xfrm>
+          <a:prstGeom prst="rect">
+            <a:avLst/>
+          </a:prstGeom>
+          <a:noFill/>
+        </p:spPr>
+        <p:txBody>
+          <a:bodyPr wrap="square">
+            <a:spAutoFit/>
+          </a:bodyPr>
+          <a:lstStyle/>
+          <a:p>
             <a:pPr algn="r">
               <a:defRPr sz="900" b="0">
                 <a:solidFill>
-                  <a:srgbClr val="6B7B9E"/>
+                  <a:srgbClr val="607090"/>
                 </a:solidFill>
                 <a:latin typeface="Microsoft YaHei"/>
               </a:defRPr>
@@ -11334,7 +11520,7 @@
     <p:bg>
       <p:bgPr>
         <a:solidFill>
-          <a:srgbClr val="0B1120"/>
+          <a:srgbClr val="0A0E1A"/>
         </a:solidFill>
         <a:effectLst/>
       </p:bgPr>
@@ -11354,14 +11540,14 @@
         </p:nvSpPr>
         <p:spPr>
           <a:xfrm>
-            <a:off x="5029200" y="1371600"/>
-            <a:ext cx="2103120" cy="2103120"/>
+            <a:off x="5181447" y="1645920"/>
+            <a:ext cx="1828800" cy="1828800"/>
           </a:xfrm>
           <a:prstGeom prst="ellipse">
             <a:avLst/>
           </a:prstGeom>
           <a:solidFill>
-            <a:srgbClr val="00D4FF"/>
+            <a:srgbClr val="00C8F0"/>
           </a:solidFill>
           <a:ln>
             <a:noFill/>
@@ -11397,8 +11583,8 @@
         </p:nvSpPr>
         <p:spPr>
           <a:xfrm>
-            <a:off x="5029200" y="1645920"/>
-            <a:ext cx="2103120" cy="1645920"/>
+            <a:off x="5181447" y="1920240"/>
+            <a:ext cx="1828800" cy="1371600"/>
           </a:xfrm>
           <a:prstGeom prst="rect">
             <a:avLst/>
@@ -11412,15 +11598,15 @@
           <a:lstStyle/>
           <a:p>
             <a:pPr algn="ctr">
-              <a:defRPr sz="6000" b="0">
+              <a:defRPr sz="5600" b="1">
                 <a:solidFill>
-                  <a:srgbClr val="FFFFFF"/>
+                  <a:srgbClr val="F0F4FC"/>
                 </a:solidFill>
                 <a:latin typeface="Microsoft YaHei"/>
               </a:defRPr>
             </a:pPr>
             <a:r>
-              <a:t>✅</a:t>
+              <a:t>✓</a:t>
             </a:r>
           </a:p>
         </p:txBody>
@@ -11434,7 +11620,7 @@
         <p:spPr>
           <a:xfrm>
             <a:off x="0" y="3840480"/>
-            <a:ext cx="12191695" cy="731520"/>
+            <a:ext cx="12191695" cy="640080"/>
           </a:xfrm>
           <a:prstGeom prst="rect">
             <a:avLst/>
@@ -11450,7 +11636,7 @@
             <a:pPr algn="ctr">
               <a:defRPr sz="3200" b="1">
                 <a:solidFill>
-                  <a:srgbClr val="FFFFFF"/>
+                  <a:srgbClr val="F0F4FC"/>
                 </a:solidFill>
                 <a:latin typeface="Microsoft YaHei"/>
               </a:defRPr>
@@ -11469,14 +11655,14 @@
         </p:nvSpPr>
         <p:spPr>
           <a:xfrm>
-            <a:off x="5029200" y="4754880"/>
-            <a:ext cx="2103120" cy="38100"/>
-          </a:xfrm>
-          <a:prstGeom prst="rect">
-            <a:avLst/>
-          </a:prstGeom>
-          <a:solidFill>
-            <a:srgbClr val="00D4FF"/>
+            <a:off x="5029200" y="4663440"/>
+            <a:ext cx="2103120" cy="25400"/>
+          </a:xfrm>
+          <a:prstGeom prst="rect">
+            <a:avLst/>
+          </a:prstGeom>
+          <a:solidFill>
+            <a:srgbClr val="00C8F0"/>
           </a:solidFill>
           <a:ln>
             <a:noFill/>
@@ -11512,7 +11698,7 @@
         </p:nvSpPr>
         <p:spPr>
           <a:xfrm>
-            <a:off x="0" y="5029200"/>
+            <a:off x="0" y="4937760"/>
             <a:ext cx="12191695" cy="457200"/>
           </a:xfrm>
           <a:prstGeom prst="rect">
@@ -11527,9 +11713,9 @@
           <a:lstStyle/>
           <a:p>
             <a:pPr algn="ctr">
-              <a:defRPr sz="1800" b="0">
+              <a:defRPr sz="1600" b="0">
                 <a:solidFill>
-                  <a:srgbClr val="CBD5E8"/>
+                  <a:srgbClr val="A0AEC4"/>
                 </a:solidFill>
                 <a:latin typeface="Microsoft YaHei"/>
               </a:defRPr>
@@ -11563,9 +11749,9 @@
           <a:lstStyle/>
           <a:p>
             <a:pPr algn="ctr">
-              <a:defRPr sz="1200" b="0">
+              <a:defRPr sz="1100" b="0">
                 <a:solidFill>
-                  <a:srgbClr val="6B7B9E"/>
+                  <a:srgbClr val="607090"/>
                 </a:solidFill>
                 <a:latin typeface="Microsoft YaHei"/>
               </a:defRPr>

--- a/AI漫剧制作课程/PPT课件/00-课程导论.pptx
+++ b/AI漫剧制作课程/PPT课件/00-课程导论.pptx
@@ -3091,7 +3091,7 @@
     <p:bg>
       <p:bgPr>
         <a:solidFill>
-          <a:srgbClr val="08080C"/>
+          <a:srgbClr val="09090F"/>
         </a:solidFill>
         <a:effectLst/>
       </p:bgPr>
@@ -3118,7 +3118,7 @@
             <a:avLst/>
           </a:prstGeom>
           <a:solidFill>
-            <a:srgbClr val="00BFFF"/>
+            <a:srgbClr val="00C0FF"/>
           </a:solidFill>
           <a:ln>
             <a:noFill/>
@@ -3148,56 +3148,20 @@
       </p:sp>
       <p:sp>
         <p:nvSpPr>
-          <p:cNvPr id="3" name="TextBox 2"/>
-          <p:cNvSpPr txBox="1"/>
-          <p:nvPr/>
-        </p:nvSpPr>
-        <p:spPr>
-          <a:xfrm>
-            <a:off x="1097280" y="2286000"/>
-            <a:ext cx="2743200" cy="1828800"/>
-          </a:xfrm>
-          <a:prstGeom prst="rect">
-            <a:avLst/>
-          </a:prstGeom>
-          <a:noFill/>
-        </p:spPr>
-        <p:txBody>
-          <a:bodyPr wrap="square">
-            <a:spAutoFit/>
-          </a:bodyPr>
-          <a:lstStyle/>
-          <a:p>
-            <a:pPr algn="ctr">
-              <a:defRPr sz="9000" b="0">
-                <a:solidFill>
-                  <a:srgbClr val="F0F0F5"/>
-                </a:solidFill>
-                <a:latin typeface="Microsoft YaHei"/>
-              </a:defRPr>
-            </a:pPr>
-            <a:r>
-              <a:t>🎬</a:t>
-            </a:r>
-          </a:p>
-        </p:txBody>
-      </p:sp>
-      <p:sp>
-        <p:nvSpPr>
-          <p:cNvPr id="4" name="Rounded Rectangle 3"/>
+          <p:cNvPr id="3" name="Rectangle 2"/>
           <p:cNvSpPr/>
           <p:nvPr/>
         </p:nvSpPr>
         <p:spPr>
           <a:xfrm>
-            <a:off x="5669280" y="1371600"/>
-            <a:ext cx="5760720" cy="411480"/>
-          </a:xfrm>
-          <a:prstGeom prst="roundRect">
+            <a:off x="5029200" y="0"/>
+            <a:ext cx="137160" cy="6858000"/>
+          </a:xfrm>
+          <a:prstGeom prst="rect">
             <a:avLst/>
           </a:prstGeom>
           <a:solidFill>
-            <a:srgbClr val="00BFFF"/>
+            <a:srgbClr val="0086B2"/>
           </a:solidFill>
           <a:ln>
             <a:noFill/>
@@ -3227,92 +3191,20 @@
       </p:sp>
       <p:sp>
         <p:nvSpPr>
-          <p:cNvPr id="5" name="TextBox 4"/>
-          <p:cNvSpPr txBox="1"/>
-          <p:nvPr/>
-        </p:nvSpPr>
-        <p:spPr>
-          <a:xfrm>
-            <a:off x="5669280" y="1371600"/>
-            <a:ext cx="5760720" cy="411480"/>
-          </a:xfrm>
-          <a:prstGeom prst="rect">
-            <a:avLst/>
-          </a:prstGeom>
-          <a:noFill/>
-        </p:spPr>
-        <p:txBody>
-          <a:bodyPr wrap="square">
-            <a:spAutoFit/>
-          </a:bodyPr>
-          <a:lstStyle/>
-          <a:p>
-            <a:pPr algn="ctr">
-              <a:defRPr sz="1100" b="0">
-                <a:solidFill>
-                  <a:srgbClr val="F0F0F5"/>
-                </a:solidFill>
-                <a:latin typeface="Microsoft YaHei"/>
-              </a:defRPr>
-            </a:pPr>
-            <a:r>
-              <a:t>AI漫剧制作全流程课程 · 2026版</a:t>
-            </a:r>
-          </a:p>
-        </p:txBody>
-      </p:sp>
-      <p:sp>
-        <p:nvSpPr>
-          <p:cNvPr id="6" name="TextBox 5"/>
-          <p:cNvSpPr txBox="1"/>
-          <p:nvPr/>
-        </p:nvSpPr>
-        <p:spPr>
-          <a:xfrm>
-            <a:off x="5669280" y="2377440"/>
-            <a:ext cx="5760720" cy="1645920"/>
-          </a:xfrm>
-          <a:prstGeom prst="rect">
-            <a:avLst/>
-          </a:prstGeom>
-          <a:noFill/>
-        </p:spPr>
-        <p:txBody>
-          <a:bodyPr wrap="square">
-            <a:spAutoFit/>
-          </a:bodyPr>
-          <a:lstStyle/>
-          <a:p>
-            <a:pPr algn="l">
-              <a:defRPr sz="4200" b="1">
-                <a:solidFill>
-                  <a:srgbClr val="F0F0F5"/>
-                </a:solidFill>
-                <a:latin typeface="Microsoft YaHei"/>
-              </a:defRPr>
-            </a:pPr>
-            <a:r>
-              <a:t>AI漫剧制作全流程课程</a:t>
-            </a:r>
-          </a:p>
-        </p:txBody>
-      </p:sp>
-      <p:sp>
-        <p:nvSpPr>
-          <p:cNvPr id="7" name="Rectangle 6"/>
+          <p:cNvPr id="4" name="Rectangle 3"/>
           <p:cNvSpPr/>
           <p:nvPr/>
         </p:nvSpPr>
         <p:spPr>
           <a:xfrm>
-            <a:off x="5669280" y="4114800"/>
-            <a:ext cx="2286000" cy="19050"/>
+            <a:off x="5166360" y="0"/>
+            <a:ext cx="73152" cy="6858000"/>
           </a:xfrm>
           <a:prstGeom prst="rect">
             <a:avLst/>
           </a:prstGeom>
           <a:solidFill>
-            <a:srgbClr val="00BFFF"/>
+            <a:srgbClr val="004C66"/>
           </a:solidFill>
           <a:ln>
             <a:noFill/>
@@ -3342,56 +3234,20 @@
       </p:sp>
       <p:sp>
         <p:nvSpPr>
-          <p:cNvPr id="8" name="TextBox 7"/>
-          <p:cNvSpPr txBox="1"/>
-          <p:nvPr/>
-        </p:nvSpPr>
-        <p:spPr>
-          <a:xfrm>
-            <a:off x="5669280" y="4480560"/>
-            <a:ext cx="5760720" cy="731520"/>
-          </a:xfrm>
-          <a:prstGeom prst="rect">
-            <a:avLst/>
-          </a:prstGeom>
-          <a:noFill/>
-        </p:spPr>
-        <p:txBody>
-          <a:bodyPr wrap="square">
-            <a:spAutoFit/>
-          </a:bodyPr>
-          <a:lstStyle/>
-          <a:p>
-            <a:pPr algn="l">
-              <a:defRPr sz="1600" b="0">
-                <a:solidFill>
-                  <a:srgbClr val="9090A0"/>
-                </a:solidFill>
-                <a:latin typeface="Microsoft YaHei"/>
-              </a:defRPr>
-            </a:pPr>
-            <a:r>
-              <a:t>124课时 · 17个模块 · 从零基础到独立制作完整AI漫剧</a:t>
-            </a:r>
-          </a:p>
-        </p:txBody>
-      </p:sp>
-      <p:sp>
-        <p:nvSpPr>
-          <p:cNvPr id="9" name="Rectangle 8"/>
+          <p:cNvPr id="5" name="Rectangle 4"/>
           <p:cNvSpPr/>
           <p:nvPr/>
         </p:nvSpPr>
         <p:spPr>
           <a:xfrm>
-            <a:off x="5669280" y="5577840"/>
-            <a:ext cx="5760720" cy="548640"/>
+            <a:off x="5239512" y="0"/>
+            <a:ext cx="36576" cy="6858000"/>
           </a:xfrm>
           <a:prstGeom prst="rect">
             <a:avLst/>
           </a:prstGeom>
           <a:solidFill>
-            <a:srgbClr val="111118"/>
+            <a:srgbClr val="002633"/>
           </a:solidFill>
           <a:ln>
             <a:noFill/>
@@ -3421,14 +3277,143 @@
       </p:sp>
       <p:sp>
         <p:nvSpPr>
-          <p:cNvPr id="10" name="TextBox 9"/>
+          <p:cNvPr id="6" name="Rectangle 5"/>
+          <p:cNvSpPr/>
+          <p:nvPr/>
+        </p:nvSpPr>
+        <p:spPr>
+          <a:xfrm>
+            <a:off x="0" y="0"/>
+            <a:ext cx="5276088" cy="25400"/>
+          </a:xfrm>
+          <a:prstGeom prst="rect">
+            <a:avLst/>
+          </a:prstGeom>
+          <a:solidFill>
+            <a:srgbClr val="EEEEF4"/>
+          </a:solidFill>
+          <a:ln>
+            <a:noFill/>
+          </a:ln>
+        </p:spPr>
+        <p:style>
+          <a:lnRef idx="1">
+            <a:schemeClr val="accent1"/>
+          </a:lnRef>
+          <a:fillRef idx="3">
+            <a:schemeClr val="accent1"/>
+          </a:fillRef>
+          <a:effectRef idx="2">
+            <a:schemeClr val="accent1"/>
+          </a:effectRef>
+          <a:fontRef idx="minor">
+            <a:schemeClr val="lt1"/>
+          </a:fontRef>
+        </p:style>
+        <p:txBody>
+          <a:bodyPr rtlCol="0" anchor="ctr"/>
+          <a:lstStyle/>
+          <a:p>
+            <a:pPr algn="ctr"/>
+          </a:p>
+        </p:txBody>
+      </p:sp>
+      <p:sp>
+        <p:nvSpPr>
+          <p:cNvPr id="7" name="Rectangle 6"/>
+          <p:cNvSpPr/>
+          <p:nvPr/>
+        </p:nvSpPr>
+        <p:spPr>
+          <a:xfrm>
+            <a:off x="0" y="6832600"/>
+            <a:ext cx="5276088" cy="25400"/>
+          </a:xfrm>
+          <a:prstGeom prst="rect">
+            <a:avLst/>
+          </a:prstGeom>
+          <a:solidFill>
+            <a:srgbClr val="EEEEF4"/>
+          </a:solidFill>
+          <a:ln>
+            <a:noFill/>
+          </a:ln>
+        </p:spPr>
+        <p:style>
+          <a:lnRef idx="1">
+            <a:schemeClr val="accent1"/>
+          </a:lnRef>
+          <a:fillRef idx="3">
+            <a:schemeClr val="accent1"/>
+          </a:fillRef>
+          <a:effectRef idx="2">
+            <a:schemeClr val="accent1"/>
+          </a:effectRef>
+          <a:fontRef idx="minor">
+            <a:schemeClr val="lt1"/>
+          </a:fontRef>
+        </p:style>
+        <p:txBody>
+          <a:bodyPr rtlCol="0" anchor="ctr"/>
+          <a:lstStyle/>
+          <a:p>
+            <a:pPr algn="ctr"/>
+          </a:p>
+        </p:txBody>
+      </p:sp>
+      <p:sp>
+        <p:nvSpPr>
+          <p:cNvPr id="8" name="Rectangle 7"/>
+          <p:cNvSpPr/>
+          <p:nvPr/>
+        </p:nvSpPr>
+        <p:spPr>
+          <a:xfrm>
+            <a:off x="0" y="0"/>
+            <a:ext cx="25400" cy="6858000"/>
+          </a:xfrm>
+          <a:prstGeom prst="rect">
+            <a:avLst/>
+          </a:prstGeom>
+          <a:solidFill>
+            <a:srgbClr val="EEEEF4"/>
+          </a:solidFill>
+          <a:ln>
+            <a:noFill/>
+          </a:ln>
+        </p:spPr>
+        <p:style>
+          <a:lnRef idx="1">
+            <a:schemeClr val="accent1"/>
+          </a:lnRef>
+          <a:fillRef idx="3">
+            <a:schemeClr val="accent1"/>
+          </a:fillRef>
+          <a:effectRef idx="2">
+            <a:schemeClr val="accent1"/>
+          </a:effectRef>
+          <a:fontRef idx="minor">
+            <a:schemeClr val="lt1"/>
+          </a:fontRef>
+        </p:style>
+        <p:txBody>
+          <a:bodyPr rtlCol="0" anchor="ctr"/>
+          <a:lstStyle/>
+          <a:p>
+            <a:pPr algn="ctr"/>
+          </a:p>
+        </p:txBody>
+      </p:sp>
+      <p:sp>
+        <p:nvSpPr>
+          <p:cNvPr id="9" name="TextBox 8"/>
           <p:cNvSpPr txBox="1"/>
           <p:nvPr/>
         </p:nvSpPr>
         <p:spPr>
           <a:xfrm>
-            <a:off x="5760720" y="5577840"/>
-            <a:ext cx="1371600" cy="548640"/>
+            <a:off x="914400" y="2011680"/>
+            <a:ext cx="3200400" cy="1828800"/>
           </a:xfrm>
           <a:prstGeom prst="rect">
             <a:avLst/>
@@ -3442,16 +3427,59 @@
           <a:lstStyle/>
           <a:p>
             <a:pPr algn="ctr">
-              <a:defRPr sz="1100" b="1">
+              <a:defRPr sz="8000" b="0">
                 <a:solidFill>
-                  <a:srgbClr val="00BFFF"/>
+                  <a:srgbClr val="EEEEF4"/>
                 </a:solidFill>
                 <a:latin typeface="Microsoft YaHei"/>
               </a:defRPr>
             </a:pPr>
             <a:r>
-              <a:t>124课时</a:t>
-            </a:r>
+              <a:t>🎬</a:t>
+            </a:r>
+          </a:p>
+        </p:txBody>
+      </p:sp>
+      <p:sp>
+        <p:nvSpPr>
+          <p:cNvPr id="10" name="Rounded Rectangle 9"/>
+          <p:cNvSpPr/>
+          <p:nvPr/>
+        </p:nvSpPr>
+        <p:spPr>
+          <a:xfrm>
+            <a:off x="5669280" y="1280160"/>
+            <a:ext cx="5760720" cy="438912"/>
+          </a:xfrm>
+          <a:prstGeom prst="roundRect">
+            <a:avLst/>
+          </a:prstGeom>
+          <a:solidFill>
+            <a:srgbClr val="00C0FF"/>
+          </a:solidFill>
+          <a:ln>
+            <a:noFill/>
+          </a:ln>
+        </p:spPr>
+        <p:style>
+          <a:lnRef idx="1">
+            <a:schemeClr val="accent1"/>
+          </a:lnRef>
+          <a:fillRef idx="3">
+            <a:schemeClr val="accent1"/>
+          </a:fillRef>
+          <a:effectRef idx="2">
+            <a:schemeClr val="accent1"/>
+          </a:effectRef>
+          <a:fontRef idx="minor">
+            <a:schemeClr val="lt1"/>
+          </a:fontRef>
+        </p:style>
+        <p:txBody>
+          <a:bodyPr rtlCol="0" anchor="ctr"/>
+          <a:lstStyle/>
+          <a:p>
+            <a:pPr algn="ctr"/>
           </a:p>
         </p:txBody>
       </p:sp>
@@ -3463,8 +3491,8 @@
         </p:nvSpPr>
         <p:spPr>
           <a:xfrm>
-            <a:off x="7200900" y="5577840"/>
-            <a:ext cx="1371600" cy="548640"/>
+            <a:off x="5669280" y="1280160"/>
+            <a:ext cx="5760720" cy="438912"/>
           </a:xfrm>
           <a:prstGeom prst="rect">
             <a:avLst/>
@@ -3478,15 +3506,15 @@
           <a:lstStyle/>
           <a:p>
             <a:pPr algn="ctr">
-              <a:defRPr sz="1100" b="1">
+              <a:defRPr sz="1100" b="0">
                 <a:solidFill>
-                  <a:srgbClr val="00BFFF"/>
+                  <a:srgbClr val="EEEEF4"/>
                 </a:solidFill>
                 <a:latin typeface="Microsoft YaHei"/>
               </a:defRPr>
             </a:pPr>
             <a:r>
-              <a:t>17模块</a:t>
+              <a:t>AI漫剧制作全流程课程 · 2026版</a:t>
             </a:r>
           </a:p>
         </p:txBody>
@@ -3499,8 +3527,8 @@
         </p:nvSpPr>
         <p:spPr>
           <a:xfrm>
-            <a:off x="8641080" y="5577840"/>
-            <a:ext cx="1371600" cy="548640"/>
+            <a:off x="5669280" y="2286000"/>
+            <a:ext cx="5760720" cy="1645920"/>
           </a:xfrm>
           <a:prstGeom prst="rect">
             <a:avLst/>
@@ -3513,30 +3541,245 @@
           </a:bodyPr>
           <a:lstStyle/>
           <a:p>
-            <a:pPr algn="ctr">
-              <a:defRPr sz="1100" b="1">
+            <a:pPr algn="l">
+              <a:defRPr sz="4000" b="1">
                 <a:solidFill>
-                  <a:srgbClr val="00BFFF"/>
+                  <a:srgbClr val="EEEEF4"/>
                 </a:solidFill>
                 <a:latin typeface="Microsoft YaHei"/>
               </a:defRPr>
             </a:pPr>
             <a:r>
-              <a:t>8-16周</a:t>
-            </a:r>
-          </a:p>
-        </p:txBody>
-      </p:sp>
-      <p:sp>
-        <p:nvSpPr>
-          <p:cNvPr id="13" name="TextBox 12"/>
+              <a:t>AI漫剧制作全流程课程</a:t>
+            </a:r>
+          </a:p>
+        </p:txBody>
+      </p:sp>
+      <p:sp>
+        <p:nvSpPr>
+          <p:cNvPr id="13" name="Rectangle 12"/>
+          <p:cNvSpPr/>
+          <p:nvPr/>
+        </p:nvSpPr>
+        <p:spPr>
+          <a:xfrm>
+            <a:off x="5669280" y="4023360"/>
+            <a:ext cx="548641" cy="38100"/>
+          </a:xfrm>
+          <a:prstGeom prst="rect">
+            <a:avLst/>
+          </a:prstGeom>
+          <a:solidFill>
+            <a:srgbClr val="00C0FF"/>
+          </a:solidFill>
+          <a:ln>
+            <a:noFill/>
+          </a:ln>
+        </p:spPr>
+        <p:style>
+          <a:lnRef idx="1">
+            <a:schemeClr val="accent1"/>
+          </a:lnRef>
+          <a:fillRef idx="3">
+            <a:schemeClr val="accent1"/>
+          </a:fillRef>
+          <a:effectRef idx="2">
+            <a:schemeClr val="accent1"/>
+          </a:effectRef>
+          <a:fontRef idx="minor">
+            <a:schemeClr val="lt1"/>
+          </a:fontRef>
+        </p:style>
+        <p:txBody>
+          <a:bodyPr rtlCol="0" anchor="ctr"/>
+          <a:lstStyle/>
+          <a:p>
+            <a:pPr algn="ctr"/>
+          </a:p>
+        </p:txBody>
+      </p:sp>
+      <p:sp>
+        <p:nvSpPr>
+          <p:cNvPr id="14" name="Rectangle 13"/>
+          <p:cNvSpPr/>
+          <p:nvPr/>
+        </p:nvSpPr>
+        <p:spPr>
+          <a:xfrm>
+            <a:off x="6217920" y="4023360"/>
+            <a:ext cx="548640" cy="38100"/>
+          </a:xfrm>
+          <a:prstGeom prst="rect">
+            <a:avLst/>
+          </a:prstGeom>
+          <a:solidFill>
+            <a:srgbClr val="00A3D8"/>
+          </a:solidFill>
+          <a:ln>
+            <a:noFill/>
+          </a:ln>
+        </p:spPr>
+        <p:style>
+          <a:lnRef idx="1">
+            <a:schemeClr val="accent1"/>
+          </a:lnRef>
+          <a:fillRef idx="3">
+            <a:schemeClr val="accent1"/>
+          </a:fillRef>
+          <a:effectRef idx="2">
+            <a:schemeClr val="accent1"/>
+          </a:effectRef>
+          <a:fontRef idx="minor">
+            <a:schemeClr val="lt1"/>
+          </a:fontRef>
+        </p:style>
+        <p:txBody>
+          <a:bodyPr rtlCol="0" anchor="ctr"/>
+          <a:lstStyle/>
+          <a:p>
+            <a:pPr algn="ctr"/>
+          </a:p>
+        </p:txBody>
+      </p:sp>
+      <p:sp>
+        <p:nvSpPr>
+          <p:cNvPr id="15" name="Rectangle 14"/>
+          <p:cNvSpPr/>
+          <p:nvPr/>
+        </p:nvSpPr>
+        <p:spPr>
+          <a:xfrm>
+            <a:off x="6766560" y="4023360"/>
+            <a:ext cx="548640" cy="38100"/>
+          </a:xfrm>
+          <a:prstGeom prst="rect">
+            <a:avLst/>
+          </a:prstGeom>
+          <a:solidFill>
+            <a:srgbClr val="0086B2"/>
+          </a:solidFill>
+          <a:ln>
+            <a:noFill/>
+          </a:ln>
+        </p:spPr>
+        <p:style>
+          <a:lnRef idx="1">
+            <a:schemeClr val="accent1"/>
+          </a:lnRef>
+          <a:fillRef idx="3">
+            <a:schemeClr val="accent1"/>
+          </a:fillRef>
+          <a:effectRef idx="2">
+            <a:schemeClr val="accent1"/>
+          </a:effectRef>
+          <a:fontRef idx="minor">
+            <a:schemeClr val="lt1"/>
+          </a:fontRef>
+        </p:style>
+        <p:txBody>
+          <a:bodyPr rtlCol="0" anchor="ctr"/>
+          <a:lstStyle/>
+          <a:p>
+            <a:pPr algn="ctr"/>
+          </a:p>
+        </p:txBody>
+      </p:sp>
+      <p:sp>
+        <p:nvSpPr>
+          <p:cNvPr id="16" name="Rectangle 15"/>
+          <p:cNvSpPr/>
+          <p:nvPr/>
+        </p:nvSpPr>
+        <p:spPr>
+          <a:xfrm>
+            <a:off x="7315200" y="4023360"/>
+            <a:ext cx="548640" cy="38100"/>
+          </a:xfrm>
+          <a:prstGeom prst="rect">
+            <a:avLst/>
+          </a:prstGeom>
+          <a:solidFill>
+            <a:srgbClr val="00698C"/>
+          </a:solidFill>
+          <a:ln>
+            <a:noFill/>
+          </a:ln>
+        </p:spPr>
+        <p:style>
+          <a:lnRef idx="1">
+            <a:schemeClr val="accent1"/>
+          </a:lnRef>
+          <a:fillRef idx="3">
+            <a:schemeClr val="accent1"/>
+          </a:fillRef>
+          <a:effectRef idx="2">
+            <a:schemeClr val="accent1"/>
+          </a:effectRef>
+          <a:fontRef idx="minor">
+            <a:schemeClr val="lt1"/>
+          </a:fontRef>
+        </p:style>
+        <p:txBody>
+          <a:bodyPr rtlCol="0" anchor="ctr"/>
+          <a:lstStyle/>
+          <a:p>
+            <a:pPr algn="ctr"/>
+          </a:p>
+        </p:txBody>
+      </p:sp>
+      <p:sp>
+        <p:nvSpPr>
+          <p:cNvPr id="17" name="Rectangle 16"/>
+          <p:cNvSpPr/>
+          <p:nvPr/>
+        </p:nvSpPr>
+        <p:spPr>
+          <a:xfrm>
+            <a:off x="7863840" y="4023360"/>
+            <a:ext cx="548640" cy="38100"/>
+          </a:xfrm>
+          <a:prstGeom prst="rect">
+            <a:avLst/>
+          </a:prstGeom>
+          <a:solidFill>
+            <a:srgbClr val="004C66"/>
+          </a:solidFill>
+          <a:ln>
+            <a:noFill/>
+          </a:ln>
+        </p:spPr>
+        <p:style>
+          <a:lnRef idx="1">
+            <a:schemeClr val="accent1"/>
+          </a:lnRef>
+          <a:fillRef idx="3">
+            <a:schemeClr val="accent1"/>
+          </a:fillRef>
+          <a:effectRef idx="2">
+            <a:schemeClr val="accent1"/>
+          </a:effectRef>
+          <a:fontRef idx="minor">
+            <a:schemeClr val="lt1"/>
+          </a:fontRef>
+        </p:style>
+        <p:txBody>
+          <a:bodyPr rtlCol="0" anchor="ctr"/>
+          <a:lstStyle/>
+          <a:p>
+            <a:pPr algn="ctr"/>
+          </a:p>
+        </p:txBody>
+      </p:sp>
+      <p:sp>
+        <p:nvSpPr>
+          <p:cNvPr id="18" name="TextBox 17"/>
           <p:cNvSpPr txBox="1"/>
           <p:nvPr/>
         </p:nvSpPr>
         <p:spPr>
           <a:xfrm>
-            <a:off x="10081260" y="5577840"/>
-            <a:ext cx="1371600" cy="548640"/>
+            <a:off x="5669280" y="4389120"/>
+            <a:ext cx="5760720" cy="731520"/>
           </a:xfrm>
           <a:prstGeom prst="rect">
             <a:avLst/>
@@ -3549,17 +3792,290 @@
           </a:bodyPr>
           <a:lstStyle/>
           <a:p>
-            <a:pPr algn="ctr">
-              <a:defRPr sz="1100" b="1">
+            <a:pPr algn="l">
+              <a:defRPr sz="1600" b="0">
                 <a:solidFill>
-                  <a:srgbClr val="00BFFF"/>
+                  <a:srgbClr val="989AA8"/>
                 </a:solidFill>
                 <a:latin typeface="Microsoft YaHei"/>
               </a:defRPr>
             </a:pPr>
             <a:r>
+              <a:t>124课时 · 17个模块 · 从零基础到独立制作完整AI漫剧</a:t>
+            </a:r>
+          </a:p>
+        </p:txBody>
+      </p:sp>
+      <p:sp>
+        <p:nvSpPr>
+          <p:cNvPr id="19" name="Rounded Rectangle 18"/>
+          <p:cNvSpPr/>
+          <p:nvPr/>
+        </p:nvSpPr>
+        <p:spPr>
+          <a:xfrm>
+            <a:off x="5669280" y="5486400"/>
+            <a:ext cx="5760720" cy="594360"/>
+          </a:xfrm>
+          <a:prstGeom prst="roundRect">
+            <a:avLst/>
+          </a:prstGeom>
+          <a:solidFill>
+            <a:srgbClr val="12141E"/>
+          </a:solidFill>
+          <a:ln>
+            <a:noFill/>
+          </a:ln>
+        </p:spPr>
+        <p:style>
+          <a:lnRef idx="1">
+            <a:schemeClr val="accent1"/>
+          </a:lnRef>
+          <a:fillRef idx="3">
+            <a:schemeClr val="accent1"/>
+          </a:fillRef>
+          <a:effectRef idx="2">
+            <a:schemeClr val="accent1"/>
+          </a:effectRef>
+          <a:fontRef idx="minor">
+            <a:schemeClr val="lt1"/>
+          </a:fontRef>
+        </p:style>
+        <p:txBody>
+          <a:bodyPr rtlCol="0" anchor="ctr"/>
+          <a:lstStyle/>
+          <a:p>
+            <a:pPr algn="ctr"/>
+          </a:p>
+        </p:txBody>
+      </p:sp>
+      <p:sp>
+        <p:nvSpPr>
+          <p:cNvPr id="20" name="TextBox 19"/>
+          <p:cNvSpPr txBox="1"/>
+          <p:nvPr/>
+        </p:nvSpPr>
+        <p:spPr>
+          <a:xfrm>
+            <a:off x="5806440" y="5486400"/>
+            <a:ext cx="1371600" cy="594360"/>
+          </a:xfrm>
+          <a:prstGeom prst="rect">
+            <a:avLst/>
+          </a:prstGeom>
+          <a:noFill/>
+        </p:spPr>
+        <p:txBody>
+          <a:bodyPr wrap="square">
+            <a:spAutoFit/>
+          </a:bodyPr>
+          <a:lstStyle/>
+          <a:p>
+            <a:pPr algn="ctr">
+              <a:defRPr sz="1100" b="1">
+                <a:solidFill>
+                  <a:srgbClr val="00C0FF"/>
+                </a:solidFill>
+                <a:latin typeface="Microsoft YaHei"/>
+              </a:defRPr>
+            </a:pPr>
+            <a:r>
+              <a:t>124课时</a:t>
+            </a:r>
+          </a:p>
+        </p:txBody>
+      </p:sp>
+      <p:sp>
+        <p:nvSpPr>
+          <p:cNvPr id="21" name="TextBox 20"/>
+          <p:cNvSpPr txBox="1"/>
+          <p:nvPr/>
+        </p:nvSpPr>
+        <p:spPr>
+          <a:xfrm>
+            <a:off x="7246620" y="5486400"/>
+            <a:ext cx="1371600" cy="594360"/>
+          </a:xfrm>
+          <a:prstGeom prst="rect">
+            <a:avLst/>
+          </a:prstGeom>
+          <a:noFill/>
+        </p:spPr>
+        <p:txBody>
+          <a:bodyPr wrap="square">
+            <a:spAutoFit/>
+          </a:bodyPr>
+          <a:lstStyle/>
+          <a:p>
+            <a:pPr algn="ctr">
+              <a:defRPr sz="1100" b="1">
+                <a:solidFill>
+                  <a:srgbClr val="00C0FF"/>
+                </a:solidFill>
+                <a:latin typeface="Microsoft YaHei"/>
+              </a:defRPr>
+            </a:pPr>
+            <a:r>
+              <a:t>17模块</a:t>
+            </a:r>
+          </a:p>
+        </p:txBody>
+      </p:sp>
+      <p:sp>
+        <p:nvSpPr>
+          <p:cNvPr id="22" name="TextBox 21"/>
+          <p:cNvSpPr txBox="1"/>
+          <p:nvPr/>
+        </p:nvSpPr>
+        <p:spPr>
+          <a:xfrm>
+            <a:off x="8686800" y="5486400"/>
+            <a:ext cx="1371600" cy="594360"/>
+          </a:xfrm>
+          <a:prstGeom prst="rect">
+            <a:avLst/>
+          </a:prstGeom>
+          <a:noFill/>
+        </p:spPr>
+        <p:txBody>
+          <a:bodyPr wrap="square">
+            <a:spAutoFit/>
+          </a:bodyPr>
+          <a:lstStyle/>
+          <a:p>
+            <a:pPr algn="ctr">
+              <a:defRPr sz="1100" b="1">
+                <a:solidFill>
+                  <a:srgbClr val="00C0FF"/>
+                </a:solidFill>
+                <a:latin typeface="Microsoft YaHei"/>
+              </a:defRPr>
+            </a:pPr>
+            <a:r>
+              <a:t>8-16周</a:t>
+            </a:r>
+          </a:p>
+        </p:txBody>
+      </p:sp>
+      <p:sp>
+        <p:nvSpPr>
+          <p:cNvPr id="23" name="TextBox 22"/>
+          <p:cNvSpPr txBox="1"/>
+          <p:nvPr/>
+        </p:nvSpPr>
+        <p:spPr>
+          <a:xfrm>
+            <a:off x="10126980" y="5486400"/>
+            <a:ext cx="1371600" cy="594360"/>
+          </a:xfrm>
+          <a:prstGeom prst="rect">
+            <a:avLst/>
+          </a:prstGeom>
+          <a:noFill/>
+        </p:spPr>
+        <p:txBody>
+          <a:bodyPr wrap="square">
+            <a:spAutoFit/>
+          </a:bodyPr>
+          <a:lstStyle/>
+          <a:p>
+            <a:pPr algn="ctr">
+              <a:defRPr sz="1100" b="1">
+                <a:solidFill>
+                  <a:srgbClr val="00C0FF"/>
+                </a:solidFill>
+                <a:latin typeface="Microsoft YaHei"/>
+              </a:defRPr>
+            </a:pPr>
+            <a:r>
               <a:t>全流程</a:t>
             </a:r>
+          </a:p>
+        </p:txBody>
+      </p:sp>
+      <p:sp>
+        <p:nvSpPr>
+          <p:cNvPr id="24" name="Rectangle 23"/>
+          <p:cNvSpPr/>
+          <p:nvPr/>
+        </p:nvSpPr>
+        <p:spPr>
+          <a:xfrm>
+            <a:off x="11430000" y="0"/>
+            <a:ext cx="761695" cy="38100"/>
+          </a:xfrm>
+          <a:prstGeom prst="rect">
+            <a:avLst/>
+          </a:prstGeom>
+          <a:solidFill>
+            <a:srgbClr val="00C0FF"/>
+          </a:solidFill>
+          <a:ln>
+            <a:noFill/>
+          </a:ln>
+        </p:spPr>
+        <p:style>
+          <a:lnRef idx="1">
+            <a:schemeClr val="accent1"/>
+          </a:lnRef>
+          <a:fillRef idx="3">
+            <a:schemeClr val="accent1"/>
+          </a:fillRef>
+          <a:effectRef idx="2">
+            <a:schemeClr val="accent1"/>
+          </a:effectRef>
+          <a:fontRef idx="minor">
+            <a:schemeClr val="lt1"/>
+          </a:fontRef>
+        </p:style>
+        <p:txBody>
+          <a:bodyPr rtlCol="0" anchor="ctr"/>
+          <a:lstStyle/>
+          <a:p>
+            <a:pPr algn="ctr"/>
+          </a:p>
+        </p:txBody>
+      </p:sp>
+      <p:sp>
+        <p:nvSpPr>
+          <p:cNvPr id="25" name="Rectangle 24"/>
+          <p:cNvSpPr/>
+          <p:nvPr/>
+        </p:nvSpPr>
+        <p:spPr>
+          <a:xfrm>
+            <a:off x="12070080" y="0"/>
+            <a:ext cx="38100" cy="640080"/>
+          </a:xfrm>
+          <a:prstGeom prst="rect">
+            <a:avLst/>
+          </a:prstGeom>
+          <a:solidFill>
+            <a:srgbClr val="00C0FF"/>
+          </a:solidFill>
+          <a:ln>
+            <a:noFill/>
+          </a:ln>
+        </p:spPr>
+        <p:style>
+          <a:lnRef idx="1">
+            <a:schemeClr val="accent1"/>
+          </a:lnRef>
+          <a:fillRef idx="3">
+            <a:schemeClr val="accent1"/>
+          </a:fillRef>
+          <a:effectRef idx="2">
+            <a:schemeClr val="accent1"/>
+          </a:effectRef>
+          <a:fontRef idx="minor">
+            <a:schemeClr val="lt1"/>
+          </a:fontRef>
+        </p:style>
+        <p:txBody>
+          <a:bodyPr rtlCol="0" anchor="ctr"/>
+          <a:lstStyle/>
+          <a:p>
+            <a:pPr algn="ctr"/>
           </a:p>
         </p:txBody>
       </p:sp>
@@ -3577,7 +4093,7 @@
     <p:bg>
       <p:bgPr>
         <a:solidFill>
-          <a:srgbClr val="08080C"/>
+          <a:srgbClr val="09090F"/>
         </a:solidFill>
         <a:effectLst/>
       </p:bgPr>
@@ -3591,56 +4107,20 @@
       <p:grpSpPr/>
       <p:sp>
         <p:nvSpPr>
-          <p:cNvPr id="2" name="TextBox 1"/>
-          <p:cNvSpPr txBox="1"/>
-          <p:nvPr/>
-        </p:nvSpPr>
-        <p:spPr>
-          <a:xfrm>
-            <a:off x="731520" y="365760"/>
-            <a:ext cx="9144000" cy="548640"/>
-          </a:xfrm>
-          <a:prstGeom prst="rect">
-            <a:avLst/>
-          </a:prstGeom>
-          <a:noFill/>
-        </p:spPr>
-        <p:txBody>
-          <a:bodyPr wrap="square">
-            <a:spAutoFit/>
-          </a:bodyPr>
-          <a:lstStyle/>
-          <a:p>
-            <a:pPr algn="l">
-              <a:defRPr sz="2800" b="1">
-                <a:solidFill>
-                  <a:srgbClr val="F0F0F5"/>
-                </a:solidFill>
-                <a:latin typeface="Microsoft YaHei"/>
-              </a:defRPr>
-            </a:pPr>
-            <a:r>
-              <a:t>本节内容</a:t>
-            </a:r>
-          </a:p>
-        </p:txBody>
-      </p:sp>
-      <p:sp>
-        <p:nvSpPr>
-          <p:cNvPr id="3" name="Rectangle 2"/>
+          <p:cNvPr id="2" name="Rectangle 1"/>
           <p:cNvSpPr/>
           <p:nvPr/>
         </p:nvSpPr>
         <p:spPr>
           <a:xfrm>
-            <a:off x="731520" y="960120"/>
-            <a:ext cx="1828800" cy="19050"/>
+            <a:off x="0" y="0"/>
+            <a:ext cx="12191695" cy="25400"/>
           </a:xfrm>
           <a:prstGeom prst="rect">
             <a:avLst/>
           </a:prstGeom>
           <a:solidFill>
-            <a:srgbClr val="00BFFF"/>
+            <a:srgbClr val="00C0FF"/>
           </a:solidFill>
           <a:ln>
             <a:noFill/>
@@ -3670,1172 +4150,20 @@
       </p:sp>
       <p:sp>
         <p:nvSpPr>
-          <p:cNvPr id="4" name="TextBox 3"/>
-          <p:cNvSpPr txBox="1"/>
-          <p:nvPr/>
-        </p:nvSpPr>
-        <p:spPr>
-          <a:xfrm>
-            <a:off x="731520" y="1280160"/>
-            <a:ext cx="457200" cy="457200"/>
-          </a:xfrm>
-          <a:prstGeom prst="rect">
-            <a:avLst/>
-          </a:prstGeom>
-          <a:noFill/>
-        </p:spPr>
-        <p:txBody>
-          <a:bodyPr wrap="square">
-            <a:spAutoFit/>
-          </a:bodyPr>
-          <a:lstStyle/>
-          <a:p>
-            <a:pPr algn="l">
-              <a:defRPr sz="1300" b="1">
-                <a:solidFill>
-                  <a:srgbClr val="00BFFF"/>
-                </a:solidFill>
-                <a:latin typeface="Microsoft YaHei"/>
-              </a:defRPr>
-            </a:pPr>
-            <a:r>
-              <a:t>01</a:t>
-            </a:r>
-          </a:p>
-        </p:txBody>
-      </p:sp>
-      <p:sp>
-        <p:nvSpPr>
-          <p:cNvPr id="5" name="TextBox 4"/>
-          <p:cNvSpPr txBox="1"/>
-          <p:nvPr/>
-        </p:nvSpPr>
-        <p:spPr>
-          <a:xfrm>
-            <a:off x="1371600" y="1280160"/>
-            <a:ext cx="4572000" cy="457200"/>
-          </a:xfrm>
-          <a:prstGeom prst="rect">
-            <a:avLst/>
-          </a:prstGeom>
-          <a:noFill/>
-        </p:spPr>
-        <p:txBody>
-          <a:bodyPr wrap="square">
-            <a:spAutoFit/>
-          </a:bodyPr>
-          <a:lstStyle/>
-          <a:p>
-            <a:pPr algn="l">
-              <a:defRPr sz="1400" b="0">
-                <a:solidFill>
-                  <a:srgbClr val="9090A0"/>
-                </a:solidFill>
-                <a:latin typeface="Microsoft YaHei"/>
-              </a:defRPr>
-            </a:pPr>
-            <a:r>
-              <a:t>行业认知与趋势</a:t>
-            </a:r>
-          </a:p>
-        </p:txBody>
-      </p:sp>
-      <p:sp>
-        <p:nvSpPr>
-          <p:cNvPr id="6" name="TextBox 5"/>
-          <p:cNvSpPr txBox="1"/>
-          <p:nvPr/>
-        </p:nvSpPr>
-        <p:spPr>
-          <a:xfrm>
-            <a:off x="731520" y="1874520"/>
-            <a:ext cx="457200" cy="457200"/>
-          </a:xfrm>
-          <a:prstGeom prst="rect">
-            <a:avLst/>
-          </a:prstGeom>
-          <a:noFill/>
-        </p:spPr>
-        <p:txBody>
-          <a:bodyPr wrap="square">
-            <a:spAutoFit/>
-          </a:bodyPr>
-          <a:lstStyle/>
-          <a:p>
-            <a:pPr algn="l">
-              <a:defRPr sz="1300" b="1">
-                <a:solidFill>
-                  <a:srgbClr val="00BFFF"/>
-                </a:solidFill>
-                <a:latin typeface="Microsoft YaHei"/>
-              </a:defRPr>
-            </a:pPr>
-            <a:r>
-              <a:t>02</a:t>
-            </a:r>
-          </a:p>
-        </p:txBody>
-      </p:sp>
-      <p:sp>
-        <p:nvSpPr>
-          <p:cNvPr id="7" name="TextBox 6"/>
-          <p:cNvSpPr txBox="1"/>
-          <p:nvPr/>
-        </p:nvSpPr>
-        <p:spPr>
-          <a:xfrm>
-            <a:off x="1371600" y="1874520"/>
-            <a:ext cx="4572000" cy="457200"/>
-          </a:xfrm>
-          <a:prstGeom prst="rect">
-            <a:avLst/>
-          </a:prstGeom>
-          <a:noFill/>
-        </p:spPr>
-        <p:txBody>
-          <a:bodyPr wrap="square">
-            <a:spAutoFit/>
-          </a:bodyPr>
-          <a:lstStyle/>
-          <a:p>
-            <a:pPr algn="l">
-              <a:defRPr sz="1400" b="0">
-                <a:solidFill>
-                  <a:srgbClr val="9090A0"/>
-                </a:solidFill>
-                <a:latin typeface="Microsoft YaHei"/>
-              </a:defRPr>
-            </a:pPr>
-            <a:r>
-              <a:t>大语言模型与剧本创作</a:t>
-            </a:r>
-          </a:p>
-        </p:txBody>
-      </p:sp>
-      <p:sp>
-        <p:nvSpPr>
-          <p:cNvPr id="8" name="TextBox 7"/>
-          <p:cNvSpPr txBox="1"/>
-          <p:nvPr/>
-        </p:nvSpPr>
-        <p:spPr>
-          <a:xfrm>
-            <a:off x="731520" y="2468880"/>
-            <a:ext cx="457200" cy="457200"/>
-          </a:xfrm>
-          <a:prstGeom prst="rect">
-            <a:avLst/>
-          </a:prstGeom>
-          <a:noFill/>
-        </p:spPr>
-        <p:txBody>
-          <a:bodyPr wrap="square">
-            <a:spAutoFit/>
-          </a:bodyPr>
-          <a:lstStyle/>
-          <a:p>
-            <a:pPr algn="l">
-              <a:defRPr sz="1300" b="1">
-                <a:solidFill>
-                  <a:srgbClr val="00BFFF"/>
-                </a:solidFill>
-                <a:latin typeface="Microsoft YaHei"/>
-              </a:defRPr>
-            </a:pPr>
-            <a:r>
-              <a:t>03</a:t>
-            </a:r>
-          </a:p>
-        </p:txBody>
-      </p:sp>
-      <p:sp>
-        <p:nvSpPr>
-          <p:cNvPr id="9" name="TextBox 8"/>
-          <p:cNvSpPr txBox="1"/>
-          <p:nvPr/>
-        </p:nvSpPr>
-        <p:spPr>
-          <a:xfrm>
-            <a:off x="1371600" y="2468880"/>
-            <a:ext cx="4572000" cy="457200"/>
-          </a:xfrm>
-          <a:prstGeom prst="rect">
-            <a:avLst/>
-          </a:prstGeom>
-          <a:noFill/>
-        </p:spPr>
-        <p:txBody>
-          <a:bodyPr wrap="square">
-            <a:spAutoFit/>
-          </a:bodyPr>
-          <a:lstStyle/>
-          <a:p>
-            <a:pPr algn="l">
-              <a:defRPr sz="1400" b="0">
-                <a:solidFill>
-                  <a:srgbClr val="9090A0"/>
-                </a:solidFill>
-                <a:latin typeface="Microsoft YaHei"/>
-              </a:defRPr>
-            </a:pPr>
-            <a:r>
-              <a:t>分镜设计与提示词工程</a:t>
-            </a:r>
-          </a:p>
-        </p:txBody>
-      </p:sp>
-      <p:sp>
-        <p:nvSpPr>
-          <p:cNvPr id="10" name="TextBox 9"/>
-          <p:cNvSpPr txBox="1"/>
-          <p:nvPr/>
-        </p:nvSpPr>
-        <p:spPr>
-          <a:xfrm>
-            <a:off x="731520" y="3063240"/>
-            <a:ext cx="457200" cy="457200"/>
-          </a:xfrm>
-          <a:prstGeom prst="rect">
-            <a:avLst/>
-          </a:prstGeom>
-          <a:noFill/>
-        </p:spPr>
-        <p:txBody>
-          <a:bodyPr wrap="square">
-            <a:spAutoFit/>
-          </a:bodyPr>
-          <a:lstStyle/>
-          <a:p>
-            <a:pPr algn="l">
-              <a:defRPr sz="1300" b="1">
-                <a:solidFill>
-                  <a:srgbClr val="00BFFF"/>
-                </a:solidFill>
-                <a:latin typeface="Microsoft YaHei"/>
-              </a:defRPr>
-            </a:pPr>
-            <a:r>
-              <a:t>04</a:t>
-            </a:r>
-          </a:p>
-        </p:txBody>
-      </p:sp>
-      <p:sp>
-        <p:nvSpPr>
-          <p:cNvPr id="11" name="TextBox 10"/>
-          <p:cNvSpPr txBox="1"/>
-          <p:nvPr/>
-        </p:nvSpPr>
-        <p:spPr>
-          <a:xfrm>
-            <a:off x="1371600" y="3063240"/>
-            <a:ext cx="4572000" cy="457200"/>
-          </a:xfrm>
-          <a:prstGeom prst="rect">
-            <a:avLst/>
-          </a:prstGeom>
-          <a:noFill/>
-        </p:spPr>
-        <p:txBody>
-          <a:bodyPr wrap="square">
-            <a:spAutoFit/>
-          </a:bodyPr>
-          <a:lstStyle/>
-          <a:p>
-            <a:pPr algn="l">
-              <a:defRPr sz="1400" b="0">
-                <a:solidFill>
-                  <a:srgbClr val="9090A0"/>
-                </a:solidFill>
-                <a:latin typeface="Microsoft YaHei"/>
-              </a:defRPr>
-            </a:pPr>
-            <a:r>
-              <a:t>即梦AI深度精通</a:t>
-            </a:r>
-          </a:p>
-        </p:txBody>
-      </p:sp>
-      <p:sp>
-        <p:nvSpPr>
-          <p:cNvPr id="12" name="TextBox 11"/>
-          <p:cNvSpPr txBox="1"/>
-          <p:nvPr/>
-        </p:nvSpPr>
-        <p:spPr>
-          <a:xfrm>
-            <a:off x="731520" y="3657600"/>
-            <a:ext cx="457200" cy="457200"/>
-          </a:xfrm>
-          <a:prstGeom prst="rect">
-            <a:avLst/>
-          </a:prstGeom>
-          <a:noFill/>
-        </p:spPr>
-        <p:txBody>
-          <a:bodyPr wrap="square">
-            <a:spAutoFit/>
-          </a:bodyPr>
-          <a:lstStyle/>
-          <a:p>
-            <a:pPr algn="l">
-              <a:defRPr sz="1300" b="1">
-                <a:solidFill>
-                  <a:srgbClr val="00BFFF"/>
-                </a:solidFill>
-                <a:latin typeface="Microsoft YaHei"/>
-              </a:defRPr>
-            </a:pPr>
-            <a:r>
-              <a:t>05</a:t>
-            </a:r>
-          </a:p>
-        </p:txBody>
-      </p:sp>
-      <p:sp>
-        <p:nvSpPr>
-          <p:cNvPr id="13" name="TextBox 12"/>
-          <p:cNvSpPr txBox="1"/>
-          <p:nvPr/>
-        </p:nvSpPr>
-        <p:spPr>
-          <a:xfrm>
-            <a:off x="1371600" y="3657600"/>
-            <a:ext cx="4572000" cy="457200"/>
-          </a:xfrm>
-          <a:prstGeom prst="rect">
-            <a:avLst/>
-          </a:prstGeom>
-          <a:noFill/>
-        </p:spPr>
-        <p:txBody>
-          <a:bodyPr wrap="square">
-            <a:spAutoFit/>
-          </a:bodyPr>
-          <a:lstStyle/>
-          <a:p>
-            <a:pPr algn="l">
-              <a:defRPr sz="1400" b="0">
-                <a:solidFill>
-                  <a:srgbClr val="9090A0"/>
-                </a:solidFill>
-                <a:latin typeface="Microsoft YaHei"/>
-              </a:defRPr>
-            </a:pPr>
-            <a:r>
-              <a:t>其他图像生成工具</a:t>
-            </a:r>
-          </a:p>
-        </p:txBody>
-      </p:sp>
-      <p:sp>
-        <p:nvSpPr>
-          <p:cNvPr id="14" name="TextBox 13"/>
-          <p:cNvSpPr txBox="1"/>
-          <p:nvPr/>
-        </p:nvSpPr>
-        <p:spPr>
-          <a:xfrm>
-            <a:off x="731520" y="4251960"/>
-            <a:ext cx="457200" cy="457200"/>
-          </a:xfrm>
-          <a:prstGeom prst="rect">
-            <a:avLst/>
-          </a:prstGeom>
-          <a:noFill/>
-        </p:spPr>
-        <p:txBody>
-          <a:bodyPr wrap="square">
-            <a:spAutoFit/>
-          </a:bodyPr>
-          <a:lstStyle/>
-          <a:p>
-            <a:pPr algn="l">
-              <a:defRPr sz="1300" b="1">
-                <a:solidFill>
-                  <a:srgbClr val="00BFFF"/>
-                </a:solidFill>
-                <a:latin typeface="Microsoft YaHei"/>
-              </a:defRPr>
-            </a:pPr>
-            <a:r>
-              <a:t>06</a:t>
-            </a:r>
-          </a:p>
-        </p:txBody>
-      </p:sp>
-      <p:sp>
-        <p:nvSpPr>
-          <p:cNvPr id="15" name="TextBox 14"/>
-          <p:cNvSpPr txBox="1"/>
-          <p:nvPr/>
-        </p:nvSpPr>
-        <p:spPr>
-          <a:xfrm>
-            <a:off x="1371600" y="4251960"/>
-            <a:ext cx="4572000" cy="457200"/>
-          </a:xfrm>
-          <a:prstGeom prst="rect">
-            <a:avLst/>
-          </a:prstGeom>
-          <a:noFill/>
-        </p:spPr>
-        <p:txBody>
-          <a:bodyPr wrap="square">
-            <a:spAutoFit/>
-          </a:bodyPr>
-          <a:lstStyle/>
-          <a:p>
-            <a:pPr algn="l">
-              <a:defRPr sz="1400" b="0">
-                <a:solidFill>
-                  <a:srgbClr val="9090A0"/>
-                </a:solidFill>
-                <a:latin typeface="Microsoft YaHei"/>
-              </a:defRPr>
-            </a:pPr>
-            <a:r>
-              <a:t>可灵AI深度精通</a:t>
-            </a:r>
-          </a:p>
-        </p:txBody>
-      </p:sp>
-      <p:sp>
-        <p:nvSpPr>
-          <p:cNvPr id="16" name="TextBox 15"/>
-          <p:cNvSpPr txBox="1"/>
-          <p:nvPr/>
-        </p:nvSpPr>
-        <p:spPr>
-          <a:xfrm>
-            <a:off x="731520" y="4846320"/>
-            <a:ext cx="457200" cy="457200"/>
-          </a:xfrm>
-          <a:prstGeom prst="rect">
-            <a:avLst/>
-          </a:prstGeom>
-          <a:noFill/>
-        </p:spPr>
-        <p:txBody>
-          <a:bodyPr wrap="square">
-            <a:spAutoFit/>
-          </a:bodyPr>
-          <a:lstStyle/>
-          <a:p>
-            <a:pPr algn="l">
-              <a:defRPr sz="1300" b="1">
-                <a:solidFill>
-                  <a:srgbClr val="00BFFF"/>
-                </a:solidFill>
-                <a:latin typeface="Microsoft YaHei"/>
-              </a:defRPr>
-            </a:pPr>
-            <a:r>
-              <a:t>07</a:t>
-            </a:r>
-          </a:p>
-        </p:txBody>
-      </p:sp>
-      <p:sp>
-        <p:nvSpPr>
-          <p:cNvPr id="17" name="TextBox 16"/>
-          <p:cNvSpPr txBox="1"/>
-          <p:nvPr/>
-        </p:nvSpPr>
-        <p:spPr>
-          <a:xfrm>
-            <a:off x="1371600" y="4846320"/>
-            <a:ext cx="4572000" cy="457200"/>
-          </a:xfrm>
-          <a:prstGeom prst="rect">
-            <a:avLst/>
-          </a:prstGeom>
-          <a:noFill/>
-        </p:spPr>
-        <p:txBody>
-          <a:bodyPr wrap="square">
-            <a:spAutoFit/>
-          </a:bodyPr>
-          <a:lstStyle/>
-          <a:p>
-            <a:pPr algn="l">
-              <a:defRPr sz="1400" b="0">
-                <a:solidFill>
-                  <a:srgbClr val="9090A0"/>
-                </a:solidFill>
-                <a:latin typeface="Microsoft YaHei"/>
-              </a:defRPr>
-            </a:pPr>
-            <a:r>
-              <a:t>Seedance 2.0深度精通</a:t>
-            </a:r>
-          </a:p>
-        </p:txBody>
-      </p:sp>
-      <p:sp>
-        <p:nvSpPr>
-          <p:cNvPr id="18" name="TextBox 17"/>
-          <p:cNvSpPr txBox="1"/>
-          <p:nvPr/>
-        </p:nvSpPr>
-        <p:spPr>
-          <a:xfrm>
-            <a:off x="731520" y="5440680"/>
-            <a:ext cx="457200" cy="457200"/>
-          </a:xfrm>
-          <a:prstGeom prst="rect">
-            <a:avLst/>
-          </a:prstGeom>
-          <a:noFill/>
-        </p:spPr>
-        <p:txBody>
-          <a:bodyPr wrap="square">
-            <a:spAutoFit/>
-          </a:bodyPr>
-          <a:lstStyle/>
-          <a:p>
-            <a:pPr algn="l">
-              <a:defRPr sz="1300" b="1">
-                <a:solidFill>
-                  <a:srgbClr val="00BFFF"/>
-                </a:solidFill>
-                <a:latin typeface="Microsoft YaHei"/>
-              </a:defRPr>
-            </a:pPr>
-            <a:r>
-              <a:t>08</a:t>
-            </a:r>
-          </a:p>
-        </p:txBody>
-      </p:sp>
-      <p:sp>
-        <p:nvSpPr>
-          <p:cNvPr id="19" name="TextBox 18"/>
-          <p:cNvSpPr txBox="1"/>
-          <p:nvPr/>
-        </p:nvSpPr>
-        <p:spPr>
-          <a:xfrm>
-            <a:off x="1371600" y="5440680"/>
-            <a:ext cx="4572000" cy="457200"/>
-          </a:xfrm>
-          <a:prstGeom prst="rect">
-            <a:avLst/>
-          </a:prstGeom>
-          <a:noFill/>
-        </p:spPr>
-        <p:txBody>
-          <a:bodyPr wrap="square">
-            <a:spAutoFit/>
-          </a:bodyPr>
-          <a:lstStyle/>
-          <a:p>
-            <a:pPr algn="l">
-              <a:defRPr sz="1400" b="0">
-                <a:solidFill>
-                  <a:srgbClr val="9090A0"/>
-                </a:solidFill>
-                <a:latin typeface="Microsoft YaHei"/>
-              </a:defRPr>
-            </a:pPr>
-            <a:r>
-              <a:t>海螺AI与Vidu</a:t>
-            </a:r>
-          </a:p>
-        </p:txBody>
-      </p:sp>
-      <p:sp>
-        <p:nvSpPr>
-          <p:cNvPr id="20" name="TextBox 19"/>
-          <p:cNvSpPr txBox="1"/>
-          <p:nvPr/>
-        </p:nvSpPr>
-        <p:spPr>
-          <a:xfrm>
-            <a:off x="6400800" y="1280160"/>
-            <a:ext cx="457200" cy="457200"/>
-          </a:xfrm>
-          <a:prstGeom prst="rect">
-            <a:avLst/>
-          </a:prstGeom>
-          <a:noFill/>
-        </p:spPr>
-        <p:txBody>
-          <a:bodyPr wrap="square">
-            <a:spAutoFit/>
-          </a:bodyPr>
-          <a:lstStyle/>
-          <a:p>
-            <a:pPr algn="l">
-              <a:defRPr sz="1300" b="1">
-                <a:solidFill>
-                  <a:srgbClr val="00BFFF"/>
-                </a:solidFill>
-                <a:latin typeface="Microsoft YaHei"/>
-              </a:defRPr>
-            </a:pPr>
-            <a:r>
-              <a:t>10</a:t>
-            </a:r>
-          </a:p>
-        </p:txBody>
-      </p:sp>
-      <p:sp>
-        <p:nvSpPr>
-          <p:cNvPr id="21" name="TextBox 20"/>
-          <p:cNvSpPr txBox="1"/>
-          <p:nvPr/>
-        </p:nvSpPr>
-        <p:spPr>
-          <a:xfrm>
-            <a:off x="7040880" y="1280160"/>
-            <a:ext cx="4572000" cy="457200"/>
-          </a:xfrm>
-          <a:prstGeom prst="rect">
-            <a:avLst/>
-          </a:prstGeom>
-          <a:noFill/>
-        </p:spPr>
-        <p:txBody>
-          <a:bodyPr wrap="square">
-            <a:spAutoFit/>
-          </a:bodyPr>
-          <a:lstStyle/>
-          <a:p>
-            <a:pPr algn="l">
-              <a:defRPr sz="1400" b="0">
-                <a:solidFill>
-                  <a:srgbClr val="9090A0"/>
-                </a:solidFill>
-                <a:latin typeface="Microsoft YaHei"/>
-              </a:defRPr>
-            </a:pPr>
-            <a:r>
-              <a:t>配音配乐与音画同步</a:t>
-            </a:r>
-          </a:p>
-        </p:txBody>
-      </p:sp>
-      <p:sp>
-        <p:nvSpPr>
-          <p:cNvPr id="22" name="TextBox 21"/>
-          <p:cNvSpPr txBox="1"/>
-          <p:nvPr/>
-        </p:nvSpPr>
-        <p:spPr>
-          <a:xfrm>
-            <a:off x="6400800" y="1874520"/>
-            <a:ext cx="457200" cy="457200"/>
-          </a:xfrm>
-          <a:prstGeom prst="rect">
-            <a:avLst/>
-          </a:prstGeom>
-          <a:noFill/>
-        </p:spPr>
-        <p:txBody>
-          <a:bodyPr wrap="square">
-            <a:spAutoFit/>
-          </a:bodyPr>
-          <a:lstStyle/>
-          <a:p>
-            <a:pPr algn="l">
-              <a:defRPr sz="1300" b="1">
-                <a:solidFill>
-                  <a:srgbClr val="00BFFF"/>
-                </a:solidFill>
-                <a:latin typeface="Microsoft YaHei"/>
-              </a:defRPr>
-            </a:pPr>
-            <a:r>
-              <a:t>11</a:t>
-            </a:r>
-          </a:p>
-        </p:txBody>
-      </p:sp>
-      <p:sp>
-        <p:nvSpPr>
-          <p:cNvPr id="23" name="TextBox 22"/>
-          <p:cNvSpPr txBox="1"/>
-          <p:nvPr/>
-        </p:nvSpPr>
-        <p:spPr>
-          <a:xfrm>
-            <a:off x="7040880" y="1874520"/>
-            <a:ext cx="4572000" cy="457200"/>
-          </a:xfrm>
-          <a:prstGeom prst="rect">
-            <a:avLst/>
-          </a:prstGeom>
-          <a:noFill/>
-        </p:spPr>
-        <p:txBody>
-          <a:bodyPr wrap="square">
-            <a:spAutoFit/>
-          </a:bodyPr>
-          <a:lstStyle/>
-          <a:p>
-            <a:pPr algn="l">
-              <a:defRPr sz="1400" b="0">
-                <a:solidFill>
-                  <a:srgbClr val="9090A0"/>
-                </a:solidFill>
-                <a:latin typeface="Microsoft YaHei"/>
-              </a:defRPr>
-            </a:pPr>
-            <a:r>
-              <a:t>剪辑与后期全流程</a:t>
-            </a:r>
-          </a:p>
-        </p:txBody>
-      </p:sp>
-      <p:sp>
-        <p:nvSpPr>
-          <p:cNvPr id="24" name="TextBox 23"/>
-          <p:cNvSpPr txBox="1"/>
-          <p:nvPr/>
-        </p:nvSpPr>
-        <p:spPr>
-          <a:xfrm>
-            <a:off x="6400800" y="2468880"/>
-            <a:ext cx="457200" cy="457200"/>
-          </a:xfrm>
-          <a:prstGeom prst="rect">
-            <a:avLst/>
-          </a:prstGeom>
-          <a:noFill/>
-        </p:spPr>
-        <p:txBody>
-          <a:bodyPr wrap="square">
-            <a:spAutoFit/>
-          </a:bodyPr>
-          <a:lstStyle/>
-          <a:p>
-            <a:pPr algn="l">
-              <a:defRPr sz="1300" b="1">
-                <a:solidFill>
-                  <a:srgbClr val="00BFFF"/>
-                </a:solidFill>
-                <a:latin typeface="Microsoft YaHei"/>
-              </a:defRPr>
-            </a:pPr>
-            <a:r>
-              <a:t>12</a:t>
-            </a:r>
-          </a:p>
-        </p:txBody>
-      </p:sp>
-      <p:sp>
-        <p:nvSpPr>
-          <p:cNvPr id="25" name="TextBox 24"/>
-          <p:cNvSpPr txBox="1"/>
-          <p:nvPr/>
-        </p:nvSpPr>
-        <p:spPr>
-          <a:xfrm>
-            <a:off x="7040880" y="2468880"/>
-            <a:ext cx="4572000" cy="457200"/>
-          </a:xfrm>
-          <a:prstGeom prst="rect">
-            <a:avLst/>
-          </a:prstGeom>
-          <a:noFill/>
-        </p:spPr>
-        <p:txBody>
-          <a:bodyPr wrap="square">
-            <a:spAutoFit/>
-          </a:bodyPr>
-          <a:lstStyle/>
-          <a:p>
-            <a:pPr algn="l">
-              <a:defRPr sz="1400" b="0">
-                <a:solidFill>
-                  <a:srgbClr val="9090A0"/>
-                </a:solidFill>
-                <a:latin typeface="Microsoft YaHei"/>
-              </a:defRPr>
-            </a:pPr>
-            <a:r>
-              <a:t>一站式平台精讲</a:t>
-            </a:r>
-          </a:p>
-        </p:txBody>
-      </p:sp>
-      <p:sp>
-        <p:nvSpPr>
-          <p:cNvPr id="26" name="TextBox 25"/>
-          <p:cNvSpPr txBox="1"/>
-          <p:nvPr/>
-        </p:nvSpPr>
-        <p:spPr>
-          <a:xfrm>
-            <a:off x="6400800" y="3063240"/>
-            <a:ext cx="457200" cy="457200"/>
-          </a:xfrm>
-          <a:prstGeom prst="rect">
-            <a:avLst/>
-          </a:prstGeom>
-          <a:noFill/>
-        </p:spPr>
-        <p:txBody>
-          <a:bodyPr wrap="square">
-            <a:spAutoFit/>
-          </a:bodyPr>
-          <a:lstStyle/>
-          <a:p>
-            <a:pPr algn="l">
-              <a:defRPr sz="1300" b="1">
-                <a:solidFill>
-                  <a:srgbClr val="00BFFF"/>
-                </a:solidFill>
-                <a:latin typeface="Microsoft YaHei"/>
-              </a:defRPr>
-            </a:pPr>
-            <a:r>
-              <a:t>13</a:t>
-            </a:r>
-          </a:p>
-        </p:txBody>
-      </p:sp>
-      <p:sp>
-        <p:nvSpPr>
-          <p:cNvPr id="27" name="TextBox 26"/>
-          <p:cNvSpPr txBox="1"/>
-          <p:nvPr/>
-        </p:nvSpPr>
-        <p:spPr>
-          <a:xfrm>
-            <a:off x="7040880" y="3063240"/>
-            <a:ext cx="4572000" cy="457200"/>
-          </a:xfrm>
-          <a:prstGeom prst="rect">
-            <a:avLst/>
-          </a:prstGeom>
-          <a:noFill/>
-        </p:spPr>
-        <p:txBody>
-          <a:bodyPr wrap="square">
-            <a:spAutoFit/>
-          </a:bodyPr>
-          <a:lstStyle/>
-          <a:p>
-            <a:pPr algn="l">
-              <a:defRPr sz="1400" b="0">
-                <a:solidFill>
-                  <a:srgbClr val="9090A0"/>
-                </a:solidFill>
-                <a:latin typeface="Microsoft YaHei"/>
-              </a:defRPr>
-            </a:pPr>
-            <a:r>
-              <a:t>ComfyUI工作流</a:t>
-            </a:r>
-          </a:p>
-        </p:txBody>
-      </p:sp>
-      <p:sp>
-        <p:nvSpPr>
-          <p:cNvPr id="28" name="TextBox 27"/>
-          <p:cNvSpPr txBox="1"/>
-          <p:nvPr/>
-        </p:nvSpPr>
-        <p:spPr>
-          <a:xfrm>
-            <a:off x="6400800" y="3657600"/>
-            <a:ext cx="457200" cy="457200"/>
-          </a:xfrm>
-          <a:prstGeom prst="rect">
-            <a:avLst/>
-          </a:prstGeom>
-          <a:noFill/>
-        </p:spPr>
-        <p:txBody>
-          <a:bodyPr wrap="square">
-            <a:spAutoFit/>
-          </a:bodyPr>
-          <a:lstStyle/>
-          <a:p>
-            <a:pPr algn="l">
-              <a:defRPr sz="1300" b="1">
-                <a:solidFill>
-                  <a:srgbClr val="00BFFF"/>
-                </a:solidFill>
-                <a:latin typeface="Microsoft YaHei"/>
-              </a:defRPr>
-            </a:pPr>
-            <a:r>
-              <a:t>14</a:t>
-            </a:r>
-          </a:p>
-        </p:txBody>
-      </p:sp>
-      <p:sp>
-        <p:nvSpPr>
-          <p:cNvPr id="29" name="TextBox 28"/>
-          <p:cNvSpPr txBox="1"/>
-          <p:nvPr/>
-        </p:nvSpPr>
-        <p:spPr>
-          <a:xfrm>
-            <a:off x="7040880" y="3657600"/>
-            <a:ext cx="4572000" cy="457200"/>
-          </a:xfrm>
-          <a:prstGeom prst="rect">
-            <a:avLst/>
-          </a:prstGeom>
-          <a:noFill/>
-        </p:spPr>
-        <p:txBody>
-          <a:bodyPr wrap="square">
-            <a:spAutoFit/>
-          </a:bodyPr>
-          <a:lstStyle/>
-          <a:p>
-            <a:pPr algn="l">
-              <a:defRPr sz="1400" b="0">
-                <a:solidFill>
-                  <a:srgbClr val="9090A0"/>
-                </a:solidFill>
-                <a:latin typeface="Microsoft YaHei"/>
-              </a:defRPr>
-            </a:pPr>
-            <a:r>
-              <a:t>工业化生产与团队协作</a:t>
-            </a:r>
-          </a:p>
-        </p:txBody>
-      </p:sp>
-      <p:sp>
-        <p:nvSpPr>
-          <p:cNvPr id="30" name="TextBox 29"/>
-          <p:cNvSpPr txBox="1"/>
-          <p:nvPr/>
-        </p:nvSpPr>
-        <p:spPr>
-          <a:xfrm>
-            <a:off x="6400800" y="4251960"/>
-            <a:ext cx="457200" cy="457200"/>
-          </a:xfrm>
-          <a:prstGeom prst="rect">
-            <a:avLst/>
-          </a:prstGeom>
-          <a:noFill/>
-        </p:spPr>
-        <p:txBody>
-          <a:bodyPr wrap="square">
-            <a:spAutoFit/>
-          </a:bodyPr>
-          <a:lstStyle/>
-          <a:p>
-            <a:pPr algn="l">
-              <a:defRPr sz="1300" b="1">
-                <a:solidFill>
-                  <a:srgbClr val="00BFFF"/>
-                </a:solidFill>
-                <a:latin typeface="Microsoft YaHei"/>
-              </a:defRPr>
-            </a:pPr>
-            <a:r>
-              <a:t>15</a:t>
-            </a:r>
-          </a:p>
-        </p:txBody>
-      </p:sp>
-      <p:sp>
-        <p:nvSpPr>
-          <p:cNvPr id="31" name="TextBox 30"/>
-          <p:cNvSpPr txBox="1"/>
-          <p:nvPr/>
-        </p:nvSpPr>
-        <p:spPr>
-          <a:xfrm>
-            <a:off x="7040880" y="4251960"/>
-            <a:ext cx="4572000" cy="457200"/>
-          </a:xfrm>
-          <a:prstGeom prst="rect">
-            <a:avLst/>
-          </a:prstGeom>
-          <a:noFill/>
-        </p:spPr>
-        <p:txBody>
-          <a:bodyPr wrap="square">
-            <a:spAutoFit/>
-          </a:bodyPr>
-          <a:lstStyle/>
-          <a:p>
-            <a:pPr algn="l">
-              <a:defRPr sz="1400" b="0">
-                <a:solidFill>
-                  <a:srgbClr val="9090A0"/>
-                </a:solidFill>
-                <a:latin typeface="Microsoft YaHei"/>
-              </a:defRPr>
-            </a:pPr>
-            <a:r>
-              <a:t>平台分发与商业变现</a:t>
-            </a:r>
-          </a:p>
-        </p:txBody>
-      </p:sp>
-      <p:sp>
-        <p:nvSpPr>
-          <p:cNvPr id="32" name="TextBox 31"/>
-          <p:cNvSpPr txBox="1"/>
-          <p:nvPr/>
-        </p:nvSpPr>
-        <p:spPr>
-          <a:xfrm>
-            <a:off x="6400800" y="4846320"/>
-            <a:ext cx="457200" cy="457200"/>
-          </a:xfrm>
-          <a:prstGeom prst="rect">
-            <a:avLst/>
-          </a:prstGeom>
-          <a:noFill/>
-        </p:spPr>
-        <p:txBody>
-          <a:bodyPr wrap="square">
-            <a:spAutoFit/>
-          </a:bodyPr>
-          <a:lstStyle/>
-          <a:p>
-            <a:pPr algn="l">
-              <a:defRPr sz="1300" b="1">
-                <a:solidFill>
-                  <a:srgbClr val="00BFFF"/>
-                </a:solidFill>
-                <a:latin typeface="Microsoft YaHei"/>
-              </a:defRPr>
-            </a:pPr>
-            <a:r>
-              <a:t>16</a:t>
-            </a:r>
-          </a:p>
-        </p:txBody>
-      </p:sp>
-      <p:sp>
-        <p:nvSpPr>
-          <p:cNvPr id="33" name="TextBox 32"/>
-          <p:cNvSpPr txBox="1"/>
-          <p:nvPr/>
-        </p:nvSpPr>
-        <p:spPr>
-          <a:xfrm>
-            <a:off x="7040880" y="4846320"/>
-            <a:ext cx="4572000" cy="457200"/>
-          </a:xfrm>
-          <a:prstGeom prst="rect">
-            <a:avLst/>
-          </a:prstGeom>
-          <a:noFill/>
-        </p:spPr>
-        <p:txBody>
-          <a:bodyPr wrap="square">
-            <a:spAutoFit/>
-          </a:bodyPr>
-          <a:lstStyle/>
-          <a:p>
-            <a:pPr algn="l">
-              <a:defRPr sz="1400" b="0">
-                <a:solidFill>
-                  <a:srgbClr val="9090A0"/>
-                </a:solidFill>
-                <a:latin typeface="Microsoft YaHei"/>
-              </a:defRPr>
-            </a:pPr>
-            <a:r>
-              <a:t>合规要求与行业规范</a:t>
-            </a:r>
-          </a:p>
-        </p:txBody>
-      </p:sp>
-      <p:sp>
-        <p:nvSpPr>
-          <p:cNvPr id="34" name="TextBox 33"/>
-          <p:cNvSpPr txBox="1"/>
-          <p:nvPr/>
-        </p:nvSpPr>
-        <p:spPr>
-          <a:xfrm>
-            <a:off x="6400800" y="5440680"/>
-            <a:ext cx="457200" cy="457200"/>
-          </a:xfrm>
-          <a:prstGeom prst="rect">
-            <a:avLst/>
-          </a:prstGeom>
-          <a:noFill/>
-        </p:spPr>
-        <p:txBody>
-          <a:bodyPr wrap="square">
-            <a:spAutoFit/>
-          </a:bodyPr>
-          <a:lstStyle/>
-          <a:p>
-            <a:pPr algn="l">
-              <a:defRPr sz="1300" b="1">
-                <a:solidFill>
-                  <a:srgbClr val="00BFFF"/>
-                </a:solidFill>
-                <a:latin typeface="Microsoft YaHei"/>
-              </a:defRPr>
-            </a:pPr>
-            <a:r>
-              <a:t>17</a:t>
-            </a:r>
-          </a:p>
-        </p:txBody>
-      </p:sp>
-      <p:sp>
-        <p:nvSpPr>
-          <p:cNvPr id="35" name="TextBox 34"/>
-          <p:cNvSpPr txBox="1"/>
-          <p:nvPr/>
-        </p:nvSpPr>
-        <p:spPr>
-          <a:xfrm>
-            <a:off x="7040880" y="5440680"/>
-            <a:ext cx="4572000" cy="457200"/>
-          </a:xfrm>
-          <a:prstGeom prst="rect">
-            <a:avLst/>
-          </a:prstGeom>
-          <a:noFill/>
-        </p:spPr>
-        <p:txBody>
-          <a:bodyPr wrap="square">
-            <a:spAutoFit/>
-          </a:bodyPr>
-          <a:lstStyle/>
-          <a:p>
-            <a:pPr algn="l">
-              <a:defRPr sz="1400" b="0">
-                <a:solidFill>
-                  <a:srgbClr val="9090A0"/>
-                </a:solidFill>
-                <a:latin typeface="Microsoft YaHei"/>
-              </a:defRPr>
-            </a:pPr>
-            <a:r>
-              <a:t>综合实战项目</a:t>
-            </a:r>
-          </a:p>
-        </p:txBody>
-      </p:sp>
-      <p:sp>
-        <p:nvSpPr>
-          <p:cNvPr id="36" name="Rectangle 35"/>
+          <p:cNvPr id="3" name="Rectangle 2"/>
           <p:cNvSpPr/>
           <p:nvPr/>
         </p:nvSpPr>
         <p:spPr>
           <a:xfrm>
-            <a:off x="0" y="6446520"/>
-            <a:ext cx="12191695" cy="19050"/>
+            <a:off x="0" y="25400"/>
+            <a:ext cx="12191695" cy="25400"/>
           </a:xfrm>
           <a:prstGeom prst="rect">
             <a:avLst/>
           </a:prstGeom>
           <a:solidFill>
-            <a:srgbClr val="1E1E2A"/>
+            <a:srgbClr val="007399"/>
           </a:solidFill>
           <a:ln>
             <a:noFill/>
@@ -4865,56 +4193,20 @@
       </p:sp>
       <p:sp>
         <p:nvSpPr>
-          <p:cNvPr id="37" name="TextBox 36"/>
-          <p:cNvSpPr txBox="1"/>
-          <p:nvPr/>
-        </p:nvSpPr>
-        <p:spPr>
-          <a:xfrm>
-            <a:off x="731520" y="6492240"/>
-            <a:ext cx="4572000" cy="274320"/>
-          </a:xfrm>
-          <a:prstGeom prst="rect">
-            <a:avLst/>
-          </a:prstGeom>
-          <a:noFill/>
-        </p:spPr>
-        <p:txBody>
-          <a:bodyPr wrap="square">
-            <a:spAutoFit/>
-          </a:bodyPr>
-          <a:lstStyle/>
-          <a:p>
-            <a:pPr algn="l">
-              <a:defRPr sz="900" b="0">
-                <a:solidFill>
-                  <a:srgbClr val="505060"/>
-                </a:solidFill>
-                <a:latin typeface="Microsoft YaHei"/>
-              </a:defRPr>
-            </a:pPr>
-            <a:r>
-              <a:t>模块00 · 课程导论</a:t>
-            </a:r>
-          </a:p>
-        </p:txBody>
-      </p:sp>
-      <p:sp>
-        <p:nvSpPr>
-          <p:cNvPr id="38" name="Rectangle 37"/>
+          <p:cNvPr id="4" name="Rectangle 3"/>
           <p:cNvSpPr/>
           <p:nvPr/>
         </p:nvSpPr>
         <p:spPr>
           <a:xfrm>
-            <a:off x="0" y="6446520"/>
-            <a:ext cx="12191695" cy="19050"/>
+            <a:off x="0" y="50800"/>
+            <a:ext cx="12191695" cy="12700"/>
           </a:xfrm>
           <a:prstGeom prst="rect">
             <a:avLst/>
           </a:prstGeom>
           <a:solidFill>
-            <a:srgbClr val="1E1E2A"/>
+            <a:srgbClr val="00394C"/>
           </a:solidFill>
           <a:ln>
             <a:noFill/>
@@ -4944,14 +4236,100 @@
       </p:sp>
       <p:sp>
         <p:nvSpPr>
-          <p:cNvPr id="39" name="TextBox 38"/>
+          <p:cNvPr id="5" name="Rectangle 4"/>
+          <p:cNvSpPr/>
+          <p:nvPr/>
+        </p:nvSpPr>
+        <p:spPr>
+          <a:xfrm>
+            <a:off x="0" y="63500"/>
+            <a:ext cx="12191695" cy="960120"/>
+          </a:xfrm>
+          <a:prstGeom prst="rect">
+            <a:avLst/>
+          </a:prstGeom>
+          <a:solidFill>
+            <a:srgbClr val="12141E"/>
+          </a:solidFill>
+          <a:ln>
+            <a:noFill/>
+          </a:ln>
+        </p:spPr>
+        <p:style>
+          <a:lnRef idx="1">
+            <a:schemeClr val="accent1"/>
+          </a:lnRef>
+          <a:fillRef idx="3">
+            <a:schemeClr val="accent1"/>
+          </a:fillRef>
+          <a:effectRef idx="2">
+            <a:schemeClr val="accent1"/>
+          </a:effectRef>
+          <a:fontRef idx="minor">
+            <a:schemeClr val="lt1"/>
+          </a:fontRef>
+        </p:style>
+        <p:txBody>
+          <a:bodyPr rtlCol="0" anchor="ctr"/>
+          <a:lstStyle/>
+          <a:p>
+            <a:pPr algn="ctr"/>
+          </a:p>
+        </p:txBody>
+      </p:sp>
+      <p:sp>
+        <p:nvSpPr>
+          <p:cNvPr id="6" name="Rectangle 5"/>
+          <p:cNvSpPr/>
+          <p:nvPr/>
+        </p:nvSpPr>
+        <p:spPr>
+          <a:xfrm>
+            <a:off x="0" y="63500"/>
+            <a:ext cx="73152" cy="960120"/>
+          </a:xfrm>
+          <a:prstGeom prst="rect">
+            <a:avLst/>
+          </a:prstGeom>
+          <a:solidFill>
+            <a:srgbClr val="00C0FF"/>
+          </a:solidFill>
+          <a:ln>
+            <a:noFill/>
+          </a:ln>
+        </p:spPr>
+        <p:style>
+          <a:lnRef idx="1">
+            <a:schemeClr val="accent1"/>
+          </a:lnRef>
+          <a:fillRef idx="3">
+            <a:schemeClr val="accent1"/>
+          </a:fillRef>
+          <a:effectRef idx="2">
+            <a:schemeClr val="accent1"/>
+          </a:effectRef>
+          <a:fontRef idx="minor">
+            <a:schemeClr val="lt1"/>
+          </a:fontRef>
+        </p:style>
+        <p:txBody>
+          <a:bodyPr rtlCol="0" anchor="ctr"/>
+          <a:lstStyle/>
+          <a:p>
+            <a:pPr algn="ctr"/>
+          </a:p>
+        </p:txBody>
+      </p:sp>
+      <p:sp>
+        <p:nvSpPr>
+          <p:cNvPr id="7" name="TextBox 6"/>
           <p:cNvSpPr txBox="1"/>
           <p:nvPr/>
         </p:nvSpPr>
         <p:spPr>
           <a:xfrm>
-            <a:off x="731520" y="6492240"/>
-            <a:ext cx="4572000" cy="274320"/>
+            <a:off x="640080" y="164592"/>
+            <a:ext cx="10058400" cy="594360"/>
           </a:xfrm>
           <a:prstGeom prst="rect">
             <a:avLst/>
@@ -4965,15 +4343,1325 @@
           <a:lstStyle/>
           <a:p>
             <a:pPr algn="l">
-              <a:defRPr sz="900" b="0">
+              <a:defRPr sz="2400" b="1">
                 <a:solidFill>
-                  <a:srgbClr val="505060"/>
+                  <a:srgbClr val="EEEEF4"/>
                 </a:solidFill>
                 <a:latin typeface="Microsoft YaHei"/>
               </a:defRPr>
             </a:pPr>
             <a:r>
+              <a:t>📋  本节内容</a:t>
+            </a:r>
+          </a:p>
+        </p:txBody>
+      </p:sp>
+      <p:sp>
+        <p:nvSpPr>
+          <p:cNvPr id="8" name="Rectangle 7"/>
+          <p:cNvSpPr/>
+          <p:nvPr/>
+        </p:nvSpPr>
+        <p:spPr>
+          <a:xfrm>
+            <a:off x="0" y="1097280"/>
+            <a:ext cx="12191695" cy="12700"/>
+          </a:xfrm>
+          <a:prstGeom prst="rect">
+            <a:avLst/>
+          </a:prstGeom>
+          <a:solidFill>
+            <a:srgbClr val="222432"/>
+          </a:solidFill>
+          <a:ln>
+            <a:noFill/>
+          </a:ln>
+        </p:spPr>
+        <p:style>
+          <a:lnRef idx="1">
+            <a:schemeClr val="accent1"/>
+          </a:lnRef>
+          <a:fillRef idx="3">
+            <a:schemeClr val="accent1"/>
+          </a:fillRef>
+          <a:effectRef idx="2">
+            <a:schemeClr val="accent1"/>
+          </a:effectRef>
+          <a:fontRef idx="minor">
+            <a:schemeClr val="lt1"/>
+          </a:fontRef>
+        </p:style>
+        <p:txBody>
+          <a:bodyPr rtlCol="0" anchor="ctr"/>
+          <a:lstStyle/>
+          <a:p>
+            <a:pPr algn="ctr"/>
+          </a:p>
+        </p:txBody>
+      </p:sp>
+      <p:sp>
+        <p:nvSpPr>
+          <p:cNvPr id="9" name="TextBox 8"/>
+          <p:cNvSpPr txBox="1"/>
+          <p:nvPr/>
+        </p:nvSpPr>
+        <p:spPr>
+          <a:xfrm>
+            <a:off x="731520" y="1371600"/>
+            <a:ext cx="411480" cy="457200"/>
+          </a:xfrm>
+          <a:prstGeom prst="rect">
+            <a:avLst/>
+          </a:prstGeom>
+          <a:noFill/>
+        </p:spPr>
+        <p:txBody>
+          <a:bodyPr wrap="square">
+            <a:spAutoFit/>
+          </a:bodyPr>
+          <a:lstStyle/>
+          <a:p>
+            <a:pPr algn="l">
+              <a:defRPr sz="1200" b="1">
+                <a:solidFill>
+                  <a:srgbClr val="00C0FF"/>
+                </a:solidFill>
+                <a:latin typeface="Microsoft YaHei"/>
+              </a:defRPr>
+            </a:pPr>
+            <a:r>
+              <a:t>01</a:t>
+            </a:r>
+          </a:p>
+        </p:txBody>
+      </p:sp>
+      <p:sp>
+        <p:nvSpPr>
+          <p:cNvPr id="10" name="TextBox 9"/>
+          <p:cNvSpPr txBox="1"/>
+          <p:nvPr/>
+        </p:nvSpPr>
+        <p:spPr>
+          <a:xfrm>
+            <a:off x="1188720" y="1371600"/>
+            <a:ext cx="10058400" cy="457200"/>
+          </a:xfrm>
+          <a:prstGeom prst="rect">
+            <a:avLst/>
+          </a:prstGeom>
+          <a:noFill/>
+        </p:spPr>
+        <p:txBody>
+          <a:bodyPr wrap="square">
+            <a:spAutoFit/>
+          </a:bodyPr>
+          <a:lstStyle/>
+          <a:p>
+            <a:pPr algn="l">
+              <a:defRPr sz="1400" b="0">
+                <a:solidFill>
+                  <a:srgbClr val="989AA8"/>
+                </a:solidFill>
+                <a:latin typeface="Microsoft YaHei"/>
+              </a:defRPr>
+            </a:pPr>
+            <a:r>
+              <a:t>行业认知与趋势</a:t>
+            </a:r>
+          </a:p>
+        </p:txBody>
+      </p:sp>
+      <p:sp>
+        <p:nvSpPr>
+          <p:cNvPr id="11" name="TextBox 10"/>
+          <p:cNvSpPr txBox="1"/>
+          <p:nvPr/>
+        </p:nvSpPr>
+        <p:spPr>
+          <a:xfrm>
+            <a:off x="731520" y="1938528"/>
+            <a:ext cx="411480" cy="457200"/>
+          </a:xfrm>
+          <a:prstGeom prst="rect">
+            <a:avLst/>
+          </a:prstGeom>
+          <a:noFill/>
+        </p:spPr>
+        <p:txBody>
+          <a:bodyPr wrap="square">
+            <a:spAutoFit/>
+          </a:bodyPr>
+          <a:lstStyle/>
+          <a:p>
+            <a:pPr algn="l">
+              <a:defRPr sz="1200" b="1">
+                <a:solidFill>
+                  <a:srgbClr val="00C0FF"/>
+                </a:solidFill>
+                <a:latin typeface="Microsoft YaHei"/>
+              </a:defRPr>
+            </a:pPr>
+            <a:r>
+              <a:t>02</a:t>
+            </a:r>
+          </a:p>
+        </p:txBody>
+      </p:sp>
+      <p:sp>
+        <p:nvSpPr>
+          <p:cNvPr id="12" name="TextBox 11"/>
+          <p:cNvSpPr txBox="1"/>
+          <p:nvPr/>
+        </p:nvSpPr>
+        <p:spPr>
+          <a:xfrm>
+            <a:off x="1188720" y="1938528"/>
+            <a:ext cx="10058400" cy="457200"/>
+          </a:xfrm>
+          <a:prstGeom prst="rect">
+            <a:avLst/>
+          </a:prstGeom>
+          <a:noFill/>
+        </p:spPr>
+        <p:txBody>
+          <a:bodyPr wrap="square">
+            <a:spAutoFit/>
+          </a:bodyPr>
+          <a:lstStyle/>
+          <a:p>
+            <a:pPr algn="l">
+              <a:defRPr sz="1400" b="0">
+                <a:solidFill>
+                  <a:srgbClr val="989AA8"/>
+                </a:solidFill>
+                <a:latin typeface="Microsoft YaHei"/>
+              </a:defRPr>
+            </a:pPr>
+            <a:r>
+              <a:t>大语言模型与剧本创作</a:t>
+            </a:r>
+          </a:p>
+        </p:txBody>
+      </p:sp>
+      <p:sp>
+        <p:nvSpPr>
+          <p:cNvPr id="13" name="TextBox 12"/>
+          <p:cNvSpPr txBox="1"/>
+          <p:nvPr/>
+        </p:nvSpPr>
+        <p:spPr>
+          <a:xfrm>
+            <a:off x="731520" y="2505456"/>
+            <a:ext cx="411480" cy="457200"/>
+          </a:xfrm>
+          <a:prstGeom prst="rect">
+            <a:avLst/>
+          </a:prstGeom>
+          <a:noFill/>
+        </p:spPr>
+        <p:txBody>
+          <a:bodyPr wrap="square">
+            <a:spAutoFit/>
+          </a:bodyPr>
+          <a:lstStyle/>
+          <a:p>
+            <a:pPr algn="l">
+              <a:defRPr sz="1200" b="1">
+                <a:solidFill>
+                  <a:srgbClr val="00C0FF"/>
+                </a:solidFill>
+                <a:latin typeface="Microsoft YaHei"/>
+              </a:defRPr>
+            </a:pPr>
+            <a:r>
+              <a:t>03</a:t>
+            </a:r>
+          </a:p>
+        </p:txBody>
+      </p:sp>
+      <p:sp>
+        <p:nvSpPr>
+          <p:cNvPr id="14" name="TextBox 13"/>
+          <p:cNvSpPr txBox="1"/>
+          <p:nvPr/>
+        </p:nvSpPr>
+        <p:spPr>
+          <a:xfrm>
+            <a:off x="1188720" y="2505456"/>
+            <a:ext cx="10058400" cy="457200"/>
+          </a:xfrm>
+          <a:prstGeom prst="rect">
+            <a:avLst/>
+          </a:prstGeom>
+          <a:noFill/>
+        </p:spPr>
+        <p:txBody>
+          <a:bodyPr wrap="square">
+            <a:spAutoFit/>
+          </a:bodyPr>
+          <a:lstStyle/>
+          <a:p>
+            <a:pPr algn="l">
+              <a:defRPr sz="1400" b="0">
+                <a:solidFill>
+                  <a:srgbClr val="989AA8"/>
+                </a:solidFill>
+                <a:latin typeface="Microsoft YaHei"/>
+              </a:defRPr>
+            </a:pPr>
+            <a:r>
+              <a:t>分镜设计与提示词工程</a:t>
+            </a:r>
+          </a:p>
+        </p:txBody>
+      </p:sp>
+      <p:sp>
+        <p:nvSpPr>
+          <p:cNvPr id="15" name="TextBox 14"/>
+          <p:cNvSpPr txBox="1"/>
+          <p:nvPr/>
+        </p:nvSpPr>
+        <p:spPr>
+          <a:xfrm>
+            <a:off x="731520" y="3072384"/>
+            <a:ext cx="411480" cy="457200"/>
+          </a:xfrm>
+          <a:prstGeom prst="rect">
+            <a:avLst/>
+          </a:prstGeom>
+          <a:noFill/>
+        </p:spPr>
+        <p:txBody>
+          <a:bodyPr wrap="square">
+            <a:spAutoFit/>
+          </a:bodyPr>
+          <a:lstStyle/>
+          <a:p>
+            <a:pPr algn="l">
+              <a:defRPr sz="1200" b="1">
+                <a:solidFill>
+                  <a:srgbClr val="00C0FF"/>
+                </a:solidFill>
+                <a:latin typeface="Microsoft YaHei"/>
+              </a:defRPr>
+            </a:pPr>
+            <a:r>
+              <a:t>04</a:t>
+            </a:r>
+          </a:p>
+        </p:txBody>
+      </p:sp>
+      <p:sp>
+        <p:nvSpPr>
+          <p:cNvPr id="16" name="TextBox 15"/>
+          <p:cNvSpPr txBox="1"/>
+          <p:nvPr/>
+        </p:nvSpPr>
+        <p:spPr>
+          <a:xfrm>
+            <a:off x="1188720" y="3072384"/>
+            <a:ext cx="10058400" cy="457200"/>
+          </a:xfrm>
+          <a:prstGeom prst="rect">
+            <a:avLst/>
+          </a:prstGeom>
+          <a:noFill/>
+        </p:spPr>
+        <p:txBody>
+          <a:bodyPr wrap="square">
+            <a:spAutoFit/>
+          </a:bodyPr>
+          <a:lstStyle/>
+          <a:p>
+            <a:pPr algn="l">
+              <a:defRPr sz="1400" b="0">
+                <a:solidFill>
+                  <a:srgbClr val="989AA8"/>
+                </a:solidFill>
+                <a:latin typeface="Microsoft YaHei"/>
+              </a:defRPr>
+            </a:pPr>
+            <a:r>
+              <a:t>即梦AI深度精通</a:t>
+            </a:r>
+          </a:p>
+        </p:txBody>
+      </p:sp>
+      <p:sp>
+        <p:nvSpPr>
+          <p:cNvPr id="17" name="TextBox 16"/>
+          <p:cNvSpPr txBox="1"/>
+          <p:nvPr/>
+        </p:nvSpPr>
+        <p:spPr>
+          <a:xfrm>
+            <a:off x="731520" y="3639312"/>
+            <a:ext cx="411480" cy="457200"/>
+          </a:xfrm>
+          <a:prstGeom prst="rect">
+            <a:avLst/>
+          </a:prstGeom>
+          <a:noFill/>
+        </p:spPr>
+        <p:txBody>
+          <a:bodyPr wrap="square">
+            <a:spAutoFit/>
+          </a:bodyPr>
+          <a:lstStyle/>
+          <a:p>
+            <a:pPr algn="l">
+              <a:defRPr sz="1200" b="1">
+                <a:solidFill>
+                  <a:srgbClr val="00C0FF"/>
+                </a:solidFill>
+                <a:latin typeface="Microsoft YaHei"/>
+              </a:defRPr>
+            </a:pPr>
+            <a:r>
+              <a:t>05</a:t>
+            </a:r>
+          </a:p>
+        </p:txBody>
+      </p:sp>
+      <p:sp>
+        <p:nvSpPr>
+          <p:cNvPr id="18" name="TextBox 17"/>
+          <p:cNvSpPr txBox="1"/>
+          <p:nvPr/>
+        </p:nvSpPr>
+        <p:spPr>
+          <a:xfrm>
+            <a:off x="1188720" y="3639312"/>
+            <a:ext cx="10058400" cy="457200"/>
+          </a:xfrm>
+          <a:prstGeom prst="rect">
+            <a:avLst/>
+          </a:prstGeom>
+          <a:noFill/>
+        </p:spPr>
+        <p:txBody>
+          <a:bodyPr wrap="square">
+            <a:spAutoFit/>
+          </a:bodyPr>
+          <a:lstStyle/>
+          <a:p>
+            <a:pPr algn="l">
+              <a:defRPr sz="1400" b="0">
+                <a:solidFill>
+                  <a:srgbClr val="989AA8"/>
+                </a:solidFill>
+                <a:latin typeface="Microsoft YaHei"/>
+              </a:defRPr>
+            </a:pPr>
+            <a:r>
+              <a:t>其他图像生成工具</a:t>
+            </a:r>
+          </a:p>
+        </p:txBody>
+      </p:sp>
+      <p:sp>
+        <p:nvSpPr>
+          <p:cNvPr id="19" name="TextBox 18"/>
+          <p:cNvSpPr txBox="1"/>
+          <p:nvPr/>
+        </p:nvSpPr>
+        <p:spPr>
+          <a:xfrm>
+            <a:off x="731520" y="4206240"/>
+            <a:ext cx="411480" cy="457200"/>
+          </a:xfrm>
+          <a:prstGeom prst="rect">
+            <a:avLst/>
+          </a:prstGeom>
+          <a:noFill/>
+        </p:spPr>
+        <p:txBody>
+          <a:bodyPr wrap="square">
+            <a:spAutoFit/>
+          </a:bodyPr>
+          <a:lstStyle/>
+          <a:p>
+            <a:pPr algn="l">
+              <a:defRPr sz="1200" b="1">
+                <a:solidFill>
+                  <a:srgbClr val="00C0FF"/>
+                </a:solidFill>
+                <a:latin typeface="Microsoft YaHei"/>
+              </a:defRPr>
+            </a:pPr>
+            <a:r>
+              <a:t>06</a:t>
+            </a:r>
+          </a:p>
+        </p:txBody>
+      </p:sp>
+      <p:sp>
+        <p:nvSpPr>
+          <p:cNvPr id="20" name="TextBox 19"/>
+          <p:cNvSpPr txBox="1"/>
+          <p:nvPr/>
+        </p:nvSpPr>
+        <p:spPr>
+          <a:xfrm>
+            <a:off x="1188720" y="4206240"/>
+            <a:ext cx="10058400" cy="457200"/>
+          </a:xfrm>
+          <a:prstGeom prst="rect">
+            <a:avLst/>
+          </a:prstGeom>
+          <a:noFill/>
+        </p:spPr>
+        <p:txBody>
+          <a:bodyPr wrap="square">
+            <a:spAutoFit/>
+          </a:bodyPr>
+          <a:lstStyle/>
+          <a:p>
+            <a:pPr algn="l">
+              <a:defRPr sz="1400" b="0">
+                <a:solidFill>
+                  <a:srgbClr val="989AA8"/>
+                </a:solidFill>
+                <a:latin typeface="Microsoft YaHei"/>
+              </a:defRPr>
+            </a:pPr>
+            <a:r>
+              <a:t>可灵AI深度精通</a:t>
+            </a:r>
+          </a:p>
+        </p:txBody>
+      </p:sp>
+      <p:sp>
+        <p:nvSpPr>
+          <p:cNvPr id="21" name="TextBox 20"/>
+          <p:cNvSpPr txBox="1"/>
+          <p:nvPr/>
+        </p:nvSpPr>
+        <p:spPr>
+          <a:xfrm>
+            <a:off x="731520" y="4773168"/>
+            <a:ext cx="411480" cy="457200"/>
+          </a:xfrm>
+          <a:prstGeom prst="rect">
+            <a:avLst/>
+          </a:prstGeom>
+          <a:noFill/>
+        </p:spPr>
+        <p:txBody>
+          <a:bodyPr wrap="square">
+            <a:spAutoFit/>
+          </a:bodyPr>
+          <a:lstStyle/>
+          <a:p>
+            <a:pPr algn="l">
+              <a:defRPr sz="1200" b="1">
+                <a:solidFill>
+                  <a:srgbClr val="00C0FF"/>
+                </a:solidFill>
+                <a:latin typeface="Microsoft YaHei"/>
+              </a:defRPr>
+            </a:pPr>
+            <a:r>
+              <a:t>07</a:t>
+            </a:r>
+          </a:p>
+        </p:txBody>
+      </p:sp>
+      <p:sp>
+        <p:nvSpPr>
+          <p:cNvPr id="22" name="TextBox 21"/>
+          <p:cNvSpPr txBox="1"/>
+          <p:nvPr/>
+        </p:nvSpPr>
+        <p:spPr>
+          <a:xfrm>
+            <a:off x="1188720" y="4773168"/>
+            <a:ext cx="10058400" cy="457200"/>
+          </a:xfrm>
+          <a:prstGeom prst="rect">
+            <a:avLst/>
+          </a:prstGeom>
+          <a:noFill/>
+        </p:spPr>
+        <p:txBody>
+          <a:bodyPr wrap="square">
+            <a:spAutoFit/>
+          </a:bodyPr>
+          <a:lstStyle/>
+          <a:p>
+            <a:pPr algn="l">
+              <a:defRPr sz="1400" b="0">
+                <a:solidFill>
+                  <a:srgbClr val="989AA8"/>
+                </a:solidFill>
+                <a:latin typeface="Microsoft YaHei"/>
+              </a:defRPr>
+            </a:pPr>
+            <a:r>
+              <a:t>Seedance 2.0深度精通</a:t>
+            </a:r>
+          </a:p>
+        </p:txBody>
+      </p:sp>
+      <p:sp>
+        <p:nvSpPr>
+          <p:cNvPr id="23" name="TextBox 22"/>
+          <p:cNvSpPr txBox="1"/>
+          <p:nvPr/>
+        </p:nvSpPr>
+        <p:spPr>
+          <a:xfrm>
+            <a:off x="731520" y="5340096"/>
+            <a:ext cx="411480" cy="457200"/>
+          </a:xfrm>
+          <a:prstGeom prst="rect">
+            <a:avLst/>
+          </a:prstGeom>
+          <a:noFill/>
+        </p:spPr>
+        <p:txBody>
+          <a:bodyPr wrap="square">
+            <a:spAutoFit/>
+          </a:bodyPr>
+          <a:lstStyle/>
+          <a:p>
+            <a:pPr algn="l">
+              <a:defRPr sz="1200" b="1">
+                <a:solidFill>
+                  <a:srgbClr val="00C0FF"/>
+                </a:solidFill>
+                <a:latin typeface="Microsoft YaHei"/>
+              </a:defRPr>
+            </a:pPr>
+            <a:r>
+              <a:t>08</a:t>
+            </a:r>
+          </a:p>
+        </p:txBody>
+      </p:sp>
+      <p:sp>
+        <p:nvSpPr>
+          <p:cNvPr id="24" name="TextBox 23"/>
+          <p:cNvSpPr txBox="1"/>
+          <p:nvPr/>
+        </p:nvSpPr>
+        <p:spPr>
+          <a:xfrm>
+            <a:off x="1188720" y="5340096"/>
+            <a:ext cx="10058400" cy="457200"/>
+          </a:xfrm>
+          <a:prstGeom prst="rect">
+            <a:avLst/>
+          </a:prstGeom>
+          <a:noFill/>
+        </p:spPr>
+        <p:txBody>
+          <a:bodyPr wrap="square">
+            <a:spAutoFit/>
+          </a:bodyPr>
+          <a:lstStyle/>
+          <a:p>
+            <a:pPr algn="l">
+              <a:defRPr sz="1400" b="0">
+                <a:solidFill>
+                  <a:srgbClr val="989AA8"/>
+                </a:solidFill>
+                <a:latin typeface="Microsoft YaHei"/>
+              </a:defRPr>
+            </a:pPr>
+            <a:r>
+              <a:t>海螺AI与Vidu</a:t>
+            </a:r>
+          </a:p>
+        </p:txBody>
+      </p:sp>
+      <p:sp>
+        <p:nvSpPr>
+          <p:cNvPr id="25" name="TextBox 24"/>
+          <p:cNvSpPr txBox="1"/>
+          <p:nvPr/>
+        </p:nvSpPr>
+        <p:spPr>
+          <a:xfrm>
+            <a:off x="6400800" y="1371600"/>
+            <a:ext cx="411480" cy="457200"/>
+          </a:xfrm>
+          <a:prstGeom prst="rect">
+            <a:avLst/>
+          </a:prstGeom>
+          <a:noFill/>
+        </p:spPr>
+        <p:txBody>
+          <a:bodyPr wrap="square">
+            <a:spAutoFit/>
+          </a:bodyPr>
+          <a:lstStyle/>
+          <a:p>
+            <a:pPr algn="l">
+              <a:defRPr sz="1200" b="1">
+                <a:solidFill>
+                  <a:srgbClr val="00C0FF"/>
+                </a:solidFill>
+                <a:latin typeface="Microsoft YaHei"/>
+              </a:defRPr>
+            </a:pPr>
+            <a:r>
+              <a:t>10</a:t>
+            </a:r>
+          </a:p>
+        </p:txBody>
+      </p:sp>
+      <p:sp>
+        <p:nvSpPr>
+          <p:cNvPr id="26" name="TextBox 25"/>
+          <p:cNvSpPr txBox="1"/>
+          <p:nvPr/>
+        </p:nvSpPr>
+        <p:spPr>
+          <a:xfrm>
+            <a:off x="6858000" y="1371600"/>
+            <a:ext cx="10058400" cy="457200"/>
+          </a:xfrm>
+          <a:prstGeom prst="rect">
+            <a:avLst/>
+          </a:prstGeom>
+          <a:noFill/>
+        </p:spPr>
+        <p:txBody>
+          <a:bodyPr wrap="square">
+            <a:spAutoFit/>
+          </a:bodyPr>
+          <a:lstStyle/>
+          <a:p>
+            <a:pPr algn="l">
+              <a:defRPr sz="1400" b="0">
+                <a:solidFill>
+                  <a:srgbClr val="989AA8"/>
+                </a:solidFill>
+                <a:latin typeface="Microsoft YaHei"/>
+              </a:defRPr>
+            </a:pPr>
+            <a:r>
+              <a:t>配音配乐与音画同步</a:t>
+            </a:r>
+          </a:p>
+        </p:txBody>
+      </p:sp>
+      <p:sp>
+        <p:nvSpPr>
+          <p:cNvPr id="27" name="TextBox 26"/>
+          <p:cNvSpPr txBox="1"/>
+          <p:nvPr/>
+        </p:nvSpPr>
+        <p:spPr>
+          <a:xfrm>
+            <a:off x="6400800" y="1938528"/>
+            <a:ext cx="411480" cy="457200"/>
+          </a:xfrm>
+          <a:prstGeom prst="rect">
+            <a:avLst/>
+          </a:prstGeom>
+          <a:noFill/>
+        </p:spPr>
+        <p:txBody>
+          <a:bodyPr wrap="square">
+            <a:spAutoFit/>
+          </a:bodyPr>
+          <a:lstStyle/>
+          <a:p>
+            <a:pPr algn="l">
+              <a:defRPr sz="1200" b="1">
+                <a:solidFill>
+                  <a:srgbClr val="00C0FF"/>
+                </a:solidFill>
+                <a:latin typeface="Microsoft YaHei"/>
+              </a:defRPr>
+            </a:pPr>
+            <a:r>
+              <a:t>11</a:t>
+            </a:r>
+          </a:p>
+        </p:txBody>
+      </p:sp>
+      <p:sp>
+        <p:nvSpPr>
+          <p:cNvPr id="28" name="TextBox 27"/>
+          <p:cNvSpPr txBox="1"/>
+          <p:nvPr/>
+        </p:nvSpPr>
+        <p:spPr>
+          <a:xfrm>
+            <a:off x="6858000" y="1938528"/>
+            <a:ext cx="10058400" cy="457200"/>
+          </a:xfrm>
+          <a:prstGeom prst="rect">
+            <a:avLst/>
+          </a:prstGeom>
+          <a:noFill/>
+        </p:spPr>
+        <p:txBody>
+          <a:bodyPr wrap="square">
+            <a:spAutoFit/>
+          </a:bodyPr>
+          <a:lstStyle/>
+          <a:p>
+            <a:pPr algn="l">
+              <a:defRPr sz="1400" b="0">
+                <a:solidFill>
+                  <a:srgbClr val="989AA8"/>
+                </a:solidFill>
+                <a:latin typeface="Microsoft YaHei"/>
+              </a:defRPr>
+            </a:pPr>
+            <a:r>
+              <a:t>剪辑与后期全流程</a:t>
+            </a:r>
+          </a:p>
+        </p:txBody>
+      </p:sp>
+      <p:sp>
+        <p:nvSpPr>
+          <p:cNvPr id="29" name="TextBox 28"/>
+          <p:cNvSpPr txBox="1"/>
+          <p:nvPr/>
+        </p:nvSpPr>
+        <p:spPr>
+          <a:xfrm>
+            <a:off x="6400800" y="2505456"/>
+            <a:ext cx="411480" cy="457200"/>
+          </a:xfrm>
+          <a:prstGeom prst="rect">
+            <a:avLst/>
+          </a:prstGeom>
+          <a:noFill/>
+        </p:spPr>
+        <p:txBody>
+          <a:bodyPr wrap="square">
+            <a:spAutoFit/>
+          </a:bodyPr>
+          <a:lstStyle/>
+          <a:p>
+            <a:pPr algn="l">
+              <a:defRPr sz="1200" b="1">
+                <a:solidFill>
+                  <a:srgbClr val="00C0FF"/>
+                </a:solidFill>
+                <a:latin typeface="Microsoft YaHei"/>
+              </a:defRPr>
+            </a:pPr>
+            <a:r>
+              <a:t>12</a:t>
+            </a:r>
+          </a:p>
+        </p:txBody>
+      </p:sp>
+      <p:sp>
+        <p:nvSpPr>
+          <p:cNvPr id="30" name="TextBox 29"/>
+          <p:cNvSpPr txBox="1"/>
+          <p:nvPr/>
+        </p:nvSpPr>
+        <p:spPr>
+          <a:xfrm>
+            <a:off x="6858000" y="2505456"/>
+            <a:ext cx="10058400" cy="457200"/>
+          </a:xfrm>
+          <a:prstGeom prst="rect">
+            <a:avLst/>
+          </a:prstGeom>
+          <a:noFill/>
+        </p:spPr>
+        <p:txBody>
+          <a:bodyPr wrap="square">
+            <a:spAutoFit/>
+          </a:bodyPr>
+          <a:lstStyle/>
+          <a:p>
+            <a:pPr algn="l">
+              <a:defRPr sz="1400" b="0">
+                <a:solidFill>
+                  <a:srgbClr val="989AA8"/>
+                </a:solidFill>
+                <a:latin typeface="Microsoft YaHei"/>
+              </a:defRPr>
+            </a:pPr>
+            <a:r>
+              <a:t>一站式平台精讲</a:t>
+            </a:r>
+          </a:p>
+        </p:txBody>
+      </p:sp>
+      <p:sp>
+        <p:nvSpPr>
+          <p:cNvPr id="31" name="TextBox 30"/>
+          <p:cNvSpPr txBox="1"/>
+          <p:nvPr/>
+        </p:nvSpPr>
+        <p:spPr>
+          <a:xfrm>
+            <a:off x="6400800" y="3072384"/>
+            <a:ext cx="411480" cy="457200"/>
+          </a:xfrm>
+          <a:prstGeom prst="rect">
+            <a:avLst/>
+          </a:prstGeom>
+          <a:noFill/>
+        </p:spPr>
+        <p:txBody>
+          <a:bodyPr wrap="square">
+            <a:spAutoFit/>
+          </a:bodyPr>
+          <a:lstStyle/>
+          <a:p>
+            <a:pPr algn="l">
+              <a:defRPr sz="1200" b="1">
+                <a:solidFill>
+                  <a:srgbClr val="00C0FF"/>
+                </a:solidFill>
+                <a:latin typeface="Microsoft YaHei"/>
+              </a:defRPr>
+            </a:pPr>
+            <a:r>
+              <a:t>13</a:t>
+            </a:r>
+          </a:p>
+        </p:txBody>
+      </p:sp>
+      <p:sp>
+        <p:nvSpPr>
+          <p:cNvPr id="32" name="TextBox 31"/>
+          <p:cNvSpPr txBox="1"/>
+          <p:nvPr/>
+        </p:nvSpPr>
+        <p:spPr>
+          <a:xfrm>
+            <a:off x="6858000" y="3072384"/>
+            <a:ext cx="10058400" cy="457200"/>
+          </a:xfrm>
+          <a:prstGeom prst="rect">
+            <a:avLst/>
+          </a:prstGeom>
+          <a:noFill/>
+        </p:spPr>
+        <p:txBody>
+          <a:bodyPr wrap="square">
+            <a:spAutoFit/>
+          </a:bodyPr>
+          <a:lstStyle/>
+          <a:p>
+            <a:pPr algn="l">
+              <a:defRPr sz="1400" b="0">
+                <a:solidFill>
+                  <a:srgbClr val="989AA8"/>
+                </a:solidFill>
+                <a:latin typeface="Microsoft YaHei"/>
+              </a:defRPr>
+            </a:pPr>
+            <a:r>
+              <a:t>ComfyUI工作流</a:t>
+            </a:r>
+          </a:p>
+        </p:txBody>
+      </p:sp>
+      <p:sp>
+        <p:nvSpPr>
+          <p:cNvPr id="33" name="TextBox 32"/>
+          <p:cNvSpPr txBox="1"/>
+          <p:nvPr/>
+        </p:nvSpPr>
+        <p:spPr>
+          <a:xfrm>
+            <a:off x="6400800" y="3639312"/>
+            <a:ext cx="411480" cy="457200"/>
+          </a:xfrm>
+          <a:prstGeom prst="rect">
+            <a:avLst/>
+          </a:prstGeom>
+          <a:noFill/>
+        </p:spPr>
+        <p:txBody>
+          <a:bodyPr wrap="square">
+            <a:spAutoFit/>
+          </a:bodyPr>
+          <a:lstStyle/>
+          <a:p>
+            <a:pPr algn="l">
+              <a:defRPr sz="1200" b="1">
+                <a:solidFill>
+                  <a:srgbClr val="00C0FF"/>
+                </a:solidFill>
+                <a:latin typeface="Microsoft YaHei"/>
+              </a:defRPr>
+            </a:pPr>
+            <a:r>
+              <a:t>14</a:t>
+            </a:r>
+          </a:p>
+        </p:txBody>
+      </p:sp>
+      <p:sp>
+        <p:nvSpPr>
+          <p:cNvPr id="34" name="TextBox 33"/>
+          <p:cNvSpPr txBox="1"/>
+          <p:nvPr/>
+        </p:nvSpPr>
+        <p:spPr>
+          <a:xfrm>
+            <a:off x="6858000" y="3639312"/>
+            <a:ext cx="10058400" cy="457200"/>
+          </a:xfrm>
+          <a:prstGeom prst="rect">
+            <a:avLst/>
+          </a:prstGeom>
+          <a:noFill/>
+        </p:spPr>
+        <p:txBody>
+          <a:bodyPr wrap="square">
+            <a:spAutoFit/>
+          </a:bodyPr>
+          <a:lstStyle/>
+          <a:p>
+            <a:pPr algn="l">
+              <a:defRPr sz="1400" b="0">
+                <a:solidFill>
+                  <a:srgbClr val="989AA8"/>
+                </a:solidFill>
+                <a:latin typeface="Microsoft YaHei"/>
+              </a:defRPr>
+            </a:pPr>
+            <a:r>
+              <a:t>工业化生产与团队协作</a:t>
+            </a:r>
+          </a:p>
+        </p:txBody>
+      </p:sp>
+      <p:sp>
+        <p:nvSpPr>
+          <p:cNvPr id="35" name="TextBox 34"/>
+          <p:cNvSpPr txBox="1"/>
+          <p:nvPr/>
+        </p:nvSpPr>
+        <p:spPr>
+          <a:xfrm>
+            <a:off x="6400800" y="4206240"/>
+            <a:ext cx="411480" cy="457200"/>
+          </a:xfrm>
+          <a:prstGeom prst="rect">
+            <a:avLst/>
+          </a:prstGeom>
+          <a:noFill/>
+        </p:spPr>
+        <p:txBody>
+          <a:bodyPr wrap="square">
+            <a:spAutoFit/>
+          </a:bodyPr>
+          <a:lstStyle/>
+          <a:p>
+            <a:pPr algn="l">
+              <a:defRPr sz="1200" b="1">
+                <a:solidFill>
+                  <a:srgbClr val="00C0FF"/>
+                </a:solidFill>
+                <a:latin typeface="Microsoft YaHei"/>
+              </a:defRPr>
+            </a:pPr>
+            <a:r>
+              <a:t>15</a:t>
+            </a:r>
+          </a:p>
+        </p:txBody>
+      </p:sp>
+      <p:sp>
+        <p:nvSpPr>
+          <p:cNvPr id="36" name="TextBox 35"/>
+          <p:cNvSpPr txBox="1"/>
+          <p:nvPr/>
+        </p:nvSpPr>
+        <p:spPr>
+          <a:xfrm>
+            <a:off x="6858000" y="4206240"/>
+            <a:ext cx="10058400" cy="457200"/>
+          </a:xfrm>
+          <a:prstGeom prst="rect">
+            <a:avLst/>
+          </a:prstGeom>
+          <a:noFill/>
+        </p:spPr>
+        <p:txBody>
+          <a:bodyPr wrap="square">
+            <a:spAutoFit/>
+          </a:bodyPr>
+          <a:lstStyle/>
+          <a:p>
+            <a:pPr algn="l">
+              <a:defRPr sz="1400" b="0">
+                <a:solidFill>
+                  <a:srgbClr val="989AA8"/>
+                </a:solidFill>
+                <a:latin typeface="Microsoft YaHei"/>
+              </a:defRPr>
+            </a:pPr>
+            <a:r>
+              <a:t>平台分发与商业变现</a:t>
+            </a:r>
+          </a:p>
+        </p:txBody>
+      </p:sp>
+      <p:sp>
+        <p:nvSpPr>
+          <p:cNvPr id="37" name="TextBox 36"/>
+          <p:cNvSpPr txBox="1"/>
+          <p:nvPr/>
+        </p:nvSpPr>
+        <p:spPr>
+          <a:xfrm>
+            <a:off x="6400800" y="4773168"/>
+            <a:ext cx="411480" cy="457200"/>
+          </a:xfrm>
+          <a:prstGeom prst="rect">
+            <a:avLst/>
+          </a:prstGeom>
+          <a:noFill/>
+        </p:spPr>
+        <p:txBody>
+          <a:bodyPr wrap="square">
+            <a:spAutoFit/>
+          </a:bodyPr>
+          <a:lstStyle/>
+          <a:p>
+            <a:pPr algn="l">
+              <a:defRPr sz="1200" b="1">
+                <a:solidFill>
+                  <a:srgbClr val="00C0FF"/>
+                </a:solidFill>
+                <a:latin typeface="Microsoft YaHei"/>
+              </a:defRPr>
+            </a:pPr>
+            <a:r>
+              <a:t>16</a:t>
+            </a:r>
+          </a:p>
+        </p:txBody>
+      </p:sp>
+      <p:sp>
+        <p:nvSpPr>
+          <p:cNvPr id="38" name="TextBox 37"/>
+          <p:cNvSpPr txBox="1"/>
+          <p:nvPr/>
+        </p:nvSpPr>
+        <p:spPr>
+          <a:xfrm>
+            <a:off x="6858000" y="4773168"/>
+            <a:ext cx="10058400" cy="457200"/>
+          </a:xfrm>
+          <a:prstGeom prst="rect">
+            <a:avLst/>
+          </a:prstGeom>
+          <a:noFill/>
+        </p:spPr>
+        <p:txBody>
+          <a:bodyPr wrap="square">
+            <a:spAutoFit/>
+          </a:bodyPr>
+          <a:lstStyle/>
+          <a:p>
+            <a:pPr algn="l">
+              <a:defRPr sz="1400" b="0">
+                <a:solidFill>
+                  <a:srgbClr val="989AA8"/>
+                </a:solidFill>
+                <a:latin typeface="Microsoft YaHei"/>
+              </a:defRPr>
+            </a:pPr>
+            <a:r>
+              <a:t>合规要求与行业规范</a:t>
+            </a:r>
+          </a:p>
+        </p:txBody>
+      </p:sp>
+      <p:sp>
+        <p:nvSpPr>
+          <p:cNvPr id="39" name="TextBox 38"/>
+          <p:cNvSpPr txBox="1"/>
+          <p:nvPr/>
+        </p:nvSpPr>
+        <p:spPr>
+          <a:xfrm>
+            <a:off x="6400800" y="5340096"/>
+            <a:ext cx="411480" cy="457200"/>
+          </a:xfrm>
+          <a:prstGeom prst="rect">
+            <a:avLst/>
+          </a:prstGeom>
+          <a:noFill/>
+        </p:spPr>
+        <p:txBody>
+          <a:bodyPr wrap="square">
+            <a:spAutoFit/>
+          </a:bodyPr>
+          <a:lstStyle/>
+          <a:p>
+            <a:pPr algn="l">
+              <a:defRPr sz="1200" b="1">
+                <a:solidFill>
+                  <a:srgbClr val="00C0FF"/>
+                </a:solidFill>
+                <a:latin typeface="Microsoft YaHei"/>
+              </a:defRPr>
+            </a:pPr>
+            <a:r>
+              <a:t>17</a:t>
+            </a:r>
+          </a:p>
+        </p:txBody>
+      </p:sp>
+      <p:sp>
+        <p:nvSpPr>
+          <p:cNvPr id="40" name="TextBox 39"/>
+          <p:cNvSpPr txBox="1"/>
+          <p:nvPr/>
+        </p:nvSpPr>
+        <p:spPr>
+          <a:xfrm>
+            <a:off x="6858000" y="5340096"/>
+            <a:ext cx="10058400" cy="457200"/>
+          </a:xfrm>
+          <a:prstGeom prst="rect">
+            <a:avLst/>
+          </a:prstGeom>
+          <a:noFill/>
+        </p:spPr>
+        <p:txBody>
+          <a:bodyPr wrap="square">
+            <a:spAutoFit/>
+          </a:bodyPr>
+          <a:lstStyle/>
+          <a:p>
+            <a:pPr algn="l">
+              <a:defRPr sz="1400" b="0">
+                <a:solidFill>
+                  <a:srgbClr val="989AA8"/>
+                </a:solidFill>
+                <a:latin typeface="Microsoft YaHei"/>
+              </a:defRPr>
+            </a:pPr>
+            <a:r>
+              <a:t>综合实战项目</a:t>
+            </a:r>
+          </a:p>
+        </p:txBody>
+      </p:sp>
+      <p:sp>
+        <p:nvSpPr>
+          <p:cNvPr id="41" name="Rectangle 40"/>
+          <p:cNvSpPr/>
+          <p:nvPr/>
+        </p:nvSpPr>
+        <p:spPr>
+          <a:xfrm>
+            <a:off x="0" y="6446520"/>
+            <a:ext cx="12191695" cy="12700"/>
+          </a:xfrm>
+          <a:prstGeom prst="rect">
+            <a:avLst/>
+          </a:prstGeom>
+          <a:solidFill>
+            <a:srgbClr val="222432"/>
+          </a:solidFill>
+          <a:ln>
+            <a:noFill/>
+          </a:ln>
+        </p:spPr>
+        <p:style>
+          <a:lnRef idx="1">
+            <a:schemeClr val="accent1"/>
+          </a:lnRef>
+          <a:fillRef idx="3">
+            <a:schemeClr val="accent1"/>
+          </a:fillRef>
+          <a:effectRef idx="2">
+            <a:schemeClr val="accent1"/>
+          </a:effectRef>
+          <a:fontRef idx="minor">
+            <a:schemeClr val="lt1"/>
+          </a:fontRef>
+        </p:style>
+        <p:txBody>
+          <a:bodyPr rtlCol="0" anchor="ctr"/>
+          <a:lstStyle/>
+          <a:p>
+            <a:pPr algn="ctr"/>
+          </a:p>
+        </p:txBody>
+      </p:sp>
+      <p:sp>
+        <p:nvSpPr>
+          <p:cNvPr id="42" name="TextBox 41"/>
+          <p:cNvSpPr txBox="1"/>
+          <p:nvPr/>
+        </p:nvSpPr>
+        <p:spPr>
+          <a:xfrm>
+            <a:off x="731520" y="6492240"/>
+            <a:ext cx="4572000" cy="274320"/>
+          </a:xfrm>
+          <a:prstGeom prst="rect">
+            <a:avLst/>
+          </a:prstGeom>
+          <a:noFill/>
+        </p:spPr>
+        <p:txBody>
+          <a:bodyPr wrap="square">
+            <a:spAutoFit/>
+          </a:bodyPr>
+          <a:lstStyle/>
+          <a:p>
+            <a:pPr algn="l">
+              <a:defRPr sz="900" b="0">
+                <a:solidFill>
+                  <a:srgbClr val="555768"/>
+                </a:solidFill>
+                <a:latin typeface="Microsoft YaHei"/>
+              </a:defRPr>
+            </a:pPr>
+            <a:r>
               <a:t>模块00 · 课程导论</a:t>
+            </a:r>
+          </a:p>
+        </p:txBody>
+      </p:sp>
+      <p:sp>
+        <p:nvSpPr>
+          <p:cNvPr id="43" name="TextBox 42"/>
+          <p:cNvSpPr txBox="1"/>
+          <p:nvPr/>
+        </p:nvSpPr>
+        <p:spPr>
+          <a:xfrm>
+            <a:off x="10789920" y="6492240"/>
+            <a:ext cx="1097280" cy="274320"/>
+          </a:xfrm>
+          <a:prstGeom prst="rect">
+            <a:avLst/>
+          </a:prstGeom>
+          <a:noFill/>
+        </p:spPr>
+        <p:txBody>
+          <a:bodyPr wrap="square">
+            <a:spAutoFit/>
+          </a:bodyPr>
+          <a:lstStyle/>
+          <a:p>
+            <a:pPr algn="r">
+              <a:defRPr sz="900" b="0">
+                <a:solidFill>
+                  <a:srgbClr val="555768"/>
+                </a:solidFill>
+                <a:latin typeface="Microsoft YaHei"/>
+              </a:defRPr>
+            </a:pPr>
+            <a:r>
+              <a:t>1</a:t>
             </a:r>
           </a:p>
         </p:txBody>
@@ -4992,7 +5680,7 @@
     <p:bg>
       <p:bgPr>
         <a:solidFill>
-          <a:srgbClr val="08080C"/>
+          <a:srgbClr val="09090F"/>
         </a:solidFill>
         <a:effectLst/>
       </p:bgPr>
@@ -5006,56 +5694,20 @@
       <p:grpSpPr/>
       <p:sp>
         <p:nvSpPr>
-          <p:cNvPr id="2" name="TextBox 1"/>
-          <p:cNvSpPr txBox="1"/>
-          <p:nvPr/>
-        </p:nvSpPr>
-        <p:spPr>
-          <a:xfrm>
-            <a:off x="731520" y="365760"/>
-            <a:ext cx="10058400" cy="548640"/>
-          </a:xfrm>
-          <a:prstGeom prst="rect">
-            <a:avLst/>
-          </a:prstGeom>
-          <a:noFill/>
-        </p:spPr>
-        <p:txBody>
-          <a:bodyPr wrap="square">
-            <a:spAutoFit/>
-          </a:bodyPr>
-          <a:lstStyle/>
-          <a:p>
-            <a:pPr algn="l">
-              <a:defRPr sz="2400" b="1">
-                <a:solidFill>
-                  <a:srgbClr val="F0F0F5"/>
-                </a:solidFill>
-                <a:latin typeface="Microsoft YaHei"/>
-              </a:defRPr>
-            </a:pPr>
-            <a:r>
-              <a:t>课程目标</a:t>
-            </a:r>
-          </a:p>
-        </p:txBody>
-      </p:sp>
-      <p:sp>
-        <p:nvSpPr>
-          <p:cNvPr id="3" name="Rectangle 2"/>
+          <p:cNvPr id="2" name="Rectangle 1"/>
           <p:cNvSpPr/>
           <p:nvPr/>
         </p:nvSpPr>
         <p:spPr>
           <a:xfrm>
-            <a:off x="731520" y="960120"/>
-            <a:ext cx="1828800" cy="19050"/>
+            <a:off x="0" y="0"/>
+            <a:ext cx="12191695" cy="25400"/>
           </a:xfrm>
           <a:prstGeom prst="rect">
             <a:avLst/>
           </a:prstGeom>
           <a:solidFill>
-            <a:srgbClr val="00BFFF"/>
+            <a:srgbClr val="00C0FF"/>
           </a:solidFill>
           <a:ln>
             <a:noFill/>
@@ -5085,20 +5737,20 @@
       </p:sp>
       <p:sp>
         <p:nvSpPr>
-          <p:cNvPr id="4" name="Rectangle 3"/>
+          <p:cNvPr id="3" name="Rectangle 2"/>
           <p:cNvSpPr/>
           <p:nvPr/>
         </p:nvSpPr>
         <p:spPr>
           <a:xfrm>
-            <a:off x="731520" y="1325880"/>
-            <a:ext cx="45720" cy="457200"/>
+            <a:off x="0" y="25400"/>
+            <a:ext cx="12191695" cy="25400"/>
           </a:xfrm>
           <a:prstGeom prst="rect">
             <a:avLst/>
           </a:prstGeom>
           <a:solidFill>
-            <a:srgbClr val="00BFFF"/>
+            <a:srgbClr val="007399"/>
           </a:solidFill>
           <a:ln>
             <a:noFill/>
@@ -5128,56 +5780,20 @@
       </p:sp>
       <p:sp>
         <p:nvSpPr>
-          <p:cNvPr id="5" name="TextBox 4"/>
-          <p:cNvSpPr txBox="1"/>
-          <p:nvPr/>
-        </p:nvSpPr>
-        <p:spPr>
-          <a:xfrm>
-            <a:off x="1005840" y="1280160"/>
-            <a:ext cx="10515600" cy="594360"/>
-          </a:xfrm>
-          <a:prstGeom prst="rect">
-            <a:avLst/>
-          </a:prstGeom>
-          <a:noFill/>
-        </p:spPr>
-        <p:txBody>
-          <a:bodyPr wrap="square">
-            <a:spAutoFit/>
-          </a:bodyPr>
-          <a:lstStyle/>
-          <a:p>
-            <a:pPr algn="l">
-              <a:defRPr sz="1500" b="0">
-                <a:solidFill>
-                  <a:srgbClr val="9090A0"/>
-                </a:solidFill>
-                <a:latin typeface="Microsoft YaHei"/>
-              </a:defRPr>
-            </a:pPr>
-            <a:r>
-              <a:t>掌握AI漫剧从剧本到成片的完整制作流程</a:t>
-            </a:r>
-          </a:p>
-        </p:txBody>
-      </p:sp>
-      <p:sp>
-        <p:nvSpPr>
-          <p:cNvPr id="6" name="Rectangle 5"/>
+          <p:cNvPr id="4" name="Rectangle 3"/>
           <p:cNvSpPr/>
           <p:nvPr/>
         </p:nvSpPr>
         <p:spPr>
           <a:xfrm>
-            <a:off x="731520" y="2103120"/>
-            <a:ext cx="45720" cy="457200"/>
+            <a:off x="0" y="50800"/>
+            <a:ext cx="12191695" cy="12700"/>
           </a:xfrm>
           <a:prstGeom prst="rect">
             <a:avLst/>
           </a:prstGeom>
           <a:solidFill>
-            <a:srgbClr val="00BFFF"/>
+            <a:srgbClr val="00394C"/>
           </a:solidFill>
           <a:ln>
             <a:noFill/>
@@ -5207,56 +5823,20 @@
       </p:sp>
       <p:sp>
         <p:nvSpPr>
-          <p:cNvPr id="7" name="TextBox 6"/>
-          <p:cNvSpPr txBox="1"/>
-          <p:nvPr/>
-        </p:nvSpPr>
-        <p:spPr>
-          <a:xfrm>
-            <a:off x="1005840" y="2057400"/>
-            <a:ext cx="10515600" cy="594360"/>
-          </a:xfrm>
-          <a:prstGeom prst="rect">
-            <a:avLst/>
-          </a:prstGeom>
-          <a:noFill/>
-        </p:spPr>
-        <p:txBody>
-          <a:bodyPr wrap="square">
-            <a:spAutoFit/>
-          </a:bodyPr>
-          <a:lstStyle/>
-          <a:p>
-            <a:pPr algn="l">
-              <a:defRPr sz="1500" b="0">
-                <a:solidFill>
-                  <a:srgbClr val="9090A0"/>
-                </a:solidFill>
-                <a:latin typeface="Microsoft YaHei"/>
-              </a:defRPr>
-            </a:pPr>
-            <a:r>
-              <a:t>精通即梦AI、可灵AI、Seedance 2.0等核心工具</a:t>
-            </a:r>
-          </a:p>
-        </p:txBody>
-      </p:sp>
-      <p:sp>
-        <p:nvSpPr>
-          <p:cNvPr id="8" name="Rectangle 7"/>
+          <p:cNvPr id="5" name="Rectangle 4"/>
           <p:cNvSpPr/>
           <p:nvPr/>
         </p:nvSpPr>
         <p:spPr>
           <a:xfrm>
-            <a:off x="731520" y="2880360"/>
-            <a:ext cx="45720" cy="457200"/>
+            <a:off x="0" y="63500"/>
+            <a:ext cx="12191695" cy="960120"/>
           </a:xfrm>
           <a:prstGeom prst="rect">
             <a:avLst/>
           </a:prstGeom>
           <a:solidFill>
-            <a:srgbClr val="00BFFF"/>
+            <a:srgbClr val="12141E"/>
           </a:solidFill>
           <a:ln>
             <a:noFill/>
@@ -5286,56 +5866,20 @@
       </p:sp>
       <p:sp>
         <p:nvSpPr>
-          <p:cNvPr id="9" name="TextBox 8"/>
-          <p:cNvSpPr txBox="1"/>
-          <p:nvPr/>
-        </p:nvSpPr>
-        <p:spPr>
-          <a:xfrm>
-            <a:off x="1005840" y="2834640"/>
-            <a:ext cx="10515600" cy="594360"/>
-          </a:xfrm>
-          <a:prstGeom prst="rect">
-            <a:avLst/>
-          </a:prstGeom>
-          <a:noFill/>
-        </p:spPr>
-        <p:txBody>
-          <a:bodyPr wrap="square">
-            <a:spAutoFit/>
-          </a:bodyPr>
-          <a:lstStyle/>
-          <a:p>
-            <a:pPr algn="l">
-              <a:defRPr sz="1500" b="0">
-                <a:solidFill>
-                  <a:srgbClr val="9090A0"/>
-                </a:solidFill>
-                <a:latin typeface="Microsoft YaHei"/>
-              </a:defRPr>
-            </a:pPr>
-            <a:r>
-              <a:t>能独立制作一集完整的AI漫剧</a:t>
-            </a:r>
-          </a:p>
-        </p:txBody>
-      </p:sp>
-      <p:sp>
-        <p:nvSpPr>
-          <p:cNvPr id="10" name="Rectangle 9"/>
+          <p:cNvPr id="6" name="Rectangle 5"/>
           <p:cNvSpPr/>
           <p:nvPr/>
         </p:nvSpPr>
         <p:spPr>
           <a:xfrm>
-            <a:off x="731520" y="3657600"/>
-            <a:ext cx="45720" cy="457200"/>
+            <a:off x="0" y="63500"/>
+            <a:ext cx="73152" cy="960120"/>
           </a:xfrm>
           <a:prstGeom prst="rect">
             <a:avLst/>
           </a:prstGeom>
           <a:solidFill>
-            <a:srgbClr val="00BFFF"/>
+            <a:srgbClr val="00C0FF"/>
           </a:solidFill>
           <a:ln>
             <a:noFill/>
@@ -5365,14 +5909,14 @@
       </p:sp>
       <p:sp>
         <p:nvSpPr>
-          <p:cNvPr id="11" name="TextBox 10"/>
+          <p:cNvPr id="7" name="TextBox 6"/>
           <p:cNvSpPr txBox="1"/>
           <p:nvPr/>
         </p:nvSpPr>
         <p:spPr>
           <a:xfrm>
-            <a:off x="1005840" y="3611880"/>
-            <a:ext cx="10515600" cy="594360"/>
+            <a:off x="640080" y="164592"/>
+            <a:ext cx="10058400" cy="594360"/>
           </a:xfrm>
           <a:prstGeom prst="rect">
             <a:avLst/>
@@ -5386,35 +5930,35 @@
           <a:lstStyle/>
           <a:p>
             <a:pPr algn="l">
-              <a:defRPr sz="1500" b="0">
+              <a:defRPr sz="2400" b="1">
                 <a:solidFill>
-                  <a:srgbClr val="9090A0"/>
+                  <a:srgbClr val="EEEEF4"/>
                 </a:solidFill>
                 <a:latin typeface="Microsoft YaHei"/>
               </a:defRPr>
             </a:pPr>
             <a:r>
-              <a:t>了解平台分发与商业变现的路径</a:t>
-            </a:r>
-          </a:p>
-        </p:txBody>
-      </p:sp>
-      <p:sp>
-        <p:nvSpPr>
-          <p:cNvPr id="12" name="Rectangle 11"/>
+              <a:t>课程目标</a:t>
+            </a:r>
+          </a:p>
+        </p:txBody>
+      </p:sp>
+      <p:sp>
+        <p:nvSpPr>
+          <p:cNvPr id="8" name="Rectangle 7"/>
           <p:cNvSpPr/>
           <p:nvPr/>
         </p:nvSpPr>
         <p:spPr>
           <a:xfrm>
-            <a:off x="731520" y="4434840"/>
-            <a:ext cx="45720" cy="457200"/>
+            <a:off x="0" y="1097280"/>
+            <a:ext cx="12191695" cy="12700"/>
           </a:xfrm>
           <a:prstGeom prst="rect">
             <a:avLst/>
           </a:prstGeom>
           <a:solidFill>
-            <a:srgbClr val="00BFFF"/>
+            <a:srgbClr val="222432"/>
           </a:solidFill>
           <a:ln>
             <a:noFill/>
@@ -5444,56 +5988,20 @@
       </p:sp>
       <p:sp>
         <p:nvSpPr>
-          <p:cNvPr id="13" name="TextBox 12"/>
-          <p:cNvSpPr txBox="1"/>
-          <p:nvPr/>
-        </p:nvSpPr>
-        <p:spPr>
-          <a:xfrm>
-            <a:off x="1005840" y="4389120"/>
-            <a:ext cx="10515600" cy="594360"/>
-          </a:xfrm>
-          <a:prstGeom prst="rect">
-            <a:avLst/>
-          </a:prstGeom>
-          <a:noFill/>
-        </p:spPr>
-        <p:txBody>
-          <a:bodyPr wrap="square">
-            <a:spAutoFit/>
-          </a:bodyPr>
-          <a:lstStyle/>
-          <a:p>
-            <a:pPr algn="l">
-              <a:defRPr sz="1500" b="0">
-                <a:solidFill>
-                  <a:srgbClr val="9090A0"/>
-                </a:solidFill>
-                <a:latin typeface="Microsoft YaHei"/>
-              </a:defRPr>
-            </a:pPr>
-            <a:r>
-              <a:t>建立工业化生产思维，实现高效量产</a:t>
-            </a:r>
-          </a:p>
-        </p:txBody>
-      </p:sp>
-      <p:sp>
-        <p:nvSpPr>
-          <p:cNvPr id="14" name="Rectangle 13"/>
+          <p:cNvPr id="9" name="Rectangle 8"/>
           <p:cNvSpPr/>
           <p:nvPr/>
         </p:nvSpPr>
         <p:spPr>
           <a:xfrm>
-            <a:off x="0" y="6446520"/>
-            <a:ext cx="12191695" cy="19050"/>
+            <a:off x="731520" y="1444752"/>
+            <a:ext cx="36576" cy="411480"/>
           </a:xfrm>
           <a:prstGeom prst="rect">
             <a:avLst/>
           </a:prstGeom>
           <a:solidFill>
-            <a:srgbClr val="1E1E2A"/>
+            <a:srgbClr val="00C0FF"/>
           </a:solidFill>
           <a:ln>
             <a:noFill/>
@@ -5523,14 +6031,14 @@
       </p:sp>
       <p:sp>
         <p:nvSpPr>
-          <p:cNvPr id="15" name="TextBox 14"/>
+          <p:cNvPr id="10" name="TextBox 9"/>
           <p:cNvSpPr txBox="1"/>
           <p:nvPr/>
         </p:nvSpPr>
         <p:spPr>
           <a:xfrm>
-            <a:off x="731520" y="6492240"/>
-            <a:ext cx="4572000" cy="274320"/>
+            <a:off x="914400" y="1371600"/>
+            <a:ext cx="10515600" cy="548640"/>
           </a:xfrm>
           <a:prstGeom prst="rect">
             <a:avLst/>
@@ -5544,15 +6052,446 @@
           <a:lstStyle/>
           <a:p>
             <a:pPr algn="l">
-              <a:defRPr sz="900" b="0">
+              <a:defRPr sz="1500" b="0">
                 <a:solidFill>
-                  <a:srgbClr val="505060"/>
+                  <a:srgbClr val="989AA8"/>
                 </a:solidFill>
                 <a:latin typeface="Microsoft YaHei"/>
               </a:defRPr>
             </a:pPr>
             <a:r>
+              <a:t>掌握AI漫剧从剧本到成片的完整制作流程</a:t>
+            </a:r>
+          </a:p>
+        </p:txBody>
+      </p:sp>
+      <p:sp>
+        <p:nvSpPr>
+          <p:cNvPr id="11" name="Rectangle 10"/>
+          <p:cNvSpPr/>
+          <p:nvPr/>
+        </p:nvSpPr>
+        <p:spPr>
+          <a:xfrm>
+            <a:off x="731520" y="2249424"/>
+            <a:ext cx="36576" cy="411480"/>
+          </a:xfrm>
+          <a:prstGeom prst="rect">
+            <a:avLst/>
+          </a:prstGeom>
+          <a:solidFill>
+            <a:srgbClr val="00C0FF"/>
+          </a:solidFill>
+          <a:ln>
+            <a:noFill/>
+          </a:ln>
+        </p:spPr>
+        <p:style>
+          <a:lnRef idx="1">
+            <a:schemeClr val="accent1"/>
+          </a:lnRef>
+          <a:fillRef idx="3">
+            <a:schemeClr val="accent1"/>
+          </a:fillRef>
+          <a:effectRef idx="2">
+            <a:schemeClr val="accent1"/>
+          </a:effectRef>
+          <a:fontRef idx="minor">
+            <a:schemeClr val="lt1"/>
+          </a:fontRef>
+        </p:style>
+        <p:txBody>
+          <a:bodyPr rtlCol="0" anchor="ctr"/>
+          <a:lstStyle/>
+          <a:p>
+            <a:pPr algn="ctr"/>
+          </a:p>
+        </p:txBody>
+      </p:sp>
+      <p:sp>
+        <p:nvSpPr>
+          <p:cNvPr id="12" name="TextBox 11"/>
+          <p:cNvSpPr txBox="1"/>
+          <p:nvPr/>
+        </p:nvSpPr>
+        <p:spPr>
+          <a:xfrm>
+            <a:off x="914400" y="2176272"/>
+            <a:ext cx="10515600" cy="548640"/>
+          </a:xfrm>
+          <a:prstGeom prst="rect">
+            <a:avLst/>
+          </a:prstGeom>
+          <a:noFill/>
+        </p:spPr>
+        <p:txBody>
+          <a:bodyPr wrap="square">
+            <a:spAutoFit/>
+          </a:bodyPr>
+          <a:lstStyle/>
+          <a:p>
+            <a:pPr algn="l">
+              <a:defRPr sz="1500" b="0">
+                <a:solidFill>
+                  <a:srgbClr val="989AA8"/>
+                </a:solidFill>
+                <a:latin typeface="Microsoft YaHei"/>
+              </a:defRPr>
+            </a:pPr>
+            <a:r>
+              <a:t>精通即梦AI、可灵AI、Seedance 2.0等核心工具</a:t>
+            </a:r>
+          </a:p>
+        </p:txBody>
+      </p:sp>
+      <p:sp>
+        <p:nvSpPr>
+          <p:cNvPr id="13" name="Rectangle 12"/>
+          <p:cNvSpPr/>
+          <p:nvPr/>
+        </p:nvSpPr>
+        <p:spPr>
+          <a:xfrm>
+            <a:off x="731520" y="3054096"/>
+            <a:ext cx="36576" cy="411480"/>
+          </a:xfrm>
+          <a:prstGeom prst="rect">
+            <a:avLst/>
+          </a:prstGeom>
+          <a:solidFill>
+            <a:srgbClr val="00C0FF"/>
+          </a:solidFill>
+          <a:ln>
+            <a:noFill/>
+          </a:ln>
+        </p:spPr>
+        <p:style>
+          <a:lnRef idx="1">
+            <a:schemeClr val="accent1"/>
+          </a:lnRef>
+          <a:fillRef idx="3">
+            <a:schemeClr val="accent1"/>
+          </a:fillRef>
+          <a:effectRef idx="2">
+            <a:schemeClr val="accent1"/>
+          </a:effectRef>
+          <a:fontRef idx="minor">
+            <a:schemeClr val="lt1"/>
+          </a:fontRef>
+        </p:style>
+        <p:txBody>
+          <a:bodyPr rtlCol="0" anchor="ctr"/>
+          <a:lstStyle/>
+          <a:p>
+            <a:pPr algn="ctr"/>
+          </a:p>
+        </p:txBody>
+      </p:sp>
+      <p:sp>
+        <p:nvSpPr>
+          <p:cNvPr id="14" name="TextBox 13"/>
+          <p:cNvSpPr txBox="1"/>
+          <p:nvPr/>
+        </p:nvSpPr>
+        <p:spPr>
+          <a:xfrm>
+            <a:off x="914400" y="2980944"/>
+            <a:ext cx="10515600" cy="548640"/>
+          </a:xfrm>
+          <a:prstGeom prst="rect">
+            <a:avLst/>
+          </a:prstGeom>
+          <a:noFill/>
+        </p:spPr>
+        <p:txBody>
+          <a:bodyPr wrap="square">
+            <a:spAutoFit/>
+          </a:bodyPr>
+          <a:lstStyle/>
+          <a:p>
+            <a:pPr algn="l">
+              <a:defRPr sz="1500" b="0">
+                <a:solidFill>
+                  <a:srgbClr val="989AA8"/>
+                </a:solidFill>
+                <a:latin typeface="Microsoft YaHei"/>
+              </a:defRPr>
+            </a:pPr>
+            <a:r>
+              <a:t>能独立制作一集完整的AI漫剧</a:t>
+            </a:r>
+          </a:p>
+        </p:txBody>
+      </p:sp>
+      <p:sp>
+        <p:nvSpPr>
+          <p:cNvPr id="15" name="Rectangle 14"/>
+          <p:cNvSpPr/>
+          <p:nvPr/>
+        </p:nvSpPr>
+        <p:spPr>
+          <a:xfrm>
+            <a:off x="731520" y="3858768"/>
+            <a:ext cx="36576" cy="411480"/>
+          </a:xfrm>
+          <a:prstGeom prst="rect">
+            <a:avLst/>
+          </a:prstGeom>
+          <a:solidFill>
+            <a:srgbClr val="00C0FF"/>
+          </a:solidFill>
+          <a:ln>
+            <a:noFill/>
+          </a:ln>
+        </p:spPr>
+        <p:style>
+          <a:lnRef idx="1">
+            <a:schemeClr val="accent1"/>
+          </a:lnRef>
+          <a:fillRef idx="3">
+            <a:schemeClr val="accent1"/>
+          </a:fillRef>
+          <a:effectRef idx="2">
+            <a:schemeClr val="accent1"/>
+          </a:effectRef>
+          <a:fontRef idx="minor">
+            <a:schemeClr val="lt1"/>
+          </a:fontRef>
+        </p:style>
+        <p:txBody>
+          <a:bodyPr rtlCol="0" anchor="ctr"/>
+          <a:lstStyle/>
+          <a:p>
+            <a:pPr algn="ctr"/>
+          </a:p>
+        </p:txBody>
+      </p:sp>
+      <p:sp>
+        <p:nvSpPr>
+          <p:cNvPr id="16" name="TextBox 15"/>
+          <p:cNvSpPr txBox="1"/>
+          <p:nvPr/>
+        </p:nvSpPr>
+        <p:spPr>
+          <a:xfrm>
+            <a:off x="914400" y="3785616"/>
+            <a:ext cx="10515600" cy="548640"/>
+          </a:xfrm>
+          <a:prstGeom prst="rect">
+            <a:avLst/>
+          </a:prstGeom>
+          <a:noFill/>
+        </p:spPr>
+        <p:txBody>
+          <a:bodyPr wrap="square">
+            <a:spAutoFit/>
+          </a:bodyPr>
+          <a:lstStyle/>
+          <a:p>
+            <a:pPr algn="l">
+              <a:defRPr sz="1500" b="0">
+                <a:solidFill>
+                  <a:srgbClr val="989AA8"/>
+                </a:solidFill>
+                <a:latin typeface="Microsoft YaHei"/>
+              </a:defRPr>
+            </a:pPr>
+            <a:r>
+              <a:t>了解平台分发与商业变现的路径</a:t>
+            </a:r>
+          </a:p>
+        </p:txBody>
+      </p:sp>
+      <p:sp>
+        <p:nvSpPr>
+          <p:cNvPr id="17" name="Rectangle 16"/>
+          <p:cNvSpPr/>
+          <p:nvPr/>
+        </p:nvSpPr>
+        <p:spPr>
+          <a:xfrm>
+            <a:off x="731520" y="4663440"/>
+            <a:ext cx="36576" cy="411480"/>
+          </a:xfrm>
+          <a:prstGeom prst="rect">
+            <a:avLst/>
+          </a:prstGeom>
+          <a:solidFill>
+            <a:srgbClr val="00C0FF"/>
+          </a:solidFill>
+          <a:ln>
+            <a:noFill/>
+          </a:ln>
+        </p:spPr>
+        <p:style>
+          <a:lnRef idx="1">
+            <a:schemeClr val="accent1"/>
+          </a:lnRef>
+          <a:fillRef idx="3">
+            <a:schemeClr val="accent1"/>
+          </a:fillRef>
+          <a:effectRef idx="2">
+            <a:schemeClr val="accent1"/>
+          </a:effectRef>
+          <a:fontRef idx="minor">
+            <a:schemeClr val="lt1"/>
+          </a:fontRef>
+        </p:style>
+        <p:txBody>
+          <a:bodyPr rtlCol="0" anchor="ctr"/>
+          <a:lstStyle/>
+          <a:p>
+            <a:pPr algn="ctr"/>
+          </a:p>
+        </p:txBody>
+      </p:sp>
+      <p:sp>
+        <p:nvSpPr>
+          <p:cNvPr id="18" name="TextBox 17"/>
+          <p:cNvSpPr txBox="1"/>
+          <p:nvPr/>
+        </p:nvSpPr>
+        <p:spPr>
+          <a:xfrm>
+            <a:off x="914400" y="4590288"/>
+            <a:ext cx="10515600" cy="548640"/>
+          </a:xfrm>
+          <a:prstGeom prst="rect">
+            <a:avLst/>
+          </a:prstGeom>
+          <a:noFill/>
+        </p:spPr>
+        <p:txBody>
+          <a:bodyPr wrap="square">
+            <a:spAutoFit/>
+          </a:bodyPr>
+          <a:lstStyle/>
+          <a:p>
+            <a:pPr algn="l">
+              <a:defRPr sz="1500" b="0">
+                <a:solidFill>
+                  <a:srgbClr val="989AA8"/>
+                </a:solidFill>
+                <a:latin typeface="Microsoft YaHei"/>
+              </a:defRPr>
+            </a:pPr>
+            <a:r>
+              <a:t>建立工业化生产思维，实现高效量产</a:t>
+            </a:r>
+          </a:p>
+        </p:txBody>
+      </p:sp>
+      <p:sp>
+        <p:nvSpPr>
+          <p:cNvPr id="19" name="Rectangle 18"/>
+          <p:cNvSpPr/>
+          <p:nvPr/>
+        </p:nvSpPr>
+        <p:spPr>
+          <a:xfrm>
+            <a:off x="0" y="6446520"/>
+            <a:ext cx="12191695" cy="12700"/>
+          </a:xfrm>
+          <a:prstGeom prst="rect">
+            <a:avLst/>
+          </a:prstGeom>
+          <a:solidFill>
+            <a:srgbClr val="222432"/>
+          </a:solidFill>
+          <a:ln>
+            <a:noFill/>
+          </a:ln>
+        </p:spPr>
+        <p:style>
+          <a:lnRef idx="1">
+            <a:schemeClr val="accent1"/>
+          </a:lnRef>
+          <a:fillRef idx="3">
+            <a:schemeClr val="accent1"/>
+          </a:fillRef>
+          <a:effectRef idx="2">
+            <a:schemeClr val="accent1"/>
+          </a:effectRef>
+          <a:fontRef idx="minor">
+            <a:schemeClr val="lt1"/>
+          </a:fontRef>
+        </p:style>
+        <p:txBody>
+          <a:bodyPr rtlCol="0" anchor="ctr"/>
+          <a:lstStyle/>
+          <a:p>
+            <a:pPr algn="ctr"/>
+          </a:p>
+        </p:txBody>
+      </p:sp>
+      <p:sp>
+        <p:nvSpPr>
+          <p:cNvPr id="20" name="TextBox 19"/>
+          <p:cNvSpPr txBox="1"/>
+          <p:nvPr/>
+        </p:nvSpPr>
+        <p:spPr>
+          <a:xfrm>
+            <a:off x="731520" y="6492240"/>
+            <a:ext cx="4572000" cy="274320"/>
+          </a:xfrm>
+          <a:prstGeom prst="rect">
+            <a:avLst/>
+          </a:prstGeom>
+          <a:noFill/>
+        </p:spPr>
+        <p:txBody>
+          <a:bodyPr wrap="square">
+            <a:spAutoFit/>
+          </a:bodyPr>
+          <a:lstStyle/>
+          <a:p>
+            <a:pPr algn="l">
+              <a:defRPr sz="900" b="0">
+                <a:solidFill>
+                  <a:srgbClr val="555768"/>
+                </a:solidFill>
+                <a:latin typeface="Microsoft YaHei"/>
+              </a:defRPr>
+            </a:pPr>
+            <a:r>
               <a:t>模块00 · 课程导论</a:t>
+            </a:r>
+          </a:p>
+        </p:txBody>
+      </p:sp>
+      <p:sp>
+        <p:nvSpPr>
+          <p:cNvPr id="21" name="TextBox 20"/>
+          <p:cNvSpPr txBox="1"/>
+          <p:nvPr/>
+        </p:nvSpPr>
+        <p:spPr>
+          <a:xfrm>
+            <a:off x="10789920" y="6492240"/>
+            <a:ext cx="1097280" cy="274320"/>
+          </a:xfrm>
+          <a:prstGeom prst="rect">
+            <a:avLst/>
+          </a:prstGeom>
+          <a:noFill/>
+        </p:spPr>
+        <p:txBody>
+          <a:bodyPr wrap="square">
+            <a:spAutoFit/>
+          </a:bodyPr>
+          <a:lstStyle/>
+          <a:p>
+            <a:pPr algn="r">
+              <a:defRPr sz="900" b="0">
+                <a:solidFill>
+                  <a:srgbClr val="555768"/>
+                </a:solidFill>
+                <a:latin typeface="Microsoft YaHei"/>
+              </a:defRPr>
+            </a:pPr>
+            <a:r>
+              <a:t>2</a:t>
             </a:r>
           </a:p>
         </p:txBody>
@@ -5571,7 +6510,7 @@
     <p:bg>
       <p:bgPr>
         <a:solidFill>
-          <a:srgbClr val="08080C"/>
+          <a:srgbClr val="09090F"/>
         </a:solidFill>
         <a:effectLst/>
       </p:bgPr>
@@ -5585,56 +6524,20 @@
       <p:grpSpPr/>
       <p:sp>
         <p:nvSpPr>
-          <p:cNvPr id="2" name="TextBox 1"/>
-          <p:cNvSpPr txBox="1"/>
-          <p:nvPr/>
-        </p:nvSpPr>
-        <p:spPr>
-          <a:xfrm>
-            <a:off x="731520" y="365760"/>
-            <a:ext cx="10058400" cy="548640"/>
-          </a:xfrm>
-          <a:prstGeom prst="rect">
-            <a:avLst/>
-          </a:prstGeom>
-          <a:noFill/>
-        </p:spPr>
-        <p:txBody>
-          <a:bodyPr wrap="square">
-            <a:spAutoFit/>
-          </a:bodyPr>
-          <a:lstStyle/>
-          <a:p>
-            <a:pPr algn="l">
-              <a:defRPr sz="2400" b="1">
-                <a:solidFill>
-                  <a:srgbClr val="F0F0F5"/>
-                </a:solidFill>
-                <a:latin typeface="Microsoft YaHei"/>
-              </a:defRPr>
-            </a:pPr>
-            <a:r>
-              <a:t>行业数据一览</a:t>
-            </a:r>
-          </a:p>
-        </p:txBody>
-      </p:sp>
-      <p:sp>
-        <p:nvSpPr>
-          <p:cNvPr id="3" name="Rectangle 2"/>
+          <p:cNvPr id="2" name="Rectangle 1"/>
           <p:cNvSpPr/>
           <p:nvPr/>
         </p:nvSpPr>
         <p:spPr>
           <a:xfrm>
-            <a:off x="731520" y="960120"/>
-            <a:ext cx="1828800" cy="19050"/>
+            <a:off x="0" y="0"/>
+            <a:ext cx="12191695" cy="25400"/>
           </a:xfrm>
           <a:prstGeom prst="rect">
             <a:avLst/>
           </a:prstGeom>
           <a:solidFill>
-            <a:srgbClr val="00BFFF"/>
+            <a:srgbClr val="00C0FF"/>
           </a:solidFill>
           <a:ln>
             <a:noFill/>
@@ -5662,9 +6565,260 @@
           </a:p>
         </p:txBody>
       </p:sp>
+      <p:sp>
+        <p:nvSpPr>
+          <p:cNvPr id="3" name="Rectangle 2"/>
+          <p:cNvSpPr/>
+          <p:nvPr/>
+        </p:nvSpPr>
+        <p:spPr>
+          <a:xfrm>
+            <a:off x="0" y="25400"/>
+            <a:ext cx="12191695" cy="25400"/>
+          </a:xfrm>
+          <a:prstGeom prst="rect">
+            <a:avLst/>
+          </a:prstGeom>
+          <a:solidFill>
+            <a:srgbClr val="007399"/>
+          </a:solidFill>
+          <a:ln>
+            <a:noFill/>
+          </a:ln>
+        </p:spPr>
+        <p:style>
+          <a:lnRef idx="1">
+            <a:schemeClr val="accent1"/>
+          </a:lnRef>
+          <a:fillRef idx="3">
+            <a:schemeClr val="accent1"/>
+          </a:fillRef>
+          <a:effectRef idx="2">
+            <a:schemeClr val="accent1"/>
+          </a:effectRef>
+          <a:fontRef idx="minor">
+            <a:schemeClr val="lt1"/>
+          </a:fontRef>
+        </p:style>
+        <p:txBody>
+          <a:bodyPr rtlCol="0" anchor="ctr"/>
+          <a:lstStyle/>
+          <a:p>
+            <a:pPr algn="ctr"/>
+          </a:p>
+        </p:txBody>
+      </p:sp>
+      <p:sp>
+        <p:nvSpPr>
+          <p:cNvPr id="4" name="Rectangle 3"/>
+          <p:cNvSpPr/>
+          <p:nvPr/>
+        </p:nvSpPr>
+        <p:spPr>
+          <a:xfrm>
+            <a:off x="0" y="50800"/>
+            <a:ext cx="12191695" cy="12700"/>
+          </a:xfrm>
+          <a:prstGeom prst="rect">
+            <a:avLst/>
+          </a:prstGeom>
+          <a:solidFill>
+            <a:srgbClr val="00394C"/>
+          </a:solidFill>
+          <a:ln>
+            <a:noFill/>
+          </a:ln>
+        </p:spPr>
+        <p:style>
+          <a:lnRef idx="1">
+            <a:schemeClr val="accent1"/>
+          </a:lnRef>
+          <a:fillRef idx="3">
+            <a:schemeClr val="accent1"/>
+          </a:fillRef>
+          <a:effectRef idx="2">
+            <a:schemeClr val="accent1"/>
+          </a:effectRef>
+          <a:fontRef idx="minor">
+            <a:schemeClr val="lt1"/>
+          </a:fontRef>
+        </p:style>
+        <p:txBody>
+          <a:bodyPr rtlCol="0" anchor="ctr"/>
+          <a:lstStyle/>
+          <a:p>
+            <a:pPr algn="ctr"/>
+          </a:p>
+        </p:txBody>
+      </p:sp>
+      <p:sp>
+        <p:nvSpPr>
+          <p:cNvPr id="5" name="Rectangle 4"/>
+          <p:cNvSpPr/>
+          <p:nvPr/>
+        </p:nvSpPr>
+        <p:spPr>
+          <a:xfrm>
+            <a:off x="0" y="63500"/>
+            <a:ext cx="12191695" cy="960120"/>
+          </a:xfrm>
+          <a:prstGeom prst="rect">
+            <a:avLst/>
+          </a:prstGeom>
+          <a:solidFill>
+            <a:srgbClr val="12141E"/>
+          </a:solidFill>
+          <a:ln>
+            <a:noFill/>
+          </a:ln>
+        </p:spPr>
+        <p:style>
+          <a:lnRef idx="1">
+            <a:schemeClr val="accent1"/>
+          </a:lnRef>
+          <a:fillRef idx="3">
+            <a:schemeClr val="accent1"/>
+          </a:fillRef>
+          <a:effectRef idx="2">
+            <a:schemeClr val="accent1"/>
+          </a:effectRef>
+          <a:fontRef idx="minor">
+            <a:schemeClr val="lt1"/>
+          </a:fontRef>
+        </p:style>
+        <p:txBody>
+          <a:bodyPr rtlCol="0" anchor="ctr"/>
+          <a:lstStyle/>
+          <a:p>
+            <a:pPr algn="ctr"/>
+          </a:p>
+        </p:txBody>
+      </p:sp>
+      <p:sp>
+        <p:nvSpPr>
+          <p:cNvPr id="6" name="Rectangle 5"/>
+          <p:cNvSpPr/>
+          <p:nvPr/>
+        </p:nvSpPr>
+        <p:spPr>
+          <a:xfrm>
+            <a:off x="0" y="63500"/>
+            <a:ext cx="73152" cy="960120"/>
+          </a:xfrm>
+          <a:prstGeom prst="rect">
+            <a:avLst/>
+          </a:prstGeom>
+          <a:solidFill>
+            <a:srgbClr val="00C0FF"/>
+          </a:solidFill>
+          <a:ln>
+            <a:noFill/>
+          </a:ln>
+        </p:spPr>
+        <p:style>
+          <a:lnRef idx="1">
+            <a:schemeClr val="accent1"/>
+          </a:lnRef>
+          <a:fillRef idx="3">
+            <a:schemeClr val="accent1"/>
+          </a:fillRef>
+          <a:effectRef idx="2">
+            <a:schemeClr val="accent1"/>
+          </a:effectRef>
+          <a:fontRef idx="minor">
+            <a:schemeClr val="lt1"/>
+          </a:fontRef>
+        </p:style>
+        <p:txBody>
+          <a:bodyPr rtlCol="0" anchor="ctr"/>
+          <a:lstStyle/>
+          <a:p>
+            <a:pPr algn="ctr"/>
+          </a:p>
+        </p:txBody>
+      </p:sp>
+      <p:sp>
+        <p:nvSpPr>
+          <p:cNvPr id="7" name="TextBox 6"/>
+          <p:cNvSpPr txBox="1"/>
+          <p:nvPr/>
+        </p:nvSpPr>
+        <p:spPr>
+          <a:xfrm>
+            <a:off x="640080" y="164592"/>
+            <a:ext cx="10058400" cy="594360"/>
+          </a:xfrm>
+          <a:prstGeom prst="rect">
+            <a:avLst/>
+          </a:prstGeom>
+          <a:noFill/>
+        </p:spPr>
+        <p:txBody>
+          <a:bodyPr wrap="square">
+            <a:spAutoFit/>
+          </a:bodyPr>
+          <a:lstStyle/>
+          <a:p>
+            <a:pPr algn="l">
+              <a:defRPr sz="2400" b="1">
+                <a:solidFill>
+                  <a:srgbClr val="EEEEF4"/>
+                </a:solidFill>
+                <a:latin typeface="Microsoft YaHei"/>
+              </a:defRPr>
+            </a:pPr>
+            <a:r>
+              <a:t>行业数据一览</a:t>
+            </a:r>
+          </a:p>
+        </p:txBody>
+      </p:sp>
+      <p:sp>
+        <p:nvSpPr>
+          <p:cNvPr id="8" name="Rectangle 7"/>
+          <p:cNvSpPr/>
+          <p:nvPr/>
+        </p:nvSpPr>
+        <p:spPr>
+          <a:xfrm>
+            <a:off x="0" y="1097280"/>
+            <a:ext cx="12191695" cy="12700"/>
+          </a:xfrm>
+          <a:prstGeom prst="rect">
+            <a:avLst/>
+          </a:prstGeom>
+          <a:solidFill>
+            <a:srgbClr val="222432"/>
+          </a:solidFill>
+          <a:ln>
+            <a:noFill/>
+          </a:ln>
+        </p:spPr>
+        <p:style>
+          <a:lnRef idx="1">
+            <a:schemeClr val="accent1"/>
+          </a:lnRef>
+          <a:fillRef idx="3">
+            <a:schemeClr val="accent1"/>
+          </a:fillRef>
+          <a:effectRef idx="2">
+            <a:schemeClr val="accent1"/>
+          </a:effectRef>
+          <a:fontRef idx="minor">
+            <a:schemeClr val="lt1"/>
+          </a:fontRef>
+        </p:style>
+        <p:txBody>
+          <a:bodyPr rtlCol="0" anchor="ctr"/>
+          <a:lstStyle/>
+          <a:p>
+            <a:pPr algn="ctr"/>
+          </a:p>
+        </p:txBody>
+      </p:sp>
       <p:graphicFrame>
         <p:nvGraphicFramePr>
-          <p:cNvPr id="4" name="Table 3"/>
+          <p:cNvPr id="9" name="Table 8"/>
           <p:cNvGraphicFramePr>
             <a:graphicFrameLocks noGrp="1"/>
           </p:cNvGraphicFramePr>
@@ -5693,7 +6847,7 @@
                       <a:pPr algn="ctr">
                         <a:defRPr sz="1200" b="1">
                           <a:solidFill>
-                            <a:srgbClr val="F0F0F5"/>
+                            <a:srgbClr val="EEEEF4"/>
                           </a:solidFill>
                           <a:latin typeface="Microsoft YaHei"/>
                         </a:defRPr>
@@ -5705,7 +6859,7 @@
                   </a:txBody>
                   <a:tcPr anchor="ctr">
                     <a:solidFill>
-                      <a:srgbClr val="00BFFF"/>
+                      <a:srgbClr val="00C0FF"/>
                     </a:solidFill>
                   </a:tcPr>
                 </a:tc>
@@ -5717,7 +6871,7 @@
                       <a:pPr algn="ctr">
                         <a:defRPr sz="1200" b="1">
                           <a:solidFill>
-                            <a:srgbClr val="F0F0F5"/>
+                            <a:srgbClr val="EEEEF4"/>
                           </a:solidFill>
                           <a:latin typeface="Microsoft YaHei"/>
                         </a:defRPr>
@@ -5729,7 +6883,7 @@
                   </a:txBody>
                   <a:tcPr anchor="ctr">
                     <a:solidFill>
-                      <a:srgbClr val="00BFFF"/>
+                      <a:srgbClr val="00C0FF"/>
                     </a:solidFill>
                   </a:tcPr>
                 </a:tc>
@@ -5743,7 +6897,7 @@
                       <a:pPr algn="ctr">
                         <a:defRPr sz="1100">
                           <a:solidFill>
-                            <a:srgbClr val="9090A0"/>
+                            <a:srgbClr val="989AA8"/>
                           </a:solidFill>
                           <a:latin typeface="Microsoft YaHei"/>
                         </a:defRPr>
@@ -5755,7 +6909,7 @@
                   </a:txBody>
                   <a:tcPr anchor="ctr">
                     <a:solidFill>
-                      <a:srgbClr val="111118"/>
+                      <a:srgbClr val="12141E"/>
                     </a:solidFill>
                   </a:tcPr>
                 </a:tc>
@@ -5767,7 +6921,7 @@
                       <a:pPr algn="ctr">
                         <a:defRPr sz="1100">
                           <a:solidFill>
-                            <a:srgbClr val="9090A0"/>
+                            <a:srgbClr val="989AA8"/>
                           </a:solidFill>
                           <a:latin typeface="Microsoft YaHei"/>
                         </a:defRPr>
@@ -5779,7 +6933,7 @@
                   </a:txBody>
                   <a:tcPr anchor="ctr">
                     <a:solidFill>
-                      <a:srgbClr val="111118"/>
+                      <a:srgbClr val="12141E"/>
                     </a:solidFill>
                   </a:tcPr>
                 </a:tc>
@@ -5793,7 +6947,7 @@
                       <a:pPr algn="ctr">
                         <a:defRPr sz="1100">
                           <a:solidFill>
-                            <a:srgbClr val="9090A0"/>
+                            <a:srgbClr val="989AA8"/>
                           </a:solidFill>
                           <a:latin typeface="Microsoft YaHei"/>
                         </a:defRPr>
@@ -5805,7 +6959,7 @@
                   </a:txBody>
                   <a:tcPr anchor="ctr">
                     <a:solidFill>
-                      <a:srgbClr val="08080C"/>
+                      <a:srgbClr val="1A1C28"/>
                     </a:solidFill>
                   </a:tcPr>
                 </a:tc>
@@ -5817,7 +6971,7 @@
                       <a:pPr algn="ctr">
                         <a:defRPr sz="1100">
                           <a:solidFill>
-                            <a:srgbClr val="9090A0"/>
+                            <a:srgbClr val="989AA8"/>
                           </a:solidFill>
                           <a:latin typeface="Microsoft YaHei"/>
                         </a:defRPr>
@@ -5829,7 +6983,7 @@
                   </a:txBody>
                   <a:tcPr anchor="ctr">
                     <a:solidFill>
-                      <a:srgbClr val="08080C"/>
+                      <a:srgbClr val="1A1C28"/>
                     </a:solidFill>
                   </a:tcPr>
                 </a:tc>
@@ -5843,7 +6997,7 @@
                       <a:pPr algn="ctr">
                         <a:defRPr sz="1100">
                           <a:solidFill>
-                            <a:srgbClr val="9090A0"/>
+                            <a:srgbClr val="989AA8"/>
                           </a:solidFill>
                           <a:latin typeface="Microsoft YaHei"/>
                         </a:defRPr>
@@ -5855,7 +7009,7 @@
                   </a:txBody>
                   <a:tcPr anchor="ctr">
                     <a:solidFill>
-                      <a:srgbClr val="111118"/>
+                      <a:srgbClr val="12141E"/>
                     </a:solidFill>
                   </a:tcPr>
                 </a:tc>
@@ -5867,7 +7021,7 @@
                       <a:pPr algn="ctr">
                         <a:defRPr sz="1100">
                           <a:solidFill>
-                            <a:srgbClr val="9090A0"/>
+                            <a:srgbClr val="989AA8"/>
                           </a:solidFill>
                           <a:latin typeface="Microsoft YaHei"/>
                         </a:defRPr>
@@ -5879,7 +7033,7 @@
                   </a:txBody>
                   <a:tcPr anchor="ctr">
                     <a:solidFill>
-                      <a:srgbClr val="111118"/>
+                      <a:srgbClr val="12141E"/>
                     </a:solidFill>
                   </a:tcPr>
                 </a:tc>
@@ -5893,7 +7047,7 @@
                       <a:pPr algn="ctr">
                         <a:defRPr sz="1100">
                           <a:solidFill>
-                            <a:srgbClr val="9090A0"/>
+                            <a:srgbClr val="989AA8"/>
                           </a:solidFill>
                           <a:latin typeface="Microsoft YaHei"/>
                         </a:defRPr>
@@ -5905,7 +7059,7 @@
                   </a:txBody>
                   <a:tcPr anchor="ctr">
                     <a:solidFill>
-                      <a:srgbClr val="08080C"/>
+                      <a:srgbClr val="1A1C28"/>
                     </a:solidFill>
                   </a:tcPr>
                 </a:tc>
@@ -5917,7 +7071,7 @@
                       <a:pPr algn="ctr">
                         <a:defRPr sz="1100">
                           <a:solidFill>
-                            <a:srgbClr val="9090A0"/>
+                            <a:srgbClr val="989AA8"/>
                           </a:solidFill>
                           <a:latin typeface="Microsoft YaHei"/>
                         </a:defRPr>
@@ -5929,7 +7083,7 @@
                   </a:txBody>
                   <a:tcPr anchor="ctr">
                     <a:solidFill>
-                      <a:srgbClr val="08080C"/>
+                      <a:srgbClr val="1A1C28"/>
                     </a:solidFill>
                   </a:tcPr>
                 </a:tc>
@@ -5943,7 +7097,7 @@
                       <a:pPr algn="ctr">
                         <a:defRPr sz="1100">
                           <a:solidFill>
-                            <a:srgbClr val="9090A0"/>
+                            <a:srgbClr val="989AA8"/>
                           </a:solidFill>
                           <a:latin typeface="Microsoft YaHei"/>
                         </a:defRPr>
@@ -5955,7 +7109,7 @@
                   </a:txBody>
                   <a:tcPr anchor="ctr">
                     <a:solidFill>
-                      <a:srgbClr val="111118"/>
+                      <a:srgbClr val="12141E"/>
                     </a:solidFill>
                   </a:tcPr>
                 </a:tc>
@@ -5967,7 +7121,7 @@
                       <a:pPr algn="ctr">
                         <a:defRPr sz="1100">
                           <a:solidFill>
-                            <a:srgbClr val="9090A0"/>
+                            <a:srgbClr val="989AA8"/>
                           </a:solidFill>
                           <a:latin typeface="Microsoft YaHei"/>
                         </a:defRPr>
@@ -5979,7 +7133,7 @@
                   </a:txBody>
                   <a:tcPr anchor="ctr">
                     <a:solidFill>
-                      <a:srgbClr val="111118"/>
+                      <a:srgbClr val="12141E"/>
                     </a:solidFill>
                   </a:tcPr>
                 </a:tc>
@@ -5990,20 +7144,20 @@
       </p:graphicFrame>
       <p:sp>
         <p:nvSpPr>
-          <p:cNvPr id="5" name="Rectangle 4"/>
+          <p:cNvPr id="10" name="Rectangle 9"/>
           <p:cNvSpPr/>
           <p:nvPr/>
         </p:nvSpPr>
         <p:spPr>
           <a:xfrm>
             <a:off x="0" y="6446520"/>
-            <a:ext cx="12191695" cy="19050"/>
+            <a:ext cx="12191695" cy="12700"/>
           </a:xfrm>
           <a:prstGeom prst="rect">
             <a:avLst/>
           </a:prstGeom>
           <a:solidFill>
-            <a:srgbClr val="1E1E2A"/>
+            <a:srgbClr val="222432"/>
           </a:solidFill>
           <a:ln>
             <a:noFill/>
@@ -6033,7 +7187,7 @@
       </p:sp>
       <p:sp>
         <p:nvSpPr>
-          <p:cNvPr id="6" name="TextBox 5"/>
+          <p:cNvPr id="11" name="TextBox 10"/>
           <p:cNvSpPr txBox="1"/>
           <p:nvPr/>
         </p:nvSpPr>
@@ -6056,13 +7210,49 @@
             <a:pPr algn="l">
               <a:defRPr sz="900" b="0">
                 <a:solidFill>
-                  <a:srgbClr val="505060"/>
+                  <a:srgbClr val="555768"/>
                 </a:solidFill>
                 <a:latin typeface="Microsoft YaHei"/>
               </a:defRPr>
             </a:pPr>
             <a:r>
               <a:t>模块00 · 课程导论</a:t>
+            </a:r>
+          </a:p>
+        </p:txBody>
+      </p:sp>
+      <p:sp>
+        <p:nvSpPr>
+          <p:cNvPr id="12" name="TextBox 11"/>
+          <p:cNvSpPr txBox="1"/>
+          <p:nvPr/>
+        </p:nvSpPr>
+        <p:spPr>
+          <a:xfrm>
+            <a:off x="10789920" y="6492240"/>
+            <a:ext cx="1097280" cy="274320"/>
+          </a:xfrm>
+          <a:prstGeom prst="rect">
+            <a:avLst/>
+          </a:prstGeom>
+          <a:noFill/>
+        </p:spPr>
+        <p:txBody>
+          <a:bodyPr wrap="square">
+            <a:spAutoFit/>
+          </a:bodyPr>
+          <a:lstStyle/>
+          <a:p>
+            <a:pPr algn="r">
+              <a:defRPr sz="900" b="0">
+                <a:solidFill>
+                  <a:srgbClr val="555768"/>
+                </a:solidFill>
+                <a:latin typeface="Microsoft YaHei"/>
+              </a:defRPr>
+            </a:pPr>
+            <a:r>
+              <a:t>3</a:t>
             </a:r>
           </a:p>
         </p:txBody>
@@ -6081,7 +7271,7 @@
     <p:bg>
       <p:bgPr>
         <a:solidFill>
-          <a:srgbClr val="08080C"/>
+          <a:srgbClr val="09090F"/>
         </a:solidFill>
         <a:effectLst/>
       </p:bgPr>
@@ -6095,56 +7285,20 @@
       <p:grpSpPr/>
       <p:sp>
         <p:nvSpPr>
-          <p:cNvPr id="2" name="TextBox 1"/>
-          <p:cNvSpPr txBox="1"/>
-          <p:nvPr/>
-        </p:nvSpPr>
-        <p:spPr>
-          <a:xfrm>
-            <a:off x="731520" y="365760"/>
-            <a:ext cx="10058400" cy="548640"/>
-          </a:xfrm>
-          <a:prstGeom prst="rect">
-            <a:avLst/>
-          </a:prstGeom>
-          <a:noFill/>
-        </p:spPr>
-        <p:txBody>
-          <a:bodyPr wrap="square">
-            <a:spAutoFit/>
-          </a:bodyPr>
-          <a:lstStyle/>
-          <a:p>
-            <a:pPr algn="l">
-              <a:defRPr sz="2400" b="1">
-                <a:solidFill>
-                  <a:srgbClr val="F0F0F5"/>
-                </a:solidFill>
-                <a:latin typeface="Microsoft YaHei"/>
-              </a:defRPr>
-            </a:pPr>
-            <a:r>
-              <a:t>学习路径选择</a:t>
-            </a:r>
-          </a:p>
-        </p:txBody>
-      </p:sp>
-      <p:sp>
-        <p:nvSpPr>
-          <p:cNvPr id="3" name="Rectangle 2"/>
+          <p:cNvPr id="2" name="Rectangle 1"/>
           <p:cNvSpPr/>
           <p:nvPr/>
         </p:nvSpPr>
         <p:spPr>
           <a:xfrm>
-            <a:off x="731520" y="960120"/>
-            <a:ext cx="1828800" cy="19050"/>
+            <a:off x="0" y="0"/>
+            <a:ext cx="12191695" cy="25400"/>
           </a:xfrm>
           <a:prstGeom prst="rect">
             <a:avLst/>
           </a:prstGeom>
           <a:solidFill>
-            <a:srgbClr val="00BFFF"/>
+            <a:srgbClr val="00C0FF"/>
           </a:solidFill>
           <a:ln>
             <a:noFill/>
@@ -6174,56 +7328,20 @@
       </p:sp>
       <p:sp>
         <p:nvSpPr>
-          <p:cNvPr id="4" name="TextBox 3"/>
-          <p:cNvSpPr txBox="1"/>
-          <p:nvPr/>
-        </p:nvSpPr>
-        <p:spPr>
-          <a:xfrm>
-            <a:off x="731520" y="1280160"/>
-            <a:ext cx="5029200" cy="457200"/>
-          </a:xfrm>
-          <a:prstGeom prst="rect">
-            <a:avLst/>
-          </a:prstGeom>
-          <a:noFill/>
-        </p:spPr>
-        <p:txBody>
-          <a:bodyPr wrap="square">
-            <a:spAutoFit/>
-          </a:bodyPr>
-          <a:lstStyle/>
-          <a:p>
-            <a:pPr algn="l">
-              <a:defRPr sz="1800" b="1">
-                <a:solidFill>
-                  <a:srgbClr val="00BFFF"/>
-                </a:solidFill>
-                <a:latin typeface="Microsoft YaHei"/>
-              </a:defRPr>
-            </a:pPr>
-            <a:r>
-              <a:t>🅰️ 零基础速成（8周）</a:t>
-            </a:r>
-          </a:p>
-        </p:txBody>
-      </p:sp>
-      <p:sp>
-        <p:nvSpPr>
-          <p:cNvPr id="5" name="Rectangle 4"/>
+          <p:cNvPr id="3" name="Rectangle 2"/>
           <p:cNvSpPr/>
           <p:nvPr/>
         </p:nvSpPr>
         <p:spPr>
           <a:xfrm>
-            <a:off x="731520" y="1783080"/>
-            <a:ext cx="1371600" cy="19050"/>
+            <a:off x="0" y="25400"/>
+            <a:ext cx="12191695" cy="25400"/>
           </a:xfrm>
           <a:prstGeom prst="rect">
             <a:avLst/>
           </a:prstGeom>
           <a:solidFill>
-            <a:srgbClr val="00BFFF"/>
+            <a:srgbClr val="007399"/>
           </a:solidFill>
           <a:ln>
             <a:noFill/>
@@ -6253,164 +7371,20 @@
       </p:sp>
       <p:sp>
         <p:nvSpPr>
-          <p:cNvPr id="6" name="TextBox 5"/>
-          <p:cNvSpPr txBox="1"/>
-          <p:nvPr/>
-        </p:nvSpPr>
-        <p:spPr>
-          <a:xfrm>
-            <a:off x="731520" y="2011680"/>
-            <a:ext cx="5029200" cy="457200"/>
-          </a:xfrm>
-          <a:prstGeom prst="rect">
-            <a:avLst/>
-          </a:prstGeom>
-          <a:noFill/>
-        </p:spPr>
-        <p:txBody>
-          <a:bodyPr wrap="square">
-            <a:spAutoFit/>
-          </a:bodyPr>
-          <a:lstStyle/>
-          <a:p>
-            <a:pPr algn="l">
-              <a:defRPr sz="1400" b="0">
-                <a:solidFill>
-                  <a:srgbClr val="9090A0"/>
-                </a:solidFill>
-                <a:latin typeface="Microsoft YaHei"/>
-              </a:defRPr>
-            </a:pPr>
-            <a:r>
-              <a:t>▸  快速上手出作品</a:t>
-            </a:r>
-          </a:p>
-        </p:txBody>
-      </p:sp>
-      <p:sp>
-        <p:nvSpPr>
-          <p:cNvPr id="7" name="TextBox 6"/>
-          <p:cNvSpPr txBox="1"/>
-          <p:nvPr/>
-        </p:nvSpPr>
-        <p:spPr>
-          <a:xfrm>
-            <a:off x="731520" y="2560320"/>
-            <a:ext cx="5029200" cy="457200"/>
-          </a:xfrm>
-          <a:prstGeom prst="rect">
-            <a:avLst/>
-          </a:prstGeom>
-          <a:noFill/>
-        </p:spPr>
-        <p:txBody>
-          <a:bodyPr wrap="square">
-            <a:spAutoFit/>
-          </a:bodyPr>
-          <a:lstStyle/>
-          <a:p>
-            <a:pPr algn="l">
-              <a:defRPr sz="1400" b="0">
-                <a:solidFill>
-                  <a:srgbClr val="9090A0"/>
-                </a:solidFill>
-                <a:latin typeface="Microsoft YaHei"/>
-              </a:defRPr>
-            </a:pPr>
-            <a:r>
-              <a:t>▸  重点模块：1,2,3,4,6,10,11,12,17</a:t>
-            </a:r>
-          </a:p>
-        </p:txBody>
-      </p:sp>
-      <p:sp>
-        <p:nvSpPr>
-          <p:cNvPr id="8" name="TextBox 7"/>
-          <p:cNvSpPr txBox="1"/>
-          <p:nvPr/>
-        </p:nvSpPr>
-        <p:spPr>
-          <a:xfrm>
-            <a:off x="731520" y="3108960"/>
-            <a:ext cx="5029200" cy="457200"/>
-          </a:xfrm>
-          <a:prstGeom prst="rect">
-            <a:avLst/>
-          </a:prstGeom>
-          <a:noFill/>
-        </p:spPr>
-        <p:txBody>
-          <a:bodyPr wrap="square">
-            <a:spAutoFit/>
-          </a:bodyPr>
-          <a:lstStyle/>
-          <a:p>
-            <a:pPr algn="l">
-              <a:defRPr sz="1400" b="0">
-                <a:solidFill>
-                  <a:srgbClr val="9090A0"/>
-                </a:solidFill>
-                <a:latin typeface="Microsoft YaHei"/>
-              </a:defRPr>
-            </a:pPr>
-            <a:r>
-              <a:t>▸  适合：想快速入行变现</a:t>
-            </a:r>
-          </a:p>
-        </p:txBody>
-      </p:sp>
-      <p:sp>
-        <p:nvSpPr>
-          <p:cNvPr id="9" name="TextBox 8"/>
-          <p:cNvSpPr txBox="1"/>
-          <p:nvPr/>
-        </p:nvSpPr>
-        <p:spPr>
-          <a:xfrm>
-            <a:off x="6400800" y="1280160"/>
-            <a:ext cx="5029200" cy="457200"/>
-          </a:xfrm>
-          <a:prstGeom prst="rect">
-            <a:avLst/>
-          </a:prstGeom>
-          <a:noFill/>
-        </p:spPr>
-        <p:txBody>
-          <a:bodyPr wrap="square">
-            <a:spAutoFit/>
-          </a:bodyPr>
-          <a:lstStyle/>
-          <a:p>
-            <a:pPr algn="l">
-              <a:defRPr sz="1800" b="1">
-                <a:solidFill>
-                  <a:srgbClr val="8B50F0"/>
-                </a:solidFill>
-                <a:latin typeface="Microsoft YaHei"/>
-              </a:defRPr>
-            </a:pPr>
-            <a:r>
-              <a:t>🅱️ 专业进阶（16周）</a:t>
-            </a:r>
-          </a:p>
-        </p:txBody>
-      </p:sp>
-      <p:sp>
-        <p:nvSpPr>
-          <p:cNvPr id="10" name="Rectangle 9"/>
+          <p:cNvPr id="4" name="Rectangle 3"/>
           <p:cNvSpPr/>
           <p:nvPr/>
         </p:nvSpPr>
         <p:spPr>
           <a:xfrm>
-            <a:off x="6400800" y="1783080"/>
-            <a:ext cx="1371600" cy="19050"/>
+            <a:off x="0" y="50800"/>
+            <a:ext cx="12191695" cy="12700"/>
           </a:xfrm>
           <a:prstGeom prst="rect">
             <a:avLst/>
           </a:prstGeom>
           <a:solidFill>
-            <a:srgbClr val="8B50F0"/>
+            <a:srgbClr val="00394C"/>
           </a:solidFill>
           <a:ln>
             <a:noFill/>
@@ -6440,128 +7414,20 @@
       </p:sp>
       <p:sp>
         <p:nvSpPr>
-          <p:cNvPr id="11" name="TextBox 10"/>
-          <p:cNvSpPr txBox="1"/>
-          <p:nvPr/>
-        </p:nvSpPr>
-        <p:spPr>
-          <a:xfrm>
-            <a:off x="6400800" y="2011680"/>
-            <a:ext cx="5029200" cy="457200"/>
-          </a:xfrm>
-          <a:prstGeom prst="rect">
-            <a:avLst/>
-          </a:prstGeom>
-          <a:noFill/>
-        </p:spPr>
-        <p:txBody>
-          <a:bodyPr wrap="square">
-            <a:spAutoFit/>
-          </a:bodyPr>
-          <a:lstStyle/>
-          <a:p>
-            <a:pPr algn="l">
-              <a:defRPr sz="1400" b="0">
-                <a:solidFill>
-                  <a:srgbClr val="9090A0"/>
-                </a:solidFill>
-                <a:latin typeface="Microsoft YaHei"/>
-              </a:defRPr>
-            </a:pPr>
-            <a:r>
-              <a:t>▸  全面掌握全链路</a:t>
-            </a:r>
-          </a:p>
-        </p:txBody>
-      </p:sp>
-      <p:sp>
-        <p:nvSpPr>
-          <p:cNvPr id="12" name="TextBox 11"/>
-          <p:cNvSpPr txBox="1"/>
-          <p:nvPr/>
-        </p:nvSpPr>
-        <p:spPr>
-          <a:xfrm>
-            <a:off x="6400800" y="2560320"/>
-            <a:ext cx="5029200" cy="457200"/>
-          </a:xfrm>
-          <a:prstGeom prst="rect">
-            <a:avLst/>
-          </a:prstGeom>
-          <a:noFill/>
-        </p:spPr>
-        <p:txBody>
-          <a:bodyPr wrap="square">
-            <a:spAutoFit/>
-          </a:bodyPr>
-          <a:lstStyle/>
-          <a:p>
-            <a:pPr algn="l">
-              <a:defRPr sz="1400" b="0">
-                <a:solidFill>
-                  <a:srgbClr val="9090A0"/>
-                </a:solidFill>
-                <a:latin typeface="Microsoft YaHei"/>
-              </a:defRPr>
-            </a:pPr>
-            <a:r>
-              <a:t>▸  全部17个模块</a:t>
-            </a:r>
-          </a:p>
-        </p:txBody>
-      </p:sp>
-      <p:sp>
-        <p:nvSpPr>
-          <p:cNvPr id="13" name="TextBox 12"/>
-          <p:cNvSpPr txBox="1"/>
-          <p:nvPr/>
-        </p:nvSpPr>
-        <p:spPr>
-          <a:xfrm>
-            <a:off x="6400800" y="3108960"/>
-            <a:ext cx="5029200" cy="457200"/>
-          </a:xfrm>
-          <a:prstGeom prst="rect">
-            <a:avLst/>
-          </a:prstGeom>
-          <a:noFill/>
-        </p:spPr>
-        <p:txBody>
-          <a:bodyPr wrap="square">
-            <a:spAutoFit/>
-          </a:bodyPr>
-          <a:lstStyle/>
-          <a:p>
-            <a:pPr algn="l">
-              <a:defRPr sz="1400" b="0">
-                <a:solidFill>
-                  <a:srgbClr val="9090A0"/>
-                </a:solidFill>
-                <a:latin typeface="Microsoft YaHei"/>
-              </a:defRPr>
-            </a:pPr>
-            <a:r>
-              <a:t>▸  适合：追求专业深度</a:t>
-            </a:r>
-          </a:p>
-        </p:txBody>
-      </p:sp>
-      <p:sp>
-        <p:nvSpPr>
-          <p:cNvPr id="14" name="Rectangle 13"/>
+          <p:cNvPr id="5" name="Rectangle 4"/>
           <p:cNvSpPr/>
           <p:nvPr/>
         </p:nvSpPr>
         <p:spPr>
           <a:xfrm>
-            <a:off x="0" y="6446520"/>
-            <a:ext cx="12191695" cy="19050"/>
+            <a:off x="0" y="63500"/>
+            <a:ext cx="12191695" cy="960120"/>
           </a:xfrm>
           <a:prstGeom prst="rect">
             <a:avLst/>
           </a:prstGeom>
           <a:solidFill>
-            <a:srgbClr val="1E1E2A"/>
+            <a:srgbClr val="12141E"/>
           </a:solidFill>
           <a:ln>
             <a:noFill/>
@@ -6591,14 +7457,57 @@
       </p:sp>
       <p:sp>
         <p:nvSpPr>
-          <p:cNvPr id="15" name="TextBox 14"/>
+          <p:cNvPr id="6" name="Rectangle 5"/>
+          <p:cNvSpPr/>
+          <p:nvPr/>
+        </p:nvSpPr>
+        <p:spPr>
+          <a:xfrm>
+            <a:off x="0" y="63500"/>
+            <a:ext cx="73152" cy="960120"/>
+          </a:xfrm>
+          <a:prstGeom prst="rect">
+            <a:avLst/>
+          </a:prstGeom>
+          <a:solidFill>
+            <a:srgbClr val="00C0FF"/>
+          </a:solidFill>
+          <a:ln>
+            <a:noFill/>
+          </a:ln>
+        </p:spPr>
+        <p:style>
+          <a:lnRef idx="1">
+            <a:schemeClr val="accent1"/>
+          </a:lnRef>
+          <a:fillRef idx="3">
+            <a:schemeClr val="accent1"/>
+          </a:fillRef>
+          <a:effectRef idx="2">
+            <a:schemeClr val="accent1"/>
+          </a:effectRef>
+          <a:fontRef idx="minor">
+            <a:schemeClr val="lt1"/>
+          </a:fontRef>
+        </p:style>
+        <p:txBody>
+          <a:bodyPr rtlCol="0" anchor="ctr"/>
+          <a:lstStyle/>
+          <a:p>
+            <a:pPr algn="ctr"/>
+          </a:p>
+        </p:txBody>
+      </p:sp>
+      <p:sp>
+        <p:nvSpPr>
+          <p:cNvPr id="7" name="TextBox 6"/>
           <p:cNvSpPr txBox="1"/>
           <p:nvPr/>
         </p:nvSpPr>
         <p:spPr>
           <a:xfrm>
-            <a:off x="731520" y="6492240"/>
-            <a:ext cx="4572000" cy="274320"/>
+            <a:off x="640080" y="164592"/>
+            <a:ext cx="10058400" cy="594360"/>
           </a:xfrm>
           <a:prstGeom prst="rect">
             <a:avLst/>
@@ -6612,15 +7521,977 @@
           <a:lstStyle/>
           <a:p>
             <a:pPr algn="l">
-              <a:defRPr sz="900" b="0">
+              <a:defRPr sz="2400" b="1">
                 <a:solidFill>
-                  <a:srgbClr val="505060"/>
+                  <a:srgbClr val="EEEEF4"/>
                 </a:solidFill>
                 <a:latin typeface="Microsoft YaHei"/>
               </a:defRPr>
             </a:pPr>
             <a:r>
+              <a:t>学习路径选择</a:t>
+            </a:r>
+          </a:p>
+        </p:txBody>
+      </p:sp>
+      <p:sp>
+        <p:nvSpPr>
+          <p:cNvPr id="8" name="Rectangle 7"/>
+          <p:cNvSpPr/>
+          <p:nvPr/>
+        </p:nvSpPr>
+        <p:spPr>
+          <a:xfrm>
+            <a:off x="0" y="1097280"/>
+            <a:ext cx="12191695" cy="12700"/>
+          </a:xfrm>
+          <a:prstGeom prst="rect">
+            <a:avLst/>
+          </a:prstGeom>
+          <a:solidFill>
+            <a:srgbClr val="222432"/>
+          </a:solidFill>
+          <a:ln>
+            <a:noFill/>
+          </a:ln>
+        </p:spPr>
+        <p:style>
+          <a:lnRef idx="1">
+            <a:schemeClr val="accent1"/>
+          </a:lnRef>
+          <a:fillRef idx="3">
+            <a:schemeClr val="accent1"/>
+          </a:fillRef>
+          <a:effectRef idx="2">
+            <a:schemeClr val="accent1"/>
+          </a:effectRef>
+          <a:fontRef idx="minor">
+            <a:schemeClr val="lt1"/>
+          </a:fontRef>
+        </p:style>
+        <p:txBody>
+          <a:bodyPr rtlCol="0" anchor="ctr"/>
+          <a:lstStyle/>
+          <a:p>
+            <a:pPr algn="ctr"/>
+          </a:p>
+        </p:txBody>
+      </p:sp>
+      <p:sp>
+        <p:nvSpPr>
+          <p:cNvPr id="9" name="Rounded Rectangle 8"/>
+          <p:cNvSpPr/>
+          <p:nvPr/>
+        </p:nvSpPr>
+        <p:spPr>
+          <a:xfrm>
+            <a:off x="457200" y="1371600"/>
+            <a:ext cx="5349240" cy="4754880"/>
+          </a:xfrm>
+          <a:prstGeom prst="roundRect">
+            <a:avLst/>
+          </a:prstGeom>
+          <a:solidFill>
+            <a:srgbClr val="12141E"/>
+          </a:solidFill>
+          <a:ln>
+            <a:noFill/>
+          </a:ln>
+        </p:spPr>
+        <p:style>
+          <a:lnRef idx="1">
+            <a:schemeClr val="accent1"/>
+          </a:lnRef>
+          <a:fillRef idx="3">
+            <a:schemeClr val="accent1"/>
+          </a:fillRef>
+          <a:effectRef idx="2">
+            <a:schemeClr val="accent1"/>
+          </a:effectRef>
+          <a:fontRef idx="minor">
+            <a:schemeClr val="lt1"/>
+          </a:fontRef>
+        </p:style>
+        <p:txBody>
+          <a:bodyPr rtlCol="0" anchor="ctr"/>
+          <a:lstStyle/>
+          <a:p>
+            <a:pPr algn="ctr"/>
+          </a:p>
+        </p:txBody>
+      </p:sp>
+      <p:sp>
+        <p:nvSpPr>
+          <p:cNvPr id="10" name="Rectangle 9"/>
+          <p:cNvSpPr/>
+          <p:nvPr/>
+        </p:nvSpPr>
+        <p:spPr>
+          <a:xfrm>
+            <a:off x="457200" y="1371600"/>
+            <a:ext cx="5349240" cy="38100"/>
+          </a:xfrm>
+          <a:prstGeom prst="rect">
+            <a:avLst/>
+          </a:prstGeom>
+          <a:solidFill>
+            <a:srgbClr val="00C0FF"/>
+          </a:solidFill>
+          <a:ln>
+            <a:noFill/>
+          </a:ln>
+        </p:spPr>
+        <p:style>
+          <a:lnRef idx="1">
+            <a:schemeClr val="accent1"/>
+          </a:lnRef>
+          <a:fillRef idx="3">
+            <a:schemeClr val="accent1"/>
+          </a:fillRef>
+          <a:effectRef idx="2">
+            <a:schemeClr val="accent1"/>
+          </a:effectRef>
+          <a:fontRef idx="minor">
+            <a:schemeClr val="lt1"/>
+          </a:fontRef>
+        </p:style>
+        <p:txBody>
+          <a:bodyPr rtlCol="0" anchor="ctr"/>
+          <a:lstStyle/>
+          <a:p>
+            <a:pPr algn="ctr"/>
+          </a:p>
+        </p:txBody>
+      </p:sp>
+      <p:sp>
+        <p:nvSpPr>
+          <p:cNvPr id="11" name="TextBox 10"/>
+          <p:cNvSpPr txBox="1"/>
+          <p:nvPr/>
+        </p:nvSpPr>
+        <p:spPr>
+          <a:xfrm>
+            <a:off x="731520" y="1600200"/>
+            <a:ext cx="4754880" cy="411480"/>
+          </a:xfrm>
+          <a:prstGeom prst="rect">
+            <a:avLst/>
+          </a:prstGeom>
+          <a:noFill/>
+        </p:spPr>
+        <p:txBody>
+          <a:bodyPr wrap="square">
+            <a:spAutoFit/>
+          </a:bodyPr>
+          <a:lstStyle/>
+          <a:p>
+            <a:pPr algn="l">
+              <a:defRPr sz="1800" b="1">
+                <a:solidFill>
+                  <a:srgbClr val="00C0FF"/>
+                </a:solidFill>
+                <a:latin typeface="Microsoft YaHei"/>
+              </a:defRPr>
+            </a:pPr>
+            <a:r>
+              <a:t>🅰️ 零基础速成（8周）</a:t>
+            </a:r>
+          </a:p>
+        </p:txBody>
+      </p:sp>
+      <p:sp>
+        <p:nvSpPr>
+          <p:cNvPr id="12" name="Rectangle 11"/>
+          <p:cNvSpPr/>
+          <p:nvPr/>
+        </p:nvSpPr>
+        <p:spPr>
+          <a:xfrm>
+            <a:off x="731520" y="2103120"/>
+            <a:ext cx="1371600" cy="25400"/>
+          </a:xfrm>
+          <a:prstGeom prst="rect">
+            <a:avLst/>
+          </a:prstGeom>
+          <a:solidFill>
+            <a:srgbClr val="00C0FF"/>
+          </a:solidFill>
+          <a:ln>
+            <a:noFill/>
+          </a:ln>
+        </p:spPr>
+        <p:style>
+          <a:lnRef idx="1">
+            <a:schemeClr val="accent1"/>
+          </a:lnRef>
+          <a:fillRef idx="3">
+            <a:schemeClr val="accent1"/>
+          </a:fillRef>
+          <a:effectRef idx="2">
+            <a:schemeClr val="accent1"/>
+          </a:effectRef>
+          <a:fontRef idx="minor">
+            <a:schemeClr val="lt1"/>
+          </a:fontRef>
+        </p:style>
+        <p:txBody>
+          <a:bodyPr rtlCol="0" anchor="ctr"/>
+          <a:lstStyle/>
+          <a:p>
+            <a:pPr algn="ctr"/>
+          </a:p>
+        </p:txBody>
+      </p:sp>
+      <p:sp>
+        <p:nvSpPr>
+          <p:cNvPr id="13" name="Oval 12"/>
+          <p:cNvSpPr/>
+          <p:nvPr/>
+        </p:nvSpPr>
+        <p:spPr>
+          <a:xfrm>
+            <a:off x="731520" y="2386584"/>
+            <a:ext cx="146304" cy="146304"/>
+          </a:xfrm>
+          <a:prstGeom prst="ellipse">
+            <a:avLst/>
+          </a:prstGeom>
+          <a:solidFill>
+            <a:srgbClr val="00C0FF"/>
+          </a:solidFill>
+          <a:ln>
+            <a:noFill/>
+          </a:ln>
+        </p:spPr>
+        <p:style>
+          <a:lnRef idx="1">
+            <a:schemeClr val="accent1"/>
+          </a:lnRef>
+          <a:fillRef idx="3">
+            <a:schemeClr val="accent1"/>
+          </a:fillRef>
+          <a:effectRef idx="2">
+            <a:schemeClr val="accent1"/>
+          </a:effectRef>
+          <a:fontRef idx="minor">
+            <a:schemeClr val="lt1"/>
+          </a:fontRef>
+        </p:style>
+        <p:txBody>
+          <a:bodyPr rtlCol="0" anchor="ctr"/>
+          <a:lstStyle/>
+          <a:p>
+            <a:pPr algn="ctr"/>
+          </a:p>
+        </p:txBody>
+      </p:sp>
+      <p:sp>
+        <p:nvSpPr>
+          <p:cNvPr id="14" name="TextBox 13"/>
+          <p:cNvSpPr txBox="1"/>
+          <p:nvPr/>
+        </p:nvSpPr>
+        <p:spPr>
+          <a:xfrm>
+            <a:off x="1005840" y="2331720"/>
+            <a:ext cx="4572000" cy="411480"/>
+          </a:xfrm>
+          <a:prstGeom prst="rect">
+            <a:avLst/>
+          </a:prstGeom>
+          <a:noFill/>
+        </p:spPr>
+        <p:txBody>
+          <a:bodyPr wrap="square">
+            <a:spAutoFit/>
+          </a:bodyPr>
+          <a:lstStyle/>
+          <a:p>
+            <a:pPr algn="l">
+              <a:defRPr sz="1300" b="0">
+                <a:solidFill>
+                  <a:srgbClr val="989AA8"/>
+                </a:solidFill>
+                <a:latin typeface="Microsoft YaHei"/>
+              </a:defRPr>
+            </a:pPr>
+            <a:r>
+              <a:t>快速上手出作品</a:t>
+            </a:r>
+          </a:p>
+        </p:txBody>
+      </p:sp>
+      <p:sp>
+        <p:nvSpPr>
+          <p:cNvPr id="15" name="Oval 14"/>
+          <p:cNvSpPr/>
+          <p:nvPr/>
+        </p:nvSpPr>
+        <p:spPr>
+          <a:xfrm>
+            <a:off x="731520" y="2916936"/>
+            <a:ext cx="146304" cy="146304"/>
+          </a:xfrm>
+          <a:prstGeom prst="ellipse">
+            <a:avLst/>
+          </a:prstGeom>
+          <a:solidFill>
+            <a:srgbClr val="00C0FF"/>
+          </a:solidFill>
+          <a:ln>
+            <a:noFill/>
+          </a:ln>
+        </p:spPr>
+        <p:style>
+          <a:lnRef idx="1">
+            <a:schemeClr val="accent1"/>
+          </a:lnRef>
+          <a:fillRef idx="3">
+            <a:schemeClr val="accent1"/>
+          </a:fillRef>
+          <a:effectRef idx="2">
+            <a:schemeClr val="accent1"/>
+          </a:effectRef>
+          <a:fontRef idx="minor">
+            <a:schemeClr val="lt1"/>
+          </a:fontRef>
+        </p:style>
+        <p:txBody>
+          <a:bodyPr rtlCol="0" anchor="ctr"/>
+          <a:lstStyle/>
+          <a:p>
+            <a:pPr algn="ctr"/>
+          </a:p>
+        </p:txBody>
+      </p:sp>
+      <p:sp>
+        <p:nvSpPr>
+          <p:cNvPr id="16" name="TextBox 15"/>
+          <p:cNvSpPr txBox="1"/>
+          <p:nvPr/>
+        </p:nvSpPr>
+        <p:spPr>
+          <a:xfrm>
+            <a:off x="1005840" y="2862072"/>
+            <a:ext cx="4572000" cy="411480"/>
+          </a:xfrm>
+          <a:prstGeom prst="rect">
+            <a:avLst/>
+          </a:prstGeom>
+          <a:noFill/>
+        </p:spPr>
+        <p:txBody>
+          <a:bodyPr wrap="square">
+            <a:spAutoFit/>
+          </a:bodyPr>
+          <a:lstStyle/>
+          <a:p>
+            <a:pPr algn="l">
+              <a:defRPr sz="1300" b="0">
+                <a:solidFill>
+                  <a:srgbClr val="989AA8"/>
+                </a:solidFill>
+                <a:latin typeface="Microsoft YaHei"/>
+              </a:defRPr>
+            </a:pPr>
+            <a:r>
+              <a:t>重点模块：1,2,3,4,6,10,11,12,17</a:t>
+            </a:r>
+          </a:p>
+        </p:txBody>
+      </p:sp>
+      <p:sp>
+        <p:nvSpPr>
+          <p:cNvPr id="17" name="Oval 16"/>
+          <p:cNvSpPr/>
+          <p:nvPr/>
+        </p:nvSpPr>
+        <p:spPr>
+          <a:xfrm>
+            <a:off x="731520" y="3447288"/>
+            <a:ext cx="146304" cy="146304"/>
+          </a:xfrm>
+          <a:prstGeom prst="ellipse">
+            <a:avLst/>
+          </a:prstGeom>
+          <a:solidFill>
+            <a:srgbClr val="00C0FF"/>
+          </a:solidFill>
+          <a:ln>
+            <a:noFill/>
+          </a:ln>
+        </p:spPr>
+        <p:style>
+          <a:lnRef idx="1">
+            <a:schemeClr val="accent1"/>
+          </a:lnRef>
+          <a:fillRef idx="3">
+            <a:schemeClr val="accent1"/>
+          </a:fillRef>
+          <a:effectRef idx="2">
+            <a:schemeClr val="accent1"/>
+          </a:effectRef>
+          <a:fontRef idx="minor">
+            <a:schemeClr val="lt1"/>
+          </a:fontRef>
+        </p:style>
+        <p:txBody>
+          <a:bodyPr rtlCol="0" anchor="ctr"/>
+          <a:lstStyle/>
+          <a:p>
+            <a:pPr algn="ctr"/>
+          </a:p>
+        </p:txBody>
+      </p:sp>
+      <p:sp>
+        <p:nvSpPr>
+          <p:cNvPr id="18" name="TextBox 17"/>
+          <p:cNvSpPr txBox="1"/>
+          <p:nvPr/>
+        </p:nvSpPr>
+        <p:spPr>
+          <a:xfrm>
+            <a:off x="1005840" y="3392424"/>
+            <a:ext cx="4572000" cy="411480"/>
+          </a:xfrm>
+          <a:prstGeom prst="rect">
+            <a:avLst/>
+          </a:prstGeom>
+          <a:noFill/>
+        </p:spPr>
+        <p:txBody>
+          <a:bodyPr wrap="square">
+            <a:spAutoFit/>
+          </a:bodyPr>
+          <a:lstStyle/>
+          <a:p>
+            <a:pPr algn="l">
+              <a:defRPr sz="1300" b="0">
+                <a:solidFill>
+                  <a:srgbClr val="989AA8"/>
+                </a:solidFill>
+                <a:latin typeface="Microsoft YaHei"/>
+              </a:defRPr>
+            </a:pPr>
+            <a:r>
+              <a:t>适合：想快速入行变现</a:t>
+            </a:r>
+          </a:p>
+        </p:txBody>
+      </p:sp>
+      <p:sp>
+        <p:nvSpPr>
+          <p:cNvPr id="19" name="Rounded Rectangle 18"/>
+          <p:cNvSpPr/>
+          <p:nvPr/>
+        </p:nvSpPr>
+        <p:spPr>
+          <a:xfrm>
+            <a:off x="6263640" y="1371600"/>
+            <a:ext cx="5349240" cy="4754880"/>
+          </a:xfrm>
+          <a:prstGeom prst="roundRect">
+            <a:avLst/>
+          </a:prstGeom>
+          <a:solidFill>
+            <a:srgbClr val="12141E"/>
+          </a:solidFill>
+          <a:ln>
+            <a:noFill/>
+          </a:ln>
+        </p:spPr>
+        <p:style>
+          <a:lnRef idx="1">
+            <a:schemeClr val="accent1"/>
+          </a:lnRef>
+          <a:fillRef idx="3">
+            <a:schemeClr val="accent1"/>
+          </a:fillRef>
+          <a:effectRef idx="2">
+            <a:schemeClr val="accent1"/>
+          </a:effectRef>
+          <a:fontRef idx="minor">
+            <a:schemeClr val="lt1"/>
+          </a:fontRef>
+        </p:style>
+        <p:txBody>
+          <a:bodyPr rtlCol="0" anchor="ctr"/>
+          <a:lstStyle/>
+          <a:p>
+            <a:pPr algn="ctr"/>
+          </a:p>
+        </p:txBody>
+      </p:sp>
+      <p:sp>
+        <p:nvSpPr>
+          <p:cNvPr id="20" name="Rectangle 19"/>
+          <p:cNvSpPr/>
+          <p:nvPr/>
+        </p:nvSpPr>
+        <p:spPr>
+          <a:xfrm>
+            <a:off x="6263640" y="1371600"/>
+            <a:ext cx="5349240" cy="38100"/>
+          </a:xfrm>
+          <a:prstGeom prst="rect">
+            <a:avLst/>
+          </a:prstGeom>
+          <a:solidFill>
+            <a:srgbClr val="8A4EF0"/>
+          </a:solidFill>
+          <a:ln>
+            <a:noFill/>
+          </a:ln>
+        </p:spPr>
+        <p:style>
+          <a:lnRef idx="1">
+            <a:schemeClr val="accent1"/>
+          </a:lnRef>
+          <a:fillRef idx="3">
+            <a:schemeClr val="accent1"/>
+          </a:fillRef>
+          <a:effectRef idx="2">
+            <a:schemeClr val="accent1"/>
+          </a:effectRef>
+          <a:fontRef idx="minor">
+            <a:schemeClr val="lt1"/>
+          </a:fontRef>
+        </p:style>
+        <p:txBody>
+          <a:bodyPr rtlCol="0" anchor="ctr"/>
+          <a:lstStyle/>
+          <a:p>
+            <a:pPr algn="ctr"/>
+          </a:p>
+        </p:txBody>
+      </p:sp>
+      <p:sp>
+        <p:nvSpPr>
+          <p:cNvPr id="21" name="TextBox 20"/>
+          <p:cNvSpPr txBox="1"/>
+          <p:nvPr/>
+        </p:nvSpPr>
+        <p:spPr>
+          <a:xfrm>
+            <a:off x="6537960" y="1600200"/>
+            <a:ext cx="4754880" cy="411480"/>
+          </a:xfrm>
+          <a:prstGeom prst="rect">
+            <a:avLst/>
+          </a:prstGeom>
+          <a:noFill/>
+        </p:spPr>
+        <p:txBody>
+          <a:bodyPr wrap="square">
+            <a:spAutoFit/>
+          </a:bodyPr>
+          <a:lstStyle/>
+          <a:p>
+            <a:pPr algn="l">
+              <a:defRPr sz="1800" b="1">
+                <a:solidFill>
+                  <a:srgbClr val="8A4EF0"/>
+                </a:solidFill>
+                <a:latin typeface="Microsoft YaHei"/>
+              </a:defRPr>
+            </a:pPr>
+            <a:r>
+              <a:t>🅱️ 专业进阶（16周）</a:t>
+            </a:r>
+          </a:p>
+        </p:txBody>
+      </p:sp>
+      <p:sp>
+        <p:nvSpPr>
+          <p:cNvPr id="22" name="Rectangle 21"/>
+          <p:cNvSpPr/>
+          <p:nvPr/>
+        </p:nvSpPr>
+        <p:spPr>
+          <a:xfrm>
+            <a:off x="6537960" y="2103120"/>
+            <a:ext cx="1371600" cy="25400"/>
+          </a:xfrm>
+          <a:prstGeom prst="rect">
+            <a:avLst/>
+          </a:prstGeom>
+          <a:solidFill>
+            <a:srgbClr val="8A4EF0"/>
+          </a:solidFill>
+          <a:ln>
+            <a:noFill/>
+          </a:ln>
+        </p:spPr>
+        <p:style>
+          <a:lnRef idx="1">
+            <a:schemeClr val="accent1"/>
+          </a:lnRef>
+          <a:fillRef idx="3">
+            <a:schemeClr val="accent1"/>
+          </a:fillRef>
+          <a:effectRef idx="2">
+            <a:schemeClr val="accent1"/>
+          </a:effectRef>
+          <a:fontRef idx="minor">
+            <a:schemeClr val="lt1"/>
+          </a:fontRef>
+        </p:style>
+        <p:txBody>
+          <a:bodyPr rtlCol="0" anchor="ctr"/>
+          <a:lstStyle/>
+          <a:p>
+            <a:pPr algn="ctr"/>
+          </a:p>
+        </p:txBody>
+      </p:sp>
+      <p:sp>
+        <p:nvSpPr>
+          <p:cNvPr id="23" name="Oval 22"/>
+          <p:cNvSpPr/>
+          <p:nvPr/>
+        </p:nvSpPr>
+        <p:spPr>
+          <a:xfrm>
+            <a:off x="6537960" y="2386584"/>
+            <a:ext cx="146304" cy="146304"/>
+          </a:xfrm>
+          <a:prstGeom prst="ellipse">
+            <a:avLst/>
+          </a:prstGeom>
+          <a:solidFill>
+            <a:srgbClr val="8A4EF0"/>
+          </a:solidFill>
+          <a:ln>
+            <a:noFill/>
+          </a:ln>
+        </p:spPr>
+        <p:style>
+          <a:lnRef idx="1">
+            <a:schemeClr val="accent1"/>
+          </a:lnRef>
+          <a:fillRef idx="3">
+            <a:schemeClr val="accent1"/>
+          </a:fillRef>
+          <a:effectRef idx="2">
+            <a:schemeClr val="accent1"/>
+          </a:effectRef>
+          <a:fontRef idx="minor">
+            <a:schemeClr val="lt1"/>
+          </a:fontRef>
+        </p:style>
+        <p:txBody>
+          <a:bodyPr rtlCol="0" anchor="ctr"/>
+          <a:lstStyle/>
+          <a:p>
+            <a:pPr algn="ctr"/>
+          </a:p>
+        </p:txBody>
+      </p:sp>
+      <p:sp>
+        <p:nvSpPr>
+          <p:cNvPr id="24" name="TextBox 23"/>
+          <p:cNvSpPr txBox="1"/>
+          <p:nvPr/>
+        </p:nvSpPr>
+        <p:spPr>
+          <a:xfrm>
+            <a:off x="6812280" y="2331720"/>
+            <a:ext cx="4572000" cy="411480"/>
+          </a:xfrm>
+          <a:prstGeom prst="rect">
+            <a:avLst/>
+          </a:prstGeom>
+          <a:noFill/>
+        </p:spPr>
+        <p:txBody>
+          <a:bodyPr wrap="square">
+            <a:spAutoFit/>
+          </a:bodyPr>
+          <a:lstStyle/>
+          <a:p>
+            <a:pPr algn="l">
+              <a:defRPr sz="1300" b="0">
+                <a:solidFill>
+                  <a:srgbClr val="989AA8"/>
+                </a:solidFill>
+                <a:latin typeface="Microsoft YaHei"/>
+              </a:defRPr>
+            </a:pPr>
+            <a:r>
+              <a:t>全面掌握全链路</a:t>
+            </a:r>
+          </a:p>
+        </p:txBody>
+      </p:sp>
+      <p:sp>
+        <p:nvSpPr>
+          <p:cNvPr id="25" name="Oval 24"/>
+          <p:cNvSpPr/>
+          <p:nvPr/>
+        </p:nvSpPr>
+        <p:spPr>
+          <a:xfrm>
+            <a:off x="6537960" y="2916936"/>
+            <a:ext cx="146304" cy="146304"/>
+          </a:xfrm>
+          <a:prstGeom prst="ellipse">
+            <a:avLst/>
+          </a:prstGeom>
+          <a:solidFill>
+            <a:srgbClr val="8A4EF0"/>
+          </a:solidFill>
+          <a:ln>
+            <a:noFill/>
+          </a:ln>
+        </p:spPr>
+        <p:style>
+          <a:lnRef idx="1">
+            <a:schemeClr val="accent1"/>
+          </a:lnRef>
+          <a:fillRef idx="3">
+            <a:schemeClr val="accent1"/>
+          </a:fillRef>
+          <a:effectRef idx="2">
+            <a:schemeClr val="accent1"/>
+          </a:effectRef>
+          <a:fontRef idx="minor">
+            <a:schemeClr val="lt1"/>
+          </a:fontRef>
+        </p:style>
+        <p:txBody>
+          <a:bodyPr rtlCol="0" anchor="ctr"/>
+          <a:lstStyle/>
+          <a:p>
+            <a:pPr algn="ctr"/>
+          </a:p>
+        </p:txBody>
+      </p:sp>
+      <p:sp>
+        <p:nvSpPr>
+          <p:cNvPr id="26" name="TextBox 25"/>
+          <p:cNvSpPr txBox="1"/>
+          <p:nvPr/>
+        </p:nvSpPr>
+        <p:spPr>
+          <a:xfrm>
+            <a:off x="6812280" y="2862072"/>
+            <a:ext cx="4572000" cy="411480"/>
+          </a:xfrm>
+          <a:prstGeom prst="rect">
+            <a:avLst/>
+          </a:prstGeom>
+          <a:noFill/>
+        </p:spPr>
+        <p:txBody>
+          <a:bodyPr wrap="square">
+            <a:spAutoFit/>
+          </a:bodyPr>
+          <a:lstStyle/>
+          <a:p>
+            <a:pPr algn="l">
+              <a:defRPr sz="1300" b="0">
+                <a:solidFill>
+                  <a:srgbClr val="989AA8"/>
+                </a:solidFill>
+                <a:latin typeface="Microsoft YaHei"/>
+              </a:defRPr>
+            </a:pPr>
+            <a:r>
+              <a:t>全部17个模块</a:t>
+            </a:r>
+          </a:p>
+        </p:txBody>
+      </p:sp>
+      <p:sp>
+        <p:nvSpPr>
+          <p:cNvPr id="27" name="Oval 26"/>
+          <p:cNvSpPr/>
+          <p:nvPr/>
+        </p:nvSpPr>
+        <p:spPr>
+          <a:xfrm>
+            <a:off x="6537960" y="3447288"/>
+            <a:ext cx="146304" cy="146304"/>
+          </a:xfrm>
+          <a:prstGeom prst="ellipse">
+            <a:avLst/>
+          </a:prstGeom>
+          <a:solidFill>
+            <a:srgbClr val="8A4EF0"/>
+          </a:solidFill>
+          <a:ln>
+            <a:noFill/>
+          </a:ln>
+        </p:spPr>
+        <p:style>
+          <a:lnRef idx="1">
+            <a:schemeClr val="accent1"/>
+          </a:lnRef>
+          <a:fillRef idx="3">
+            <a:schemeClr val="accent1"/>
+          </a:fillRef>
+          <a:effectRef idx="2">
+            <a:schemeClr val="accent1"/>
+          </a:effectRef>
+          <a:fontRef idx="minor">
+            <a:schemeClr val="lt1"/>
+          </a:fontRef>
+        </p:style>
+        <p:txBody>
+          <a:bodyPr rtlCol="0" anchor="ctr"/>
+          <a:lstStyle/>
+          <a:p>
+            <a:pPr algn="ctr"/>
+          </a:p>
+        </p:txBody>
+      </p:sp>
+      <p:sp>
+        <p:nvSpPr>
+          <p:cNvPr id="28" name="TextBox 27"/>
+          <p:cNvSpPr txBox="1"/>
+          <p:nvPr/>
+        </p:nvSpPr>
+        <p:spPr>
+          <a:xfrm>
+            <a:off x="6812280" y="3392424"/>
+            <a:ext cx="4572000" cy="411480"/>
+          </a:xfrm>
+          <a:prstGeom prst="rect">
+            <a:avLst/>
+          </a:prstGeom>
+          <a:noFill/>
+        </p:spPr>
+        <p:txBody>
+          <a:bodyPr wrap="square">
+            <a:spAutoFit/>
+          </a:bodyPr>
+          <a:lstStyle/>
+          <a:p>
+            <a:pPr algn="l">
+              <a:defRPr sz="1300" b="0">
+                <a:solidFill>
+                  <a:srgbClr val="989AA8"/>
+                </a:solidFill>
+                <a:latin typeface="Microsoft YaHei"/>
+              </a:defRPr>
+            </a:pPr>
+            <a:r>
+              <a:t>适合：追求专业深度</a:t>
+            </a:r>
+          </a:p>
+        </p:txBody>
+      </p:sp>
+      <p:sp>
+        <p:nvSpPr>
+          <p:cNvPr id="29" name="Rectangle 28"/>
+          <p:cNvSpPr/>
+          <p:nvPr/>
+        </p:nvSpPr>
+        <p:spPr>
+          <a:xfrm>
+            <a:off x="0" y="6446520"/>
+            <a:ext cx="12191695" cy="12700"/>
+          </a:xfrm>
+          <a:prstGeom prst="rect">
+            <a:avLst/>
+          </a:prstGeom>
+          <a:solidFill>
+            <a:srgbClr val="222432"/>
+          </a:solidFill>
+          <a:ln>
+            <a:noFill/>
+          </a:ln>
+        </p:spPr>
+        <p:style>
+          <a:lnRef idx="1">
+            <a:schemeClr val="accent1"/>
+          </a:lnRef>
+          <a:fillRef idx="3">
+            <a:schemeClr val="accent1"/>
+          </a:fillRef>
+          <a:effectRef idx="2">
+            <a:schemeClr val="accent1"/>
+          </a:effectRef>
+          <a:fontRef idx="minor">
+            <a:schemeClr val="lt1"/>
+          </a:fontRef>
+        </p:style>
+        <p:txBody>
+          <a:bodyPr rtlCol="0" anchor="ctr"/>
+          <a:lstStyle/>
+          <a:p>
+            <a:pPr algn="ctr"/>
+          </a:p>
+        </p:txBody>
+      </p:sp>
+      <p:sp>
+        <p:nvSpPr>
+          <p:cNvPr id="30" name="TextBox 29"/>
+          <p:cNvSpPr txBox="1"/>
+          <p:nvPr/>
+        </p:nvSpPr>
+        <p:spPr>
+          <a:xfrm>
+            <a:off x="731520" y="6492240"/>
+            <a:ext cx="4572000" cy="274320"/>
+          </a:xfrm>
+          <a:prstGeom prst="rect">
+            <a:avLst/>
+          </a:prstGeom>
+          <a:noFill/>
+        </p:spPr>
+        <p:txBody>
+          <a:bodyPr wrap="square">
+            <a:spAutoFit/>
+          </a:bodyPr>
+          <a:lstStyle/>
+          <a:p>
+            <a:pPr algn="l">
+              <a:defRPr sz="900" b="0">
+                <a:solidFill>
+                  <a:srgbClr val="555768"/>
+                </a:solidFill>
+                <a:latin typeface="Microsoft YaHei"/>
+              </a:defRPr>
+            </a:pPr>
+            <a:r>
               <a:t>模块00 · 课程导论</a:t>
+            </a:r>
+          </a:p>
+        </p:txBody>
+      </p:sp>
+      <p:sp>
+        <p:nvSpPr>
+          <p:cNvPr id="31" name="TextBox 30"/>
+          <p:cNvSpPr txBox="1"/>
+          <p:nvPr/>
+        </p:nvSpPr>
+        <p:spPr>
+          <a:xfrm>
+            <a:off x="10789920" y="6492240"/>
+            <a:ext cx="1097280" cy="274320"/>
+          </a:xfrm>
+          <a:prstGeom prst="rect">
+            <a:avLst/>
+          </a:prstGeom>
+          <a:noFill/>
+        </p:spPr>
+        <p:txBody>
+          <a:bodyPr wrap="square">
+            <a:spAutoFit/>
+          </a:bodyPr>
+          <a:lstStyle/>
+          <a:p>
+            <a:pPr algn="r">
+              <a:defRPr sz="900" b="0">
+                <a:solidFill>
+                  <a:srgbClr val="555768"/>
+                </a:solidFill>
+                <a:latin typeface="Microsoft YaHei"/>
+              </a:defRPr>
+            </a:pPr>
+            <a:r>
+              <a:t>4</a:t>
             </a:r>
           </a:p>
         </p:txBody>
@@ -6639,7 +8510,7 @@
     <p:bg>
       <p:bgPr>
         <a:solidFill>
-          <a:srgbClr val="08080C"/>
+          <a:srgbClr val="09090F"/>
         </a:solidFill>
         <a:effectLst/>
       </p:bgPr>
@@ -6653,56 +8524,20 @@
       <p:grpSpPr/>
       <p:sp>
         <p:nvSpPr>
-          <p:cNvPr id="2" name="TextBox 1"/>
-          <p:cNvSpPr txBox="1"/>
-          <p:nvPr/>
-        </p:nvSpPr>
-        <p:spPr>
-          <a:xfrm>
-            <a:off x="731520" y="365760"/>
-            <a:ext cx="10058400" cy="548640"/>
-          </a:xfrm>
-          <a:prstGeom prst="rect">
-            <a:avLst/>
-          </a:prstGeom>
-          <a:noFill/>
-        </p:spPr>
-        <p:txBody>
-          <a:bodyPr wrap="square">
-            <a:spAutoFit/>
-          </a:bodyPr>
-          <a:lstStyle/>
-          <a:p>
-            <a:pPr algn="l">
-              <a:defRPr sz="2400" b="1">
-                <a:solidFill>
-                  <a:srgbClr val="F0F0F5"/>
-                </a:solidFill>
-                <a:latin typeface="Microsoft YaHei"/>
-              </a:defRPr>
-            </a:pPr>
-            <a:r>
-              <a:t>课程学习路线图</a:t>
-            </a:r>
-          </a:p>
-        </p:txBody>
-      </p:sp>
-      <p:sp>
-        <p:nvSpPr>
-          <p:cNvPr id="3" name="Rectangle 2"/>
+          <p:cNvPr id="2" name="Rectangle 1"/>
           <p:cNvSpPr/>
           <p:nvPr/>
         </p:nvSpPr>
         <p:spPr>
           <a:xfrm>
-            <a:off x="731520" y="960120"/>
-            <a:ext cx="1828800" cy="19050"/>
+            <a:off x="0" y="0"/>
+            <a:ext cx="12191695" cy="25400"/>
           </a:xfrm>
           <a:prstGeom prst="rect">
             <a:avLst/>
           </a:prstGeom>
           <a:solidFill>
-            <a:srgbClr val="00BFFF"/>
+            <a:srgbClr val="00C0FF"/>
           </a:solidFill>
           <a:ln>
             <a:noFill/>
@@ -6732,20 +8567,20 @@
       </p:sp>
       <p:sp>
         <p:nvSpPr>
-          <p:cNvPr id="4" name="Rectangle 3"/>
+          <p:cNvPr id="3" name="Rectangle 2"/>
           <p:cNvSpPr/>
           <p:nvPr/>
         </p:nvSpPr>
         <p:spPr>
           <a:xfrm>
-            <a:off x="731520" y="1353312"/>
-            <a:ext cx="45720" cy="502920"/>
+            <a:off x="0" y="25400"/>
+            <a:ext cx="12191695" cy="25400"/>
           </a:xfrm>
           <a:prstGeom prst="rect">
             <a:avLst/>
           </a:prstGeom>
           <a:solidFill>
-            <a:srgbClr val="00BFFF"/>
+            <a:srgbClr val="007399"/>
           </a:solidFill>
           <a:ln>
             <a:noFill/>
@@ -6775,92 +8610,20 @@
       </p:sp>
       <p:sp>
         <p:nvSpPr>
-          <p:cNvPr id="5" name="TextBox 4"/>
-          <p:cNvSpPr txBox="1"/>
-          <p:nvPr/>
-        </p:nvSpPr>
-        <p:spPr>
-          <a:xfrm>
-            <a:off x="1005840" y="1280160"/>
-            <a:ext cx="365760" cy="640080"/>
-          </a:xfrm>
-          <a:prstGeom prst="rect">
-            <a:avLst/>
-          </a:prstGeom>
-          <a:noFill/>
-        </p:spPr>
-        <p:txBody>
-          <a:bodyPr wrap="square">
-            <a:spAutoFit/>
-          </a:bodyPr>
-          <a:lstStyle/>
-          <a:p>
-            <a:pPr algn="l">
-              <a:defRPr sz="1300" b="1">
-                <a:solidFill>
-                  <a:srgbClr val="00BFFF"/>
-                </a:solidFill>
-                <a:latin typeface="Microsoft YaHei"/>
-              </a:defRPr>
-            </a:pPr>
-            <a:r>
-              <a:t>1</a:t>
-            </a:r>
-          </a:p>
-        </p:txBody>
-      </p:sp>
-      <p:sp>
-        <p:nvSpPr>
-          <p:cNvPr id="6" name="TextBox 5"/>
-          <p:cNvSpPr txBox="1"/>
-          <p:nvPr/>
-        </p:nvSpPr>
-        <p:spPr>
-          <a:xfrm>
-            <a:off x="1463040" y="1280160"/>
-            <a:ext cx="10058400" cy="640080"/>
-          </a:xfrm>
-          <a:prstGeom prst="rect">
-            <a:avLst/>
-          </a:prstGeom>
-          <a:noFill/>
-        </p:spPr>
-        <p:txBody>
-          <a:bodyPr wrap="square">
-            <a:spAutoFit/>
-          </a:bodyPr>
-          <a:lstStyle/>
-          <a:p>
-            <a:pPr algn="l">
-              <a:defRPr sz="1500" b="0">
-                <a:solidFill>
-                  <a:srgbClr val="9090A0"/>
-                </a:solidFill>
-                <a:latin typeface="Microsoft YaHei"/>
-              </a:defRPr>
-            </a:pPr>
-            <a:r>
-              <a:t>Step 1：行业认知 → 理解AI漫剧是什么、市场多大</a:t>
-            </a:r>
-          </a:p>
-        </p:txBody>
-      </p:sp>
-      <p:sp>
-        <p:nvSpPr>
-          <p:cNvPr id="7" name="Rectangle 6"/>
+          <p:cNvPr id="4" name="Rectangle 3"/>
           <p:cNvSpPr/>
           <p:nvPr/>
         </p:nvSpPr>
         <p:spPr>
           <a:xfrm>
-            <a:off x="731520" y="2157984"/>
-            <a:ext cx="45720" cy="502920"/>
+            <a:off x="0" y="50800"/>
+            <a:ext cx="12191695" cy="12700"/>
           </a:xfrm>
           <a:prstGeom prst="rect">
             <a:avLst/>
           </a:prstGeom>
           <a:solidFill>
-            <a:srgbClr val="00BFFF"/>
+            <a:srgbClr val="00394C"/>
           </a:solidFill>
           <a:ln>
             <a:noFill/>
@@ -6890,92 +8653,20 @@
       </p:sp>
       <p:sp>
         <p:nvSpPr>
-          <p:cNvPr id="8" name="TextBox 7"/>
-          <p:cNvSpPr txBox="1"/>
-          <p:nvPr/>
-        </p:nvSpPr>
-        <p:spPr>
-          <a:xfrm>
-            <a:off x="1005840" y="2084832"/>
-            <a:ext cx="365760" cy="640080"/>
-          </a:xfrm>
-          <a:prstGeom prst="rect">
-            <a:avLst/>
-          </a:prstGeom>
-          <a:noFill/>
-        </p:spPr>
-        <p:txBody>
-          <a:bodyPr wrap="square">
-            <a:spAutoFit/>
-          </a:bodyPr>
-          <a:lstStyle/>
-          <a:p>
-            <a:pPr algn="l">
-              <a:defRPr sz="1300" b="1">
-                <a:solidFill>
-                  <a:srgbClr val="00BFFF"/>
-                </a:solidFill>
-                <a:latin typeface="Microsoft YaHei"/>
-              </a:defRPr>
-            </a:pPr>
-            <a:r>
-              <a:t>2</a:t>
-            </a:r>
-          </a:p>
-        </p:txBody>
-      </p:sp>
-      <p:sp>
-        <p:nvSpPr>
-          <p:cNvPr id="9" name="TextBox 8"/>
-          <p:cNvSpPr txBox="1"/>
-          <p:nvPr/>
-        </p:nvSpPr>
-        <p:spPr>
-          <a:xfrm>
-            <a:off x="1463040" y="2084832"/>
-            <a:ext cx="10058400" cy="640080"/>
-          </a:xfrm>
-          <a:prstGeom prst="rect">
-            <a:avLst/>
-          </a:prstGeom>
-          <a:noFill/>
-        </p:spPr>
-        <p:txBody>
-          <a:bodyPr wrap="square">
-            <a:spAutoFit/>
-          </a:bodyPr>
-          <a:lstStyle/>
-          <a:p>
-            <a:pPr algn="l">
-              <a:defRPr sz="1500" b="0">
-                <a:solidFill>
-                  <a:srgbClr val="9090A0"/>
-                </a:solidFill>
-                <a:latin typeface="Microsoft YaHei"/>
-              </a:defRPr>
-            </a:pPr>
-            <a:r>
-              <a:t>Step 2：创作技能 → 剧本、分镜、提示词工程</a:t>
-            </a:r>
-          </a:p>
-        </p:txBody>
-      </p:sp>
-      <p:sp>
-        <p:nvSpPr>
-          <p:cNvPr id="10" name="Rectangle 9"/>
+          <p:cNvPr id="5" name="Rectangle 4"/>
           <p:cNvSpPr/>
           <p:nvPr/>
         </p:nvSpPr>
         <p:spPr>
           <a:xfrm>
-            <a:off x="731520" y="2962656"/>
-            <a:ext cx="45720" cy="502920"/>
+            <a:off x="0" y="63500"/>
+            <a:ext cx="12191695" cy="960120"/>
           </a:xfrm>
           <a:prstGeom prst="rect">
             <a:avLst/>
           </a:prstGeom>
           <a:solidFill>
-            <a:srgbClr val="00BFFF"/>
+            <a:srgbClr val="12141E"/>
           </a:solidFill>
           <a:ln>
             <a:noFill/>
@@ -7005,92 +8696,20 @@
       </p:sp>
       <p:sp>
         <p:nvSpPr>
-          <p:cNvPr id="11" name="TextBox 10"/>
-          <p:cNvSpPr txBox="1"/>
-          <p:nvPr/>
-        </p:nvSpPr>
-        <p:spPr>
-          <a:xfrm>
-            <a:off x="1005840" y="2889504"/>
-            <a:ext cx="365760" cy="640080"/>
-          </a:xfrm>
-          <a:prstGeom prst="rect">
-            <a:avLst/>
-          </a:prstGeom>
-          <a:noFill/>
-        </p:spPr>
-        <p:txBody>
-          <a:bodyPr wrap="square">
-            <a:spAutoFit/>
-          </a:bodyPr>
-          <a:lstStyle/>
-          <a:p>
-            <a:pPr algn="l">
-              <a:defRPr sz="1300" b="1">
-                <a:solidFill>
-                  <a:srgbClr val="00BFFF"/>
-                </a:solidFill>
-                <a:latin typeface="Microsoft YaHei"/>
-              </a:defRPr>
-            </a:pPr>
-            <a:r>
-              <a:t>3</a:t>
-            </a:r>
-          </a:p>
-        </p:txBody>
-      </p:sp>
-      <p:sp>
-        <p:nvSpPr>
-          <p:cNvPr id="12" name="TextBox 11"/>
-          <p:cNvSpPr txBox="1"/>
-          <p:nvPr/>
-        </p:nvSpPr>
-        <p:spPr>
-          <a:xfrm>
-            <a:off x="1463040" y="2889504"/>
-            <a:ext cx="10058400" cy="640080"/>
-          </a:xfrm>
-          <a:prstGeom prst="rect">
-            <a:avLst/>
-          </a:prstGeom>
-          <a:noFill/>
-        </p:spPr>
-        <p:txBody>
-          <a:bodyPr wrap="square">
-            <a:spAutoFit/>
-          </a:bodyPr>
-          <a:lstStyle/>
-          <a:p>
-            <a:pPr algn="l">
-              <a:defRPr sz="1500" b="0">
-                <a:solidFill>
-                  <a:srgbClr val="9090A0"/>
-                </a:solidFill>
-                <a:latin typeface="Microsoft YaHei"/>
-              </a:defRPr>
-            </a:pPr>
-            <a:r>
-              <a:t>Step 3：工具精通 → 即梦AI、可灵AI、Seedance等</a:t>
-            </a:r>
-          </a:p>
-        </p:txBody>
-      </p:sp>
-      <p:sp>
-        <p:nvSpPr>
-          <p:cNvPr id="13" name="Rectangle 12"/>
+          <p:cNvPr id="6" name="Rectangle 5"/>
           <p:cNvSpPr/>
           <p:nvPr/>
         </p:nvSpPr>
         <p:spPr>
           <a:xfrm>
-            <a:off x="731520" y="3767328"/>
-            <a:ext cx="45720" cy="502920"/>
+            <a:off x="0" y="63500"/>
+            <a:ext cx="73152" cy="960120"/>
           </a:xfrm>
           <a:prstGeom prst="rect">
             <a:avLst/>
           </a:prstGeom>
           <a:solidFill>
-            <a:srgbClr val="00BFFF"/>
+            <a:srgbClr val="00C0FF"/>
           </a:solidFill>
           <a:ln>
             <a:noFill/>
@@ -7120,14 +8739,14 @@
       </p:sp>
       <p:sp>
         <p:nvSpPr>
-          <p:cNvPr id="14" name="TextBox 13"/>
+          <p:cNvPr id="7" name="TextBox 6"/>
           <p:cNvSpPr txBox="1"/>
           <p:nvPr/>
         </p:nvSpPr>
         <p:spPr>
           <a:xfrm>
-            <a:off x="1005840" y="3694176"/>
-            <a:ext cx="365760" cy="640080"/>
+            <a:off x="640080" y="164592"/>
+            <a:ext cx="10058400" cy="594360"/>
           </a:xfrm>
           <a:prstGeom prst="rect">
             <a:avLst/>
@@ -7141,71 +8760,35 @@
           <a:lstStyle/>
           <a:p>
             <a:pPr algn="l">
-              <a:defRPr sz="1300" b="1">
+              <a:defRPr sz="2400" b="1">
                 <a:solidFill>
-                  <a:srgbClr val="00BFFF"/>
+                  <a:srgbClr val="EEEEF4"/>
                 </a:solidFill>
                 <a:latin typeface="Microsoft YaHei"/>
               </a:defRPr>
             </a:pPr>
             <a:r>
-              <a:t>4</a:t>
-            </a:r>
-          </a:p>
-        </p:txBody>
-      </p:sp>
-      <p:sp>
-        <p:nvSpPr>
-          <p:cNvPr id="15" name="TextBox 14"/>
-          <p:cNvSpPr txBox="1"/>
-          <p:nvPr/>
-        </p:nvSpPr>
-        <p:spPr>
-          <a:xfrm>
-            <a:off x="1463040" y="3694176"/>
-            <a:ext cx="10058400" cy="640080"/>
-          </a:xfrm>
-          <a:prstGeom prst="rect">
-            <a:avLst/>
-          </a:prstGeom>
-          <a:noFill/>
-        </p:spPr>
-        <p:txBody>
-          <a:bodyPr wrap="square">
-            <a:spAutoFit/>
-          </a:bodyPr>
-          <a:lstStyle/>
-          <a:p>
-            <a:pPr algn="l">
-              <a:defRPr sz="1500" b="0">
-                <a:solidFill>
-                  <a:srgbClr val="9090A0"/>
-                </a:solidFill>
-                <a:latin typeface="Microsoft YaHei"/>
-              </a:defRPr>
-            </a:pPr>
-            <a:r>
-              <a:t>Step 4：后期制作 → 音频、剪辑、调色、成片</a:t>
-            </a:r>
-          </a:p>
-        </p:txBody>
-      </p:sp>
-      <p:sp>
-        <p:nvSpPr>
-          <p:cNvPr id="16" name="Rectangle 15"/>
+              <a:t>课程学习路线图</a:t>
+            </a:r>
+          </a:p>
+        </p:txBody>
+      </p:sp>
+      <p:sp>
+        <p:nvSpPr>
+          <p:cNvPr id="8" name="Rectangle 7"/>
           <p:cNvSpPr/>
           <p:nvPr/>
         </p:nvSpPr>
         <p:spPr>
           <a:xfrm>
-            <a:off x="731520" y="4572000"/>
-            <a:ext cx="45720" cy="502920"/>
+            <a:off x="0" y="1097280"/>
+            <a:ext cx="12191695" cy="12700"/>
           </a:xfrm>
           <a:prstGeom prst="rect">
             <a:avLst/>
           </a:prstGeom>
           <a:solidFill>
-            <a:srgbClr val="00BFFF"/>
+            <a:srgbClr val="222432"/>
           </a:solidFill>
           <a:ln>
             <a:noFill/>
@@ -7235,92 +8818,20 @@
       </p:sp>
       <p:sp>
         <p:nvSpPr>
-          <p:cNvPr id="17" name="TextBox 16"/>
-          <p:cNvSpPr txBox="1"/>
-          <p:nvPr/>
-        </p:nvSpPr>
-        <p:spPr>
-          <a:xfrm>
-            <a:off x="1005840" y="4498848"/>
-            <a:ext cx="365760" cy="640080"/>
-          </a:xfrm>
-          <a:prstGeom prst="rect">
-            <a:avLst/>
-          </a:prstGeom>
-          <a:noFill/>
-        </p:spPr>
-        <p:txBody>
-          <a:bodyPr wrap="square">
-            <a:spAutoFit/>
-          </a:bodyPr>
-          <a:lstStyle/>
-          <a:p>
-            <a:pPr algn="l">
-              <a:defRPr sz="1300" b="1">
-                <a:solidFill>
-                  <a:srgbClr val="00BFFF"/>
-                </a:solidFill>
-                <a:latin typeface="Microsoft YaHei"/>
-              </a:defRPr>
-            </a:pPr>
-            <a:r>
-              <a:t>5</a:t>
-            </a:r>
-          </a:p>
-        </p:txBody>
-      </p:sp>
-      <p:sp>
-        <p:nvSpPr>
-          <p:cNvPr id="18" name="TextBox 17"/>
-          <p:cNvSpPr txBox="1"/>
-          <p:nvPr/>
-        </p:nvSpPr>
-        <p:spPr>
-          <a:xfrm>
-            <a:off x="1463040" y="4498848"/>
-            <a:ext cx="10058400" cy="640080"/>
-          </a:xfrm>
-          <a:prstGeom prst="rect">
-            <a:avLst/>
-          </a:prstGeom>
-          <a:noFill/>
-        </p:spPr>
-        <p:txBody>
-          <a:bodyPr wrap="square">
-            <a:spAutoFit/>
-          </a:bodyPr>
-          <a:lstStyle/>
-          <a:p>
-            <a:pPr algn="l">
-              <a:defRPr sz="1500" b="0">
-                <a:solidFill>
-                  <a:srgbClr val="9090A0"/>
-                </a:solidFill>
-                <a:latin typeface="Microsoft YaHei"/>
-              </a:defRPr>
-            </a:pPr>
-            <a:r>
-              <a:t>Step 5：商业运营 → 平台分发、变现、合规</a:t>
-            </a:r>
-          </a:p>
-        </p:txBody>
-      </p:sp>
-      <p:sp>
-        <p:nvSpPr>
-          <p:cNvPr id="19" name="Rectangle 18"/>
+          <p:cNvPr id="9" name="Rectangle 8"/>
           <p:cNvSpPr/>
           <p:nvPr/>
         </p:nvSpPr>
         <p:spPr>
           <a:xfrm>
-            <a:off x="731520" y="5376672"/>
-            <a:ext cx="45720" cy="502920"/>
+            <a:off x="731520" y="1444752"/>
+            <a:ext cx="36576" cy="411480"/>
           </a:xfrm>
           <a:prstGeom prst="rect">
             <a:avLst/>
           </a:prstGeom>
           <a:solidFill>
-            <a:srgbClr val="00BFFF"/>
+            <a:srgbClr val="00C0FF"/>
           </a:solidFill>
           <a:ln>
             <a:noFill/>
@@ -7350,14 +8861,14 @@
       </p:sp>
       <p:sp>
         <p:nvSpPr>
-          <p:cNvPr id="20" name="TextBox 19"/>
+          <p:cNvPr id="10" name="TextBox 9"/>
           <p:cNvSpPr txBox="1"/>
           <p:nvPr/>
         </p:nvSpPr>
         <p:spPr>
           <a:xfrm>
-            <a:off x="1005840" y="5303520"/>
-            <a:ext cx="365760" cy="640080"/>
+            <a:off x="914400" y="1371600"/>
+            <a:ext cx="10515600" cy="548640"/>
           </a:xfrm>
           <a:prstGeom prst="rect">
             <a:avLst/>
@@ -7371,29 +8882,29 @@
           <a:lstStyle/>
           <a:p>
             <a:pPr algn="l">
-              <a:defRPr sz="1300" b="1">
+              <a:defRPr sz="1400" b="0">
                 <a:solidFill>
-                  <a:srgbClr val="00BFFF"/>
+                  <a:srgbClr val="989AA8"/>
                 </a:solidFill>
                 <a:latin typeface="Microsoft YaHei"/>
               </a:defRPr>
             </a:pPr>
             <a:r>
-              <a:t>6</a:t>
-            </a:r>
-          </a:p>
-        </p:txBody>
-      </p:sp>
-      <p:sp>
-        <p:nvSpPr>
-          <p:cNvPr id="21" name="TextBox 20"/>
+              <a:t>Step 1：行业认知 → 理解AI漫剧是什么、市场多大</a:t>
+            </a:r>
+          </a:p>
+        </p:txBody>
+      </p:sp>
+      <p:sp>
+        <p:nvSpPr>
+          <p:cNvPr id="11" name="TextBox 10"/>
           <p:cNvSpPr txBox="1"/>
           <p:nvPr/>
         </p:nvSpPr>
         <p:spPr>
           <a:xfrm>
-            <a:off x="1463040" y="5303520"/>
-            <a:ext cx="10058400" cy="640080"/>
+            <a:off x="731520" y="1371600"/>
+            <a:ext cx="274320" cy="457200"/>
           </a:xfrm>
           <a:prstGeom prst="rect">
             <a:avLst/>
@@ -7407,35 +8918,35 @@
           <a:lstStyle/>
           <a:p>
             <a:pPr algn="l">
-              <a:defRPr sz="1500" b="0">
+              <a:defRPr sz="900" b="1">
                 <a:solidFill>
-                  <a:srgbClr val="9090A0"/>
+                  <a:srgbClr val="EEEEF4"/>
                 </a:solidFill>
                 <a:latin typeface="Microsoft YaHei"/>
               </a:defRPr>
             </a:pPr>
             <a:r>
-              <a:t>Step 6：综合实战 → 从0到1独立完成一集AI漫剧</a:t>
-            </a:r>
-          </a:p>
-        </p:txBody>
-      </p:sp>
-      <p:sp>
-        <p:nvSpPr>
-          <p:cNvPr id="22" name="Rectangle 21"/>
+              <a:t>1</a:t>
+            </a:r>
+          </a:p>
+        </p:txBody>
+      </p:sp>
+      <p:sp>
+        <p:nvSpPr>
+          <p:cNvPr id="12" name="Rectangle 11"/>
           <p:cNvSpPr/>
           <p:nvPr/>
         </p:nvSpPr>
         <p:spPr>
           <a:xfrm>
-            <a:off x="0" y="6446520"/>
-            <a:ext cx="12191695" cy="19050"/>
+            <a:off x="731520" y="2221992"/>
+            <a:ext cx="36576" cy="411480"/>
           </a:xfrm>
           <a:prstGeom prst="rect">
             <a:avLst/>
           </a:prstGeom>
           <a:solidFill>
-            <a:srgbClr val="1E1E2A"/>
+            <a:srgbClr val="00C0FF"/>
           </a:solidFill>
           <a:ln>
             <a:noFill/>
@@ -7465,14 +8976,14 @@
       </p:sp>
       <p:sp>
         <p:nvSpPr>
-          <p:cNvPr id="23" name="TextBox 22"/>
+          <p:cNvPr id="13" name="TextBox 12"/>
           <p:cNvSpPr txBox="1"/>
           <p:nvPr/>
         </p:nvSpPr>
         <p:spPr>
           <a:xfrm>
-            <a:off x="731520" y="6492240"/>
-            <a:ext cx="4572000" cy="274320"/>
+            <a:off x="914400" y="2148840"/>
+            <a:ext cx="10515600" cy="548640"/>
           </a:xfrm>
           <a:prstGeom prst="rect">
             <a:avLst/>
@@ -7486,15 +8997,626 @@
           <a:lstStyle/>
           <a:p>
             <a:pPr algn="l">
-              <a:defRPr sz="900" b="0">
+              <a:defRPr sz="1400" b="0">
                 <a:solidFill>
-                  <a:srgbClr val="505060"/>
+                  <a:srgbClr val="989AA8"/>
                 </a:solidFill>
                 <a:latin typeface="Microsoft YaHei"/>
               </a:defRPr>
             </a:pPr>
             <a:r>
+              <a:t>Step 2：创作技能 → 剧本、分镜、提示词工程</a:t>
+            </a:r>
+          </a:p>
+        </p:txBody>
+      </p:sp>
+      <p:sp>
+        <p:nvSpPr>
+          <p:cNvPr id="14" name="TextBox 13"/>
+          <p:cNvSpPr txBox="1"/>
+          <p:nvPr/>
+        </p:nvSpPr>
+        <p:spPr>
+          <a:xfrm>
+            <a:off x="731520" y="2148840"/>
+            <a:ext cx="274320" cy="457200"/>
+          </a:xfrm>
+          <a:prstGeom prst="rect">
+            <a:avLst/>
+          </a:prstGeom>
+          <a:noFill/>
+        </p:spPr>
+        <p:txBody>
+          <a:bodyPr wrap="square">
+            <a:spAutoFit/>
+          </a:bodyPr>
+          <a:lstStyle/>
+          <a:p>
+            <a:pPr algn="l">
+              <a:defRPr sz="900" b="1">
+                <a:solidFill>
+                  <a:srgbClr val="EEEEF4"/>
+                </a:solidFill>
+                <a:latin typeface="Microsoft YaHei"/>
+              </a:defRPr>
+            </a:pPr>
+            <a:r>
+              <a:t>2</a:t>
+            </a:r>
+          </a:p>
+        </p:txBody>
+      </p:sp>
+      <p:sp>
+        <p:nvSpPr>
+          <p:cNvPr id="15" name="Rectangle 14"/>
+          <p:cNvSpPr/>
+          <p:nvPr/>
+        </p:nvSpPr>
+        <p:spPr>
+          <a:xfrm>
+            <a:off x="731520" y="2999232"/>
+            <a:ext cx="36576" cy="411480"/>
+          </a:xfrm>
+          <a:prstGeom prst="rect">
+            <a:avLst/>
+          </a:prstGeom>
+          <a:solidFill>
+            <a:srgbClr val="00C0FF"/>
+          </a:solidFill>
+          <a:ln>
+            <a:noFill/>
+          </a:ln>
+        </p:spPr>
+        <p:style>
+          <a:lnRef idx="1">
+            <a:schemeClr val="accent1"/>
+          </a:lnRef>
+          <a:fillRef idx="3">
+            <a:schemeClr val="accent1"/>
+          </a:fillRef>
+          <a:effectRef idx="2">
+            <a:schemeClr val="accent1"/>
+          </a:effectRef>
+          <a:fontRef idx="minor">
+            <a:schemeClr val="lt1"/>
+          </a:fontRef>
+        </p:style>
+        <p:txBody>
+          <a:bodyPr rtlCol="0" anchor="ctr"/>
+          <a:lstStyle/>
+          <a:p>
+            <a:pPr algn="ctr"/>
+          </a:p>
+        </p:txBody>
+      </p:sp>
+      <p:sp>
+        <p:nvSpPr>
+          <p:cNvPr id="16" name="TextBox 15"/>
+          <p:cNvSpPr txBox="1"/>
+          <p:nvPr/>
+        </p:nvSpPr>
+        <p:spPr>
+          <a:xfrm>
+            <a:off x="914400" y="2926080"/>
+            <a:ext cx="10515600" cy="548640"/>
+          </a:xfrm>
+          <a:prstGeom prst="rect">
+            <a:avLst/>
+          </a:prstGeom>
+          <a:noFill/>
+        </p:spPr>
+        <p:txBody>
+          <a:bodyPr wrap="square">
+            <a:spAutoFit/>
+          </a:bodyPr>
+          <a:lstStyle/>
+          <a:p>
+            <a:pPr algn="l">
+              <a:defRPr sz="1400" b="0">
+                <a:solidFill>
+                  <a:srgbClr val="989AA8"/>
+                </a:solidFill>
+                <a:latin typeface="Microsoft YaHei"/>
+              </a:defRPr>
+            </a:pPr>
+            <a:r>
+              <a:t>Step 3：工具精通 → 即梦AI、可灵AI、Seedance等</a:t>
+            </a:r>
+          </a:p>
+        </p:txBody>
+      </p:sp>
+      <p:sp>
+        <p:nvSpPr>
+          <p:cNvPr id="17" name="TextBox 16"/>
+          <p:cNvSpPr txBox="1"/>
+          <p:nvPr/>
+        </p:nvSpPr>
+        <p:spPr>
+          <a:xfrm>
+            <a:off x="731520" y="2926080"/>
+            <a:ext cx="274320" cy="457200"/>
+          </a:xfrm>
+          <a:prstGeom prst="rect">
+            <a:avLst/>
+          </a:prstGeom>
+          <a:noFill/>
+        </p:spPr>
+        <p:txBody>
+          <a:bodyPr wrap="square">
+            <a:spAutoFit/>
+          </a:bodyPr>
+          <a:lstStyle/>
+          <a:p>
+            <a:pPr algn="l">
+              <a:defRPr sz="900" b="1">
+                <a:solidFill>
+                  <a:srgbClr val="EEEEF4"/>
+                </a:solidFill>
+                <a:latin typeface="Microsoft YaHei"/>
+              </a:defRPr>
+            </a:pPr>
+            <a:r>
+              <a:t>3</a:t>
+            </a:r>
+          </a:p>
+        </p:txBody>
+      </p:sp>
+      <p:sp>
+        <p:nvSpPr>
+          <p:cNvPr id="18" name="Rectangle 17"/>
+          <p:cNvSpPr/>
+          <p:nvPr/>
+        </p:nvSpPr>
+        <p:spPr>
+          <a:xfrm>
+            <a:off x="731520" y="3776472"/>
+            <a:ext cx="36576" cy="411480"/>
+          </a:xfrm>
+          <a:prstGeom prst="rect">
+            <a:avLst/>
+          </a:prstGeom>
+          <a:solidFill>
+            <a:srgbClr val="00C0FF"/>
+          </a:solidFill>
+          <a:ln>
+            <a:noFill/>
+          </a:ln>
+        </p:spPr>
+        <p:style>
+          <a:lnRef idx="1">
+            <a:schemeClr val="accent1"/>
+          </a:lnRef>
+          <a:fillRef idx="3">
+            <a:schemeClr val="accent1"/>
+          </a:fillRef>
+          <a:effectRef idx="2">
+            <a:schemeClr val="accent1"/>
+          </a:effectRef>
+          <a:fontRef idx="minor">
+            <a:schemeClr val="lt1"/>
+          </a:fontRef>
+        </p:style>
+        <p:txBody>
+          <a:bodyPr rtlCol="0" anchor="ctr"/>
+          <a:lstStyle/>
+          <a:p>
+            <a:pPr algn="ctr"/>
+          </a:p>
+        </p:txBody>
+      </p:sp>
+      <p:sp>
+        <p:nvSpPr>
+          <p:cNvPr id="19" name="TextBox 18"/>
+          <p:cNvSpPr txBox="1"/>
+          <p:nvPr/>
+        </p:nvSpPr>
+        <p:spPr>
+          <a:xfrm>
+            <a:off x="914400" y="3703320"/>
+            <a:ext cx="10515600" cy="548640"/>
+          </a:xfrm>
+          <a:prstGeom prst="rect">
+            <a:avLst/>
+          </a:prstGeom>
+          <a:noFill/>
+        </p:spPr>
+        <p:txBody>
+          <a:bodyPr wrap="square">
+            <a:spAutoFit/>
+          </a:bodyPr>
+          <a:lstStyle/>
+          <a:p>
+            <a:pPr algn="l">
+              <a:defRPr sz="1400" b="0">
+                <a:solidFill>
+                  <a:srgbClr val="989AA8"/>
+                </a:solidFill>
+                <a:latin typeface="Microsoft YaHei"/>
+              </a:defRPr>
+            </a:pPr>
+            <a:r>
+              <a:t>Step 4：后期制作 → 音频、剪辑、调色、成片</a:t>
+            </a:r>
+          </a:p>
+        </p:txBody>
+      </p:sp>
+      <p:sp>
+        <p:nvSpPr>
+          <p:cNvPr id="20" name="TextBox 19"/>
+          <p:cNvSpPr txBox="1"/>
+          <p:nvPr/>
+        </p:nvSpPr>
+        <p:spPr>
+          <a:xfrm>
+            <a:off x="731520" y="3703320"/>
+            <a:ext cx="274320" cy="457200"/>
+          </a:xfrm>
+          <a:prstGeom prst="rect">
+            <a:avLst/>
+          </a:prstGeom>
+          <a:noFill/>
+        </p:spPr>
+        <p:txBody>
+          <a:bodyPr wrap="square">
+            <a:spAutoFit/>
+          </a:bodyPr>
+          <a:lstStyle/>
+          <a:p>
+            <a:pPr algn="l">
+              <a:defRPr sz="900" b="1">
+                <a:solidFill>
+                  <a:srgbClr val="EEEEF4"/>
+                </a:solidFill>
+                <a:latin typeface="Microsoft YaHei"/>
+              </a:defRPr>
+            </a:pPr>
+            <a:r>
+              <a:t>4</a:t>
+            </a:r>
+          </a:p>
+        </p:txBody>
+      </p:sp>
+      <p:sp>
+        <p:nvSpPr>
+          <p:cNvPr id="21" name="Rectangle 20"/>
+          <p:cNvSpPr/>
+          <p:nvPr/>
+        </p:nvSpPr>
+        <p:spPr>
+          <a:xfrm>
+            <a:off x="731520" y="4553712"/>
+            <a:ext cx="36576" cy="411480"/>
+          </a:xfrm>
+          <a:prstGeom prst="rect">
+            <a:avLst/>
+          </a:prstGeom>
+          <a:solidFill>
+            <a:srgbClr val="00C0FF"/>
+          </a:solidFill>
+          <a:ln>
+            <a:noFill/>
+          </a:ln>
+        </p:spPr>
+        <p:style>
+          <a:lnRef idx="1">
+            <a:schemeClr val="accent1"/>
+          </a:lnRef>
+          <a:fillRef idx="3">
+            <a:schemeClr val="accent1"/>
+          </a:fillRef>
+          <a:effectRef idx="2">
+            <a:schemeClr val="accent1"/>
+          </a:effectRef>
+          <a:fontRef idx="minor">
+            <a:schemeClr val="lt1"/>
+          </a:fontRef>
+        </p:style>
+        <p:txBody>
+          <a:bodyPr rtlCol="0" anchor="ctr"/>
+          <a:lstStyle/>
+          <a:p>
+            <a:pPr algn="ctr"/>
+          </a:p>
+        </p:txBody>
+      </p:sp>
+      <p:sp>
+        <p:nvSpPr>
+          <p:cNvPr id="22" name="TextBox 21"/>
+          <p:cNvSpPr txBox="1"/>
+          <p:nvPr/>
+        </p:nvSpPr>
+        <p:spPr>
+          <a:xfrm>
+            <a:off x="914400" y="4480560"/>
+            <a:ext cx="10515600" cy="548640"/>
+          </a:xfrm>
+          <a:prstGeom prst="rect">
+            <a:avLst/>
+          </a:prstGeom>
+          <a:noFill/>
+        </p:spPr>
+        <p:txBody>
+          <a:bodyPr wrap="square">
+            <a:spAutoFit/>
+          </a:bodyPr>
+          <a:lstStyle/>
+          <a:p>
+            <a:pPr algn="l">
+              <a:defRPr sz="1400" b="0">
+                <a:solidFill>
+                  <a:srgbClr val="989AA8"/>
+                </a:solidFill>
+                <a:latin typeface="Microsoft YaHei"/>
+              </a:defRPr>
+            </a:pPr>
+            <a:r>
+              <a:t>Step 5：商业运营 → 平台分发、变现、合规</a:t>
+            </a:r>
+          </a:p>
+        </p:txBody>
+      </p:sp>
+      <p:sp>
+        <p:nvSpPr>
+          <p:cNvPr id="23" name="TextBox 22"/>
+          <p:cNvSpPr txBox="1"/>
+          <p:nvPr/>
+        </p:nvSpPr>
+        <p:spPr>
+          <a:xfrm>
+            <a:off x="731520" y="4480560"/>
+            <a:ext cx="274320" cy="457200"/>
+          </a:xfrm>
+          <a:prstGeom prst="rect">
+            <a:avLst/>
+          </a:prstGeom>
+          <a:noFill/>
+        </p:spPr>
+        <p:txBody>
+          <a:bodyPr wrap="square">
+            <a:spAutoFit/>
+          </a:bodyPr>
+          <a:lstStyle/>
+          <a:p>
+            <a:pPr algn="l">
+              <a:defRPr sz="900" b="1">
+                <a:solidFill>
+                  <a:srgbClr val="EEEEF4"/>
+                </a:solidFill>
+                <a:latin typeface="Microsoft YaHei"/>
+              </a:defRPr>
+            </a:pPr>
+            <a:r>
+              <a:t>5</a:t>
+            </a:r>
+          </a:p>
+        </p:txBody>
+      </p:sp>
+      <p:sp>
+        <p:nvSpPr>
+          <p:cNvPr id="24" name="Rectangle 23"/>
+          <p:cNvSpPr/>
+          <p:nvPr/>
+        </p:nvSpPr>
+        <p:spPr>
+          <a:xfrm>
+            <a:off x="731520" y="5330952"/>
+            <a:ext cx="36576" cy="411480"/>
+          </a:xfrm>
+          <a:prstGeom prst="rect">
+            <a:avLst/>
+          </a:prstGeom>
+          <a:solidFill>
+            <a:srgbClr val="00C0FF"/>
+          </a:solidFill>
+          <a:ln>
+            <a:noFill/>
+          </a:ln>
+        </p:spPr>
+        <p:style>
+          <a:lnRef idx="1">
+            <a:schemeClr val="accent1"/>
+          </a:lnRef>
+          <a:fillRef idx="3">
+            <a:schemeClr val="accent1"/>
+          </a:fillRef>
+          <a:effectRef idx="2">
+            <a:schemeClr val="accent1"/>
+          </a:effectRef>
+          <a:fontRef idx="minor">
+            <a:schemeClr val="lt1"/>
+          </a:fontRef>
+        </p:style>
+        <p:txBody>
+          <a:bodyPr rtlCol="0" anchor="ctr"/>
+          <a:lstStyle/>
+          <a:p>
+            <a:pPr algn="ctr"/>
+          </a:p>
+        </p:txBody>
+      </p:sp>
+      <p:sp>
+        <p:nvSpPr>
+          <p:cNvPr id="25" name="TextBox 24"/>
+          <p:cNvSpPr txBox="1"/>
+          <p:nvPr/>
+        </p:nvSpPr>
+        <p:spPr>
+          <a:xfrm>
+            <a:off x="914400" y="5257800"/>
+            <a:ext cx="10515600" cy="548640"/>
+          </a:xfrm>
+          <a:prstGeom prst="rect">
+            <a:avLst/>
+          </a:prstGeom>
+          <a:noFill/>
+        </p:spPr>
+        <p:txBody>
+          <a:bodyPr wrap="square">
+            <a:spAutoFit/>
+          </a:bodyPr>
+          <a:lstStyle/>
+          <a:p>
+            <a:pPr algn="l">
+              <a:defRPr sz="1400" b="0">
+                <a:solidFill>
+                  <a:srgbClr val="989AA8"/>
+                </a:solidFill>
+                <a:latin typeface="Microsoft YaHei"/>
+              </a:defRPr>
+            </a:pPr>
+            <a:r>
+              <a:t>Step 6：综合实战 → 从0到1独立完成一集AI漫剧</a:t>
+            </a:r>
+          </a:p>
+        </p:txBody>
+      </p:sp>
+      <p:sp>
+        <p:nvSpPr>
+          <p:cNvPr id="26" name="TextBox 25"/>
+          <p:cNvSpPr txBox="1"/>
+          <p:nvPr/>
+        </p:nvSpPr>
+        <p:spPr>
+          <a:xfrm>
+            <a:off x="731520" y="5257800"/>
+            <a:ext cx="274320" cy="457200"/>
+          </a:xfrm>
+          <a:prstGeom prst="rect">
+            <a:avLst/>
+          </a:prstGeom>
+          <a:noFill/>
+        </p:spPr>
+        <p:txBody>
+          <a:bodyPr wrap="square">
+            <a:spAutoFit/>
+          </a:bodyPr>
+          <a:lstStyle/>
+          <a:p>
+            <a:pPr algn="l">
+              <a:defRPr sz="900" b="1">
+                <a:solidFill>
+                  <a:srgbClr val="EEEEF4"/>
+                </a:solidFill>
+                <a:latin typeface="Microsoft YaHei"/>
+              </a:defRPr>
+            </a:pPr>
+            <a:r>
+              <a:t>6</a:t>
+            </a:r>
+          </a:p>
+        </p:txBody>
+      </p:sp>
+      <p:sp>
+        <p:nvSpPr>
+          <p:cNvPr id="27" name="Rectangle 26"/>
+          <p:cNvSpPr/>
+          <p:nvPr/>
+        </p:nvSpPr>
+        <p:spPr>
+          <a:xfrm>
+            <a:off x="0" y="6446520"/>
+            <a:ext cx="12191695" cy="12700"/>
+          </a:xfrm>
+          <a:prstGeom prst="rect">
+            <a:avLst/>
+          </a:prstGeom>
+          <a:solidFill>
+            <a:srgbClr val="222432"/>
+          </a:solidFill>
+          <a:ln>
+            <a:noFill/>
+          </a:ln>
+        </p:spPr>
+        <p:style>
+          <a:lnRef idx="1">
+            <a:schemeClr val="accent1"/>
+          </a:lnRef>
+          <a:fillRef idx="3">
+            <a:schemeClr val="accent1"/>
+          </a:fillRef>
+          <a:effectRef idx="2">
+            <a:schemeClr val="accent1"/>
+          </a:effectRef>
+          <a:fontRef idx="minor">
+            <a:schemeClr val="lt1"/>
+          </a:fontRef>
+        </p:style>
+        <p:txBody>
+          <a:bodyPr rtlCol="0" anchor="ctr"/>
+          <a:lstStyle/>
+          <a:p>
+            <a:pPr algn="ctr"/>
+          </a:p>
+        </p:txBody>
+      </p:sp>
+      <p:sp>
+        <p:nvSpPr>
+          <p:cNvPr id="28" name="TextBox 27"/>
+          <p:cNvSpPr txBox="1"/>
+          <p:nvPr/>
+        </p:nvSpPr>
+        <p:spPr>
+          <a:xfrm>
+            <a:off x="731520" y="6492240"/>
+            <a:ext cx="4572000" cy="274320"/>
+          </a:xfrm>
+          <a:prstGeom prst="rect">
+            <a:avLst/>
+          </a:prstGeom>
+          <a:noFill/>
+        </p:spPr>
+        <p:txBody>
+          <a:bodyPr wrap="square">
+            <a:spAutoFit/>
+          </a:bodyPr>
+          <a:lstStyle/>
+          <a:p>
+            <a:pPr algn="l">
+              <a:defRPr sz="900" b="0">
+                <a:solidFill>
+                  <a:srgbClr val="555768"/>
+                </a:solidFill>
+                <a:latin typeface="Microsoft YaHei"/>
+              </a:defRPr>
+            </a:pPr>
+            <a:r>
               <a:t>模块00 · 课程导论</a:t>
+            </a:r>
+          </a:p>
+        </p:txBody>
+      </p:sp>
+      <p:sp>
+        <p:nvSpPr>
+          <p:cNvPr id="29" name="TextBox 28"/>
+          <p:cNvSpPr txBox="1"/>
+          <p:nvPr/>
+        </p:nvSpPr>
+        <p:spPr>
+          <a:xfrm>
+            <a:off x="10789920" y="6492240"/>
+            <a:ext cx="1097280" cy="274320"/>
+          </a:xfrm>
+          <a:prstGeom prst="rect">
+            <a:avLst/>
+          </a:prstGeom>
+          <a:noFill/>
+        </p:spPr>
+        <p:txBody>
+          <a:bodyPr wrap="square">
+            <a:spAutoFit/>
+          </a:bodyPr>
+          <a:lstStyle/>
+          <a:p>
+            <a:pPr algn="r">
+              <a:defRPr sz="900" b="0">
+                <a:solidFill>
+                  <a:srgbClr val="555768"/>
+                </a:solidFill>
+                <a:latin typeface="Microsoft YaHei"/>
+              </a:defRPr>
+            </a:pPr>
+            <a:r>
+              <a:t>5</a:t>
             </a:r>
           </a:p>
         </p:txBody>
@@ -7513,7 +9635,7 @@
     <p:bg>
       <p:bgPr>
         <a:solidFill>
-          <a:srgbClr val="08080C"/>
+          <a:srgbClr val="09090F"/>
         </a:solidFill>
         <a:effectLst/>
       </p:bgPr>
@@ -7527,56 +9649,20 @@
       <p:grpSpPr/>
       <p:sp>
         <p:nvSpPr>
-          <p:cNvPr id="2" name="TextBox 1"/>
-          <p:cNvSpPr txBox="1"/>
-          <p:nvPr/>
-        </p:nvSpPr>
-        <p:spPr>
-          <a:xfrm>
-            <a:off x="1371600" y="1371600"/>
-            <a:ext cx="9418320" cy="2286000"/>
-          </a:xfrm>
-          <a:prstGeom prst="rect">
-            <a:avLst/>
-          </a:prstGeom>
-          <a:noFill/>
-        </p:spPr>
-        <p:txBody>
-          <a:bodyPr wrap="square">
-            <a:spAutoFit/>
-          </a:bodyPr>
-          <a:lstStyle/>
-          <a:p>
-            <a:pPr algn="ctr">
-              <a:defRPr sz="3200" b="1">
-                <a:solidFill>
-                  <a:srgbClr val="F0F0F5"/>
-                </a:solidFill>
-                <a:latin typeface="Microsoft YaHei"/>
-              </a:defRPr>
-            </a:pPr>
-            <a:r>
-              <a:t>AI漫剧的核心竞争力 = 创意 × 工具熟练度 × 量产能力</a:t>
-            </a:r>
-          </a:p>
-        </p:txBody>
-      </p:sp>
-      <p:sp>
-        <p:nvSpPr>
-          <p:cNvPr id="3" name="Rectangle 2"/>
+          <p:cNvPr id="2" name="Rectangle 1"/>
           <p:cNvSpPr/>
           <p:nvPr/>
         </p:nvSpPr>
         <p:spPr>
           <a:xfrm>
-            <a:off x="5029200" y="3840480"/>
-            <a:ext cx="2103120" cy="19050"/>
+            <a:off x="3657600" y="1097280"/>
+            <a:ext cx="969265" cy="38100"/>
           </a:xfrm>
           <a:prstGeom prst="rect">
             <a:avLst/>
           </a:prstGeom>
           <a:solidFill>
-            <a:srgbClr val="00BFFF"/>
+            <a:srgbClr val="00C0FF"/>
           </a:solidFill>
           <a:ln>
             <a:noFill/>
@@ -7606,56 +9692,20 @@
       </p:sp>
       <p:sp>
         <p:nvSpPr>
-          <p:cNvPr id="4" name="TextBox 3"/>
-          <p:cNvSpPr txBox="1"/>
-          <p:nvPr/>
-        </p:nvSpPr>
-        <p:spPr>
-          <a:xfrm>
-            <a:off x="1371600" y="4206240"/>
-            <a:ext cx="9418320" cy="1645920"/>
-          </a:xfrm>
-          <a:prstGeom prst="rect">
-            <a:avLst/>
-          </a:prstGeom>
-          <a:noFill/>
-        </p:spPr>
-        <p:txBody>
-          <a:bodyPr wrap="square">
-            <a:spAutoFit/>
-          </a:bodyPr>
-          <a:lstStyle/>
-          <a:p>
-            <a:pPr algn="ctr">
-              <a:defRPr sz="1500" b="0">
-                <a:solidFill>
-                  <a:srgbClr val="9090A0"/>
-                </a:solidFill>
-                <a:latin typeface="Microsoft YaHei"/>
-              </a:defRPr>
-            </a:pPr>
-            <a:r>
-              <a:t>工具会更新迭代，但创意能力和工业化思维是持久的竞争力。本课程不仅教工具操作，更注重培养你的创作思维和生产效率。</a:t>
-            </a:r>
-          </a:p>
-        </p:txBody>
-      </p:sp>
-      <p:sp>
-        <p:nvSpPr>
-          <p:cNvPr id="5" name="Rectangle 4"/>
+          <p:cNvPr id="3" name="Rectangle 2"/>
           <p:cNvSpPr/>
           <p:nvPr/>
         </p:nvSpPr>
         <p:spPr>
           <a:xfrm>
-            <a:off x="0" y="6446520"/>
-            <a:ext cx="12191695" cy="19050"/>
+            <a:off x="4626864" y="1097280"/>
+            <a:ext cx="969264" cy="38100"/>
           </a:xfrm>
           <a:prstGeom prst="rect">
             <a:avLst/>
           </a:prstGeom>
           <a:solidFill>
-            <a:srgbClr val="1E1E2A"/>
+            <a:srgbClr val="00A3D8"/>
           </a:solidFill>
           <a:ln>
             <a:noFill/>
@@ -7685,14 +9735,143 @@
       </p:sp>
       <p:sp>
         <p:nvSpPr>
-          <p:cNvPr id="6" name="TextBox 5"/>
+          <p:cNvPr id="4" name="Rectangle 3"/>
+          <p:cNvSpPr/>
+          <p:nvPr/>
+        </p:nvSpPr>
+        <p:spPr>
+          <a:xfrm>
+            <a:off x="5596128" y="1097280"/>
+            <a:ext cx="969264" cy="38100"/>
+          </a:xfrm>
+          <a:prstGeom prst="rect">
+            <a:avLst/>
+          </a:prstGeom>
+          <a:solidFill>
+            <a:srgbClr val="0086B2"/>
+          </a:solidFill>
+          <a:ln>
+            <a:noFill/>
+          </a:ln>
+        </p:spPr>
+        <p:style>
+          <a:lnRef idx="1">
+            <a:schemeClr val="accent1"/>
+          </a:lnRef>
+          <a:fillRef idx="3">
+            <a:schemeClr val="accent1"/>
+          </a:fillRef>
+          <a:effectRef idx="2">
+            <a:schemeClr val="accent1"/>
+          </a:effectRef>
+          <a:fontRef idx="minor">
+            <a:schemeClr val="lt1"/>
+          </a:fontRef>
+        </p:style>
+        <p:txBody>
+          <a:bodyPr rtlCol="0" anchor="ctr"/>
+          <a:lstStyle/>
+          <a:p>
+            <a:pPr algn="ctr"/>
+          </a:p>
+        </p:txBody>
+      </p:sp>
+      <p:sp>
+        <p:nvSpPr>
+          <p:cNvPr id="5" name="Rectangle 4"/>
+          <p:cNvSpPr/>
+          <p:nvPr/>
+        </p:nvSpPr>
+        <p:spPr>
+          <a:xfrm>
+            <a:off x="6565392" y="1097280"/>
+            <a:ext cx="969264" cy="38100"/>
+          </a:xfrm>
+          <a:prstGeom prst="rect">
+            <a:avLst/>
+          </a:prstGeom>
+          <a:solidFill>
+            <a:srgbClr val="00698C"/>
+          </a:solidFill>
+          <a:ln>
+            <a:noFill/>
+          </a:ln>
+        </p:spPr>
+        <p:style>
+          <a:lnRef idx="1">
+            <a:schemeClr val="accent1"/>
+          </a:lnRef>
+          <a:fillRef idx="3">
+            <a:schemeClr val="accent1"/>
+          </a:fillRef>
+          <a:effectRef idx="2">
+            <a:schemeClr val="accent1"/>
+          </a:effectRef>
+          <a:fontRef idx="minor">
+            <a:schemeClr val="lt1"/>
+          </a:fontRef>
+        </p:style>
+        <p:txBody>
+          <a:bodyPr rtlCol="0" anchor="ctr"/>
+          <a:lstStyle/>
+          <a:p>
+            <a:pPr algn="ctr"/>
+          </a:p>
+        </p:txBody>
+      </p:sp>
+      <p:sp>
+        <p:nvSpPr>
+          <p:cNvPr id="6" name="Rectangle 5"/>
+          <p:cNvSpPr/>
+          <p:nvPr/>
+        </p:nvSpPr>
+        <p:spPr>
+          <a:xfrm>
+            <a:off x="7534656" y="1097280"/>
+            <a:ext cx="969264" cy="38100"/>
+          </a:xfrm>
+          <a:prstGeom prst="rect">
+            <a:avLst/>
+          </a:prstGeom>
+          <a:solidFill>
+            <a:srgbClr val="004C66"/>
+          </a:solidFill>
+          <a:ln>
+            <a:noFill/>
+          </a:ln>
+        </p:spPr>
+        <p:style>
+          <a:lnRef idx="1">
+            <a:schemeClr val="accent1"/>
+          </a:lnRef>
+          <a:fillRef idx="3">
+            <a:schemeClr val="accent1"/>
+          </a:fillRef>
+          <a:effectRef idx="2">
+            <a:schemeClr val="accent1"/>
+          </a:effectRef>
+          <a:fontRef idx="minor">
+            <a:schemeClr val="lt1"/>
+          </a:fontRef>
+        </p:style>
+        <p:txBody>
+          <a:bodyPr rtlCol="0" anchor="ctr"/>
+          <a:lstStyle/>
+          <a:p>
+            <a:pPr algn="ctr"/>
+          </a:p>
+        </p:txBody>
+      </p:sp>
+      <p:sp>
+        <p:nvSpPr>
+          <p:cNvPr id="7" name="TextBox 6"/>
           <p:cNvSpPr txBox="1"/>
           <p:nvPr/>
         </p:nvSpPr>
         <p:spPr>
           <a:xfrm>
-            <a:off x="731520" y="6492240"/>
-            <a:ext cx="4572000" cy="274320"/>
+            <a:off x="1371600" y="1645920"/>
+            <a:ext cx="9418320" cy="2286000"/>
           </a:xfrm>
           <a:prstGeom prst="rect">
             <a:avLst/>
@@ -7705,16 +9884,210 @@
           </a:bodyPr>
           <a:lstStyle/>
           <a:p>
-            <a:pPr algn="l">
-              <a:defRPr sz="900" b="0">
+            <a:pPr algn="ctr">
+              <a:defRPr sz="3000" b="1">
                 <a:solidFill>
-                  <a:srgbClr val="505060"/>
+                  <a:srgbClr val="EEEEF4"/>
                 </a:solidFill>
                 <a:latin typeface="Microsoft YaHei"/>
               </a:defRPr>
             </a:pPr>
             <a:r>
+              <a:t>AI漫剧的核心竞争力 = 创意 × 工具熟练度 × 量产能力</a:t>
+            </a:r>
+          </a:p>
+        </p:txBody>
+      </p:sp>
+      <p:sp>
+        <p:nvSpPr>
+          <p:cNvPr id="8" name="Rectangle 7"/>
+          <p:cNvSpPr/>
+          <p:nvPr/>
+        </p:nvSpPr>
+        <p:spPr>
+          <a:xfrm>
+            <a:off x="5029200" y="3931920"/>
+            <a:ext cx="2103120" cy="25400"/>
+          </a:xfrm>
+          <a:prstGeom prst="rect">
+            <a:avLst/>
+          </a:prstGeom>
+          <a:solidFill>
+            <a:srgbClr val="00C0FF"/>
+          </a:solidFill>
+          <a:ln>
+            <a:noFill/>
+          </a:ln>
+        </p:spPr>
+        <p:style>
+          <a:lnRef idx="1">
+            <a:schemeClr val="accent1"/>
+          </a:lnRef>
+          <a:fillRef idx="3">
+            <a:schemeClr val="accent1"/>
+          </a:fillRef>
+          <a:effectRef idx="2">
+            <a:schemeClr val="accent1"/>
+          </a:effectRef>
+          <a:fontRef idx="minor">
+            <a:schemeClr val="lt1"/>
+          </a:fontRef>
+        </p:style>
+        <p:txBody>
+          <a:bodyPr rtlCol="0" anchor="ctr"/>
+          <a:lstStyle/>
+          <a:p>
+            <a:pPr algn="ctr"/>
+          </a:p>
+        </p:txBody>
+      </p:sp>
+      <p:sp>
+        <p:nvSpPr>
+          <p:cNvPr id="9" name="TextBox 8"/>
+          <p:cNvSpPr txBox="1"/>
+          <p:nvPr/>
+        </p:nvSpPr>
+        <p:spPr>
+          <a:xfrm>
+            <a:off x="1371600" y="4297680"/>
+            <a:ext cx="9418320" cy="1645920"/>
+          </a:xfrm>
+          <a:prstGeom prst="rect">
+            <a:avLst/>
+          </a:prstGeom>
+          <a:noFill/>
+        </p:spPr>
+        <p:txBody>
+          <a:bodyPr wrap="square">
+            <a:spAutoFit/>
+          </a:bodyPr>
+          <a:lstStyle/>
+          <a:p>
+            <a:pPr algn="ctr">
+              <a:defRPr sz="1500" b="0">
+                <a:solidFill>
+                  <a:srgbClr val="989AA8"/>
+                </a:solidFill>
+                <a:latin typeface="Microsoft YaHei"/>
+              </a:defRPr>
+            </a:pPr>
+            <a:r>
+              <a:t>工具会更新迭代，但创意能力和工业化思维是持久的竞争力。本课程不仅教工具操作，更注重培养你的创作思维和生产效率。</a:t>
+            </a:r>
+          </a:p>
+        </p:txBody>
+      </p:sp>
+      <p:sp>
+        <p:nvSpPr>
+          <p:cNvPr id="10" name="Rectangle 9"/>
+          <p:cNvSpPr/>
+          <p:nvPr/>
+        </p:nvSpPr>
+        <p:spPr>
+          <a:xfrm>
+            <a:off x="0" y="6446520"/>
+            <a:ext cx="12191695" cy="12700"/>
+          </a:xfrm>
+          <a:prstGeom prst="rect">
+            <a:avLst/>
+          </a:prstGeom>
+          <a:solidFill>
+            <a:srgbClr val="222432"/>
+          </a:solidFill>
+          <a:ln>
+            <a:noFill/>
+          </a:ln>
+        </p:spPr>
+        <p:style>
+          <a:lnRef idx="1">
+            <a:schemeClr val="accent1"/>
+          </a:lnRef>
+          <a:fillRef idx="3">
+            <a:schemeClr val="accent1"/>
+          </a:fillRef>
+          <a:effectRef idx="2">
+            <a:schemeClr val="accent1"/>
+          </a:effectRef>
+          <a:fontRef idx="minor">
+            <a:schemeClr val="lt1"/>
+          </a:fontRef>
+        </p:style>
+        <p:txBody>
+          <a:bodyPr rtlCol="0" anchor="ctr"/>
+          <a:lstStyle/>
+          <a:p>
+            <a:pPr algn="ctr"/>
+          </a:p>
+        </p:txBody>
+      </p:sp>
+      <p:sp>
+        <p:nvSpPr>
+          <p:cNvPr id="11" name="TextBox 10"/>
+          <p:cNvSpPr txBox="1"/>
+          <p:nvPr/>
+        </p:nvSpPr>
+        <p:spPr>
+          <a:xfrm>
+            <a:off x="731520" y="6492240"/>
+            <a:ext cx="4572000" cy="274320"/>
+          </a:xfrm>
+          <a:prstGeom prst="rect">
+            <a:avLst/>
+          </a:prstGeom>
+          <a:noFill/>
+        </p:spPr>
+        <p:txBody>
+          <a:bodyPr wrap="square">
+            <a:spAutoFit/>
+          </a:bodyPr>
+          <a:lstStyle/>
+          <a:p>
+            <a:pPr algn="l">
+              <a:defRPr sz="900" b="0">
+                <a:solidFill>
+                  <a:srgbClr val="555768"/>
+                </a:solidFill>
+                <a:latin typeface="Microsoft YaHei"/>
+              </a:defRPr>
+            </a:pPr>
+            <a:r>
               <a:t>模块00 · 课程导论</a:t>
+            </a:r>
+          </a:p>
+        </p:txBody>
+      </p:sp>
+      <p:sp>
+        <p:nvSpPr>
+          <p:cNvPr id="12" name="TextBox 11"/>
+          <p:cNvSpPr txBox="1"/>
+          <p:nvPr/>
+        </p:nvSpPr>
+        <p:spPr>
+          <a:xfrm>
+            <a:off x="10789920" y="6492240"/>
+            <a:ext cx="1097280" cy="274320"/>
+          </a:xfrm>
+          <a:prstGeom prst="rect">
+            <a:avLst/>
+          </a:prstGeom>
+          <a:noFill/>
+        </p:spPr>
+        <p:txBody>
+          <a:bodyPr wrap="square">
+            <a:spAutoFit/>
+          </a:bodyPr>
+          <a:lstStyle/>
+          <a:p>
+            <a:pPr algn="r">
+              <a:defRPr sz="900" b="0">
+                <a:solidFill>
+                  <a:srgbClr val="555768"/>
+                </a:solidFill>
+                <a:latin typeface="Microsoft YaHei"/>
+              </a:defRPr>
+            </a:pPr>
+            <a:r>
+              <a:t>6</a:t>
             </a:r>
           </a:p>
         </p:txBody>
@@ -7733,7 +10106,7 @@
     <p:bg>
       <p:bgPr>
         <a:solidFill>
-          <a:srgbClr val="08080C"/>
+          <a:srgbClr val="09090F"/>
         </a:solidFill>
         <a:effectLst/>
       </p:bgPr>
@@ -7747,92 +10120,20 @@
       <p:grpSpPr/>
       <p:sp>
         <p:nvSpPr>
-          <p:cNvPr id="2" name="TextBox 1"/>
-          <p:cNvSpPr txBox="1"/>
-          <p:nvPr/>
-        </p:nvSpPr>
-        <p:spPr>
-          <a:xfrm>
-            <a:off x="0" y="1828800"/>
-            <a:ext cx="12191695" cy="914400"/>
-          </a:xfrm>
-          <a:prstGeom prst="rect">
-            <a:avLst/>
-          </a:prstGeom>
-          <a:noFill/>
-        </p:spPr>
-        <p:txBody>
-          <a:bodyPr wrap="square">
-            <a:spAutoFit/>
-          </a:bodyPr>
-          <a:lstStyle/>
-          <a:p>
-            <a:pPr algn="ctr">
-              <a:defRPr sz="7200" b="1">
-                <a:solidFill>
-                  <a:srgbClr val="00BFFF"/>
-                </a:solidFill>
-                <a:latin typeface="Microsoft YaHei"/>
-              </a:defRPr>
-            </a:pPr>
-            <a:r>
-              <a:t>✓</a:t>
-            </a:r>
-          </a:p>
-        </p:txBody>
-      </p:sp>
-      <p:sp>
-        <p:nvSpPr>
-          <p:cNvPr id="3" name="TextBox 2"/>
-          <p:cNvSpPr txBox="1"/>
-          <p:nvPr/>
-        </p:nvSpPr>
-        <p:spPr>
-          <a:xfrm>
-            <a:off x="0" y="3017520"/>
-            <a:ext cx="12191695" cy="731520"/>
-          </a:xfrm>
-          <a:prstGeom prst="rect">
-            <a:avLst/>
-          </a:prstGeom>
-          <a:noFill/>
-        </p:spPr>
-        <p:txBody>
-          <a:bodyPr wrap="square">
-            <a:spAutoFit/>
-          </a:bodyPr>
-          <a:lstStyle/>
-          <a:p>
-            <a:pPr algn="ctr">
-              <a:defRPr sz="3200" b="1">
-                <a:solidFill>
-                  <a:srgbClr val="F0F0F5"/>
-                </a:solidFill>
-                <a:latin typeface="Microsoft YaHei"/>
-              </a:defRPr>
-            </a:pPr>
-            <a:r>
-              <a:t>本模块结束</a:t>
-            </a:r>
-          </a:p>
-        </p:txBody>
-      </p:sp>
-      <p:sp>
-        <p:nvSpPr>
-          <p:cNvPr id="4" name="Rectangle 3"/>
+          <p:cNvPr id="2" name="Rectangle 1"/>
           <p:cNvSpPr/>
           <p:nvPr/>
         </p:nvSpPr>
         <p:spPr>
           <a:xfrm>
-            <a:off x="5029200" y="3931920"/>
-            <a:ext cx="2103120" cy="19050"/>
+            <a:off x="4572000" y="1371600"/>
+            <a:ext cx="603505" cy="38100"/>
           </a:xfrm>
           <a:prstGeom prst="rect">
             <a:avLst/>
           </a:prstGeom>
           <a:solidFill>
-            <a:srgbClr val="00BFFF"/>
+            <a:srgbClr val="00C0FF"/>
           </a:solidFill>
           <a:ln>
             <a:noFill/>
@@ -7862,14 +10163,186 @@
       </p:sp>
       <p:sp>
         <p:nvSpPr>
-          <p:cNvPr id="5" name="TextBox 4"/>
+          <p:cNvPr id="3" name="Rectangle 2"/>
+          <p:cNvSpPr/>
+          <p:nvPr/>
+        </p:nvSpPr>
+        <p:spPr>
+          <a:xfrm>
+            <a:off x="5175504" y="1371600"/>
+            <a:ext cx="603504" cy="38100"/>
+          </a:xfrm>
+          <a:prstGeom prst="rect">
+            <a:avLst/>
+          </a:prstGeom>
+          <a:solidFill>
+            <a:srgbClr val="00A3D8"/>
+          </a:solidFill>
+          <a:ln>
+            <a:noFill/>
+          </a:ln>
+        </p:spPr>
+        <p:style>
+          <a:lnRef idx="1">
+            <a:schemeClr val="accent1"/>
+          </a:lnRef>
+          <a:fillRef idx="3">
+            <a:schemeClr val="accent1"/>
+          </a:fillRef>
+          <a:effectRef idx="2">
+            <a:schemeClr val="accent1"/>
+          </a:effectRef>
+          <a:fontRef idx="minor">
+            <a:schemeClr val="lt1"/>
+          </a:fontRef>
+        </p:style>
+        <p:txBody>
+          <a:bodyPr rtlCol="0" anchor="ctr"/>
+          <a:lstStyle/>
+          <a:p>
+            <a:pPr algn="ctr"/>
+          </a:p>
+        </p:txBody>
+      </p:sp>
+      <p:sp>
+        <p:nvSpPr>
+          <p:cNvPr id="4" name="Rectangle 3"/>
+          <p:cNvSpPr/>
+          <p:nvPr/>
+        </p:nvSpPr>
+        <p:spPr>
+          <a:xfrm>
+            <a:off x="5779008" y="1371600"/>
+            <a:ext cx="603504" cy="38100"/>
+          </a:xfrm>
+          <a:prstGeom prst="rect">
+            <a:avLst/>
+          </a:prstGeom>
+          <a:solidFill>
+            <a:srgbClr val="0086B2"/>
+          </a:solidFill>
+          <a:ln>
+            <a:noFill/>
+          </a:ln>
+        </p:spPr>
+        <p:style>
+          <a:lnRef idx="1">
+            <a:schemeClr val="accent1"/>
+          </a:lnRef>
+          <a:fillRef idx="3">
+            <a:schemeClr val="accent1"/>
+          </a:fillRef>
+          <a:effectRef idx="2">
+            <a:schemeClr val="accent1"/>
+          </a:effectRef>
+          <a:fontRef idx="minor">
+            <a:schemeClr val="lt1"/>
+          </a:fontRef>
+        </p:style>
+        <p:txBody>
+          <a:bodyPr rtlCol="0" anchor="ctr"/>
+          <a:lstStyle/>
+          <a:p>
+            <a:pPr algn="ctr"/>
+          </a:p>
+        </p:txBody>
+      </p:sp>
+      <p:sp>
+        <p:nvSpPr>
+          <p:cNvPr id="5" name="Rectangle 4"/>
+          <p:cNvSpPr/>
+          <p:nvPr/>
+        </p:nvSpPr>
+        <p:spPr>
+          <a:xfrm>
+            <a:off x="6382512" y="1371600"/>
+            <a:ext cx="603504" cy="38100"/>
+          </a:xfrm>
+          <a:prstGeom prst="rect">
+            <a:avLst/>
+          </a:prstGeom>
+          <a:solidFill>
+            <a:srgbClr val="00698C"/>
+          </a:solidFill>
+          <a:ln>
+            <a:noFill/>
+          </a:ln>
+        </p:spPr>
+        <p:style>
+          <a:lnRef idx="1">
+            <a:schemeClr val="accent1"/>
+          </a:lnRef>
+          <a:fillRef idx="3">
+            <a:schemeClr val="accent1"/>
+          </a:fillRef>
+          <a:effectRef idx="2">
+            <a:schemeClr val="accent1"/>
+          </a:effectRef>
+          <a:fontRef idx="minor">
+            <a:schemeClr val="lt1"/>
+          </a:fontRef>
+        </p:style>
+        <p:txBody>
+          <a:bodyPr rtlCol="0" anchor="ctr"/>
+          <a:lstStyle/>
+          <a:p>
+            <a:pPr algn="ctr"/>
+          </a:p>
+        </p:txBody>
+      </p:sp>
+      <p:sp>
+        <p:nvSpPr>
+          <p:cNvPr id="6" name="Rectangle 5"/>
+          <p:cNvSpPr/>
+          <p:nvPr/>
+        </p:nvSpPr>
+        <p:spPr>
+          <a:xfrm>
+            <a:off x="6986016" y="1371600"/>
+            <a:ext cx="603504" cy="38100"/>
+          </a:xfrm>
+          <a:prstGeom prst="rect">
+            <a:avLst/>
+          </a:prstGeom>
+          <a:solidFill>
+            <a:srgbClr val="004C66"/>
+          </a:solidFill>
+          <a:ln>
+            <a:noFill/>
+          </a:ln>
+        </p:spPr>
+        <p:style>
+          <a:lnRef idx="1">
+            <a:schemeClr val="accent1"/>
+          </a:lnRef>
+          <a:fillRef idx="3">
+            <a:schemeClr val="accent1"/>
+          </a:fillRef>
+          <a:effectRef idx="2">
+            <a:schemeClr val="accent1"/>
+          </a:effectRef>
+          <a:fontRef idx="minor">
+            <a:schemeClr val="lt1"/>
+          </a:fontRef>
+        </p:style>
+        <p:txBody>
+          <a:bodyPr rtlCol="0" anchor="ctr"/>
+          <a:lstStyle/>
+          <a:p>
+            <a:pPr algn="ctr"/>
+          </a:p>
+        </p:txBody>
+      </p:sp>
+      <p:sp>
+        <p:nvSpPr>
+          <p:cNvPr id="7" name="TextBox 6"/>
           <p:cNvSpPr txBox="1"/>
           <p:nvPr/>
         </p:nvSpPr>
         <p:spPr>
           <a:xfrm>
-            <a:off x="0" y="4206240"/>
-            <a:ext cx="12191695" cy="457200"/>
+            <a:off x="0" y="2011680"/>
+            <a:ext cx="12191695" cy="914400"/>
           </a:xfrm>
           <a:prstGeom prst="rect">
             <a:avLst/>
@@ -7883,29 +10356,29 @@
           <a:lstStyle/>
           <a:p>
             <a:pPr algn="ctr">
-              <a:defRPr sz="1600" b="0">
+              <a:defRPr sz="6400" b="1">
                 <a:solidFill>
-                  <a:srgbClr val="9090A0"/>
+                  <a:srgbClr val="00C0FF"/>
                 </a:solidFill>
                 <a:latin typeface="Microsoft YaHei"/>
               </a:defRPr>
             </a:pPr>
             <a:r>
-              <a:t>下一模块：行业认知与趋势</a:t>
-            </a:r>
-          </a:p>
-        </p:txBody>
-      </p:sp>
-      <p:sp>
-        <p:nvSpPr>
-          <p:cNvPr id="6" name="TextBox 5"/>
+              <a:t>✓</a:t>
+            </a:r>
+          </a:p>
+        </p:txBody>
+      </p:sp>
+      <p:sp>
+        <p:nvSpPr>
+          <p:cNvPr id="8" name="TextBox 7"/>
           <p:cNvSpPr txBox="1"/>
           <p:nvPr/>
         </p:nvSpPr>
         <p:spPr>
           <a:xfrm>
-            <a:off x="0" y="5943600"/>
-            <a:ext cx="12191695" cy="365760"/>
+            <a:off x="0" y="3200400"/>
+            <a:ext cx="12191695" cy="640080"/>
           </a:xfrm>
           <a:prstGeom prst="rect">
             <a:avLst/>
@@ -7919,9 +10392,124 @@
           <a:lstStyle/>
           <a:p>
             <a:pPr algn="ctr">
+              <a:defRPr sz="3000" b="1">
+                <a:solidFill>
+                  <a:srgbClr val="EEEEF4"/>
+                </a:solidFill>
+                <a:latin typeface="Microsoft YaHei"/>
+              </a:defRPr>
+            </a:pPr>
+            <a:r>
+              <a:t>本模块结束</a:t>
+            </a:r>
+          </a:p>
+        </p:txBody>
+      </p:sp>
+      <p:sp>
+        <p:nvSpPr>
+          <p:cNvPr id="9" name="Rectangle 8"/>
+          <p:cNvSpPr/>
+          <p:nvPr/>
+        </p:nvSpPr>
+        <p:spPr>
+          <a:xfrm>
+            <a:off x="5029200" y="4023360"/>
+            <a:ext cx="2103120" cy="25400"/>
+          </a:xfrm>
+          <a:prstGeom prst="rect">
+            <a:avLst/>
+          </a:prstGeom>
+          <a:solidFill>
+            <a:srgbClr val="00C0FF"/>
+          </a:solidFill>
+          <a:ln>
+            <a:noFill/>
+          </a:ln>
+        </p:spPr>
+        <p:style>
+          <a:lnRef idx="1">
+            <a:schemeClr val="accent1"/>
+          </a:lnRef>
+          <a:fillRef idx="3">
+            <a:schemeClr val="accent1"/>
+          </a:fillRef>
+          <a:effectRef idx="2">
+            <a:schemeClr val="accent1"/>
+          </a:effectRef>
+          <a:fontRef idx="minor">
+            <a:schemeClr val="lt1"/>
+          </a:fontRef>
+        </p:style>
+        <p:txBody>
+          <a:bodyPr rtlCol="0" anchor="ctr"/>
+          <a:lstStyle/>
+          <a:p>
+            <a:pPr algn="ctr"/>
+          </a:p>
+        </p:txBody>
+      </p:sp>
+      <p:sp>
+        <p:nvSpPr>
+          <p:cNvPr id="10" name="TextBox 9"/>
+          <p:cNvSpPr txBox="1"/>
+          <p:nvPr/>
+        </p:nvSpPr>
+        <p:spPr>
+          <a:xfrm>
+            <a:off x="0" y="4297680"/>
+            <a:ext cx="12191695" cy="457200"/>
+          </a:xfrm>
+          <a:prstGeom prst="rect">
+            <a:avLst/>
+          </a:prstGeom>
+          <a:noFill/>
+        </p:spPr>
+        <p:txBody>
+          <a:bodyPr wrap="square">
+            <a:spAutoFit/>
+          </a:bodyPr>
+          <a:lstStyle/>
+          <a:p>
+            <a:pPr algn="ctr">
+              <a:defRPr sz="1600" b="0">
+                <a:solidFill>
+                  <a:srgbClr val="989AA8"/>
+                </a:solidFill>
+                <a:latin typeface="Microsoft YaHei"/>
+              </a:defRPr>
+            </a:pPr>
+            <a:r>
+              <a:t>下一模块：行业认知与趋势</a:t>
+            </a:r>
+          </a:p>
+        </p:txBody>
+      </p:sp>
+      <p:sp>
+        <p:nvSpPr>
+          <p:cNvPr id="11" name="TextBox 10"/>
+          <p:cNvSpPr txBox="1"/>
+          <p:nvPr/>
+        </p:nvSpPr>
+        <p:spPr>
+          <a:xfrm>
+            <a:off x="0" y="5943600"/>
+            <a:ext cx="12191695" cy="365760"/>
+          </a:xfrm>
+          <a:prstGeom prst="rect">
+            <a:avLst/>
+          </a:prstGeom>
+          <a:noFill/>
+        </p:spPr>
+        <p:txBody>
+          <a:bodyPr wrap="square">
+            <a:spAutoFit/>
+          </a:bodyPr>
+          <a:lstStyle/>
+          <a:p>
+            <a:pPr algn="ctr">
               <a:defRPr sz="1000" b="0">
                 <a:solidFill>
-                  <a:srgbClr val="505060"/>
+                  <a:srgbClr val="555768"/>
                 </a:solidFill>
                 <a:latin typeface="Microsoft YaHei"/>
               </a:defRPr>

--- a/AI漫剧制作课程/PPT课件/00-课程导论.pptx
+++ b/AI漫剧制作课程/PPT课件/00-课程导论.pptx
@@ -4478,7 +4478,7 @@
               </a:defRPr>
             </a:pPr>
             <a:r>
-              <a:t>🎬</a:t>
+              <a:t>▶</a:t>
             </a:r>
           </a:p>
         </p:txBody>
@@ -7123,7 +7123,7 @@
               </a:defRPr>
             </a:pPr>
             <a:r>
-              <a:t>📋  本节内容</a:t>
+              <a:t>§  本节内容</a:t>
             </a:r>
           </a:p>
         </p:txBody>
@@ -18338,7 +18338,7 @@
               </a:defRPr>
             </a:pPr>
             <a:r>
-              <a:t>🅰️ 零基础速成（8周）</a:t>
+              <a:t>A️ 零基础速成（8周）</a:t>
             </a:r>
           </a:p>
         </p:txBody>
@@ -19344,7 +19344,7 @@
               </a:defRPr>
             </a:pPr>
             <a:r>
-              <a:t>🅱️ 专业进阶（16周）</a:t>
+              <a:t>B️ 专业进阶（16周）</a:t>
             </a:r>
           </a:p>
         </p:txBody>
@@ -26884,7 +26884,7 @@
               </a:defRPr>
             </a:pPr>
             <a:r>
-              <a:t>✓</a:t>
+              <a:t>◆</a:t>
             </a:r>
           </a:p>
         </p:txBody>
